--- a/slides/07 Angry Birds.pptx
+++ b/slides/07 Angry Birds.pptx
@@ -31,6 +31,7 @@
     <p:sldId id="280" r:id="rId30"/>
     <p:sldId id="292" r:id="rId42"/>
     <p:sldId id="293" r:id="rId52"/>
+    <p:sldId id="313" r:id="rId40"/>
     <p:sldId id="294" r:id="rId53"/>
     <p:sldId id="296" r:id="rId55"/>
   </p:sldIdLst>
@@ -829,6 +830,245 @@
 </p:notes>
 </file>
 
+<file path=ppt/notesSlides/notesSlide10.xml><?xml version="1.0" encoding="utf-8"?>
+<p:notes xmlns:a="http://schemas.openxmlformats.org/drawingml/2006/main" xmlns:p="http://schemas.openxmlformats.org/presentationml/2006/main" xmlns:r="http://schemas.openxmlformats.org/officeDocument/2006/relationships">
+  <p:cSld>
+    <p:spTree>
+      <p:nvGrpSpPr>
+        <p:cNvPr id="1" name=""/>
+        <p:cNvGrpSpPr/>
+        <p:nvPr/>
+      </p:nvGrpSpPr>
+      <p:grpSpPr>
+        <a:xfrm>
+          <a:off x="0" y="0"/>
+          <a:ext cx="0" cy="0"/>
+          <a:chOff x="0" y="0"/>
+          <a:chExt cx="0" cy="0"/>
+        </a:xfrm>
+      </p:grpSpPr>
+      <p:sp>
+        <p:nvSpPr>
+          <p:cNvPr id="2" name="Slide Image Placeholder 1"/>
+          <p:cNvSpPr>
+            <a:spLocks noGrp="1"/>
+          </p:cNvSpPr>
+          <p:nvPr>
+            <p:ph type="sldImg" idx="2"/>
+          </p:nvPr>
+        </p:nvSpPr>
+        <p:spPr/>
+      </p:sp>
+      <p:sp>
+        <p:nvSpPr>
+          <p:cNvPr id="3" name="Notes Placeholder 2"/>
+          <p:cNvSpPr>
+            <a:spLocks noGrp="1"/>
+          </p:cNvSpPr>
+          <p:nvPr>
+            <p:ph type="body" idx="1"/>
+          </p:nvPr>
+        </p:nvSpPr>
+        <p:spPr/>
+        <p:txBody>
+          <a:bodyPr/>
+          <a:lstStyle/>
+          <a:p>
+            <a:r>
+              <a:t>Talking points:</a:t>
+            </a:r>
+          </a:p>
+          <a:p>
+            <a:r>
+              <a:t>- A block exists twice: an entity, and a body</a:t>
+            </a:r>
+          </a:p>
+          <a:p>
+            <a:r>
+              <a:t>- The physics world owns the position</a:t>
+            </a:r>
+          </a:p>
+          <a:p>
+            <a:r>
+              <a:t>  - An entity reads its body’s position every time it’s drawn</a:t>
+            </a:r>
+          </a:p>
+          <a:p>
+            <a:r>
+              <a:t>- And the body knows its owner</a:t>
+            </a:r>
+          </a:p>
+          <a:p>
+            <a:r>
+              <a:t>  - So events about bodies lead back to entities</a:t>
+            </a:r>
+          </a:p>
+          <a:p>
+            <a:r>
+              <a:t>- F1: what the physics world sees (awake green, asleep blue)</a:t>
+            </a:r>
+          </a:p>
+          <a:p>
+            <a:r>
+              <a:t>- A fixed time step: Snake’s accumulator, again</a:t>
+            </a:r>
+          </a:p>
+        </p:txBody>
+      </p:sp>
+    </p:spTree>
+  </p:cSld>
+  <p:clrMapOvr>
+    <a:masterClrMapping/>
+  </p:clrMapOvr>
+</p:notes>
+</file>
+
+<file path=ppt/notesSlides/notesSlide11.xml><?xml version="1.0" encoding="utf-8"?>
+<p:notes xmlns:a="http://schemas.openxmlformats.org/drawingml/2006/main" xmlns:p="http://schemas.openxmlformats.org/presentationml/2006/main" xmlns:r="http://schemas.openxmlformats.org/officeDocument/2006/relationships">
+  <p:cSld>
+    <p:spTree>
+      <p:nvGrpSpPr>
+        <p:cNvPr id="1" name=""/>
+        <p:cNvGrpSpPr/>
+        <p:nvPr/>
+      </p:nvGrpSpPr>
+      <p:grpSpPr>
+        <a:xfrm>
+          <a:off x="0" y="0"/>
+          <a:ext cx="0" cy="0"/>
+          <a:chOff x="0" y="0"/>
+          <a:chExt cx="0" cy="0"/>
+        </a:xfrm>
+      </p:grpSpPr>
+      <p:sp>
+        <p:nvSpPr>
+          <p:cNvPr id="2" name="Slide Image Placeholder 1"/>
+          <p:cNvSpPr>
+            <a:spLocks noGrp="1"/>
+          </p:cNvSpPr>
+          <p:nvPr>
+            <p:ph type="sldImg" idx="2"/>
+          </p:nvPr>
+        </p:nvSpPr>
+        <p:spPr/>
+      </p:sp>
+      <p:sp>
+        <p:nvSpPr>
+          <p:cNvPr id="3" name="Notes Placeholder 2"/>
+          <p:cNvSpPr>
+            <a:spLocks noGrp="1"/>
+          </p:cNvSpPr>
+          <p:nvPr>
+            <p:ph type="body" idx="1"/>
+          </p:nvPr>
+        </p:nvSpPr>
+        <p:spPr/>
+        <p:txBody>
+          <a:bodyPr/>
+          <a:lstStyle/>
+          <a:p>
+            <a:r>
+              <a:t>Talking points:</a:t>
+            </a:r>
+          </a:p>
+          <a:p>
+            <a:r>
+              <a:t>- Three levels, a few birds each</a:t>
+            </a:r>
+          </a:p>
+          <a:p>
+            <a:r>
+              <a:t>- Game states: Aim → Fly → Aim or Level End</a:t>
+            </a:r>
+          </a:p>
+          <a:p>
+            <a:r>
+              <a:t>- Fly waits until the world has settled</a:t>
+            </a:r>
+          </a:p>
+          <a:p>
+            <a:r>
+              <a:t>  - The facade answers it in one line: IsSettled</a:t>
+            </a:r>
+          </a:p>
+          <a:p>
+            <a:r>
+              <a:t>- The aiming curve doesn’t use the physics world</a:t>
+            </a:r>
+          </a:p>
+          <a:p>
+            <a:r>
+              <a:t>  - start + velocity × t + gravity × t² / 2</a:t>
+            </a:r>
+          </a:p>
+        </p:txBody>
+      </p:sp>
+    </p:spTree>
+  </p:cSld>
+  <p:clrMapOvr>
+    <a:masterClrMapping/>
+  </p:clrMapOvr>
+</p:notes>
+</file>
+
+<file path=ppt/notesSlides/notesSlide12.xml><?xml version="1.0" encoding="utf-8"?>
+<p:notes xmlns:a="http://schemas.openxmlformats.org/drawingml/2006/main" xmlns:p="http://schemas.openxmlformats.org/presentationml/2006/main" xmlns:r="http://schemas.openxmlformats.org/officeDocument/2006/relationships">
+  <p:cSld>
+    <p:spTree>
+      <p:nvGrpSpPr>
+        <p:cNvPr id="1" name=""/>
+        <p:cNvGrpSpPr/>
+        <p:nvPr/>
+      </p:nvGrpSpPr>
+      <p:grpSpPr>
+        <a:xfrm>
+          <a:off x="0" y="0"/>
+          <a:ext cx="0" cy="0"/>
+          <a:chOff x="0" y="0"/>
+          <a:chExt cx="0" cy="0"/>
+        </a:xfrm>
+      </p:grpSpPr>
+      <p:sp>
+        <p:nvSpPr>
+          <p:cNvPr id="2" name="Slide Image Placeholder 1"/>
+          <p:cNvSpPr>
+            <a:spLocks noGrp="1"/>
+          </p:cNvSpPr>
+          <p:nvPr>
+            <p:ph type="sldImg" idx="2"/>
+          </p:nvPr>
+        </p:nvSpPr>
+        <p:spPr/>
+      </p:sp>
+      <p:sp>
+        <p:nvSpPr>
+          <p:cNvPr id="3" name="Notes Placeholder 2"/>
+          <p:cNvSpPr>
+            <a:spLocks noGrp="1"/>
+          </p:cNvSpPr>
+          <p:nvPr>
+            <p:ph type="body" idx="1"/>
+          </p:nvPr>
+        </p:nvSpPr>
+        <p:spPr/>
+        <p:txBody>
+          <a:bodyPr/>
+          <a:lstStyle/>
+          <a:p>
+            <a:r>
+              <a:t>Ask, let them answer in pairs for a minute, then take a few answers. These are the site’s Check yourself questions.</a:t>
+            </a:r>
+          </a:p>
+        </p:txBody>
+      </p:sp>
+    </p:spTree>
+  </p:cSld>
+  <p:clrMapOvr>
+    <a:masterClrMapping/>
+  </p:clrMapOvr>
+</p:notes>
+</file>
+
 <file path=ppt/notesSlides/notesSlide2.xml><?xml version="1.0" encoding="utf-8"?>
 <p:notes xmlns:a="http://schemas.openxmlformats.org/drawingml/2006/main" xmlns:r="http://schemas.openxmlformats.org/officeDocument/2006/relationships" xmlns:mc="http://schemas.openxmlformats.org/markup-compatibility/2006" xmlns:mv="urn:schemas-microsoft-com:mac:vml" xmlns:p="http://schemas.openxmlformats.org/presentationml/2006/main" xmlns:c="http://schemas.openxmlformats.org/drawingml/2006/chart" xmlns:dgm="http://schemas.openxmlformats.org/drawingml/2006/diagram" xmlns:o="urn:schemas-microsoft-com:office:office" xmlns:v="urn:schemas-microsoft-com:vml" xmlns:pvml="urn:schemas-microsoft-com:office:powerpoint" xmlns:com="http://schemas.openxmlformats.org/drawingml/2006/compatibility" xmlns:p14="http://schemas.microsoft.com/office/powerpoint/2010/main" xmlns:p15="http://schemas.microsoft.com/office/powerpoint/2012/main" xmlns:ahyp="http://schemas.microsoft.com/office/drawing/2018/hyperlinkcolor" showMasterPhAnim="0" showMasterSp="0">
   <p:cSld>
@@ -1300,19 +1540,308 @@
           </a:bodyPr>
           <a:lstStyle/>
           <a:p>
-            <a:pPr indent="0" lvl="0" marL="0" rtl="0" algn="l">
-              <a:spcBef>
-                <a:spcPts val="0"/>
-              </a:spcBef>
-              <a:spcAft>
-                <a:spcPts val="0"/>
-              </a:spcAft>
-              <a:buNone/>
-            </a:pPr>
-            <a:r>
-              <a:t/>
-            </a:r>
-            <a:endParaRPr/>
+            <a:r>
+              <a:t>Talking points:</a:t>
+            </a:r>
+          </a:p>
+          <a:p>
+            <a:r>
+              <a:t>- All Source code for today’s game can be found here:</a:t>
+            </a:r>
+          </a:p>
+          <a:p>
+            <a:r>
+              <a:t>  - github.com/Metamate/gar-games (folder 07-angry-birds)</a:t>
+            </a:r>
+          </a:p>
+          <a:p>
+            <a:r>
+              <a:t>- The game is built up in steps: Birds0 → Birds4</a:t>
+            </a:r>
+          </a:p>
+          <a:p>
+            <a:r>
+              <a:t>  - Each step is a separate project that adds one concept</a:t>
+            </a:r>
+          </a:p>
+          <a:p>
+            <a:r>
+              <a:t>  - Compare neighbouring steps to see exactly what changed</a:t>
+            </a:r>
+          </a:p>
+          <a:p>
+            <a:r>
+              <a:t>- Birds4 is the finished game, and the starting point for the exercises</a:t>
+            </a:r>
+          </a:p>
+        </p:txBody>
+      </p:sp>
+    </p:spTree>
+  </p:cSld>
+  <p:clrMapOvr>
+    <a:masterClrMapping/>
+  </p:clrMapOvr>
+</p:notes>
+</file>
+
+<file path=ppt/notesSlides/notesSlide7.xml><?xml version="1.0" encoding="utf-8"?>
+<p:notes xmlns:a="http://schemas.openxmlformats.org/drawingml/2006/main" xmlns:p="http://schemas.openxmlformats.org/presentationml/2006/main" xmlns:r="http://schemas.openxmlformats.org/officeDocument/2006/relationships">
+  <p:cSld>
+    <p:spTree>
+      <p:nvGrpSpPr>
+        <p:cNvPr id="1" name=""/>
+        <p:cNvGrpSpPr/>
+        <p:nvPr/>
+      </p:nvGrpSpPr>
+      <p:grpSpPr>
+        <a:xfrm>
+          <a:off x="0" y="0"/>
+          <a:ext cx="0" cy="0"/>
+          <a:chOff x="0" y="0"/>
+          <a:chExt cx="0" cy="0"/>
+        </a:xfrm>
+      </p:grpSpPr>
+      <p:sp>
+        <p:nvSpPr>
+          <p:cNvPr id="2" name="Slide Image Placeholder 1"/>
+          <p:cNvSpPr>
+            <a:spLocks noGrp="1"/>
+          </p:cNvSpPr>
+          <p:nvPr>
+            <p:ph type="sldImg" idx="2"/>
+          </p:nvPr>
+        </p:nvSpPr>
+        <p:spPr/>
+      </p:sp>
+      <p:sp>
+        <p:nvSpPr>
+          <p:cNvPr id="3" name="Notes Placeholder 2"/>
+          <p:cNvSpPr>
+            <a:spLocks noGrp="1"/>
+          </p:cNvSpPr>
+          <p:nvPr>
+            <p:ph type="body" idx="1"/>
+          </p:nvPr>
+        </p:nvSpPr>
+        <p:spPr/>
+        <p:txBody>
+          <a:bodyPr/>
+          <a:lstStyle/>
+          <a:p>
+            <a:r>
+              <a:t>Talking points:</a:t>
+            </a:r>
+          </a:p>
+          <a:p>
+            <a:r>
+              <a:t>- Stacks that tip, bounce and break: more than Mario’s physics</a:t>
+            </a:r>
+          </a:p>
+          <a:p>
+            <a:r>
+              <a:t>- Box2D: a 2D physics engine, used in many games</a:t>
+            </a:r>
+          </a:p>
+          <a:p>
+            <a:r>
+              <a:t>  - Box2D.NET: a C# port, added as a NuGet package</a:t>
+            </a:r>
+          </a:p>
+          <a:p>
+            <a:r>
+              <a:t>- A world of bodies</a:t>
+            </a:r>
+          </a:p>
+          <a:p>
+            <a:r>
+              <a:t>  - Each body has shapes: boxes, circles, polygons</a:t>
+            </a:r>
+          </a:p>
+          <a:p>
+            <a:r>
+              <a:t>  - Static bodies never move; dynamic bodies are moved by gravity and collisions</a:t>
+            </a:r>
+          </a:p>
+          <a:p>
+            <a:r>
+              <a:t>- Step the world forward, then read where the bodies are</a:t>
+            </a:r>
+          </a:p>
+        </p:txBody>
+      </p:sp>
+    </p:spTree>
+  </p:cSld>
+  <p:clrMapOvr>
+    <a:masterClrMapping/>
+  </p:clrMapOvr>
+</p:notes>
+</file>
+
+<file path=ppt/notesSlides/notesSlide8.xml><?xml version="1.0" encoding="utf-8"?>
+<p:notes xmlns:a="http://schemas.openxmlformats.org/drawingml/2006/main" xmlns:p="http://schemas.openxmlformats.org/presentationml/2006/main" xmlns:r="http://schemas.openxmlformats.org/officeDocument/2006/relationships">
+  <p:cSld>
+    <p:spTree>
+      <p:nvGrpSpPr>
+        <p:cNvPr id="1" name=""/>
+        <p:cNvGrpSpPr/>
+        <p:nvPr/>
+      </p:nvGrpSpPr>
+      <p:grpSpPr>
+        <a:xfrm>
+          <a:off x="0" y="0"/>
+          <a:ext cx="0" cy="0"/>
+          <a:chOff x="0" y="0"/>
+          <a:chExt cx="0" cy="0"/>
+        </a:xfrm>
+      </p:grpSpPr>
+      <p:sp>
+        <p:nvSpPr>
+          <p:cNvPr id="2" name="Slide Image Placeholder 1"/>
+          <p:cNvSpPr>
+            <a:spLocks noGrp="1"/>
+          </p:cNvSpPr>
+          <p:nvPr>
+            <p:ph type="sldImg" idx="2"/>
+          </p:nvPr>
+        </p:nvSpPr>
+        <p:spPr/>
+      </p:sp>
+      <p:sp>
+        <p:nvSpPr>
+          <p:cNvPr id="3" name="Notes Placeholder 2"/>
+          <p:cNvSpPr>
+            <a:spLocks noGrp="1"/>
+          </p:cNvSpPr>
+          <p:nvPr>
+            <p:ph type="body" idx="1"/>
+          </p:nvPr>
+        </p:nvSpPr>
+        <p:spPr/>
+        <p:txBody>
+          <a:bodyPr/>
+          <a:lstStyle/>
+          <a:p>
+            <a:r>
+              <a:t>Talking points:</a:t>
+            </a:r>
+          </a:p>
+          <a:p>
+            <a:r>
+              <a:t>- Box2D is tuned for objects of 0.1 to 10 metres</a:t>
+            </a:r>
+          </a:p>
+          <a:p>
+            <a:r>
+              <a:t>  - A 50-pixel block would be a 50-metre block</a:t>
+            </a:r>
+          </a:p>
+          <a:p>
+            <a:r>
+              <a:t>  - It would fall as slowly as a building</a:t>
+            </a:r>
+          </a:p>
+          <a:p>
+            <a:r>
+              <a:t>- Simulate in metres, draw in pixels: 50 pixels per metre</a:t>
+            </a:r>
+          </a:p>
+          <a:p>
+            <a:r>
+              <a:t>- Box2D turns counter-clockwise, SpriteBatch clockwise</a:t>
+            </a:r>
+          </a:p>
+          <a:p>
+            <a:r>
+              <a:t>- Forget one conversion: a body in the wrong place, or falling up</a:t>
+            </a:r>
+          </a:p>
+        </p:txBody>
+      </p:sp>
+    </p:spTree>
+  </p:cSld>
+  <p:clrMapOvr>
+    <a:masterClrMapping/>
+  </p:clrMapOvr>
+</p:notes>
+</file>
+
+<file path=ppt/notesSlides/notesSlide9.xml><?xml version="1.0" encoding="utf-8"?>
+<p:notes xmlns:a="http://schemas.openxmlformats.org/drawingml/2006/main" xmlns:p="http://schemas.openxmlformats.org/presentationml/2006/main" xmlns:r="http://schemas.openxmlformats.org/officeDocument/2006/relationships">
+  <p:cSld>
+    <p:spTree>
+      <p:nvGrpSpPr>
+        <p:cNvPr id="1" name=""/>
+        <p:cNvGrpSpPr/>
+        <p:nvPr/>
+      </p:nvGrpSpPr>
+      <p:grpSpPr>
+        <a:xfrm>
+          <a:off x="0" y="0"/>
+          <a:ext cx="0" cy="0"/>
+          <a:chOff x="0" y="0"/>
+          <a:chExt cx="0" cy="0"/>
+        </a:xfrm>
+      </p:grpSpPr>
+      <p:sp>
+        <p:nvSpPr>
+          <p:cNvPr id="2" name="Slide Image Placeholder 1"/>
+          <p:cNvSpPr>
+            <a:spLocks noGrp="1"/>
+          </p:cNvSpPr>
+          <p:nvPr>
+            <p:ph type="sldImg" idx="2"/>
+          </p:nvPr>
+        </p:nvSpPr>
+        <p:spPr/>
+      </p:sp>
+      <p:sp>
+        <p:nvSpPr>
+          <p:cNvPr id="3" name="Notes Placeholder 2"/>
+          <p:cNvSpPr>
+            <a:spLocks noGrp="1"/>
+          </p:cNvSpPr>
+          <p:nvPr>
+            <p:ph type="body" idx="1"/>
+          </p:nvPr>
+        </p:nvSpPr>
+        <p:spPr/>
+        <p:txBody>
+          <a:bodyPr/>
+          <a:lstStyle/>
+          <a:p>
+            <a:r>
+              <a:t>Talking points:</a:t>
+            </a:r>
+          </a:p>
+          <a:p>
+            <a:r>
+              <a:t>- Adapter: converts an interface into the one its users expect</a:t>
+            </a:r>
+          </a:p>
+          <a:p>
+            <a:r>
+              <a:t>  - PhysicsBody wraps a Box2D body: pixels, clockwise, our types</a:t>
+            </a:r>
+          </a:p>
+          <a:p>
+            <a:r>
+              <a:t>- Facade: one simple interface in front of a subsystem</a:t>
+            </a:r>
+          </a:p>
+          <a:p>
+            <a:r>
+              <a:t>  - Box2D has hundreds of functions; the game needs a handful</a:t>
+            </a:r>
+          </a:p>
+          <a:p>
+            <a:r>
+              <a:t>  - PhysicsWorld: create a box or a circle, step, destroy</a:t>
+            </a:r>
+          </a:p>
+          <a:p>
+            <a:r>
+              <a:t>- The rest of the game never sees a Box2D type</a:t>
+            </a:r>
           </a:p>
         </p:txBody>
       </p:sp>
@@ -6708,7 +7237,7 @@
         <p:spPr>
           <a:xfrm>
             <a:off x="311700" y="885950"/>
-            <a:ext cx="8520600" cy="4023300"/>
+            <a:ext cx="8520600" cy="521208"/>
           </a:xfrm>
           <a:prstGeom prst="rect">
             <a:avLst/>
@@ -6732,111 +7261,326 @@
             </a:pPr>
             <a:r>
               <a:rPr lang="en"/>
-              <a:t>A block exists twice: an entity, and a body</a:t>
+              <a:t>A block exists twice. The physics world owns where it is.</a:t>
             </a:r>
             <a:endParaRPr/>
           </a:p>
-          <a:p>
-            <a:pPr indent="-330200" lvl="0" marL="457200" rtl="0" algn="l">
-              <a:spcBef>
-                <a:spcPts val="0"/>
-              </a:spcBef>
-              <a:spcAft>
-                <a:spcPts val="0"/>
-              </a:spcAft>
-              <a:buSzPts val="1600"/>
-              <a:buChar char="●"/>
-            </a:pPr>
-            <a:r>
-              <a:rPr lang="en"/>
-              <a:t>The physics world owns the position</a:t>
-            </a:r>
-            <a:endParaRPr/>
-          </a:p>
-          <a:p>
-            <a:pPr indent="-317500" lvl="1" marL="914400" rtl="0" algn="l">
-              <a:spcBef>
-                <a:spcPts val="0"/>
-              </a:spcBef>
-              <a:spcAft>
-                <a:spcPts val="0"/>
-              </a:spcAft>
-              <a:buSzPts val="1400"/>
-              <a:buChar char="○"/>
-            </a:pPr>
-            <a:r>
-              <a:rPr lang="en"/>
-              <a:t>An entity reads its body’s position every time it’s drawn</a:t>
-            </a:r>
-            <a:endParaRPr/>
-          </a:p>
-          <a:p>
-            <a:pPr indent="-330200" lvl="0" marL="457200" rtl="0" algn="l">
-              <a:spcBef>
-                <a:spcPts val="0"/>
-              </a:spcBef>
-              <a:spcAft>
-                <a:spcPts val="0"/>
-              </a:spcAft>
-              <a:buSzPts val="1600"/>
-              <a:buChar char="●"/>
-            </a:pPr>
-            <a:r>
-              <a:rPr lang="en"/>
-              <a:t>And the body knows its owner</a:t>
-            </a:r>
-            <a:endParaRPr/>
-          </a:p>
-          <a:p>
-            <a:pPr indent="-317500" lvl="1" marL="914400" rtl="0" algn="l">
-              <a:spcBef>
-                <a:spcPts val="0"/>
-              </a:spcBef>
-              <a:spcAft>
-                <a:spcPts val="0"/>
-              </a:spcAft>
-              <a:buSzPts val="1400"/>
-              <a:buChar char="○"/>
-            </a:pPr>
-            <a:r>
-              <a:rPr lang="en"/>
-              <a:t>So events about bodies lead back to entities</a:t>
-            </a:r>
-            <a:endParaRPr/>
-          </a:p>
-          <a:p>
-            <a:pPr indent="-330200" lvl="0" marL="457200" rtl="0" algn="l">
-              <a:spcBef>
-                <a:spcPts val="0"/>
-              </a:spcBef>
-              <a:spcAft>
-                <a:spcPts val="0"/>
-              </a:spcAft>
-              <a:buSzPts val="1600"/>
-              <a:buChar char="●"/>
-            </a:pPr>
-            <a:r>
-              <a:rPr lang="en"/>
-              <a:t>F1: what the physics world sees (awake green, asleep blue)</a:t>
-            </a:r>
-            <a:endParaRPr/>
-          </a:p>
-          <a:p>
-            <a:pPr indent="-330200" lvl="0" marL="457200" rtl="0" algn="l">
-              <a:spcBef>
-                <a:spcPts val="0"/>
-              </a:spcBef>
-              <a:spcAft>
-                <a:spcPts val="0"/>
-              </a:spcAft>
-              <a:buSzPts val="1600"/>
-              <a:buChar char="●"/>
-            </a:pPr>
-            <a:r>
-              <a:rPr lang="en"/>
-              <a:t>A fixed time step: Snake’s accumulator, again</a:t>
-            </a:r>
-            <a:endParaRPr/>
+        </p:txBody>
+      </p:sp>
+      <p:sp>
+        <p:nvSpPr>
+          <p:cNvPr id="295" name="Rounded Rectangle 294"/>
+          <p:cNvSpPr/>
+          <p:nvPr/>
+        </p:nvSpPr>
+        <p:spPr>
+          <a:xfrm>
+            <a:off x="731520" y="1463040"/>
+            <a:ext cx="3108960" cy="1005840"/>
+          </a:xfrm>
+          <a:prstGeom prst="roundRect">
+            <a:avLst>
+              <a:gd name="adj" fmla="val 12000"/>
+            </a:avLst>
+          </a:prstGeom>
+          <a:solidFill>
+            <a:srgbClr val="2E3338"/>
+          </a:solidFill>
+          <a:ln>
+            <a:noFill/>
+          </a:ln>
+          <a:effectLst/>
+        </p:spPr>
+        <p:style>
+          <a:lnRef idx="1">
+            <a:schemeClr val="accent1"/>
+          </a:lnRef>
+          <a:fillRef idx="3">
+            <a:schemeClr val="accent1"/>
+          </a:fillRef>
+          <a:effectRef idx="2">
+            <a:schemeClr val="accent1"/>
+          </a:effectRef>
+          <a:fontRef idx="minor">
+            <a:schemeClr val="lt1"/>
+          </a:fontRef>
+        </p:style>
+        <p:txBody>
+          <a:bodyPr rtlCol="0" anchor="ctr" wrap="square" lIns="73152" rIns="73152"/>
+          <a:lstStyle/>
+          <a:p>
+            <a:pPr algn="ctr"/>
+            <a:r>
+              <a:rPr sz="1600" b="1">
+                <a:solidFill>
+                  <a:srgbClr val="DEE2E6"/>
+                </a:solidFill>
+              </a:rPr>
+              <a:t>Entity</a:t>
+            </a:r>
+          </a:p>
+          <a:p>
+            <a:pPr algn="ctr"/>
+            <a:r>
+              <a:rPr sz="1400" b="0">
+                <a:solidFill>
+                  <a:srgbClr val="9AA3AB"/>
+                </a:solidFill>
+              </a:rPr>
+              <a:t>sprite, health, damage</a:t>
+            </a:r>
+          </a:p>
+        </p:txBody>
+      </p:sp>
+      <p:sp>
+        <p:nvSpPr>
+          <p:cNvPr id="296" name="Rounded Rectangle 295"/>
+          <p:cNvSpPr/>
+          <p:nvPr/>
+        </p:nvSpPr>
+        <p:spPr>
+          <a:xfrm>
+            <a:off x="5303520" y="1463040"/>
+            <a:ext cx="3108960" cy="1005840"/>
+          </a:xfrm>
+          <a:prstGeom prst="roundRect">
+            <a:avLst>
+              <a:gd name="adj" fmla="val 12000"/>
+            </a:avLst>
+          </a:prstGeom>
+          <a:solidFill>
+            <a:srgbClr val="2E3338"/>
+          </a:solidFill>
+          <a:ln w="25400">
+            <a:solidFill>
+              <a:srgbClr val="D45D35"/>
+            </a:solidFill>
+          </a:ln>
+          <a:effectLst/>
+        </p:spPr>
+        <p:style>
+          <a:lnRef idx="1">
+            <a:schemeClr val="accent1"/>
+          </a:lnRef>
+          <a:fillRef idx="3">
+            <a:schemeClr val="accent1"/>
+          </a:fillRef>
+          <a:effectRef idx="2">
+            <a:schemeClr val="accent1"/>
+          </a:effectRef>
+          <a:fontRef idx="minor">
+            <a:schemeClr val="lt1"/>
+          </a:fontRef>
+        </p:style>
+        <p:txBody>
+          <a:bodyPr rtlCol="0" anchor="ctr" wrap="square" lIns="73152" rIns="73152"/>
+          <a:lstStyle/>
+          <a:p>
+            <a:pPr algn="ctr"/>
+            <a:r>
+              <a:rPr sz="1600" b="1">
+                <a:solidFill>
+                  <a:srgbClr val="DEE2E6"/>
+                </a:solidFill>
+              </a:rPr>
+              <a:t>PhysicsBody</a:t>
+            </a:r>
+          </a:p>
+          <a:p>
+            <a:pPr algn="ctr"/>
+            <a:r>
+              <a:rPr sz="1400" b="0">
+                <a:solidFill>
+                  <a:srgbClr val="9AA3AB"/>
+                </a:solidFill>
+              </a:rPr>
+              <a:t>position, rotation, velocity</a:t>
+            </a:r>
+          </a:p>
+        </p:txBody>
+      </p:sp>
+      <p:cxnSp>
+        <p:nvCxnSpPr>
+          <p:cNvPr id="297" name="Connector 296"/>
+          <p:cNvCxnSpPr/>
+          <p:nvPr/>
+        </p:nvCxnSpPr>
+        <p:spPr>
+          <a:xfrm flipH="1">
+            <a:off x="3886200" y="1783080"/>
+            <a:ext cx="1371600" cy="0"/>
+          </a:xfrm>
+          <a:prstGeom prst="line">
+            <a:avLst/>
+          </a:prstGeom>
+          <a:ln w="25400">
+            <a:solidFill>
+              <a:srgbClr val="D45D35"/>
+            </a:solidFill>
+            <a:tailEnd type="triangle"/>
+          </a:ln>
+        </p:spPr>
+        <p:style>
+          <a:lnRef idx="2">
+            <a:schemeClr val="accent1"/>
+          </a:lnRef>
+          <a:fillRef idx="0">
+            <a:schemeClr val="accent1"/>
+          </a:fillRef>
+          <a:effectRef idx="1">
+            <a:schemeClr val="accent1"/>
+          </a:effectRef>
+          <a:fontRef idx="minor">
+            <a:schemeClr val="tx1"/>
+          </a:fontRef>
+        </p:style>
+      </p:cxnSp>
+      <p:sp>
+        <p:nvSpPr>
+          <p:cNvPr id="298" name="TextBox 297"/>
+          <p:cNvSpPr txBox="1"/>
+          <p:nvPr/>
+        </p:nvSpPr>
+        <p:spPr>
+          <a:xfrm>
+            <a:off x="3703320" y="1490472"/>
+            <a:ext cx="1737360" cy="274320"/>
+          </a:xfrm>
+          <a:prstGeom prst="rect">
+            <a:avLst/>
+          </a:prstGeom>
+          <a:noFill/>
+        </p:spPr>
+        <p:txBody>
+          <a:bodyPr wrap="square">
+            <a:spAutoFit/>
+          </a:bodyPr>
+          <a:lstStyle/>
+          <a:p>
+            <a:pPr algn="ctr"/>
+            <a:r>
+              <a:rPr sz="1100" b="0" i="0">
+                <a:solidFill>
+                  <a:srgbClr val="9AA3AB"/>
+                </a:solidFill>
+              </a:rPr>
+              <a:t>position, every draw</a:t>
+            </a:r>
+          </a:p>
+        </p:txBody>
+      </p:sp>
+      <p:cxnSp>
+        <p:nvCxnSpPr>
+          <p:cNvPr id="299" name="Connector 298"/>
+          <p:cNvCxnSpPr/>
+          <p:nvPr/>
+        </p:nvCxnSpPr>
+        <p:spPr>
+          <a:xfrm>
+            <a:off x="3886200" y="2194560"/>
+            <a:ext cx="1371600" cy="0"/>
+          </a:xfrm>
+          <a:prstGeom prst="line">
+            <a:avLst/>
+          </a:prstGeom>
+          <a:ln w="25400">
+            <a:solidFill>
+              <a:srgbClr val="9AA3AB"/>
+            </a:solidFill>
+            <a:tailEnd type="triangle"/>
+          </a:ln>
+        </p:spPr>
+        <p:style>
+          <a:lnRef idx="2">
+            <a:schemeClr val="accent1"/>
+          </a:lnRef>
+          <a:fillRef idx="0">
+            <a:schemeClr val="accent1"/>
+          </a:fillRef>
+          <a:effectRef idx="1">
+            <a:schemeClr val="accent1"/>
+          </a:effectRef>
+          <a:fontRef idx="minor">
+            <a:schemeClr val="tx1"/>
+          </a:fontRef>
+        </p:style>
+      </p:cxnSp>
+      <p:sp>
+        <p:nvSpPr>
+          <p:cNvPr id="300" name="TextBox 299"/>
+          <p:cNvSpPr txBox="1"/>
+          <p:nvPr/>
+        </p:nvSpPr>
+        <p:spPr>
+          <a:xfrm>
+            <a:off x="3886200" y="2240280"/>
+            <a:ext cx="1371600" cy="274320"/>
+          </a:xfrm>
+          <a:prstGeom prst="rect">
+            <a:avLst/>
+          </a:prstGeom>
+          <a:noFill/>
+        </p:spPr>
+        <p:txBody>
+          <a:bodyPr wrap="square">
+            <a:spAutoFit/>
+          </a:bodyPr>
+          <a:lstStyle/>
+          <a:p>
+            <a:pPr algn="ctr"/>
+            <a:r>
+              <a:rPr sz="1100" b="0" i="0">
+                <a:solidFill>
+                  <a:srgbClr val="9AA3AB"/>
+                </a:solidFill>
+              </a:rPr>
+              <a:t>Owner</a:t>
+            </a:r>
+          </a:p>
+        </p:txBody>
+      </p:sp>
+      <p:sp>
+        <p:nvSpPr>
+          <p:cNvPr id="301" name="TextBox 300"/>
+          <p:cNvSpPr txBox="1"/>
+          <p:nvPr/>
+        </p:nvSpPr>
+        <p:spPr>
+          <a:xfrm>
+            <a:off x="731520" y="2743200"/>
+            <a:ext cx="7680960" cy="822960"/>
+          </a:xfrm>
+          <a:prstGeom prst="rect">
+            <a:avLst/>
+          </a:prstGeom>
+          <a:noFill/>
+        </p:spPr>
+        <p:txBody>
+          <a:bodyPr wrap="square">
+            <a:spAutoFit/>
+          </a:bodyPr>
+          <a:lstStyle/>
+          <a:p>
+            <a:pPr algn="ctr"/>
+            <a:r>
+              <a:rPr sz="1400" b="0" i="0">
+                <a:solidFill>
+                  <a:srgbClr val="9AA3AB"/>
+                </a:solidFill>
+              </a:rPr>
+              <a:t>The body knows its owner, so a hit between two bodies leads back to two entities.</a:t>
+            </a:r>
+          </a:p>
+          <a:p>
+            <a:pPr algn="ctr"/>
+            <a:r>
+              <a:rPr sz="1400" b="0" i="0">
+                <a:solidFill>
+                  <a:srgbClr val="9AA3AB"/>
+                </a:solidFill>
+              </a:rPr>
+              <a:t>F1 shows what the physics world sees. A fixed time step: Snake’s accumulator again.</a:t>
+            </a:r>
           </a:p>
         </p:txBody>
       </p:sp>
@@ -10415,7 +11159,7 @@
         <p:spPr>
           <a:xfrm>
             <a:off x="311700" y="885950"/>
-            <a:ext cx="8520600" cy="4023300"/>
+            <a:ext cx="8520600" cy="521208"/>
           </a:xfrm>
           <a:prstGeom prst="rect">
             <a:avLst/>
@@ -10439,94 +11183,318 @@
             </a:pPr>
             <a:r>
               <a:rPr lang="en"/>
-              <a:t>Three levels, a few birds each</a:t>
+              <a:t>Three levels, a few birds each. Fly waits until the world has settled.</a:t>
             </a:r>
             <a:endParaRPr/>
           </a:p>
-          <a:p>
-            <a:pPr indent="-330200" lvl="0" marL="457200" rtl="0" algn="l">
-              <a:spcBef>
-                <a:spcPts val="0"/>
-              </a:spcBef>
-              <a:spcAft>
-                <a:spcPts val="0"/>
-              </a:spcAft>
-              <a:buSzPts val="1600"/>
-              <a:buChar char="●"/>
-            </a:pPr>
-            <a:r>
-              <a:rPr lang="en"/>
-              <a:t>Game states: Aim → Fly → Aim or Level End</a:t>
-            </a:r>
-            <a:endParaRPr/>
-          </a:p>
-          <a:p>
-            <a:pPr indent="-330200" lvl="0" marL="457200" rtl="0" algn="l">
-              <a:spcBef>
-                <a:spcPts val="0"/>
-              </a:spcBef>
-              <a:spcAft>
-                <a:spcPts val="0"/>
-              </a:spcAft>
-              <a:buSzPts val="1600"/>
-              <a:buChar char="●"/>
-            </a:pPr>
-            <a:r>
-              <a:rPr lang="en"/>
-              <a:t>Fly waits until the world has settled</a:t>
-            </a:r>
-            <a:endParaRPr/>
-          </a:p>
-          <a:p>
-            <a:pPr indent="-317500" lvl="1" marL="914400" rtl="0" algn="l">
-              <a:spcBef>
-                <a:spcPts val="0"/>
-              </a:spcBef>
-              <a:spcAft>
-                <a:spcPts val="0"/>
-              </a:spcAft>
-              <a:buSzPts val="1400"/>
-              <a:buChar char="○"/>
-            </a:pPr>
-            <a:r>
-              <a:rPr lang="en"/>
-              <a:t>The facade answers it in one line: IsSettled</a:t>
-            </a:r>
-            <a:endParaRPr/>
-          </a:p>
-          <a:p>
-            <a:pPr indent="-330200" lvl="0" marL="457200" rtl="0" algn="l">
-              <a:spcBef>
-                <a:spcPts val="0"/>
-              </a:spcBef>
-              <a:spcAft>
-                <a:spcPts val="0"/>
-              </a:spcAft>
-              <a:buSzPts val="1600"/>
-              <a:buChar char="●"/>
-            </a:pPr>
-            <a:r>
-              <a:rPr lang="en"/>
-              <a:t>The aiming curve doesn’t use the physics world</a:t>
-            </a:r>
-            <a:endParaRPr/>
-          </a:p>
-          <a:p>
-            <a:pPr indent="-317500" lvl="1" marL="914400" rtl="0" algn="l">
-              <a:spcBef>
-                <a:spcPts val="0"/>
-              </a:spcBef>
-              <a:spcAft>
-                <a:spcPts val="0"/>
-              </a:spcAft>
-              <a:buSzPts val="1400"/>
-              <a:buChar char="○"/>
-            </a:pPr>
-            <a:r>
-              <a:rPr lang="en"/>
-              <a:t>start + velocity × t + gravity × t² / 2</a:t>
-            </a:r>
-            <a:endParaRPr/>
+        </p:txBody>
+      </p:sp>
+      <p:sp>
+        <p:nvSpPr>
+          <p:cNvPr id="295" name="Rounded Rectangle 294"/>
+          <p:cNvSpPr/>
+          <p:nvPr/>
+        </p:nvSpPr>
+        <p:spPr>
+          <a:xfrm>
+            <a:off x="1463040" y="1463040"/>
+            <a:ext cx="1828800" cy="548640"/>
+          </a:xfrm>
+          <a:prstGeom prst="roundRect">
+            <a:avLst>
+              <a:gd name="adj" fmla="val 12000"/>
+            </a:avLst>
+          </a:prstGeom>
+          <a:solidFill>
+            <a:srgbClr val="2E3338"/>
+          </a:solidFill>
+          <a:ln w="25400">
+            <a:solidFill>
+              <a:srgbClr val="D45D35"/>
+            </a:solidFill>
+          </a:ln>
+          <a:effectLst/>
+        </p:spPr>
+        <p:style>
+          <a:lnRef idx="1">
+            <a:schemeClr val="accent1"/>
+          </a:lnRef>
+          <a:fillRef idx="3">
+            <a:schemeClr val="accent1"/>
+          </a:fillRef>
+          <a:effectRef idx="2">
+            <a:schemeClr val="accent1"/>
+          </a:effectRef>
+          <a:fontRef idx="minor">
+            <a:schemeClr val="lt1"/>
+          </a:fontRef>
+        </p:style>
+        <p:txBody>
+          <a:bodyPr rtlCol="0" anchor="ctr" wrap="square" lIns="73152" rIns="73152"/>
+          <a:lstStyle/>
+          <a:p>
+            <a:pPr algn="ctr"/>
+            <a:r>
+              <a:rPr sz="1500" b="1">
+                <a:solidFill>
+                  <a:srgbClr val="DEE2E6"/>
+                </a:solidFill>
+              </a:rPr>
+              <a:t>Aim</a:t>
+            </a:r>
+          </a:p>
+        </p:txBody>
+      </p:sp>
+      <p:cxnSp>
+        <p:nvCxnSpPr>
+          <p:cNvPr id="296" name="Connector 295"/>
+          <p:cNvCxnSpPr/>
+          <p:nvPr/>
+        </p:nvCxnSpPr>
+        <p:spPr>
+          <a:xfrm>
+            <a:off x="3310128" y="1737360"/>
+            <a:ext cx="237744" cy="0"/>
+          </a:xfrm>
+          <a:prstGeom prst="line">
+            <a:avLst/>
+          </a:prstGeom>
+          <a:ln w="25400">
+            <a:solidFill>
+              <a:srgbClr val="9AA3AB"/>
+            </a:solidFill>
+            <a:tailEnd type="triangle"/>
+          </a:ln>
+        </p:spPr>
+        <p:style>
+          <a:lnRef idx="2">
+            <a:schemeClr val="accent1"/>
+          </a:lnRef>
+          <a:fillRef idx="0">
+            <a:schemeClr val="accent1"/>
+          </a:fillRef>
+          <a:effectRef idx="1">
+            <a:schemeClr val="accent1"/>
+          </a:effectRef>
+          <a:fontRef idx="minor">
+            <a:schemeClr val="tx1"/>
+          </a:fontRef>
+        </p:style>
+      </p:cxnSp>
+      <p:sp>
+        <p:nvSpPr>
+          <p:cNvPr id="297" name="Rounded Rectangle 296"/>
+          <p:cNvSpPr/>
+          <p:nvPr/>
+        </p:nvSpPr>
+        <p:spPr>
+          <a:xfrm>
+            <a:off x="3566160" y="1463040"/>
+            <a:ext cx="1828800" cy="548640"/>
+          </a:xfrm>
+          <a:prstGeom prst="roundRect">
+            <a:avLst>
+              <a:gd name="adj" fmla="val 12000"/>
+            </a:avLst>
+          </a:prstGeom>
+          <a:solidFill>
+            <a:srgbClr val="2E3338"/>
+          </a:solidFill>
+          <a:ln>
+            <a:noFill/>
+          </a:ln>
+          <a:effectLst/>
+        </p:spPr>
+        <p:style>
+          <a:lnRef idx="1">
+            <a:schemeClr val="accent1"/>
+          </a:lnRef>
+          <a:fillRef idx="3">
+            <a:schemeClr val="accent1"/>
+          </a:fillRef>
+          <a:effectRef idx="2">
+            <a:schemeClr val="accent1"/>
+          </a:effectRef>
+          <a:fontRef idx="minor">
+            <a:schemeClr val="lt1"/>
+          </a:fontRef>
+        </p:style>
+        <p:txBody>
+          <a:bodyPr rtlCol="0" anchor="ctr" wrap="square" lIns="73152" rIns="73152"/>
+          <a:lstStyle/>
+          <a:p>
+            <a:pPr algn="ctr"/>
+            <a:r>
+              <a:rPr sz="1500" b="1">
+                <a:solidFill>
+                  <a:srgbClr val="DEE2E6"/>
+                </a:solidFill>
+              </a:rPr>
+              <a:t>Fly</a:t>
+            </a:r>
+          </a:p>
+        </p:txBody>
+      </p:sp>
+      <p:cxnSp>
+        <p:nvCxnSpPr>
+          <p:cNvPr id="298" name="Connector 297"/>
+          <p:cNvCxnSpPr/>
+          <p:nvPr/>
+        </p:nvCxnSpPr>
+        <p:spPr>
+          <a:xfrm>
+            <a:off x="5413248" y="1737360"/>
+            <a:ext cx="237744" cy="0"/>
+          </a:xfrm>
+          <a:prstGeom prst="line">
+            <a:avLst/>
+          </a:prstGeom>
+          <a:ln w="25400">
+            <a:solidFill>
+              <a:srgbClr val="9AA3AB"/>
+            </a:solidFill>
+            <a:tailEnd type="triangle"/>
+          </a:ln>
+        </p:spPr>
+        <p:style>
+          <a:lnRef idx="2">
+            <a:schemeClr val="accent1"/>
+          </a:lnRef>
+          <a:fillRef idx="0">
+            <a:schemeClr val="accent1"/>
+          </a:fillRef>
+          <a:effectRef idx="1">
+            <a:schemeClr val="accent1"/>
+          </a:effectRef>
+          <a:fontRef idx="minor">
+            <a:schemeClr val="tx1"/>
+          </a:fontRef>
+        </p:style>
+      </p:cxnSp>
+      <p:sp>
+        <p:nvSpPr>
+          <p:cNvPr id="299" name="Rounded Rectangle 298"/>
+          <p:cNvSpPr/>
+          <p:nvPr/>
+        </p:nvSpPr>
+        <p:spPr>
+          <a:xfrm>
+            <a:off x="5669279" y="1463040"/>
+            <a:ext cx="1828800" cy="548640"/>
+          </a:xfrm>
+          <a:prstGeom prst="roundRect">
+            <a:avLst>
+              <a:gd name="adj" fmla="val 12000"/>
+            </a:avLst>
+          </a:prstGeom>
+          <a:solidFill>
+            <a:srgbClr val="2E3338"/>
+          </a:solidFill>
+          <a:ln>
+            <a:noFill/>
+          </a:ln>
+          <a:effectLst/>
+        </p:spPr>
+        <p:style>
+          <a:lnRef idx="1">
+            <a:schemeClr val="accent1"/>
+          </a:lnRef>
+          <a:fillRef idx="3">
+            <a:schemeClr val="accent1"/>
+          </a:fillRef>
+          <a:effectRef idx="2">
+            <a:schemeClr val="accent1"/>
+          </a:effectRef>
+          <a:fontRef idx="minor">
+            <a:schemeClr val="lt1"/>
+          </a:fontRef>
+        </p:style>
+        <p:txBody>
+          <a:bodyPr rtlCol="0" anchor="ctr" wrap="square" lIns="73152" rIns="73152"/>
+          <a:lstStyle/>
+          <a:p>
+            <a:pPr algn="ctr"/>
+            <a:r>
+              <a:rPr sz="1500" b="1">
+                <a:solidFill>
+                  <a:srgbClr val="DEE2E6"/>
+                </a:solidFill>
+              </a:rPr>
+              <a:t>Aim again, or Level End</a:t>
+            </a:r>
+          </a:p>
+        </p:txBody>
+      </p:sp>
+      <p:sp>
+        <p:nvSpPr>
+          <p:cNvPr id="300" name="Rectangle 299"/>
+          <p:cNvSpPr/>
+          <p:nvPr/>
+        </p:nvSpPr>
+        <p:spPr>
+          <a:xfrm>
+            <a:off x="914400" y="2468880"/>
+            <a:ext cx="7315200" cy="685800"/>
+          </a:xfrm>
+          <a:prstGeom prst="rect">
+            <a:avLst/>
+          </a:prstGeom>
+          <a:solidFill>
+            <a:srgbClr val="17191C"/>
+          </a:solidFill>
+          <a:ln>
+            <a:noFill/>
+          </a:ln>
+          <a:effectLst/>
+        </p:spPr>
+        <p:style>
+          <a:lnRef idx="1">
+            <a:schemeClr val="accent1"/>
+          </a:lnRef>
+          <a:fillRef idx="3">
+            <a:schemeClr val="accent1"/>
+          </a:fillRef>
+          <a:effectRef idx="2">
+            <a:schemeClr val="accent1"/>
+          </a:effectRef>
+          <a:fontRef idx="minor">
+            <a:schemeClr val="lt1"/>
+          </a:fontRef>
+        </p:style>
+        <p:txBody>
+          <a:bodyPr rtlCol="0" anchor="ctr" wrap="square" lIns="164592" rIns="73152"/>
+          <a:lstStyle/>
+          <a:p>
+            <a:pPr algn="l"/>
+            <a:r>
+              <a:rPr sz="1400" b="0">
+                <a:solidFill>
+                  <a:srgbClr val="DEE2E6"/>
+                </a:solidFill>
+              </a:rPr>
+              <a:t/>
+            </a:r>
+            <a:r>
+              <a:rPr sz="1300">
+                <a:solidFill>
+                  <a:srgbClr val="9AA3AB"/>
+                </a:solidFill>
+                <a:latin typeface="Consolas"/>
+              </a:rPr>
+              <a:t>// the aiming curve: no physics world needed</a:t>
+            </a:r>
+          </a:p>
+          <a:p>
+            <a:pPr algn="l"/>
+            <a:r>
+              <a:rPr sz="1300">
+                <a:solidFill>
+                  <a:srgbClr val="DEE2E6"/>
+                </a:solidFill>
+                <a:latin typeface="Consolas"/>
+              </a:rPr>
+              <a:t>position = start + velocity * t + gravity * t * t / 2</a:t>
+            </a:r>
           </a:p>
         </p:txBody>
       </p:sp>
@@ -13342,6 +14310,179 @@
 </p:sld>
 </file>
 
+<file path=ppt/slides/slide26.xml><?xml version="1.0" encoding="utf-8"?>
+<p:sld xmlns:a="http://schemas.openxmlformats.org/drawingml/2006/main" xmlns:p="http://schemas.openxmlformats.org/presentationml/2006/main" xmlns:r="http://schemas.openxmlformats.org/officeDocument/2006/relationships">
+  <p:cSld>
+    <p:spTree>
+      <p:nvGrpSpPr>
+        <p:cNvPr id="1" name=""/>
+        <p:cNvGrpSpPr/>
+        <p:nvPr/>
+      </p:nvGrpSpPr>
+      <p:grpSpPr/>
+      <p:sp>
+        <p:nvSpPr>
+          <p:cNvPr id="2" name="Title 1"/>
+          <p:cNvSpPr>
+            <a:spLocks noGrp="1"/>
+          </p:cNvSpPr>
+          <p:nvPr>
+            <p:ph type="title"/>
+          </p:nvPr>
+        </p:nvSpPr>
+        <p:spPr/>
+        <p:txBody>
+          <a:bodyPr/>
+          <a:lstStyle/>
+          <a:p>
+            <a:pPr indent="0" lvl="0" marL="0" rtl="0" algn="l">
+              <a:spcBef>
+                <a:spcPts val="0"/>
+              </a:spcBef>
+              <a:spcAft>
+                <a:spcPts val="0"/>
+              </a:spcAft>
+              <a:buNone/>
+            </a:pPr>
+            <a:r>
+              <a:rPr lang="en"/>
+              <a:t>Check Yourself</a:t>
+            </a:r>
+            <a:endParaRPr/>
+          </a:p>
+        </p:txBody>
+      </p:sp>
+      <p:sp>
+        <p:nvSpPr>
+          <p:cNvPr id="3" name="Text Placeholder 2"/>
+          <p:cNvSpPr>
+            <a:spLocks noGrp="1"/>
+          </p:cNvSpPr>
+          <p:nvPr>
+            <p:ph type="body" idx="1"/>
+          </p:nvPr>
+        </p:nvSpPr>
+        <p:spPr>
+          <a:xfrm>
+            <a:off x="311700" y="885950"/>
+            <a:ext cx="8520600" cy="1719072"/>
+          </a:xfrm>
+        </p:spPr>
+        <p:txBody>
+          <a:bodyPr/>
+          <a:lstStyle/>
+          <a:p>
+            <a:pPr indent="-330200" lvl="0" marL="457200" rtl="0" algn="l">
+              <a:spcBef>
+                <a:spcPts val="0"/>
+              </a:spcBef>
+              <a:spcAft>
+                <a:spcPts val="0"/>
+              </a:spcAft>
+              <a:buSzPts val="1600"/>
+              <a:buChar char="●"/>
+            </a:pPr>
+            <a:r>
+              <a:rPr lang="en"/>
+              <a:t>What is the difference between an Adapter and a Facade?</a:t>
+            </a:r>
+            <a:endParaRPr/>
+          </a:p>
+          <a:p>
+            <a:pPr indent="-330200" lvl="0" marL="457200" rtl="0" algn="l">
+              <a:spcBef>
+                <a:spcPts val="0"/>
+              </a:spcBef>
+              <a:spcAft>
+                <a:spcPts val="0"/>
+              </a:spcAft>
+              <a:buSzPts val="1600"/>
+              <a:buChar char="●"/>
+            </a:pPr>
+            <a:r>
+              <a:rPr lang="en"/>
+              <a:t>Why convert between metres and pixels at all?</a:t>
+            </a:r>
+            <a:endParaRPr/>
+          </a:p>
+          <a:p>
+            <a:pPr indent="-330200" lvl="0" marL="457200" rtl="0" algn="l">
+              <a:spcBef>
+                <a:spcPts val="0"/>
+              </a:spcBef>
+              <a:spcAft>
+                <a:spcPts val="0"/>
+              </a:spcAft>
+              <a:buSzPts val="1600"/>
+              <a:buChar char="●"/>
+            </a:pPr>
+            <a:r>
+              <a:rPr lang="en"/>
+              <a:t>Why not destroy a body inside the hit handler?</a:t>
+            </a:r>
+            <a:endParaRPr/>
+          </a:p>
+          <a:p>
+            <a:pPr indent="-330200" lvl="0" marL="457200" rtl="0" algn="l">
+              <a:spcBef>
+                <a:spcPts val="0"/>
+              </a:spcBef>
+              <a:spcAft>
+                <a:spcPts val="0"/>
+              </a:spcAft>
+              <a:buSzPts val="1600"/>
+              <a:buChar char="●"/>
+            </a:pPr>
+            <a:r>
+              <a:rPr lang="en"/>
+              <a:t>What does a shallow copy share with the original, and why does it matter?</a:t>
+            </a:r>
+            <a:endParaRPr/>
+          </a:p>
+        </p:txBody>
+      </p:sp>
+      <p:sp>
+        <p:nvSpPr>
+          <p:cNvPr id="4" name="TextBox 3"/>
+          <p:cNvSpPr txBox="1"/>
+          <p:nvPr/>
+        </p:nvSpPr>
+        <p:spPr>
+          <a:xfrm>
+            <a:off x="457200" y="3182112"/>
+            <a:ext cx="8229600" cy="457200"/>
+          </a:xfrm>
+          <a:prstGeom prst="rect">
+            <a:avLst/>
+          </a:prstGeom>
+          <a:noFill/>
+        </p:spPr>
+        <p:txBody>
+          <a:bodyPr wrap="square">
+            <a:spAutoFit/>
+          </a:bodyPr>
+          <a:lstStyle/>
+          <a:p>
+            <a:pPr algn="ctr"/>
+            <a:r>
+              <a:rPr sz="1400" b="0" i="0">
+                <a:solidFill>
+                  <a:srgbClr val="9AA3AB"/>
+                </a:solidFill>
+              </a:rPr>
+              <a:t>The answers, and more questions, are on the course site.</a:t>
+            </a:r>
+          </a:p>
+        </p:txBody>
+      </p:sp>
+    </p:spTree>
+  </p:cSld>
+  <p:clrMapOvr>
+    <a:masterClrMapping/>
+  </p:clrMapOvr>
+</p:sld>
+</file>
+
 <file path=ppt/slides/slide3.xml><?xml version="1.0" encoding="utf-8"?>
 <p:sld xmlns:a="http://schemas.openxmlformats.org/drawingml/2006/main" xmlns:r="http://schemas.openxmlformats.org/officeDocument/2006/relationships" xmlns:mc="http://schemas.openxmlformats.org/markup-compatibility/2006" xmlns:mv="urn:schemas-microsoft-com:mac:vml" xmlns:p="http://schemas.openxmlformats.org/presentationml/2006/main" xmlns:c="http://schemas.openxmlformats.org/drawingml/2006/chart" xmlns:dgm="http://schemas.openxmlformats.org/drawingml/2006/diagram" xmlns:o="urn:schemas-microsoft-com:office:office" xmlns:v="urn:schemas-microsoft-com:vml" xmlns:pvml="urn:schemas-microsoft-com:office:powerpoint" xmlns:com="http://schemas.openxmlformats.org/drawingml/2006/compatibility" xmlns:p14="http://schemas.microsoft.com/office/powerpoint/2010/main" xmlns:p15="http://schemas.microsoft.com/office/powerpoint/2012/main" xmlns:ahyp="http://schemas.microsoft.com/office/drawing/2018/hyperlinkcolor">
   <p:cSld>
@@ -13876,7 +15017,7 @@
         <p:spPr>
           <a:xfrm>
             <a:off x="311700" y="885950"/>
-            <a:ext cx="8520600" cy="4023300"/>
+            <a:ext cx="8520600" cy="1289304"/>
           </a:xfrm>
           <a:prstGeom prst="rect">
             <a:avLst/>
@@ -13900,29 +15041,7 @@
             </a:pPr>
             <a:r>
               <a:rPr lang="en"/>
-              <a:t>All Source code for today’s game can be found here:</a:t>
-            </a:r>
-            <a:endParaRPr/>
-          </a:p>
-          <a:p>
-            <a:pPr indent="-317500" lvl="1" marL="914400" rtl="0" algn="l">
-              <a:spcBef>
-                <a:spcPts val="0"/>
-              </a:spcBef>
-              <a:spcAft>
-                <a:spcPts val="0"/>
-              </a:spcAft>
-              <a:buSzPts val="1400"/>
-              <a:buChar char="○"/>
-            </a:pPr>
-            <a:r>
-              <a:rPr lang="en" u="sng">
-                <a:solidFill>
-                  <a:schemeClr val="hlink"/>
-                </a:solidFill>
-                <a:hlinkClick r:id="rId3"/>
-              </a:rPr>
-              <a:t>github.com/Metamate/gar-games (folder 07-angry-birds)</a:t>
+              <a:t>github.com/Metamate/gar-games, folder 07-angry-birds</a:t>
             </a:r>
             <a:endParaRPr/>
           </a:p>
@@ -13939,41 +15058,7 @@
             </a:pPr>
             <a:r>
               <a:rPr lang="en"/>
-              <a:t>The game is built up in steps: Birds0 → Birds4</a:t>
-            </a:r>
-            <a:endParaRPr/>
-          </a:p>
-          <a:p>
-            <a:pPr indent="-317500" lvl="1" marL="914400" rtl="0" algn="l">
-              <a:spcBef>
-                <a:spcPts val="0"/>
-              </a:spcBef>
-              <a:spcAft>
-                <a:spcPts val="0"/>
-              </a:spcAft>
-              <a:buSzPts val="1400"/>
-              <a:buChar char="○"/>
-            </a:pPr>
-            <a:r>
-              <a:rPr lang="en"/>
-              <a:t>Each step is a separate project that adds one concept</a:t>
-            </a:r>
-            <a:endParaRPr/>
-          </a:p>
-          <a:p>
-            <a:pPr indent="-317500" lvl="1" marL="914400" rtl="0" algn="l">
-              <a:spcBef>
-                <a:spcPts val="0"/>
-              </a:spcBef>
-              <a:spcAft>
-                <a:spcPts val="0"/>
-              </a:spcAft>
-              <a:buSzPts val="1400"/>
-              <a:buChar char="○"/>
-            </a:pPr>
-            <a:r>
-              <a:rPr lang="en"/>
-              <a:t>Compare neighbouring steps to see exactly what changed</a:t>
+              <a:t>Its README: the steps (Birds0 to Birds4), a map of the code, how to run it</a:t>
             </a:r>
             <a:endParaRPr/>
           </a:p>
@@ -13990,7 +15075,7 @@
             </a:pPr>
             <a:r>
               <a:rPr lang="en"/>
-              <a:t>Birds4 is the finished game, and the starting point for the exercises</a:t>
+              <a:t>The course site: today’s concepts in full, the exercises, and questions to check yourself</a:t>
             </a:r>
             <a:endParaRPr/>
           </a:p>
@@ -14073,7 +15158,7 @@
         <p:spPr>
           <a:xfrm>
             <a:off x="311700" y="885950"/>
-            <a:ext cx="8520600" cy="4023300"/>
+            <a:ext cx="8520600" cy="521208"/>
           </a:xfrm>
           <a:prstGeom prst="rect">
             <a:avLst/>
@@ -14097,111 +15182,397 @@
             </a:pPr>
             <a:r>
               <a:rPr lang="en"/>
-              <a:t>Stacks that tip, bounce and break: more than Mario’s physics</a:t>
+              <a:t>Stacks that tip, bounce and break: we use Box2D, not our own physics.</a:t>
             </a:r>
             <a:endParaRPr/>
           </a:p>
-          <a:p>
-            <a:pPr indent="-330200" lvl="0" marL="457200" rtl="0" algn="l">
-              <a:spcBef>
-                <a:spcPts val="0"/>
-              </a:spcBef>
-              <a:spcAft>
-                <a:spcPts val="0"/>
-              </a:spcAft>
-              <a:buSzPts val="1600"/>
-              <a:buChar char="●"/>
-            </a:pPr>
-            <a:r>
-              <a:rPr lang="en"/>
-              <a:t>Box2D: a 2D physics engine, used in many games</a:t>
-            </a:r>
-            <a:endParaRPr/>
-          </a:p>
-          <a:p>
-            <a:pPr indent="-317500" lvl="1" marL="914400" rtl="0" algn="l">
-              <a:spcBef>
-                <a:spcPts val="0"/>
-              </a:spcBef>
-              <a:spcAft>
-                <a:spcPts val="0"/>
-              </a:spcAft>
-              <a:buSzPts val="1400"/>
-              <a:buChar char="○"/>
-            </a:pPr>
-            <a:r>
-              <a:rPr lang="en"/>
-              <a:t>Box2D.NET: a C# port, added as a NuGet package</a:t>
-            </a:r>
-            <a:endParaRPr/>
-          </a:p>
-          <a:p>
-            <a:pPr indent="-330200" lvl="0" marL="457200" rtl="0" algn="l">
-              <a:spcBef>
-                <a:spcPts val="0"/>
-              </a:spcBef>
-              <a:spcAft>
-                <a:spcPts val="0"/>
-              </a:spcAft>
-              <a:buSzPts val="1600"/>
-              <a:buChar char="●"/>
-            </a:pPr>
-            <a:r>
-              <a:rPr lang="en"/>
+        </p:txBody>
+      </p:sp>
+      <p:sp>
+        <p:nvSpPr>
+          <p:cNvPr id="295" name="Rounded Rectangle 294"/>
+          <p:cNvSpPr/>
+          <p:nvPr/>
+        </p:nvSpPr>
+        <p:spPr>
+          <a:xfrm>
+            <a:off x="548640" y="1417320"/>
+            <a:ext cx="3749039" cy="1097280"/>
+          </a:xfrm>
+          <a:prstGeom prst="roundRect">
+            <a:avLst>
+              <a:gd name="adj" fmla="val 12000"/>
+            </a:avLst>
+          </a:prstGeom>
+          <a:solidFill>
+            <a:srgbClr val="2E3338"/>
+          </a:solidFill>
+          <a:ln>
+            <a:noFill/>
+          </a:ln>
+          <a:effectLst/>
+        </p:spPr>
+        <p:style>
+          <a:lnRef idx="1">
+            <a:schemeClr val="accent1"/>
+          </a:lnRef>
+          <a:fillRef idx="3">
+            <a:schemeClr val="accent1"/>
+          </a:fillRef>
+          <a:effectRef idx="2">
+            <a:schemeClr val="accent1"/>
+          </a:effectRef>
+          <a:fontRef idx="minor">
+            <a:schemeClr val="lt1"/>
+          </a:fontRef>
+        </p:style>
+        <p:txBody>
+          <a:bodyPr rtlCol="0" anchor="ctr" wrap="square" lIns="73152" rIns="73152"/>
+          <a:lstStyle/>
+          <a:p>
+            <a:pPr algn="ctr"/>
+            <a:r>
+              <a:rPr sz="1500" b="1">
+                <a:solidFill>
+                  <a:srgbClr val="DEE2E6"/>
+                </a:solidFill>
+              </a:rPr>
               <a:t>A world of bodies</a:t>
             </a:r>
-            <a:endParaRPr/>
-          </a:p>
-          <a:p>
-            <a:pPr indent="-317500" lvl="1" marL="914400" rtl="0" algn="l">
-              <a:spcBef>
-                <a:spcPts val="0"/>
-              </a:spcBef>
-              <a:spcAft>
-                <a:spcPts val="0"/>
-              </a:spcAft>
-              <a:buSzPts val="1400"/>
-              <a:buChar char="○"/>
-            </a:pPr>
-            <a:r>
-              <a:rPr lang="en"/>
-              <a:t>Each body has shapes: boxes, circles, polygons</a:t>
-            </a:r>
-            <a:endParaRPr/>
-          </a:p>
-          <a:p>
-            <a:pPr indent="-317500" lvl="1" marL="914400" rtl="0" algn="l">
-              <a:spcBef>
-                <a:spcPts val="0"/>
-              </a:spcBef>
-              <a:spcAft>
-                <a:spcPts val="0"/>
-              </a:spcAft>
-              <a:buSzPts val="1400"/>
-              <a:buChar char="○"/>
-            </a:pPr>
-            <a:r>
-              <a:rPr lang="en"/>
-              <a:t>Static bodies never move; dynamic bodies are moved by gravity and collisions</a:t>
-            </a:r>
-            <a:endParaRPr/>
-          </a:p>
-          <a:p>
-            <a:pPr indent="-330200" lvl="0" marL="457200" rtl="0" algn="l">
-              <a:spcBef>
-                <a:spcPts val="0"/>
-              </a:spcBef>
-              <a:spcAft>
-                <a:spcPts val="0"/>
-              </a:spcAft>
-              <a:buSzPts val="1600"/>
-              <a:buChar char="●"/>
-            </a:pPr>
-            <a:r>
-              <a:rPr lang="en"/>
-              <a:t>Step the world forward, then read where the bodies are</a:t>
-            </a:r>
-            <a:endParaRPr/>
+          </a:p>
+          <a:p>
+            <a:pPr algn="ctr"/>
+            <a:r>
+              <a:rPr sz="1300" b="0">
+                <a:solidFill>
+                  <a:srgbClr val="9AA3AB"/>
+                </a:solidFill>
+              </a:rPr>
+              <a:t>static: never move (the ground)</a:t>
+            </a:r>
+          </a:p>
+          <a:p>
+            <a:pPr algn="ctr"/>
+            <a:r>
+              <a:rPr sz="1300" b="0">
+                <a:solidFill>
+                  <a:srgbClr val="9AA3AB"/>
+                </a:solidFill>
+              </a:rPr>
+              <a:t>dynamic: gravity and collisions</a:t>
+            </a:r>
+          </a:p>
+        </p:txBody>
+      </p:sp>
+      <p:sp>
+        <p:nvSpPr>
+          <p:cNvPr id="296" name="Rounded Rectangle 295"/>
+          <p:cNvSpPr/>
+          <p:nvPr/>
+        </p:nvSpPr>
+        <p:spPr>
+          <a:xfrm>
+            <a:off x="4846320" y="1417320"/>
+            <a:ext cx="3749039" cy="1097280"/>
+          </a:xfrm>
+          <a:prstGeom prst="roundRect">
+            <a:avLst>
+              <a:gd name="adj" fmla="val 12000"/>
+            </a:avLst>
+          </a:prstGeom>
+          <a:solidFill>
+            <a:srgbClr val="2E3338"/>
+          </a:solidFill>
+          <a:ln>
+            <a:noFill/>
+          </a:ln>
+          <a:effectLst/>
+        </p:spPr>
+        <p:style>
+          <a:lnRef idx="1">
+            <a:schemeClr val="accent1"/>
+          </a:lnRef>
+          <a:fillRef idx="3">
+            <a:schemeClr val="accent1"/>
+          </a:fillRef>
+          <a:effectRef idx="2">
+            <a:schemeClr val="accent1"/>
+          </a:effectRef>
+          <a:fontRef idx="minor">
+            <a:schemeClr val="lt1"/>
+          </a:fontRef>
+        </p:style>
+        <p:txBody>
+          <a:bodyPr rtlCol="0" anchor="ctr" wrap="square" lIns="73152" rIns="73152"/>
+          <a:lstStyle/>
+          <a:p>
+            <a:pPr algn="ctr"/>
+            <a:r>
+              <a:rPr sz="1500" b="1">
+                <a:solidFill>
+                  <a:srgbClr val="DEE2E6"/>
+                </a:solidFill>
+              </a:rPr>
+              <a:t>Bodies have shapes</a:t>
+            </a:r>
+          </a:p>
+          <a:p>
+            <a:pPr algn="ctr"/>
+            <a:r>
+              <a:rPr sz="1300" b="0">
+                <a:solidFill>
+                  <a:srgbClr val="9AA3AB"/>
+                </a:solidFill>
+              </a:rPr>
+              <a:t>boxes, circles, polygons</a:t>
+            </a:r>
+          </a:p>
+          <a:p>
+            <a:pPr algn="ctr"/>
+            <a:r>
+              <a:rPr sz="1300" b="0">
+                <a:solidFill>
+                  <a:srgbClr val="9AA3AB"/>
+                </a:solidFill>
+              </a:rPr>
+              <a:t>with friction and density</a:t>
+            </a:r>
+          </a:p>
+        </p:txBody>
+      </p:sp>
+      <p:sp>
+        <p:nvSpPr>
+          <p:cNvPr id="297" name="Rounded Rectangle 296"/>
+          <p:cNvSpPr/>
+          <p:nvPr/>
+        </p:nvSpPr>
+        <p:spPr>
+          <a:xfrm>
+            <a:off x="1005840" y="2834640"/>
+            <a:ext cx="2103120" cy="594360"/>
+          </a:xfrm>
+          <a:prstGeom prst="roundRect">
+            <a:avLst>
+              <a:gd name="adj" fmla="val 12000"/>
+            </a:avLst>
+          </a:prstGeom>
+          <a:solidFill>
+            <a:srgbClr val="2E3338"/>
+          </a:solidFill>
+          <a:ln w="25400">
+            <a:solidFill>
+              <a:srgbClr val="D45D35"/>
+            </a:solidFill>
+          </a:ln>
+          <a:effectLst/>
+        </p:spPr>
+        <p:style>
+          <a:lnRef idx="1">
+            <a:schemeClr val="accent1"/>
+          </a:lnRef>
+          <a:fillRef idx="3">
+            <a:schemeClr val="accent1"/>
+          </a:fillRef>
+          <a:effectRef idx="2">
+            <a:schemeClr val="accent1"/>
+          </a:effectRef>
+          <a:fontRef idx="minor">
+            <a:schemeClr val="lt1"/>
+          </a:fontRef>
+        </p:style>
+        <p:txBody>
+          <a:bodyPr rtlCol="0" anchor="ctr" wrap="square" lIns="73152" rIns="73152"/>
+          <a:lstStyle/>
+          <a:p>
+            <a:pPr algn="ctr"/>
+            <a:r>
+              <a:rPr sz="1500" b="1">
+                <a:solidFill>
+                  <a:srgbClr val="DEE2E6"/>
+                </a:solidFill>
+              </a:rPr>
+              <a:t>Step the world</a:t>
+            </a:r>
+          </a:p>
+        </p:txBody>
+      </p:sp>
+      <p:cxnSp>
+        <p:nvCxnSpPr>
+          <p:cNvPr id="298" name="Connector 297"/>
+          <p:cNvCxnSpPr/>
+          <p:nvPr/>
+        </p:nvCxnSpPr>
+        <p:spPr>
+          <a:xfrm>
+            <a:off x="3127248" y="3131820"/>
+            <a:ext cx="237743" cy="0"/>
+          </a:xfrm>
+          <a:prstGeom prst="line">
+            <a:avLst/>
+          </a:prstGeom>
+          <a:ln w="25400">
+            <a:solidFill>
+              <a:srgbClr val="9AA3AB"/>
+            </a:solidFill>
+            <a:tailEnd type="triangle"/>
+          </a:ln>
+        </p:spPr>
+        <p:style>
+          <a:lnRef idx="2">
+            <a:schemeClr val="accent1"/>
+          </a:lnRef>
+          <a:fillRef idx="0">
+            <a:schemeClr val="accent1"/>
+          </a:fillRef>
+          <a:effectRef idx="1">
+            <a:schemeClr val="accent1"/>
+          </a:effectRef>
+          <a:fontRef idx="minor">
+            <a:schemeClr val="tx1"/>
+          </a:fontRef>
+        </p:style>
+      </p:cxnSp>
+      <p:sp>
+        <p:nvSpPr>
+          <p:cNvPr id="299" name="Rounded Rectangle 298"/>
+          <p:cNvSpPr/>
+          <p:nvPr/>
+        </p:nvSpPr>
+        <p:spPr>
+          <a:xfrm>
+            <a:off x="3383279" y="2834640"/>
+            <a:ext cx="2103120" cy="594360"/>
+          </a:xfrm>
+          <a:prstGeom prst="roundRect">
+            <a:avLst>
+              <a:gd name="adj" fmla="val 12000"/>
+            </a:avLst>
+          </a:prstGeom>
+          <a:solidFill>
+            <a:srgbClr val="2E3338"/>
+          </a:solidFill>
+          <a:ln>
+            <a:noFill/>
+          </a:ln>
+          <a:effectLst/>
+        </p:spPr>
+        <p:style>
+          <a:lnRef idx="1">
+            <a:schemeClr val="accent1"/>
+          </a:lnRef>
+          <a:fillRef idx="3">
+            <a:schemeClr val="accent1"/>
+          </a:fillRef>
+          <a:effectRef idx="2">
+            <a:schemeClr val="accent1"/>
+          </a:effectRef>
+          <a:fontRef idx="minor">
+            <a:schemeClr val="lt1"/>
+          </a:fontRef>
+        </p:style>
+        <p:txBody>
+          <a:bodyPr rtlCol="0" anchor="ctr" wrap="square" lIns="73152" rIns="73152"/>
+          <a:lstStyle/>
+          <a:p>
+            <a:pPr algn="ctr"/>
+            <a:r>
+              <a:rPr sz="1500" b="1">
+                <a:solidFill>
+                  <a:srgbClr val="DEE2E6"/>
+                </a:solidFill>
+              </a:rPr>
+              <a:t>Read the positions</a:t>
+            </a:r>
+          </a:p>
+        </p:txBody>
+      </p:sp>
+      <p:cxnSp>
+        <p:nvCxnSpPr>
+          <p:cNvPr id="300" name="Connector 299"/>
+          <p:cNvCxnSpPr/>
+          <p:nvPr/>
+        </p:nvCxnSpPr>
+        <p:spPr>
+          <a:xfrm>
+            <a:off x="5504688" y="3131820"/>
+            <a:ext cx="237744" cy="0"/>
+          </a:xfrm>
+          <a:prstGeom prst="line">
+            <a:avLst/>
+          </a:prstGeom>
+          <a:ln w="25400">
+            <a:solidFill>
+              <a:srgbClr val="9AA3AB"/>
+            </a:solidFill>
+            <a:tailEnd type="triangle"/>
+          </a:ln>
+        </p:spPr>
+        <p:style>
+          <a:lnRef idx="2">
+            <a:schemeClr val="accent1"/>
+          </a:lnRef>
+          <a:fillRef idx="0">
+            <a:schemeClr val="accent1"/>
+          </a:fillRef>
+          <a:effectRef idx="1">
+            <a:schemeClr val="accent1"/>
+          </a:effectRef>
+          <a:fontRef idx="minor">
+            <a:schemeClr val="tx1"/>
+          </a:fontRef>
+        </p:style>
+      </p:cxnSp>
+      <p:sp>
+        <p:nvSpPr>
+          <p:cNvPr id="301" name="Rounded Rectangle 300"/>
+          <p:cNvSpPr/>
+          <p:nvPr/>
+        </p:nvSpPr>
+        <p:spPr>
+          <a:xfrm>
+            <a:off x="5760719" y="2834640"/>
+            <a:ext cx="2103120" cy="594360"/>
+          </a:xfrm>
+          <a:prstGeom prst="roundRect">
+            <a:avLst>
+              <a:gd name="adj" fmla="val 12000"/>
+            </a:avLst>
+          </a:prstGeom>
+          <a:solidFill>
+            <a:srgbClr val="2E3338"/>
+          </a:solidFill>
+          <a:ln>
+            <a:noFill/>
+          </a:ln>
+          <a:effectLst/>
+        </p:spPr>
+        <p:style>
+          <a:lnRef idx="1">
+            <a:schemeClr val="accent1"/>
+          </a:lnRef>
+          <a:fillRef idx="3">
+            <a:schemeClr val="accent1"/>
+          </a:fillRef>
+          <a:effectRef idx="2">
+            <a:schemeClr val="accent1"/>
+          </a:effectRef>
+          <a:fontRef idx="minor">
+            <a:schemeClr val="lt1"/>
+          </a:fontRef>
+        </p:style>
+        <p:txBody>
+          <a:bodyPr rtlCol="0" anchor="ctr" wrap="square" lIns="73152" rIns="73152"/>
+          <a:lstStyle/>
+          <a:p>
+            <a:pPr algn="ctr"/>
+            <a:r>
+              <a:rPr sz="1500" b="1">
+                <a:solidFill>
+                  <a:srgbClr val="DEE2E6"/>
+                </a:solidFill>
+              </a:rPr>
+              <a:t>Draw the sprites there</a:t>
+            </a:r>
           </a:p>
         </p:txBody>
       </p:sp>
@@ -15178,7 +16549,7 @@
         <p:spPr>
           <a:xfrm>
             <a:off x="311700" y="885950"/>
-            <a:ext cx="8520600" cy="4023300"/>
+            <a:ext cx="8520600" cy="521208"/>
           </a:xfrm>
           <a:prstGeom prst="rect">
             <a:avLst/>
@@ -15202,94 +16573,335 @@
             </a:pPr>
             <a:r>
               <a:rPr lang="en"/>
-              <a:t>Box2D is tuned for objects of 0.1 to 10 metres</a:t>
+              <a:t>A 50-pixel block, taken as metres, is a 50-metre building: it falls in slow motion.</a:t>
             </a:r>
             <a:endParaRPr/>
           </a:p>
-          <a:p>
-            <a:pPr indent="-317500" lvl="1" marL="914400" rtl="0" algn="l">
-              <a:spcBef>
-                <a:spcPts val="0"/>
-              </a:spcBef>
-              <a:spcAft>
-                <a:spcPts val="0"/>
-              </a:spcAft>
-              <a:buSzPts val="1400"/>
-              <a:buChar char="○"/>
-            </a:pPr>
-            <a:r>
-              <a:rPr lang="en"/>
-              <a:t>A 50-pixel block would be a 50-metre block</a:t>
-            </a:r>
-            <a:endParaRPr/>
-          </a:p>
-          <a:p>
-            <a:pPr indent="-317500" lvl="1" marL="914400" rtl="0" algn="l">
-              <a:spcBef>
-                <a:spcPts val="0"/>
-              </a:spcBef>
-              <a:spcAft>
-                <a:spcPts val="0"/>
-              </a:spcAft>
-              <a:buSzPts val="1400"/>
-              <a:buChar char="○"/>
-            </a:pPr>
-            <a:r>
-              <a:rPr lang="en"/>
-              <a:t>It would fall as slowly as a building</a:t>
-            </a:r>
-            <a:endParaRPr/>
-          </a:p>
-          <a:p>
-            <a:pPr indent="-330200" lvl="0" marL="457200" rtl="0" algn="l">
-              <a:spcBef>
-                <a:spcPts val="0"/>
-              </a:spcBef>
-              <a:spcAft>
-                <a:spcPts val="0"/>
-              </a:spcAft>
-              <a:buSzPts val="1600"/>
-              <a:buChar char="●"/>
-            </a:pPr>
-            <a:r>
-              <a:rPr lang="en"/>
-              <a:t>Simulate in metres, draw in pixels: 50 pixels per metre</a:t>
-            </a:r>
-            <a:endParaRPr/>
-          </a:p>
-          <a:p>
-            <a:pPr indent="-330200" lvl="0" marL="457200" rtl="0" algn="l">
-              <a:spcBef>
-                <a:spcPts val="0"/>
-              </a:spcBef>
-              <a:spcAft>
-                <a:spcPts val="0"/>
-              </a:spcAft>
-              <a:buSzPts val="1600"/>
-              <a:buChar char="●"/>
-            </a:pPr>
-            <a:r>
-              <a:rPr lang="en"/>
-              <a:t>Box2D turns counter-clockwise, SpriteBatch clockwise</a:t>
-            </a:r>
-            <a:endParaRPr/>
-          </a:p>
-          <a:p>
-            <a:pPr indent="-330200" lvl="0" marL="457200" rtl="0" algn="l">
-              <a:spcBef>
-                <a:spcPts val="0"/>
-              </a:spcBef>
-              <a:spcAft>
-                <a:spcPts val="0"/>
-              </a:spcAft>
-              <a:buSzPts val="1600"/>
-              <a:buChar char="●"/>
-            </a:pPr>
-            <a:r>
-              <a:rPr lang="en"/>
-              <a:t>Forget one conversion: a body in the wrong place, or falling up</a:t>
-            </a:r>
-            <a:endParaRPr/>
+        </p:txBody>
+      </p:sp>
+      <p:sp>
+        <p:nvSpPr>
+          <p:cNvPr id="295" name="Rounded Rectangle 294"/>
+          <p:cNvSpPr/>
+          <p:nvPr/>
+        </p:nvSpPr>
+        <p:spPr>
+          <a:xfrm>
+            <a:off x="548640" y="1463040"/>
+            <a:ext cx="2743200" cy="914400"/>
+          </a:xfrm>
+          <a:prstGeom prst="roundRect">
+            <a:avLst>
+              <a:gd name="adj" fmla="val 12000"/>
+            </a:avLst>
+          </a:prstGeom>
+          <a:solidFill>
+            <a:srgbClr val="2E3338"/>
+          </a:solidFill>
+          <a:ln>
+            <a:noFill/>
+          </a:ln>
+          <a:effectLst/>
+        </p:spPr>
+        <p:style>
+          <a:lnRef idx="1">
+            <a:schemeClr val="accent1"/>
+          </a:lnRef>
+          <a:fillRef idx="3">
+            <a:schemeClr val="accent1"/>
+          </a:fillRef>
+          <a:effectRef idx="2">
+            <a:schemeClr val="accent1"/>
+          </a:effectRef>
+          <a:fontRef idx="minor">
+            <a:schemeClr val="lt1"/>
+          </a:fontRef>
+        </p:style>
+        <p:txBody>
+          <a:bodyPr rtlCol="0" anchor="ctr" wrap="square" lIns="73152" rIns="73152"/>
+          <a:lstStyle/>
+          <a:p>
+            <a:pPr algn="ctr"/>
+            <a:r>
+              <a:rPr sz="1600" b="1">
+                <a:solidFill>
+                  <a:srgbClr val="DEE2E6"/>
+                </a:solidFill>
+              </a:rPr>
+              <a:t>Our game</a:t>
+            </a:r>
+          </a:p>
+          <a:p>
+            <a:pPr algn="ctr"/>
+            <a:r>
+              <a:rPr sz="1400" b="0">
+                <a:solidFill>
+                  <a:srgbClr val="9AA3AB"/>
+                </a:solidFill>
+              </a:rPr>
+              <a:t>pixels, y down,</a:t>
+            </a:r>
+          </a:p>
+          <a:p>
+            <a:pPr algn="ctr"/>
+            <a:r>
+              <a:rPr sz="1400" b="0">
+                <a:solidFill>
+                  <a:srgbClr val="9AA3AB"/>
+                </a:solidFill>
+              </a:rPr>
+              <a:t>clockwise</a:t>
+            </a:r>
+          </a:p>
+        </p:txBody>
+      </p:sp>
+      <p:sp>
+        <p:nvSpPr>
+          <p:cNvPr id="296" name="Rounded Rectangle 295"/>
+          <p:cNvSpPr/>
+          <p:nvPr/>
+        </p:nvSpPr>
+        <p:spPr>
+          <a:xfrm>
+            <a:off x="5852160" y="1463040"/>
+            <a:ext cx="2743200" cy="914400"/>
+          </a:xfrm>
+          <a:prstGeom prst="roundRect">
+            <a:avLst>
+              <a:gd name="adj" fmla="val 12000"/>
+            </a:avLst>
+          </a:prstGeom>
+          <a:solidFill>
+            <a:srgbClr val="2E3338"/>
+          </a:solidFill>
+          <a:ln>
+            <a:noFill/>
+          </a:ln>
+          <a:effectLst/>
+        </p:spPr>
+        <p:style>
+          <a:lnRef idx="1">
+            <a:schemeClr val="accent1"/>
+          </a:lnRef>
+          <a:fillRef idx="3">
+            <a:schemeClr val="accent1"/>
+          </a:fillRef>
+          <a:effectRef idx="2">
+            <a:schemeClr val="accent1"/>
+          </a:effectRef>
+          <a:fontRef idx="minor">
+            <a:schemeClr val="lt1"/>
+          </a:fontRef>
+        </p:style>
+        <p:txBody>
+          <a:bodyPr rtlCol="0" anchor="ctr" wrap="square" lIns="73152" rIns="73152"/>
+          <a:lstStyle/>
+          <a:p>
+            <a:pPr algn="ctr"/>
+            <a:r>
+              <a:rPr sz="1600" b="1">
+                <a:solidFill>
+                  <a:srgbClr val="DEE2E6"/>
+                </a:solidFill>
+              </a:rPr>
+              <a:t>Box2D</a:t>
+            </a:r>
+          </a:p>
+          <a:p>
+            <a:pPr algn="ctr"/>
+            <a:r>
+              <a:rPr sz="1400" b="0">
+                <a:solidFill>
+                  <a:srgbClr val="9AA3AB"/>
+                </a:solidFill>
+              </a:rPr>
+              <a:t>metres, y up,</a:t>
+            </a:r>
+          </a:p>
+          <a:p>
+            <a:pPr algn="ctr"/>
+            <a:r>
+              <a:rPr sz="1400" b="0">
+                <a:solidFill>
+                  <a:srgbClr val="9AA3AB"/>
+                </a:solidFill>
+              </a:rPr>
+              <a:t>counter-clockwise</a:t>
+            </a:r>
+          </a:p>
+        </p:txBody>
+      </p:sp>
+      <p:cxnSp>
+        <p:nvCxnSpPr>
+          <p:cNvPr id="297" name="Connector 296"/>
+          <p:cNvCxnSpPr/>
+          <p:nvPr/>
+        </p:nvCxnSpPr>
+        <p:spPr>
+          <a:xfrm>
+            <a:off x="3337560" y="1783080"/>
+            <a:ext cx="2468880" cy="0"/>
+          </a:xfrm>
+          <a:prstGeom prst="line">
+            <a:avLst/>
+          </a:prstGeom>
+          <a:ln w="25400">
+            <a:solidFill>
+              <a:srgbClr val="D45D35"/>
+            </a:solidFill>
+            <a:tailEnd type="triangle"/>
+          </a:ln>
+        </p:spPr>
+        <p:style>
+          <a:lnRef idx="2">
+            <a:schemeClr val="accent1"/>
+          </a:lnRef>
+          <a:fillRef idx="0">
+            <a:schemeClr val="accent1"/>
+          </a:fillRef>
+          <a:effectRef idx="1">
+            <a:schemeClr val="accent1"/>
+          </a:effectRef>
+          <a:fontRef idx="minor">
+            <a:schemeClr val="tx1"/>
+          </a:fontRef>
+        </p:style>
+      </p:cxnSp>
+      <p:sp>
+        <p:nvSpPr>
+          <p:cNvPr id="298" name="TextBox 297"/>
+          <p:cNvSpPr txBox="1"/>
+          <p:nvPr/>
+        </p:nvSpPr>
+        <p:spPr>
+          <a:xfrm>
+            <a:off x="3154679" y="1490472"/>
+            <a:ext cx="2834639" cy="274320"/>
+          </a:xfrm>
+          <a:prstGeom prst="rect">
+            <a:avLst/>
+          </a:prstGeom>
+          <a:noFill/>
+        </p:spPr>
+        <p:txBody>
+          <a:bodyPr wrap="square">
+            <a:spAutoFit/>
+          </a:bodyPr>
+          <a:lstStyle/>
+          <a:p>
+            <a:pPr algn="ctr"/>
+            <a:r>
+              <a:rPr sz="1100" b="0" i="0">
+                <a:solidFill>
+                  <a:srgbClr val="9AA3AB"/>
+                </a:solidFill>
+              </a:rPr>
+              <a:t>÷ 50, flip y</a:t>
+            </a:r>
+          </a:p>
+        </p:txBody>
+      </p:sp>
+      <p:cxnSp>
+        <p:nvCxnSpPr>
+          <p:cNvPr id="299" name="Connector 298"/>
+          <p:cNvCxnSpPr/>
+          <p:nvPr/>
+        </p:nvCxnSpPr>
+        <p:spPr>
+          <a:xfrm flipH="1">
+            <a:off x="3337560" y="2103120"/>
+            <a:ext cx="2468880" cy="0"/>
+          </a:xfrm>
+          <a:prstGeom prst="line">
+            <a:avLst/>
+          </a:prstGeom>
+          <a:ln w="25400">
+            <a:solidFill>
+              <a:srgbClr val="D45D35"/>
+            </a:solidFill>
+            <a:tailEnd type="triangle"/>
+          </a:ln>
+        </p:spPr>
+        <p:style>
+          <a:lnRef idx="2">
+            <a:schemeClr val="accent1"/>
+          </a:lnRef>
+          <a:fillRef idx="0">
+            <a:schemeClr val="accent1"/>
+          </a:fillRef>
+          <a:effectRef idx="1">
+            <a:schemeClr val="accent1"/>
+          </a:effectRef>
+          <a:fontRef idx="minor">
+            <a:schemeClr val="tx1"/>
+          </a:fontRef>
+        </p:style>
+      </p:cxnSp>
+      <p:sp>
+        <p:nvSpPr>
+          <p:cNvPr id="300" name="TextBox 299"/>
+          <p:cNvSpPr txBox="1"/>
+          <p:nvPr/>
+        </p:nvSpPr>
+        <p:spPr>
+          <a:xfrm>
+            <a:off x="3337560" y="2148840"/>
+            <a:ext cx="2468880" cy="274320"/>
+          </a:xfrm>
+          <a:prstGeom prst="rect">
+            <a:avLst/>
+          </a:prstGeom>
+          <a:noFill/>
+        </p:spPr>
+        <p:txBody>
+          <a:bodyPr wrap="square">
+            <a:spAutoFit/>
+          </a:bodyPr>
+          <a:lstStyle/>
+          <a:p>
+            <a:pPr algn="ctr"/>
+            <a:r>
+              <a:rPr sz="1100" b="0" i="0">
+                <a:solidFill>
+                  <a:srgbClr val="9AA3AB"/>
+                </a:solidFill>
+              </a:rPr>
+              <a:t>× 50, flip y</a:t>
+            </a:r>
+          </a:p>
+        </p:txBody>
+      </p:sp>
+      <p:sp>
+        <p:nvSpPr>
+          <p:cNvPr id="301" name="TextBox 300"/>
+          <p:cNvSpPr txBox="1"/>
+          <p:nvPr/>
+        </p:nvSpPr>
+        <p:spPr>
+          <a:xfrm>
+            <a:off x="457200" y="2834640"/>
+            <a:ext cx="8229600" cy="731520"/>
+          </a:xfrm>
+          <a:prstGeom prst="rect">
+            <a:avLst/>
+          </a:prstGeom>
+          <a:noFill/>
+        </p:spPr>
+        <p:txBody>
+          <a:bodyPr wrap="square">
+            <a:spAutoFit/>
+          </a:bodyPr>
+          <a:lstStyle/>
+          <a:p>
+            <a:pPr algn="ctr"/>
+            <a:r>
+              <a:rPr sz="1700" b="1" i="0">
+                <a:solidFill>
+                  <a:srgbClr val="DEE2E6"/>
+                </a:solidFill>
+              </a:rPr>
+              <a:t>Forget one conversion. What do you see?</a:t>
+            </a:r>
           </a:p>
         </p:txBody>
       </p:sp>
@@ -15497,7 +17109,7 @@
         <p:spPr>
           <a:xfrm>
             <a:off x="311700" y="885950"/>
-            <a:ext cx="8520600" cy="4023300"/>
+            <a:ext cx="8520600" cy="521208"/>
           </a:xfrm>
           <a:prstGeom prst="rect">
             <a:avLst/>
@@ -15521,94 +17133,285 @@
             </a:pPr>
             <a:r>
               <a:rPr lang="en"/>
-              <a:t>Adapter: converts an interface into the one its users expect</a:t>
+              <a:t>Keep Box2D in one place: the rest of the game never sees a Box2D type.</a:t>
             </a:r>
             <a:endParaRPr/>
           </a:p>
-          <a:p>
-            <a:pPr indent="-317500" lvl="1" marL="914400" rtl="0" algn="l">
-              <a:spcBef>
-                <a:spcPts val="0"/>
-              </a:spcBef>
-              <a:spcAft>
-                <a:spcPts val="0"/>
-              </a:spcAft>
-              <a:buSzPts val="1400"/>
-              <a:buChar char="○"/>
-            </a:pPr>
-            <a:r>
-              <a:rPr lang="en"/>
-              <a:t>PhysicsBody wraps a Box2D body: pixels, clockwise, our types</a:t>
-            </a:r>
-            <a:endParaRPr/>
-          </a:p>
-          <a:p>
-            <a:pPr indent="-330200" lvl="0" marL="457200" rtl="0" algn="l">
-              <a:spcBef>
-                <a:spcPts val="0"/>
-              </a:spcBef>
-              <a:spcAft>
-                <a:spcPts val="0"/>
-              </a:spcAft>
-              <a:buSzPts val="1600"/>
-              <a:buChar char="●"/>
-            </a:pPr>
-            <a:r>
-              <a:rPr lang="en"/>
-              <a:t>Facade: one simple interface in front of a subsystem</a:t>
-            </a:r>
-            <a:endParaRPr/>
-          </a:p>
-          <a:p>
-            <a:pPr indent="-317500" lvl="1" marL="914400" rtl="0" algn="l">
-              <a:spcBef>
-                <a:spcPts val="0"/>
-              </a:spcBef>
-              <a:spcAft>
-                <a:spcPts val="0"/>
-              </a:spcAft>
-              <a:buSzPts val="1400"/>
-              <a:buChar char="○"/>
-            </a:pPr>
-            <a:r>
-              <a:rPr lang="en"/>
-              <a:t>Box2D has hundreds of functions; the game needs a handful</a:t>
-            </a:r>
-            <a:endParaRPr/>
-          </a:p>
-          <a:p>
-            <a:pPr indent="-317500" lvl="1" marL="914400" rtl="0" algn="l">
-              <a:spcBef>
-                <a:spcPts val="0"/>
-              </a:spcBef>
-              <a:spcAft>
-                <a:spcPts val="0"/>
-              </a:spcAft>
-              <a:buSzPts val="1400"/>
-              <a:buChar char="○"/>
-            </a:pPr>
-            <a:r>
-              <a:rPr lang="en"/>
-              <a:t>PhysicsWorld: create a box or a circle, step, destroy</a:t>
-            </a:r>
-            <a:endParaRPr/>
-          </a:p>
-          <a:p>
-            <a:pPr indent="-330200" lvl="0" marL="457200" rtl="0" algn="l">
-              <a:spcBef>
-                <a:spcPts val="0"/>
-              </a:spcBef>
-              <a:spcAft>
-                <a:spcPts val="0"/>
-              </a:spcAft>
-              <a:buSzPts val="1600"/>
-              <a:buChar char="●"/>
-            </a:pPr>
-            <a:r>
-              <a:rPr lang="en"/>
-              <a:t>The rest of the game never sees a Box2D type</a:t>
-            </a:r>
-            <a:endParaRPr/>
+        </p:txBody>
+      </p:sp>
+      <p:sp>
+        <p:nvSpPr>
+          <p:cNvPr id="295" name="Rounded Rectangle 294"/>
+          <p:cNvSpPr/>
+          <p:nvPr/>
+        </p:nvSpPr>
+        <p:spPr>
+          <a:xfrm>
+            <a:off x="548640" y="1371600"/>
+            <a:ext cx="8046720" cy="548640"/>
+          </a:xfrm>
+          <a:prstGeom prst="roundRect">
+            <a:avLst>
+              <a:gd name="adj" fmla="val 12000"/>
+            </a:avLst>
+          </a:prstGeom>
+          <a:solidFill>
+            <a:srgbClr val="2E3338"/>
+          </a:solidFill>
+          <a:ln>
+            <a:noFill/>
+          </a:ln>
+          <a:effectLst/>
+        </p:spPr>
+        <p:style>
+          <a:lnRef idx="1">
+            <a:schemeClr val="accent1"/>
+          </a:lnRef>
+          <a:fillRef idx="3">
+            <a:schemeClr val="accent1"/>
+          </a:fillRef>
+          <a:effectRef idx="2">
+            <a:schemeClr val="accent1"/>
+          </a:effectRef>
+          <a:fontRef idx="minor">
+            <a:schemeClr val="lt1"/>
+          </a:fontRef>
+        </p:style>
+        <p:txBody>
+          <a:bodyPr rtlCol="0" anchor="ctr" wrap="square" lIns="73152" rIns="73152"/>
+          <a:lstStyle/>
+          <a:p>
+            <a:pPr algn="ctr"/>
+            <a:r>
+              <a:rPr sz="1500" b="1">
+                <a:solidFill>
+                  <a:srgbClr val="DEE2E6"/>
+                </a:solidFill>
+              </a:rPr>
+              <a:t>The game: blocks, pigs, birds, levels</a:t>
+            </a:r>
+          </a:p>
+        </p:txBody>
+      </p:sp>
+      <p:sp>
+        <p:nvSpPr>
+          <p:cNvPr id="296" name="Rounded Rectangle 295"/>
+          <p:cNvSpPr/>
+          <p:nvPr/>
+        </p:nvSpPr>
+        <p:spPr>
+          <a:xfrm>
+            <a:off x="548640" y="2148840"/>
+            <a:ext cx="3886200" cy="822960"/>
+          </a:xfrm>
+          <a:prstGeom prst="roundRect">
+            <a:avLst>
+              <a:gd name="adj" fmla="val 12000"/>
+            </a:avLst>
+          </a:prstGeom>
+          <a:solidFill>
+            <a:srgbClr val="2E3338"/>
+          </a:solidFill>
+          <a:ln w="25400">
+            <a:solidFill>
+              <a:srgbClr val="D45D35"/>
+            </a:solidFill>
+          </a:ln>
+          <a:effectLst/>
+        </p:spPr>
+        <p:style>
+          <a:lnRef idx="1">
+            <a:schemeClr val="accent1"/>
+          </a:lnRef>
+          <a:fillRef idx="3">
+            <a:schemeClr val="accent1"/>
+          </a:fillRef>
+          <a:effectRef idx="2">
+            <a:schemeClr val="accent1"/>
+          </a:effectRef>
+          <a:fontRef idx="minor">
+            <a:schemeClr val="lt1"/>
+          </a:fontRef>
+        </p:style>
+        <p:txBody>
+          <a:bodyPr rtlCol="0" anchor="ctr" wrap="square" lIns="73152" rIns="73152"/>
+          <a:lstStyle/>
+          <a:p>
+            <a:pPr algn="ctr"/>
+            <a:r>
+              <a:rPr sz="1500" b="1">
+                <a:solidFill>
+                  <a:srgbClr val="DEE2E6"/>
+                </a:solidFill>
+              </a:rPr>
+              <a:t>PhysicsWorld: a Facade</a:t>
+            </a:r>
+          </a:p>
+          <a:p>
+            <a:pPr algn="ctr"/>
+            <a:r>
+              <a:rPr sz="1300" b="0">
+                <a:solidFill>
+                  <a:srgbClr val="9AA3AB"/>
+                </a:solidFill>
+              </a:rPr>
+              <a:t>a handful of calls: create, step, destroy</a:t>
+            </a:r>
+          </a:p>
+        </p:txBody>
+      </p:sp>
+      <p:sp>
+        <p:nvSpPr>
+          <p:cNvPr id="297" name="Rounded Rectangle 296"/>
+          <p:cNvSpPr/>
+          <p:nvPr/>
+        </p:nvSpPr>
+        <p:spPr>
+          <a:xfrm>
+            <a:off x="4709160" y="2148840"/>
+            <a:ext cx="3886200" cy="822960"/>
+          </a:xfrm>
+          <a:prstGeom prst="roundRect">
+            <a:avLst>
+              <a:gd name="adj" fmla="val 12000"/>
+            </a:avLst>
+          </a:prstGeom>
+          <a:solidFill>
+            <a:srgbClr val="2E3338"/>
+          </a:solidFill>
+          <a:ln w="25400">
+            <a:solidFill>
+              <a:srgbClr val="D45D35"/>
+            </a:solidFill>
+          </a:ln>
+          <a:effectLst/>
+        </p:spPr>
+        <p:style>
+          <a:lnRef idx="1">
+            <a:schemeClr val="accent1"/>
+          </a:lnRef>
+          <a:fillRef idx="3">
+            <a:schemeClr val="accent1"/>
+          </a:fillRef>
+          <a:effectRef idx="2">
+            <a:schemeClr val="accent1"/>
+          </a:effectRef>
+          <a:fontRef idx="minor">
+            <a:schemeClr val="lt1"/>
+          </a:fontRef>
+        </p:style>
+        <p:txBody>
+          <a:bodyPr rtlCol="0" anchor="ctr" wrap="square" lIns="73152" rIns="73152"/>
+          <a:lstStyle/>
+          <a:p>
+            <a:pPr algn="ctr"/>
+            <a:r>
+              <a:rPr sz="1500" b="1">
+                <a:solidFill>
+                  <a:srgbClr val="DEE2E6"/>
+                </a:solidFill>
+              </a:rPr>
+              <a:t>PhysicsBody: an Adapter</a:t>
+            </a:r>
+          </a:p>
+          <a:p>
+            <a:pPr algn="ctr"/>
+            <a:r>
+              <a:rPr sz="1300" b="0">
+                <a:solidFill>
+                  <a:srgbClr val="9AA3AB"/>
+                </a:solidFill>
+              </a:rPr>
+              <a:t>a body in pixels, turning like SpriteBatch</a:t>
+            </a:r>
+          </a:p>
+        </p:txBody>
+      </p:sp>
+      <p:sp>
+        <p:nvSpPr>
+          <p:cNvPr id="298" name="Rounded Rectangle 297"/>
+          <p:cNvSpPr/>
+          <p:nvPr/>
+        </p:nvSpPr>
+        <p:spPr>
+          <a:xfrm>
+            <a:off x="548640" y="3200400"/>
+            <a:ext cx="8046720" cy="548640"/>
+          </a:xfrm>
+          <a:prstGeom prst="roundRect">
+            <a:avLst>
+              <a:gd name="adj" fmla="val 12000"/>
+            </a:avLst>
+          </a:prstGeom>
+          <a:solidFill>
+            <a:srgbClr val="2E3338"/>
+          </a:solidFill>
+          <a:ln>
+            <a:noFill/>
+          </a:ln>
+          <a:effectLst/>
+        </p:spPr>
+        <p:style>
+          <a:lnRef idx="1">
+            <a:schemeClr val="accent1"/>
+          </a:lnRef>
+          <a:fillRef idx="3">
+            <a:schemeClr val="accent1"/>
+          </a:fillRef>
+          <a:effectRef idx="2">
+            <a:schemeClr val="accent1"/>
+          </a:effectRef>
+          <a:fontRef idx="minor">
+            <a:schemeClr val="lt1"/>
+          </a:fontRef>
+        </p:style>
+        <p:txBody>
+          <a:bodyPr rtlCol="0" anchor="ctr" wrap="square" lIns="73152" rIns="73152"/>
+          <a:lstStyle/>
+          <a:p>
+            <a:pPr algn="ctr"/>
+            <a:r>
+              <a:rPr sz="1500" b="1">
+                <a:solidFill>
+                  <a:srgbClr val="DEE2E6"/>
+                </a:solidFill>
+              </a:rPr>
+              <a:t>Box2D: hundreds of functions, metres, structs and IDs</a:t>
+            </a:r>
+          </a:p>
+        </p:txBody>
+      </p:sp>
+      <p:sp>
+        <p:nvSpPr>
+          <p:cNvPr id="299" name="TextBox 298"/>
+          <p:cNvSpPr txBox="1"/>
+          <p:nvPr/>
+        </p:nvSpPr>
+        <p:spPr>
+          <a:xfrm>
+            <a:off x="457200" y="3886200"/>
+            <a:ext cx="8229600" cy="731520"/>
+          </a:xfrm>
+          <a:prstGeom prst="rect">
+            <a:avLst/>
+          </a:prstGeom>
+          <a:noFill/>
+        </p:spPr>
+        <p:txBody>
+          <a:bodyPr wrap="square">
+            <a:spAutoFit/>
+          </a:bodyPr>
+          <a:lstStyle/>
+          <a:p>
+            <a:pPr algn="ctr"/>
+            <a:r>
+              <a:rPr sz="1500" b="1" i="0">
+                <a:solidFill>
+                  <a:srgbClr val="DEE2E6"/>
+                </a:solidFill>
+              </a:rPr>
+              <a:t>Swap Box2D for another library. Which files change?</a:t>
+            </a:r>
           </a:p>
         </p:txBody>
       </p:sp>

--- a/slides/07 Angry Birds.pptx
+++ b/slides/07 Angry Birds.pptx
@@ -806,19 +806,14 @@
           </a:bodyPr>
           <a:lstStyle/>
           <a:p>
-            <a:pPr indent="0" lvl="0" marL="0" rtl="0" algn="l">
-              <a:spcBef>
-                <a:spcPts val="0"/>
-              </a:spcBef>
-              <a:spcAft>
-                <a:spcPts val="0"/>
-              </a:spcAft>
-              <a:buNone/>
-            </a:pPr>
-            <a:r>
-              <a:t/>
-            </a:r>
-            <a:endParaRPr/>
+            <a:r>
+              <a:t>Welcome. Today we build Angry Birds. The main topic: using a library behind your own interface.</a:t>
+            </a:r>
+          </a:p>
+          <a:p>
+            <a:r>
+              <a:t>Start by playing the finished game, Birds4, before any code.</a:t>
+            </a:r>
           </a:p>
         </p:txBody>
       </p:sp>
@@ -875,42 +870,12 @@
           <a:lstStyle/>
           <a:p>
             <a:r>
-              <a:t>Talking points:</a:t>
-            </a:r>
-          </a:p>
-          <a:p>
-            <a:r>
-              <a:t>- A block exists twice: an entity, and a body</a:t>
-            </a:r>
-          </a:p>
-          <a:p>
-            <a:r>
-              <a:t>- The physics world owns the position</a:t>
-            </a:r>
-          </a:p>
-          <a:p>
-            <a:r>
-              <a:t>  - An entity reads its body’s position every time it’s drawn</a:t>
-            </a:r>
-          </a:p>
-          <a:p>
-            <a:r>
-              <a:t>- And the body knows its owner</a:t>
-            </a:r>
-          </a:p>
-          <a:p>
-            <a:r>
-              <a:t>  - So events about bodies lead back to entities</a:t>
-            </a:r>
-          </a:p>
-          <a:p>
-            <a:r>
-              <a:t>- F1: what the physics world sees (awake green, asleep blue)</a:t>
-            </a:r>
-          </a:p>
-          <a:p>
-            <a:r>
-              <a:t>- A fixed time step: Snake’s accumulator, again</a:t>
+              <a:t>A block exists twice: an entity and a body. The physics world owns the position; the entity reads it every draw.</a:t>
+            </a:r>
+          </a:p>
+          <a:p>
+            <a:r>
+              <a:t>The body knows its owner, so a hit between bodies leads back to entities. F1 shows what the physics world sees.</a:t>
             </a:r>
           </a:p>
         </p:txBody>
@@ -968,37 +933,12 @@
           <a:lstStyle/>
           <a:p>
             <a:r>
-              <a:t>Talking points:</a:t>
-            </a:r>
-          </a:p>
-          <a:p>
-            <a:r>
-              <a:t>- Three levels, a few birds each</a:t>
-            </a:r>
-          </a:p>
-          <a:p>
-            <a:r>
-              <a:t>- Game states: Aim → Fly → Aim or Level End</a:t>
-            </a:r>
-          </a:p>
-          <a:p>
-            <a:r>
-              <a:t>- Fly waits until the world has settled</a:t>
-            </a:r>
-          </a:p>
-          <a:p>
-            <a:r>
-              <a:t>  - The facade answers it in one line: IsSettled</a:t>
-            </a:r>
-          </a:p>
-          <a:p>
-            <a:r>
-              <a:t>- The aiming curve doesn’t use the physics world</a:t>
-            </a:r>
-          </a:p>
-          <a:p>
-            <a:r>
-              <a:t>  - start + velocity × t + gravity × t² / 2</a:t>
+              <a:t>Aim, fly, and aim again or end the level. Fly waits until the world settles; the facade answers that in one line.</a:t>
+            </a:r>
+          </a:p>
+          <a:p>
+            <a:r>
+              <a:t>The aiming curve is just the formula: no physics world needed to draw it.</a:t>
             </a:r>
           </a:p>
         </p:txBody>
@@ -1056,7 +996,492 @@
           <a:lstStyle/>
           <a:p>
             <a:r>
-              <a:t>Ask, let them answer in pairs for a minute, then take a few answers. These are the site’s Check yourself questions.</a:t>
+              <a:t>Ask one question at a time. Pairs discuss for a minute, then take two or three answers.</a:t>
+            </a:r>
+          </a:p>
+          <a:p>
+            <a:r>
+              <a:t>Expected answers (from the course site):</a:t>
+            </a:r>
+          </a:p>
+          <a:p/>
+          <a:p>
+            <a:r>
+              <a:t>Q: What is the difference between an Adapter and a Facade?</a:t>
+            </a:r>
+          </a:p>
+          <a:p>
+            <a:r>
+              <a:t>A: An Adapter converts one interface into another that its users expect (here, a Box2D body into a body in pixels). A Facade puts one simple interface in front of a whole subsystem (here, a few methods in front of Box2D's many). PhysicsWorld and PhysicsBody together do both.</a:t>
+            </a:r>
+          </a:p>
+          <a:p/>
+          <a:p>
+            <a:r>
+              <a:t>Q: Why convert between metres and pixels at all?</a:t>
+            </a:r>
+          </a:p>
+          <a:p>
+            <a:r>
+              <a:t>A: Box2D is tuned for objects of about 0.1 to 10 metres. In pixels, objects would be tens or hundreds of units big, and would behave like huge, slow objects. The game simulates in metres, and draws in pixels.</a:t>
+            </a:r>
+          </a:p>
+          <a:p/>
+          <a:p>
+            <a:r>
+              <a:t>Q: Why not destroy a body inside the hit handler?</a:t>
+            </a:r>
+          </a:p>
+          <a:p>
+            <a:r>
+              <a:t>A: The physics world is still reporting hits, and a later one may be about the destroyed body; some libraries crash if the world changes during a callback. The game may also be looping over the list you remove from. Mark it, and remove it after the step.</a:t>
+            </a:r>
+          </a:p>
+          <a:p/>
+          <a:p>
+            <a:r>
+              <a:t>Q: What does a shallow copy share with the original, and why does that matter here?</a:t>
+            </a:r>
+          </a:p>
+          <a:p>
+            <a:r>
+              <a:t>A: Every field that refers to an object: the copy points to the same object. Sharing an unchanging sprite is fine, but sharing a physics body would make two entities one. So the clone gets its own body.</a:t>
+            </a:r>
+          </a:p>
+        </p:txBody>
+      </p:sp>
+    </p:spTree>
+  </p:cSld>
+  <p:clrMapOvr>
+    <a:masterClrMapping/>
+  </p:clrMapOvr>
+</p:notes>
+</file>
+
+<file path=ppt/notesSlides/notesSlide13.xml><?xml version="1.0" encoding="utf-8"?>
+<p:notes xmlns:a="http://schemas.openxmlformats.org/drawingml/2006/main" xmlns:p="http://schemas.openxmlformats.org/presentationml/2006/main" xmlns:r="http://schemas.openxmlformats.org/officeDocument/2006/relationships">
+  <p:cSld>
+    <p:spTree>
+      <p:nvGrpSpPr>
+        <p:cNvPr id="1" name=""/>
+        <p:cNvGrpSpPr/>
+        <p:nvPr/>
+      </p:nvGrpSpPr>
+      <p:grpSpPr>
+        <a:xfrm>
+          <a:off x="0" y="0"/>
+          <a:ext cx="0" cy="0"/>
+          <a:chOff x="0" y="0"/>
+          <a:chExt cx="0" cy="0"/>
+        </a:xfrm>
+      </p:grpSpPr>
+      <p:sp>
+        <p:nvSpPr>
+          <p:cNvPr id="2" name="Slide Image Placeholder 1"/>
+          <p:cNvSpPr>
+            <a:spLocks noGrp="1"/>
+          </p:cNvSpPr>
+          <p:nvPr>
+            <p:ph type="sldImg" idx="2"/>
+          </p:nvPr>
+        </p:nvSpPr>
+        <p:spPr/>
+      </p:sp>
+      <p:sp>
+        <p:nvSpPr>
+          <p:cNvPr id="3" name="Notes Placeholder 2"/>
+          <p:cNvSpPr>
+            <a:spLocks noGrp="1"/>
+          </p:cNvSpPr>
+          <p:nvPr>
+            <p:ph type="body" idx="1"/>
+          </p:nvPr>
+        </p:nvSpPr>
+        <p:spPr/>
+        <p:txBody>
+          <a:bodyPr/>
+          <a:lstStyle/>
+          <a:p>
+            <a:r>
+              <a:t>Birds0 calls Box2D from Game1. Point at the conversions: divide, multiply, flip y, everywhere.</a:t>
+            </a:r>
+          </a:p>
+          <a:p>
+            <a:r>
+              <a:t>Ask: what happens when we add a second kind of block? The same lines again.</a:t>
+            </a:r>
+          </a:p>
+        </p:txBody>
+      </p:sp>
+    </p:spTree>
+  </p:cSld>
+  <p:clrMapOvr>
+    <a:masterClrMapping/>
+  </p:clrMapOvr>
+</p:notes>
+</file>
+
+<file path=ppt/notesSlides/notesSlide14.xml><?xml version="1.0" encoding="utf-8"?>
+<p:notes xmlns:a="http://schemas.openxmlformats.org/drawingml/2006/main" xmlns:p="http://schemas.openxmlformats.org/presentationml/2006/main" xmlns:r="http://schemas.openxmlformats.org/officeDocument/2006/relationships">
+  <p:cSld>
+    <p:spTree>
+      <p:nvGrpSpPr>
+        <p:cNvPr id="1" name=""/>
+        <p:cNvGrpSpPr/>
+        <p:nvPr/>
+      </p:nvGrpSpPr>
+      <p:grpSpPr>
+        <a:xfrm>
+          <a:off x="0" y="0"/>
+          <a:ext cx="0" cy="0"/>
+          <a:chOff x="0" y="0"/>
+          <a:chExt cx="0" cy="0"/>
+        </a:xfrm>
+      </p:grpSpPr>
+      <p:sp>
+        <p:nvSpPr>
+          <p:cNvPr id="2" name="Slide Image Placeholder 1"/>
+          <p:cNvSpPr>
+            <a:spLocks noGrp="1"/>
+          </p:cNvSpPr>
+          <p:nvPr>
+            <p:ph type="sldImg" idx="2"/>
+          </p:nvPr>
+        </p:nvSpPr>
+        <p:spPr/>
+      </p:sp>
+      <p:sp>
+        <p:nvSpPr>
+          <p:cNvPr id="3" name="Notes Placeholder 2"/>
+          <p:cNvSpPr>
+            <a:spLocks noGrp="1"/>
+          </p:cNvSpPr>
+          <p:nvPr>
+            <p:ph type="body" idx="1"/>
+          </p:nvPr>
+        </p:nvSpPr>
+        <p:spPr/>
+        <p:txBody>
+          <a:bodyPr/>
+          <a:lstStyle/>
+          <a:p>
+            <a:r>
+              <a:t>Demo: run Birds0.</a:t>
+            </a:r>
+          </a:p>
+          <a:p>
+            <a:r>
+              <a:t>- Game1 full of Box2D calls and unit conversions</a:t>
+            </a:r>
+          </a:p>
+          <a:p>
+            <a:r>
+              <a:t>- launch a bird: the physics itself works</a:t>
+            </a:r>
+          </a:p>
+        </p:txBody>
+      </p:sp>
+    </p:spTree>
+  </p:cSld>
+  <p:clrMapOvr>
+    <a:masterClrMapping/>
+  </p:clrMapOvr>
+</p:notes>
+</file>
+
+<file path=ppt/notesSlides/notesSlide15.xml><?xml version="1.0" encoding="utf-8"?>
+<p:notes xmlns:a="http://schemas.openxmlformats.org/drawingml/2006/main" xmlns:p="http://schemas.openxmlformats.org/presentationml/2006/main" xmlns:r="http://schemas.openxmlformats.org/officeDocument/2006/relationships">
+  <p:cSld>
+    <p:spTree>
+      <p:nvGrpSpPr>
+        <p:cNvPr id="1" name=""/>
+        <p:cNvGrpSpPr/>
+        <p:nvPr/>
+      </p:nvGrpSpPr>
+      <p:grpSpPr>
+        <a:xfrm>
+          <a:off x="0" y="0"/>
+          <a:ext cx="0" cy="0"/>
+          <a:chOff x="0" y="0"/>
+          <a:chExt cx="0" cy="0"/>
+        </a:xfrm>
+      </p:grpSpPr>
+      <p:sp>
+        <p:nvSpPr>
+          <p:cNvPr id="2" name="Slide Image Placeholder 1"/>
+          <p:cNvSpPr>
+            <a:spLocks noGrp="1"/>
+          </p:cNvSpPr>
+          <p:nvPr>
+            <p:ph type="sldImg" idx="2"/>
+          </p:nvPr>
+        </p:nvSpPr>
+        <p:spPr/>
+      </p:sp>
+      <p:sp>
+        <p:nvSpPr>
+          <p:cNvPr id="3" name="Notes Placeholder 2"/>
+          <p:cNvSpPr>
+            <a:spLocks noGrp="1"/>
+          </p:cNvSpPr>
+          <p:nvPr>
+            <p:ph type="body" idx="1"/>
+          </p:nvPr>
+        </p:nvSpPr>
+        <p:spPr/>
+        <p:txBody>
+          <a:bodyPr/>
+          <a:lstStyle/>
+          <a:p>
+            <a:r>
+              <a:t>PhysicsBody wraps a Box2D body: positions in pixels, rotation turning like SpriteBatch. Every conversion in one place.</a:t>
+            </a:r>
+          </a:p>
+        </p:txBody>
+      </p:sp>
+    </p:spTree>
+  </p:cSld>
+  <p:clrMapOvr>
+    <a:masterClrMapping/>
+  </p:clrMapOvr>
+</p:notes>
+</file>
+
+<file path=ppt/notesSlides/notesSlide16.xml><?xml version="1.0" encoding="utf-8"?>
+<p:notes xmlns:a="http://schemas.openxmlformats.org/drawingml/2006/main" xmlns:p="http://schemas.openxmlformats.org/presentationml/2006/main" xmlns:r="http://schemas.openxmlformats.org/officeDocument/2006/relationships">
+  <p:cSld>
+    <p:spTree>
+      <p:nvGrpSpPr>
+        <p:cNvPr id="1" name=""/>
+        <p:cNvGrpSpPr/>
+        <p:nvPr/>
+      </p:nvGrpSpPr>
+      <p:grpSpPr>
+        <a:xfrm>
+          <a:off x="0" y="0"/>
+          <a:ext cx="0" cy="0"/>
+          <a:chOff x="0" y="0"/>
+          <a:chExt cx="0" cy="0"/>
+        </a:xfrm>
+      </p:grpSpPr>
+      <p:sp>
+        <p:nvSpPr>
+          <p:cNvPr id="2" name="Slide Image Placeholder 1"/>
+          <p:cNvSpPr>
+            <a:spLocks noGrp="1"/>
+          </p:cNvSpPr>
+          <p:nvPr>
+            <p:ph type="sldImg" idx="2"/>
+          </p:nvPr>
+        </p:nvSpPr>
+        <p:spPr/>
+      </p:sp>
+      <p:sp>
+        <p:nvSpPr>
+          <p:cNvPr id="3" name="Notes Placeholder 2"/>
+          <p:cNvSpPr>
+            <a:spLocks noGrp="1"/>
+          </p:cNvSpPr>
+          <p:nvPr>
+            <p:ph type="body" idx="1"/>
+          </p:nvPr>
+        </p:nvSpPr>
+        <p:spPr/>
+        <p:txBody>
+          <a:bodyPr/>
+          <a:lstStyle/>
+          <a:p>
+            <a:r>
+              <a:t>The game reads like our game again. The cost: every new physics feature goes through the facade first.</a:t>
+            </a:r>
+          </a:p>
+        </p:txBody>
+      </p:sp>
+    </p:spTree>
+  </p:cSld>
+  <p:clrMapOvr>
+    <a:masterClrMapping/>
+  </p:clrMapOvr>
+</p:notes>
+</file>
+
+<file path=ppt/notesSlides/notesSlide17.xml><?xml version="1.0" encoding="utf-8"?>
+<p:notes xmlns:a="http://schemas.openxmlformats.org/drawingml/2006/main" xmlns:p="http://schemas.openxmlformats.org/presentationml/2006/main" xmlns:r="http://schemas.openxmlformats.org/officeDocument/2006/relationships">
+  <p:cSld>
+    <p:spTree>
+      <p:nvGrpSpPr>
+        <p:cNvPr id="1" name=""/>
+        <p:cNvGrpSpPr/>
+        <p:nvPr/>
+      </p:nvGrpSpPr>
+      <p:grpSpPr>
+        <a:xfrm>
+          <a:off x="0" y="0"/>
+          <a:ext cx="0" cy="0"/>
+          <a:chOff x="0" y="0"/>
+          <a:chExt cx="0" cy="0"/>
+        </a:xfrm>
+      </p:grpSpPr>
+      <p:sp>
+        <p:nvSpPr>
+          <p:cNvPr id="2" name="Slide Image Placeholder 1"/>
+          <p:cNvSpPr>
+            <a:spLocks noGrp="1"/>
+          </p:cNvSpPr>
+          <p:nvPr>
+            <p:ph type="sldImg" idx="2"/>
+          </p:nvPr>
+        </p:nvSpPr>
+        <p:spPr/>
+      </p:sp>
+      <p:sp>
+        <p:nvSpPr>
+          <p:cNvPr id="3" name="Notes Placeholder 2"/>
+          <p:cNvSpPr>
+            <a:spLocks noGrp="1"/>
+          </p:cNvSpPr>
+          <p:nvPr>
+            <p:ph type="body" idx="1"/>
+          </p:nvPr>
+        </p:nvSpPr>
+        <p:spPr/>
+        <p:txBody>
+          <a:bodyPr/>
+          <a:lstStyle/>
+          <a:p>
+            <a:r>
+              <a:t>Demo: open Birds0 and Birds1 side by side (a diff tool, or two editor panes), then run Birds1.</a:t>
+            </a:r>
+          </a:p>
+          <a:p>
+            <a:r>
+              <a:t>- Physics/: PhysicsWorld, PhysicsBody, Units</a:t>
+            </a:r>
+          </a:p>
+          <a:p>
+            <a:r>
+              <a:t>- Game1 no longer mentions Box2D</a:t>
+            </a:r>
+          </a:p>
+        </p:txBody>
+      </p:sp>
+    </p:spTree>
+  </p:cSld>
+  <p:clrMapOvr>
+    <a:masterClrMapping/>
+  </p:clrMapOvr>
+</p:notes>
+</file>
+
+<file path=ppt/notesSlides/notesSlide18.xml><?xml version="1.0" encoding="utf-8"?>
+<p:notes xmlns:a="http://schemas.openxmlformats.org/drawingml/2006/main" xmlns:p="http://schemas.openxmlformats.org/presentationml/2006/main" xmlns:r="http://schemas.openxmlformats.org/officeDocument/2006/relationships">
+  <p:cSld>
+    <p:spTree>
+      <p:nvGrpSpPr>
+        <p:cNvPr id="1" name=""/>
+        <p:cNvGrpSpPr/>
+        <p:nvPr/>
+      </p:nvGrpSpPr>
+      <p:grpSpPr>
+        <a:xfrm>
+          <a:off x="0" y="0"/>
+          <a:ext cx="0" cy="0"/>
+          <a:chOff x="0" y="0"/>
+          <a:chExt cx="0" cy="0"/>
+        </a:xfrm>
+      </p:grpSpPr>
+      <p:sp>
+        <p:nvSpPr>
+          <p:cNvPr id="2" name="Slide Image Placeholder 1"/>
+          <p:cNvSpPr>
+            <a:spLocks noGrp="1"/>
+          </p:cNvSpPr>
+          <p:nvPr>
+            <p:ph type="sldImg" idx="2"/>
+          </p:nvPr>
+        </p:nvSpPr>
+        <p:spPr/>
+      </p:sp>
+      <p:sp>
+        <p:nvSpPr>
+          <p:cNvPr id="3" name="Notes Placeholder 2"/>
+          <p:cNvSpPr>
+            <a:spLocks noGrp="1"/>
+          </p:cNvSpPr>
+          <p:nvPr>
+            <p:ph type="body" idx="1"/>
+          </p:nvPr>
+        </p:nvSpPr>
+        <p:spPr/>
+        <p:txBody>
+          <a:bodyPr/>
+          <a:lstStyle/>
+          <a:p>
+            <a:r>
+              <a:t>Box2D collects hits during a step; we read them afterwards and raise a C# event in our own terms: two bodies and a speed.</a:t>
+            </a:r>
+          </a:p>
+        </p:txBody>
+      </p:sp>
+    </p:spTree>
+  </p:cSld>
+  <p:clrMapOvr>
+    <a:masterClrMapping/>
+  </p:clrMapOvr>
+</p:notes>
+</file>
+
+<file path=ppt/notesSlides/notesSlide19.xml><?xml version="1.0" encoding="utf-8"?>
+<p:notes xmlns:a="http://schemas.openxmlformats.org/drawingml/2006/main" xmlns:p="http://schemas.openxmlformats.org/presentationml/2006/main" xmlns:r="http://schemas.openxmlformats.org/officeDocument/2006/relationships">
+  <p:cSld>
+    <p:spTree>
+      <p:nvGrpSpPr>
+        <p:cNvPr id="1" name=""/>
+        <p:cNvGrpSpPr/>
+        <p:nvPr/>
+      </p:nvGrpSpPr>
+      <p:grpSpPr>
+        <a:xfrm>
+          <a:off x="0" y="0"/>
+          <a:ext cx="0" cy="0"/>
+          <a:chOff x="0" y="0"/>
+          <a:chExt cx="0" cy="0"/>
+        </a:xfrm>
+      </p:grpSpPr>
+      <p:sp>
+        <p:nvSpPr>
+          <p:cNvPr id="2" name="Slide Image Placeholder 1"/>
+          <p:cNvSpPr>
+            <a:spLocks noGrp="1"/>
+          </p:cNvSpPr>
+          <p:nvPr>
+            <p:ph type="sldImg" idx="2"/>
+          </p:nvPr>
+        </p:nvSpPr>
+        <p:spPr/>
+      </p:sp>
+      <p:sp>
+        <p:nvSpPr>
+          <p:cNvPr id="3" name="Notes Placeholder 2"/>
+          <p:cNvSpPr>
+            <a:spLocks noGrp="1"/>
+          </p:cNvSpPr>
+          <p:nvPr>
+            <p:ph type="body" idx="1"/>
+          </p:nvPr>
+        </p:nvSpPr>
+        <p:spPr/>
+        <p:txBody>
+          <a:bodyPr/>
+          <a:lstStyle/>
+          <a:p>
+            <a:r>
+              <a:t>Ask: why not destroy the body in the hit handler? More hits may be about it, the library may crash, and you may be looping over the list.</a:t>
+            </a:r>
+          </a:p>
+          <a:p>
+            <a:r>
+              <a:t>Mark now, remove after the step, looping backwards.</a:t>
             </a:r>
           </a:p>
         </p:txBody>
@@ -1144,19 +1569,339 @@
           </a:bodyPr>
           <a:lstStyle/>
           <a:p>
-            <a:pPr indent="0" lvl="0" marL="0" rtl="0" algn="l">
-              <a:spcBef>
-                <a:spcPts val="0"/>
-              </a:spcBef>
-              <a:spcAft>
-                <a:spcPts val="0"/>
-              </a:spcAft>
-              <a:buNone/>
-            </a:pPr>
-            <a:r>
-              <a:t/>
-            </a:r>
-            <a:endParaRPr/>
+            <a:r>
+              <a:t>Run Birds4 and play it for a minute.</a:t>
+            </a:r>
+          </a:p>
+          <a:p>
+            <a:r>
+              <a:t>Ask: what would you need to build this? Collect answers on the board, and come back to them at the end.</a:t>
+            </a:r>
+          </a:p>
+        </p:txBody>
+      </p:sp>
+    </p:spTree>
+  </p:cSld>
+  <p:clrMapOvr>
+    <a:masterClrMapping/>
+  </p:clrMapOvr>
+</p:notes>
+</file>
+
+<file path=ppt/notesSlides/notesSlide20.xml><?xml version="1.0" encoding="utf-8"?>
+<p:notes xmlns:a="http://schemas.openxmlformats.org/drawingml/2006/main" xmlns:p="http://schemas.openxmlformats.org/presentationml/2006/main" xmlns:r="http://schemas.openxmlformats.org/officeDocument/2006/relationships">
+  <p:cSld>
+    <p:spTree>
+      <p:nvGrpSpPr>
+        <p:cNvPr id="1" name=""/>
+        <p:cNvGrpSpPr/>
+        <p:nvPr/>
+      </p:nvGrpSpPr>
+      <p:grpSpPr>
+        <a:xfrm>
+          <a:off x="0" y="0"/>
+          <a:ext cx="0" cy="0"/>
+          <a:chOff x="0" y="0"/>
+          <a:chExt cx="0" cy="0"/>
+        </a:xfrm>
+      </p:grpSpPr>
+      <p:sp>
+        <p:nvSpPr>
+          <p:cNvPr id="2" name="Slide Image Placeholder 1"/>
+          <p:cNvSpPr>
+            <a:spLocks noGrp="1"/>
+          </p:cNvSpPr>
+          <p:nvPr>
+            <p:ph type="sldImg" idx="2"/>
+          </p:nvPr>
+        </p:nvSpPr>
+        <p:spPr/>
+      </p:sp>
+      <p:sp>
+        <p:nvSpPr>
+          <p:cNvPr id="3" name="Notes Placeholder 2"/>
+          <p:cNvSpPr>
+            <a:spLocks noGrp="1"/>
+          </p:cNvSpPr>
+          <p:nvPr>
+            <p:ph type="body" idx="1"/>
+          </p:nvPr>
+        </p:nvSpPr>
+        <p:spPr/>
+        <p:txBody>
+          <a:bodyPr/>
+          <a:lstStyle/>
+          <a:p>
+            <a:r>
+              <a:t>Demo: open Birds1 and Birds2 side by side (a diff tool, or two editor panes), then run Birds2.</a:t>
+            </a:r>
+          </a:p>
+          <a:p>
+            <a:r>
+              <a:t>- the Hit event on PhysicsWorld</a:t>
+            </a:r>
+          </a:p>
+          <a:p>
+            <a:r>
+              <a:t>- damage in the handler, removal after the step</a:t>
+            </a:r>
+          </a:p>
+          <a:p>
+            <a:r>
+              <a:t>- glass breaks, stone barely</a:t>
+            </a:r>
+          </a:p>
+        </p:txBody>
+      </p:sp>
+    </p:spTree>
+  </p:cSld>
+  <p:clrMapOvr>
+    <a:masterClrMapping/>
+  </p:clrMapOvr>
+</p:notes>
+</file>
+
+<file path=ppt/notesSlides/notesSlide21.xml><?xml version="1.0" encoding="utf-8"?>
+<p:notes xmlns:a="http://schemas.openxmlformats.org/drawingml/2006/main" xmlns:p="http://schemas.openxmlformats.org/presentationml/2006/main" xmlns:r="http://schemas.openxmlformats.org/officeDocument/2006/relationships">
+  <p:cSld>
+    <p:spTree>
+      <p:nvGrpSpPr>
+        <p:cNvPr id="1" name=""/>
+        <p:cNvGrpSpPr/>
+        <p:nvPr/>
+      </p:nvGrpSpPr>
+      <p:grpSpPr>
+        <a:xfrm>
+          <a:off x="0" y="0"/>
+          <a:ext cx="0" cy="0"/>
+          <a:chOff x="0" y="0"/>
+          <a:chExt cx="0" cy="0"/>
+        </a:xfrm>
+      </p:grpSpPr>
+      <p:sp>
+        <p:nvSpPr>
+          <p:cNvPr id="2" name="Slide Image Placeholder 1"/>
+          <p:cNvSpPr>
+            <a:spLocks noGrp="1"/>
+          </p:cNvSpPr>
+          <p:nvPr>
+            <p:ph type="sldImg" idx="2"/>
+          </p:nvPr>
+        </p:nvSpPr>
+        <p:spPr/>
+      </p:sp>
+      <p:sp>
+        <p:nvSpPr>
+          <p:cNvPr id="3" name="Notes Placeholder 2"/>
+          <p:cNvSpPr>
+            <a:spLocks noGrp="1"/>
+          </p:cNvSpPr>
+          <p:nvPr>
+            <p:ph type="body" idx="1"/>
+          </p:nvPr>
+        </p:nvSpPr>
+        <p:spPr/>
+        <p:txBody>
+          <a:bodyPr/>
+          <a:lstStyle/>
+          <a:p>
+            <a:r>
+              <a:t>Make new objects by copying a configured one. A big pig is a Pig with a bigger radius, not a subclass.</a:t>
+            </a:r>
+          </a:p>
+        </p:txBody>
+      </p:sp>
+    </p:spTree>
+  </p:cSld>
+  <p:clrMapOvr>
+    <a:masterClrMapping/>
+  </p:clrMapOvr>
+</p:notes>
+</file>
+
+<file path=ppt/notesSlides/notesSlide22.xml><?xml version="1.0" encoding="utf-8"?>
+<p:notes xmlns:a="http://schemas.openxmlformats.org/drawingml/2006/main" xmlns:p="http://schemas.openxmlformats.org/presentationml/2006/main" xmlns:r="http://schemas.openxmlformats.org/officeDocument/2006/relationships">
+  <p:cSld>
+    <p:spTree>
+      <p:nvGrpSpPr>
+        <p:cNvPr id="1" name=""/>
+        <p:cNvGrpSpPr/>
+        <p:nvPr/>
+      </p:nvGrpSpPr>
+      <p:grpSpPr>
+        <a:xfrm>
+          <a:off x="0" y="0"/>
+          <a:ext cx="0" cy="0"/>
+          <a:chOff x="0" y="0"/>
+          <a:chExt cx="0" cy="0"/>
+        </a:xfrm>
+      </p:grpSpPr>
+      <p:sp>
+        <p:nvSpPr>
+          <p:cNvPr id="2" name="Slide Image Placeholder 1"/>
+          <p:cNvSpPr>
+            <a:spLocks noGrp="1"/>
+          </p:cNvSpPr>
+          <p:nvPr>
+            <p:ph type="sldImg" idx="2"/>
+          </p:nvPr>
+        </p:nvSpPr>
+        <p:spPr/>
+      </p:sp>
+      <p:sp>
+        <p:nvSpPr>
+          <p:cNvPr id="3" name="Notes Placeholder 2"/>
+          <p:cNvSpPr>
+            <a:spLocks noGrp="1"/>
+          </p:cNvSpPr>
+          <p:nvPr>
+            <p:ph type="body" idx="1"/>
+          </p:nvPr>
+        </p:nvSpPr>
+        <p:spPr/>
+        <p:txBody>
+          <a:bodyPr/>
+          <a:lstStyle/>
+          <a:p>
+            <a:r>
+              <a:t>A level is prefab names and positions: levels as data again.</a:t>
+            </a:r>
+          </a:p>
+          <a:p>
+            <a:r>
+              <a:t>MemberwiseClone is shallow: sharing a sprite is fine, sharing a body means two blocks move as one. That’s why Clone clears Body.</a:t>
+            </a:r>
+          </a:p>
+        </p:txBody>
+      </p:sp>
+    </p:spTree>
+  </p:cSld>
+  <p:clrMapOvr>
+    <a:masterClrMapping/>
+  </p:clrMapOvr>
+</p:notes>
+</file>
+
+<file path=ppt/notesSlides/notesSlide23.xml><?xml version="1.0" encoding="utf-8"?>
+<p:notes xmlns:a="http://schemas.openxmlformats.org/drawingml/2006/main" xmlns:p="http://schemas.openxmlformats.org/presentationml/2006/main" xmlns:r="http://schemas.openxmlformats.org/officeDocument/2006/relationships">
+  <p:cSld>
+    <p:spTree>
+      <p:nvGrpSpPr>
+        <p:cNvPr id="1" name=""/>
+        <p:cNvGrpSpPr/>
+        <p:nvPr/>
+      </p:nvGrpSpPr>
+      <p:grpSpPr>
+        <a:xfrm>
+          <a:off x="0" y="0"/>
+          <a:ext cx="0" cy="0"/>
+          <a:chOff x="0" y="0"/>
+          <a:chExt cx="0" cy="0"/>
+        </a:xfrm>
+      </p:grpSpPr>
+      <p:sp>
+        <p:nvSpPr>
+          <p:cNvPr id="2" name="Slide Image Placeholder 1"/>
+          <p:cNvSpPr>
+            <a:spLocks noGrp="1"/>
+          </p:cNvSpPr>
+          <p:nvPr>
+            <p:ph type="sldImg" idx="2"/>
+          </p:nvPr>
+        </p:nvSpPr>
+        <p:spPr/>
+      </p:sp>
+      <p:sp>
+        <p:nvSpPr>
+          <p:cNvPr id="3" name="Notes Placeholder 2"/>
+          <p:cNvSpPr>
+            <a:spLocks noGrp="1"/>
+          </p:cNvSpPr>
+          <p:nvPr>
+            <p:ph type="body" idx="1"/>
+          </p:nvPr>
+        </p:nvSpPr>
+        <p:spPr/>
+        <p:txBody>
+          <a:bodyPr/>
+          <a:lstStyle/>
+          <a:p>
+            <a:r>
+              <a:t>Demo: open Birds2 and Birds3 side by side (a diff tool, or two editor panes), then run Birds3.</a:t>
+            </a:r>
+          </a:p>
+          <a:p>
+            <a:r>
+              <a:t>- Prefabs.cs</a:t>
+            </a:r>
+          </a:p>
+          <a:p>
+            <a:r>
+              <a:t>- level1.txt</a:t>
+            </a:r>
+          </a:p>
+          <a:p>
+            <a:r>
+              <a:t>- change a line in the level file and run again</a:t>
+            </a:r>
+          </a:p>
+        </p:txBody>
+      </p:sp>
+    </p:spTree>
+  </p:cSld>
+  <p:clrMapOvr>
+    <a:masterClrMapping/>
+  </p:clrMapOvr>
+</p:notes>
+</file>
+
+<file path=ppt/notesSlides/notesSlide24.xml><?xml version="1.0" encoding="utf-8"?>
+<p:notes xmlns:a="http://schemas.openxmlformats.org/drawingml/2006/main" xmlns:p="http://schemas.openxmlformats.org/presentationml/2006/main" xmlns:r="http://schemas.openxmlformats.org/officeDocument/2006/relationships">
+  <p:cSld>
+    <p:spTree>
+      <p:nvGrpSpPr>
+        <p:cNvPr id="1" name=""/>
+        <p:cNvGrpSpPr/>
+        <p:nvPr/>
+      </p:nvGrpSpPr>
+      <p:grpSpPr>
+        <a:xfrm>
+          <a:off x="0" y="0"/>
+          <a:ext cx="0" cy="0"/>
+          <a:chOff x="0" y="0"/>
+          <a:chExt cx="0" cy="0"/>
+        </a:xfrm>
+      </p:grpSpPr>
+      <p:sp>
+        <p:nvSpPr>
+          <p:cNvPr id="2" name="Slide Image Placeholder 1"/>
+          <p:cNvSpPr>
+            <a:spLocks noGrp="1"/>
+          </p:cNvSpPr>
+          <p:nvPr>
+            <p:ph type="sldImg" idx="2"/>
+          </p:nvPr>
+        </p:nvSpPr>
+        <p:spPr/>
+      </p:sp>
+      <p:sp>
+        <p:nvSpPr>
+          <p:cNvPr id="3" name="Notes Placeholder 2"/>
+          <p:cNvSpPr>
+            <a:spLocks noGrp="1"/>
+          </p:cNvSpPr>
+          <p:nvPr>
+            <p:ph type="body" idx="1"/>
+          </p:nvPr>
+        </p:nvSpPr>
+        <p:spPr/>
+        <p:txBody>
+          <a:bodyPr/>
+          <a:lstStyle/>
+          <a:p>
+            <a:r>
+              <a:t>Unit-test the conversions; and try swapping the library, counting the files that change.</a:t>
+            </a:r>
           </a:p>
         </p:txBody>
       </p:sp>
@@ -1243,19 +1988,72 @@
           </a:bodyPr>
           <a:lstStyle/>
           <a:p>
-            <a:pPr indent="0" lvl="0" marL="0" rtl="0" algn="l">
-              <a:spcBef>
-                <a:spcPts val="0"/>
-              </a:spcBef>
-              <a:spcAft>
-                <a:spcPts val="0"/>
-              </a:spcAft>
-              <a:buNone/>
-            </a:pPr>
-            <a:r>
-              <a:t/>
-            </a:r>
-            <a:endParaRPr/>
+            <a:r>
+              <a:t>Demo: play a level of Birds4. Press F1 mid-flight to show the bodies (awake green, asleep blue).</a:t>
+            </a:r>
+          </a:p>
+        </p:txBody>
+      </p:sp>
+    </p:spTree>
+  </p:cSld>
+  <p:clrMapOvr>
+    <a:masterClrMapping/>
+  </p:clrMapOvr>
+</p:notes>
+</file>
+
+<file path=ppt/notesSlides/notesSlide26.xml><?xml version="1.0" encoding="utf-8"?>
+<p:notes xmlns:a="http://schemas.openxmlformats.org/drawingml/2006/main" xmlns:p="http://schemas.openxmlformats.org/presentationml/2006/main" xmlns:r="http://schemas.openxmlformats.org/officeDocument/2006/relationships">
+  <p:cSld>
+    <p:spTree>
+      <p:nvGrpSpPr>
+        <p:cNvPr id="1" name=""/>
+        <p:cNvGrpSpPr/>
+        <p:nvPr/>
+      </p:nvGrpSpPr>
+      <p:grpSpPr>
+        <a:xfrm>
+          <a:off x="0" y="0"/>
+          <a:ext cx="0" cy="0"/>
+          <a:chOff x="0" y="0"/>
+          <a:chExt cx="0" cy="0"/>
+        </a:xfrm>
+      </p:grpSpPr>
+      <p:sp>
+        <p:nvSpPr>
+          <p:cNvPr id="2" name="Slide Image Placeholder 1"/>
+          <p:cNvSpPr>
+            <a:spLocks noGrp="1"/>
+          </p:cNvSpPr>
+          <p:nvPr>
+            <p:ph type="sldImg" idx="2"/>
+          </p:nvPr>
+        </p:nvSpPr>
+        <p:spPr/>
+      </p:sp>
+      <p:sp>
+        <p:nvSpPr>
+          <p:cNvPr id="3" name="Notes Placeholder 2"/>
+          <p:cNvSpPr>
+            <a:spLocks noGrp="1"/>
+          </p:cNvSpPr>
+          <p:nvPr>
+            <p:ph type="body" idx="1"/>
+          </p:nvPr>
+        </p:nvSpPr>
+        <p:spPr/>
+        <p:txBody>
+          <a:bodyPr/>
+          <a:lstStyle/>
+          <a:p>
+            <a:r>
+              <a:t>Give the project groups five minutes with these questions.</a:t>
+            </a:r>
+          </a:p>
+          <a:p>
+            <a:r>
+              <a:t>Ask two groups to share one answer each. Push for concrete classes and files, not intentions.</a:t>
+            </a:r>
           </a:p>
         </p:txBody>
       </p:sp>
@@ -1342,19 +2140,9 @@
           </a:bodyPr>
           <a:lstStyle/>
           <a:p>
-            <a:pPr indent="0" lvl="0" marL="0" rtl="0" algn="l">
-              <a:spcBef>
-                <a:spcPts val="0"/>
-              </a:spcBef>
-              <a:spcAft>
-                <a:spcPts val="0"/>
-              </a:spcAft>
-              <a:buNone/>
-            </a:pPr>
-            <a:r>
-              <a:t/>
-            </a:r>
-            <a:endParaRPr/>
+            <a:r>
+              <a:t>The main topic: using a third-party library without letting it spread through your code. Adapter and Facade, two worlds, contact events, and Prototype.</a:t>
+            </a:r>
           </a:p>
         </p:txBody>
       </p:sp>
@@ -1441,19 +2229,9 @@
           </a:bodyPr>
           <a:lstStyle/>
           <a:p>
-            <a:pPr indent="0" lvl="0" marL="0" rtl="0" algn="l">
-              <a:spcBef>
-                <a:spcPts val="0"/>
-              </a:spcBef>
-              <a:spcAft>
-                <a:spcPts val="0"/>
-              </a:spcAft>
-              <a:buNone/>
-            </a:pPr>
-            <a:r>
-              <a:t/>
-            </a:r>
-            <a:endParaRPr/>
+            <a:r>
+              <a:t>Start from Birds4. For the TNT exercise, the question is what the facade must offer, while Box2D stays inside it.</a:t>
+            </a:r>
           </a:p>
         </p:txBody>
       </p:sp>
@@ -1541,37 +2319,70 @@
           <a:lstStyle/>
           <a:p>
             <a:r>
-              <a:t>Talking points:</a:t>
-            </a:r>
-          </a:p>
-          <a:p>
-            <a:r>
-              <a:t>- All Source code for today’s game can be found here:</a:t>
-            </a:r>
-          </a:p>
-          <a:p>
-            <a:r>
-              <a:t>  - github.com/Metamate/gar-games (folder 07-angry-birds)</a:t>
-            </a:r>
-          </a:p>
-          <a:p>
-            <a:r>
-              <a:t>- The game is built up in steps: Birds0 → Birds4</a:t>
-            </a:r>
-          </a:p>
-          <a:p>
-            <a:r>
-              <a:t>  - Each step is a separate project that adds one concept</a:t>
-            </a:r>
-          </a:p>
-          <a:p>
-            <a:r>
-              <a:t>  - Compare neighbouring steps to see exactly what changed</a:t>
-            </a:r>
-          </a:p>
-          <a:p>
-            <a:r>
-              <a:t>- Birds4 is the finished game, and the starting point for the exercises</a:t>
+              <a:t>Open gar-games/07-angry-birds live. Show the README: the step table, the code map, how to run a step.</a:t>
+            </a:r>
+          </a:p>
+          <a:p>
+            <a:r>
+              <a:t>Say: the site explains the ideas, the README helps you find them in the code, the slides are for today.</a:t>
+            </a:r>
+          </a:p>
+        </p:txBody>
+      </p:sp>
+    </p:spTree>
+  </p:cSld>
+  <p:clrMapOvr>
+    <a:masterClrMapping/>
+  </p:clrMapOvr>
+</p:notes>
+</file>
+
+<file path=ppt/notesSlides/notesSlide6.xml><?xml version="1.0" encoding="utf-8"?>
+<p:notes xmlns:a="http://schemas.openxmlformats.org/drawingml/2006/main" xmlns:p="http://schemas.openxmlformats.org/presentationml/2006/main" xmlns:r="http://schemas.openxmlformats.org/officeDocument/2006/relationships">
+  <p:cSld>
+    <p:spTree>
+      <p:nvGrpSpPr>
+        <p:cNvPr id="1" name=""/>
+        <p:cNvGrpSpPr/>
+        <p:nvPr/>
+      </p:nvGrpSpPr>
+      <p:grpSpPr>
+        <a:xfrm>
+          <a:off x="0" y="0"/>
+          <a:ext cx="0" cy="0"/>
+          <a:chOff x="0" y="0"/>
+          <a:chExt cx="0" cy="0"/>
+        </a:xfrm>
+      </p:grpSpPr>
+      <p:sp>
+        <p:nvSpPr>
+          <p:cNvPr id="2" name="Slide Image Placeholder 1"/>
+          <p:cNvSpPr>
+            <a:spLocks noGrp="1"/>
+          </p:cNvSpPr>
+          <p:nvPr>
+            <p:ph type="sldImg" idx="2"/>
+          </p:nvPr>
+        </p:nvSpPr>
+        <p:spPr/>
+      </p:sp>
+      <p:sp>
+        <p:nvSpPr>
+          <p:cNvPr id="3" name="Notes Placeholder 2"/>
+          <p:cNvSpPr>
+            <a:spLocks noGrp="1"/>
+          </p:cNvSpPr>
+          <p:nvPr>
+            <p:ph type="body" idx="1"/>
+          </p:nvPr>
+        </p:nvSpPr>
+        <p:spPr/>
+        <p:txBody>
+          <a:bodyPr/>
+          <a:lstStyle/>
+          <a:p>
+            <a:r>
+              <a:t>Next milestone by session 09: the self-review. If you use a library, where does it leak into your code?</a:t>
             </a:r>
           </a:p>
         </p:txBody>
@@ -1629,42 +2440,12 @@
           <a:lstStyle/>
           <a:p>
             <a:r>
-              <a:t>Talking points:</a:t>
-            </a:r>
-          </a:p>
-          <a:p>
-            <a:r>
-              <a:t>- Stacks that tip, bounce and break: more than Mario’s physics</a:t>
-            </a:r>
-          </a:p>
-          <a:p>
-            <a:r>
-              <a:t>- Box2D: a 2D physics engine, used in many games</a:t>
-            </a:r>
-          </a:p>
-          <a:p>
-            <a:r>
-              <a:t>  - Box2D.NET: a C# port, added as a NuGet package</a:t>
-            </a:r>
-          </a:p>
-          <a:p>
-            <a:r>
-              <a:t>- A world of bodies</a:t>
-            </a:r>
-          </a:p>
-          <a:p>
-            <a:r>
-              <a:t>  - Each body has shapes: boxes, circles, polygons</a:t>
-            </a:r>
-          </a:p>
-          <a:p>
-            <a:r>
-              <a:t>  - Static bodies never move; dynamic bodies are moved by gravity and collisions</a:t>
-            </a:r>
-          </a:p>
-          <a:p>
-            <a:r>
-              <a:t>- Step the world forward, then read where the bodies are</a:t>
+              <a:t>Tipping, bouncing stacks are far beyond Mario’s physics. Box2D does it for us.</a:t>
+            </a:r>
+          </a:p>
+          <a:p>
+            <a:r>
+              <a:t>The loop: step the world, read where the bodies are, draw the sprites there.</a:t>
             </a:r>
           </a:p>
         </p:txBody>
@@ -1722,37 +2503,12 @@
           <a:lstStyle/>
           <a:p>
             <a:r>
-              <a:t>Talking points:</a:t>
-            </a:r>
-          </a:p>
-          <a:p>
-            <a:r>
-              <a:t>- Box2D is tuned for objects of 0.1 to 10 metres</a:t>
-            </a:r>
-          </a:p>
-          <a:p>
-            <a:r>
-              <a:t>  - A 50-pixel block would be a 50-metre block</a:t>
-            </a:r>
-          </a:p>
-          <a:p>
-            <a:r>
-              <a:t>  - It would fall as slowly as a building</a:t>
-            </a:r>
-          </a:p>
-          <a:p>
-            <a:r>
-              <a:t>- Simulate in metres, draw in pixels: 50 pixels per metre</a:t>
-            </a:r>
-          </a:p>
-          <a:p>
-            <a:r>
-              <a:t>- Box2D turns counter-clockwise, SpriteBatch clockwise</a:t>
-            </a:r>
-          </a:p>
-          <a:p>
-            <a:r>
-              <a:t>- Forget one conversion: a body in the wrong place, or falling up</a:t>
+              <a:t>Box2D is tuned for things 0.1 to 10 metres big. Treat 50 pixels as 50 metres and a block falls like a building.</a:t>
+            </a:r>
+          </a:p>
+          <a:p>
+            <a:r>
+              <a:t>Ask the question: forget one conversion; what do you see? A body in the wrong place, spinning the wrong way, or falling up.</a:t>
             </a:r>
           </a:p>
         </p:txBody>
@@ -1810,37 +2566,17 @@
           <a:lstStyle/>
           <a:p>
             <a:r>
-              <a:t>Talking points:</a:t>
-            </a:r>
-          </a:p>
-          <a:p>
-            <a:r>
-              <a:t>- Adapter: converts an interface into the one its users expect</a:t>
-            </a:r>
-          </a:p>
-          <a:p>
-            <a:r>
-              <a:t>  - PhysicsBody wraps a Box2D body: pixels, clockwise, our types</a:t>
-            </a:r>
-          </a:p>
-          <a:p>
-            <a:r>
-              <a:t>- Facade: one simple interface in front of a subsystem</a:t>
-            </a:r>
-          </a:p>
-          <a:p>
-            <a:r>
-              <a:t>  - Box2D has hundreds of functions; the game needs a handful</a:t>
-            </a:r>
-          </a:p>
-          <a:p>
-            <a:r>
-              <a:t>  - PhysicsWorld: create a box or a circle, step, destroy</a:t>
-            </a:r>
-          </a:p>
-          <a:p>
-            <a:r>
-              <a:t>- The rest of the game never sees a Box2D type</a:t>
+              <a:t>The layers: the game at the top, Box2D at the bottom, and our two classes between.</a:t>
+            </a:r>
+          </a:p>
+          <a:p>
+            <a:r>
+              <a:t>Facade: a small interface in front of a big subsystem. Adapter: converts one interface into the one we expect.</a:t>
+            </a:r>
+          </a:p>
+          <a:p>
+            <a:r>
+              <a:t>Ask the question: swap the library, which files change? Only the Physics folder.</a:t>
             </a:r>
           </a:p>
         </p:txBody>
@@ -13322,6 +14058,179 @@
 </file>
 
 <file path=ppt/slides/slide24.xml><?xml version="1.0" encoding="utf-8"?>
+<p:sld xmlns:a="http://schemas.openxmlformats.org/drawingml/2006/main" xmlns:p="http://schemas.openxmlformats.org/presentationml/2006/main" xmlns:r="http://schemas.openxmlformats.org/officeDocument/2006/relationships">
+  <p:cSld>
+    <p:spTree>
+      <p:nvGrpSpPr>
+        <p:cNvPr id="1" name=""/>
+        <p:cNvGrpSpPr/>
+        <p:nvPr/>
+      </p:nvGrpSpPr>
+      <p:grpSpPr/>
+      <p:sp>
+        <p:nvSpPr>
+          <p:cNvPr id="2" name="Title 1"/>
+          <p:cNvSpPr>
+            <a:spLocks noGrp="1"/>
+          </p:cNvSpPr>
+          <p:nvPr>
+            <p:ph type="title"/>
+          </p:nvPr>
+        </p:nvSpPr>
+        <p:spPr/>
+        <p:txBody>
+          <a:bodyPr/>
+          <a:lstStyle/>
+          <a:p>
+            <a:pPr indent="0" lvl="0" marL="0" rtl="0" algn="l">
+              <a:spcBef>
+                <a:spcPts val="0"/>
+              </a:spcBef>
+              <a:spcAft>
+                <a:spcPts val="0"/>
+              </a:spcAft>
+              <a:buNone/>
+            </a:pPr>
+            <a:r>
+              <a:rPr lang="en"/>
+              <a:t>Check Yourself</a:t>
+            </a:r>
+            <a:endParaRPr/>
+          </a:p>
+        </p:txBody>
+      </p:sp>
+      <p:sp>
+        <p:nvSpPr>
+          <p:cNvPr id="3" name="Text Placeholder 2"/>
+          <p:cNvSpPr>
+            <a:spLocks noGrp="1"/>
+          </p:cNvSpPr>
+          <p:nvPr>
+            <p:ph type="body" idx="1"/>
+          </p:nvPr>
+        </p:nvSpPr>
+        <p:spPr>
+          <a:xfrm>
+            <a:off x="311700" y="885950"/>
+            <a:ext cx="8520600" cy="1719072"/>
+          </a:xfrm>
+        </p:spPr>
+        <p:txBody>
+          <a:bodyPr/>
+          <a:lstStyle/>
+          <a:p>
+            <a:pPr indent="-330200" lvl="0" marL="457200" rtl="0" algn="l">
+              <a:spcBef>
+                <a:spcPts val="0"/>
+              </a:spcBef>
+              <a:spcAft>
+                <a:spcPts val="0"/>
+              </a:spcAft>
+              <a:buSzPts val="1600"/>
+              <a:buChar char="●"/>
+            </a:pPr>
+            <a:r>
+              <a:rPr lang="en"/>
+              <a:t>What is the difference between an Adapter and a Facade?</a:t>
+            </a:r>
+            <a:endParaRPr/>
+          </a:p>
+          <a:p>
+            <a:pPr indent="-330200" lvl="0" marL="457200" rtl="0" algn="l">
+              <a:spcBef>
+                <a:spcPts val="0"/>
+              </a:spcBef>
+              <a:spcAft>
+                <a:spcPts val="0"/>
+              </a:spcAft>
+              <a:buSzPts val="1600"/>
+              <a:buChar char="●"/>
+            </a:pPr>
+            <a:r>
+              <a:rPr lang="en"/>
+              <a:t>Why convert between metres and pixels at all?</a:t>
+            </a:r>
+            <a:endParaRPr/>
+          </a:p>
+          <a:p>
+            <a:pPr indent="-330200" lvl="0" marL="457200" rtl="0" algn="l">
+              <a:spcBef>
+                <a:spcPts val="0"/>
+              </a:spcBef>
+              <a:spcAft>
+                <a:spcPts val="0"/>
+              </a:spcAft>
+              <a:buSzPts val="1600"/>
+              <a:buChar char="●"/>
+            </a:pPr>
+            <a:r>
+              <a:rPr lang="en"/>
+              <a:t>Why not destroy a body inside the hit handler?</a:t>
+            </a:r>
+            <a:endParaRPr/>
+          </a:p>
+          <a:p>
+            <a:pPr indent="-330200" lvl="0" marL="457200" rtl="0" algn="l">
+              <a:spcBef>
+                <a:spcPts val="0"/>
+              </a:spcBef>
+              <a:spcAft>
+                <a:spcPts val="0"/>
+              </a:spcAft>
+              <a:buSzPts val="1600"/>
+              <a:buChar char="●"/>
+            </a:pPr>
+            <a:r>
+              <a:rPr lang="en"/>
+              <a:t>What does a shallow copy share with the original, and why does it matter?</a:t>
+            </a:r>
+            <a:endParaRPr/>
+          </a:p>
+        </p:txBody>
+      </p:sp>
+      <p:sp>
+        <p:nvSpPr>
+          <p:cNvPr id="4" name="TextBox 3"/>
+          <p:cNvSpPr txBox="1"/>
+          <p:nvPr/>
+        </p:nvSpPr>
+        <p:spPr>
+          <a:xfrm>
+            <a:off x="457200" y="3182112"/>
+            <a:ext cx="8229600" cy="457200"/>
+          </a:xfrm>
+          <a:prstGeom prst="rect">
+            <a:avLst/>
+          </a:prstGeom>
+          <a:noFill/>
+        </p:spPr>
+        <p:txBody>
+          <a:bodyPr wrap="square">
+            <a:spAutoFit/>
+          </a:bodyPr>
+          <a:lstStyle/>
+          <a:p>
+            <a:pPr algn="ctr"/>
+            <a:r>
+              <a:rPr sz="1400" b="0" i="0">
+                <a:solidFill>
+                  <a:srgbClr val="9AA3AB"/>
+                </a:solidFill>
+              </a:rPr>
+              <a:t>The answers, and more questions, are on the course site.</a:t>
+            </a:r>
+          </a:p>
+        </p:txBody>
+      </p:sp>
+    </p:spTree>
+  </p:cSld>
+  <p:clrMapOvr>
+    <a:masterClrMapping/>
+  </p:clrMapOvr>
+</p:sld>
+</file>
+
+<file path=ppt/slides/slide25.xml><?xml version="1.0" encoding="utf-8"?>
 <p:sld xmlns:a="http://schemas.openxmlformats.org/drawingml/2006/main" xmlns:r="http://schemas.openxmlformats.org/officeDocument/2006/relationships" xmlns:mc="http://schemas.openxmlformats.org/markup-compatibility/2006" xmlns:mv="urn:schemas-microsoft-com:mac:vml" xmlns:p="http://schemas.openxmlformats.org/presentationml/2006/main" xmlns:c="http://schemas.openxmlformats.org/drawingml/2006/chart" xmlns:dgm="http://schemas.openxmlformats.org/drawingml/2006/diagram" xmlns:o="urn:schemas-microsoft-com:office:office" xmlns:v="urn:schemas-microsoft-com:vml" xmlns:pvml="urn:schemas-microsoft-com:office:powerpoint" xmlns:com="http://schemas.openxmlformats.org/drawingml/2006/compatibility" xmlns:p14="http://schemas.microsoft.com/office/powerpoint/2010/main" xmlns:p15="http://schemas.microsoft.com/office/powerpoint/2012/main" xmlns:ahyp="http://schemas.microsoft.com/office/drawing/2018/hyperlinkcolor">
   <p:cSld>
     <p:spTree>
@@ -14153,7 +15062,7 @@
 </p:sld>
 </file>
 
-<file path=ppt/slides/slide25.xml><?xml version="1.0" encoding="utf-8"?>
+<file path=ppt/slides/slide26.xml><?xml version="1.0" encoding="utf-8"?>
 <p:sld xmlns:a="http://schemas.openxmlformats.org/drawingml/2006/main" xmlns:r="http://schemas.openxmlformats.org/officeDocument/2006/relationships" xmlns:mc="http://schemas.openxmlformats.org/markup-compatibility/2006" xmlns:mv="urn:schemas-microsoft-com:mac:vml" xmlns:p="http://schemas.openxmlformats.org/presentationml/2006/main" xmlns:c="http://schemas.openxmlformats.org/drawingml/2006/chart" xmlns:dgm="http://schemas.openxmlformats.org/drawingml/2006/diagram" xmlns:o="urn:schemas-microsoft-com:office:office" xmlns:v="urn:schemas-microsoft-com:vml" xmlns:pvml="urn:schemas-microsoft-com:office:powerpoint" xmlns:com="http://schemas.openxmlformats.org/drawingml/2006/compatibility" xmlns:p14="http://schemas.microsoft.com/office/powerpoint/2010/main" xmlns:p15="http://schemas.microsoft.com/office/powerpoint/2012/main" xmlns:ahyp="http://schemas.microsoft.com/office/drawing/2018/hyperlinkcolor">
   <p:cSld>
     <p:spTree>
@@ -14299,179 +15208,6 @@
               <a:t>Using a library? Where does it leak into your code?</a:t>
             </a:r>
             <a:endParaRPr/>
-          </a:p>
-        </p:txBody>
-      </p:sp>
-    </p:spTree>
-  </p:cSld>
-  <p:clrMapOvr>
-    <a:masterClrMapping/>
-  </p:clrMapOvr>
-</p:sld>
-</file>
-
-<file path=ppt/slides/slide26.xml><?xml version="1.0" encoding="utf-8"?>
-<p:sld xmlns:a="http://schemas.openxmlformats.org/drawingml/2006/main" xmlns:p="http://schemas.openxmlformats.org/presentationml/2006/main" xmlns:r="http://schemas.openxmlformats.org/officeDocument/2006/relationships">
-  <p:cSld>
-    <p:spTree>
-      <p:nvGrpSpPr>
-        <p:cNvPr id="1" name=""/>
-        <p:cNvGrpSpPr/>
-        <p:nvPr/>
-      </p:nvGrpSpPr>
-      <p:grpSpPr/>
-      <p:sp>
-        <p:nvSpPr>
-          <p:cNvPr id="2" name="Title 1"/>
-          <p:cNvSpPr>
-            <a:spLocks noGrp="1"/>
-          </p:cNvSpPr>
-          <p:nvPr>
-            <p:ph type="title"/>
-          </p:nvPr>
-        </p:nvSpPr>
-        <p:spPr/>
-        <p:txBody>
-          <a:bodyPr/>
-          <a:lstStyle/>
-          <a:p>
-            <a:pPr indent="0" lvl="0" marL="0" rtl="0" algn="l">
-              <a:spcBef>
-                <a:spcPts val="0"/>
-              </a:spcBef>
-              <a:spcAft>
-                <a:spcPts val="0"/>
-              </a:spcAft>
-              <a:buNone/>
-            </a:pPr>
-            <a:r>
-              <a:rPr lang="en"/>
-              <a:t>Check Yourself</a:t>
-            </a:r>
-            <a:endParaRPr/>
-          </a:p>
-        </p:txBody>
-      </p:sp>
-      <p:sp>
-        <p:nvSpPr>
-          <p:cNvPr id="3" name="Text Placeholder 2"/>
-          <p:cNvSpPr>
-            <a:spLocks noGrp="1"/>
-          </p:cNvSpPr>
-          <p:nvPr>
-            <p:ph type="body" idx="1"/>
-          </p:nvPr>
-        </p:nvSpPr>
-        <p:spPr>
-          <a:xfrm>
-            <a:off x="311700" y="885950"/>
-            <a:ext cx="8520600" cy="1719072"/>
-          </a:xfrm>
-        </p:spPr>
-        <p:txBody>
-          <a:bodyPr/>
-          <a:lstStyle/>
-          <a:p>
-            <a:pPr indent="-330200" lvl="0" marL="457200" rtl="0" algn="l">
-              <a:spcBef>
-                <a:spcPts val="0"/>
-              </a:spcBef>
-              <a:spcAft>
-                <a:spcPts val="0"/>
-              </a:spcAft>
-              <a:buSzPts val="1600"/>
-              <a:buChar char="●"/>
-            </a:pPr>
-            <a:r>
-              <a:rPr lang="en"/>
-              <a:t>What is the difference between an Adapter and a Facade?</a:t>
-            </a:r>
-            <a:endParaRPr/>
-          </a:p>
-          <a:p>
-            <a:pPr indent="-330200" lvl="0" marL="457200" rtl="0" algn="l">
-              <a:spcBef>
-                <a:spcPts val="0"/>
-              </a:spcBef>
-              <a:spcAft>
-                <a:spcPts val="0"/>
-              </a:spcAft>
-              <a:buSzPts val="1600"/>
-              <a:buChar char="●"/>
-            </a:pPr>
-            <a:r>
-              <a:rPr lang="en"/>
-              <a:t>Why convert between metres and pixels at all?</a:t>
-            </a:r>
-            <a:endParaRPr/>
-          </a:p>
-          <a:p>
-            <a:pPr indent="-330200" lvl="0" marL="457200" rtl="0" algn="l">
-              <a:spcBef>
-                <a:spcPts val="0"/>
-              </a:spcBef>
-              <a:spcAft>
-                <a:spcPts val="0"/>
-              </a:spcAft>
-              <a:buSzPts val="1600"/>
-              <a:buChar char="●"/>
-            </a:pPr>
-            <a:r>
-              <a:rPr lang="en"/>
-              <a:t>Why not destroy a body inside the hit handler?</a:t>
-            </a:r>
-            <a:endParaRPr/>
-          </a:p>
-          <a:p>
-            <a:pPr indent="-330200" lvl="0" marL="457200" rtl="0" algn="l">
-              <a:spcBef>
-                <a:spcPts val="0"/>
-              </a:spcBef>
-              <a:spcAft>
-                <a:spcPts val="0"/>
-              </a:spcAft>
-              <a:buSzPts val="1600"/>
-              <a:buChar char="●"/>
-            </a:pPr>
-            <a:r>
-              <a:rPr lang="en"/>
-              <a:t>What does a shallow copy share with the original, and why does it matter?</a:t>
-            </a:r>
-            <a:endParaRPr/>
-          </a:p>
-        </p:txBody>
-      </p:sp>
-      <p:sp>
-        <p:nvSpPr>
-          <p:cNvPr id="4" name="TextBox 3"/>
-          <p:cNvSpPr txBox="1"/>
-          <p:nvPr/>
-        </p:nvSpPr>
-        <p:spPr>
-          <a:xfrm>
-            <a:off x="457200" y="3182112"/>
-            <a:ext cx="8229600" cy="457200"/>
-          </a:xfrm>
-          <a:prstGeom prst="rect">
-            <a:avLst/>
-          </a:prstGeom>
-          <a:noFill/>
-        </p:spPr>
-        <p:txBody>
-          <a:bodyPr wrap="square">
-            <a:spAutoFit/>
-          </a:bodyPr>
-          <a:lstStyle/>
-          <a:p>
-            <a:pPr algn="ctr"/>
-            <a:r>
-              <a:rPr sz="1400" b="0" i="0">
-                <a:solidFill>
-                  <a:srgbClr val="9AA3AB"/>
-                </a:solidFill>
-              </a:rPr>
-              <a:t>The answers, and more questions, are on the course site.</a:t>
-            </a:r>
           </a:p>
         </p:txBody>
       </p:sp>

--- a/slides/07 Angry Birds.pptx
+++ b/slides/07 Angry Birds.pptx
@@ -2052,7 +2052,7 @@
           </a:p>
           <a:p>
             <a:r>
-              <a:t>Ask two groups to share one answer each. Push for concrete classes and files, not intentions.</a:t>
+              <a:t>Ask two groups to share one answer each, and push them to name actual classes and files.</a:t>
             </a:r>
           </a:p>
         </p:txBody>
@@ -15794,7 +15794,7 @@
             </a:pPr>
             <a:r>
               <a:rPr lang="en"/>
-              <a:t>Its README: the steps (Birds0 to Birds4), a map of the code, how to run it</a:t>
+              <a:t>Its README: the steps (Birds0 to Birds4), where things are in the code, how to run it</a:t>
             </a:r>
             <a:endParaRPr/>
           </a:p>

--- a/slides/07 Angry Birds.pptx
+++ b/slides/07 Angry Birds.pptx
@@ -9,6 +9,7 @@
   </p:notesMasterIdLst>
   <p:sldIdLst>
     <p:sldId id="256" r:id="rId6"/>
+    <p:sldId id="314" r:id="rId41"/>
     <p:sldId id="257" r:id="rId7"/>
     <p:sldId id="258" r:id="rId8"/>
     <p:sldId id="259" r:id="rId9"/>
@@ -2053,6 +2054,69 @@
           <a:p>
             <a:r>
               <a:t>Ask two groups to share one answer each, and push them to name actual classes and files.</a:t>
+            </a:r>
+          </a:p>
+        </p:txBody>
+      </p:sp>
+    </p:spTree>
+  </p:cSld>
+  <p:clrMapOvr>
+    <a:masterClrMapping/>
+  </p:clrMapOvr>
+</p:notes>
+</file>
+
+<file path=ppt/notesSlides/notesSlide27.xml><?xml version="1.0" encoding="utf-8"?>
+<p:notes xmlns:a="http://schemas.openxmlformats.org/drawingml/2006/main" xmlns:p="http://schemas.openxmlformats.org/presentationml/2006/main" xmlns:r="http://schemas.openxmlformats.org/officeDocument/2006/relationships">
+  <p:cSld>
+    <p:spTree>
+      <p:nvGrpSpPr>
+        <p:cNvPr id="1" name=""/>
+        <p:cNvGrpSpPr/>
+        <p:nvPr/>
+      </p:nvGrpSpPr>
+      <p:grpSpPr>
+        <a:xfrm>
+          <a:off x="0" y="0"/>
+          <a:ext cx="0" cy="0"/>
+          <a:chOff x="0" y="0"/>
+          <a:chExt cx="0" cy="0"/>
+        </a:xfrm>
+      </p:grpSpPr>
+      <p:sp>
+        <p:nvSpPr>
+          <p:cNvPr id="2" name="Slide Image Placeholder 1"/>
+          <p:cNvSpPr>
+            <a:spLocks noGrp="1"/>
+          </p:cNvSpPr>
+          <p:nvPr>
+            <p:ph type="sldImg" idx="2"/>
+          </p:nvPr>
+        </p:nvSpPr>
+        <p:spPr/>
+      </p:sp>
+      <p:sp>
+        <p:nvSpPr>
+          <p:cNvPr id="3" name="Notes Placeholder 2"/>
+          <p:cNvSpPr>
+            <a:spLocks noGrp="1"/>
+          </p:cNvSpPr>
+          <p:nvPr>
+            <p:ph type="body" idx="1"/>
+          </p:nvPr>
+        </p:nvSpPr>
+        <p:spPr/>
+        <p:txBody>
+          <a:bodyPr/>
+          <a:lstStyle/>
+          <a:p>
+            <a:r>
+              <a:t>The original: Angry Birds. Ask who has played it, and what they remember of how it plays.</a:t>
+            </a:r>
+          </a:p>
+          <a:p>
+            <a:r>
+              <a:t>Today we build the parts that matter for the architecture, not the whole game.</a:t>
             </a:r>
           </a:p>
         </p:txBody>
@@ -6262,7 +6326,7 @@
       <p:grpSpPr/>
       <p:sp>
         <p:nvSpPr>
-          <p:cNvPr id="140" name="Google Shape;140;p23"/>
+          <p:cNvPr id="293" name="Google Shape;293;p45"/>
           <p:cNvSpPr txBox="1"/>
           <p:nvPr>
             <p:ph type="title"/>
@@ -6293,25 +6357,33 @@
               <a:buNone/>
             </a:pPr>
             <a:r>
-              <a:rPr lang="en"/>
-              <a:t>The Adapter: PhysicsBody</a:t>
-            </a:r>
-            <a:endParaRPr/>
+              <a:rPr lang="en">
+                <a:solidFill>
+                  <a:schemeClr val="accent5"/>
+                </a:solidFill>
+              </a:rPr>
+              <a:t>Adapter &amp; Facade</a:t>
+            </a:r>
+            <a:endParaRPr>
+              <a:solidFill>
+                <a:schemeClr val="accent5"/>
+              </a:solidFill>
+            </a:endParaRPr>
           </a:p>
         </p:txBody>
       </p:sp>
       <p:sp>
         <p:nvSpPr>
-          <p:cNvPr id="293" name="Google Shape;293;p45"/>
+          <p:cNvPr id="294" name="Google Shape;294;p45"/>
           <p:cNvSpPr txBox="1"/>
           <p:nvPr>
-            <p:ph type="title"/>
+            <p:ph idx="1" type="body"/>
           </p:nvPr>
         </p:nvSpPr>
         <p:spPr>
           <a:xfrm>
-            <a:off x="311700" y="1152475"/>
-            <a:ext cx="3700000" cy="3500000"/>
+            <a:off x="311700" y="885950"/>
+            <a:ext cx="8520600" cy="521208"/>
           </a:xfrm>
           <a:prstGeom prst="rect">
             <a:avLst/>
@@ -6319,14 +6391,11 @@
         </p:spPr>
         <p:txBody>
           <a:bodyPr anchorCtr="0" anchor="t" bIns="91425" lIns="91425" spcFirstLastPara="1" rIns="91425" wrap="square" tIns="91425">
-            <a:normAutofit fontScale="90000"/>
+            <a:normAutofit/>
           </a:bodyPr>
           <a:lstStyle/>
           <a:p>
             <a:pPr indent="-330200" lvl="0" marL="457200" rtl="0" algn="l">
-              <a:buClr>
-                <a:srgbClr val="DEE2E6"/>
-              </a:buClr>
               <a:spcBef>
                 <a:spcPts val="0"/>
               </a:spcBef>
@@ -6337,108 +6406,8 @@
               <a:buChar char="●"/>
             </a:pPr>
             <a:r>
-              <a:rPr lang="en" sz="1600">
-                <a:solidFill>
-                  <a:srgbClr val="DEE2E6"/>
-                </a:solidFill>
-              </a:rPr>
-              <a:t>Wraps a B2BodyId</a:t>
-            </a:r>
-            <a:endParaRPr/>
-          </a:p>
-          <a:p>
-            <a:pPr indent="-330200" lvl="0" marL="457200" rtl="0" algn="l">
-              <a:buClr>
-                <a:srgbClr val="DEE2E6"/>
-              </a:buClr>
-              <a:spcBef>
-                <a:spcPts val="0"/>
-              </a:spcBef>
-              <a:spcAft>
-                <a:spcPts val="0"/>
-              </a:spcAft>
-              <a:buSzPts val="1600"/>
-              <a:buChar char="●"/>
-            </a:pPr>
-            <a:r>
-              <a:rPr lang="en" sz="1600">
-                <a:solidFill>
-                  <a:srgbClr val="DEE2E6"/>
-                </a:solidFill>
-              </a:rPr>
-              <a:t>Position in pixels</a:t>
-            </a:r>
-            <a:endParaRPr/>
-          </a:p>
-          <a:p>
-            <a:pPr indent="-330200" lvl="0" marL="457200" rtl="0" algn="l">
-              <a:buClr>
-                <a:srgbClr val="DEE2E6"/>
-              </a:buClr>
-              <a:spcBef>
-                <a:spcPts val="0"/>
-              </a:spcBef>
-              <a:spcAft>
-                <a:spcPts val="0"/>
-              </a:spcAft>
-              <a:buSzPts val="1600"/>
-              <a:buChar char="●"/>
-            </a:pPr>
-            <a:r>
-              <a:rPr lang="en" sz="1600">
-                <a:solidFill>
-                  <a:srgbClr val="DEE2E6"/>
-                </a:solidFill>
-              </a:rPr>
-              <a:t>Rotation that turns like SpriteBatch</a:t>
-            </a:r>
-            <a:endParaRPr/>
-          </a:p>
-          <a:p>
-            <a:pPr indent="-330200" lvl="0" marL="457200" rtl="0" algn="l">
-              <a:buClr>
-                <a:srgbClr val="DEE2E6"/>
-              </a:buClr>
-              <a:spcBef>
-                <a:spcPts val="0"/>
-              </a:spcBef>
-              <a:spcAft>
-                <a:spcPts val="0"/>
-              </a:spcAft>
-              <a:buSzPts val="1600"/>
-              <a:buChar char="●"/>
-            </a:pPr>
-            <a:r>
-              <a:rPr lang="en" sz="1600">
-                <a:solidFill>
-                  <a:srgbClr val="DEE2E6"/>
-                </a:solidFill>
-              </a:rPr>
-              <a:t>Owner: the entity it belongs to</a:t>
-            </a:r>
-            <a:endParaRPr/>
-          </a:p>
-          <a:p>
-            <a:pPr indent="-330200" lvl="0" marL="457200" rtl="0" algn="l">
-              <a:buClr>
-                <a:srgbClr val="DEE2E6"/>
-              </a:buClr>
-              <a:spcBef>
-                <a:spcPts val="0"/>
-              </a:spcBef>
-              <a:spcAft>
-                <a:spcPts val="0"/>
-              </a:spcAft>
-              <a:buSzPts val="1600"/>
-              <a:buChar char="●"/>
-            </a:pPr>
-            <a:r>
-              <a:rPr lang="en" sz="1600">
-                <a:solidFill>
-                  <a:srgbClr val="DEE2E6"/>
-                </a:solidFill>
-              </a:rPr>
-              <a:t>Units: every conversion, in one place</a:t>
+              <a:rPr lang="en"/>
+              <a:t>Keep Box2D in one place: the rest of the game never sees a Box2D type.</a:t>
             </a:r>
             <a:endParaRPr/>
           </a:p>
@@ -6446,671 +6415,277 @@
       </p:sp>
       <p:sp>
         <p:nvSpPr>
-          <p:cNvPr id="141" name="Google Shape;141;p23"/>
-          <p:cNvSpPr txBox="1"/>
-          <p:nvPr>
-            <p:ph idx="2" type="body"/>
-          </p:nvPr>
+          <p:cNvPr id="295" name="Rounded Rectangle 294"/>
+          <p:cNvSpPr/>
+          <p:nvPr/>
         </p:nvSpPr>
         <p:spPr>
           <a:xfrm>
-            <a:off x="4150000" y="1152475"/>
-            <a:ext cx="4750000" cy="3600000"/>
+            <a:off x="548640" y="1371600"/>
+            <a:ext cx="8046720" cy="548640"/>
+          </a:xfrm>
+          <a:prstGeom prst="roundRect">
+            <a:avLst>
+              <a:gd name="adj" fmla="val 12000"/>
+            </a:avLst>
+          </a:prstGeom>
+          <a:solidFill>
+            <a:srgbClr val="2E3338"/>
+          </a:solidFill>
+          <a:ln>
+            <a:noFill/>
+          </a:ln>
+          <a:effectLst/>
+        </p:spPr>
+        <p:style>
+          <a:lnRef idx="1">
+            <a:schemeClr val="accent1"/>
+          </a:lnRef>
+          <a:fillRef idx="3">
+            <a:schemeClr val="accent1"/>
+          </a:fillRef>
+          <a:effectRef idx="2">
+            <a:schemeClr val="accent1"/>
+          </a:effectRef>
+          <a:fontRef idx="minor">
+            <a:schemeClr val="lt1"/>
+          </a:fontRef>
+        </p:style>
+        <p:txBody>
+          <a:bodyPr rtlCol="0" anchor="ctr" wrap="square" lIns="73152" rIns="73152"/>
+          <a:lstStyle/>
+          <a:p>
+            <a:pPr algn="ctr"/>
+            <a:r>
+              <a:rPr sz="1500" b="1">
+                <a:solidFill>
+                  <a:srgbClr val="DEE2E6"/>
+                </a:solidFill>
+              </a:rPr>
+              <a:t>The game: blocks, pigs, birds, levels</a:t>
+            </a:r>
+          </a:p>
+        </p:txBody>
+      </p:sp>
+      <p:sp>
+        <p:nvSpPr>
+          <p:cNvPr id="296" name="Rounded Rectangle 295"/>
+          <p:cNvSpPr/>
+          <p:nvPr/>
+        </p:nvSpPr>
+        <p:spPr>
+          <a:xfrm>
+            <a:off x="548640" y="2148840"/>
+            <a:ext cx="3886200" cy="822960"/>
+          </a:xfrm>
+          <a:prstGeom prst="roundRect">
+            <a:avLst>
+              <a:gd name="adj" fmla="val 12000"/>
+            </a:avLst>
+          </a:prstGeom>
+          <a:solidFill>
+            <a:srgbClr val="2E3338"/>
+          </a:solidFill>
+          <a:ln w="25400">
+            <a:solidFill>
+              <a:srgbClr val="D45D35"/>
+            </a:solidFill>
+          </a:ln>
+          <a:effectLst/>
+        </p:spPr>
+        <p:style>
+          <a:lnRef idx="1">
+            <a:schemeClr val="accent1"/>
+          </a:lnRef>
+          <a:fillRef idx="3">
+            <a:schemeClr val="accent1"/>
+          </a:fillRef>
+          <a:effectRef idx="2">
+            <a:schemeClr val="accent1"/>
+          </a:effectRef>
+          <a:fontRef idx="minor">
+            <a:schemeClr val="lt1"/>
+          </a:fontRef>
+        </p:style>
+        <p:txBody>
+          <a:bodyPr rtlCol="0" anchor="ctr" wrap="square" lIns="73152" rIns="73152"/>
+          <a:lstStyle/>
+          <a:p>
+            <a:pPr algn="ctr"/>
+            <a:r>
+              <a:rPr sz="1500" b="1">
+                <a:solidFill>
+                  <a:srgbClr val="DEE2E6"/>
+                </a:solidFill>
+              </a:rPr>
+              <a:t>PhysicsWorld: a Facade</a:t>
+            </a:r>
+          </a:p>
+          <a:p>
+            <a:pPr algn="ctr"/>
+            <a:r>
+              <a:rPr sz="1300" b="0">
+                <a:solidFill>
+                  <a:srgbClr val="9AA3AB"/>
+                </a:solidFill>
+              </a:rPr>
+              <a:t>a handful of calls: create, step, destroy</a:t>
+            </a:r>
+          </a:p>
+        </p:txBody>
+      </p:sp>
+      <p:sp>
+        <p:nvSpPr>
+          <p:cNvPr id="297" name="Rounded Rectangle 296"/>
+          <p:cNvSpPr/>
+          <p:nvPr/>
+        </p:nvSpPr>
+        <p:spPr>
+          <a:xfrm>
+            <a:off x="4709160" y="2148840"/>
+            <a:ext cx="3886200" cy="822960"/>
+          </a:xfrm>
+          <a:prstGeom prst="roundRect">
+            <a:avLst>
+              <a:gd name="adj" fmla="val 12000"/>
+            </a:avLst>
+          </a:prstGeom>
+          <a:solidFill>
+            <a:srgbClr val="2E3338"/>
+          </a:solidFill>
+          <a:ln w="25400">
+            <a:solidFill>
+              <a:srgbClr val="D45D35"/>
+            </a:solidFill>
+          </a:ln>
+          <a:effectLst/>
+        </p:spPr>
+        <p:style>
+          <a:lnRef idx="1">
+            <a:schemeClr val="accent1"/>
+          </a:lnRef>
+          <a:fillRef idx="3">
+            <a:schemeClr val="accent1"/>
+          </a:fillRef>
+          <a:effectRef idx="2">
+            <a:schemeClr val="accent1"/>
+          </a:effectRef>
+          <a:fontRef idx="minor">
+            <a:schemeClr val="lt1"/>
+          </a:fontRef>
+        </p:style>
+        <p:txBody>
+          <a:bodyPr rtlCol="0" anchor="ctr" wrap="square" lIns="73152" rIns="73152"/>
+          <a:lstStyle/>
+          <a:p>
+            <a:pPr algn="ctr"/>
+            <a:r>
+              <a:rPr sz="1500" b="1">
+                <a:solidFill>
+                  <a:srgbClr val="DEE2E6"/>
+                </a:solidFill>
+              </a:rPr>
+              <a:t>PhysicsBody: an Adapter</a:t>
+            </a:r>
+          </a:p>
+          <a:p>
+            <a:pPr algn="ctr"/>
+            <a:r>
+              <a:rPr sz="1300" b="0">
+                <a:solidFill>
+                  <a:srgbClr val="9AA3AB"/>
+                </a:solidFill>
+              </a:rPr>
+              <a:t>a body in pixels, turning like SpriteBatch</a:t>
+            </a:r>
+          </a:p>
+        </p:txBody>
+      </p:sp>
+      <p:sp>
+        <p:nvSpPr>
+          <p:cNvPr id="298" name="Rounded Rectangle 297"/>
+          <p:cNvSpPr/>
+          <p:nvPr/>
+        </p:nvSpPr>
+        <p:spPr>
+          <a:xfrm>
+            <a:off x="548640" y="3200400"/>
+            <a:ext cx="8046720" cy="548640"/>
+          </a:xfrm>
+          <a:prstGeom prst="roundRect">
+            <a:avLst>
+              <a:gd name="adj" fmla="val 12000"/>
+            </a:avLst>
+          </a:prstGeom>
+          <a:solidFill>
+            <a:srgbClr val="2E3338"/>
+          </a:solidFill>
+          <a:ln>
+            <a:noFill/>
+          </a:ln>
+          <a:effectLst/>
+        </p:spPr>
+        <p:style>
+          <a:lnRef idx="1">
+            <a:schemeClr val="accent1"/>
+          </a:lnRef>
+          <a:fillRef idx="3">
+            <a:schemeClr val="accent1"/>
+          </a:fillRef>
+          <a:effectRef idx="2">
+            <a:schemeClr val="accent1"/>
+          </a:effectRef>
+          <a:fontRef idx="minor">
+            <a:schemeClr val="lt1"/>
+          </a:fontRef>
+        </p:style>
+        <p:txBody>
+          <a:bodyPr rtlCol="0" anchor="ctr" wrap="square" lIns="73152" rIns="73152"/>
+          <a:lstStyle/>
+          <a:p>
+            <a:pPr algn="ctr"/>
+            <a:r>
+              <a:rPr sz="1500" b="1">
+                <a:solidFill>
+                  <a:srgbClr val="DEE2E6"/>
+                </a:solidFill>
+              </a:rPr>
+              <a:t>Box2D: hundreds of functions, metres, structs and IDs</a:t>
+            </a:r>
+          </a:p>
+        </p:txBody>
+      </p:sp>
+      <p:sp>
+        <p:nvSpPr>
+          <p:cNvPr id="299" name="TextBox 298"/>
+          <p:cNvSpPr txBox="1"/>
+          <p:nvPr/>
+        </p:nvSpPr>
+        <p:spPr>
+          <a:xfrm>
+            <a:off x="457200" y="3886200"/>
+            <a:ext cx="8229600" cy="731520"/>
           </a:xfrm>
           <a:prstGeom prst="rect">
             <a:avLst/>
           </a:prstGeom>
+          <a:noFill/>
         </p:spPr>
         <p:txBody>
-          <a:bodyPr anchorCtr="0" anchor="t" bIns="91425" lIns="91425" spcFirstLastPara="1" rIns="91425" wrap="square" tIns="91425">
-            <a:noAutofit/>
+          <a:bodyPr wrap="square">
+            <a:spAutoFit/>
           </a:bodyPr>
           <a:lstStyle/>
           <a:p>
-            <a:pPr indent="0" lvl="0" marL="0" rtl="0" algn="l">
-              <a:lnSpc>
-                <a:spcPct val="115000"/>
-              </a:lnSpc>
-              <a:spcBef>
-                <a:spcPts val="0"/>
-              </a:spcBef>
-              <a:spcAft>
-                <a:spcPts val="0"/>
-              </a:spcAft>
-              <a:buNone/>
-            </a:pPr>
-            <a:r>
-              <a:rPr lang="en" sz="1000">
-                <a:highlight>
-                  <a:schemeClr val="dk2"/>
-                </a:highlight>
-                <a:latin typeface="Consolas"/>
-                <a:ea typeface="Consolas"/>
-                <a:cs typeface="Consolas"/>
-                <a:sym typeface="Consolas"/>
-              </a:rPr>
-              <a:t>public sealed class PhysicsBody</a:t>
-            </a:r>
-            <a:endParaRPr sz="1000">
-              <a:solidFill>
-                <a:srgbClr val="CCCCCC"/>
-              </a:solidFill>
-              <a:highlight>
-                <a:schemeClr val="dk2"/>
-              </a:highlight>
-              <a:latin typeface="Consolas"/>
-              <a:ea typeface="Consolas"/>
-              <a:cs typeface="Consolas"/>
-              <a:sym typeface="Consolas"/>
-            </a:endParaRPr>
-          </a:p>
-          <a:p>
-            <a:pPr indent="0" lvl="0" marL="0" rtl="0" algn="l">
-              <a:lnSpc>
-                <a:spcPct val="115000"/>
-              </a:lnSpc>
-              <a:spcBef>
-                <a:spcPts val="0"/>
-              </a:spcBef>
-              <a:spcAft>
-                <a:spcPts val="0"/>
-              </a:spcAft>
-              <a:buNone/>
-            </a:pPr>
-            <a:r>
-              <a:rPr lang="en" sz="1000">
-                <a:highlight>
-                  <a:schemeClr val="dk2"/>
-                </a:highlight>
-                <a:latin typeface="Consolas"/>
-                <a:ea typeface="Consolas"/>
-                <a:cs typeface="Consolas"/>
-                <a:sym typeface="Consolas"/>
-              </a:rPr>
-              <a:t>{</a:t>
-            </a:r>
-            <a:endParaRPr sz="1000">
-              <a:solidFill>
-                <a:srgbClr val="CCCCCC"/>
-              </a:solidFill>
-              <a:highlight>
-                <a:schemeClr val="dk2"/>
-              </a:highlight>
-              <a:latin typeface="Consolas"/>
-              <a:ea typeface="Consolas"/>
-              <a:cs typeface="Consolas"/>
-              <a:sym typeface="Consolas"/>
-            </a:endParaRPr>
-          </a:p>
-          <a:p>
-            <a:pPr indent="0" lvl="0" marL="0" rtl="0" algn="l">
-              <a:lnSpc>
-                <a:spcPct val="115000"/>
-              </a:lnSpc>
-              <a:spcBef>
-                <a:spcPts val="0"/>
-              </a:spcBef>
-              <a:spcAft>
-                <a:spcPts val="0"/>
-              </a:spcAft>
-              <a:buNone/>
-            </a:pPr>
-            <a:r>
-              <a:rPr lang="en" sz="1000">
-                <a:highlight>
-                  <a:schemeClr val="dk2"/>
-                </a:highlight>
-                <a:latin typeface="Consolas"/>
-                <a:ea typeface="Consolas"/>
-                <a:cs typeface="Consolas"/>
-                <a:sym typeface="Consolas"/>
-              </a:rPr>
-              <a:t>    internal B2BodyId Id { get; }</a:t>
-            </a:r>
-            <a:endParaRPr sz="1000">
-              <a:solidFill>
-                <a:srgbClr val="CCCCCC"/>
-              </a:solidFill>
-              <a:highlight>
-                <a:schemeClr val="dk2"/>
-              </a:highlight>
-              <a:latin typeface="Consolas"/>
-              <a:ea typeface="Consolas"/>
-              <a:cs typeface="Consolas"/>
-              <a:sym typeface="Consolas"/>
-            </a:endParaRPr>
-          </a:p>
-          <a:p>
-            <a:pPr indent="0" lvl="0" marL="0" rtl="0" algn="l">
-              <a:lnSpc>
-                <a:spcPct val="115000"/>
-              </a:lnSpc>
-              <a:spcBef>
-                <a:spcPts val="0"/>
-              </a:spcBef>
-              <a:spcAft>
-                <a:spcPts val="0"/>
-              </a:spcAft>
-              <a:buNone/>
-            </a:pPr>
-            <a:r>
-              <a:rPr lang="en" sz="1000">
-                <a:highlight>
-                  <a:schemeClr val="dk2"/>
-                </a:highlight>
-                <a:latin typeface="Consolas"/>
-                <a:ea typeface="Consolas"/>
-                <a:cs typeface="Consolas"/>
-                <a:sym typeface="Consolas"/>
-              </a:rPr>
-              <a:t>    public object Owner { get; }</a:t>
-            </a:r>
-            <a:endParaRPr sz="1000">
-              <a:solidFill>
-                <a:srgbClr val="CCCCCC"/>
-              </a:solidFill>
-              <a:highlight>
-                <a:schemeClr val="dk2"/>
-              </a:highlight>
-              <a:latin typeface="Consolas"/>
-              <a:ea typeface="Consolas"/>
-              <a:cs typeface="Consolas"/>
-              <a:sym typeface="Consolas"/>
-            </a:endParaRPr>
-          </a:p>
-          <a:p>
-            <a:pPr indent="0" lvl="0" marL="0" rtl="0" algn="l">
-              <a:lnSpc>
-                <a:spcPct val="115000"/>
-              </a:lnSpc>
-              <a:spcBef>
-                <a:spcPts val="0"/>
-              </a:spcBef>
-              <a:spcAft>
-                <a:spcPts val="0"/>
-              </a:spcAft>
-              <a:buNone/>
-            </a:pPr>
-            <a:r>
-              <a:rPr lang="en" sz="1000">
-                <a:highlight>
-                  <a:schemeClr val="dk2"/>
-                </a:highlight>
-                <a:latin typeface="Consolas"/>
-                <a:ea typeface="Consolas"/>
-                <a:cs typeface="Consolas"/>
-                <a:sym typeface="Consolas"/>
-              </a:rPr>
-              <a:t/>
-            </a:r>
-            <a:endParaRPr sz="1000">
-              <a:solidFill>
-                <a:srgbClr val="CCCCCC"/>
-              </a:solidFill>
-              <a:highlight>
-                <a:schemeClr val="dk2"/>
-              </a:highlight>
-              <a:latin typeface="Consolas"/>
-              <a:ea typeface="Consolas"/>
-              <a:cs typeface="Consolas"/>
-              <a:sym typeface="Consolas"/>
-            </a:endParaRPr>
-          </a:p>
-          <a:p>
-            <a:pPr indent="0" lvl="0" marL="0" rtl="0" algn="l">
-              <a:lnSpc>
-                <a:spcPct val="115000"/>
-              </a:lnSpc>
-              <a:spcBef>
-                <a:spcPts val="0"/>
-              </a:spcBef>
-              <a:spcAft>
-                <a:spcPts val="0"/>
-              </a:spcAft>
-              <a:buNone/>
-            </a:pPr>
-            <a:r>
-              <a:rPr lang="en" sz="1000">
-                <a:highlight>
-                  <a:schemeClr val="dk2"/>
-                </a:highlight>
-                <a:latin typeface="Consolas"/>
-                <a:ea typeface="Consolas"/>
-                <a:cs typeface="Consolas"/>
-                <a:sym typeface="Consolas"/>
-              </a:rPr>
-              <a:t>    public Vector2 Position =&gt;</a:t>
-            </a:r>
-            <a:endParaRPr sz="1000">
-              <a:solidFill>
-                <a:srgbClr val="CCCCCC"/>
-              </a:solidFill>
-              <a:highlight>
-                <a:schemeClr val="dk2"/>
-              </a:highlight>
-              <a:latin typeface="Consolas"/>
-              <a:ea typeface="Consolas"/>
-              <a:cs typeface="Consolas"/>
-              <a:sym typeface="Consolas"/>
-            </a:endParaRPr>
-          </a:p>
-          <a:p>
-            <a:pPr indent="0" lvl="0" marL="0" rtl="0" algn="l">
-              <a:lnSpc>
-                <a:spcPct val="115000"/>
-              </a:lnSpc>
-              <a:spcBef>
-                <a:spcPts val="0"/>
-              </a:spcBef>
-              <a:spcAft>
-                <a:spcPts val="0"/>
-              </a:spcAft>
-              <a:buNone/>
-            </a:pPr>
-            <a:r>
-              <a:rPr lang="en" sz="1000">
-                <a:highlight>
-                  <a:schemeClr val="dk2"/>
-                </a:highlight>
-                <a:latin typeface="Consolas"/>
-                <a:ea typeface="Consolas"/>
-                <a:cs typeface="Consolas"/>
-                <a:sym typeface="Consolas"/>
-              </a:rPr>
-              <a:t>        Units.ToPixels(b2Body_GetPosition(Id));</a:t>
-            </a:r>
-            <a:endParaRPr sz="1000">
-              <a:solidFill>
-                <a:srgbClr val="CCCCCC"/>
-              </a:solidFill>
-              <a:highlight>
-                <a:schemeClr val="dk2"/>
-              </a:highlight>
-              <a:latin typeface="Consolas"/>
-              <a:ea typeface="Consolas"/>
-              <a:cs typeface="Consolas"/>
-              <a:sym typeface="Consolas"/>
-            </a:endParaRPr>
-          </a:p>
-          <a:p>
-            <a:pPr indent="0" lvl="0" marL="0" rtl="0" algn="l">
-              <a:lnSpc>
-                <a:spcPct val="115000"/>
-              </a:lnSpc>
-              <a:spcBef>
-                <a:spcPts val="0"/>
-              </a:spcBef>
-              <a:spcAft>
-                <a:spcPts val="0"/>
-              </a:spcAft>
-              <a:buNone/>
-            </a:pPr>
-            <a:r>
-              <a:rPr lang="en" sz="1000">
-                <a:highlight>
-                  <a:schemeClr val="dk2"/>
-                </a:highlight>
-                <a:latin typeface="Consolas"/>
-                <a:ea typeface="Consolas"/>
-                <a:cs typeface="Consolas"/>
-                <a:sym typeface="Consolas"/>
-              </a:rPr>
-              <a:t/>
-            </a:r>
-            <a:endParaRPr sz="1000">
-              <a:solidFill>
-                <a:srgbClr val="CCCCCC"/>
-              </a:solidFill>
-              <a:highlight>
-                <a:schemeClr val="dk2"/>
-              </a:highlight>
-              <a:latin typeface="Consolas"/>
-              <a:ea typeface="Consolas"/>
-              <a:cs typeface="Consolas"/>
-              <a:sym typeface="Consolas"/>
-            </a:endParaRPr>
-          </a:p>
-          <a:p>
-            <a:pPr indent="0" lvl="0" marL="0" rtl="0" algn="l">
-              <a:lnSpc>
-                <a:spcPct val="115000"/>
-              </a:lnSpc>
-              <a:spcBef>
-                <a:spcPts val="0"/>
-              </a:spcBef>
-              <a:spcAft>
-                <a:spcPts val="0"/>
-              </a:spcAft>
-              <a:buNone/>
-            </a:pPr>
-            <a:r>
-              <a:rPr lang="en" sz="1000">
-                <a:highlight>
-                  <a:schemeClr val="dk2"/>
-                </a:highlight>
-                <a:latin typeface="Consolas"/>
-                <a:ea typeface="Consolas"/>
-                <a:cs typeface="Consolas"/>
-                <a:sym typeface="Consolas"/>
-              </a:rPr>
-              <a:t>    public float Rotation</a:t>
-            </a:r>
-            <a:endParaRPr sz="1000">
-              <a:solidFill>
-                <a:srgbClr val="CCCCCC"/>
-              </a:solidFill>
-              <a:highlight>
-                <a:schemeClr val="dk2"/>
-              </a:highlight>
-              <a:latin typeface="Consolas"/>
-              <a:ea typeface="Consolas"/>
-              <a:cs typeface="Consolas"/>
-              <a:sym typeface="Consolas"/>
-            </a:endParaRPr>
-          </a:p>
-          <a:p>
-            <a:pPr indent="0" lvl="0" marL="0" rtl="0" algn="l">
-              <a:lnSpc>
-                <a:spcPct val="115000"/>
-              </a:lnSpc>
-              <a:spcBef>
-                <a:spcPts val="0"/>
-              </a:spcBef>
-              <a:spcAft>
-                <a:spcPts val="0"/>
-              </a:spcAft>
-              <a:buNone/>
-            </a:pPr>
-            <a:r>
-              <a:rPr lang="en" sz="1000">
-                <a:highlight>
-                  <a:schemeClr val="dk2"/>
-                </a:highlight>
-                <a:latin typeface="Consolas"/>
-                <a:ea typeface="Consolas"/>
-                <a:cs typeface="Consolas"/>
-                <a:sym typeface="Consolas"/>
-              </a:rPr>
-              <a:t>    {</a:t>
-            </a:r>
-            <a:endParaRPr sz="1000">
-              <a:solidFill>
-                <a:srgbClr val="CCCCCC"/>
-              </a:solidFill>
-              <a:highlight>
-                <a:schemeClr val="dk2"/>
-              </a:highlight>
-              <a:latin typeface="Consolas"/>
-              <a:ea typeface="Consolas"/>
-              <a:cs typeface="Consolas"/>
-              <a:sym typeface="Consolas"/>
-            </a:endParaRPr>
-          </a:p>
-          <a:p>
-            <a:pPr indent="0" lvl="0" marL="0" rtl="0" algn="l">
-              <a:lnSpc>
-                <a:spcPct val="115000"/>
-              </a:lnSpc>
-              <a:spcBef>
-                <a:spcPts val="0"/>
-              </a:spcBef>
-              <a:spcAft>
-                <a:spcPts val="0"/>
-              </a:spcAft>
-              <a:buNone/>
-            </a:pPr>
-            <a:r>
-              <a:rPr lang="en" sz="1000">
-                <a:highlight>
-                  <a:schemeClr val="dk2"/>
-                </a:highlight>
-                <a:latin typeface="Consolas"/>
-                <a:ea typeface="Consolas"/>
-                <a:cs typeface="Consolas"/>
-                <a:sym typeface="Consolas"/>
-              </a:rPr>
-              <a:t>        get</a:t>
-            </a:r>
-            <a:endParaRPr sz="1000">
-              <a:solidFill>
-                <a:srgbClr val="CCCCCC"/>
-              </a:solidFill>
-              <a:highlight>
-                <a:schemeClr val="dk2"/>
-              </a:highlight>
-              <a:latin typeface="Consolas"/>
-              <a:ea typeface="Consolas"/>
-              <a:cs typeface="Consolas"/>
-              <a:sym typeface="Consolas"/>
-            </a:endParaRPr>
-          </a:p>
-          <a:p>
-            <a:pPr indent="0" lvl="0" marL="0" rtl="0" algn="l">
-              <a:lnSpc>
-                <a:spcPct val="115000"/>
-              </a:lnSpc>
-              <a:spcBef>
-                <a:spcPts val="0"/>
-              </a:spcBef>
-              <a:spcAft>
-                <a:spcPts val="0"/>
-              </a:spcAft>
-              <a:buNone/>
-            </a:pPr>
-            <a:r>
-              <a:rPr lang="en" sz="1000">
-                <a:highlight>
-                  <a:schemeClr val="dk2"/>
-                </a:highlight>
-                <a:latin typeface="Consolas"/>
-                <a:ea typeface="Consolas"/>
-                <a:cs typeface="Consolas"/>
-                <a:sym typeface="Consolas"/>
-              </a:rPr>
-              <a:t>        {</a:t>
-            </a:r>
-            <a:endParaRPr sz="1000">
-              <a:solidFill>
-                <a:srgbClr val="CCCCCC"/>
-              </a:solidFill>
-              <a:highlight>
-                <a:schemeClr val="dk2"/>
-              </a:highlight>
-              <a:latin typeface="Consolas"/>
-              <a:ea typeface="Consolas"/>
-              <a:cs typeface="Consolas"/>
-              <a:sym typeface="Consolas"/>
-            </a:endParaRPr>
-          </a:p>
-          <a:p>
-            <a:pPr indent="0" lvl="0" marL="0" rtl="0" algn="l">
-              <a:lnSpc>
-                <a:spcPct val="115000"/>
-              </a:lnSpc>
-              <a:spcBef>
-                <a:spcPts val="0"/>
-              </a:spcBef>
-              <a:spcAft>
-                <a:spcPts val="0"/>
-              </a:spcAft>
-              <a:buNone/>
-            </a:pPr>
-            <a:r>
-              <a:rPr lang="en" sz="1000">
-                <a:highlight>
-                  <a:schemeClr val="dk2"/>
-                </a:highlight>
-                <a:latin typeface="Consolas"/>
-                <a:ea typeface="Consolas"/>
-                <a:cs typeface="Consolas"/>
-                <a:sym typeface="Consolas"/>
-              </a:rPr>
-              <a:t>            B2Rot r = b2Body_GetRotation(Id);</a:t>
-            </a:r>
-            <a:endParaRPr sz="1000">
-              <a:solidFill>
-                <a:srgbClr val="CCCCCC"/>
-              </a:solidFill>
-              <a:highlight>
-                <a:schemeClr val="dk2"/>
-              </a:highlight>
-              <a:latin typeface="Consolas"/>
-              <a:ea typeface="Consolas"/>
-              <a:cs typeface="Consolas"/>
-              <a:sym typeface="Consolas"/>
-            </a:endParaRPr>
-          </a:p>
-          <a:p>
-            <a:pPr indent="0" lvl="0" marL="0" rtl="0" algn="l">
-              <a:lnSpc>
-                <a:spcPct val="115000"/>
-              </a:lnSpc>
-              <a:spcBef>
-                <a:spcPts val="0"/>
-              </a:spcBef>
-              <a:spcAft>
-                <a:spcPts val="0"/>
-              </a:spcAft>
-              <a:buNone/>
-            </a:pPr>
-            <a:r>
-              <a:rPr lang="en" sz="1000">
-                <a:highlight>
-                  <a:schemeClr val="dk2"/>
-                </a:highlight>
-                <a:latin typeface="Consolas"/>
-                <a:ea typeface="Consolas"/>
-                <a:cs typeface="Consolas"/>
-                <a:sym typeface="Consolas"/>
-              </a:rPr>
-              <a:t>            return -b2Rot_GetAngle(in r);</a:t>
-            </a:r>
-            <a:endParaRPr sz="1000">
-              <a:solidFill>
-                <a:srgbClr val="CCCCCC"/>
-              </a:solidFill>
-              <a:highlight>
-                <a:schemeClr val="dk2"/>
-              </a:highlight>
-              <a:latin typeface="Consolas"/>
-              <a:ea typeface="Consolas"/>
-              <a:cs typeface="Consolas"/>
-              <a:sym typeface="Consolas"/>
-            </a:endParaRPr>
-          </a:p>
-          <a:p>
-            <a:pPr indent="0" lvl="0" marL="0" rtl="0" algn="l">
-              <a:lnSpc>
-                <a:spcPct val="115000"/>
-              </a:lnSpc>
-              <a:spcBef>
-                <a:spcPts val="0"/>
-              </a:spcBef>
-              <a:spcAft>
-                <a:spcPts val="0"/>
-              </a:spcAft>
-              <a:buNone/>
-            </a:pPr>
-            <a:r>
-              <a:rPr lang="en" sz="1000">
-                <a:highlight>
-                  <a:schemeClr val="dk2"/>
-                </a:highlight>
-                <a:latin typeface="Consolas"/>
-                <a:ea typeface="Consolas"/>
-                <a:cs typeface="Consolas"/>
-                <a:sym typeface="Consolas"/>
-              </a:rPr>
-              <a:t>        }</a:t>
-            </a:r>
-            <a:endParaRPr sz="1000">
-              <a:solidFill>
-                <a:srgbClr val="CCCCCC"/>
-              </a:solidFill>
-              <a:highlight>
-                <a:schemeClr val="dk2"/>
-              </a:highlight>
-              <a:latin typeface="Consolas"/>
-              <a:ea typeface="Consolas"/>
-              <a:cs typeface="Consolas"/>
-              <a:sym typeface="Consolas"/>
-            </a:endParaRPr>
-          </a:p>
-          <a:p>
-            <a:pPr indent="0" lvl="0" marL="0" rtl="0" algn="l">
-              <a:lnSpc>
-                <a:spcPct val="115000"/>
-              </a:lnSpc>
-              <a:spcBef>
-                <a:spcPts val="0"/>
-              </a:spcBef>
-              <a:spcAft>
-                <a:spcPts val="0"/>
-              </a:spcAft>
-              <a:buNone/>
-            </a:pPr>
-            <a:r>
-              <a:rPr lang="en" sz="1000">
-                <a:highlight>
-                  <a:schemeClr val="dk2"/>
-                </a:highlight>
-                <a:latin typeface="Consolas"/>
-                <a:ea typeface="Consolas"/>
-                <a:cs typeface="Consolas"/>
-                <a:sym typeface="Consolas"/>
-              </a:rPr>
-              <a:t>    }</a:t>
-            </a:r>
-            <a:endParaRPr sz="1000">
-              <a:solidFill>
-                <a:srgbClr val="CCCCCC"/>
-              </a:solidFill>
-              <a:highlight>
-                <a:schemeClr val="dk2"/>
-              </a:highlight>
-              <a:latin typeface="Consolas"/>
-              <a:ea typeface="Consolas"/>
-              <a:cs typeface="Consolas"/>
-              <a:sym typeface="Consolas"/>
-            </a:endParaRPr>
-          </a:p>
-          <a:p>
-            <a:pPr indent="0" lvl="0" marL="0" rtl="0" algn="l">
-              <a:lnSpc>
-                <a:spcPct val="115000"/>
-              </a:lnSpc>
-              <a:spcBef>
-                <a:spcPts val="0"/>
-              </a:spcBef>
-              <a:spcAft>
-                <a:spcPts val="0"/>
-              </a:spcAft>
-              <a:buNone/>
-            </a:pPr>
-            <a:r>
-              <a:rPr lang="en" sz="1000">
-                <a:highlight>
-                  <a:schemeClr val="dk2"/>
-                </a:highlight>
-                <a:latin typeface="Consolas"/>
-                <a:ea typeface="Consolas"/>
-                <a:cs typeface="Consolas"/>
-                <a:sym typeface="Consolas"/>
-              </a:rPr>
-              <a:t>}</a:t>
-            </a:r>
-            <a:endParaRPr sz="1000">
-              <a:solidFill>
-                <a:srgbClr val="CCCCCC"/>
-              </a:solidFill>
-              <a:highlight>
-                <a:schemeClr val="dk2"/>
-              </a:highlight>
-              <a:latin typeface="Consolas"/>
-              <a:ea typeface="Consolas"/>
-              <a:cs typeface="Consolas"/>
-              <a:sym typeface="Consolas"/>
-            </a:endParaRPr>
+            <a:pPr algn="ctr"/>
+            <a:r>
+              <a:rPr sz="1500" b="1" i="0">
+                <a:solidFill>
+                  <a:srgbClr val="DEE2E6"/>
+                </a:solidFill>
+              </a:rPr>
+              <a:t>Swap Box2D for another library. Which files change?</a:t>
+            </a:r>
           </a:p>
         </p:txBody>
       </p:sp>
@@ -7166,7 +6741,7 @@
             </a:pPr>
             <a:r>
               <a:rPr lang="en"/>
-              <a:t>The Facade: PhysicsWorld</a:t>
+              <a:t>The Adapter: PhysicsBody</a:t>
             </a:r>
             <a:endParaRPr/>
           </a:p>
@@ -7214,7 +6789,7 @@
                   <a:srgbClr val="DEE2E6"/>
                 </a:solidFill>
               </a:rPr>
-              <a:t>The game reads like our game again</a:t>
+              <a:t>Wraps a B2BodyId</a:t>
             </a:r>
             <a:endParaRPr/>
           </a:p>
@@ -7238,79 +6813,7 @@
                   <a:srgbClr val="DEE2E6"/>
                 </a:solidFill>
               </a:rPr>
-              <a:t>Gains</a:t>
-            </a:r>
-            <a:endParaRPr/>
-          </a:p>
-          <a:p>
-            <a:pPr indent="-317500" lvl="1" marL="914400" rtl="0" algn="l">
-              <a:buClr>
-                <a:srgbClr val="6C757D"/>
-              </a:buClr>
-              <a:spcBef>
-                <a:spcPts val="0"/>
-              </a:spcBef>
-              <a:spcAft>
-                <a:spcPts val="0"/>
-              </a:spcAft>
-              <a:buSzPts val="1400"/>
-              <a:buChar char="○"/>
-            </a:pPr>
-            <a:r>
-              <a:rPr lang="en" sz="1400">
-                <a:solidFill>
-                  <a:srgbClr val="6C757D"/>
-                </a:solidFill>
-              </a:rPr>
-              <a:t>One place to change</a:t>
-            </a:r>
-            <a:endParaRPr/>
-          </a:p>
-          <a:p>
-            <a:pPr indent="-317500" lvl="1" marL="914400" rtl="0" algn="l">
-              <a:buClr>
-                <a:srgbClr val="6C757D"/>
-              </a:buClr>
-              <a:spcBef>
-                <a:spcPts val="0"/>
-              </a:spcBef>
-              <a:spcAft>
-                <a:spcPts val="0"/>
-              </a:spcAft>
-              <a:buSzPts val="1400"/>
-              <a:buChar char="○"/>
-            </a:pPr>
-            <a:r>
-              <a:rPr lang="en" sz="1400">
-                <a:solidFill>
-                  <a:srgbClr val="6C757D"/>
-                </a:solidFill>
-              </a:rPr>
-              <a:t>Our language: pixels, not metres</a:t>
-            </a:r>
-            <a:endParaRPr/>
-          </a:p>
-          <a:p>
-            <a:pPr indent="-317500" lvl="1" marL="914400" rtl="0" algn="l">
-              <a:buClr>
-                <a:srgbClr val="6C757D"/>
-              </a:buClr>
-              <a:spcBef>
-                <a:spcPts val="0"/>
-              </a:spcBef>
-              <a:spcAft>
-                <a:spcPts val="0"/>
-              </a:spcAft>
-              <a:buSzPts val="1400"/>
-              <a:buChar char="○"/>
-            </a:pPr>
-            <a:r>
-              <a:rPr lang="en" sz="1400">
-                <a:solidFill>
-                  <a:srgbClr val="6C757D"/>
-                </a:solidFill>
-              </a:rPr>
-              <a:t>A smaller surface</a:t>
+              <a:t>Position in pixels</a:t>
             </a:r>
             <a:endParaRPr/>
           </a:p>
@@ -7334,7 +6837,55 @@
                   <a:srgbClr val="DEE2E6"/>
                 </a:solidFill>
               </a:rPr>
-              <a:t>Cost: every new feature goes through the facade first</a:t>
+              <a:t>Rotation that turns like SpriteBatch</a:t>
+            </a:r>
+            <a:endParaRPr/>
+          </a:p>
+          <a:p>
+            <a:pPr indent="-330200" lvl="0" marL="457200" rtl="0" algn="l">
+              <a:buClr>
+                <a:srgbClr val="DEE2E6"/>
+              </a:buClr>
+              <a:spcBef>
+                <a:spcPts val="0"/>
+              </a:spcBef>
+              <a:spcAft>
+                <a:spcPts val="0"/>
+              </a:spcAft>
+              <a:buSzPts val="1600"/>
+              <a:buChar char="●"/>
+            </a:pPr>
+            <a:r>
+              <a:rPr lang="en" sz="1600">
+                <a:solidFill>
+                  <a:srgbClr val="DEE2E6"/>
+                </a:solidFill>
+              </a:rPr>
+              <a:t>Owner: the entity it belongs to</a:t>
+            </a:r>
+            <a:endParaRPr/>
+          </a:p>
+          <a:p>
+            <a:pPr indent="-330200" lvl="0" marL="457200" rtl="0" algn="l">
+              <a:buClr>
+                <a:srgbClr val="DEE2E6"/>
+              </a:buClr>
+              <a:spcBef>
+                <a:spcPts val="0"/>
+              </a:spcBef>
+              <a:spcAft>
+                <a:spcPts val="0"/>
+              </a:spcAft>
+              <a:buSzPts val="1600"/>
+              <a:buChar char="●"/>
+            </a:pPr>
+            <a:r>
+              <a:rPr lang="en" sz="1600">
+                <a:solidFill>
+                  <a:srgbClr val="DEE2E6"/>
+                </a:solidFill>
+              </a:rPr>
+              <a:t>Units: every conversion, in one place</a:t>
             </a:r>
             <a:endParaRPr/>
           </a:p>
@@ -7385,7 +6936,7 @@
                 <a:cs typeface="Consolas"/>
                 <a:sym typeface="Consolas"/>
               </a:rPr>
-              <a:t>// Units.cs</a:t>
+              <a:t>public sealed class PhysicsBody</a:t>
             </a:r>
             <a:endParaRPr sz="1000">
               <a:solidFill>
@@ -7423,7 +6974,7 @@
                 <a:cs typeface="Consolas"/>
                 <a:sym typeface="Consolas"/>
               </a:rPr>
-              <a:t>public static B2Vec2 ToMeters(Vector2 pixels) =&gt;</a:t>
+              <a:t>{</a:t>
             </a:r>
             <a:endParaRPr sz="1000">
               <a:solidFill>
@@ -7461,7 +7012,7 @@
                 <a:cs typeface="Consolas"/>
                 <a:sym typeface="Consolas"/>
               </a:rPr>
-              <a:t>    new(pixels.X / PixelsPerMeter,</a:t>
+              <a:t>    internal B2BodyId Id { get; }</a:t>
             </a:r>
             <a:endParaRPr sz="1000">
               <a:solidFill>
@@ -7499,7 +7050,7 @@
                 <a:cs typeface="Consolas"/>
                 <a:sym typeface="Consolas"/>
               </a:rPr>
-              <a:t>        -pixels.Y / PixelsPerMeter);</a:t>
+              <a:t>    public object Owner { get; }</a:t>
             </a:r>
             <a:endParaRPr sz="1000">
               <a:solidFill>
@@ -7575,7 +7126,7 @@
                 <a:cs typeface="Consolas"/>
                 <a:sym typeface="Consolas"/>
               </a:rPr>
-              <a:t>// Block.cs</a:t>
+              <a:t>    public Vector2 Position =&gt;</a:t>
             </a:r>
             <a:endParaRPr sz="1000">
               <a:solidFill>
@@ -7613,7 +7164,7 @@
                 <a:cs typeface="Consolas"/>
                 <a:sym typeface="Consolas"/>
               </a:rPr>
-              <a:t>public Block(PhysicsWorld world, Vector2 center,</a:t>
+              <a:t>        Units.ToPixels(b2Body_GetPosition(Id));</a:t>
             </a:r>
             <a:endParaRPr sz="1000">
               <a:solidFill>
@@ -7651,7 +7202,7 @@
                 <a:cs typeface="Consolas"/>
                 <a:sym typeface="Consolas"/>
               </a:rPr>
-              <a:t>    Vector2 size, float rotation,</a:t>
+              <a:t/>
             </a:r>
             <a:endParaRPr sz="1000">
               <a:solidFill>
@@ -7689,7 +7240,7 @@
                 <a:cs typeface="Consolas"/>
                 <a:sym typeface="Consolas"/>
               </a:rPr>
-              <a:t>    PhysicsMaterial material, TextureRegion sprite)</a:t>
+              <a:t>    public float Rotation</a:t>
             </a:r>
             <a:endParaRPr sz="1000">
               <a:solidFill>
@@ -7727,7 +7278,7 @@
                 <a:cs typeface="Consolas"/>
                 <a:sym typeface="Consolas"/>
               </a:rPr>
-              <a:t>    : base(sprite)</a:t>
+              <a:t>    {</a:t>
             </a:r>
             <a:endParaRPr sz="1000">
               <a:solidFill>
@@ -7765,7 +7316,7 @@
                 <a:cs typeface="Consolas"/>
                 <a:sym typeface="Consolas"/>
               </a:rPr>
-              <a:t>{</a:t>
+              <a:t>        get</a:t>
             </a:r>
             <a:endParaRPr sz="1000">
               <a:solidFill>
@@ -7803,7 +7354,7 @@
                 <a:cs typeface="Consolas"/>
                 <a:sym typeface="Consolas"/>
               </a:rPr>
-              <a:t>    Body = world.CreateBox(center, size,</a:t>
+              <a:t>        {</a:t>
             </a:r>
             <a:endParaRPr sz="1000">
               <a:solidFill>
@@ -7841,7 +7392,7 @@
                 <a:cs typeface="Consolas"/>
                 <a:sym typeface="Consolas"/>
               </a:rPr>
-              <a:t>        rotation, material, this);</a:t>
+              <a:t>            B2Rot r = b2Body_GetRotation(Id);</a:t>
             </a:r>
             <a:endParaRPr sz="1000">
               <a:solidFill>
@@ -7879,7 +7430,7 @@
                 <a:cs typeface="Consolas"/>
                 <a:sym typeface="Consolas"/>
               </a:rPr>
-              <a:t>}</a:t>
+              <a:t>            return -b2Rot_GetAngle(in r);</a:t>
             </a:r>
             <a:endParaRPr sz="1000">
               <a:solidFill>
@@ -7894,6 +7445,120 @@
               <a:sym typeface="Consolas"/>
             </a:endParaRPr>
           </a:p>
+          <a:p>
+            <a:pPr indent="0" lvl="0" marL="0" rtl="0" algn="l">
+              <a:lnSpc>
+                <a:spcPct val="115000"/>
+              </a:lnSpc>
+              <a:spcBef>
+                <a:spcPts val="0"/>
+              </a:spcBef>
+              <a:spcAft>
+                <a:spcPts val="0"/>
+              </a:spcAft>
+              <a:buNone/>
+            </a:pPr>
+            <a:r>
+              <a:rPr lang="en" sz="1000">
+                <a:highlight>
+                  <a:schemeClr val="dk2"/>
+                </a:highlight>
+                <a:latin typeface="Consolas"/>
+                <a:ea typeface="Consolas"/>
+                <a:cs typeface="Consolas"/>
+                <a:sym typeface="Consolas"/>
+              </a:rPr>
+              <a:t>        }</a:t>
+            </a:r>
+            <a:endParaRPr sz="1000">
+              <a:solidFill>
+                <a:srgbClr val="CCCCCC"/>
+              </a:solidFill>
+              <a:highlight>
+                <a:schemeClr val="dk2"/>
+              </a:highlight>
+              <a:latin typeface="Consolas"/>
+              <a:ea typeface="Consolas"/>
+              <a:cs typeface="Consolas"/>
+              <a:sym typeface="Consolas"/>
+            </a:endParaRPr>
+          </a:p>
+          <a:p>
+            <a:pPr indent="0" lvl="0" marL="0" rtl="0" algn="l">
+              <a:lnSpc>
+                <a:spcPct val="115000"/>
+              </a:lnSpc>
+              <a:spcBef>
+                <a:spcPts val="0"/>
+              </a:spcBef>
+              <a:spcAft>
+                <a:spcPts val="0"/>
+              </a:spcAft>
+              <a:buNone/>
+            </a:pPr>
+            <a:r>
+              <a:rPr lang="en" sz="1000">
+                <a:highlight>
+                  <a:schemeClr val="dk2"/>
+                </a:highlight>
+                <a:latin typeface="Consolas"/>
+                <a:ea typeface="Consolas"/>
+                <a:cs typeface="Consolas"/>
+                <a:sym typeface="Consolas"/>
+              </a:rPr>
+              <a:t>    }</a:t>
+            </a:r>
+            <a:endParaRPr sz="1000">
+              <a:solidFill>
+                <a:srgbClr val="CCCCCC"/>
+              </a:solidFill>
+              <a:highlight>
+                <a:schemeClr val="dk2"/>
+              </a:highlight>
+              <a:latin typeface="Consolas"/>
+              <a:ea typeface="Consolas"/>
+              <a:cs typeface="Consolas"/>
+              <a:sym typeface="Consolas"/>
+            </a:endParaRPr>
+          </a:p>
+          <a:p>
+            <a:pPr indent="0" lvl="0" marL="0" rtl="0" algn="l">
+              <a:lnSpc>
+                <a:spcPct val="115000"/>
+              </a:lnSpc>
+              <a:spcBef>
+                <a:spcPts val="0"/>
+              </a:spcBef>
+              <a:spcAft>
+                <a:spcPts val="0"/>
+              </a:spcAft>
+              <a:buNone/>
+            </a:pPr>
+            <a:r>
+              <a:rPr lang="en" sz="1000">
+                <a:highlight>
+                  <a:schemeClr val="dk2"/>
+                </a:highlight>
+                <a:latin typeface="Consolas"/>
+                <a:ea typeface="Consolas"/>
+                <a:cs typeface="Consolas"/>
+                <a:sym typeface="Consolas"/>
+              </a:rPr>
+              <a:t>}</a:t>
+            </a:r>
+            <a:endParaRPr sz="1000">
+              <a:solidFill>
+                <a:srgbClr val="CCCCCC"/>
+              </a:solidFill>
+              <a:highlight>
+                <a:schemeClr val="dk2"/>
+              </a:highlight>
+              <a:latin typeface="Consolas"/>
+              <a:ea typeface="Consolas"/>
+              <a:cs typeface="Consolas"/>
+              <a:sym typeface="Consolas"/>
+            </a:endParaRPr>
+          </a:p>
         </p:txBody>
       </p:sp>
     </p:spTree>
@@ -7905,6 +7570,788 @@
 </file>
 
 <file path=ppt/slides/slide12.xml><?xml version="1.0" encoding="utf-8"?>
+<p:sld xmlns:a="http://schemas.openxmlformats.org/drawingml/2006/main" xmlns:p="http://schemas.openxmlformats.org/presentationml/2006/main" xmlns:r="http://schemas.openxmlformats.org/officeDocument/2006/relationships">
+  <p:cSld>
+    <p:spTree>
+      <p:nvGrpSpPr>
+        <p:cNvPr id="1" name=""/>
+        <p:cNvGrpSpPr/>
+        <p:nvPr/>
+      </p:nvGrpSpPr>
+      <p:grpSpPr/>
+      <p:sp>
+        <p:nvSpPr>
+          <p:cNvPr id="140" name="Google Shape;140;p23"/>
+          <p:cNvSpPr txBox="1"/>
+          <p:nvPr>
+            <p:ph type="title"/>
+          </p:nvPr>
+        </p:nvSpPr>
+        <p:spPr>
+          <a:xfrm>
+            <a:off x="311700" y="195615"/>
+            <a:ext cx="8520600" cy="572700"/>
+          </a:xfrm>
+          <a:prstGeom prst="rect">
+            <a:avLst/>
+          </a:prstGeom>
+        </p:spPr>
+        <p:txBody>
+          <a:bodyPr anchorCtr="0" anchor="t" bIns="91425" lIns="91425" spcFirstLastPara="1" rIns="91425" wrap="square" tIns="91425">
+            <a:normAutofit fontScale="90000"/>
+          </a:bodyPr>
+          <a:lstStyle/>
+          <a:p>
+            <a:pPr indent="0" lvl="0" marL="0" rtl="0" algn="l">
+              <a:spcBef>
+                <a:spcPts val="0"/>
+              </a:spcBef>
+              <a:spcAft>
+                <a:spcPts val="0"/>
+              </a:spcAft>
+              <a:buNone/>
+            </a:pPr>
+            <a:r>
+              <a:rPr lang="en"/>
+              <a:t>The Facade: PhysicsWorld</a:t>
+            </a:r>
+            <a:endParaRPr/>
+          </a:p>
+        </p:txBody>
+      </p:sp>
+      <p:sp>
+        <p:nvSpPr>
+          <p:cNvPr id="293" name="Google Shape;293;p45"/>
+          <p:cNvSpPr txBox="1"/>
+          <p:nvPr>
+            <p:ph type="title"/>
+          </p:nvPr>
+        </p:nvSpPr>
+        <p:spPr>
+          <a:xfrm>
+            <a:off x="311700" y="1152475"/>
+            <a:ext cx="3700000" cy="3500000"/>
+          </a:xfrm>
+          <a:prstGeom prst="rect">
+            <a:avLst/>
+          </a:prstGeom>
+        </p:spPr>
+        <p:txBody>
+          <a:bodyPr anchorCtr="0" anchor="t" bIns="91425" lIns="91425" spcFirstLastPara="1" rIns="91425" wrap="square" tIns="91425">
+            <a:normAutofit fontScale="90000"/>
+          </a:bodyPr>
+          <a:lstStyle/>
+          <a:p>
+            <a:pPr indent="-330200" lvl="0" marL="457200" rtl="0" algn="l">
+              <a:buClr>
+                <a:srgbClr val="DEE2E6"/>
+              </a:buClr>
+              <a:spcBef>
+                <a:spcPts val="0"/>
+              </a:spcBef>
+              <a:spcAft>
+                <a:spcPts val="0"/>
+              </a:spcAft>
+              <a:buSzPts val="1600"/>
+              <a:buChar char="●"/>
+            </a:pPr>
+            <a:r>
+              <a:rPr lang="en" sz="1600">
+                <a:solidFill>
+                  <a:srgbClr val="DEE2E6"/>
+                </a:solidFill>
+              </a:rPr>
+              <a:t>The game reads like our game again</a:t>
+            </a:r>
+            <a:endParaRPr/>
+          </a:p>
+          <a:p>
+            <a:pPr indent="-330200" lvl="0" marL="457200" rtl="0" algn="l">
+              <a:buClr>
+                <a:srgbClr val="DEE2E6"/>
+              </a:buClr>
+              <a:spcBef>
+                <a:spcPts val="0"/>
+              </a:spcBef>
+              <a:spcAft>
+                <a:spcPts val="0"/>
+              </a:spcAft>
+              <a:buSzPts val="1600"/>
+              <a:buChar char="●"/>
+            </a:pPr>
+            <a:r>
+              <a:rPr lang="en" sz="1600">
+                <a:solidFill>
+                  <a:srgbClr val="DEE2E6"/>
+                </a:solidFill>
+              </a:rPr>
+              <a:t>Gains</a:t>
+            </a:r>
+            <a:endParaRPr/>
+          </a:p>
+          <a:p>
+            <a:pPr indent="-317500" lvl="1" marL="914400" rtl="0" algn="l">
+              <a:buClr>
+                <a:srgbClr val="6C757D"/>
+              </a:buClr>
+              <a:spcBef>
+                <a:spcPts val="0"/>
+              </a:spcBef>
+              <a:spcAft>
+                <a:spcPts val="0"/>
+              </a:spcAft>
+              <a:buSzPts val="1400"/>
+              <a:buChar char="○"/>
+            </a:pPr>
+            <a:r>
+              <a:rPr lang="en" sz="1400">
+                <a:solidFill>
+                  <a:srgbClr val="6C757D"/>
+                </a:solidFill>
+              </a:rPr>
+              <a:t>One place to change</a:t>
+            </a:r>
+            <a:endParaRPr/>
+          </a:p>
+          <a:p>
+            <a:pPr indent="-317500" lvl="1" marL="914400" rtl="0" algn="l">
+              <a:buClr>
+                <a:srgbClr val="6C757D"/>
+              </a:buClr>
+              <a:spcBef>
+                <a:spcPts val="0"/>
+              </a:spcBef>
+              <a:spcAft>
+                <a:spcPts val="0"/>
+              </a:spcAft>
+              <a:buSzPts val="1400"/>
+              <a:buChar char="○"/>
+            </a:pPr>
+            <a:r>
+              <a:rPr lang="en" sz="1400">
+                <a:solidFill>
+                  <a:srgbClr val="6C757D"/>
+                </a:solidFill>
+              </a:rPr>
+              <a:t>Our language: pixels, not metres</a:t>
+            </a:r>
+            <a:endParaRPr/>
+          </a:p>
+          <a:p>
+            <a:pPr indent="-317500" lvl="1" marL="914400" rtl="0" algn="l">
+              <a:buClr>
+                <a:srgbClr val="6C757D"/>
+              </a:buClr>
+              <a:spcBef>
+                <a:spcPts val="0"/>
+              </a:spcBef>
+              <a:spcAft>
+                <a:spcPts val="0"/>
+              </a:spcAft>
+              <a:buSzPts val="1400"/>
+              <a:buChar char="○"/>
+            </a:pPr>
+            <a:r>
+              <a:rPr lang="en" sz="1400">
+                <a:solidFill>
+                  <a:srgbClr val="6C757D"/>
+                </a:solidFill>
+              </a:rPr>
+              <a:t>A smaller surface</a:t>
+            </a:r>
+            <a:endParaRPr/>
+          </a:p>
+          <a:p>
+            <a:pPr indent="-330200" lvl="0" marL="457200" rtl="0" algn="l">
+              <a:buClr>
+                <a:srgbClr val="DEE2E6"/>
+              </a:buClr>
+              <a:spcBef>
+                <a:spcPts val="0"/>
+              </a:spcBef>
+              <a:spcAft>
+                <a:spcPts val="0"/>
+              </a:spcAft>
+              <a:buSzPts val="1600"/>
+              <a:buChar char="●"/>
+            </a:pPr>
+            <a:r>
+              <a:rPr lang="en" sz="1600">
+                <a:solidFill>
+                  <a:srgbClr val="DEE2E6"/>
+                </a:solidFill>
+              </a:rPr>
+              <a:t>Cost: every new feature goes through the facade first</a:t>
+            </a:r>
+            <a:endParaRPr/>
+          </a:p>
+        </p:txBody>
+      </p:sp>
+      <p:sp>
+        <p:nvSpPr>
+          <p:cNvPr id="141" name="Google Shape;141;p23"/>
+          <p:cNvSpPr txBox="1"/>
+          <p:nvPr>
+            <p:ph idx="2" type="body"/>
+          </p:nvPr>
+        </p:nvSpPr>
+        <p:spPr>
+          <a:xfrm>
+            <a:off x="4150000" y="1152475"/>
+            <a:ext cx="4750000" cy="3600000"/>
+          </a:xfrm>
+          <a:prstGeom prst="rect">
+            <a:avLst/>
+          </a:prstGeom>
+        </p:spPr>
+        <p:txBody>
+          <a:bodyPr anchorCtr="0" anchor="t" bIns="91425" lIns="91425" spcFirstLastPara="1" rIns="91425" wrap="square" tIns="91425">
+            <a:noAutofit/>
+          </a:bodyPr>
+          <a:lstStyle/>
+          <a:p>
+            <a:pPr indent="0" lvl="0" marL="0" rtl="0" algn="l">
+              <a:lnSpc>
+                <a:spcPct val="115000"/>
+              </a:lnSpc>
+              <a:spcBef>
+                <a:spcPts val="0"/>
+              </a:spcBef>
+              <a:spcAft>
+                <a:spcPts val="0"/>
+              </a:spcAft>
+              <a:buNone/>
+            </a:pPr>
+            <a:r>
+              <a:rPr lang="en" sz="1000">
+                <a:highlight>
+                  <a:schemeClr val="dk2"/>
+                </a:highlight>
+                <a:latin typeface="Consolas"/>
+                <a:ea typeface="Consolas"/>
+                <a:cs typeface="Consolas"/>
+                <a:sym typeface="Consolas"/>
+              </a:rPr>
+              <a:t>// Units.cs</a:t>
+            </a:r>
+            <a:endParaRPr sz="1000">
+              <a:solidFill>
+                <a:srgbClr val="CCCCCC"/>
+              </a:solidFill>
+              <a:highlight>
+                <a:schemeClr val="dk2"/>
+              </a:highlight>
+              <a:latin typeface="Consolas"/>
+              <a:ea typeface="Consolas"/>
+              <a:cs typeface="Consolas"/>
+              <a:sym typeface="Consolas"/>
+            </a:endParaRPr>
+          </a:p>
+          <a:p>
+            <a:pPr indent="0" lvl="0" marL="0" rtl="0" algn="l">
+              <a:lnSpc>
+                <a:spcPct val="115000"/>
+              </a:lnSpc>
+              <a:spcBef>
+                <a:spcPts val="0"/>
+              </a:spcBef>
+              <a:spcAft>
+                <a:spcPts val="0"/>
+              </a:spcAft>
+              <a:buNone/>
+            </a:pPr>
+            <a:r>
+              <a:rPr lang="en" sz="1000">
+                <a:highlight>
+                  <a:schemeClr val="dk2"/>
+                </a:highlight>
+                <a:latin typeface="Consolas"/>
+                <a:ea typeface="Consolas"/>
+                <a:cs typeface="Consolas"/>
+                <a:sym typeface="Consolas"/>
+              </a:rPr>
+              <a:t>public static B2Vec2 ToMeters(Vector2 pixels) =&gt;</a:t>
+            </a:r>
+            <a:endParaRPr sz="1000">
+              <a:solidFill>
+                <a:srgbClr val="CCCCCC"/>
+              </a:solidFill>
+              <a:highlight>
+                <a:schemeClr val="dk2"/>
+              </a:highlight>
+              <a:latin typeface="Consolas"/>
+              <a:ea typeface="Consolas"/>
+              <a:cs typeface="Consolas"/>
+              <a:sym typeface="Consolas"/>
+            </a:endParaRPr>
+          </a:p>
+          <a:p>
+            <a:pPr indent="0" lvl="0" marL="0" rtl="0" algn="l">
+              <a:lnSpc>
+                <a:spcPct val="115000"/>
+              </a:lnSpc>
+              <a:spcBef>
+                <a:spcPts val="0"/>
+              </a:spcBef>
+              <a:spcAft>
+                <a:spcPts val="0"/>
+              </a:spcAft>
+              <a:buNone/>
+            </a:pPr>
+            <a:r>
+              <a:rPr lang="en" sz="1000">
+                <a:highlight>
+                  <a:schemeClr val="dk2"/>
+                </a:highlight>
+                <a:latin typeface="Consolas"/>
+                <a:ea typeface="Consolas"/>
+                <a:cs typeface="Consolas"/>
+                <a:sym typeface="Consolas"/>
+              </a:rPr>
+              <a:t>    new(pixels.X / PixelsPerMeter,</a:t>
+            </a:r>
+            <a:endParaRPr sz="1000">
+              <a:solidFill>
+                <a:srgbClr val="CCCCCC"/>
+              </a:solidFill>
+              <a:highlight>
+                <a:schemeClr val="dk2"/>
+              </a:highlight>
+              <a:latin typeface="Consolas"/>
+              <a:ea typeface="Consolas"/>
+              <a:cs typeface="Consolas"/>
+              <a:sym typeface="Consolas"/>
+            </a:endParaRPr>
+          </a:p>
+          <a:p>
+            <a:pPr indent="0" lvl="0" marL="0" rtl="0" algn="l">
+              <a:lnSpc>
+                <a:spcPct val="115000"/>
+              </a:lnSpc>
+              <a:spcBef>
+                <a:spcPts val="0"/>
+              </a:spcBef>
+              <a:spcAft>
+                <a:spcPts val="0"/>
+              </a:spcAft>
+              <a:buNone/>
+            </a:pPr>
+            <a:r>
+              <a:rPr lang="en" sz="1000">
+                <a:highlight>
+                  <a:schemeClr val="dk2"/>
+                </a:highlight>
+                <a:latin typeface="Consolas"/>
+                <a:ea typeface="Consolas"/>
+                <a:cs typeface="Consolas"/>
+                <a:sym typeface="Consolas"/>
+              </a:rPr>
+              <a:t>        -pixels.Y / PixelsPerMeter);</a:t>
+            </a:r>
+            <a:endParaRPr sz="1000">
+              <a:solidFill>
+                <a:srgbClr val="CCCCCC"/>
+              </a:solidFill>
+              <a:highlight>
+                <a:schemeClr val="dk2"/>
+              </a:highlight>
+              <a:latin typeface="Consolas"/>
+              <a:ea typeface="Consolas"/>
+              <a:cs typeface="Consolas"/>
+              <a:sym typeface="Consolas"/>
+            </a:endParaRPr>
+          </a:p>
+          <a:p>
+            <a:pPr indent="0" lvl="0" marL="0" rtl="0" algn="l">
+              <a:lnSpc>
+                <a:spcPct val="115000"/>
+              </a:lnSpc>
+              <a:spcBef>
+                <a:spcPts val="0"/>
+              </a:spcBef>
+              <a:spcAft>
+                <a:spcPts val="0"/>
+              </a:spcAft>
+              <a:buNone/>
+            </a:pPr>
+            <a:r>
+              <a:rPr lang="en" sz="1000">
+                <a:highlight>
+                  <a:schemeClr val="dk2"/>
+                </a:highlight>
+                <a:latin typeface="Consolas"/>
+                <a:ea typeface="Consolas"/>
+                <a:cs typeface="Consolas"/>
+                <a:sym typeface="Consolas"/>
+              </a:rPr>
+              <a:t/>
+            </a:r>
+            <a:endParaRPr sz="1000">
+              <a:solidFill>
+                <a:srgbClr val="CCCCCC"/>
+              </a:solidFill>
+              <a:highlight>
+                <a:schemeClr val="dk2"/>
+              </a:highlight>
+              <a:latin typeface="Consolas"/>
+              <a:ea typeface="Consolas"/>
+              <a:cs typeface="Consolas"/>
+              <a:sym typeface="Consolas"/>
+            </a:endParaRPr>
+          </a:p>
+          <a:p>
+            <a:pPr indent="0" lvl="0" marL="0" rtl="0" algn="l">
+              <a:lnSpc>
+                <a:spcPct val="115000"/>
+              </a:lnSpc>
+              <a:spcBef>
+                <a:spcPts val="0"/>
+              </a:spcBef>
+              <a:spcAft>
+                <a:spcPts val="0"/>
+              </a:spcAft>
+              <a:buNone/>
+            </a:pPr>
+            <a:r>
+              <a:rPr lang="en" sz="1000">
+                <a:highlight>
+                  <a:schemeClr val="dk2"/>
+                </a:highlight>
+                <a:latin typeface="Consolas"/>
+                <a:ea typeface="Consolas"/>
+                <a:cs typeface="Consolas"/>
+                <a:sym typeface="Consolas"/>
+              </a:rPr>
+              <a:t>// Block.cs</a:t>
+            </a:r>
+            <a:endParaRPr sz="1000">
+              <a:solidFill>
+                <a:srgbClr val="CCCCCC"/>
+              </a:solidFill>
+              <a:highlight>
+                <a:schemeClr val="dk2"/>
+              </a:highlight>
+              <a:latin typeface="Consolas"/>
+              <a:ea typeface="Consolas"/>
+              <a:cs typeface="Consolas"/>
+              <a:sym typeface="Consolas"/>
+            </a:endParaRPr>
+          </a:p>
+          <a:p>
+            <a:pPr indent="0" lvl="0" marL="0" rtl="0" algn="l">
+              <a:lnSpc>
+                <a:spcPct val="115000"/>
+              </a:lnSpc>
+              <a:spcBef>
+                <a:spcPts val="0"/>
+              </a:spcBef>
+              <a:spcAft>
+                <a:spcPts val="0"/>
+              </a:spcAft>
+              <a:buNone/>
+            </a:pPr>
+            <a:r>
+              <a:rPr lang="en" sz="1000">
+                <a:highlight>
+                  <a:schemeClr val="dk2"/>
+                </a:highlight>
+                <a:latin typeface="Consolas"/>
+                <a:ea typeface="Consolas"/>
+                <a:cs typeface="Consolas"/>
+                <a:sym typeface="Consolas"/>
+              </a:rPr>
+              <a:t>public Block(PhysicsWorld world, Vector2 center,</a:t>
+            </a:r>
+            <a:endParaRPr sz="1000">
+              <a:solidFill>
+                <a:srgbClr val="CCCCCC"/>
+              </a:solidFill>
+              <a:highlight>
+                <a:schemeClr val="dk2"/>
+              </a:highlight>
+              <a:latin typeface="Consolas"/>
+              <a:ea typeface="Consolas"/>
+              <a:cs typeface="Consolas"/>
+              <a:sym typeface="Consolas"/>
+            </a:endParaRPr>
+          </a:p>
+          <a:p>
+            <a:pPr indent="0" lvl="0" marL="0" rtl="0" algn="l">
+              <a:lnSpc>
+                <a:spcPct val="115000"/>
+              </a:lnSpc>
+              <a:spcBef>
+                <a:spcPts val="0"/>
+              </a:spcBef>
+              <a:spcAft>
+                <a:spcPts val="0"/>
+              </a:spcAft>
+              <a:buNone/>
+            </a:pPr>
+            <a:r>
+              <a:rPr lang="en" sz="1000">
+                <a:highlight>
+                  <a:schemeClr val="dk2"/>
+                </a:highlight>
+                <a:latin typeface="Consolas"/>
+                <a:ea typeface="Consolas"/>
+                <a:cs typeface="Consolas"/>
+                <a:sym typeface="Consolas"/>
+              </a:rPr>
+              <a:t>    Vector2 size, float rotation,</a:t>
+            </a:r>
+            <a:endParaRPr sz="1000">
+              <a:solidFill>
+                <a:srgbClr val="CCCCCC"/>
+              </a:solidFill>
+              <a:highlight>
+                <a:schemeClr val="dk2"/>
+              </a:highlight>
+              <a:latin typeface="Consolas"/>
+              <a:ea typeface="Consolas"/>
+              <a:cs typeface="Consolas"/>
+              <a:sym typeface="Consolas"/>
+            </a:endParaRPr>
+          </a:p>
+          <a:p>
+            <a:pPr indent="0" lvl="0" marL="0" rtl="0" algn="l">
+              <a:lnSpc>
+                <a:spcPct val="115000"/>
+              </a:lnSpc>
+              <a:spcBef>
+                <a:spcPts val="0"/>
+              </a:spcBef>
+              <a:spcAft>
+                <a:spcPts val="0"/>
+              </a:spcAft>
+              <a:buNone/>
+            </a:pPr>
+            <a:r>
+              <a:rPr lang="en" sz="1000">
+                <a:highlight>
+                  <a:schemeClr val="dk2"/>
+                </a:highlight>
+                <a:latin typeface="Consolas"/>
+                <a:ea typeface="Consolas"/>
+                <a:cs typeface="Consolas"/>
+                <a:sym typeface="Consolas"/>
+              </a:rPr>
+              <a:t>    PhysicsMaterial material, TextureRegion sprite)</a:t>
+            </a:r>
+            <a:endParaRPr sz="1000">
+              <a:solidFill>
+                <a:srgbClr val="CCCCCC"/>
+              </a:solidFill>
+              <a:highlight>
+                <a:schemeClr val="dk2"/>
+              </a:highlight>
+              <a:latin typeface="Consolas"/>
+              <a:ea typeface="Consolas"/>
+              <a:cs typeface="Consolas"/>
+              <a:sym typeface="Consolas"/>
+            </a:endParaRPr>
+          </a:p>
+          <a:p>
+            <a:pPr indent="0" lvl="0" marL="0" rtl="0" algn="l">
+              <a:lnSpc>
+                <a:spcPct val="115000"/>
+              </a:lnSpc>
+              <a:spcBef>
+                <a:spcPts val="0"/>
+              </a:spcBef>
+              <a:spcAft>
+                <a:spcPts val="0"/>
+              </a:spcAft>
+              <a:buNone/>
+            </a:pPr>
+            <a:r>
+              <a:rPr lang="en" sz="1000">
+                <a:highlight>
+                  <a:schemeClr val="dk2"/>
+                </a:highlight>
+                <a:latin typeface="Consolas"/>
+                <a:ea typeface="Consolas"/>
+                <a:cs typeface="Consolas"/>
+                <a:sym typeface="Consolas"/>
+              </a:rPr>
+              <a:t>    : base(sprite)</a:t>
+            </a:r>
+            <a:endParaRPr sz="1000">
+              <a:solidFill>
+                <a:srgbClr val="CCCCCC"/>
+              </a:solidFill>
+              <a:highlight>
+                <a:schemeClr val="dk2"/>
+              </a:highlight>
+              <a:latin typeface="Consolas"/>
+              <a:ea typeface="Consolas"/>
+              <a:cs typeface="Consolas"/>
+              <a:sym typeface="Consolas"/>
+            </a:endParaRPr>
+          </a:p>
+          <a:p>
+            <a:pPr indent="0" lvl="0" marL="0" rtl="0" algn="l">
+              <a:lnSpc>
+                <a:spcPct val="115000"/>
+              </a:lnSpc>
+              <a:spcBef>
+                <a:spcPts val="0"/>
+              </a:spcBef>
+              <a:spcAft>
+                <a:spcPts val="0"/>
+              </a:spcAft>
+              <a:buNone/>
+            </a:pPr>
+            <a:r>
+              <a:rPr lang="en" sz="1000">
+                <a:highlight>
+                  <a:schemeClr val="dk2"/>
+                </a:highlight>
+                <a:latin typeface="Consolas"/>
+                <a:ea typeface="Consolas"/>
+                <a:cs typeface="Consolas"/>
+                <a:sym typeface="Consolas"/>
+              </a:rPr>
+              <a:t>{</a:t>
+            </a:r>
+            <a:endParaRPr sz="1000">
+              <a:solidFill>
+                <a:srgbClr val="CCCCCC"/>
+              </a:solidFill>
+              <a:highlight>
+                <a:schemeClr val="dk2"/>
+              </a:highlight>
+              <a:latin typeface="Consolas"/>
+              <a:ea typeface="Consolas"/>
+              <a:cs typeface="Consolas"/>
+              <a:sym typeface="Consolas"/>
+            </a:endParaRPr>
+          </a:p>
+          <a:p>
+            <a:pPr indent="0" lvl="0" marL="0" rtl="0" algn="l">
+              <a:lnSpc>
+                <a:spcPct val="115000"/>
+              </a:lnSpc>
+              <a:spcBef>
+                <a:spcPts val="0"/>
+              </a:spcBef>
+              <a:spcAft>
+                <a:spcPts val="0"/>
+              </a:spcAft>
+              <a:buNone/>
+            </a:pPr>
+            <a:r>
+              <a:rPr lang="en" sz="1000">
+                <a:highlight>
+                  <a:schemeClr val="dk2"/>
+                </a:highlight>
+                <a:latin typeface="Consolas"/>
+                <a:ea typeface="Consolas"/>
+                <a:cs typeface="Consolas"/>
+                <a:sym typeface="Consolas"/>
+              </a:rPr>
+              <a:t>    Body = world.CreateBox(center, size,</a:t>
+            </a:r>
+            <a:endParaRPr sz="1000">
+              <a:solidFill>
+                <a:srgbClr val="CCCCCC"/>
+              </a:solidFill>
+              <a:highlight>
+                <a:schemeClr val="dk2"/>
+              </a:highlight>
+              <a:latin typeface="Consolas"/>
+              <a:ea typeface="Consolas"/>
+              <a:cs typeface="Consolas"/>
+              <a:sym typeface="Consolas"/>
+            </a:endParaRPr>
+          </a:p>
+          <a:p>
+            <a:pPr indent="0" lvl="0" marL="0" rtl="0" algn="l">
+              <a:lnSpc>
+                <a:spcPct val="115000"/>
+              </a:lnSpc>
+              <a:spcBef>
+                <a:spcPts val="0"/>
+              </a:spcBef>
+              <a:spcAft>
+                <a:spcPts val="0"/>
+              </a:spcAft>
+              <a:buNone/>
+            </a:pPr>
+            <a:r>
+              <a:rPr lang="en" sz="1000">
+                <a:highlight>
+                  <a:schemeClr val="dk2"/>
+                </a:highlight>
+                <a:latin typeface="Consolas"/>
+                <a:ea typeface="Consolas"/>
+                <a:cs typeface="Consolas"/>
+                <a:sym typeface="Consolas"/>
+              </a:rPr>
+              <a:t>        rotation, material, this);</a:t>
+            </a:r>
+            <a:endParaRPr sz="1000">
+              <a:solidFill>
+                <a:srgbClr val="CCCCCC"/>
+              </a:solidFill>
+              <a:highlight>
+                <a:schemeClr val="dk2"/>
+              </a:highlight>
+              <a:latin typeface="Consolas"/>
+              <a:ea typeface="Consolas"/>
+              <a:cs typeface="Consolas"/>
+              <a:sym typeface="Consolas"/>
+            </a:endParaRPr>
+          </a:p>
+          <a:p>
+            <a:pPr indent="0" lvl="0" marL="0" rtl="0" algn="l">
+              <a:lnSpc>
+                <a:spcPct val="115000"/>
+              </a:lnSpc>
+              <a:spcBef>
+                <a:spcPts val="0"/>
+              </a:spcBef>
+              <a:spcAft>
+                <a:spcPts val="0"/>
+              </a:spcAft>
+              <a:buNone/>
+            </a:pPr>
+            <a:r>
+              <a:rPr lang="en" sz="1000">
+                <a:highlight>
+                  <a:schemeClr val="dk2"/>
+                </a:highlight>
+                <a:latin typeface="Consolas"/>
+                <a:ea typeface="Consolas"/>
+                <a:cs typeface="Consolas"/>
+                <a:sym typeface="Consolas"/>
+              </a:rPr>
+              <a:t>}</a:t>
+            </a:r>
+            <a:endParaRPr sz="1000">
+              <a:solidFill>
+                <a:srgbClr val="CCCCCC"/>
+              </a:solidFill>
+              <a:highlight>
+                <a:schemeClr val="dk2"/>
+              </a:highlight>
+              <a:latin typeface="Consolas"/>
+              <a:ea typeface="Consolas"/>
+              <a:cs typeface="Consolas"/>
+              <a:sym typeface="Consolas"/>
+            </a:endParaRPr>
+          </a:p>
+        </p:txBody>
+      </p:sp>
+    </p:spTree>
+  </p:cSld>
+  <p:clrMapOvr>
+    <a:masterClrMapping/>
+  </p:clrMapOvr>
+</p:sld>
+</file>
+
+<file path=ppt/slides/slide13.xml><?xml version="1.0" encoding="utf-8"?>
 <p:sld xmlns:a="http://schemas.openxmlformats.org/drawingml/2006/main" xmlns:p="http://schemas.openxmlformats.org/presentationml/2006/main" xmlns:r="http://schemas.openxmlformats.org/officeDocument/2006/relationships">
   <p:cSld>
     <p:spTree>
@@ -8328,7 +8775,7 @@
 </p:sld>
 </file>
 
-<file path=ppt/slides/slide13.xml><?xml version="1.0" encoding="utf-8"?>
+<file path=ppt/slides/slide14.xml><?xml version="1.0" encoding="utf-8"?>
 <p:sld xmlns:a="http://schemas.openxmlformats.org/drawingml/2006/main" xmlns:p="http://schemas.openxmlformats.org/presentationml/2006/main" xmlns:r="http://schemas.openxmlformats.org/officeDocument/2006/relationships">
   <p:cSld>
     <p:spTree>
@@ -8444,826 +8891,6 @@
               <a:t>Birds0 → Birds1: Box2D behind PhysicsWorld and PhysicsBody</a:t>
             </a:r>
             <a:endParaRPr sz="1800"/>
-          </a:p>
-        </p:txBody>
-      </p:sp>
-    </p:spTree>
-  </p:cSld>
-  <p:clrMapOvr>
-    <a:masterClrMapping/>
-  </p:clrMapOvr>
-</p:sld>
-</file>
-
-<file path=ppt/slides/slide14.xml><?xml version="1.0" encoding="utf-8"?>
-<p:sld xmlns:a="http://schemas.openxmlformats.org/drawingml/2006/main" xmlns:p="http://schemas.openxmlformats.org/presentationml/2006/main" xmlns:r="http://schemas.openxmlformats.org/officeDocument/2006/relationships">
-  <p:cSld>
-    <p:spTree>
-      <p:nvGrpSpPr>
-        <p:cNvPr id="1" name=""/>
-        <p:cNvGrpSpPr/>
-        <p:nvPr/>
-      </p:nvGrpSpPr>
-      <p:grpSpPr/>
-      <p:sp>
-        <p:nvSpPr>
-          <p:cNvPr id="140" name="Google Shape;140;p23"/>
-          <p:cNvSpPr txBox="1"/>
-          <p:nvPr>
-            <p:ph type="title"/>
-          </p:nvPr>
-        </p:nvSpPr>
-        <p:spPr>
-          <a:xfrm>
-            <a:off x="311700" y="195615"/>
-            <a:ext cx="8520600" cy="572700"/>
-          </a:xfrm>
-          <a:prstGeom prst="rect">
-            <a:avLst/>
-          </a:prstGeom>
-        </p:spPr>
-        <p:txBody>
-          <a:bodyPr anchorCtr="0" anchor="t" bIns="91425" lIns="91425" spcFirstLastPara="1" rIns="91425" wrap="square" tIns="91425">
-            <a:normAutofit fontScale="90000"/>
-          </a:bodyPr>
-          <a:lstStyle/>
-          <a:p>
-            <a:pPr indent="0" lvl="0" marL="0" rtl="0" algn="l">
-              <a:spcBef>
-                <a:spcPts val="0"/>
-              </a:spcBef>
-              <a:spcAft>
-                <a:spcPts val="0"/>
-              </a:spcAft>
-              <a:buNone/>
-            </a:pPr>
-            <a:r>
-              <a:rPr lang="en"/>
-              <a:t>Contact Events</a:t>
-            </a:r>
-            <a:endParaRPr/>
-          </a:p>
-        </p:txBody>
-      </p:sp>
-      <p:sp>
-        <p:nvSpPr>
-          <p:cNvPr id="293" name="Google Shape;293;p45"/>
-          <p:cNvSpPr txBox="1"/>
-          <p:nvPr>
-            <p:ph type="title"/>
-          </p:nvPr>
-        </p:nvSpPr>
-        <p:spPr>
-          <a:xfrm>
-            <a:off x="311700" y="1152475"/>
-            <a:ext cx="3700000" cy="3500000"/>
-          </a:xfrm>
-          <a:prstGeom prst="rect">
-            <a:avLst/>
-          </a:prstGeom>
-        </p:spPr>
-        <p:txBody>
-          <a:bodyPr anchorCtr="0" anchor="t" bIns="91425" lIns="91425" spcFirstLastPara="1" rIns="91425" wrap="square" tIns="91425">
-            <a:normAutofit fontScale="90000"/>
-          </a:bodyPr>
-          <a:lstStyle/>
-          <a:p>
-            <a:pPr indent="-330200" lvl="0" marL="457200" rtl="0" algn="l">
-              <a:buClr>
-                <a:srgbClr val="DEE2E6"/>
-              </a:buClr>
-              <a:spcBef>
-                <a:spcPts val="0"/>
-              </a:spcBef>
-              <a:spcAft>
-                <a:spcPts val="0"/>
-              </a:spcAft>
-              <a:buSzPts val="1600"/>
-              <a:buChar char="●"/>
-            </a:pPr>
-            <a:r>
-              <a:rPr lang="en" sz="1600">
-                <a:solidFill>
-                  <a:srgbClr val="DEE2E6"/>
-                </a:solidFill>
-              </a:rPr>
-              <a:t>Box2D collects hit events during the step</a:t>
-            </a:r>
-            <a:endParaRPr/>
-          </a:p>
-          <a:p>
-            <a:pPr indent="-317500" lvl="1" marL="914400" rtl="0" algn="l">
-              <a:buClr>
-                <a:srgbClr val="6C757D"/>
-              </a:buClr>
-              <a:spcBef>
-                <a:spcPts val="0"/>
-              </a:spcBef>
-              <a:spcAft>
-                <a:spcPts val="0"/>
-              </a:spcAft>
-              <a:buSzPts val="1400"/>
-              <a:buChar char="○"/>
-            </a:pPr>
-            <a:r>
-              <a:rPr lang="en" sz="1400">
-                <a:solidFill>
-                  <a:srgbClr val="6C757D"/>
-                </a:solidFill>
-              </a:rPr>
-              <a:t>Read after the step</a:t>
-            </a:r>
-            <a:endParaRPr/>
-          </a:p>
-          <a:p>
-            <a:pPr indent="-330200" lvl="0" marL="457200" rtl="0" algn="l">
-              <a:buClr>
-                <a:srgbClr val="DEE2E6"/>
-              </a:buClr>
-              <a:spcBef>
-                <a:spcPts val="0"/>
-              </a:spcBef>
-              <a:spcAft>
-                <a:spcPts val="0"/>
-              </a:spcAft>
-              <a:buSzPts val="1600"/>
-              <a:buChar char="●"/>
-            </a:pPr>
-            <a:r>
-              <a:rPr lang="en" sz="1600">
-                <a:solidFill>
-                  <a:srgbClr val="DEE2E6"/>
-                </a:solidFill>
-              </a:rPr>
-              <a:t>The facade turns them into a C# event, in our terms</a:t>
-            </a:r>
-            <a:endParaRPr/>
-          </a:p>
-          <a:p>
-            <a:pPr indent="-317500" lvl="1" marL="914400" rtl="0" algn="l">
-              <a:buClr>
-                <a:srgbClr val="6C757D"/>
-              </a:buClr>
-              <a:spcBef>
-                <a:spcPts val="0"/>
-              </a:spcBef>
-              <a:spcAft>
-                <a:spcPts val="0"/>
-              </a:spcAft>
-              <a:buSzPts val="1400"/>
-              <a:buChar char="○"/>
-            </a:pPr>
-            <a:r>
-              <a:rPr lang="en" sz="1400">
-                <a:solidFill>
-                  <a:srgbClr val="6C757D"/>
-                </a:solidFill>
-              </a:rPr>
-              <a:t>Bodies, and a speed in pixels per second</a:t>
-            </a:r>
-            <a:endParaRPr/>
-          </a:p>
-          <a:p>
-            <a:pPr indent="-330200" lvl="0" marL="457200" rtl="0" algn="l">
-              <a:buClr>
-                <a:srgbClr val="DEE2E6"/>
-              </a:buClr>
-              <a:spcBef>
-                <a:spcPts val="0"/>
-              </a:spcBef>
-              <a:spcAft>
-                <a:spcPts val="0"/>
-              </a:spcAft>
-              <a:buSzPts val="1600"/>
-              <a:buChar char="●"/>
-            </a:pPr>
-            <a:r>
-              <a:rPr lang="en" sz="1600">
-                <a:solidFill>
-                  <a:srgbClr val="DEE2E6"/>
-                </a:solidFill>
-              </a:rPr>
-              <a:t>The game damages both entities</a:t>
-            </a:r>
-            <a:endParaRPr/>
-          </a:p>
-          <a:p>
-            <a:pPr indent="-317500" lvl="1" marL="914400" rtl="0" algn="l">
-              <a:buClr>
-                <a:srgbClr val="6C757D"/>
-              </a:buClr>
-              <a:spcBef>
-                <a:spcPts val="0"/>
-              </a:spcBef>
-              <a:spcAft>
-                <a:spcPts val="0"/>
-              </a:spcAft>
-              <a:buSzPts val="1400"/>
-              <a:buChar char="○"/>
-            </a:pPr>
-            <a:r>
-              <a:rPr lang="en" sz="1400">
-                <a:solidFill>
-                  <a:srgbClr val="6C757D"/>
-                </a:solidFill>
-              </a:rPr>
-              <a:t>Glass breaks easily, stone hardly at all</a:t>
-            </a:r>
-            <a:endParaRPr/>
-          </a:p>
-        </p:txBody>
-      </p:sp>
-      <p:sp>
-        <p:nvSpPr>
-          <p:cNvPr id="141" name="Google Shape;141;p23"/>
-          <p:cNvSpPr txBox="1"/>
-          <p:nvPr>
-            <p:ph idx="2" type="body"/>
-          </p:nvPr>
-        </p:nvSpPr>
-        <p:spPr>
-          <a:xfrm>
-            <a:off x="4150000" y="1152475"/>
-            <a:ext cx="4750000" cy="3600000"/>
-          </a:xfrm>
-          <a:prstGeom prst="rect">
-            <a:avLst/>
-          </a:prstGeom>
-        </p:spPr>
-        <p:txBody>
-          <a:bodyPr anchorCtr="0" anchor="t" bIns="91425" lIns="91425" spcFirstLastPara="1" rIns="91425" wrap="square" tIns="91425">
-            <a:noAutofit/>
-          </a:bodyPr>
-          <a:lstStyle/>
-          <a:p>
-            <a:pPr indent="0" lvl="0" marL="0" rtl="0" algn="l">
-              <a:lnSpc>
-                <a:spcPct val="115000"/>
-              </a:lnSpc>
-              <a:spcBef>
-                <a:spcPts val="0"/>
-              </a:spcBef>
-              <a:spcAft>
-                <a:spcPts val="0"/>
-              </a:spcAft>
-              <a:buNone/>
-            </a:pPr>
-            <a:r>
-              <a:rPr lang="en" sz="1000">
-                <a:highlight>
-                  <a:schemeClr val="dk2"/>
-                </a:highlight>
-                <a:latin typeface="Consolas"/>
-                <a:ea typeface="Consolas"/>
-                <a:cs typeface="Consolas"/>
-                <a:sym typeface="Consolas"/>
-              </a:rPr>
-              <a:t>public event Action&lt;PhysicsBody, PhysicsBody,</a:t>
-            </a:r>
-            <a:endParaRPr sz="1000">
-              <a:solidFill>
-                <a:srgbClr val="CCCCCC"/>
-              </a:solidFill>
-              <a:highlight>
-                <a:schemeClr val="dk2"/>
-              </a:highlight>
-              <a:latin typeface="Consolas"/>
-              <a:ea typeface="Consolas"/>
-              <a:cs typeface="Consolas"/>
-              <a:sym typeface="Consolas"/>
-            </a:endParaRPr>
-          </a:p>
-          <a:p>
-            <a:pPr indent="0" lvl="0" marL="0" rtl="0" algn="l">
-              <a:lnSpc>
-                <a:spcPct val="115000"/>
-              </a:lnSpc>
-              <a:spcBef>
-                <a:spcPts val="0"/>
-              </a:spcBef>
-              <a:spcAft>
-                <a:spcPts val="0"/>
-              </a:spcAft>
-              <a:buNone/>
-            </a:pPr>
-            <a:r>
-              <a:rPr lang="en" sz="1000">
-                <a:highlight>
-                  <a:schemeClr val="dk2"/>
-                </a:highlight>
-                <a:latin typeface="Consolas"/>
-                <a:ea typeface="Consolas"/>
-                <a:cs typeface="Consolas"/>
-                <a:sym typeface="Consolas"/>
-              </a:rPr>
-              <a:t>    float&gt; Hit;</a:t>
-            </a:r>
-            <a:endParaRPr sz="1000">
-              <a:solidFill>
-                <a:srgbClr val="CCCCCC"/>
-              </a:solidFill>
-              <a:highlight>
-                <a:schemeClr val="dk2"/>
-              </a:highlight>
-              <a:latin typeface="Consolas"/>
-              <a:ea typeface="Consolas"/>
-              <a:cs typeface="Consolas"/>
-              <a:sym typeface="Consolas"/>
-            </a:endParaRPr>
-          </a:p>
-          <a:p>
-            <a:pPr indent="0" lvl="0" marL="0" rtl="0" algn="l">
-              <a:lnSpc>
-                <a:spcPct val="115000"/>
-              </a:lnSpc>
-              <a:spcBef>
-                <a:spcPts val="0"/>
-              </a:spcBef>
-              <a:spcAft>
-                <a:spcPts val="0"/>
-              </a:spcAft>
-              <a:buNone/>
-            </a:pPr>
-            <a:r>
-              <a:rPr lang="en" sz="1000">
-                <a:highlight>
-                  <a:schemeClr val="dk2"/>
-                </a:highlight>
-                <a:latin typeface="Consolas"/>
-                <a:ea typeface="Consolas"/>
-                <a:cs typeface="Consolas"/>
-                <a:sym typeface="Consolas"/>
-              </a:rPr>
-              <a:t/>
-            </a:r>
-            <a:endParaRPr sz="1000">
-              <a:solidFill>
-                <a:srgbClr val="CCCCCC"/>
-              </a:solidFill>
-              <a:highlight>
-                <a:schemeClr val="dk2"/>
-              </a:highlight>
-              <a:latin typeface="Consolas"/>
-              <a:ea typeface="Consolas"/>
-              <a:cs typeface="Consolas"/>
-              <a:sym typeface="Consolas"/>
-            </a:endParaRPr>
-          </a:p>
-          <a:p>
-            <a:pPr indent="0" lvl="0" marL="0" rtl="0" algn="l">
-              <a:lnSpc>
-                <a:spcPct val="115000"/>
-              </a:lnSpc>
-              <a:spcBef>
-                <a:spcPts val="0"/>
-              </a:spcBef>
-              <a:spcAft>
-                <a:spcPts val="0"/>
-              </a:spcAft>
-              <a:buNone/>
-            </a:pPr>
-            <a:r>
-              <a:rPr lang="en" sz="1000">
-                <a:highlight>
-                  <a:schemeClr val="dk2"/>
-                </a:highlight>
-                <a:latin typeface="Consolas"/>
-                <a:ea typeface="Consolas"/>
-                <a:cs typeface="Consolas"/>
-                <a:sym typeface="Consolas"/>
-              </a:rPr>
-              <a:t>B2ContactEvents events =</a:t>
-            </a:r>
-            <a:endParaRPr sz="1000">
-              <a:solidFill>
-                <a:srgbClr val="CCCCCC"/>
-              </a:solidFill>
-              <a:highlight>
-                <a:schemeClr val="dk2"/>
-              </a:highlight>
-              <a:latin typeface="Consolas"/>
-              <a:ea typeface="Consolas"/>
-              <a:cs typeface="Consolas"/>
-              <a:sym typeface="Consolas"/>
-            </a:endParaRPr>
-          </a:p>
-          <a:p>
-            <a:pPr indent="0" lvl="0" marL="0" rtl="0" algn="l">
-              <a:lnSpc>
-                <a:spcPct val="115000"/>
-              </a:lnSpc>
-              <a:spcBef>
-                <a:spcPts val="0"/>
-              </a:spcBef>
-              <a:spcAft>
-                <a:spcPts val="0"/>
-              </a:spcAft>
-              <a:buNone/>
-            </a:pPr>
-            <a:r>
-              <a:rPr lang="en" sz="1000">
-                <a:highlight>
-                  <a:schemeClr val="dk2"/>
-                </a:highlight>
-                <a:latin typeface="Consolas"/>
-                <a:ea typeface="Consolas"/>
-                <a:cs typeface="Consolas"/>
-                <a:sym typeface="Consolas"/>
-              </a:rPr>
-              <a:t>    b2World_GetContactEvents(_world);</a:t>
-            </a:r>
-            <a:endParaRPr sz="1000">
-              <a:solidFill>
-                <a:srgbClr val="CCCCCC"/>
-              </a:solidFill>
-              <a:highlight>
-                <a:schemeClr val="dk2"/>
-              </a:highlight>
-              <a:latin typeface="Consolas"/>
-              <a:ea typeface="Consolas"/>
-              <a:cs typeface="Consolas"/>
-              <a:sym typeface="Consolas"/>
-            </a:endParaRPr>
-          </a:p>
-          <a:p>
-            <a:pPr indent="0" lvl="0" marL="0" rtl="0" algn="l">
-              <a:lnSpc>
-                <a:spcPct val="115000"/>
-              </a:lnSpc>
-              <a:spcBef>
-                <a:spcPts val="0"/>
-              </a:spcBef>
-              <a:spcAft>
-                <a:spcPts val="0"/>
-              </a:spcAft>
-              <a:buNone/>
-            </a:pPr>
-            <a:r>
-              <a:rPr lang="en" sz="1000">
-                <a:highlight>
-                  <a:schemeClr val="dk2"/>
-                </a:highlight>
-                <a:latin typeface="Consolas"/>
-                <a:ea typeface="Consolas"/>
-                <a:cs typeface="Consolas"/>
-                <a:sym typeface="Consolas"/>
-              </a:rPr>
-              <a:t>for (int i = 0; i &lt; events.hitCount; i++)</a:t>
-            </a:r>
-            <a:endParaRPr sz="1000">
-              <a:solidFill>
-                <a:srgbClr val="CCCCCC"/>
-              </a:solidFill>
-              <a:highlight>
-                <a:schemeClr val="dk2"/>
-              </a:highlight>
-              <a:latin typeface="Consolas"/>
-              <a:ea typeface="Consolas"/>
-              <a:cs typeface="Consolas"/>
-              <a:sym typeface="Consolas"/>
-            </a:endParaRPr>
-          </a:p>
-          <a:p>
-            <a:pPr indent="0" lvl="0" marL="0" rtl="0" algn="l">
-              <a:lnSpc>
-                <a:spcPct val="115000"/>
-              </a:lnSpc>
-              <a:spcBef>
-                <a:spcPts val="0"/>
-              </a:spcBef>
-              <a:spcAft>
-                <a:spcPts val="0"/>
-              </a:spcAft>
-              <a:buNone/>
-            </a:pPr>
-            <a:r>
-              <a:rPr lang="en" sz="1000">
-                <a:highlight>
-                  <a:schemeClr val="dk2"/>
-                </a:highlight>
-                <a:latin typeface="Consolas"/>
-                <a:ea typeface="Consolas"/>
-                <a:cs typeface="Consolas"/>
-                <a:sym typeface="Consolas"/>
-              </a:rPr>
-              <a:t>{</a:t>
-            </a:r>
-            <a:endParaRPr sz="1000">
-              <a:solidFill>
-                <a:srgbClr val="CCCCCC"/>
-              </a:solidFill>
-              <a:highlight>
-                <a:schemeClr val="dk2"/>
-              </a:highlight>
-              <a:latin typeface="Consolas"/>
-              <a:ea typeface="Consolas"/>
-              <a:cs typeface="Consolas"/>
-              <a:sym typeface="Consolas"/>
-            </a:endParaRPr>
-          </a:p>
-          <a:p>
-            <a:pPr indent="0" lvl="0" marL="0" rtl="0" algn="l">
-              <a:lnSpc>
-                <a:spcPct val="115000"/>
-              </a:lnSpc>
-              <a:spcBef>
-                <a:spcPts val="0"/>
-              </a:spcBef>
-              <a:spcAft>
-                <a:spcPts val="0"/>
-              </a:spcAft>
-              <a:buNone/>
-            </a:pPr>
-            <a:r>
-              <a:rPr lang="en" sz="1000">
-                <a:highlight>
-                  <a:schemeClr val="dk2"/>
-                </a:highlight>
-                <a:latin typeface="Consolas"/>
-                <a:ea typeface="Consolas"/>
-                <a:cs typeface="Consolas"/>
-                <a:sym typeface="Consolas"/>
-              </a:rPr>
-              <a:t>    B2ContactHitEvent hit = events.hitEvents[i];</a:t>
-            </a:r>
-            <a:endParaRPr sz="1000">
-              <a:solidFill>
-                <a:srgbClr val="CCCCCC"/>
-              </a:solidFill>
-              <a:highlight>
-                <a:schemeClr val="dk2"/>
-              </a:highlight>
-              <a:latin typeface="Consolas"/>
-              <a:ea typeface="Consolas"/>
-              <a:cs typeface="Consolas"/>
-              <a:sym typeface="Consolas"/>
-            </a:endParaRPr>
-          </a:p>
-          <a:p>
-            <a:pPr indent="0" lvl="0" marL="0" rtl="0" algn="l">
-              <a:lnSpc>
-                <a:spcPct val="115000"/>
-              </a:lnSpc>
-              <a:spcBef>
-                <a:spcPts val="0"/>
-              </a:spcBef>
-              <a:spcAft>
-                <a:spcPts val="0"/>
-              </a:spcAft>
-              <a:buNone/>
-            </a:pPr>
-            <a:r>
-              <a:rPr lang="en" sz="1000">
-                <a:highlight>
-                  <a:schemeClr val="dk2"/>
-                </a:highlight>
-                <a:latin typeface="Consolas"/>
-                <a:ea typeface="Consolas"/>
-                <a:cs typeface="Consolas"/>
-                <a:sym typeface="Consolas"/>
-              </a:rPr>
-              <a:t>    if (!b2Shape_IsValid(hit.shapeIdA) ||</a:t>
-            </a:r>
-            <a:endParaRPr sz="1000">
-              <a:solidFill>
-                <a:srgbClr val="CCCCCC"/>
-              </a:solidFill>
-              <a:highlight>
-                <a:schemeClr val="dk2"/>
-              </a:highlight>
-              <a:latin typeface="Consolas"/>
-              <a:ea typeface="Consolas"/>
-              <a:cs typeface="Consolas"/>
-              <a:sym typeface="Consolas"/>
-            </a:endParaRPr>
-          </a:p>
-          <a:p>
-            <a:pPr indent="0" lvl="0" marL="0" rtl="0" algn="l">
-              <a:lnSpc>
-                <a:spcPct val="115000"/>
-              </a:lnSpc>
-              <a:spcBef>
-                <a:spcPts val="0"/>
-              </a:spcBef>
-              <a:spcAft>
-                <a:spcPts val="0"/>
-              </a:spcAft>
-              <a:buNone/>
-            </a:pPr>
-            <a:r>
-              <a:rPr lang="en" sz="1000">
-                <a:highlight>
-                  <a:schemeClr val="dk2"/>
-                </a:highlight>
-                <a:latin typeface="Consolas"/>
-                <a:ea typeface="Consolas"/>
-                <a:cs typeface="Consolas"/>
-                <a:sym typeface="Consolas"/>
-              </a:rPr>
-              <a:t>        !b2Shape_IsValid(hit.shapeIdB))</a:t>
-            </a:r>
-            <a:endParaRPr sz="1000">
-              <a:solidFill>
-                <a:srgbClr val="CCCCCC"/>
-              </a:solidFill>
-              <a:highlight>
-                <a:schemeClr val="dk2"/>
-              </a:highlight>
-              <a:latin typeface="Consolas"/>
-              <a:ea typeface="Consolas"/>
-              <a:cs typeface="Consolas"/>
-              <a:sym typeface="Consolas"/>
-            </a:endParaRPr>
-          </a:p>
-          <a:p>
-            <a:pPr indent="0" lvl="0" marL="0" rtl="0" algn="l">
-              <a:lnSpc>
-                <a:spcPct val="115000"/>
-              </a:lnSpc>
-              <a:spcBef>
-                <a:spcPts val="0"/>
-              </a:spcBef>
-              <a:spcAft>
-                <a:spcPts val="0"/>
-              </a:spcAft>
-              <a:buNone/>
-            </a:pPr>
-            <a:r>
-              <a:rPr lang="en" sz="1000">
-                <a:highlight>
-                  <a:schemeClr val="dk2"/>
-                </a:highlight>
-                <a:latin typeface="Consolas"/>
-                <a:ea typeface="Consolas"/>
-                <a:cs typeface="Consolas"/>
-                <a:sym typeface="Consolas"/>
-              </a:rPr>
-              <a:t>        continue;</a:t>
-            </a:r>
-            <a:endParaRPr sz="1000">
-              <a:solidFill>
-                <a:srgbClr val="CCCCCC"/>
-              </a:solidFill>
-              <a:highlight>
-                <a:schemeClr val="dk2"/>
-              </a:highlight>
-              <a:latin typeface="Consolas"/>
-              <a:ea typeface="Consolas"/>
-              <a:cs typeface="Consolas"/>
-              <a:sym typeface="Consolas"/>
-            </a:endParaRPr>
-          </a:p>
-          <a:p>
-            <a:pPr indent="0" lvl="0" marL="0" rtl="0" algn="l">
-              <a:lnSpc>
-                <a:spcPct val="115000"/>
-              </a:lnSpc>
-              <a:spcBef>
-                <a:spcPts val="0"/>
-              </a:spcBef>
-              <a:spcAft>
-                <a:spcPts val="0"/>
-              </a:spcAft>
-              <a:buNone/>
-            </a:pPr>
-            <a:r>
-              <a:rPr lang="en" sz="1000">
-                <a:highlight>
-                  <a:schemeClr val="dk2"/>
-                </a:highlight>
-                <a:latin typeface="Consolas"/>
-                <a:ea typeface="Consolas"/>
-                <a:cs typeface="Consolas"/>
-                <a:sym typeface="Consolas"/>
-              </a:rPr>
-              <a:t>    Hit?.Invoke(BodyOf(hit.shapeIdA),</a:t>
-            </a:r>
-            <a:endParaRPr sz="1000">
-              <a:solidFill>
-                <a:srgbClr val="CCCCCC"/>
-              </a:solidFill>
-              <a:highlight>
-                <a:schemeClr val="dk2"/>
-              </a:highlight>
-              <a:latin typeface="Consolas"/>
-              <a:ea typeface="Consolas"/>
-              <a:cs typeface="Consolas"/>
-              <a:sym typeface="Consolas"/>
-            </a:endParaRPr>
-          </a:p>
-          <a:p>
-            <a:pPr indent="0" lvl="0" marL="0" rtl="0" algn="l">
-              <a:lnSpc>
-                <a:spcPct val="115000"/>
-              </a:lnSpc>
-              <a:spcBef>
-                <a:spcPts val="0"/>
-              </a:spcBef>
-              <a:spcAft>
-                <a:spcPts val="0"/>
-              </a:spcAft>
-              <a:buNone/>
-            </a:pPr>
-            <a:r>
-              <a:rPr lang="en" sz="1000">
-                <a:highlight>
-                  <a:schemeClr val="dk2"/>
-                </a:highlight>
-                <a:latin typeface="Consolas"/>
-                <a:ea typeface="Consolas"/>
-                <a:cs typeface="Consolas"/>
-                <a:sym typeface="Consolas"/>
-              </a:rPr>
-              <a:t>        BodyOf(hit.shapeIdB),</a:t>
-            </a:r>
-            <a:endParaRPr sz="1000">
-              <a:solidFill>
-                <a:srgbClr val="CCCCCC"/>
-              </a:solidFill>
-              <a:highlight>
-                <a:schemeClr val="dk2"/>
-              </a:highlight>
-              <a:latin typeface="Consolas"/>
-              <a:ea typeface="Consolas"/>
-              <a:cs typeface="Consolas"/>
-              <a:sym typeface="Consolas"/>
-            </a:endParaRPr>
-          </a:p>
-          <a:p>
-            <a:pPr indent="0" lvl="0" marL="0" rtl="0" algn="l">
-              <a:lnSpc>
-                <a:spcPct val="115000"/>
-              </a:lnSpc>
-              <a:spcBef>
-                <a:spcPts val="0"/>
-              </a:spcBef>
-              <a:spcAft>
-                <a:spcPts val="0"/>
-              </a:spcAft>
-              <a:buNone/>
-            </a:pPr>
-            <a:r>
-              <a:rPr lang="en" sz="1000">
-                <a:highlight>
-                  <a:schemeClr val="dk2"/>
-                </a:highlight>
-                <a:latin typeface="Consolas"/>
-                <a:ea typeface="Consolas"/>
-                <a:cs typeface="Consolas"/>
-                <a:sym typeface="Consolas"/>
-              </a:rPr>
-              <a:t>        Units.ToPixels(hit.approachSpeed));</a:t>
-            </a:r>
-            <a:endParaRPr sz="1000">
-              <a:solidFill>
-                <a:srgbClr val="CCCCCC"/>
-              </a:solidFill>
-              <a:highlight>
-                <a:schemeClr val="dk2"/>
-              </a:highlight>
-              <a:latin typeface="Consolas"/>
-              <a:ea typeface="Consolas"/>
-              <a:cs typeface="Consolas"/>
-              <a:sym typeface="Consolas"/>
-            </a:endParaRPr>
-          </a:p>
-          <a:p>
-            <a:pPr indent="0" lvl="0" marL="0" rtl="0" algn="l">
-              <a:lnSpc>
-                <a:spcPct val="115000"/>
-              </a:lnSpc>
-              <a:spcBef>
-                <a:spcPts val="0"/>
-              </a:spcBef>
-              <a:spcAft>
-                <a:spcPts val="0"/>
-              </a:spcAft>
-              <a:buNone/>
-            </a:pPr>
-            <a:r>
-              <a:rPr lang="en" sz="1000">
-                <a:highlight>
-                  <a:schemeClr val="dk2"/>
-                </a:highlight>
-                <a:latin typeface="Consolas"/>
-                <a:ea typeface="Consolas"/>
-                <a:cs typeface="Consolas"/>
-                <a:sym typeface="Consolas"/>
-              </a:rPr>
-              <a:t>}</a:t>
-            </a:r>
-            <a:endParaRPr sz="1000">
-              <a:solidFill>
-                <a:srgbClr val="CCCCCC"/>
-              </a:solidFill>
-              <a:highlight>
-                <a:schemeClr val="dk2"/>
-              </a:highlight>
-              <a:latin typeface="Consolas"/>
-              <a:ea typeface="Consolas"/>
-              <a:cs typeface="Consolas"/>
-              <a:sym typeface="Consolas"/>
-            </a:endParaRPr>
           </a:p>
         </p:txBody>
       </p:sp>
@@ -9319,7 +8946,7 @@
             </a:pPr>
             <a:r>
               <a:rPr lang="en"/>
-              <a:t>Destroying Safely</a:t>
+              <a:t>Contact Events</a:t>
             </a:r>
             <a:endParaRPr/>
           </a:p>
@@ -9367,7 +8994,7 @@
                   <a:srgbClr val="DEE2E6"/>
                 </a:solidFill>
               </a:rPr>
-              <a:t>Not in the hit handler</a:t>
+              <a:t>Box2D collects hit events during the step</a:t>
             </a:r>
             <a:endParaRPr/>
           </a:p>
@@ -9391,7 +9018,31 @@
                   <a:srgbClr val="6C757D"/>
                 </a:solidFill>
               </a:rPr>
-              <a:t>More hits may be about the body you destroyed</a:t>
+              <a:t>Read after the step</a:t>
+            </a:r>
+            <a:endParaRPr/>
+          </a:p>
+          <a:p>
+            <a:pPr indent="-330200" lvl="0" marL="457200" rtl="0" algn="l">
+              <a:buClr>
+                <a:srgbClr val="DEE2E6"/>
+              </a:buClr>
+              <a:spcBef>
+                <a:spcPts val="0"/>
+              </a:spcBef>
+              <a:spcAft>
+                <a:spcPts val="0"/>
+              </a:spcAft>
+              <a:buSzPts val="1600"/>
+              <a:buChar char="●"/>
+            </a:pPr>
+            <a:r>
+              <a:rPr lang="en" sz="1600">
+                <a:solidFill>
+                  <a:srgbClr val="DEE2E6"/>
+                </a:solidFill>
+              </a:rPr>
+              <a:t>The facade turns them into a C# event, in our terms</a:t>
             </a:r>
             <a:endParaRPr/>
           </a:p>
@@ -9415,7 +9066,31 @@
                   <a:srgbClr val="6C757D"/>
                 </a:solidFill>
               </a:rPr>
-              <a:t>Many libraries crash if the world changes during a callback</a:t>
+              <a:t>Bodies, and a speed in pixels per second</a:t>
+            </a:r>
+            <a:endParaRPr/>
+          </a:p>
+          <a:p>
+            <a:pPr indent="-330200" lvl="0" marL="457200" rtl="0" algn="l">
+              <a:buClr>
+                <a:srgbClr val="DEE2E6"/>
+              </a:buClr>
+              <a:spcBef>
+                <a:spcPts val="0"/>
+              </a:spcBef>
+              <a:spcAft>
+                <a:spcPts val="0"/>
+              </a:spcAft>
+              <a:buSzPts val="1600"/>
+              <a:buChar char="●"/>
+            </a:pPr>
+            <a:r>
+              <a:rPr lang="en" sz="1600">
+                <a:solidFill>
+                  <a:srgbClr val="DEE2E6"/>
+                </a:solidFill>
+              </a:rPr>
+              <a:t>The game damages both entities</a:t>
             </a:r>
             <a:endParaRPr/>
           </a:p>
@@ -9439,55 +9114,7 @@
                   <a:srgbClr val="6C757D"/>
                 </a:solidFill>
               </a:rPr>
-              <a:t>You may be looping over the list</a:t>
-            </a:r>
-            <a:endParaRPr/>
-          </a:p>
-          <a:p>
-            <a:pPr indent="-330200" lvl="0" marL="457200" rtl="0" algn="l">
-              <a:buClr>
-                <a:srgbClr val="DEE2E6"/>
-              </a:buClr>
-              <a:spcBef>
-                <a:spcPts val="0"/>
-              </a:spcBef>
-              <a:spcAft>
-                <a:spcPts val="0"/>
-              </a:spcAft>
-              <a:buSzPts val="1600"/>
-              <a:buChar char="●"/>
-            </a:pPr>
-            <a:r>
-              <a:rPr lang="en" sz="1600">
-                <a:solidFill>
-                  <a:srgbClr val="DEE2E6"/>
-                </a:solidFill>
-              </a:rPr>
-              <a:t>Mark now, remove at a safe point</a:t>
-            </a:r>
-            <a:endParaRPr/>
-          </a:p>
-          <a:p>
-            <a:pPr indent="-330200" lvl="0" marL="457200" rtl="0" algn="l">
-              <a:buClr>
-                <a:srgbClr val="DEE2E6"/>
-              </a:buClr>
-              <a:spcBef>
-                <a:spcPts val="0"/>
-              </a:spcBef>
-              <a:spcAft>
-                <a:spcPts val="0"/>
-              </a:spcAft>
-              <a:buSzPts val="1600"/>
-              <a:buChar char="●"/>
-            </a:pPr>
-            <a:r>
-              <a:rPr lang="en" sz="1600">
-                <a:solidFill>
-                  <a:srgbClr val="DEE2E6"/>
-                </a:solidFill>
-              </a:rPr>
-              <a:t>Loop backwards when removing</a:t>
+              <a:t>Glass breaks easily, stone hardly at all</a:t>
             </a:r>
             <a:endParaRPr/>
           </a:p>
@@ -9538,7 +9165,7 @@
                 <a:cs typeface="Consolas"/>
                 <a:sym typeface="Consolas"/>
               </a:rPr>
-              <a:t>void OnHit(PhysicsBody a, PhysicsBody b,</a:t>
+              <a:t>public event Action&lt;PhysicsBody, PhysicsBody,</a:t>
             </a:r>
             <a:endParaRPr sz="1000">
               <a:solidFill>
@@ -9576,7 +9203,7 @@
                 <a:cs typeface="Consolas"/>
                 <a:sym typeface="Consolas"/>
               </a:rPr>
-              <a:t>    float speed)</a:t>
+              <a:t>    float&gt; Hit;</a:t>
             </a:r>
             <a:endParaRPr sz="1000">
               <a:solidFill>
@@ -9614,7 +9241,7 @@
                 <a:cs typeface="Consolas"/>
                 <a:sym typeface="Consolas"/>
               </a:rPr>
-              <a:t>{</a:t>
+              <a:t/>
             </a:r>
             <a:endParaRPr sz="1000">
               <a:solidFill>
@@ -9652,7 +9279,7 @@
                 <a:cs typeface="Consolas"/>
                 <a:sym typeface="Consolas"/>
               </a:rPr>
-              <a:t>    (a.Owner as Entity)?.TakeDamage(speed / 100);</a:t>
+              <a:t>B2ContactEvents events =</a:t>
             </a:r>
             <a:endParaRPr sz="1000">
               <a:solidFill>
@@ -9690,7 +9317,7 @@
                 <a:cs typeface="Consolas"/>
                 <a:sym typeface="Consolas"/>
               </a:rPr>
-              <a:t>    (b.Owner as Entity)?.TakeDamage(speed / 100);</a:t>
+              <a:t>    b2World_GetContactEvents(_world);</a:t>
             </a:r>
             <a:endParaRPr sz="1000">
               <a:solidFill>
@@ -9728,7 +9355,7 @@
                 <a:cs typeface="Consolas"/>
                 <a:sym typeface="Consolas"/>
               </a:rPr>
-              <a:t>}</a:t>
+              <a:t>for (int i = 0; i &lt; events.hitCount; i++)</a:t>
             </a:r>
             <a:endParaRPr sz="1000">
               <a:solidFill>
@@ -9766,7 +9393,7 @@
                 <a:cs typeface="Consolas"/>
                 <a:sym typeface="Consolas"/>
               </a:rPr>
-              <a:t/>
+              <a:t>{</a:t>
             </a:r>
             <a:endParaRPr sz="1000">
               <a:solidFill>
@@ -9804,7 +9431,7 @@
                 <a:cs typeface="Consolas"/>
                 <a:sym typeface="Consolas"/>
               </a:rPr>
-              <a:t>_physics.Update(deltaSeconds);</a:t>
+              <a:t>    B2ContactHitEvent hit = events.hitEvents[i];</a:t>
             </a:r>
             <a:endParaRPr sz="1000">
               <a:solidFill>
@@ -9842,7 +9469,7 @@
                 <a:cs typeface="Consolas"/>
                 <a:sym typeface="Consolas"/>
               </a:rPr>
-              <a:t>RemoveDestroyed();</a:t>
+              <a:t>    if (!b2Shape_IsValid(hit.shapeIdA) ||</a:t>
             </a:r>
             <a:endParaRPr sz="1000">
               <a:solidFill>
@@ -9880,7 +9507,7 @@
                 <a:cs typeface="Consolas"/>
                 <a:sym typeface="Consolas"/>
               </a:rPr>
-              <a:t/>
+              <a:t>        !b2Shape_IsValid(hit.shapeIdB))</a:t>
             </a:r>
             <a:endParaRPr sz="1000">
               <a:solidFill>
@@ -9918,7 +9545,7 @@
                 <a:cs typeface="Consolas"/>
                 <a:sym typeface="Consolas"/>
               </a:rPr>
-              <a:t>for (int i = _entities.Count - 1; i &gt;= 0; i--)</a:t>
+              <a:t>        continue;</a:t>
             </a:r>
             <a:endParaRPr sz="1000">
               <a:solidFill>
@@ -9956,7 +9583,7 @@
                 <a:cs typeface="Consolas"/>
                 <a:sym typeface="Consolas"/>
               </a:rPr>
-              <a:t>{</a:t>
+              <a:t>    Hit?.Invoke(BodyOf(hit.shapeIdA),</a:t>
             </a:r>
             <a:endParaRPr sz="1000">
               <a:solidFill>
@@ -9994,7 +9621,7 @@
                 <a:cs typeface="Consolas"/>
                 <a:sym typeface="Consolas"/>
               </a:rPr>
-              <a:t>    if (!_entities[i].IsDestroyed) continue;</a:t>
+              <a:t>        BodyOf(hit.shapeIdB),</a:t>
             </a:r>
             <a:endParaRPr sz="1000">
               <a:solidFill>
@@ -10032,7 +9659,7 @@
                 <a:cs typeface="Consolas"/>
                 <a:sym typeface="Consolas"/>
               </a:rPr>
-              <a:t>    _physics.Destroy(_entities[i].Body);</a:t>
+              <a:t>        Units.ToPixels(hit.approachSpeed));</a:t>
             </a:r>
             <a:endParaRPr sz="1000">
               <a:solidFill>
@@ -10070,7 +9697,7 @@
                 <a:cs typeface="Consolas"/>
                 <a:sym typeface="Consolas"/>
               </a:rPr>
-              <a:t>    _entities.RemoveAt(i);</a:t>
+              <a:t>}</a:t>
             </a:r>
             <a:endParaRPr sz="1000">
               <a:solidFill>
@@ -10085,6 +9712,256 @@
               <a:sym typeface="Consolas"/>
             </a:endParaRPr>
           </a:p>
+        </p:txBody>
+      </p:sp>
+    </p:spTree>
+  </p:cSld>
+  <p:clrMapOvr>
+    <a:masterClrMapping/>
+  </p:clrMapOvr>
+</p:sld>
+</file>
+
+<file path=ppt/slides/slide16.xml><?xml version="1.0" encoding="utf-8"?>
+<p:sld xmlns:a="http://schemas.openxmlformats.org/drawingml/2006/main" xmlns:p="http://schemas.openxmlformats.org/presentationml/2006/main" xmlns:r="http://schemas.openxmlformats.org/officeDocument/2006/relationships">
+  <p:cSld>
+    <p:spTree>
+      <p:nvGrpSpPr>
+        <p:cNvPr id="1" name=""/>
+        <p:cNvGrpSpPr/>
+        <p:nvPr/>
+      </p:nvGrpSpPr>
+      <p:grpSpPr/>
+      <p:sp>
+        <p:nvSpPr>
+          <p:cNvPr id="140" name="Google Shape;140;p23"/>
+          <p:cNvSpPr txBox="1"/>
+          <p:nvPr>
+            <p:ph type="title"/>
+          </p:nvPr>
+        </p:nvSpPr>
+        <p:spPr>
+          <a:xfrm>
+            <a:off x="311700" y="195615"/>
+            <a:ext cx="8520600" cy="572700"/>
+          </a:xfrm>
+          <a:prstGeom prst="rect">
+            <a:avLst/>
+          </a:prstGeom>
+        </p:spPr>
+        <p:txBody>
+          <a:bodyPr anchorCtr="0" anchor="t" bIns="91425" lIns="91425" spcFirstLastPara="1" rIns="91425" wrap="square" tIns="91425">
+            <a:normAutofit fontScale="90000"/>
+          </a:bodyPr>
+          <a:lstStyle/>
+          <a:p>
+            <a:pPr indent="0" lvl="0" marL="0" rtl="0" algn="l">
+              <a:spcBef>
+                <a:spcPts val="0"/>
+              </a:spcBef>
+              <a:spcAft>
+                <a:spcPts val="0"/>
+              </a:spcAft>
+              <a:buNone/>
+            </a:pPr>
+            <a:r>
+              <a:rPr lang="en"/>
+              <a:t>Destroying Safely</a:t>
+            </a:r>
+            <a:endParaRPr/>
+          </a:p>
+        </p:txBody>
+      </p:sp>
+      <p:sp>
+        <p:nvSpPr>
+          <p:cNvPr id="293" name="Google Shape;293;p45"/>
+          <p:cNvSpPr txBox="1"/>
+          <p:nvPr>
+            <p:ph type="title"/>
+          </p:nvPr>
+        </p:nvSpPr>
+        <p:spPr>
+          <a:xfrm>
+            <a:off x="311700" y="1152475"/>
+            <a:ext cx="3700000" cy="3500000"/>
+          </a:xfrm>
+          <a:prstGeom prst="rect">
+            <a:avLst/>
+          </a:prstGeom>
+        </p:spPr>
+        <p:txBody>
+          <a:bodyPr anchorCtr="0" anchor="t" bIns="91425" lIns="91425" spcFirstLastPara="1" rIns="91425" wrap="square" tIns="91425">
+            <a:normAutofit fontScale="90000"/>
+          </a:bodyPr>
+          <a:lstStyle/>
+          <a:p>
+            <a:pPr indent="-330200" lvl="0" marL="457200" rtl="0" algn="l">
+              <a:buClr>
+                <a:srgbClr val="DEE2E6"/>
+              </a:buClr>
+              <a:spcBef>
+                <a:spcPts val="0"/>
+              </a:spcBef>
+              <a:spcAft>
+                <a:spcPts val="0"/>
+              </a:spcAft>
+              <a:buSzPts val="1600"/>
+              <a:buChar char="●"/>
+            </a:pPr>
+            <a:r>
+              <a:rPr lang="en" sz="1600">
+                <a:solidFill>
+                  <a:srgbClr val="DEE2E6"/>
+                </a:solidFill>
+              </a:rPr>
+              <a:t>Not in the hit handler</a:t>
+            </a:r>
+            <a:endParaRPr/>
+          </a:p>
+          <a:p>
+            <a:pPr indent="-317500" lvl="1" marL="914400" rtl="0" algn="l">
+              <a:buClr>
+                <a:srgbClr val="6C757D"/>
+              </a:buClr>
+              <a:spcBef>
+                <a:spcPts val="0"/>
+              </a:spcBef>
+              <a:spcAft>
+                <a:spcPts val="0"/>
+              </a:spcAft>
+              <a:buSzPts val="1400"/>
+              <a:buChar char="○"/>
+            </a:pPr>
+            <a:r>
+              <a:rPr lang="en" sz="1400">
+                <a:solidFill>
+                  <a:srgbClr val="6C757D"/>
+                </a:solidFill>
+              </a:rPr>
+              <a:t>More hits may be about the body you destroyed</a:t>
+            </a:r>
+            <a:endParaRPr/>
+          </a:p>
+          <a:p>
+            <a:pPr indent="-317500" lvl="1" marL="914400" rtl="0" algn="l">
+              <a:buClr>
+                <a:srgbClr val="6C757D"/>
+              </a:buClr>
+              <a:spcBef>
+                <a:spcPts val="0"/>
+              </a:spcBef>
+              <a:spcAft>
+                <a:spcPts val="0"/>
+              </a:spcAft>
+              <a:buSzPts val="1400"/>
+              <a:buChar char="○"/>
+            </a:pPr>
+            <a:r>
+              <a:rPr lang="en" sz="1400">
+                <a:solidFill>
+                  <a:srgbClr val="6C757D"/>
+                </a:solidFill>
+              </a:rPr>
+              <a:t>Many libraries crash if the world changes during a callback</a:t>
+            </a:r>
+            <a:endParaRPr/>
+          </a:p>
+          <a:p>
+            <a:pPr indent="-317500" lvl="1" marL="914400" rtl="0" algn="l">
+              <a:buClr>
+                <a:srgbClr val="6C757D"/>
+              </a:buClr>
+              <a:spcBef>
+                <a:spcPts val="0"/>
+              </a:spcBef>
+              <a:spcAft>
+                <a:spcPts val="0"/>
+              </a:spcAft>
+              <a:buSzPts val="1400"/>
+              <a:buChar char="○"/>
+            </a:pPr>
+            <a:r>
+              <a:rPr lang="en" sz="1400">
+                <a:solidFill>
+                  <a:srgbClr val="6C757D"/>
+                </a:solidFill>
+              </a:rPr>
+              <a:t>You may be looping over the list</a:t>
+            </a:r>
+            <a:endParaRPr/>
+          </a:p>
+          <a:p>
+            <a:pPr indent="-330200" lvl="0" marL="457200" rtl="0" algn="l">
+              <a:buClr>
+                <a:srgbClr val="DEE2E6"/>
+              </a:buClr>
+              <a:spcBef>
+                <a:spcPts val="0"/>
+              </a:spcBef>
+              <a:spcAft>
+                <a:spcPts val="0"/>
+              </a:spcAft>
+              <a:buSzPts val="1600"/>
+              <a:buChar char="●"/>
+            </a:pPr>
+            <a:r>
+              <a:rPr lang="en" sz="1600">
+                <a:solidFill>
+                  <a:srgbClr val="DEE2E6"/>
+                </a:solidFill>
+              </a:rPr>
+              <a:t>Mark now, remove at a safe point</a:t>
+            </a:r>
+            <a:endParaRPr/>
+          </a:p>
+          <a:p>
+            <a:pPr indent="-330200" lvl="0" marL="457200" rtl="0" algn="l">
+              <a:buClr>
+                <a:srgbClr val="DEE2E6"/>
+              </a:buClr>
+              <a:spcBef>
+                <a:spcPts val="0"/>
+              </a:spcBef>
+              <a:spcAft>
+                <a:spcPts val="0"/>
+              </a:spcAft>
+              <a:buSzPts val="1600"/>
+              <a:buChar char="●"/>
+            </a:pPr>
+            <a:r>
+              <a:rPr lang="en" sz="1600">
+                <a:solidFill>
+                  <a:srgbClr val="DEE2E6"/>
+                </a:solidFill>
+              </a:rPr>
+              <a:t>Loop backwards when removing</a:t>
+            </a:r>
+            <a:endParaRPr/>
+          </a:p>
+        </p:txBody>
+      </p:sp>
+      <p:sp>
+        <p:nvSpPr>
+          <p:cNvPr id="141" name="Google Shape;141;p23"/>
+          <p:cNvSpPr txBox="1"/>
+          <p:nvPr>
+            <p:ph idx="2" type="body"/>
+          </p:nvPr>
+        </p:nvSpPr>
+        <p:spPr>
+          <a:xfrm>
+            <a:off x="4150000" y="1152475"/>
+            <a:ext cx="4750000" cy="3600000"/>
+          </a:xfrm>
+          <a:prstGeom prst="rect">
+            <a:avLst/>
+          </a:prstGeom>
+        </p:spPr>
+        <p:txBody>
+          <a:bodyPr anchorCtr="0" anchor="t" bIns="91425" lIns="91425" spcFirstLastPara="1" rIns="91425" wrap="square" tIns="91425">
+            <a:noAutofit/>
+          </a:bodyPr>
+          <a:lstStyle/>
           <a:p>
             <a:pPr indent="0" lvl="0" marL="0" rtl="0" algn="l">
               <a:lnSpc>
@@ -10108,7 +9985,7 @@
                 <a:cs typeface="Consolas"/>
                 <a:sym typeface="Consolas"/>
               </a:rPr>
-              <a:t>}</a:t>
+              <a:t>void OnHit(PhysicsBody a, PhysicsBody b,</a:t>
             </a:r>
             <a:endParaRPr sz="1000">
               <a:solidFill>
@@ -10123,6 +10000,576 @@
               <a:sym typeface="Consolas"/>
             </a:endParaRPr>
           </a:p>
+          <a:p>
+            <a:pPr indent="0" lvl="0" marL="0" rtl="0" algn="l">
+              <a:lnSpc>
+                <a:spcPct val="115000"/>
+              </a:lnSpc>
+              <a:spcBef>
+                <a:spcPts val="0"/>
+              </a:spcBef>
+              <a:spcAft>
+                <a:spcPts val="0"/>
+              </a:spcAft>
+              <a:buNone/>
+            </a:pPr>
+            <a:r>
+              <a:rPr lang="en" sz="1000">
+                <a:highlight>
+                  <a:schemeClr val="dk2"/>
+                </a:highlight>
+                <a:latin typeface="Consolas"/>
+                <a:ea typeface="Consolas"/>
+                <a:cs typeface="Consolas"/>
+                <a:sym typeface="Consolas"/>
+              </a:rPr>
+              <a:t>    float speed)</a:t>
+            </a:r>
+            <a:endParaRPr sz="1000">
+              <a:solidFill>
+                <a:srgbClr val="CCCCCC"/>
+              </a:solidFill>
+              <a:highlight>
+                <a:schemeClr val="dk2"/>
+              </a:highlight>
+              <a:latin typeface="Consolas"/>
+              <a:ea typeface="Consolas"/>
+              <a:cs typeface="Consolas"/>
+              <a:sym typeface="Consolas"/>
+            </a:endParaRPr>
+          </a:p>
+          <a:p>
+            <a:pPr indent="0" lvl="0" marL="0" rtl="0" algn="l">
+              <a:lnSpc>
+                <a:spcPct val="115000"/>
+              </a:lnSpc>
+              <a:spcBef>
+                <a:spcPts val="0"/>
+              </a:spcBef>
+              <a:spcAft>
+                <a:spcPts val="0"/>
+              </a:spcAft>
+              <a:buNone/>
+            </a:pPr>
+            <a:r>
+              <a:rPr lang="en" sz="1000">
+                <a:highlight>
+                  <a:schemeClr val="dk2"/>
+                </a:highlight>
+                <a:latin typeface="Consolas"/>
+                <a:ea typeface="Consolas"/>
+                <a:cs typeface="Consolas"/>
+                <a:sym typeface="Consolas"/>
+              </a:rPr>
+              <a:t>{</a:t>
+            </a:r>
+            <a:endParaRPr sz="1000">
+              <a:solidFill>
+                <a:srgbClr val="CCCCCC"/>
+              </a:solidFill>
+              <a:highlight>
+                <a:schemeClr val="dk2"/>
+              </a:highlight>
+              <a:latin typeface="Consolas"/>
+              <a:ea typeface="Consolas"/>
+              <a:cs typeface="Consolas"/>
+              <a:sym typeface="Consolas"/>
+            </a:endParaRPr>
+          </a:p>
+          <a:p>
+            <a:pPr indent="0" lvl="0" marL="0" rtl="0" algn="l">
+              <a:lnSpc>
+                <a:spcPct val="115000"/>
+              </a:lnSpc>
+              <a:spcBef>
+                <a:spcPts val="0"/>
+              </a:spcBef>
+              <a:spcAft>
+                <a:spcPts val="0"/>
+              </a:spcAft>
+              <a:buNone/>
+            </a:pPr>
+            <a:r>
+              <a:rPr lang="en" sz="1000">
+                <a:highlight>
+                  <a:schemeClr val="dk2"/>
+                </a:highlight>
+                <a:latin typeface="Consolas"/>
+                <a:ea typeface="Consolas"/>
+                <a:cs typeface="Consolas"/>
+                <a:sym typeface="Consolas"/>
+              </a:rPr>
+              <a:t>    (a.Owner as Entity)?.TakeDamage(speed / 100);</a:t>
+            </a:r>
+            <a:endParaRPr sz="1000">
+              <a:solidFill>
+                <a:srgbClr val="CCCCCC"/>
+              </a:solidFill>
+              <a:highlight>
+                <a:schemeClr val="dk2"/>
+              </a:highlight>
+              <a:latin typeface="Consolas"/>
+              <a:ea typeface="Consolas"/>
+              <a:cs typeface="Consolas"/>
+              <a:sym typeface="Consolas"/>
+            </a:endParaRPr>
+          </a:p>
+          <a:p>
+            <a:pPr indent="0" lvl="0" marL="0" rtl="0" algn="l">
+              <a:lnSpc>
+                <a:spcPct val="115000"/>
+              </a:lnSpc>
+              <a:spcBef>
+                <a:spcPts val="0"/>
+              </a:spcBef>
+              <a:spcAft>
+                <a:spcPts val="0"/>
+              </a:spcAft>
+              <a:buNone/>
+            </a:pPr>
+            <a:r>
+              <a:rPr lang="en" sz="1000">
+                <a:highlight>
+                  <a:schemeClr val="dk2"/>
+                </a:highlight>
+                <a:latin typeface="Consolas"/>
+                <a:ea typeface="Consolas"/>
+                <a:cs typeface="Consolas"/>
+                <a:sym typeface="Consolas"/>
+              </a:rPr>
+              <a:t>    (b.Owner as Entity)?.TakeDamage(speed / 100);</a:t>
+            </a:r>
+            <a:endParaRPr sz="1000">
+              <a:solidFill>
+                <a:srgbClr val="CCCCCC"/>
+              </a:solidFill>
+              <a:highlight>
+                <a:schemeClr val="dk2"/>
+              </a:highlight>
+              <a:latin typeface="Consolas"/>
+              <a:ea typeface="Consolas"/>
+              <a:cs typeface="Consolas"/>
+              <a:sym typeface="Consolas"/>
+            </a:endParaRPr>
+          </a:p>
+          <a:p>
+            <a:pPr indent="0" lvl="0" marL="0" rtl="0" algn="l">
+              <a:lnSpc>
+                <a:spcPct val="115000"/>
+              </a:lnSpc>
+              <a:spcBef>
+                <a:spcPts val="0"/>
+              </a:spcBef>
+              <a:spcAft>
+                <a:spcPts val="0"/>
+              </a:spcAft>
+              <a:buNone/>
+            </a:pPr>
+            <a:r>
+              <a:rPr lang="en" sz="1000">
+                <a:highlight>
+                  <a:schemeClr val="dk2"/>
+                </a:highlight>
+                <a:latin typeface="Consolas"/>
+                <a:ea typeface="Consolas"/>
+                <a:cs typeface="Consolas"/>
+                <a:sym typeface="Consolas"/>
+              </a:rPr>
+              <a:t>}</a:t>
+            </a:r>
+            <a:endParaRPr sz="1000">
+              <a:solidFill>
+                <a:srgbClr val="CCCCCC"/>
+              </a:solidFill>
+              <a:highlight>
+                <a:schemeClr val="dk2"/>
+              </a:highlight>
+              <a:latin typeface="Consolas"/>
+              <a:ea typeface="Consolas"/>
+              <a:cs typeface="Consolas"/>
+              <a:sym typeface="Consolas"/>
+            </a:endParaRPr>
+          </a:p>
+          <a:p>
+            <a:pPr indent="0" lvl="0" marL="0" rtl="0" algn="l">
+              <a:lnSpc>
+                <a:spcPct val="115000"/>
+              </a:lnSpc>
+              <a:spcBef>
+                <a:spcPts val="0"/>
+              </a:spcBef>
+              <a:spcAft>
+                <a:spcPts val="0"/>
+              </a:spcAft>
+              <a:buNone/>
+            </a:pPr>
+            <a:r>
+              <a:rPr lang="en" sz="1000">
+                <a:highlight>
+                  <a:schemeClr val="dk2"/>
+                </a:highlight>
+                <a:latin typeface="Consolas"/>
+                <a:ea typeface="Consolas"/>
+                <a:cs typeface="Consolas"/>
+                <a:sym typeface="Consolas"/>
+              </a:rPr>
+              <a:t/>
+            </a:r>
+            <a:endParaRPr sz="1000">
+              <a:solidFill>
+                <a:srgbClr val="CCCCCC"/>
+              </a:solidFill>
+              <a:highlight>
+                <a:schemeClr val="dk2"/>
+              </a:highlight>
+              <a:latin typeface="Consolas"/>
+              <a:ea typeface="Consolas"/>
+              <a:cs typeface="Consolas"/>
+              <a:sym typeface="Consolas"/>
+            </a:endParaRPr>
+          </a:p>
+          <a:p>
+            <a:pPr indent="0" lvl="0" marL="0" rtl="0" algn="l">
+              <a:lnSpc>
+                <a:spcPct val="115000"/>
+              </a:lnSpc>
+              <a:spcBef>
+                <a:spcPts val="0"/>
+              </a:spcBef>
+              <a:spcAft>
+                <a:spcPts val="0"/>
+              </a:spcAft>
+              <a:buNone/>
+            </a:pPr>
+            <a:r>
+              <a:rPr lang="en" sz="1000">
+                <a:highlight>
+                  <a:schemeClr val="dk2"/>
+                </a:highlight>
+                <a:latin typeface="Consolas"/>
+                <a:ea typeface="Consolas"/>
+                <a:cs typeface="Consolas"/>
+                <a:sym typeface="Consolas"/>
+              </a:rPr>
+              <a:t>_physics.Update(deltaSeconds);</a:t>
+            </a:r>
+            <a:endParaRPr sz="1000">
+              <a:solidFill>
+                <a:srgbClr val="CCCCCC"/>
+              </a:solidFill>
+              <a:highlight>
+                <a:schemeClr val="dk2"/>
+              </a:highlight>
+              <a:latin typeface="Consolas"/>
+              <a:ea typeface="Consolas"/>
+              <a:cs typeface="Consolas"/>
+              <a:sym typeface="Consolas"/>
+            </a:endParaRPr>
+          </a:p>
+          <a:p>
+            <a:pPr indent="0" lvl="0" marL="0" rtl="0" algn="l">
+              <a:lnSpc>
+                <a:spcPct val="115000"/>
+              </a:lnSpc>
+              <a:spcBef>
+                <a:spcPts val="0"/>
+              </a:spcBef>
+              <a:spcAft>
+                <a:spcPts val="0"/>
+              </a:spcAft>
+              <a:buNone/>
+            </a:pPr>
+            <a:r>
+              <a:rPr lang="en" sz="1000">
+                <a:highlight>
+                  <a:schemeClr val="dk2"/>
+                </a:highlight>
+                <a:latin typeface="Consolas"/>
+                <a:ea typeface="Consolas"/>
+                <a:cs typeface="Consolas"/>
+                <a:sym typeface="Consolas"/>
+              </a:rPr>
+              <a:t>RemoveDestroyed();</a:t>
+            </a:r>
+            <a:endParaRPr sz="1000">
+              <a:solidFill>
+                <a:srgbClr val="CCCCCC"/>
+              </a:solidFill>
+              <a:highlight>
+                <a:schemeClr val="dk2"/>
+              </a:highlight>
+              <a:latin typeface="Consolas"/>
+              <a:ea typeface="Consolas"/>
+              <a:cs typeface="Consolas"/>
+              <a:sym typeface="Consolas"/>
+            </a:endParaRPr>
+          </a:p>
+          <a:p>
+            <a:pPr indent="0" lvl="0" marL="0" rtl="0" algn="l">
+              <a:lnSpc>
+                <a:spcPct val="115000"/>
+              </a:lnSpc>
+              <a:spcBef>
+                <a:spcPts val="0"/>
+              </a:spcBef>
+              <a:spcAft>
+                <a:spcPts val="0"/>
+              </a:spcAft>
+              <a:buNone/>
+            </a:pPr>
+            <a:r>
+              <a:rPr lang="en" sz="1000">
+                <a:highlight>
+                  <a:schemeClr val="dk2"/>
+                </a:highlight>
+                <a:latin typeface="Consolas"/>
+                <a:ea typeface="Consolas"/>
+                <a:cs typeface="Consolas"/>
+                <a:sym typeface="Consolas"/>
+              </a:rPr>
+              <a:t/>
+            </a:r>
+            <a:endParaRPr sz="1000">
+              <a:solidFill>
+                <a:srgbClr val="CCCCCC"/>
+              </a:solidFill>
+              <a:highlight>
+                <a:schemeClr val="dk2"/>
+              </a:highlight>
+              <a:latin typeface="Consolas"/>
+              <a:ea typeface="Consolas"/>
+              <a:cs typeface="Consolas"/>
+              <a:sym typeface="Consolas"/>
+            </a:endParaRPr>
+          </a:p>
+          <a:p>
+            <a:pPr indent="0" lvl="0" marL="0" rtl="0" algn="l">
+              <a:lnSpc>
+                <a:spcPct val="115000"/>
+              </a:lnSpc>
+              <a:spcBef>
+                <a:spcPts val="0"/>
+              </a:spcBef>
+              <a:spcAft>
+                <a:spcPts val="0"/>
+              </a:spcAft>
+              <a:buNone/>
+            </a:pPr>
+            <a:r>
+              <a:rPr lang="en" sz="1000">
+                <a:highlight>
+                  <a:schemeClr val="dk2"/>
+                </a:highlight>
+                <a:latin typeface="Consolas"/>
+                <a:ea typeface="Consolas"/>
+                <a:cs typeface="Consolas"/>
+                <a:sym typeface="Consolas"/>
+              </a:rPr>
+              <a:t>for (int i = _entities.Count - 1; i &gt;= 0; i--)</a:t>
+            </a:r>
+            <a:endParaRPr sz="1000">
+              <a:solidFill>
+                <a:srgbClr val="CCCCCC"/>
+              </a:solidFill>
+              <a:highlight>
+                <a:schemeClr val="dk2"/>
+              </a:highlight>
+              <a:latin typeface="Consolas"/>
+              <a:ea typeface="Consolas"/>
+              <a:cs typeface="Consolas"/>
+              <a:sym typeface="Consolas"/>
+            </a:endParaRPr>
+          </a:p>
+          <a:p>
+            <a:pPr indent="0" lvl="0" marL="0" rtl="0" algn="l">
+              <a:lnSpc>
+                <a:spcPct val="115000"/>
+              </a:lnSpc>
+              <a:spcBef>
+                <a:spcPts val="0"/>
+              </a:spcBef>
+              <a:spcAft>
+                <a:spcPts val="0"/>
+              </a:spcAft>
+              <a:buNone/>
+            </a:pPr>
+            <a:r>
+              <a:rPr lang="en" sz="1000">
+                <a:highlight>
+                  <a:schemeClr val="dk2"/>
+                </a:highlight>
+                <a:latin typeface="Consolas"/>
+                <a:ea typeface="Consolas"/>
+                <a:cs typeface="Consolas"/>
+                <a:sym typeface="Consolas"/>
+              </a:rPr>
+              <a:t>{</a:t>
+            </a:r>
+            <a:endParaRPr sz="1000">
+              <a:solidFill>
+                <a:srgbClr val="CCCCCC"/>
+              </a:solidFill>
+              <a:highlight>
+                <a:schemeClr val="dk2"/>
+              </a:highlight>
+              <a:latin typeface="Consolas"/>
+              <a:ea typeface="Consolas"/>
+              <a:cs typeface="Consolas"/>
+              <a:sym typeface="Consolas"/>
+            </a:endParaRPr>
+          </a:p>
+          <a:p>
+            <a:pPr indent="0" lvl="0" marL="0" rtl="0" algn="l">
+              <a:lnSpc>
+                <a:spcPct val="115000"/>
+              </a:lnSpc>
+              <a:spcBef>
+                <a:spcPts val="0"/>
+              </a:spcBef>
+              <a:spcAft>
+                <a:spcPts val="0"/>
+              </a:spcAft>
+              <a:buNone/>
+            </a:pPr>
+            <a:r>
+              <a:rPr lang="en" sz="1000">
+                <a:highlight>
+                  <a:schemeClr val="dk2"/>
+                </a:highlight>
+                <a:latin typeface="Consolas"/>
+                <a:ea typeface="Consolas"/>
+                <a:cs typeface="Consolas"/>
+                <a:sym typeface="Consolas"/>
+              </a:rPr>
+              <a:t>    if (!_entities[i].IsDestroyed) continue;</a:t>
+            </a:r>
+            <a:endParaRPr sz="1000">
+              <a:solidFill>
+                <a:srgbClr val="CCCCCC"/>
+              </a:solidFill>
+              <a:highlight>
+                <a:schemeClr val="dk2"/>
+              </a:highlight>
+              <a:latin typeface="Consolas"/>
+              <a:ea typeface="Consolas"/>
+              <a:cs typeface="Consolas"/>
+              <a:sym typeface="Consolas"/>
+            </a:endParaRPr>
+          </a:p>
+          <a:p>
+            <a:pPr indent="0" lvl="0" marL="0" rtl="0" algn="l">
+              <a:lnSpc>
+                <a:spcPct val="115000"/>
+              </a:lnSpc>
+              <a:spcBef>
+                <a:spcPts val="0"/>
+              </a:spcBef>
+              <a:spcAft>
+                <a:spcPts val="0"/>
+              </a:spcAft>
+              <a:buNone/>
+            </a:pPr>
+            <a:r>
+              <a:rPr lang="en" sz="1000">
+                <a:highlight>
+                  <a:schemeClr val="dk2"/>
+                </a:highlight>
+                <a:latin typeface="Consolas"/>
+                <a:ea typeface="Consolas"/>
+                <a:cs typeface="Consolas"/>
+                <a:sym typeface="Consolas"/>
+              </a:rPr>
+              <a:t>    _physics.Destroy(_entities[i].Body);</a:t>
+            </a:r>
+            <a:endParaRPr sz="1000">
+              <a:solidFill>
+                <a:srgbClr val="CCCCCC"/>
+              </a:solidFill>
+              <a:highlight>
+                <a:schemeClr val="dk2"/>
+              </a:highlight>
+              <a:latin typeface="Consolas"/>
+              <a:ea typeface="Consolas"/>
+              <a:cs typeface="Consolas"/>
+              <a:sym typeface="Consolas"/>
+            </a:endParaRPr>
+          </a:p>
+          <a:p>
+            <a:pPr indent="0" lvl="0" marL="0" rtl="0" algn="l">
+              <a:lnSpc>
+                <a:spcPct val="115000"/>
+              </a:lnSpc>
+              <a:spcBef>
+                <a:spcPts val="0"/>
+              </a:spcBef>
+              <a:spcAft>
+                <a:spcPts val="0"/>
+              </a:spcAft>
+              <a:buNone/>
+            </a:pPr>
+            <a:r>
+              <a:rPr lang="en" sz="1000">
+                <a:highlight>
+                  <a:schemeClr val="dk2"/>
+                </a:highlight>
+                <a:latin typeface="Consolas"/>
+                <a:ea typeface="Consolas"/>
+                <a:cs typeface="Consolas"/>
+                <a:sym typeface="Consolas"/>
+              </a:rPr>
+              <a:t>    _entities.RemoveAt(i);</a:t>
+            </a:r>
+            <a:endParaRPr sz="1000">
+              <a:solidFill>
+                <a:srgbClr val="CCCCCC"/>
+              </a:solidFill>
+              <a:highlight>
+                <a:schemeClr val="dk2"/>
+              </a:highlight>
+              <a:latin typeface="Consolas"/>
+              <a:ea typeface="Consolas"/>
+              <a:cs typeface="Consolas"/>
+              <a:sym typeface="Consolas"/>
+            </a:endParaRPr>
+          </a:p>
+          <a:p>
+            <a:pPr indent="0" lvl="0" marL="0" rtl="0" algn="l">
+              <a:lnSpc>
+                <a:spcPct val="115000"/>
+              </a:lnSpc>
+              <a:spcBef>
+                <a:spcPts val="0"/>
+              </a:spcBef>
+              <a:spcAft>
+                <a:spcPts val="0"/>
+              </a:spcAft>
+              <a:buNone/>
+            </a:pPr>
+            <a:r>
+              <a:rPr lang="en" sz="1000">
+                <a:highlight>
+                  <a:schemeClr val="dk2"/>
+                </a:highlight>
+                <a:latin typeface="Consolas"/>
+                <a:ea typeface="Consolas"/>
+                <a:cs typeface="Consolas"/>
+                <a:sym typeface="Consolas"/>
+              </a:rPr>
+              <a:t>}</a:t>
+            </a:r>
+            <a:endParaRPr sz="1000">
+              <a:solidFill>
+                <a:srgbClr val="CCCCCC"/>
+              </a:solidFill>
+              <a:highlight>
+                <a:schemeClr val="dk2"/>
+              </a:highlight>
+              <a:latin typeface="Consolas"/>
+              <a:ea typeface="Consolas"/>
+              <a:cs typeface="Consolas"/>
+              <a:sym typeface="Consolas"/>
+            </a:endParaRPr>
+          </a:p>
         </p:txBody>
       </p:sp>
     </p:spTree>
@@ -10133,7 +10580,7 @@
 </p:sld>
 </file>
 
-<file path=ppt/slides/slide16.xml><?xml version="1.0" encoding="utf-8"?>
+<file path=ppt/slides/slide17.xml><?xml version="1.0" encoding="utf-8"?>
 <p:sld xmlns:a="http://schemas.openxmlformats.org/drawingml/2006/main" xmlns:p="http://schemas.openxmlformats.org/presentationml/2006/main" xmlns:r="http://schemas.openxmlformats.org/officeDocument/2006/relationships">
   <p:cSld>
     <p:spTree>
@@ -10249,802 +10696,6 @@
               <a:t>Birds2: hits that damage, removed after the step</a:t>
             </a:r>
             <a:endParaRPr sz="1800"/>
-          </a:p>
-        </p:txBody>
-      </p:sp>
-    </p:spTree>
-  </p:cSld>
-  <p:clrMapOvr>
-    <a:masterClrMapping/>
-  </p:clrMapOvr>
-</p:sld>
-</file>
-
-<file path=ppt/slides/slide17.xml><?xml version="1.0" encoding="utf-8"?>
-<p:sld xmlns:a="http://schemas.openxmlformats.org/drawingml/2006/main" xmlns:p="http://schemas.openxmlformats.org/presentationml/2006/main" xmlns:r="http://schemas.openxmlformats.org/officeDocument/2006/relationships">
-  <p:cSld>
-    <p:spTree>
-      <p:nvGrpSpPr>
-        <p:cNvPr id="1" name=""/>
-        <p:cNvGrpSpPr/>
-        <p:nvPr/>
-      </p:nvGrpSpPr>
-      <p:grpSpPr/>
-      <p:sp>
-        <p:nvSpPr>
-          <p:cNvPr id="140" name="Google Shape;140;p23"/>
-          <p:cNvSpPr txBox="1"/>
-          <p:nvPr>
-            <p:ph type="title"/>
-          </p:nvPr>
-        </p:nvSpPr>
-        <p:spPr>
-          <a:xfrm>
-            <a:off x="311700" y="195615"/>
-            <a:ext cx="8520600" cy="572700"/>
-          </a:xfrm>
-          <a:prstGeom prst="rect">
-            <a:avLst/>
-          </a:prstGeom>
-        </p:spPr>
-        <p:txBody>
-          <a:bodyPr anchorCtr="0" anchor="t" bIns="91425" lIns="91425" spcFirstLastPara="1" rIns="91425" wrap="square" tIns="91425">
-            <a:normAutofit fontScale="90000"/>
-          </a:bodyPr>
-          <a:lstStyle/>
-          <a:p>
-            <a:pPr indent="0" lvl="0" marL="0" rtl="0" algn="l">
-              <a:spcBef>
-                <a:spcPts val="0"/>
-              </a:spcBef>
-              <a:spcAft>
-                <a:spcPts val="0"/>
-              </a:spcAft>
-              <a:buNone/>
-            </a:pPr>
-            <a:r>
-              <a:rPr lang="en"/>
-              <a:t>Prototype</a:t>
-            </a:r>
-            <a:endParaRPr/>
-          </a:p>
-        </p:txBody>
-      </p:sp>
-      <p:sp>
-        <p:nvSpPr>
-          <p:cNvPr id="293" name="Google Shape;293;p45"/>
-          <p:cNvSpPr txBox="1"/>
-          <p:nvPr>
-            <p:ph type="title"/>
-          </p:nvPr>
-        </p:nvSpPr>
-        <p:spPr>
-          <a:xfrm>
-            <a:off x="311700" y="1152475"/>
-            <a:ext cx="3700000" cy="3500000"/>
-          </a:xfrm>
-          <a:prstGeom prst="rect">
-            <a:avLst/>
-          </a:prstGeom>
-        </p:spPr>
-        <p:txBody>
-          <a:bodyPr anchorCtr="0" anchor="t" bIns="91425" lIns="91425" spcFirstLastPara="1" rIns="91425" wrap="square" tIns="91425">
-            <a:normAutofit fontScale="90000"/>
-          </a:bodyPr>
-          <a:lstStyle/>
-          <a:p>
-            <a:pPr indent="-330200" lvl="0" marL="457200" rtl="0" algn="l">
-              <a:buClr>
-                <a:srgbClr val="DEE2E6"/>
-              </a:buClr>
-              <a:spcBef>
-                <a:spcPts val="0"/>
-              </a:spcBef>
-              <a:spcAft>
-                <a:spcPts val="0"/>
-              </a:spcAft>
-              <a:buSzPts val="1600"/>
-              <a:buChar char="●"/>
-            </a:pPr>
-            <a:r>
-              <a:rPr lang="en" sz="1600">
-                <a:solidFill>
-                  <a:srgbClr val="DEE2E6"/>
-                </a:solidFill>
-              </a:rPr>
-              <a:t>“Create new objects by copying a prototype”</a:t>
-            </a:r>
-            <a:endParaRPr/>
-          </a:p>
-          <a:p>
-            <a:pPr indent="-330200" lvl="0" marL="457200" rtl="0" algn="l">
-              <a:buClr>
-                <a:srgbClr val="DEE2E6"/>
-              </a:buClr>
-              <a:spcBef>
-                <a:spcPts val="0"/>
-              </a:spcBef>
-              <a:spcAft>
-                <a:spcPts val="0"/>
-              </a:spcAft>
-              <a:buSzPts val="1600"/>
-              <a:buChar char="●"/>
-            </a:pPr>
-            <a:r>
-              <a:rPr lang="en" sz="1600">
-                <a:solidFill>
-                  <a:srgbClr val="DEE2E6"/>
-                </a:solidFill>
-              </a:rPr>
-              <a:t>A configured entity, not in the world</a:t>
-            </a:r>
-            <a:endParaRPr/>
-          </a:p>
-          <a:p>
-            <a:pPr indent="-330200" lvl="0" marL="457200" rtl="0" algn="l">
-              <a:buClr>
-                <a:srgbClr val="DEE2E6"/>
-              </a:buClr>
-              <a:spcBef>
-                <a:spcPts val="0"/>
-              </a:spcBef>
-              <a:spcAft>
-                <a:spcPts val="0"/>
-              </a:spcAft>
-              <a:buSzPts val="1600"/>
-              <a:buChar char="●"/>
-            </a:pPr>
-            <a:r>
-              <a:rPr lang="en" sz="1600">
-                <a:solidFill>
-                  <a:srgbClr val="DEE2E6"/>
-                </a:solidFill>
-              </a:rPr>
-              <a:t>Copy it, and give the copy a body</a:t>
-            </a:r>
-            <a:endParaRPr/>
-          </a:p>
-          <a:p>
-            <a:pPr indent="-330200" lvl="0" marL="457200" rtl="0" algn="l">
-              <a:buClr>
-                <a:srgbClr val="DEE2E6"/>
-              </a:buClr>
-              <a:spcBef>
-                <a:spcPts val="0"/>
-              </a:spcBef>
-              <a:spcAft>
-                <a:spcPts val="0"/>
-              </a:spcAft>
-              <a:buSzPts val="1600"/>
-              <a:buChar char="●"/>
-            </a:pPr>
-            <a:r>
-              <a:rPr lang="en" sz="1600">
-                <a:solidFill>
-                  <a:srgbClr val="DEE2E6"/>
-                </a:solidFill>
-              </a:rPr>
-              <a:t>Prefabs: one prototype per kind, by name</a:t>
-            </a:r>
-            <a:endParaRPr/>
-          </a:p>
-          <a:p>
-            <a:pPr indent="-317500" lvl="1" marL="914400" rtl="0" algn="l">
-              <a:buClr>
-                <a:srgbClr val="6C757D"/>
-              </a:buClr>
-              <a:spcBef>
-                <a:spcPts val="0"/>
-              </a:spcBef>
-              <a:spcAft>
-                <a:spcPts val="0"/>
-              </a:spcAft>
-              <a:buSzPts val="1400"/>
-              <a:buChar char="○"/>
-            </a:pPr>
-            <a:r>
-              <a:rPr lang="en" sz="1400">
-                <a:solidFill>
-                  <a:srgbClr val="6C757D"/>
-                </a:solidFill>
-              </a:rPr>
-              <a:t>A big pig: a Pig with a bigger radius, not a subclass</a:t>
-            </a:r>
-            <a:endParaRPr/>
-          </a:p>
-        </p:txBody>
-      </p:sp>
-      <p:sp>
-        <p:nvSpPr>
-          <p:cNvPr id="141" name="Google Shape;141;p23"/>
-          <p:cNvSpPr txBox="1"/>
-          <p:nvPr>
-            <p:ph idx="2" type="body"/>
-          </p:nvPr>
-        </p:nvSpPr>
-        <p:spPr>
-          <a:xfrm>
-            <a:off x="4150000" y="1152475"/>
-            <a:ext cx="4750000" cy="3600000"/>
-          </a:xfrm>
-          <a:prstGeom prst="rect">
-            <a:avLst/>
-          </a:prstGeom>
-        </p:spPr>
-        <p:txBody>
-          <a:bodyPr anchorCtr="0" anchor="t" bIns="91425" lIns="91425" spcFirstLastPara="1" rIns="91425" wrap="square" tIns="91425">
-            <a:noAutofit/>
-          </a:bodyPr>
-          <a:lstStyle/>
-          <a:p>
-            <a:pPr indent="0" lvl="0" marL="0" rtl="0" algn="l">
-              <a:lnSpc>
-                <a:spcPct val="115000"/>
-              </a:lnSpc>
-              <a:spcBef>
-                <a:spcPts val="0"/>
-              </a:spcBef>
-              <a:spcAft>
-                <a:spcPts val="0"/>
-              </a:spcAft>
-              <a:buNone/>
-            </a:pPr>
-            <a:r>
-              <a:rPr lang="en" sz="1000">
-                <a:highlight>
-                  <a:schemeClr val="dk2"/>
-                </a:highlight>
-                <a:latin typeface="Consolas"/>
-                <a:ea typeface="Consolas"/>
-                <a:cs typeface="Consolas"/>
-                <a:sym typeface="Consolas"/>
-              </a:rPr>
-              <a:t>public Entity Clone()</a:t>
-            </a:r>
-            <a:endParaRPr sz="1000">
-              <a:solidFill>
-                <a:srgbClr val="CCCCCC"/>
-              </a:solidFill>
-              <a:highlight>
-                <a:schemeClr val="dk2"/>
-              </a:highlight>
-              <a:latin typeface="Consolas"/>
-              <a:ea typeface="Consolas"/>
-              <a:cs typeface="Consolas"/>
-              <a:sym typeface="Consolas"/>
-            </a:endParaRPr>
-          </a:p>
-          <a:p>
-            <a:pPr indent="0" lvl="0" marL="0" rtl="0" algn="l">
-              <a:lnSpc>
-                <a:spcPct val="115000"/>
-              </a:lnSpc>
-              <a:spcBef>
-                <a:spcPts val="0"/>
-              </a:spcBef>
-              <a:spcAft>
-                <a:spcPts val="0"/>
-              </a:spcAft>
-              <a:buNone/>
-            </a:pPr>
-            <a:r>
-              <a:rPr lang="en" sz="1000">
-                <a:highlight>
-                  <a:schemeClr val="dk2"/>
-                </a:highlight>
-                <a:latin typeface="Consolas"/>
-                <a:ea typeface="Consolas"/>
-                <a:cs typeface="Consolas"/>
-                <a:sym typeface="Consolas"/>
-              </a:rPr>
-              <a:t>{</a:t>
-            </a:r>
-            <a:endParaRPr sz="1000">
-              <a:solidFill>
-                <a:srgbClr val="CCCCCC"/>
-              </a:solidFill>
-              <a:highlight>
-                <a:schemeClr val="dk2"/>
-              </a:highlight>
-              <a:latin typeface="Consolas"/>
-              <a:ea typeface="Consolas"/>
-              <a:cs typeface="Consolas"/>
-              <a:sym typeface="Consolas"/>
-            </a:endParaRPr>
-          </a:p>
-          <a:p>
-            <a:pPr indent="0" lvl="0" marL="0" rtl="0" algn="l">
-              <a:lnSpc>
-                <a:spcPct val="115000"/>
-              </a:lnSpc>
-              <a:spcBef>
-                <a:spcPts val="0"/>
-              </a:spcBef>
-              <a:spcAft>
-                <a:spcPts val="0"/>
-              </a:spcAft>
-              <a:buNone/>
-            </a:pPr>
-            <a:r>
-              <a:rPr lang="en" sz="1000">
-                <a:highlight>
-                  <a:schemeClr val="dk2"/>
-                </a:highlight>
-                <a:latin typeface="Consolas"/>
-                <a:ea typeface="Consolas"/>
-                <a:cs typeface="Consolas"/>
-                <a:sym typeface="Consolas"/>
-              </a:rPr>
-              <a:t>    var copy = (Entity)MemberwiseClone();</a:t>
-            </a:r>
-            <a:endParaRPr sz="1000">
-              <a:solidFill>
-                <a:srgbClr val="CCCCCC"/>
-              </a:solidFill>
-              <a:highlight>
-                <a:schemeClr val="dk2"/>
-              </a:highlight>
-              <a:latin typeface="Consolas"/>
-              <a:ea typeface="Consolas"/>
-              <a:cs typeface="Consolas"/>
-              <a:sym typeface="Consolas"/>
-            </a:endParaRPr>
-          </a:p>
-          <a:p>
-            <a:pPr indent="0" lvl="0" marL="0" rtl="0" algn="l">
-              <a:lnSpc>
-                <a:spcPct val="115000"/>
-              </a:lnSpc>
-              <a:spcBef>
-                <a:spcPts val="0"/>
-              </a:spcBef>
-              <a:spcAft>
-                <a:spcPts val="0"/>
-              </a:spcAft>
-              <a:buNone/>
-            </a:pPr>
-            <a:r>
-              <a:rPr lang="en" sz="1000">
-                <a:highlight>
-                  <a:schemeClr val="dk2"/>
-                </a:highlight>
-                <a:latin typeface="Consolas"/>
-                <a:ea typeface="Consolas"/>
-                <a:cs typeface="Consolas"/>
-                <a:sym typeface="Consolas"/>
-              </a:rPr>
-              <a:t>    copy.Body = null;</a:t>
-            </a:r>
-            <a:endParaRPr sz="1000">
-              <a:solidFill>
-                <a:srgbClr val="CCCCCC"/>
-              </a:solidFill>
-              <a:highlight>
-                <a:schemeClr val="dk2"/>
-              </a:highlight>
-              <a:latin typeface="Consolas"/>
-              <a:ea typeface="Consolas"/>
-              <a:cs typeface="Consolas"/>
-              <a:sym typeface="Consolas"/>
-            </a:endParaRPr>
-          </a:p>
-          <a:p>
-            <a:pPr indent="0" lvl="0" marL="0" rtl="0" algn="l">
-              <a:lnSpc>
-                <a:spcPct val="115000"/>
-              </a:lnSpc>
-              <a:spcBef>
-                <a:spcPts val="0"/>
-              </a:spcBef>
-              <a:spcAft>
-                <a:spcPts val="0"/>
-              </a:spcAft>
-              <a:buNone/>
-            </a:pPr>
-            <a:r>
-              <a:rPr lang="en" sz="1000">
-                <a:highlight>
-                  <a:schemeClr val="dk2"/>
-                </a:highlight>
-                <a:latin typeface="Consolas"/>
-                <a:ea typeface="Consolas"/>
-                <a:cs typeface="Consolas"/>
-                <a:sym typeface="Consolas"/>
-              </a:rPr>
-              <a:t>    return copy;</a:t>
-            </a:r>
-            <a:endParaRPr sz="1000">
-              <a:solidFill>
-                <a:srgbClr val="CCCCCC"/>
-              </a:solidFill>
-              <a:highlight>
-                <a:schemeClr val="dk2"/>
-              </a:highlight>
-              <a:latin typeface="Consolas"/>
-              <a:ea typeface="Consolas"/>
-              <a:cs typeface="Consolas"/>
-              <a:sym typeface="Consolas"/>
-            </a:endParaRPr>
-          </a:p>
-          <a:p>
-            <a:pPr indent="0" lvl="0" marL="0" rtl="0" algn="l">
-              <a:lnSpc>
-                <a:spcPct val="115000"/>
-              </a:lnSpc>
-              <a:spcBef>
-                <a:spcPts val="0"/>
-              </a:spcBef>
-              <a:spcAft>
-                <a:spcPts val="0"/>
-              </a:spcAft>
-              <a:buNone/>
-            </a:pPr>
-            <a:r>
-              <a:rPr lang="en" sz="1000">
-                <a:highlight>
-                  <a:schemeClr val="dk2"/>
-                </a:highlight>
-                <a:latin typeface="Consolas"/>
-                <a:ea typeface="Consolas"/>
-                <a:cs typeface="Consolas"/>
-                <a:sym typeface="Consolas"/>
-              </a:rPr>
-              <a:t>}</a:t>
-            </a:r>
-            <a:endParaRPr sz="1000">
-              <a:solidFill>
-                <a:srgbClr val="CCCCCC"/>
-              </a:solidFill>
-              <a:highlight>
-                <a:schemeClr val="dk2"/>
-              </a:highlight>
-              <a:latin typeface="Consolas"/>
-              <a:ea typeface="Consolas"/>
-              <a:cs typeface="Consolas"/>
-              <a:sym typeface="Consolas"/>
-            </a:endParaRPr>
-          </a:p>
-          <a:p>
-            <a:pPr indent="0" lvl="0" marL="0" rtl="0" algn="l">
-              <a:lnSpc>
-                <a:spcPct val="115000"/>
-              </a:lnSpc>
-              <a:spcBef>
-                <a:spcPts val="0"/>
-              </a:spcBef>
-              <a:spcAft>
-                <a:spcPts val="0"/>
-              </a:spcAft>
-              <a:buNone/>
-            </a:pPr>
-            <a:r>
-              <a:rPr lang="en" sz="1000">
-                <a:highlight>
-                  <a:schemeClr val="dk2"/>
-                </a:highlight>
-                <a:latin typeface="Consolas"/>
-                <a:ea typeface="Consolas"/>
-                <a:cs typeface="Consolas"/>
-                <a:sym typeface="Consolas"/>
-              </a:rPr>
-              <a:t/>
-            </a:r>
-            <a:endParaRPr sz="1000">
-              <a:solidFill>
-                <a:srgbClr val="CCCCCC"/>
-              </a:solidFill>
-              <a:highlight>
-                <a:schemeClr val="dk2"/>
-              </a:highlight>
-              <a:latin typeface="Consolas"/>
-              <a:ea typeface="Consolas"/>
-              <a:cs typeface="Consolas"/>
-              <a:sym typeface="Consolas"/>
-            </a:endParaRPr>
-          </a:p>
-          <a:p>
-            <a:pPr indent="0" lvl="0" marL="0" rtl="0" algn="l">
-              <a:lnSpc>
-                <a:spcPct val="115000"/>
-              </a:lnSpc>
-              <a:spcBef>
-                <a:spcPts val="0"/>
-              </a:spcBef>
-              <a:spcAft>
-                <a:spcPts val="0"/>
-              </a:spcAft>
-              <a:buNone/>
-            </a:pPr>
-            <a:r>
-              <a:rPr lang="en" sz="1000">
-                <a:highlight>
-                  <a:schemeClr val="dk2"/>
-                </a:highlight>
-                <a:latin typeface="Consolas"/>
-                <a:ea typeface="Consolas"/>
-                <a:cs typeface="Consolas"/>
-                <a:sym typeface="Consolas"/>
-              </a:rPr>
-              <a:t>// Prefabs.cs</a:t>
-            </a:r>
-            <a:endParaRPr sz="1000">
-              <a:solidFill>
-                <a:srgbClr val="CCCCCC"/>
-              </a:solidFill>
-              <a:highlight>
-                <a:schemeClr val="dk2"/>
-              </a:highlight>
-              <a:latin typeface="Consolas"/>
-              <a:ea typeface="Consolas"/>
-              <a:cs typeface="Consolas"/>
-              <a:sym typeface="Consolas"/>
-            </a:endParaRPr>
-          </a:p>
-          <a:p>
-            <a:pPr indent="0" lvl="0" marL="0" rtl="0" algn="l">
-              <a:lnSpc>
-                <a:spcPct val="115000"/>
-              </a:lnSpc>
-              <a:spcBef>
-                <a:spcPts val="0"/>
-              </a:spcBef>
-              <a:spcAft>
-                <a:spcPts val="0"/>
-              </a:spcAft>
-              <a:buNone/>
-            </a:pPr>
-            <a:r>
-              <a:rPr lang="en" sz="1000">
-                <a:highlight>
-                  <a:schemeClr val="dk2"/>
-                </a:highlight>
-                <a:latin typeface="Consolas"/>
-                <a:ea typeface="Consolas"/>
-                <a:cs typeface="Consolas"/>
-                <a:sym typeface="Consolas"/>
-              </a:rPr>
-              <a:t>Add("wood-post", new Block(Materials.Wood,</a:t>
-            </a:r>
-            <a:endParaRPr sz="1000">
-              <a:solidFill>
-                <a:srgbClr val="CCCCCC"/>
-              </a:solidFill>
-              <a:highlight>
-                <a:schemeClr val="dk2"/>
-              </a:highlight>
-              <a:latin typeface="Consolas"/>
-              <a:ea typeface="Consolas"/>
-              <a:cs typeface="Consolas"/>
-              <a:sym typeface="Consolas"/>
-            </a:endParaRPr>
-          </a:p>
-          <a:p>
-            <a:pPr indent="0" lvl="0" marL="0" rtl="0" algn="l">
-              <a:lnSpc>
-                <a:spcPct val="115000"/>
-              </a:lnSpc>
-              <a:spcBef>
-                <a:spcPts val="0"/>
-              </a:spcBef>
-              <a:spcAft>
-                <a:spcPts val="0"/>
-              </a:spcAft>
-              <a:buNone/>
-            </a:pPr>
-            <a:r>
-              <a:rPr lang="en" sz="1000">
-                <a:highlight>
-                  <a:schemeClr val="dk2"/>
-                </a:highlight>
-                <a:latin typeface="Consolas"/>
-                <a:ea typeface="Consolas"/>
-                <a:cs typeface="Consolas"/>
-                <a:sym typeface="Consolas"/>
-              </a:rPr>
-              <a:t>    post, 8, 500, atlas.GetRegion("wood-post")));</a:t>
-            </a:r>
-            <a:endParaRPr sz="1000">
-              <a:solidFill>
-                <a:srgbClr val="CCCCCC"/>
-              </a:solidFill>
-              <a:highlight>
-                <a:schemeClr val="dk2"/>
-              </a:highlight>
-              <a:latin typeface="Consolas"/>
-              <a:ea typeface="Consolas"/>
-              <a:cs typeface="Consolas"/>
-              <a:sym typeface="Consolas"/>
-            </a:endParaRPr>
-          </a:p>
-          <a:p>
-            <a:pPr indent="0" lvl="0" marL="0" rtl="0" algn="l">
-              <a:lnSpc>
-                <a:spcPct val="115000"/>
-              </a:lnSpc>
-              <a:spcBef>
-                <a:spcPts val="0"/>
-              </a:spcBef>
-              <a:spcAft>
-                <a:spcPts val="0"/>
-              </a:spcAft>
-              <a:buNone/>
-            </a:pPr>
-            <a:r>
-              <a:rPr lang="en" sz="1000">
-                <a:highlight>
-                  <a:schemeClr val="dk2"/>
-                </a:highlight>
-                <a:latin typeface="Consolas"/>
-                <a:ea typeface="Consolas"/>
-                <a:cs typeface="Consolas"/>
-                <a:sym typeface="Consolas"/>
-              </a:rPr>
-              <a:t>Add("big-pig", new Pig(30, 6, 5000,</a:t>
-            </a:r>
-            <a:endParaRPr sz="1000">
-              <a:solidFill>
-                <a:srgbClr val="CCCCCC"/>
-              </a:solidFill>
-              <a:highlight>
-                <a:schemeClr val="dk2"/>
-              </a:highlight>
-              <a:latin typeface="Consolas"/>
-              <a:ea typeface="Consolas"/>
-              <a:cs typeface="Consolas"/>
-              <a:sym typeface="Consolas"/>
-            </a:endParaRPr>
-          </a:p>
-          <a:p>
-            <a:pPr indent="0" lvl="0" marL="0" rtl="0" algn="l">
-              <a:lnSpc>
-                <a:spcPct val="115000"/>
-              </a:lnSpc>
-              <a:spcBef>
-                <a:spcPts val="0"/>
-              </a:spcBef>
-              <a:spcAft>
-                <a:spcPts val="0"/>
-              </a:spcAft>
-              <a:buNone/>
-            </a:pPr>
-            <a:r>
-              <a:rPr lang="en" sz="1000">
-                <a:highlight>
-                  <a:schemeClr val="dk2"/>
-                </a:highlight>
-                <a:latin typeface="Consolas"/>
-                <a:ea typeface="Consolas"/>
-                <a:cs typeface="Consolas"/>
-                <a:sym typeface="Consolas"/>
-              </a:rPr>
-              <a:t>    atlas.GetRegion("big-pig")));</a:t>
-            </a:r>
-            <a:endParaRPr sz="1000">
-              <a:solidFill>
-                <a:srgbClr val="CCCCCC"/>
-              </a:solidFill>
-              <a:highlight>
-                <a:schemeClr val="dk2"/>
-              </a:highlight>
-              <a:latin typeface="Consolas"/>
-              <a:ea typeface="Consolas"/>
-              <a:cs typeface="Consolas"/>
-              <a:sym typeface="Consolas"/>
-            </a:endParaRPr>
-          </a:p>
-          <a:p>
-            <a:pPr indent="0" lvl="0" marL="0" rtl="0" algn="l">
-              <a:lnSpc>
-                <a:spcPct val="115000"/>
-              </a:lnSpc>
-              <a:spcBef>
-                <a:spcPts val="0"/>
-              </a:spcBef>
-              <a:spcAft>
-                <a:spcPts val="0"/>
-              </a:spcAft>
-              <a:buNone/>
-            </a:pPr>
-            <a:r>
-              <a:rPr lang="en" sz="1000">
-                <a:highlight>
-                  <a:schemeClr val="dk2"/>
-                </a:highlight>
-                <a:latin typeface="Consolas"/>
-                <a:ea typeface="Consolas"/>
-                <a:cs typeface="Consolas"/>
-                <a:sym typeface="Consolas"/>
-              </a:rPr>
-              <a:t/>
-            </a:r>
-            <a:endParaRPr sz="1000">
-              <a:solidFill>
-                <a:srgbClr val="CCCCCC"/>
-              </a:solidFill>
-              <a:highlight>
-                <a:schemeClr val="dk2"/>
-              </a:highlight>
-              <a:latin typeface="Consolas"/>
-              <a:ea typeface="Consolas"/>
-              <a:cs typeface="Consolas"/>
-              <a:sym typeface="Consolas"/>
-            </a:endParaRPr>
-          </a:p>
-          <a:p>
-            <a:pPr indent="0" lvl="0" marL="0" rtl="0" algn="l">
-              <a:lnSpc>
-                <a:spcPct val="115000"/>
-              </a:lnSpc>
-              <a:spcBef>
-                <a:spcPts val="0"/>
-              </a:spcBef>
-              <a:spcAft>
-                <a:spcPts val="0"/>
-              </a:spcAft>
-              <a:buNone/>
-            </a:pPr>
-            <a:r>
-              <a:rPr lang="en" sz="1000">
-                <a:highlight>
-                  <a:schemeClr val="dk2"/>
-                </a:highlight>
-                <a:latin typeface="Consolas"/>
-                <a:ea typeface="Consolas"/>
-                <a:cs typeface="Consolas"/>
-                <a:sym typeface="Consolas"/>
-              </a:rPr>
-              <a:t>Entity entity = _prototypes[name].Clone();</a:t>
-            </a:r>
-            <a:endParaRPr sz="1000">
-              <a:solidFill>
-                <a:srgbClr val="CCCCCC"/>
-              </a:solidFill>
-              <a:highlight>
-                <a:schemeClr val="dk2"/>
-              </a:highlight>
-              <a:latin typeface="Consolas"/>
-              <a:ea typeface="Consolas"/>
-              <a:cs typeface="Consolas"/>
-              <a:sym typeface="Consolas"/>
-            </a:endParaRPr>
-          </a:p>
-          <a:p>
-            <a:pPr indent="0" lvl="0" marL="0" rtl="0" algn="l">
-              <a:lnSpc>
-                <a:spcPct val="115000"/>
-              </a:lnSpc>
-              <a:spcBef>
-                <a:spcPts val="0"/>
-              </a:spcBef>
-              <a:spcAft>
-                <a:spcPts val="0"/>
-              </a:spcAft>
-              <a:buNone/>
-            </a:pPr>
-            <a:r>
-              <a:rPr lang="en" sz="1000">
-                <a:highlight>
-                  <a:schemeClr val="dk2"/>
-                </a:highlight>
-                <a:latin typeface="Consolas"/>
-                <a:ea typeface="Consolas"/>
-                <a:cs typeface="Consolas"/>
-                <a:sym typeface="Consolas"/>
-              </a:rPr>
-              <a:t>entity.Spawn(world, position, rotation);</a:t>
-            </a:r>
-            <a:endParaRPr sz="1000">
-              <a:solidFill>
-                <a:srgbClr val="CCCCCC"/>
-              </a:solidFill>
-              <a:highlight>
-                <a:schemeClr val="dk2"/>
-              </a:highlight>
-              <a:latin typeface="Consolas"/>
-              <a:ea typeface="Consolas"/>
-              <a:cs typeface="Consolas"/>
-              <a:sym typeface="Consolas"/>
-            </a:endParaRPr>
           </a:p>
         </p:txBody>
       </p:sp>
@@ -11100,7 +10751,7 @@
             </a:pPr>
             <a:r>
               <a:rPr lang="en"/>
-              <a:t>Levels From Prefabs</a:t>
+              <a:t>Prototype</a:t>
             </a:r>
             <a:endParaRPr/>
           </a:p>
@@ -11148,7 +10799,79 @@
                   <a:srgbClr val="DEE2E6"/>
                 </a:solidFill>
               </a:rPr>
-              <a:t>A level: prefab names and positions</a:t>
+              <a:t>“Create new objects by copying a prototype”</a:t>
+            </a:r>
+            <a:endParaRPr/>
+          </a:p>
+          <a:p>
+            <a:pPr indent="-330200" lvl="0" marL="457200" rtl="0" algn="l">
+              <a:buClr>
+                <a:srgbClr val="DEE2E6"/>
+              </a:buClr>
+              <a:spcBef>
+                <a:spcPts val="0"/>
+              </a:spcBef>
+              <a:spcAft>
+                <a:spcPts val="0"/>
+              </a:spcAft>
+              <a:buSzPts val="1600"/>
+              <a:buChar char="●"/>
+            </a:pPr>
+            <a:r>
+              <a:rPr lang="en" sz="1600">
+                <a:solidFill>
+                  <a:srgbClr val="DEE2E6"/>
+                </a:solidFill>
+              </a:rPr>
+              <a:t>A configured entity, not in the world</a:t>
+            </a:r>
+            <a:endParaRPr/>
+          </a:p>
+          <a:p>
+            <a:pPr indent="-330200" lvl="0" marL="457200" rtl="0" algn="l">
+              <a:buClr>
+                <a:srgbClr val="DEE2E6"/>
+              </a:buClr>
+              <a:spcBef>
+                <a:spcPts val="0"/>
+              </a:spcBef>
+              <a:spcAft>
+                <a:spcPts val="0"/>
+              </a:spcAft>
+              <a:buSzPts val="1600"/>
+              <a:buChar char="●"/>
+            </a:pPr>
+            <a:r>
+              <a:rPr lang="en" sz="1600">
+                <a:solidFill>
+                  <a:srgbClr val="DEE2E6"/>
+                </a:solidFill>
+              </a:rPr>
+              <a:t>Copy it, and give the copy a body</a:t>
+            </a:r>
+            <a:endParaRPr/>
+          </a:p>
+          <a:p>
+            <a:pPr indent="-330200" lvl="0" marL="457200" rtl="0" algn="l">
+              <a:buClr>
+                <a:srgbClr val="DEE2E6"/>
+              </a:buClr>
+              <a:spcBef>
+                <a:spcPts val="0"/>
+              </a:spcBef>
+              <a:spcAft>
+                <a:spcPts val="0"/>
+              </a:spcAft>
+              <a:buSzPts val="1600"/>
+              <a:buChar char="●"/>
+            </a:pPr>
+            <a:r>
+              <a:rPr lang="en" sz="1600">
+                <a:solidFill>
+                  <a:srgbClr val="DEE2E6"/>
+                </a:solidFill>
+              </a:rPr>
+              <a:t>Prefabs: one prototype per kind, by name</a:t>
             </a:r>
             <a:endParaRPr/>
           </a:p>
@@ -11172,103 +10895,7 @@
                   <a:srgbClr val="6C757D"/>
                 </a:solidFill>
               </a:rPr>
-              <a:t>Levels as data, as in Sokoban</a:t>
-            </a:r>
-            <a:endParaRPr/>
-          </a:p>
-          <a:p>
-            <a:pPr indent="-330200" lvl="0" marL="457200" rtl="0" algn="l">
-              <a:buClr>
-                <a:srgbClr val="DEE2E6"/>
-              </a:buClr>
-              <a:spcBef>
-                <a:spcPts val="0"/>
-              </a:spcBef>
-              <a:spcAft>
-                <a:spcPts val="0"/>
-              </a:spcAft>
-              <a:buSzPts val="1600"/>
-              <a:buChar char="●"/>
-            </a:pPr>
-            <a:r>
-              <a:rPr lang="en" sz="1600">
-                <a:solidFill>
-                  <a:srgbClr val="DEE2E6"/>
-                </a:solidFill>
-              </a:rPr>
-              <a:t>MemberwiseClone: a shallow copy</a:t>
-            </a:r>
-            <a:endParaRPr/>
-          </a:p>
-          <a:p>
-            <a:pPr indent="-317500" lvl="1" marL="914400" rtl="0" algn="l">
-              <a:buClr>
-                <a:srgbClr val="6C757D"/>
-              </a:buClr>
-              <a:spcBef>
-                <a:spcPts val="0"/>
-              </a:spcBef>
-              <a:spcAft>
-                <a:spcPts val="0"/>
-              </a:spcAft>
-              <a:buSzPts val="1400"/>
-              <a:buChar char="○"/>
-            </a:pPr>
-            <a:r>
-              <a:rPr lang="en" sz="1400">
-                <a:solidFill>
-                  <a:srgbClr val="6C757D"/>
-                </a:solidFill>
-              </a:rPr>
-              <a:t>Sharing a sprite: fine</a:t>
-            </a:r>
-            <a:endParaRPr/>
-          </a:p>
-          <a:p>
-            <a:pPr indent="-317500" lvl="1" marL="914400" rtl="0" algn="l">
-              <a:buClr>
-                <a:srgbClr val="6C757D"/>
-              </a:buClr>
-              <a:spcBef>
-                <a:spcPts val="0"/>
-              </a:spcBef>
-              <a:spcAft>
-                <a:spcPts val="0"/>
-              </a:spcAft>
-              <a:buSzPts val="1400"/>
-              <a:buChar char="○"/>
-            </a:pPr>
-            <a:r>
-              <a:rPr lang="en" sz="1400">
-                <a:solidFill>
-                  <a:srgbClr val="6C757D"/>
-                </a:solidFill>
-              </a:rPr>
-              <a:t>Sharing a body: two blocks move as one</a:t>
-            </a:r>
-            <a:endParaRPr/>
-          </a:p>
-          <a:p>
-            <a:pPr indent="-330200" lvl="0" marL="457200" rtl="0" algn="l">
-              <a:buClr>
-                <a:srgbClr val="DEE2E6"/>
-              </a:buClr>
-              <a:spcBef>
-                <a:spcPts val="0"/>
-              </a:spcBef>
-              <a:spcAft>
-                <a:spcPts val="0"/>
-              </a:spcAft>
-              <a:buSzPts val="1600"/>
-              <a:buChar char="●"/>
-            </a:pPr>
-            <a:r>
-              <a:rPr lang="en" sz="1600">
-                <a:solidFill>
-                  <a:srgbClr val="DEE2E6"/>
-                </a:solidFill>
-              </a:rPr>
-              <a:t>Prototype vs. Type Object: in Plants vs. Zombies</a:t>
+              <a:t>A big pig: a Pig with a bigger radius, not a subclass</a:t>
             </a:r>
             <a:endParaRPr/>
           </a:p>
@@ -11319,7 +10946,7 @@
                 <a:cs typeface="Consolas"/>
                 <a:sym typeface="Consolas"/>
               </a:rPr>
-              <a:t># level1.txt</a:t>
+              <a:t>public Entity Clone()</a:t>
             </a:r>
             <a:endParaRPr sz="1000">
               <a:solidFill>
@@ -11357,7 +10984,7 @@
                 <a:cs typeface="Consolas"/>
                 <a:sym typeface="Consolas"/>
               </a:rPr>
-              <a:t>birds 3</a:t>
+              <a:t>{</a:t>
             </a:r>
             <a:endParaRPr sz="1000">
               <a:solidFill>
@@ -11395,7 +11022,7 @@
                 <a:cs typeface="Consolas"/>
                 <a:sym typeface="Consolas"/>
               </a:rPr>
-              <a:t>wood-post    880 590 0</a:t>
+              <a:t>    var copy = (Entity)MemberwiseClone();</a:t>
             </a:r>
             <a:endParaRPr sz="1000">
               <a:solidFill>
@@ -11433,7 +11060,7 @@
                 <a:cs typeface="Consolas"/>
                 <a:sym typeface="Consolas"/>
               </a:rPr>
-              <a:t>wood-post   1040 590 0</a:t>
+              <a:t>    copy.Body = null;</a:t>
             </a:r>
             <a:endParaRPr sz="1000">
               <a:solidFill>
@@ -11471,7 +11098,7 @@
                 <a:cs typeface="Consolas"/>
                 <a:sym typeface="Consolas"/>
               </a:rPr>
-              <a:t>wood-plank   960 530 0</a:t>
+              <a:t>    return copy;</a:t>
             </a:r>
             <a:endParaRPr sz="1000">
               <a:solidFill>
@@ -11509,7 +11136,7 @@
                 <a:cs typeface="Consolas"/>
                 <a:sym typeface="Consolas"/>
               </a:rPr>
-              <a:t>pig          960 618 0</a:t>
+              <a:t>}</a:t>
             </a:r>
             <a:endParaRPr sz="1000">
               <a:solidFill>
@@ -11547,7 +11174,7 @@
                 <a:cs typeface="Consolas"/>
                 <a:sym typeface="Consolas"/>
               </a:rPr>
-              <a:t>glass-box    960 495 0</a:t>
+              <a:t/>
             </a:r>
             <a:endParaRPr sz="1000">
               <a:solidFill>
@@ -11585,7 +11212,7 @@
                 <a:cs typeface="Consolas"/>
                 <a:sym typeface="Consolas"/>
               </a:rPr>
-              <a:t>pig          960 448 0</a:t>
+              <a:t>// Prefabs.cs</a:t>
             </a:r>
             <a:endParaRPr sz="1000">
               <a:solidFill>
@@ -11600,6 +11227,272 @@
               <a:sym typeface="Consolas"/>
             </a:endParaRPr>
           </a:p>
+          <a:p>
+            <a:pPr indent="0" lvl="0" marL="0" rtl="0" algn="l">
+              <a:lnSpc>
+                <a:spcPct val="115000"/>
+              </a:lnSpc>
+              <a:spcBef>
+                <a:spcPts val="0"/>
+              </a:spcBef>
+              <a:spcAft>
+                <a:spcPts val="0"/>
+              </a:spcAft>
+              <a:buNone/>
+            </a:pPr>
+            <a:r>
+              <a:rPr lang="en" sz="1000">
+                <a:highlight>
+                  <a:schemeClr val="dk2"/>
+                </a:highlight>
+                <a:latin typeface="Consolas"/>
+                <a:ea typeface="Consolas"/>
+                <a:cs typeface="Consolas"/>
+                <a:sym typeface="Consolas"/>
+              </a:rPr>
+              <a:t>Add("wood-post", new Block(Materials.Wood,</a:t>
+            </a:r>
+            <a:endParaRPr sz="1000">
+              <a:solidFill>
+                <a:srgbClr val="CCCCCC"/>
+              </a:solidFill>
+              <a:highlight>
+                <a:schemeClr val="dk2"/>
+              </a:highlight>
+              <a:latin typeface="Consolas"/>
+              <a:ea typeface="Consolas"/>
+              <a:cs typeface="Consolas"/>
+              <a:sym typeface="Consolas"/>
+            </a:endParaRPr>
+          </a:p>
+          <a:p>
+            <a:pPr indent="0" lvl="0" marL="0" rtl="0" algn="l">
+              <a:lnSpc>
+                <a:spcPct val="115000"/>
+              </a:lnSpc>
+              <a:spcBef>
+                <a:spcPts val="0"/>
+              </a:spcBef>
+              <a:spcAft>
+                <a:spcPts val="0"/>
+              </a:spcAft>
+              <a:buNone/>
+            </a:pPr>
+            <a:r>
+              <a:rPr lang="en" sz="1000">
+                <a:highlight>
+                  <a:schemeClr val="dk2"/>
+                </a:highlight>
+                <a:latin typeface="Consolas"/>
+                <a:ea typeface="Consolas"/>
+                <a:cs typeface="Consolas"/>
+                <a:sym typeface="Consolas"/>
+              </a:rPr>
+              <a:t>    post, 8, 500, atlas.GetRegion("wood-post")));</a:t>
+            </a:r>
+            <a:endParaRPr sz="1000">
+              <a:solidFill>
+                <a:srgbClr val="CCCCCC"/>
+              </a:solidFill>
+              <a:highlight>
+                <a:schemeClr val="dk2"/>
+              </a:highlight>
+              <a:latin typeface="Consolas"/>
+              <a:ea typeface="Consolas"/>
+              <a:cs typeface="Consolas"/>
+              <a:sym typeface="Consolas"/>
+            </a:endParaRPr>
+          </a:p>
+          <a:p>
+            <a:pPr indent="0" lvl="0" marL="0" rtl="0" algn="l">
+              <a:lnSpc>
+                <a:spcPct val="115000"/>
+              </a:lnSpc>
+              <a:spcBef>
+                <a:spcPts val="0"/>
+              </a:spcBef>
+              <a:spcAft>
+                <a:spcPts val="0"/>
+              </a:spcAft>
+              <a:buNone/>
+            </a:pPr>
+            <a:r>
+              <a:rPr lang="en" sz="1000">
+                <a:highlight>
+                  <a:schemeClr val="dk2"/>
+                </a:highlight>
+                <a:latin typeface="Consolas"/>
+                <a:ea typeface="Consolas"/>
+                <a:cs typeface="Consolas"/>
+                <a:sym typeface="Consolas"/>
+              </a:rPr>
+              <a:t>Add("big-pig", new Pig(30, 6, 5000,</a:t>
+            </a:r>
+            <a:endParaRPr sz="1000">
+              <a:solidFill>
+                <a:srgbClr val="CCCCCC"/>
+              </a:solidFill>
+              <a:highlight>
+                <a:schemeClr val="dk2"/>
+              </a:highlight>
+              <a:latin typeface="Consolas"/>
+              <a:ea typeface="Consolas"/>
+              <a:cs typeface="Consolas"/>
+              <a:sym typeface="Consolas"/>
+            </a:endParaRPr>
+          </a:p>
+          <a:p>
+            <a:pPr indent="0" lvl="0" marL="0" rtl="0" algn="l">
+              <a:lnSpc>
+                <a:spcPct val="115000"/>
+              </a:lnSpc>
+              <a:spcBef>
+                <a:spcPts val="0"/>
+              </a:spcBef>
+              <a:spcAft>
+                <a:spcPts val="0"/>
+              </a:spcAft>
+              <a:buNone/>
+            </a:pPr>
+            <a:r>
+              <a:rPr lang="en" sz="1000">
+                <a:highlight>
+                  <a:schemeClr val="dk2"/>
+                </a:highlight>
+                <a:latin typeface="Consolas"/>
+                <a:ea typeface="Consolas"/>
+                <a:cs typeface="Consolas"/>
+                <a:sym typeface="Consolas"/>
+              </a:rPr>
+              <a:t>    atlas.GetRegion("big-pig")));</a:t>
+            </a:r>
+            <a:endParaRPr sz="1000">
+              <a:solidFill>
+                <a:srgbClr val="CCCCCC"/>
+              </a:solidFill>
+              <a:highlight>
+                <a:schemeClr val="dk2"/>
+              </a:highlight>
+              <a:latin typeface="Consolas"/>
+              <a:ea typeface="Consolas"/>
+              <a:cs typeface="Consolas"/>
+              <a:sym typeface="Consolas"/>
+            </a:endParaRPr>
+          </a:p>
+          <a:p>
+            <a:pPr indent="0" lvl="0" marL="0" rtl="0" algn="l">
+              <a:lnSpc>
+                <a:spcPct val="115000"/>
+              </a:lnSpc>
+              <a:spcBef>
+                <a:spcPts val="0"/>
+              </a:spcBef>
+              <a:spcAft>
+                <a:spcPts val="0"/>
+              </a:spcAft>
+              <a:buNone/>
+            </a:pPr>
+            <a:r>
+              <a:rPr lang="en" sz="1000">
+                <a:highlight>
+                  <a:schemeClr val="dk2"/>
+                </a:highlight>
+                <a:latin typeface="Consolas"/>
+                <a:ea typeface="Consolas"/>
+                <a:cs typeface="Consolas"/>
+                <a:sym typeface="Consolas"/>
+              </a:rPr>
+              <a:t/>
+            </a:r>
+            <a:endParaRPr sz="1000">
+              <a:solidFill>
+                <a:srgbClr val="CCCCCC"/>
+              </a:solidFill>
+              <a:highlight>
+                <a:schemeClr val="dk2"/>
+              </a:highlight>
+              <a:latin typeface="Consolas"/>
+              <a:ea typeface="Consolas"/>
+              <a:cs typeface="Consolas"/>
+              <a:sym typeface="Consolas"/>
+            </a:endParaRPr>
+          </a:p>
+          <a:p>
+            <a:pPr indent="0" lvl="0" marL="0" rtl="0" algn="l">
+              <a:lnSpc>
+                <a:spcPct val="115000"/>
+              </a:lnSpc>
+              <a:spcBef>
+                <a:spcPts val="0"/>
+              </a:spcBef>
+              <a:spcAft>
+                <a:spcPts val="0"/>
+              </a:spcAft>
+              <a:buNone/>
+            </a:pPr>
+            <a:r>
+              <a:rPr lang="en" sz="1000">
+                <a:highlight>
+                  <a:schemeClr val="dk2"/>
+                </a:highlight>
+                <a:latin typeface="Consolas"/>
+                <a:ea typeface="Consolas"/>
+                <a:cs typeface="Consolas"/>
+                <a:sym typeface="Consolas"/>
+              </a:rPr>
+              <a:t>Entity entity = _prototypes[name].Clone();</a:t>
+            </a:r>
+            <a:endParaRPr sz="1000">
+              <a:solidFill>
+                <a:srgbClr val="CCCCCC"/>
+              </a:solidFill>
+              <a:highlight>
+                <a:schemeClr val="dk2"/>
+              </a:highlight>
+              <a:latin typeface="Consolas"/>
+              <a:ea typeface="Consolas"/>
+              <a:cs typeface="Consolas"/>
+              <a:sym typeface="Consolas"/>
+            </a:endParaRPr>
+          </a:p>
+          <a:p>
+            <a:pPr indent="0" lvl="0" marL="0" rtl="0" algn="l">
+              <a:lnSpc>
+                <a:spcPct val="115000"/>
+              </a:lnSpc>
+              <a:spcBef>
+                <a:spcPts val="0"/>
+              </a:spcBef>
+              <a:spcAft>
+                <a:spcPts val="0"/>
+              </a:spcAft>
+              <a:buNone/>
+            </a:pPr>
+            <a:r>
+              <a:rPr lang="en" sz="1000">
+                <a:highlight>
+                  <a:schemeClr val="dk2"/>
+                </a:highlight>
+                <a:latin typeface="Consolas"/>
+                <a:ea typeface="Consolas"/>
+                <a:cs typeface="Consolas"/>
+                <a:sym typeface="Consolas"/>
+              </a:rPr>
+              <a:t>entity.Spawn(world, position, rotation);</a:t>
+            </a:r>
+            <a:endParaRPr sz="1000">
+              <a:solidFill>
+                <a:srgbClr val="CCCCCC"/>
+              </a:solidFill>
+              <a:highlight>
+                <a:schemeClr val="dk2"/>
+              </a:highlight>
+              <a:latin typeface="Consolas"/>
+              <a:ea typeface="Consolas"/>
+              <a:cs typeface="Consolas"/>
+              <a:sym typeface="Consolas"/>
+            </a:endParaRPr>
+          </a:p>
         </p:txBody>
       </p:sp>
     </p:spTree>
@@ -11611,6 +11504,673 @@
 </file>
 
 <file path=ppt/slides/slide19.xml><?xml version="1.0" encoding="utf-8"?>
+<p:sld xmlns:a="http://schemas.openxmlformats.org/drawingml/2006/main" xmlns:p="http://schemas.openxmlformats.org/presentationml/2006/main" xmlns:r="http://schemas.openxmlformats.org/officeDocument/2006/relationships">
+  <p:cSld>
+    <p:spTree>
+      <p:nvGrpSpPr>
+        <p:cNvPr id="1" name=""/>
+        <p:cNvGrpSpPr/>
+        <p:nvPr/>
+      </p:nvGrpSpPr>
+      <p:grpSpPr/>
+      <p:sp>
+        <p:nvSpPr>
+          <p:cNvPr id="140" name="Google Shape;140;p23"/>
+          <p:cNvSpPr txBox="1"/>
+          <p:nvPr>
+            <p:ph type="title"/>
+          </p:nvPr>
+        </p:nvSpPr>
+        <p:spPr>
+          <a:xfrm>
+            <a:off x="311700" y="195615"/>
+            <a:ext cx="8520600" cy="572700"/>
+          </a:xfrm>
+          <a:prstGeom prst="rect">
+            <a:avLst/>
+          </a:prstGeom>
+        </p:spPr>
+        <p:txBody>
+          <a:bodyPr anchorCtr="0" anchor="t" bIns="91425" lIns="91425" spcFirstLastPara="1" rIns="91425" wrap="square" tIns="91425">
+            <a:normAutofit fontScale="90000"/>
+          </a:bodyPr>
+          <a:lstStyle/>
+          <a:p>
+            <a:pPr indent="0" lvl="0" marL="0" rtl="0" algn="l">
+              <a:spcBef>
+                <a:spcPts val="0"/>
+              </a:spcBef>
+              <a:spcAft>
+                <a:spcPts val="0"/>
+              </a:spcAft>
+              <a:buNone/>
+            </a:pPr>
+            <a:r>
+              <a:rPr lang="en"/>
+              <a:t>Levels From Prefabs</a:t>
+            </a:r>
+            <a:endParaRPr/>
+          </a:p>
+        </p:txBody>
+      </p:sp>
+      <p:sp>
+        <p:nvSpPr>
+          <p:cNvPr id="293" name="Google Shape;293;p45"/>
+          <p:cNvSpPr txBox="1"/>
+          <p:nvPr>
+            <p:ph type="title"/>
+          </p:nvPr>
+        </p:nvSpPr>
+        <p:spPr>
+          <a:xfrm>
+            <a:off x="311700" y="1152475"/>
+            <a:ext cx="3700000" cy="3500000"/>
+          </a:xfrm>
+          <a:prstGeom prst="rect">
+            <a:avLst/>
+          </a:prstGeom>
+        </p:spPr>
+        <p:txBody>
+          <a:bodyPr anchorCtr="0" anchor="t" bIns="91425" lIns="91425" spcFirstLastPara="1" rIns="91425" wrap="square" tIns="91425">
+            <a:normAutofit fontScale="90000"/>
+          </a:bodyPr>
+          <a:lstStyle/>
+          <a:p>
+            <a:pPr indent="-330200" lvl="0" marL="457200" rtl="0" algn="l">
+              <a:buClr>
+                <a:srgbClr val="DEE2E6"/>
+              </a:buClr>
+              <a:spcBef>
+                <a:spcPts val="0"/>
+              </a:spcBef>
+              <a:spcAft>
+                <a:spcPts val="0"/>
+              </a:spcAft>
+              <a:buSzPts val="1600"/>
+              <a:buChar char="●"/>
+            </a:pPr>
+            <a:r>
+              <a:rPr lang="en" sz="1600">
+                <a:solidFill>
+                  <a:srgbClr val="DEE2E6"/>
+                </a:solidFill>
+              </a:rPr>
+              <a:t>A level: prefab names and positions</a:t>
+            </a:r>
+            <a:endParaRPr/>
+          </a:p>
+          <a:p>
+            <a:pPr indent="-317500" lvl="1" marL="914400" rtl="0" algn="l">
+              <a:buClr>
+                <a:srgbClr val="6C757D"/>
+              </a:buClr>
+              <a:spcBef>
+                <a:spcPts val="0"/>
+              </a:spcBef>
+              <a:spcAft>
+                <a:spcPts val="0"/>
+              </a:spcAft>
+              <a:buSzPts val="1400"/>
+              <a:buChar char="○"/>
+            </a:pPr>
+            <a:r>
+              <a:rPr lang="en" sz="1400">
+                <a:solidFill>
+                  <a:srgbClr val="6C757D"/>
+                </a:solidFill>
+              </a:rPr>
+              <a:t>Levels as data, as in Sokoban</a:t>
+            </a:r>
+            <a:endParaRPr/>
+          </a:p>
+          <a:p>
+            <a:pPr indent="-330200" lvl="0" marL="457200" rtl="0" algn="l">
+              <a:buClr>
+                <a:srgbClr val="DEE2E6"/>
+              </a:buClr>
+              <a:spcBef>
+                <a:spcPts val="0"/>
+              </a:spcBef>
+              <a:spcAft>
+                <a:spcPts val="0"/>
+              </a:spcAft>
+              <a:buSzPts val="1600"/>
+              <a:buChar char="●"/>
+            </a:pPr>
+            <a:r>
+              <a:rPr lang="en" sz="1600">
+                <a:solidFill>
+                  <a:srgbClr val="DEE2E6"/>
+                </a:solidFill>
+              </a:rPr>
+              <a:t>MemberwiseClone: a shallow copy</a:t>
+            </a:r>
+            <a:endParaRPr/>
+          </a:p>
+          <a:p>
+            <a:pPr indent="-317500" lvl="1" marL="914400" rtl="0" algn="l">
+              <a:buClr>
+                <a:srgbClr val="6C757D"/>
+              </a:buClr>
+              <a:spcBef>
+                <a:spcPts val="0"/>
+              </a:spcBef>
+              <a:spcAft>
+                <a:spcPts val="0"/>
+              </a:spcAft>
+              <a:buSzPts val="1400"/>
+              <a:buChar char="○"/>
+            </a:pPr>
+            <a:r>
+              <a:rPr lang="en" sz="1400">
+                <a:solidFill>
+                  <a:srgbClr val="6C757D"/>
+                </a:solidFill>
+              </a:rPr>
+              <a:t>Sharing a sprite: fine</a:t>
+            </a:r>
+            <a:endParaRPr/>
+          </a:p>
+          <a:p>
+            <a:pPr indent="-317500" lvl="1" marL="914400" rtl="0" algn="l">
+              <a:buClr>
+                <a:srgbClr val="6C757D"/>
+              </a:buClr>
+              <a:spcBef>
+                <a:spcPts val="0"/>
+              </a:spcBef>
+              <a:spcAft>
+                <a:spcPts val="0"/>
+              </a:spcAft>
+              <a:buSzPts val="1400"/>
+              <a:buChar char="○"/>
+            </a:pPr>
+            <a:r>
+              <a:rPr lang="en" sz="1400">
+                <a:solidFill>
+                  <a:srgbClr val="6C757D"/>
+                </a:solidFill>
+              </a:rPr>
+              <a:t>Sharing a body: two blocks move as one</a:t>
+            </a:r>
+            <a:endParaRPr/>
+          </a:p>
+          <a:p>
+            <a:pPr indent="-330200" lvl="0" marL="457200" rtl="0" algn="l">
+              <a:buClr>
+                <a:srgbClr val="DEE2E6"/>
+              </a:buClr>
+              <a:spcBef>
+                <a:spcPts val="0"/>
+              </a:spcBef>
+              <a:spcAft>
+                <a:spcPts val="0"/>
+              </a:spcAft>
+              <a:buSzPts val="1600"/>
+              <a:buChar char="●"/>
+            </a:pPr>
+            <a:r>
+              <a:rPr lang="en" sz="1600">
+                <a:solidFill>
+                  <a:srgbClr val="DEE2E6"/>
+                </a:solidFill>
+              </a:rPr>
+              <a:t>Prototype vs. Type Object: in Plants vs. Zombies</a:t>
+            </a:r>
+            <a:endParaRPr/>
+          </a:p>
+        </p:txBody>
+      </p:sp>
+      <p:sp>
+        <p:nvSpPr>
+          <p:cNvPr id="141" name="Google Shape;141;p23"/>
+          <p:cNvSpPr txBox="1"/>
+          <p:nvPr>
+            <p:ph idx="2" type="body"/>
+          </p:nvPr>
+        </p:nvSpPr>
+        <p:spPr>
+          <a:xfrm>
+            <a:off x="4150000" y="1152475"/>
+            <a:ext cx="4750000" cy="3600000"/>
+          </a:xfrm>
+          <a:prstGeom prst="rect">
+            <a:avLst/>
+          </a:prstGeom>
+        </p:spPr>
+        <p:txBody>
+          <a:bodyPr anchorCtr="0" anchor="t" bIns="91425" lIns="91425" spcFirstLastPara="1" rIns="91425" wrap="square" tIns="91425">
+            <a:noAutofit/>
+          </a:bodyPr>
+          <a:lstStyle/>
+          <a:p>
+            <a:pPr indent="0" lvl="0" marL="0" rtl="0" algn="l">
+              <a:lnSpc>
+                <a:spcPct val="115000"/>
+              </a:lnSpc>
+              <a:spcBef>
+                <a:spcPts val="0"/>
+              </a:spcBef>
+              <a:spcAft>
+                <a:spcPts val="0"/>
+              </a:spcAft>
+              <a:buNone/>
+            </a:pPr>
+            <a:r>
+              <a:rPr lang="en" sz="1000">
+                <a:highlight>
+                  <a:schemeClr val="dk2"/>
+                </a:highlight>
+                <a:latin typeface="Consolas"/>
+                <a:ea typeface="Consolas"/>
+                <a:cs typeface="Consolas"/>
+                <a:sym typeface="Consolas"/>
+              </a:rPr>
+              <a:t># level1.txt</a:t>
+            </a:r>
+            <a:endParaRPr sz="1000">
+              <a:solidFill>
+                <a:srgbClr val="CCCCCC"/>
+              </a:solidFill>
+              <a:highlight>
+                <a:schemeClr val="dk2"/>
+              </a:highlight>
+              <a:latin typeface="Consolas"/>
+              <a:ea typeface="Consolas"/>
+              <a:cs typeface="Consolas"/>
+              <a:sym typeface="Consolas"/>
+            </a:endParaRPr>
+          </a:p>
+          <a:p>
+            <a:pPr indent="0" lvl="0" marL="0" rtl="0" algn="l">
+              <a:lnSpc>
+                <a:spcPct val="115000"/>
+              </a:lnSpc>
+              <a:spcBef>
+                <a:spcPts val="0"/>
+              </a:spcBef>
+              <a:spcAft>
+                <a:spcPts val="0"/>
+              </a:spcAft>
+              <a:buNone/>
+            </a:pPr>
+            <a:r>
+              <a:rPr lang="en" sz="1000">
+                <a:highlight>
+                  <a:schemeClr val="dk2"/>
+                </a:highlight>
+                <a:latin typeface="Consolas"/>
+                <a:ea typeface="Consolas"/>
+                <a:cs typeface="Consolas"/>
+                <a:sym typeface="Consolas"/>
+              </a:rPr>
+              <a:t>birds 3</a:t>
+            </a:r>
+            <a:endParaRPr sz="1000">
+              <a:solidFill>
+                <a:srgbClr val="CCCCCC"/>
+              </a:solidFill>
+              <a:highlight>
+                <a:schemeClr val="dk2"/>
+              </a:highlight>
+              <a:latin typeface="Consolas"/>
+              <a:ea typeface="Consolas"/>
+              <a:cs typeface="Consolas"/>
+              <a:sym typeface="Consolas"/>
+            </a:endParaRPr>
+          </a:p>
+          <a:p>
+            <a:pPr indent="0" lvl="0" marL="0" rtl="0" algn="l">
+              <a:lnSpc>
+                <a:spcPct val="115000"/>
+              </a:lnSpc>
+              <a:spcBef>
+                <a:spcPts val="0"/>
+              </a:spcBef>
+              <a:spcAft>
+                <a:spcPts val="0"/>
+              </a:spcAft>
+              <a:buNone/>
+            </a:pPr>
+            <a:r>
+              <a:rPr lang="en" sz="1000">
+                <a:highlight>
+                  <a:schemeClr val="dk2"/>
+                </a:highlight>
+                <a:latin typeface="Consolas"/>
+                <a:ea typeface="Consolas"/>
+                <a:cs typeface="Consolas"/>
+                <a:sym typeface="Consolas"/>
+              </a:rPr>
+              <a:t>wood-post    880 590 0</a:t>
+            </a:r>
+            <a:endParaRPr sz="1000">
+              <a:solidFill>
+                <a:srgbClr val="CCCCCC"/>
+              </a:solidFill>
+              <a:highlight>
+                <a:schemeClr val="dk2"/>
+              </a:highlight>
+              <a:latin typeface="Consolas"/>
+              <a:ea typeface="Consolas"/>
+              <a:cs typeface="Consolas"/>
+              <a:sym typeface="Consolas"/>
+            </a:endParaRPr>
+          </a:p>
+          <a:p>
+            <a:pPr indent="0" lvl="0" marL="0" rtl="0" algn="l">
+              <a:lnSpc>
+                <a:spcPct val="115000"/>
+              </a:lnSpc>
+              <a:spcBef>
+                <a:spcPts val="0"/>
+              </a:spcBef>
+              <a:spcAft>
+                <a:spcPts val="0"/>
+              </a:spcAft>
+              <a:buNone/>
+            </a:pPr>
+            <a:r>
+              <a:rPr lang="en" sz="1000">
+                <a:highlight>
+                  <a:schemeClr val="dk2"/>
+                </a:highlight>
+                <a:latin typeface="Consolas"/>
+                <a:ea typeface="Consolas"/>
+                <a:cs typeface="Consolas"/>
+                <a:sym typeface="Consolas"/>
+              </a:rPr>
+              <a:t>wood-post   1040 590 0</a:t>
+            </a:r>
+            <a:endParaRPr sz="1000">
+              <a:solidFill>
+                <a:srgbClr val="CCCCCC"/>
+              </a:solidFill>
+              <a:highlight>
+                <a:schemeClr val="dk2"/>
+              </a:highlight>
+              <a:latin typeface="Consolas"/>
+              <a:ea typeface="Consolas"/>
+              <a:cs typeface="Consolas"/>
+              <a:sym typeface="Consolas"/>
+            </a:endParaRPr>
+          </a:p>
+          <a:p>
+            <a:pPr indent="0" lvl="0" marL="0" rtl="0" algn="l">
+              <a:lnSpc>
+                <a:spcPct val="115000"/>
+              </a:lnSpc>
+              <a:spcBef>
+                <a:spcPts val="0"/>
+              </a:spcBef>
+              <a:spcAft>
+                <a:spcPts val="0"/>
+              </a:spcAft>
+              <a:buNone/>
+            </a:pPr>
+            <a:r>
+              <a:rPr lang="en" sz="1000">
+                <a:highlight>
+                  <a:schemeClr val="dk2"/>
+                </a:highlight>
+                <a:latin typeface="Consolas"/>
+                <a:ea typeface="Consolas"/>
+                <a:cs typeface="Consolas"/>
+                <a:sym typeface="Consolas"/>
+              </a:rPr>
+              <a:t>wood-plank   960 530 0</a:t>
+            </a:r>
+            <a:endParaRPr sz="1000">
+              <a:solidFill>
+                <a:srgbClr val="CCCCCC"/>
+              </a:solidFill>
+              <a:highlight>
+                <a:schemeClr val="dk2"/>
+              </a:highlight>
+              <a:latin typeface="Consolas"/>
+              <a:ea typeface="Consolas"/>
+              <a:cs typeface="Consolas"/>
+              <a:sym typeface="Consolas"/>
+            </a:endParaRPr>
+          </a:p>
+          <a:p>
+            <a:pPr indent="0" lvl="0" marL="0" rtl="0" algn="l">
+              <a:lnSpc>
+                <a:spcPct val="115000"/>
+              </a:lnSpc>
+              <a:spcBef>
+                <a:spcPts val="0"/>
+              </a:spcBef>
+              <a:spcAft>
+                <a:spcPts val="0"/>
+              </a:spcAft>
+              <a:buNone/>
+            </a:pPr>
+            <a:r>
+              <a:rPr lang="en" sz="1000">
+                <a:highlight>
+                  <a:schemeClr val="dk2"/>
+                </a:highlight>
+                <a:latin typeface="Consolas"/>
+                <a:ea typeface="Consolas"/>
+                <a:cs typeface="Consolas"/>
+                <a:sym typeface="Consolas"/>
+              </a:rPr>
+              <a:t>pig          960 618 0</a:t>
+            </a:r>
+            <a:endParaRPr sz="1000">
+              <a:solidFill>
+                <a:srgbClr val="CCCCCC"/>
+              </a:solidFill>
+              <a:highlight>
+                <a:schemeClr val="dk2"/>
+              </a:highlight>
+              <a:latin typeface="Consolas"/>
+              <a:ea typeface="Consolas"/>
+              <a:cs typeface="Consolas"/>
+              <a:sym typeface="Consolas"/>
+            </a:endParaRPr>
+          </a:p>
+          <a:p>
+            <a:pPr indent="0" lvl="0" marL="0" rtl="0" algn="l">
+              <a:lnSpc>
+                <a:spcPct val="115000"/>
+              </a:lnSpc>
+              <a:spcBef>
+                <a:spcPts val="0"/>
+              </a:spcBef>
+              <a:spcAft>
+                <a:spcPts val="0"/>
+              </a:spcAft>
+              <a:buNone/>
+            </a:pPr>
+            <a:r>
+              <a:rPr lang="en" sz="1000">
+                <a:highlight>
+                  <a:schemeClr val="dk2"/>
+                </a:highlight>
+                <a:latin typeface="Consolas"/>
+                <a:ea typeface="Consolas"/>
+                <a:cs typeface="Consolas"/>
+                <a:sym typeface="Consolas"/>
+              </a:rPr>
+              <a:t>glass-box    960 495 0</a:t>
+            </a:r>
+            <a:endParaRPr sz="1000">
+              <a:solidFill>
+                <a:srgbClr val="CCCCCC"/>
+              </a:solidFill>
+              <a:highlight>
+                <a:schemeClr val="dk2"/>
+              </a:highlight>
+              <a:latin typeface="Consolas"/>
+              <a:ea typeface="Consolas"/>
+              <a:cs typeface="Consolas"/>
+              <a:sym typeface="Consolas"/>
+            </a:endParaRPr>
+          </a:p>
+          <a:p>
+            <a:pPr indent="0" lvl="0" marL="0" rtl="0" algn="l">
+              <a:lnSpc>
+                <a:spcPct val="115000"/>
+              </a:lnSpc>
+              <a:spcBef>
+                <a:spcPts val="0"/>
+              </a:spcBef>
+              <a:spcAft>
+                <a:spcPts val="0"/>
+              </a:spcAft>
+              <a:buNone/>
+            </a:pPr>
+            <a:r>
+              <a:rPr lang="en" sz="1000">
+                <a:highlight>
+                  <a:schemeClr val="dk2"/>
+                </a:highlight>
+                <a:latin typeface="Consolas"/>
+                <a:ea typeface="Consolas"/>
+                <a:cs typeface="Consolas"/>
+                <a:sym typeface="Consolas"/>
+              </a:rPr>
+              <a:t>pig          960 448 0</a:t>
+            </a:r>
+            <a:endParaRPr sz="1000">
+              <a:solidFill>
+                <a:srgbClr val="CCCCCC"/>
+              </a:solidFill>
+              <a:highlight>
+                <a:schemeClr val="dk2"/>
+              </a:highlight>
+              <a:latin typeface="Consolas"/>
+              <a:ea typeface="Consolas"/>
+              <a:cs typeface="Consolas"/>
+              <a:sym typeface="Consolas"/>
+            </a:endParaRPr>
+          </a:p>
+        </p:txBody>
+      </p:sp>
+    </p:spTree>
+  </p:cSld>
+  <p:clrMapOvr>
+    <a:masterClrMapping/>
+  </p:clrMapOvr>
+</p:sld>
+</file>
+
+<file path=ppt/slides/slide2.xml><?xml version="1.0" encoding="utf-8"?>
+<p:sld xmlns:a="http://schemas.openxmlformats.org/drawingml/2006/main" xmlns:p="http://schemas.openxmlformats.org/presentationml/2006/main" xmlns:r="http://schemas.openxmlformats.org/officeDocument/2006/relationships">
+  <p:cSld>
+    <p:spTree>
+      <p:nvGrpSpPr>
+        <p:cNvPr id="1" name=""/>
+        <p:cNvGrpSpPr/>
+        <p:nvPr/>
+      </p:nvGrpSpPr>
+      <p:grpSpPr/>
+      <p:sp>
+        <p:nvSpPr>
+          <p:cNvPr id="2" name="Title 1"/>
+          <p:cNvSpPr>
+            <a:spLocks noGrp="1"/>
+          </p:cNvSpPr>
+          <p:nvPr>
+            <p:ph type="title"/>
+          </p:nvPr>
+        </p:nvSpPr>
+        <p:spPr>
+          <a:xfrm>
+            <a:off x="311700" y="195615"/>
+            <a:ext cx="8520600" cy="572700"/>
+          </a:xfrm>
+        </p:spPr>
+        <p:txBody>
+          <a:bodyPr/>
+          <a:lstStyle/>
+          <a:p>
+            <a:pPr indent="0" lvl="0" marL="0" rtl="0" algn="l">
+              <a:spcBef>
+                <a:spcPts val="0"/>
+              </a:spcBef>
+              <a:spcAft>
+                <a:spcPts val="0"/>
+              </a:spcAft>
+              <a:buNone/>
+            </a:pPr>
+            <a:r>
+              <a:rPr lang="en"/>
+              <a:t>Angry Birds</a:t>
+            </a:r>
+            <a:endParaRPr/>
+          </a:p>
+        </p:txBody>
+      </p:sp>
+      <p:pic>
+        <p:nvPicPr>
+          <p:cNvPr id="3" name="Picture 2" descr="angry-birds.png"/>
+          <p:cNvPicPr>
+            <a:picLocks noChangeAspect="1"/>
+          </p:cNvPicPr>
+          <p:nvPr/>
+        </p:nvPicPr>
+        <p:blipFill>
+          <a:blip r:embed="rId2"/>
+          <a:stretch>
+            <a:fillRect/>
+          </a:stretch>
+        </p:blipFill>
+        <p:spPr>
+          <a:xfrm>
+            <a:off x="1179443" y="960120"/>
+            <a:ext cx="6785113" cy="3657600"/>
+          </a:xfrm>
+          <a:prstGeom prst="rect">
+            <a:avLst/>
+          </a:prstGeom>
+        </p:spPr>
+      </p:pic>
+      <p:sp>
+        <p:nvSpPr>
+          <p:cNvPr id="4" name="TextBox 3"/>
+          <p:cNvSpPr txBox="1"/>
+          <p:nvPr/>
+        </p:nvSpPr>
+        <p:spPr>
+          <a:xfrm>
+            <a:off x="457200" y="4736592"/>
+            <a:ext cx="8229600" cy="274320"/>
+          </a:xfrm>
+          <a:prstGeom prst="rect">
+            <a:avLst/>
+          </a:prstGeom>
+          <a:noFill/>
+        </p:spPr>
+        <p:txBody>
+          <a:bodyPr wrap="square">
+            <a:spAutoFit/>
+          </a:bodyPr>
+          <a:lstStyle/>
+          <a:p>
+            <a:pPr algn="ctr"/>
+            <a:r>
+              <a:rPr sz="900" b="0" i="0">
+                <a:solidFill>
+                  <a:srgbClr val="9AA3AB"/>
+                </a:solidFill>
+              </a:rPr>
+              <a:t>Angry Birds (Rovio, 2009). Image: Sony Pictures, CC BY 3.0, via Wikimedia Commons.</a:t>
+            </a:r>
+          </a:p>
+        </p:txBody>
+      </p:sp>
+    </p:spTree>
+  </p:cSld>
+  <p:clrMapOvr>
+    <a:masterClrMapping/>
+  </p:clrMapOvr>
+</p:sld>
+</file>
+
+<file path=ppt/slides/slide20.xml><?xml version="1.0" encoding="utf-8"?>
 <p:sld xmlns:a="http://schemas.openxmlformats.org/drawingml/2006/main" xmlns:p="http://schemas.openxmlformats.org/presentationml/2006/main" xmlns:r="http://schemas.openxmlformats.org/officeDocument/2006/relationships">
   <p:cSld>
     <p:spTree>
@@ -11737,96 +12297,7 @@
 </p:sld>
 </file>
 
-<file path=ppt/slides/slide2.xml><?xml version="1.0" encoding="utf-8"?>
-<p:sld xmlns:a="http://schemas.openxmlformats.org/drawingml/2006/main" xmlns:r="http://schemas.openxmlformats.org/officeDocument/2006/relationships" xmlns:mc="http://schemas.openxmlformats.org/markup-compatibility/2006" xmlns:mv="urn:schemas-microsoft-com:mac:vml" xmlns:p="http://schemas.openxmlformats.org/presentationml/2006/main" xmlns:c="http://schemas.openxmlformats.org/drawingml/2006/chart" xmlns:dgm="http://schemas.openxmlformats.org/drawingml/2006/diagram" xmlns:o="urn:schemas-microsoft-com:office:office" xmlns:v="urn:schemas-microsoft-com:vml" xmlns:pvml="urn:schemas-microsoft-com:office:powerpoint" xmlns:com="http://schemas.openxmlformats.org/drawingml/2006/compatibility" xmlns:p14="http://schemas.microsoft.com/office/powerpoint/2010/main" xmlns:p15="http://schemas.microsoft.com/office/powerpoint/2012/main" xmlns:ahyp="http://schemas.microsoft.com/office/drawing/2018/hyperlinkcolor">
-  <p:cSld>
-    <p:spTree>
-      <p:nvGrpSpPr>
-        <p:cNvPr id="44" name="Shape 44"/>
-        <p:cNvGrpSpPr/>
-        <p:nvPr/>
-      </p:nvGrpSpPr>
-      <p:grpSpPr>
-        <a:xfrm>
-          <a:off x="0" y="0"/>
-          <a:ext cx="0" cy="0"/>
-          <a:chOff x="0" y="0"/>
-          <a:chExt cx="0" cy="0"/>
-        </a:xfrm>
-      </p:grpSpPr>
-      <p:sp>
-        <p:nvSpPr>
-          <p:cNvPr id="45" name="Google Shape;45;p10"/>
-          <p:cNvSpPr txBox="1"/>
-          <p:nvPr>
-            <p:ph type="title"/>
-          </p:nvPr>
-        </p:nvSpPr>
-        <p:spPr>
-          <a:xfrm>
-            <a:off x="311700" y="195615"/>
-            <a:ext cx="8520600" cy="572700"/>
-          </a:xfrm>
-          <a:prstGeom prst="rect">
-            <a:avLst/>
-          </a:prstGeom>
-        </p:spPr>
-        <p:txBody>
-          <a:bodyPr anchorCtr="0" anchor="t" bIns="91425" lIns="91425" spcFirstLastPara="1" rIns="91425" wrap="square" tIns="91425">
-            <a:normAutofit fontScale="90000"/>
-          </a:bodyPr>
-          <a:lstStyle/>
-          <a:p>
-            <a:pPr indent="0" lvl="0" marL="0" rtl="0" algn="l">
-              <a:spcBef>
-                <a:spcPts val="0"/>
-              </a:spcBef>
-              <a:spcAft>
-                <a:spcPts val="0"/>
-              </a:spcAft>
-              <a:buNone/>
-            </a:pPr>
-            <a:r>
-              <a:rPr lang="en"/>
-              <a:t>Today’s Goal</a:t>
-            </a:r>
-            <a:endParaRPr/>
-          </a:p>
-        </p:txBody>
-      </p:sp>
-      <p:pic>
-        <p:nvPicPr>
-          <p:cNvPr id="46" name="Picture 46" descr="birds-flight.png"/>
-          <p:cNvPicPr>
-            <a:picLocks noChangeAspect="1"/>
-          </p:cNvPicPr>
-          <p:nvPr/>
-        </p:nvPicPr>
-        <p:blipFill>
-          <a:blip r:embed="rId4"/>
-          <a:stretch>
-            <a:fillRect/>
-          </a:stretch>
-        </p:blipFill>
-        <p:spPr>
-          <a:xfrm>
-            <a:off x="1677201" y="1531275"/>
-            <a:ext cx="5789598" cy="3256648"/>
-          </a:xfrm>
-          <a:prstGeom prst="rect">
-            <a:avLst/>
-          </a:prstGeom>
-        </p:spPr>
-      </p:pic>
-    </p:spTree>
-  </p:cSld>
-  <p:clrMapOvr>
-    <a:masterClrMapping/>
-  </p:clrMapOvr>
-</p:sld>
-</file>
-
-<file path=ppt/slides/slide20.xml><?xml version="1.0" encoding="utf-8"?>
+<file path=ppt/slides/slide21.xml><?xml version="1.0" encoding="utf-8"?>
 <p:sld xmlns:a="http://schemas.openxmlformats.org/drawingml/2006/main" xmlns:p="http://schemas.openxmlformats.org/presentationml/2006/main" xmlns:r="http://schemas.openxmlformats.org/officeDocument/2006/relationships">
   <p:cSld>
     <p:spTree>
@@ -12242,7 +12713,7 @@
 </p:sld>
 </file>
 
-<file path=ppt/slides/slide21.xml><?xml version="1.0" encoding="utf-8"?>
+<file path=ppt/slides/slide22.xml><?xml version="1.0" encoding="utf-8"?>
 <p:sld xmlns:a="http://schemas.openxmlformats.org/drawingml/2006/main" xmlns:r="http://schemas.openxmlformats.org/officeDocument/2006/relationships" xmlns:mc="http://schemas.openxmlformats.org/markup-compatibility/2006" xmlns:mv="urn:schemas-microsoft-com:mac:vml" xmlns:p="http://schemas.openxmlformats.org/presentationml/2006/main" xmlns:c="http://schemas.openxmlformats.org/drawingml/2006/chart" xmlns:dgm="http://schemas.openxmlformats.org/drawingml/2006/diagram" xmlns:o="urn:schemas-microsoft-com:office:office" xmlns:v="urn:schemas-microsoft-com:vml" xmlns:pvml="urn:schemas-microsoft-com:office:powerpoint" xmlns:com="http://schemas.openxmlformats.org/drawingml/2006/compatibility" xmlns:p14="http://schemas.microsoft.com/office/powerpoint/2010/main" xmlns:p15="http://schemas.microsoft.com/office/powerpoint/2012/main" xmlns:ahyp="http://schemas.microsoft.com/office/drawing/2018/hyperlinkcolor">
   <p:cSld>
     <p:spTree>
@@ -12373,872 +12844,6 @@
   <p:clrMapOvr>
     <a:masterClrMapping/>
   </p:clrMapOvr>
-</p:sld>
-</file>
-
-<file path=ppt/slides/slide22.xml><?xml version="1.0" encoding="utf-8"?>
-<p:sld xmlns:a="http://schemas.openxmlformats.org/drawingml/2006/main" xmlns:r="http://schemas.openxmlformats.org/officeDocument/2006/relationships" xmlns:mc="http://schemas.openxmlformats.org/markup-compatibility/2006" xmlns:mv="urn:schemas-microsoft-com:mac:vml" xmlns:p="http://schemas.openxmlformats.org/presentationml/2006/main" xmlns:c="http://schemas.openxmlformats.org/drawingml/2006/chart" xmlns:dgm="http://schemas.openxmlformats.org/drawingml/2006/diagram" xmlns:o="urn:schemas-microsoft-com:office:office" xmlns:v="urn:schemas-microsoft-com:vml" xmlns:pvml="urn:schemas-microsoft-com:office:powerpoint" xmlns:com="http://schemas.openxmlformats.org/drawingml/2006/compatibility" xmlns:p14="http://schemas.microsoft.com/office/powerpoint/2010/main" xmlns:p15="http://schemas.microsoft.com/office/powerpoint/2012/main" xmlns:ahyp="http://schemas.microsoft.com/office/drawing/2018/hyperlinkcolor">
-  <p:cSld>
-    <p:spTree>
-      <p:nvGrpSpPr>
-        <p:cNvPr id="292" name="Shape 292"/>
-        <p:cNvGrpSpPr/>
-        <p:nvPr/>
-      </p:nvGrpSpPr>
-      <p:grpSpPr>
-        <a:xfrm>
-          <a:off x="0" y="0"/>
-          <a:ext cx="0" cy="0"/>
-          <a:chOff x="0" y="0"/>
-          <a:chExt cx="0" cy="0"/>
-        </a:xfrm>
-      </p:grpSpPr>
-      <p:sp>
-        <p:nvSpPr>
-          <p:cNvPr id="293" name="Google Shape;293;p45"/>
-          <p:cNvSpPr txBox="1"/>
-          <p:nvPr>
-            <p:ph type="title"/>
-          </p:nvPr>
-        </p:nvSpPr>
-        <p:spPr>
-          <a:xfrm>
-            <a:off x="311700" y="195615"/>
-            <a:ext cx="8520600" cy="572700"/>
-          </a:xfrm>
-          <a:prstGeom prst="rect">
-            <a:avLst/>
-          </a:prstGeom>
-        </p:spPr>
-        <p:txBody>
-          <a:bodyPr anchorCtr="0" anchor="t" bIns="91425" lIns="91425" spcFirstLastPara="1" rIns="91425" wrap="square" tIns="91425">
-            <a:normAutofit fontScale="90000"/>
-          </a:bodyPr>
-          <a:lstStyle/>
-          <a:p>
-            <a:pPr indent="0" lvl="0" marL="0" rtl="0" algn="l">
-              <a:spcBef>
-                <a:spcPts val="0"/>
-              </a:spcBef>
-              <a:spcAft>
-                <a:spcPts val="0"/>
-              </a:spcAft>
-              <a:buNone/>
-            </a:pPr>
-            <a:r>
-              <a:rPr lang="en">
-                <a:solidFill>
-                  <a:schemeClr val="accent5"/>
-                </a:solidFill>
-              </a:rPr>
-              <a:t>Exercises</a:t>
-            </a:r>
-            <a:endParaRPr>
-              <a:solidFill>
-                <a:schemeClr val="accent5"/>
-              </a:solidFill>
-            </a:endParaRPr>
-          </a:p>
-        </p:txBody>
-      </p:sp>
-      <p:sp>
-        <p:nvSpPr>
-          <p:cNvPr id="294" name="Google Shape;294;p45"/>
-          <p:cNvSpPr txBox="1"/>
-          <p:nvPr>
-            <p:ph idx="1" type="body"/>
-          </p:nvPr>
-        </p:nvSpPr>
-        <p:spPr>
-          <a:xfrm>
-            <a:off x="311700" y="885950"/>
-            <a:ext cx="8520600" cy="4023300"/>
-          </a:xfrm>
-          <a:prstGeom prst="rect">
-            <a:avLst/>
-          </a:prstGeom>
-        </p:spPr>
-        <p:txBody>
-          <a:bodyPr anchorCtr="0" anchor="t" bIns="91425" lIns="91425" spcFirstLastPara="1" rIns="91425" wrap="square" tIns="91425">
-            <a:normAutofit/>
-          </a:bodyPr>
-          <a:lstStyle/>
-          <a:p>
-            <a:pPr indent="-330200" lvl="0" marL="457200" rtl="0" algn="l">
-              <a:spcBef>
-                <a:spcPts val="0"/>
-              </a:spcBef>
-              <a:spcAft>
-                <a:spcPts val="0"/>
-              </a:spcAft>
-              <a:buSzPts val="1600"/>
-              <a:buChar char="●"/>
-            </a:pPr>
-            <a:r>
-              <a:rPr lang="en"/>
-              <a:t>Start from Birds4, the finished game</a:t>
-            </a:r>
-            <a:endParaRPr/>
-          </a:p>
-          <a:p>
-            <a:pPr indent="-330200" lvl="0" marL="457200" rtl="0" algn="l">
-              <a:spcBef>
-                <a:spcPts val="0"/>
-              </a:spcBef>
-              <a:spcAft>
-                <a:spcPts val="0"/>
-              </a:spcAft>
-              <a:buSzPts val="1600"/>
-              <a:buChar char="●"/>
-            </a:pPr>
-            <a:r>
-              <a:rPr lang="en"/>
-              <a:t>A new level, and a new prefab: how much code changed?</a:t>
-            </a:r>
-            <a:endParaRPr/>
-          </a:p>
-          <a:p>
-            <a:pPr indent="-330200" lvl="0" marL="457200" rtl="0" algn="l">
-              <a:spcBef>
-                <a:spcPts val="0"/>
-              </a:spcBef>
-              <a:spcAft>
-                <a:spcPts val="0"/>
-              </a:spcAft>
-              <a:buSzPts val="1600"/>
-              <a:buChar char="●"/>
-            </a:pPr>
-            <a:r>
-              <a:rPr lang="en"/>
-              <a:t>A heavy bird, twice the size, as a prefab</a:t>
-            </a:r>
-            <a:endParaRPr/>
-          </a:p>
-          <a:p>
-            <a:pPr indent="-317500" lvl="1" marL="914400" rtl="0" algn="l">
-              <a:spcBef>
-                <a:spcPts val="0"/>
-              </a:spcBef>
-              <a:spcAft>
-                <a:spcPts val="0"/>
-              </a:spcAft>
-              <a:buSzPts val="1400"/>
-              <a:buChar char="○"/>
-            </a:pPr>
-            <a:r>
-              <a:rPr lang="en"/>
-              <a:t>A list of birds per level: birds red red heavy</a:t>
-            </a:r>
-            <a:endParaRPr/>
-          </a:p>
-          <a:p>
-            <a:pPr indent="-330200" lvl="0" marL="457200" rtl="0" algn="l">
-              <a:spcBef>
-                <a:spcPts val="0"/>
-              </a:spcBef>
-              <a:spcAft>
-                <a:spcPts val="0"/>
-              </a:spcAft>
-              <a:buSzPts val="1600"/>
-              <a:buChar char="●"/>
-            </a:pPr>
-            <a:r>
-              <a:rPr lang="en"/>
-              <a:t>A TNT box that pushes everything nearby away</a:t>
-            </a:r>
-            <a:endParaRPr/>
-          </a:p>
-          <a:p>
-            <a:pPr indent="-317500" lvl="1" marL="914400" rtl="0" algn="l">
-              <a:spcBef>
-                <a:spcPts val="0"/>
-              </a:spcBef>
-              <a:spcAft>
-                <a:spcPts val="0"/>
-              </a:spcAft>
-              <a:buSzPts val="1400"/>
-              <a:buChar char="○"/>
-            </a:pPr>
-            <a:r>
-              <a:rPr lang="en"/>
-              <a:t>What must the facade offer? Keep Box2D inside</a:t>
-            </a:r>
-            <a:endParaRPr/>
-          </a:p>
-        </p:txBody>
-      </p:sp>
-    </p:spTree>
-  </p:cSld>
-  <p:clrMapOvr>
-    <a:masterClrMapping/>
-  </p:clrMapOvr>
-  <p:timing>
-    <p:tnLst>
-      <p:par>
-        <p:cTn dur="indefinite" nodeType="tmRoot" restart="never">
-          <p:childTnLst>
-            <p:seq concurrent="1" nextAc="seek">
-              <p:cTn dur="indefinite" id="2" nodeType="mainSeq">
-                <p:childTnLst>
-                  <p:par>
-                    <p:cTn fill="hold">
-                      <p:stCondLst>
-                        <p:cond delay="indefinite"/>
-                      </p:stCondLst>
-                      <p:childTnLst>
-                        <p:par>
-                          <p:cTn fill="hold">
-                            <p:stCondLst>
-                              <p:cond delay="0"/>
-                            </p:stCondLst>
-                            <p:childTnLst>
-                              <p:par>
-                                <p:cTn fill="hold" nodeType="clickEffect" presetClass="entr" presetID="1" presetSubtype="0">
-                                  <p:stCondLst>
-                                    <p:cond delay="0"/>
-                                  </p:stCondLst>
-                                  <p:childTnLst>
-                                    <p:set>
-                                      <p:cBhvr>
-                                        <p:cTn dur="1" fill="hold">
-                                          <p:stCondLst>
-                                            <p:cond delay="0"/>
-                                          </p:stCondLst>
-                                        </p:cTn>
-                                        <p:tgtEl>
-                                          <p:spTgt spid="294">
-                                            <p:txEl>
-                                              <p:pRg end="0" st="0"/>
-                                            </p:txEl>
-                                          </p:spTgt>
-                                        </p:tgtEl>
-                                        <p:attrNameLst>
-                                          <p:attrName>style.visibility</p:attrName>
-                                        </p:attrNameLst>
-                                      </p:cBhvr>
-                                      <p:to>
-                                        <p:strVal val="visible"/>
-                                      </p:to>
-                                    </p:set>
-                                  </p:childTnLst>
-                                </p:cTn>
-                              </p:par>
-                            </p:childTnLst>
-                          </p:cTn>
-                        </p:par>
-                      </p:childTnLst>
-                    </p:cTn>
-                  </p:par>
-                  <p:par>
-                    <p:cTn fill="hold">
-                      <p:stCondLst>
-                        <p:cond delay="indefinite"/>
-                      </p:stCondLst>
-                      <p:childTnLst>
-                        <p:par>
-                          <p:cTn fill="hold">
-                            <p:stCondLst>
-                              <p:cond delay="0"/>
-                            </p:stCondLst>
-                            <p:childTnLst>
-                              <p:par>
-                                <p:cTn fill="hold" nodeType="clickEffect" presetClass="entr" presetID="1" presetSubtype="0">
-                                  <p:stCondLst>
-                                    <p:cond delay="0"/>
-                                  </p:stCondLst>
-                                  <p:childTnLst>
-                                    <p:set>
-                                      <p:cBhvr>
-                                        <p:cTn dur="1" fill="hold">
-                                          <p:stCondLst>
-                                            <p:cond delay="0"/>
-                                          </p:stCondLst>
-                                        </p:cTn>
-                                        <p:tgtEl>
-                                          <p:spTgt spid="294">
-                                            <p:txEl>
-                                              <p:pRg end="1" st="1"/>
-                                            </p:txEl>
-                                          </p:spTgt>
-                                        </p:tgtEl>
-                                        <p:attrNameLst>
-                                          <p:attrName>style.visibility</p:attrName>
-                                        </p:attrNameLst>
-                                      </p:cBhvr>
-                                      <p:to>
-                                        <p:strVal val="visible"/>
-                                      </p:to>
-                                    </p:set>
-                                  </p:childTnLst>
-                                </p:cTn>
-                              </p:par>
-                            </p:childTnLst>
-                          </p:cTn>
-                        </p:par>
-                      </p:childTnLst>
-                    </p:cTn>
-                  </p:par>
-                  <p:par>
-                    <p:cTn fill="hold">
-                      <p:stCondLst>
-                        <p:cond delay="indefinite"/>
-                      </p:stCondLst>
-                      <p:childTnLst>
-                        <p:par>
-                          <p:cTn fill="hold">
-                            <p:stCondLst>
-                              <p:cond delay="0"/>
-                            </p:stCondLst>
-                            <p:childTnLst>
-                              <p:par>
-                                <p:cTn fill="hold" nodeType="clickEffect" presetClass="entr" presetID="1" presetSubtype="0">
-                                  <p:stCondLst>
-                                    <p:cond delay="0"/>
-                                  </p:stCondLst>
-                                  <p:childTnLst>
-                                    <p:set>
-                                      <p:cBhvr>
-                                        <p:cTn dur="1" fill="hold">
-                                          <p:stCondLst>
-                                            <p:cond delay="0"/>
-                                          </p:stCondLst>
-                                        </p:cTn>
-                                        <p:tgtEl>
-                                          <p:spTgt spid="294">
-                                            <p:txEl>
-                                              <p:pRg end="2" st="2"/>
-                                            </p:txEl>
-                                          </p:spTgt>
-                                        </p:tgtEl>
-                                        <p:attrNameLst>
-                                          <p:attrName>style.visibility</p:attrName>
-                                        </p:attrNameLst>
-                                      </p:cBhvr>
-                                      <p:to>
-                                        <p:strVal val="visible"/>
-                                      </p:to>
-                                    </p:set>
-                                  </p:childTnLst>
-                                </p:cTn>
-                              </p:par>
-                            </p:childTnLst>
-                          </p:cTn>
-                        </p:par>
-                      </p:childTnLst>
-                    </p:cTn>
-                  </p:par>
-                  <p:par>
-                    <p:cTn fill="hold">
-                      <p:stCondLst>
-                        <p:cond delay="indefinite"/>
-                      </p:stCondLst>
-                      <p:childTnLst>
-                        <p:par>
-                          <p:cTn fill="hold">
-                            <p:stCondLst>
-                              <p:cond delay="0"/>
-                            </p:stCondLst>
-                            <p:childTnLst>
-                              <p:par>
-                                <p:cTn fill="hold" nodeType="clickEffect" presetClass="entr" presetID="1" presetSubtype="0">
-                                  <p:stCondLst>
-                                    <p:cond delay="0"/>
-                                  </p:stCondLst>
-                                  <p:childTnLst>
-                                    <p:set>
-                                      <p:cBhvr>
-                                        <p:cTn dur="1" fill="hold">
-                                          <p:stCondLst>
-                                            <p:cond delay="0"/>
-                                          </p:stCondLst>
-                                        </p:cTn>
-                                        <p:tgtEl>
-                                          <p:spTgt spid="294">
-                                            <p:txEl>
-                                              <p:pRg end="3" st="3"/>
-                                            </p:txEl>
-                                          </p:spTgt>
-                                        </p:tgtEl>
-                                        <p:attrNameLst>
-                                          <p:attrName>style.visibility</p:attrName>
-                                        </p:attrNameLst>
-                                      </p:cBhvr>
-                                      <p:to>
-                                        <p:strVal val="visible"/>
-                                      </p:to>
-                                    </p:set>
-                                  </p:childTnLst>
-                                </p:cTn>
-                              </p:par>
-                            </p:childTnLst>
-                          </p:cTn>
-                        </p:par>
-                      </p:childTnLst>
-                    </p:cTn>
-                  </p:par>
-                  <p:par>
-                    <p:cTn fill="hold">
-                      <p:stCondLst>
-                        <p:cond delay="indefinite"/>
-                      </p:stCondLst>
-                      <p:childTnLst>
-                        <p:par>
-                          <p:cTn fill="hold">
-                            <p:stCondLst>
-                              <p:cond delay="0"/>
-                            </p:stCondLst>
-                            <p:childTnLst>
-                              <p:par>
-                                <p:cTn fill="hold" nodeType="clickEffect" presetClass="entr" presetID="1" presetSubtype="0">
-                                  <p:stCondLst>
-                                    <p:cond delay="0"/>
-                                  </p:stCondLst>
-                                  <p:childTnLst>
-                                    <p:set>
-                                      <p:cBhvr>
-                                        <p:cTn dur="1" fill="hold">
-                                          <p:stCondLst>
-                                            <p:cond delay="0"/>
-                                          </p:stCondLst>
-                                        </p:cTn>
-                                        <p:tgtEl>
-                                          <p:spTgt spid="294">
-                                            <p:txEl>
-                                              <p:pRg end="4" st="4"/>
-                                            </p:txEl>
-                                          </p:spTgt>
-                                        </p:tgtEl>
-                                        <p:attrNameLst>
-                                          <p:attrName>style.visibility</p:attrName>
-                                        </p:attrNameLst>
-                                      </p:cBhvr>
-                                      <p:to>
-                                        <p:strVal val="visible"/>
-                                      </p:to>
-                                    </p:set>
-                                  </p:childTnLst>
-                                </p:cTn>
-                              </p:par>
-                            </p:childTnLst>
-                          </p:cTn>
-                        </p:par>
-                      </p:childTnLst>
-                    </p:cTn>
-                  </p:par>
-                  <p:par>
-                    <p:cTn fill="hold">
-                      <p:stCondLst>
-                        <p:cond delay="indefinite"/>
-                      </p:stCondLst>
-                      <p:childTnLst>
-                        <p:par>
-                          <p:cTn fill="hold">
-                            <p:stCondLst>
-                              <p:cond delay="0"/>
-                            </p:stCondLst>
-                            <p:childTnLst>
-                              <p:par>
-                                <p:cTn fill="hold" nodeType="clickEffect" presetClass="entr" presetID="1" presetSubtype="0">
-                                  <p:stCondLst>
-                                    <p:cond delay="0"/>
-                                  </p:stCondLst>
-                                  <p:childTnLst>
-                                    <p:set>
-                                      <p:cBhvr>
-                                        <p:cTn dur="1" fill="hold">
-                                          <p:stCondLst>
-                                            <p:cond delay="0"/>
-                                          </p:stCondLst>
-                                        </p:cTn>
-                                        <p:tgtEl>
-                                          <p:spTgt spid="294">
-                                            <p:txEl>
-                                              <p:pRg end="5" st="5"/>
-                                            </p:txEl>
-                                          </p:spTgt>
-                                        </p:tgtEl>
-                                        <p:attrNameLst>
-                                          <p:attrName>style.visibility</p:attrName>
-                                        </p:attrNameLst>
-                                      </p:cBhvr>
-                                      <p:to>
-                                        <p:strVal val="visible"/>
-                                      </p:to>
-                                    </p:set>
-                                  </p:childTnLst>
-                                </p:cTn>
-                              </p:par>
-                            </p:childTnLst>
-                          </p:cTn>
-                        </p:par>
-                      </p:childTnLst>
-                    </p:cTn>
-                  </p:par>
-                  <p:par>
-                    <p:cTn fill="hold">
-                      <p:stCondLst>
-                        <p:cond delay="indefinite"/>
-                      </p:stCondLst>
-                      <p:childTnLst>
-                        <p:par>
-                          <p:cTn fill="hold">
-                            <p:stCondLst>
-                              <p:cond delay="0"/>
-                            </p:stCondLst>
-                            <p:childTnLst>
-                              <p:par>
-                                <p:cTn fill="hold" nodeType="clickEffect" presetClass="entr" presetID="1" presetSubtype="0">
-                                  <p:stCondLst>
-                                    <p:cond delay="0"/>
-                                  </p:stCondLst>
-                                  <p:childTnLst>
-                                    <p:set>
-                                      <p:cBhvr>
-                                        <p:cTn dur="1" fill="hold">
-                                          <p:stCondLst>
-                                            <p:cond delay="0"/>
-                                          </p:stCondLst>
-                                        </p:cTn>
-                                        <p:tgtEl>
-                                          <p:spTgt spid="294">
-                                            <p:txEl>
-                                              <p:pRg end="6" st="6"/>
-                                            </p:txEl>
-                                          </p:spTgt>
-                                        </p:tgtEl>
-                                        <p:attrNameLst>
-                                          <p:attrName>style.visibility</p:attrName>
-                                        </p:attrNameLst>
-                                      </p:cBhvr>
-                                      <p:to>
-                                        <p:strVal val="visible"/>
-                                      </p:to>
-                                    </p:set>
-                                  </p:childTnLst>
-                                </p:cTn>
-                              </p:par>
-                            </p:childTnLst>
-                          </p:cTn>
-                        </p:par>
-                      </p:childTnLst>
-                    </p:cTn>
-                  </p:par>
-                  <p:par>
-                    <p:cTn fill="hold">
-                      <p:stCondLst>
-                        <p:cond delay="indefinite"/>
-                      </p:stCondLst>
-                      <p:childTnLst>
-                        <p:par>
-                          <p:cTn fill="hold">
-                            <p:stCondLst>
-                              <p:cond delay="0"/>
-                            </p:stCondLst>
-                            <p:childTnLst>
-                              <p:par>
-                                <p:cTn fill="hold" nodeType="clickEffect" presetClass="entr" presetID="1" presetSubtype="0">
-                                  <p:stCondLst>
-                                    <p:cond delay="0"/>
-                                  </p:stCondLst>
-                                  <p:childTnLst>
-                                    <p:set>
-                                      <p:cBhvr>
-                                        <p:cTn dur="1" fill="hold">
-                                          <p:stCondLst>
-                                            <p:cond delay="0"/>
-                                          </p:stCondLst>
-                                        </p:cTn>
-                                        <p:tgtEl>
-                                          <p:spTgt spid="294">
-                                            <p:txEl>
-                                              <p:pRg end="7" st="7"/>
-                                            </p:txEl>
-                                          </p:spTgt>
-                                        </p:tgtEl>
-                                        <p:attrNameLst>
-                                          <p:attrName>style.visibility</p:attrName>
-                                        </p:attrNameLst>
-                                      </p:cBhvr>
-                                      <p:to>
-                                        <p:strVal val="visible"/>
-                                      </p:to>
-                                    </p:set>
-                                  </p:childTnLst>
-                                </p:cTn>
-                              </p:par>
-                            </p:childTnLst>
-                          </p:cTn>
-                        </p:par>
-                      </p:childTnLst>
-                    </p:cTn>
-                  </p:par>
-                  <p:par>
-                    <p:cTn fill="hold">
-                      <p:stCondLst>
-                        <p:cond delay="indefinite"/>
-                      </p:stCondLst>
-                      <p:childTnLst>
-                        <p:par>
-                          <p:cTn fill="hold">
-                            <p:stCondLst>
-                              <p:cond delay="0"/>
-                            </p:stCondLst>
-                            <p:childTnLst>
-                              <p:par>
-                                <p:cTn fill="hold" nodeType="clickEffect" presetClass="entr" presetID="1" presetSubtype="0">
-                                  <p:stCondLst>
-                                    <p:cond delay="0"/>
-                                  </p:stCondLst>
-                                  <p:childTnLst>
-                                    <p:set>
-                                      <p:cBhvr>
-                                        <p:cTn dur="1" fill="hold">
-                                          <p:stCondLst>
-                                            <p:cond delay="0"/>
-                                          </p:stCondLst>
-                                        </p:cTn>
-                                        <p:tgtEl>
-                                          <p:spTgt spid="294">
-                                            <p:txEl>
-                                              <p:pRg end="8" st="8"/>
-                                            </p:txEl>
-                                          </p:spTgt>
-                                        </p:tgtEl>
-                                        <p:attrNameLst>
-                                          <p:attrName>style.visibility</p:attrName>
-                                        </p:attrNameLst>
-                                      </p:cBhvr>
-                                      <p:to>
-                                        <p:strVal val="visible"/>
-                                      </p:to>
-                                    </p:set>
-                                  </p:childTnLst>
-                                </p:cTn>
-                              </p:par>
-                            </p:childTnLst>
-                          </p:cTn>
-                        </p:par>
-                      </p:childTnLst>
-                    </p:cTn>
-                  </p:par>
-                  <p:par>
-                    <p:cTn fill="hold">
-                      <p:stCondLst>
-                        <p:cond delay="indefinite"/>
-                      </p:stCondLst>
-                      <p:childTnLst>
-                        <p:par>
-                          <p:cTn fill="hold">
-                            <p:stCondLst>
-                              <p:cond delay="0"/>
-                            </p:stCondLst>
-                            <p:childTnLst>
-                              <p:par>
-                                <p:cTn fill="hold" nodeType="clickEffect" presetClass="entr" presetID="1" presetSubtype="0">
-                                  <p:stCondLst>
-                                    <p:cond delay="0"/>
-                                  </p:stCondLst>
-                                  <p:childTnLst>
-                                    <p:set>
-                                      <p:cBhvr>
-                                        <p:cTn dur="1" fill="hold">
-                                          <p:stCondLst>
-                                            <p:cond delay="0"/>
-                                          </p:stCondLst>
-                                        </p:cTn>
-                                        <p:tgtEl>
-                                          <p:spTgt spid="294">
-                                            <p:txEl>
-                                              <p:pRg end="9" st="9"/>
-                                            </p:txEl>
-                                          </p:spTgt>
-                                        </p:tgtEl>
-                                        <p:attrNameLst>
-                                          <p:attrName>style.visibility</p:attrName>
-                                        </p:attrNameLst>
-                                      </p:cBhvr>
-                                      <p:to>
-                                        <p:strVal val="visible"/>
-                                      </p:to>
-                                    </p:set>
-                                  </p:childTnLst>
-                                </p:cTn>
-                              </p:par>
-                            </p:childTnLst>
-                          </p:cTn>
-                        </p:par>
-                      </p:childTnLst>
-                    </p:cTn>
-                  </p:par>
-                  <p:par>
-                    <p:cTn fill="hold">
-                      <p:stCondLst>
-                        <p:cond delay="indefinite"/>
-                      </p:stCondLst>
-                      <p:childTnLst>
-                        <p:par>
-                          <p:cTn fill="hold">
-                            <p:stCondLst>
-                              <p:cond delay="0"/>
-                            </p:stCondLst>
-                            <p:childTnLst>
-                              <p:par>
-                                <p:cTn fill="hold" nodeType="clickEffect" presetClass="entr" presetID="1" presetSubtype="0">
-                                  <p:stCondLst>
-                                    <p:cond delay="0"/>
-                                  </p:stCondLst>
-                                  <p:childTnLst>
-                                    <p:set>
-                                      <p:cBhvr>
-                                        <p:cTn dur="1" fill="hold">
-                                          <p:stCondLst>
-                                            <p:cond delay="0"/>
-                                          </p:stCondLst>
-                                        </p:cTn>
-                                        <p:tgtEl>
-                                          <p:spTgt spid="294">
-                                            <p:txEl>
-                                              <p:pRg end="10" st="10"/>
-                                            </p:txEl>
-                                          </p:spTgt>
-                                        </p:tgtEl>
-                                        <p:attrNameLst>
-                                          <p:attrName>style.visibility</p:attrName>
-                                        </p:attrNameLst>
-                                      </p:cBhvr>
-                                      <p:to>
-                                        <p:strVal val="visible"/>
-                                      </p:to>
-                                    </p:set>
-                                  </p:childTnLst>
-                                </p:cTn>
-                              </p:par>
-                            </p:childTnLst>
-                          </p:cTn>
-                        </p:par>
-                      </p:childTnLst>
-                    </p:cTn>
-                  </p:par>
-                  <p:par>
-                    <p:cTn fill="hold">
-                      <p:stCondLst>
-                        <p:cond delay="indefinite"/>
-                      </p:stCondLst>
-                      <p:childTnLst>
-                        <p:par>
-                          <p:cTn fill="hold">
-                            <p:stCondLst>
-                              <p:cond delay="0"/>
-                            </p:stCondLst>
-                            <p:childTnLst>
-                              <p:par>
-                                <p:cTn fill="hold" nodeType="clickEffect" presetClass="entr" presetID="1" presetSubtype="0">
-                                  <p:stCondLst>
-                                    <p:cond delay="0"/>
-                                  </p:stCondLst>
-                                  <p:childTnLst>
-                                    <p:set>
-                                      <p:cBhvr>
-                                        <p:cTn dur="1" fill="hold">
-                                          <p:stCondLst>
-                                            <p:cond delay="0"/>
-                                          </p:stCondLst>
-                                        </p:cTn>
-                                        <p:tgtEl>
-                                          <p:spTgt spid="294">
-                                            <p:txEl>
-                                              <p:pRg end="11" st="11"/>
-                                            </p:txEl>
-                                          </p:spTgt>
-                                        </p:tgtEl>
-                                        <p:attrNameLst>
-                                          <p:attrName>style.visibility</p:attrName>
-                                        </p:attrNameLst>
-                                      </p:cBhvr>
-                                      <p:to>
-                                        <p:strVal val="visible"/>
-                                      </p:to>
-                                    </p:set>
-                                  </p:childTnLst>
-                                </p:cTn>
-                              </p:par>
-                            </p:childTnLst>
-                          </p:cTn>
-                        </p:par>
-                      </p:childTnLst>
-                    </p:cTn>
-                  </p:par>
-                  <p:par>
-                    <p:cTn fill="hold">
-                      <p:stCondLst>
-                        <p:cond delay="indefinite"/>
-                      </p:stCondLst>
-                      <p:childTnLst>
-                        <p:par>
-                          <p:cTn fill="hold">
-                            <p:stCondLst>
-                              <p:cond delay="0"/>
-                            </p:stCondLst>
-                            <p:childTnLst>
-                              <p:par>
-                                <p:cTn fill="hold" nodeType="clickEffect" presetClass="entr" presetID="1" presetSubtype="0">
-                                  <p:stCondLst>
-                                    <p:cond delay="0"/>
-                                  </p:stCondLst>
-                                  <p:childTnLst>
-                                    <p:set>
-                                      <p:cBhvr>
-                                        <p:cTn dur="1" fill="hold">
-                                          <p:stCondLst>
-                                            <p:cond delay="0"/>
-                                          </p:stCondLst>
-                                        </p:cTn>
-                                        <p:tgtEl>
-                                          <p:spTgt spid="294">
-                                            <p:txEl>
-                                              <p:pRg end="12" st="12"/>
-                                            </p:txEl>
-                                          </p:spTgt>
-                                        </p:tgtEl>
-                                        <p:attrNameLst>
-                                          <p:attrName>style.visibility</p:attrName>
-                                        </p:attrNameLst>
-                                      </p:cBhvr>
-                                      <p:to>
-                                        <p:strVal val="visible"/>
-                                      </p:to>
-                                    </p:set>
-                                  </p:childTnLst>
-                                </p:cTn>
-                              </p:par>
-                            </p:childTnLst>
-                          </p:cTn>
-                        </p:par>
-                      </p:childTnLst>
-                    </p:cTn>
-                  </p:par>
-                </p:childTnLst>
-              </p:cTn>
-              <p:prevCondLst>
-                <p:cond evt="onPrev">
-                  <p:tgtEl>
-                    <p:sldTgt/>
-                  </p:tgtEl>
-                </p:cond>
-              </p:prevCondLst>
-              <p:nextCondLst>
-                <p:cond evt="onNext">
-                  <p:tgtEl>
-                    <p:sldTgt/>
-                  </p:tgtEl>
-                </p:cond>
-              </p:nextCondLst>
-            </p:seq>
-          </p:childTnLst>
-        </p:cTn>
-      </p:par>
-    </p:tnLst>
-  </p:timing>
 </p:sld>
 </file>
 
@@ -13297,7 +12902,7 @@
                   <a:schemeClr val="accent5"/>
                 </a:solidFill>
               </a:rPr>
-              <a:t>Exercises (Stretch)</a:t>
+              <a:t>Exercises</a:t>
             </a:r>
             <a:endParaRPr>
               <a:solidFill>
@@ -13342,7 +12947,7 @@
             </a:pPr>
             <a:r>
               <a:rPr lang="en"/>
-              <a:t>Unit test Units: to metres and back, and y flips</a:t>
+              <a:t>Start from Birds4, the finished game</a:t>
             </a:r>
             <a:endParaRPr/>
           </a:p>
@@ -13359,7 +12964,24 @@
             </a:pPr>
             <a:r>
               <a:rPr lang="en"/>
-              <a:t>Swap the library: which files would change?</a:t>
+              <a:t>A new level, and a new prefab: how much code changed?</a:t>
+            </a:r>
+            <a:endParaRPr/>
+          </a:p>
+          <a:p>
+            <a:pPr indent="-330200" lvl="0" marL="457200" rtl="0" algn="l">
+              <a:spcBef>
+                <a:spcPts val="0"/>
+              </a:spcBef>
+              <a:spcAft>
+                <a:spcPts val="0"/>
+              </a:spcAft>
+              <a:buSzPts val="1600"/>
+              <a:buChar char="●"/>
+            </a:pPr>
+            <a:r>
+              <a:rPr lang="en"/>
+              <a:t>A heavy bird, twice the size, as a prefab</a:t>
             </a:r>
             <a:endParaRPr/>
           </a:p>
@@ -13376,7 +12998,41 @@
             </a:pPr>
             <a:r>
               <a:rPr lang="en"/>
-              <a:t>Try it with Aether.Physics2D</a:t>
+              <a:t>A list of birds per level: birds red red heavy</a:t>
+            </a:r>
+            <a:endParaRPr/>
+          </a:p>
+          <a:p>
+            <a:pPr indent="-330200" lvl="0" marL="457200" rtl="0" algn="l">
+              <a:spcBef>
+                <a:spcPts val="0"/>
+              </a:spcBef>
+              <a:spcAft>
+                <a:spcPts val="0"/>
+              </a:spcAft>
+              <a:buSzPts val="1600"/>
+              <a:buChar char="●"/>
+            </a:pPr>
+            <a:r>
+              <a:rPr lang="en"/>
+              <a:t>A TNT box that pushes everything nearby away</a:t>
+            </a:r>
+            <a:endParaRPr/>
+          </a:p>
+          <a:p>
+            <a:pPr indent="-317500" lvl="1" marL="914400" rtl="0" algn="l">
+              <a:spcBef>
+                <a:spcPts val="0"/>
+              </a:spcBef>
+              <a:spcAft>
+                <a:spcPts val="0"/>
+              </a:spcAft>
+              <a:buSzPts val="1400"/>
+              <a:buChar char="○"/>
+            </a:pPr>
+            <a:r>
+              <a:rPr lang="en"/>
+              <a:t>What must the facade offer? Keep Box2D inside</a:t>
             </a:r>
             <a:endParaRPr/>
           </a:p>
@@ -14058,179 +13714,6 @@
 </file>
 
 <file path=ppt/slides/slide24.xml><?xml version="1.0" encoding="utf-8"?>
-<p:sld xmlns:a="http://schemas.openxmlformats.org/drawingml/2006/main" xmlns:p="http://schemas.openxmlformats.org/presentationml/2006/main" xmlns:r="http://schemas.openxmlformats.org/officeDocument/2006/relationships">
-  <p:cSld>
-    <p:spTree>
-      <p:nvGrpSpPr>
-        <p:cNvPr id="1" name=""/>
-        <p:cNvGrpSpPr/>
-        <p:nvPr/>
-      </p:nvGrpSpPr>
-      <p:grpSpPr/>
-      <p:sp>
-        <p:nvSpPr>
-          <p:cNvPr id="2" name="Title 1"/>
-          <p:cNvSpPr>
-            <a:spLocks noGrp="1"/>
-          </p:cNvSpPr>
-          <p:nvPr>
-            <p:ph type="title"/>
-          </p:nvPr>
-        </p:nvSpPr>
-        <p:spPr/>
-        <p:txBody>
-          <a:bodyPr/>
-          <a:lstStyle/>
-          <a:p>
-            <a:pPr indent="0" lvl="0" marL="0" rtl="0" algn="l">
-              <a:spcBef>
-                <a:spcPts val="0"/>
-              </a:spcBef>
-              <a:spcAft>
-                <a:spcPts val="0"/>
-              </a:spcAft>
-              <a:buNone/>
-            </a:pPr>
-            <a:r>
-              <a:rPr lang="en"/>
-              <a:t>Check Yourself</a:t>
-            </a:r>
-            <a:endParaRPr/>
-          </a:p>
-        </p:txBody>
-      </p:sp>
-      <p:sp>
-        <p:nvSpPr>
-          <p:cNvPr id="3" name="Text Placeholder 2"/>
-          <p:cNvSpPr>
-            <a:spLocks noGrp="1"/>
-          </p:cNvSpPr>
-          <p:nvPr>
-            <p:ph type="body" idx="1"/>
-          </p:nvPr>
-        </p:nvSpPr>
-        <p:spPr>
-          <a:xfrm>
-            <a:off x="311700" y="885950"/>
-            <a:ext cx="8520600" cy="1719072"/>
-          </a:xfrm>
-        </p:spPr>
-        <p:txBody>
-          <a:bodyPr/>
-          <a:lstStyle/>
-          <a:p>
-            <a:pPr indent="-330200" lvl="0" marL="457200" rtl="0" algn="l">
-              <a:spcBef>
-                <a:spcPts val="0"/>
-              </a:spcBef>
-              <a:spcAft>
-                <a:spcPts val="0"/>
-              </a:spcAft>
-              <a:buSzPts val="1600"/>
-              <a:buChar char="●"/>
-            </a:pPr>
-            <a:r>
-              <a:rPr lang="en"/>
-              <a:t>What is the difference between an Adapter and a Facade?</a:t>
-            </a:r>
-            <a:endParaRPr/>
-          </a:p>
-          <a:p>
-            <a:pPr indent="-330200" lvl="0" marL="457200" rtl="0" algn="l">
-              <a:spcBef>
-                <a:spcPts val="0"/>
-              </a:spcBef>
-              <a:spcAft>
-                <a:spcPts val="0"/>
-              </a:spcAft>
-              <a:buSzPts val="1600"/>
-              <a:buChar char="●"/>
-            </a:pPr>
-            <a:r>
-              <a:rPr lang="en"/>
-              <a:t>Why convert between metres and pixels at all?</a:t>
-            </a:r>
-            <a:endParaRPr/>
-          </a:p>
-          <a:p>
-            <a:pPr indent="-330200" lvl="0" marL="457200" rtl="0" algn="l">
-              <a:spcBef>
-                <a:spcPts val="0"/>
-              </a:spcBef>
-              <a:spcAft>
-                <a:spcPts val="0"/>
-              </a:spcAft>
-              <a:buSzPts val="1600"/>
-              <a:buChar char="●"/>
-            </a:pPr>
-            <a:r>
-              <a:rPr lang="en"/>
-              <a:t>Why not destroy a body inside the hit handler?</a:t>
-            </a:r>
-            <a:endParaRPr/>
-          </a:p>
-          <a:p>
-            <a:pPr indent="-330200" lvl="0" marL="457200" rtl="0" algn="l">
-              <a:spcBef>
-                <a:spcPts val="0"/>
-              </a:spcBef>
-              <a:spcAft>
-                <a:spcPts val="0"/>
-              </a:spcAft>
-              <a:buSzPts val="1600"/>
-              <a:buChar char="●"/>
-            </a:pPr>
-            <a:r>
-              <a:rPr lang="en"/>
-              <a:t>What does a shallow copy share with the original, and why does it matter?</a:t>
-            </a:r>
-            <a:endParaRPr/>
-          </a:p>
-        </p:txBody>
-      </p:sp>
-      <p:sp>
-        <p:nvSpPr>
-          <p:cNvPr id="4" name="TextBox 3"/>
-          <p:cNvSpPr txBox="1"/>
-          <p:nvPr/>
-        </p:nvSpPr>
-        <p:spPr>
-          <a:xfrm>
-            <a:off x="457200" y="3182112"/>
-            <a:ext cx="8229600" cy="457200"/>
-          </a:xfrm>
-          <a:prstGeom prst="rect">
-            <a:avLst/>
-          </a:prstGeom>
-          <a:noFill/>
-        </p:spPr>
-        <p:txBody>
-          <a:bodyPr wrap="square">
-            <a:spAutoFit/>
-          </a:bodyPr>
-          <a:lstStyle/>
-          <a:p>
-            <a:pPr algn="ctr"/>
-            <a:r>
-              <a:rPr sz="1400" b="0" i="0">
-                <a:solidFill>
-                  <a:srgbClr val="9AA3AB"/>
-                </a:solidFill>
-              </a:rPr>
-              <a:t>The answers, and more questions, are on the course site.</a:t>
-            </a:r>
-          </a:p>
-        </p:txBody>
-      </p:sp>
-    </p:spTree>
-  </p:cSld>
-  <p:clrMapOvr>
-    <a:masterClrMapping/>
-  </p:clrMapOvr>
-</p:sld>
-</file>
-
-<file path=ppt/slides/slide25.xml><?xml version="1.0" encoding="utf-8"?>
 <p:sld xmlns:a="http://schemas.openxmlformats.org/drawingml/2006/main" xmlns:r="http://schemas.openxmlformats.org/officeDocument/2006/relationships" xmlns:mc="http://schemas.openxmlformats.org/markup-compatibility/2006" xmlns:mv="urn:schemas-microsoft-com:mac:vml" xmlns:p="http://schemas.openxmlformats.org/presentationml/2006/main" xmlns:c="http://schemas.openxmlformats.org/drawingml/2006/chart" xmlns:dgm="http://schemas.openxmlformats.org/drawingml/2006/diagram" xmlns:o="urn:schemas-microsoft-com:office:office" xmlns:v="urn:schemas-microsoft-com:vml" xmlns:pvml="urn:schemas-microsoft-com:office:powerpoint" xmlns:com="http://schemas.openxmlformats.org/drawingml/2006/compatibility" xmlns:p14="http://schemas.microsoft.com/office/powerpoint/2010/main" xmlns:p15="http://schemas.microsoft.com/office/powerpoint/2012/main" xmlns:ahyp="http://schemas.microsoft.com/office/drawing/2018/hyperlinkcolor">
   <p:cSld>
     <p:spTree>
@@ -14285,7 +13768,7 @@
                   <a:schemeClr val="accent5"/>
                 </a:solidFill>
               </a:rPr>
-              <a:t>Apply It to Your Project</a:t>
+              <a:t>Exercises (Stretch)</a:t>
             </a:r>
             <a:endParaRPr>
               <a:solidFill>
@@ -14330,7 +13813,7 @@
             </a:pPr>
             <a:r>
               <a:rPr lang="en"/>
-              <a:t>Which libraries does your game use? Would your code notice a swap?</a:t>
+              <a:t>Unit test Units: to metres and back, and y flips</a:t>
             </a:r>
             <a:endParaRPr/>
           </a:p>
@@ -14347,41 +13830,24 @@
             </a:pPr>
             <a:r>
               <a:rPr lang="en"/>
-              <a:t>Does anything exist twice? Which copy owns it?</a:t>
+              <a:t>Swap the library: which files would change?</a:t>
             </a:r>
             <a:endParaRPr/>
           </a:p>
           <a:p>
-            <a:pPr indent="-330200" lvl="0" marL="457200" rtl="0" algn="l">
-              <a:spcBef>
-                <a:spcPts val="0"/>
-              </a:spcBef>
-              <a:spcAft>
-                <a:spcPts val="0"/>
-              </a:spcAft>
-              <a:buSzPts val="1600"/>
-              <a:buChar char="●"/>
+            <a:pPr indent="-317500" lvl="1" marL="914400" rtl="0" algn="l">
+              <a:spcBef>
+                <a:spcPts val="0"/>
+              </a:spcBef>
+              <a:spcAft>
+                <a:spcPts val="0"/>
+              </a:spcAft>
+              <a:buSzPts val="1400"/>
+              <a:buChar char="○"/>
             </a:pPr>
             <a:r>
               <a:rPr lang="en"/>
-              <a:t>Do you remove objects while looping over them?</a:t>
-            </a:r>
-            <a:endParaRPr/>
-          </a:p>
-          <a:p>
-            <a:pPr indent="-330200" lvl="0" marL="457200" rtl="0" algn="l">
-              <a:spcBef>
-                <a:spcPts val="0"/>
-              </a:spcBef>
-              <a:spcAft>
-                <a:spcPts val="0"/>
-              </a:spcAft>
-              <a:buSzPts val="1600"/>
-              <a:buChar char="●"/>
-            </a:pPr>
-            <a:r>
-              <a:rPr lang="en"/>
-              <a:t>Which kinds of things could be prototypes, or data?</a:t>
+              <a:t>Try it with Aether.Physics2D</a:t>
             </a:r>
             <a:endParaRPr/>
           </a:p>
@@ -15062,7 +14528,1012 @@
 </p:sld>
 </file>
 
+<file path=ppt/slides/slide25.xml><?xml version="1.0" encoding="utf-8"?>
+<p:sld xmlns:a="http://schemas.openxmlformats.org/drawingml/2006/main" xmlns:p="http://schemas.openxmlformats.org/presentationml/2006/main" xmlns:r="http://schemas.openxmlformats.org/officeDocument/2006/relationships">
+  <p:cSld>
+    <p:spTree>
+      <p:nvGrpSpPr>
+        <p:cNvPr id="1" name=""/>
+        <p:cNvGrpSpPr/>
+        <p:nvPr/>
+      </p:nvGrpSpPr>
+      <p:grpSpPr/>
+      <p:sp>
+        <p:nvSpPr>
+          <p:cNvPr id="2" name="Title 1"/>
+          <p:cNvSpPr>
+            <a:spLocks noGrp="1"/>
+          </p:cNvSpPr>
+          <p:nvPr>
+            <p:ph type="title"/>
+          </p:nvPr>
+        </p:nvSpPr>
+        <p:spPr/>
+        <p:txBody>
+          <a:bodyPr/>
+          <a:lstStyle/>
+          <a:p>
+            <a:pPr indent="0" lvl="0" marL="0" rtl="0" algn="l">
+              <a:spcBef>
+                <a:spcPts val="0"/>
+              </a:spcBef>
+              <a:spcAft>
+                <a:spcPts val="0"/>
+              </a:spcAft>
+              <a:buNone/>
+            </a:pPr>
+            <a:r>
+              <a:rPr lang="en"/>
+              <a:t>Check Yourself</a:t>
+            </a:r>
+            <a:endParaRPr/>
+          </a:p>
+        </p:txBody>
+      </p:sp>
+      <p:sp>
+        <p:nvSpPr>
+          <p:cNvPr id="3" name="Text Placeholder 2"/>
+          <p:cNvSpPr>
+            <a:spLocks noGrp="1"/>
+          </p:cNvSpPr>
+          <p:nvPr>
+            <p:ph type="body" idx="1"/>
+          </p:nvPr>
+        </p:nvSpPr>
+        <p:spPr>
+          <a:xfrm>
+            <a:off x="311700" y="885950"/>
+            <a:ext cx="8520600" cy="1719072"/>
+          </a:xfrm>
+        </p:spPr>
+        <p:txBody>
+          <a:bodyPr/>
+          <a:lstStyle/>
+          <a:p>
+            <a:pPr indent="-330200" lvl="0" marL="457200" rtl="0" algn="l">
+              <a:spcBef>
+                <a:spcPts val="0"/>
+              </a:spcBef>
+              <a:spcAft>
+                <a:spcPts val="0"/>
+              </a:spcAft>
+              <a:buSzPts val="1600"/>
+              <a:buChar char="●"/>
+            </a:pPr>
+            <a:r>
+              <a:rPr lang="en"/>
+              <a:t>What is the difference between an Adapter and a Facade?</a:t>
+            </a:r>
+            <a:endParaRPr/>
+          </a:p>
+          <a:p>
+            <a:pPr indent="-330200" lvl="0" marL="457200" rtl="0" algn="l">
+              <a:spcBef>
+                <a:spcPts val="0"/>
+              </a:spcBef>
+              <a:spcAft>
+                <a:spcPts val="0"/>
+              </a:spcAft>
+              <a:buSzPts val="1600"/>
+              <a:buChar char="●"/>
+            </a:pPr>
+            <a:r>
+              <a:rPr lang="en"/>
+              <a:t>Why convert between metres and pixels at all?</a:t>
+            </a:r>
+            <a:endParaRPr/>
+          </a:p>
+          <a:p>
+            <a:pPr indent="-330200" lvl="0" marL="457200" rtl="0" algn="l">
+              <a:spcBef>
+                <a:spcPts val="0"/>
+              </a:spcBef>
+              <a:spcAft>
+                <a:spcPts val="0"/>
+              </a:spcAft>
+              <a:buSzPts val="1600"/>
+              <a:buChar char="●"/>
+            </a:pPr>
+            <a:r>
+              <a:rPr lang="en"/>
+              <a:t>Why not destroy a body inside the hit handler?</a:t>
+            </a:r>
+            <a:endParaRPr/>
+          </a:p>
+          <a:p>
+            <a:pPr indent="-330200" lvl="0" marL="457200" rtl="0" algn="l">
+              <a:spcBef>
+                <a:spcPts val="0"/>
+              </a:spcBef>
+              <a:spcAft>
+                <a:spcPts val="0"/>
+              </a:spcAft>
+              <a:buSzPts val="1600"/>
+              <a:buChar char="●"/>
+            </a:pPr>
+            <a:r>
+              <a:rPr lang="en"/>
+              <a:t>What does a shallow copy share with the original, and why does it matter?</a:t>
+            </a:r>
+            <a:endParaRPr/>
+          </a:p>
+        </p:txBody>
+      </p:sp>
+      <p:sp>
+        <p:nvSpPr>
+          <p:cNvPr id="4" name="TextBox 3"/>
+          <p:cNvSpPr txBox="1"/>
+          <p:nvPr/>
+        </p:nvSpPr>
+        <p:spPr>
+          <a:xfrm>
+            <a:off x="457200" y="3182112"/>
+            <a:ext cx="8229600" cy="457200"/>
+          </a:xfrm>
+          <a:prstGeom prst="rect">
+            <a:avLst/>
+          </a:prstGeom>
+          <a:noFill/>
+        </p:spPr>
+        <p:txBody>
+          <a:bodyPr wrap="square">
+            <a:spAutoFit/>
+          </a:bodyPr>
+          <a:lstStyle/>
+          <a:p>
+            <a:pPr algn="ctr"/>
+            <a:r>
+              <a:rPr sz="1400" b="0" i="0">
+                <a:solidFill>
+                  <a:srgbClr val="9AA3AB"/>
+                </a:solidFill>
+              </a:rPr>
+              <a:t>The answers, and more questions, are on the course site.</a:t>
+            </a:r>
+          </a:p>
+        </p:txBody>
+      </p:sp>
+    </p:spTree>
+  </p:cSld>
+  <p:clrMapOvr>
+    <a:masterClrMapping/>
+  </p:clrMapOvr>
+</p:sld>
+</file>
+
 <file path=ppt/slides/slide26.xml><?xml version="1.0" encoding="utf-8"?>
+<p:sld xmlns:a="http://schemas.openxmlformats.org/drawingml/2006/main" xmlns:r="http://schemas.openxmlformats.org/officeDocument/2006/relationships" xmlns:mc="http://schemas.openxmlformats.org/markup-compatibility/2006" xmlns:mv="urn:schemas-microsoft-com:mac:vml" xmlns:p="http://schemas.openxmlformats.org/presentationml/2006/main" xmlns:c="http://schemas.openxmlformats.org/drawingml/2006/chart" xmlns:dgm="http://schemas.openxmlformats.org/drawingml/2006/diagram" xmlns:o="urn:schemas-microsoft-com:office:office" xmlns:v="urn:schemas-microsoft-com:vml" xmlns:pvml="urn:schemas-microsoft-com:office:powerpoint" xmlns:com="http://schemas.openxmlformats.org/drawingml/2006/compatibility" xmlns:p14="http://schemas.microsoft.com/office/powerpoint/2010/main" xmlns:p15="http://schemas.microsoft.com/office/powerpoint/2012/main" xmlns:ahyp="http://schemas.microsoft.com/office/drawing/2018/hyperlinkcolor">
+  <p:cSld>
+    <p:spTree>
+      <p:nvGrpSpPr>
+        <p:cNvPr id="292" name="Shape 292"/>
+        <p:cNvGrpSpPr/>
+        <p:nvPr/>
+      </p:nvGrpSpPr>
+      <p:grpSpPr>
+        <a:xfrm>
+          <a:off x="0" y="0"/>
+          <a:ext cx="0" cy="0"/>
+          <a:chOff x="0" y="0"/>
+          <a:chExt cx="0" cy="0"/>
+        </a:xfrm>
+      </p:grpSpPr>
+      <p:sp>
+        <p:nvSpPr>
+          <p:cNvPr id="293" name="Google Shape;293;p45"/>
+          <p:cNvSpPr txBox="1"/>
+          <p:nvPr>
+            <p:ph type="title"/>
+          </p:nvPr>
+        </p:nvSpPr>
+        <p:spPr>
+          <a:xfrm>
+            <a:off x="311700" y="195615"/>
+            <a:ext cx="8520600" cy="572700"/>
+          </a:xfrm>
+          <a:prstGeom prst="rect">
+            <a:avLst/>
+          </a:prstGeom>
+        </p:spPr>
+        <p:txBody>
+          <a:bodyPr anchorCtr="0" anchor="t" bIns="91425" lIns="91425" spcFirstLastPara="1" rIns="91425" wrap="square" tIns="91425">
+            <a:normAutofit fontScale="90000"/>
+          </a:bodyPr>
+          <a:lstStyle/>
+          <a:p>
+            <a:pPr indent="0" lvl="0" marL="0" rtl="0" algn="l">
+              <a:spcBef>
+                <a:spcPts val="0"/>
+              </a:spcBef>
+              <a:spcAft>
+                <a:spcPts val="0"/>
+              </a:spcAft>
+              <a:buNone/>
+            </a:pPr>
+            <a:r>
+              <a:rPr lang="en">
+                <a:solidFill>
+                  <a:schemeClr val="accent5"/>
+                </a:solidFill>
+              </a:rPr>
+              <a:t>Apply It to Your Project</a:t>
+            </a:r>
+            <a:endParaRPr>
+              <a:solidFill>
+                <a:schemeClr val="accent5"/>
+              </a:solidFill>
+            </a:endParaRPr>
+          </a:p>
+        </p:txBody>
+      </p:sp>
+      <p:sp>
+        <p:nvSpPr>
+          <p:cNvPr id="294" name="Google Shape;294;p45"/>
+          <p:cNvSpPr txBox="1"/>
+          <p:nvPr>
+            <p:ph idx="1" type="body"/>
+          </p:nvPr>
+        </p:nvSpPr>
+        <p:spPr>
+          <a:xfrm>
+            <a:off x="311700" y="885950"/>
+            <a:ext cx="8520600" cy="4023300"/>
+          </a:xfrm>
+          <a:prstGeom prst="rect">
+            <a:avLst/>
+          </a:prstGeom>
+        </p:spPr>
+        <p:txBody>
+          <a:bodyPr anchorCtr="0" anchor="t" bIns="91425" lIns="91425" spcFirstLastPara="1" rIns="91425" wrap="square" tIns="91425">
+            <a:normAutofit/>
+          </a:bodyPr>
+          <a:lstStyle/>
+          <a:p>
+            <a:pPr indent="-330200" lvl="0" marL="457200" rtl="0" algn="l">
+              <a:spcBef>
+                <a:spcPts val="0"/>
+              </a:spcBef>
+              <a:spcAft>
+                <a:spcPts val="0"/>
+              </a:spcAft>
+              <a:buSzPts val="1600"/>
+              <a:buChar char="●"/>
+            </a:pPr>
+            <a:r>
+              <a:rPr lang="en"/>
+              <a:t>Which libraries does your game use? Would your code notice a swap?</a:t>
+            </a:r>
+            <a:endParaRPr/>
+          </a:p>
+          <a:p>
+            <a:pPr indent="-330200" lvl="0" marL="457200" rtl="0" algn="l">
+              <a:spcBef>
+                <a:spcPts val="0"/>
+              </a:spcBef>
+              <a:spcAft>
+                <a:spcPts val="0"/>
+              </a:spcAft>
+              <a:buSzPts val="1600"/>
+              <a:buChar char="●"/>
+            </a:pPr>
+            <a:r>
+              <a:rPr lang="en"/>
+              <a:t>Does anything exist twice? Which copy owns it?</a:t>
+            </a:r>
+            <a:endParaRPr/>
+          </a:p>
+          <a:p>
+            <a:pPr indent="-330200" lvl="0" marL="457200" rtl="0" algn="l">
+              <a:spcBef>
+                <a:spcPts val="0"/>
+              </a:spcBef>
+              <a:spcAft>
+                <a:spcPts val="0"/>
+              </a:spcAft>
+              <a:buSzPts val="1600"/>
+              <a:buChar char="●"/>
+            </a:pPr>
+            <a:r>
+              <a:rPr lang="en"/>
+              <a:t>Do you remove objects while looping over them?</a:t>
+            </a:r>
+            <a:endParaRPr/>
+          </a:p>
+          <a:p>
+            <a:pPr indent="-330200" lvl="0" marL="457200" rtl="0" algn="l">
+              <a:spcBef>
+                <a:spcPts val="0"/>
+              </a:spcBef>
+              <a:spcAft>
+                <a:spcPts val="0"/>
+              </a:spcAft>
+              <a:buSzPts val="1600"/>
+              <a:buChar char="●"/>
+            </a:pPr>
+            <a:r>
+              <a:rPr lang="en"/>
+              <a:t>Which kinds of things could be prototypes, or data?</a:t>
+            </a:r>
+            <a:endParaRPr/>
+          </a:p>
+        </p:txBody>
+      </p:sp>
+    </p:spTree>
+  </p:cSld>
+  <p:clrMapOvr>
+    <a:masterClrMapping/>
+  </p:clrMapOvr>
+  <p:timing>
+    <p:tnLst>
+      <p:par>
+        <p:cTn dur="indefinite" nodeType="tmRoot" restart="never">
+          <p:childTnLst>
+            <p:seq concurrent="1" nextAc="seek">
+              <p:cTn dur="indefinite" id="2" nodeType="mainSeq">
+                <p:childTnLst>
+                  <p:par>
+                    <p:cTn fill="hold">
+                      <p:stCondLst>
+                        <p:cond delay="indefinite"/>
+                      </p:stCondLst>
+                      <p:childTnLst>
+                        <p:par>
+                          <p:cTn fill="hold">
+                            <p:stCondLst>
+                              <p:cond delay="0"/>
+                            </p:stCondLst>
+                            <p:childTnLst>
+                              <p:par>
+                                <p:cTn fill="hold" nodeType="clickEffect" presetClass="entr" presetID="1" presetSubtype="0">
+                                  <p:stCondLst>
+                                    <p:cond delay="0"/>
+                                  </p:stCondLst>
+                                  <p:childTnLst>
+                                    <p:set>
+                                      <p:cBhvr>
+                                        <p:cTn dur="1" fill="hold">
+                                          <p:stCondLst>
+                                            <p:cond delay="0"/>
+                                          </p:stCondLst>
+                                        </p:cTn>
+                                        <p:tgtEl>
+                                          <p:spTgt spid="294">
+                                            <p:txEl>
+                                              <p:pRg end="0" st="0"/>
+                                            </p:txEl>
+                                          </p:spTgt>
+                                        </p:tgtEl>
+                                        <p:attrNameLst>
+                                          <p:attrName>style.visibility</p:attrName>
+                                        </p:attrNameLst>
+                                      </p:cBhvr>
+                                      <p:to>
+                                        <p:strVal val="visible"/>
+                                      </p:to>
+                                    </p:set>
+                                  </p:childTnLst>
+                                </p:cTn>
+                              </p:par>
+                            </p:childTnLst>
+                          </p:cTn>
+                        </p:par>
+                      </p:childTnLst>
+                    </p:cTn>
+                  </p:par>
+                  <p:par>
+                    <p:cTn fill="hold">
+                      <p:stCondLst>
+                        <p:cond delay="indefinite"/>
+                      </p:stCondLst>
+                      <p:childTnLst>
+                        <p:par>
+                          <p:cTn fill="hold">
+                            <p:stCondLst>
+                              <p:cond delay="0"/>
+                            </p:stCondLst>
+                            <p:childTnLst>
+                              <p:par>
+                                <p:cTn fill="hold" nodeType="clickEffect" presetClass="entr" presetID="1" presetSubtype="0">
+                                  <p:stCondLst>
+                                    <p:cond delay="0"/>
+                                  </p:stCondLst>
+                                  <p:childTnLst>
+                                    <p:set>
+                                      <p:cBhvr>
+                                        <p:cTn dur="1" fill="hold">
+                                          <p:stCondLst>
+                                            <p:cond delay="0"/>
+                                          </p:stCondLst>
+                                        </p:cTn>
+                                        <p:tgtEl>
+                                          <p:spTgt spid="294">
+                                            <p:txEl>
+                                              <p:pRg end="1" st="1"/>
+                                            </p:txEl>
+                                          </p:spTgt>
+                                        </p:tgtEl>
+                                        <p:attrNameLst>
+                                          <p:attrName>style.visibility</p:attrName>
+                                        </p:attrNameLst>
+                                      </p:cBhvr>
+                                      <p:to>
+                                        <p:strVal val="visible"/>
+                                      </p:to>
+                                    </p:set>
+                                  </p:childTnLst>
+                                </p:cTn>
+                              </p:par>
+                            </p:childTnLst>
+                          </p:cTn>
+                        </p:par>
+                      </p:childTnLst>
+                    </p:cTn>
+                  </p:par>
+                  <p:par>
+                    <p:cTn fill="hold">
+                      <p:stCondLst>
+                        <p:cond delay="indefinite"/>
+                      </p:stCondLst>
+                      <p:childTnLst>
+                        <p:par>
+                          <p:cTn fill="hold">
+                            <p:stCondLst>
+                              <p:cond delay="0"/>
+                            </p:stCondLst>
+                            <p:childTnLst>
+                              <p:par>
+                                <p:cTn fill="hold" nodeType="clickEffect" presetClass="entr" presetID="1" presetSubtype="0">
+                                  <p:stCondLst>
+                                    <p:cond delay="0"/>
+                                  </p:stCondLst>
+                                  <p:childTnLst>
+                                    <p:set>
+                                      <p:cBhvr>
+                                        <p:cTn dur="1" fill="hold">
+                                          <p:stCondLst>
+                                            <p:cond delay="0"/>
+                                          </p:stCondLst>
+                                        </p:cTn>
+                                        <p:tgtEl>
+                                          <p:spTgt spid="294">
+                                            <p:txEl>
+                                              <p:pRg end="2" st="2"/>
+                                            </p:txEl>
+                                          </p:spTgt>
+                                        </p:tgtEl>
+                                        <p:attrNameLst>
+                                          <p:attrName>style.visibility</p:attrName>
+                                        </p:attrNameLst>
+                                      </p:cBhvr>
+                                      <p:to>
+                                        <p:strVal val="visible"/>
+                                      </p:to>
+                                    </p:set>
+                                  </p:childTnLst>
+                                </p:cTn>
+                              </p:par>
+                            </p:childTnLst>
+                          </p:cTn>
+                        </p:par>
+                      </p:childTnLst>
+                    </p:cTn>
+                  </p:par>
+                  <p:par>
+                    <p:cTn fill="hold">
+                      <p:stCondLst>
+                        <p:cond delay="indefinite"/>
+                      </p:stCondLst>
+                      <p:childTnLst>
+                        <p:par>
+                          <p:cTn fill="hold">
+                            <p:stCondLst>
+                              <p:cond delay="0"/>
+                            </p:stCondLst>
+                            <p:childTnLst>
+                              <p:par>
+                                <p:cTn fill="hold" nodeType="clickEffect" presetClass="entr" presetID="1" presetSubtype="0">
+                                  <p:stCondLst>
+                                    <p:cond delay="0"/>
+                                  </p:stCondLst>
+                                  <p:childTnLst>
+                                    <p:set>
+                                      <p:cBhvr>
+                                        <p:cTn dur="1" fill="hold">
+                                          <p:stCondLst>
+                                            <p:cond delay="0"/>
+                                          </p:stCondLst>
+                                        </p:cTn>
+                                        <p:tgtEl>
+                                          <p:spTgt spid="294">
+                                            <p:txEl>
+                                              <p:pRg end="3" st="3"/>
+                                            </p:txEl>
+                                          </p:spTgt>
+                                        </p:tgtEl>
+                                        <p:attrNameLst>
+                                          <p:attrName>style.visibility</p:attrName>
+                                        </p:attrNameLst>
+                                      </p:cBhvr>
+                                      <p:to>
+                                        <p:strVal val="visible"/>
+                                      </p:to>
+                                    </p:set>
+                                  </p:childTnLst>
+                                </p:cTn>
+                              </p:par>
+                            </p:childTnLst>
+                          </p:cTn>
+                        </p:par>
+                      </p:childTnLst>
+                    </p:cTn>
+                  </p:par>
+                  <p:par>
+                    <p:cTn fill="hold">
+                      <p:stCondLst>
+                        <p:cond delay="indefinite"/>
+                      </p:stCondLst>
+                      <p:childTnLst>
+                        <p:par>
+                          <p:cTn fill="hold">
+                            <p:stCondLst>
+                              <p:cond delay="0"/>
+                            </p:stCondLst>
+                            <p:childTnLst>
+                              <p:par>
+                                <p:cTn fill="hold" nodeType="clickEffect" presetClass="entr" presetID="1" presetSubtype="0">
+                                  <p:stCondLst>
+                                    <p:cond delay="0"/>
+                                  </p:stCondLst>
+                                  <p:childTnLst>
+                                    <p:set>
+                                      <p:cBhvr>
+                                        <p:cTn dur="1" fill="hold">
+                                          <p:stCondLst>
+                                            <p:cond delay="0"/>
+                                          </p:stCondLst>
+                                        </p:cTn>
+                                        <p:tgtEl>
+                                          <p:spTgt spid="294">
+                                            <p:txEl>
+                                              <p:pRg end="4" st="4"/>
+                                            </p:txEl>
+                                          </p:spTgt>
+                                        </p:tgtEl>
+                                        <p:attrNameLst>
+                                          <p:attrName>style.visibility</p:attrName>
+                                        </p:attrNameLst>
+                                      </p:cBhvr>
+                                      <p:to>
+                                        <p:strVal val="visible"/>
+                                      </p:to>
+                                    </p:set>
+                                  </p:childTnLst>
+                                </p:cTn>
+                              </p:par>
+                            </p:childTnLst>
+                          </p:cTn>
+                        </p:par>
+                      </p:childTnLst>
+                    </p:cTn>
+                  </p:par>
+                  <p:par>
+                    <p:cTn fill="hold">
+                      <p:stCondLst>
+                        <p:cond delay="indefinite"/>
+                      </p:stCondLst>
+                      <p:childTnLst>
+                        <p:par>
+                          <p:cTn fill="hold">
+                            <p:stCondLst>
+                              <p:cond delay="0"/>
+                            </p:stCondLst>
+                            <p:childTnLst>
+                              <p:par>
+                                <p:cTn fill="hold" nodeType="clickEffect" presetClass="entr" presetID="1" presetSubtype="0">
+                                  <p:stCondLst>
+                                    <p:cond delay="0"/>
+                                  </p:stCondLst>
+                                  <p:childTnLst>
+                                    <p:set>
+                                      <p:cBhvr>
+                                        <p:cTn dur="1" fill="hold">
+                                          <p:stCondLst>
+                                            <p:cond delay="0"/>
+                                          </p:stCondLst>
+                                        </p:cTn>
+                                        <p:tgtEl>
+                                          <p:spTgt spid="294">
+                                            <p:txEl>
+                                              <p:pRg end="5" st="5"/>
+                                            </p:txEl>
+                                          </p:spTgt>
+                                        </p:tgtEl>
+                                        <p:attrNameLst>
+                                          <p:attrName>style.visibility</p:attrName>
+                                        </p:attrNameLst>
+                                      </p:cBhvr>
+                                      <p:to>
+                                        <p:strVal val="visible"/>
+                                      </p:to>
+                                    </p:set>
+                                  </p:childTnLst>
+                                </p:cTn>
+                              </p:par>
+                            </p:childTnLst>
+                          </p:cTn>
+                        </p:par>
+                      </p:childTnLst>
+                    </p:cTn>
+                  </p:par>
+                  <p:par>
+                    <p:cTn fill="hold">
+                      <p:stCondLst>
+                        <p:cond delay="indefinite"/>
+                      </p:stCondLst>
+                      <p:childTnLst>
+                        <p:par>
+                          <p:cTn fill="hold">
+                            <p:stCondLst>
+                              <p:cond delay="0"/>
+                            </p:stCondLst>
+                            <p:childTnLst>
+                              <p:par>
+                                <p:cTn fill="hold" nodeType="clickEffect" presetClass="entr" presetID="1" presetSubtype="0">
+                                  <p:stCondLst>
+                                    <p:cond delay="0"/>
+                                  </p:stCondLst>
+                                  <p:childTnLst>
+                                    <p:set>
+                                      <p:cBhvr>
+                                        <p:cTn dur="1" fill="hold">
+                                          <p:stCondLst>
+                                            <p:cond delay="0"/>
+                                          </p:stCondLst>
+                                        </p:cTn>
+                                        <p:tgtEl>
+                                          <p:spTgt spid="294">
+                                            <p:txEl>
+                                              <p:pRg end="6" st="6"/>
+                                            </p:txEl>
+                                          </p:spTgt>
+                                        </p:tgtEl>
+                                        <p:attrNameLst>
+                                          <p:attrName>style.visibility</p:attrName>
+                                        </p:attrNameLst>
+                                      </p:cBhvr>
+                                      <p:to>
+                                        <p:strVal val="visible"/>
+                                      </p:to>
+                                    </p:set>
+                                  </p:childTnLst>
+                                </p:cTn>
+                              </p:par>
+                            </p:childTnLst>
+                          </p:cTn>
+                        </p:par>
+                      </p:childTnLst>
+                    </p:cTn>
+                  </p:par>
+                  <p:par>
+                    <p:cTn fill="hold">
+                      <p:stCondLst>
+                        <p:cond delay="indefinite"/>
+                      </p:stCondLst>
+                      <p:childTnLst>
+                        <p:par>
+                          <p:cTn fill="hold">
+                            <p:stCondLst>
+                              <p:cond delay="0"/>
+                            </p:stCondLst>
+                            <p:childTnLst>
+                              <p:par>
+                                <p:cTn fill="hold" nodeType="clickEffect" presetClass="entr" presetID="1" presetSubtype="0">
+                                  <p:stCondLst>
+                                    <p:cond delay="0"/>
+                                  </p:stCondLst>
+                                  <p:childTnLst>
+                                    <p:set>
+                                      <p:cBhvr>
+                                        <p:cTn dur="1" fill="hold">
+                                          <p:stCondLst>
+                                            <p:cond delay="0"/>
+                                          </p:stCondLst>
+                                        </p:cTn>
+                                        <p:tgtEl>
+                                          <p:spTgt spid="294">
+                                            <p:txEl>
+                                              <p:pRg end="7" st="7"/>
+                                            </p:txEl>
+                                          </p:spTgt>
+                                        </p:tgtEl>
+                                        <p:attrNameLst>
+                                          <p:attrName>style.visibility</p:attrName>
+                                        </p:attrNameLst>
+                                      </p:cBhvr>
+                                      <p:to>
+                                        <p:strVal val="visible"/>
+                                      </p:to>
+                                    </p:set>
+                                  </p:childTnLst>
+                                </p:cTn>
+                              </p:par>
+                            </p:childTnLst>
+                          </p:cTn>
+                        </p:par>
+                      </p:childTnLst>
+                    </p:cTn>
+                  </p:par>
+                  <p:par>
+                    <p:cTn fill="hold">
+                      <p:stCondLst>
+                        <p:cond delay="indefinite"/>
+                      </p:stCondLst>
+                      <p:childTnLst>
+                        <p:par>
+                          <p:cTn fill="hold">
+                            <p:stCondLst>
+                              <p:cond delay="0"/>
+                            </p:stCondLst>
+                            <p:childTnLst>
+                              <p:par>
+                                <p:cTn fill="hold" nodeType="clickEffect" presetClass="entr" presetID="1" presetSubtype="0">
+                                  <p:stCondLst>
+                                    <p:cond delay="0"/>
+                                  </p:stCondLst>
+                                  <p:childTnLst>
+                                    <p:set>
+                                      <p:cBhvr>
+                                        <p:cTn dur="1" fill="hold">
+                                          <p:stCondLst>
+                                            <p:cond delay="0"/>
+                                          </p:stCondLst>
+                                        </p:cTn>
+                                        <p:tgtEl>
+                                          <p:spTgt spid="294">
+                                            <p:txEl>
+                                              <p:pRg end="8" st="8"/>
+                                            </p:txEl>
+                                          </p:spTgt>
+                                        </p:tgtEl>
+                                        <p:attrNameLst>
+                                          <p:attrName>style.visibility</p:attrName>
+                                        </p:attrNameLst>
+                                      </p:cBhvr>
+                                      <p:to>
+                                        <p:strVal val="visible"/>
+                                      </p:to>
+                                    </p:set>
+                                  </p:childTnLst>
+                                </p:cTn>
+                              </p:par>
+                            </p:childTnLst>
+                          </p:cTn>
+                        </p:par>
+                      </p:childTnLst>
+                    </p:cTn>
+                  </p:par>
+                  <p:par>
+                    <p:cTn fill="hold">
+                      <p:stCondLst>
+                        <p:cond delay="indefinite"/>
+                      </p:stCondLst>
+                      <p:childTnLst>
+                        <p:par>
+                          <p:cTn fill="hold">
+                            <p:stCondLst>
+                              <p:cond delay="0"/>
+                            </p:stCondLst>
+                            <p:childTnLst>
+                              <p:par>
+                                <p:cTn fill="hold" nodeType="clickEffect" presetClass="entr" presetID="1" presetSubtype="0">
+                                  <p:stCondLst>
+                                    <p:cond delay="0"/>
+                                  </p:stCondLst>
+                                  <p:childTnLst>
+                                    <p:set>
+                                      <p:cBhvr>
+                                        <p:cTn dur="1" fill="hold">
+                                          <p:stCondLst>
+                                            <p:cond delay="0"/>
+                                          </p:stCondLst>
+                                        </p:cTn>
+                                        <p:tgtEl>
+                                          <p:spTgt spid="294">
+                                            <p:txEl>
+                                              <p:pRg end="9" st="9"/>
+                                            </p:txEl>
+                                          </p:spTgt>
+                                        </p:tgtEl>
+                                        <p:attrNameLst>
+                                          <p:attrName>style.visibility</p:attrName>
+                                        </p:attrNameLst>
+                                      </p:cBhvr>
+                                      <p:to>
+                                        <p:strVal val="visible"/>
+                                      </p:to>
+                                    </p:set>
+                                  </p:childTnLst>
+                                </p:cTn>
+                              </p:par>
+                            </p:childTnLst>
+                          </p:cTn>
+                        </p:par>
+                      </p:childTnLst>
+                    </p:cTn>
+                  </p:par>
+                  <p:par>
+                    <p:cTn fill="hold">
+                      <p:stCondLst>
+                        <p:cond delay="indefinite"/>
+                      </p:stCondLst>
+                      <p:childTnLst>
+                        <p:par>
+                          <p:cTn fill="hold">
+                            <p:stCondLst>
+                              <p:cond delay="0"/>
+                            </p:stCondLst>
+                            <p:childTnLst>
+                              <p:par>
+                                <p:cTn fill="hold" nodeType="clickEffect" presetClass="entr" presetID="1" presetSubtype="0">
+                                  <p:stCondLst>
+                                    <p:cond delay="0"/>
+                                  </p:stCondLst>
+                                  <p:childTnLst>
+                                    <p:set>
+                                      <p:cBhvr>
+                                        <p:cTn dur="1" fill="hold">
+                                          <p:stCondLst>
+                                            <p:cond delay="0"/>
+                                          </p:stCondLst>
+                                        </p:cTn>
+                                        <p:tgtEl>
+                                          <p:spTgt spid="294">
+                                            <p:txEl>
+                                              <p:pRg end="10" st="10"/>
+                                            </p:txEl>
+                                          </p:spTgt>
+                                        </p:tgtEl>
+                                        <p:attrNameLst>
+                                          <p:attrName>style.visibility</p:attrName>
+                                        </p:attrNameLst>
+                                      </p:cBhvr>
+                                      <p:to>
+                                        <p:strVal val="visible"/>
+                                      </p:to>
+                                    </p:set>
+                                  </p:childTnLst>
+                                </p:cTn>
+                              </p:par>
+                            </p:childTnLst>
+                          </p:cTn>
+                        </p:par>
+                      </p:childTnLst>
+                    </p:cTn>
+                  </p:par>
+                  <p:par>
+                    <p:cTn fill="hold">
+                      <p:stCondLst>
+                        <p:cond delay="indefinite"/>
+                      </p:stCondLst>
+                      <p:childTnLst>
+                        <p:par>
+                          <p:cTn fill="hold">
+                            <p:stCondLst>
+                              <p:cond delay="0"/>
+                            </p:stCondLst>
+                            <p:childTnLst>
+                              <p:par>
+                                <p:cTn fill="hold" nodeType="clickEffect" presetClass="entr" presetID="1" presetSubtype="0">
+                                  <p:stCondLst>
+                                    <p:cond delay="0"/>
+                                  </p:stCondLst>
+                                  <p:childTnLst>
+                                    <p:set>
+                                      <p:cBhvr>
+                                        <p:cTn dur="1" fill="hold">
+                                          <p:stCondLst>
+                                            <p:cond delay="0"/>
+                                          </p:stCondLst>
+                                        </p:cTn>
+                                        <p:tgtEl>
+                                          <p:spTgt spid="294">
+                                            <p:txEl>
+                                              <p:pRg end="11" st="11"/>
+                                            </p:txEl>
+                                          </p:spTgt>
+                                        </p:tgtEl>
+                                        <p:attrNameLst>
+                                          <p:attrName>style.visibility</p:attrName>
+                                        </p:attrNameLst>
+                                      </p:cBhvr>
+                                      <p:to>
+                                        <p:strVal val="visible"/>
+                                      </p:to>
+                                    </p:set>
+                                  </p:childTnLst>
+                                </p:cTn>
+                              </p:par>
+                            </p:childTnLst>
+                          </p:cTn>
+                        </p:par>
+                      </p:childTnLst>
+                    </p:cTn>
+                  </p:par>
+                  <p:par>
+                    <p:cTn fill="hold">
+                      <p:stCondLst>
+                        <p:cond delay="indefinite"/>
+                      </p:stCondLst>
+                      <p:childTnLst>
+                        <p:par>
+                          <p:cTn fill="hold">
+                            <p:stCondLst>
+                              <p:cond delay="0"/>
+                            </p:stCondLst>
+                            <p:childTnLst>
+                              <p:par>
+                                <p:cTn fill="hold" nodeType="clickEffect" presetClass="entr" presetID="1" presetSubtype="0">
+                                  <p:stCondLst>
+                                    <p:cond delay="0"/>
+                                  </p:stCondLst>
+                                  <p:childTnLst>
+                                    <p:set>
+                                      <p:cBhvr>
+                                        <p:cTn dur="1" fill="hold">
+                                          <p:stCondLst>
+                                            <p:cond delay="0"/>
+                                          </p:stCondLst>
+                                        </p:cTn>
+                                        <p:tgtEl>
+                                          <p:spTgt spid="294">
+                                            <p:txEl>
+                                              <p:pRg end="12" st="12"/>
+                                            </p:txEl>
+                                          </p:spTgt>
+                                        </p:tgtEl>
+                                        <p:attrNameLst>
+                                          <p:attrName>style.visibility</p:attrName>
+                                        </p:attrNameLst>
+                                      </p:cBhvr>
+                                      <p:to>
+                                        <p:strVal val="visible"/>
+                                      </p:to>
+                                    </p:set>
+                                  </p:childTnLst>
+                                </p:cTn>
+                              </p:par>
+                            </p:childTnLst>
+                          </p:cTn>
+                        </p:par>
+                      </p:childTnLst>
+                    </p:cTn>
+                  </p:par>
+                </p:childTnLst>
+              </p:cTn>
+              <p:prevCondLst>
+                <p:cond evt="onPrev">
+                  <p:tgtEl>
+                    <p:sldTgt/>
+                  </p:tgtEl>
+                </p:cond>
+              </p:prevCondLst>
+              <p:nextCondLst>
+                <p:cond evt="onNext">
+                  <p:tgtEl>
+                    <p:sldTgt/>
+                  </p:tgtEl>
+                </p:cond>
+              </p:nextCondLst>
+            </p:seq>
+          </p:childTnLst>
+        </p:cTn>
+      </p:par>
+    </p:tnLst>
+  </p:timing>
+</p:sld>
+</file>
+
+<file path=ppt/slides/slide27.xml><?xml version="1.0" encoding="utf-8"?>
 <p:sld xmlns:a="http://schemas.openxmlformats.org/drawingml/2006/main" xmlns:r="http://schemas.openxmlformats.org/officeDocument/2006/relationships" xmlns:mc="http://schemas.openxmlformats.org/markup-compatibility/2006" xmlns:mv="urn:schemas-microsoft-com:mac:vml" xmlns:p="http://schemas.openxmlformats.org/presentationml/2006/main" xmlns:c="http://schemas.openxmlformats.org/drawingml/2006/chart" xmlns:dgm="http://schemas.openxmlformats.org/drawingml/2006/diagram" xmlns:o="urn:schemas-microsoft-com:office:office" xmlns:v="urn:schemas-microsoft-com:vml" xmlns:pvml="urn:schemas-microsoft-com:office:powerpoint" xmlns:com="http://schemas.openxmlformats.org/drawingml/2006/compatibility" xmlns:p14="http://schemas.microsoft.com/office/powerpoint/2010/main" xmlns:p15="http://schemas.microsoft.com/office/powerpoint/2012/main" xmlns:ahyp="http://schemas.microsoft.com/office/drawing/2018/hyperlinkcolor">
   <p:cSld>
     <p:spTree>
@@ -15220,6 +15691,95 @@
 </file>
 
 <file path=ppt/slides/slide3.xml><?xml version="1.0" encoding="utf-8"?>
+<p:sld xmlns:a="http://schemas.openxmlformats.org/drawingml/2006/main" xmlns:r="http://schemas.openxmlformats.org/officeDocument/2006/relationships" xmlns:mc="http://schemas.openxmlformats.org/markup-compatibility/2006" xmlns:mv="urn:schemas-microsoft-com:mac:vml" xmlns:p="http://schemas.openxmlformats.org/presentationml/2006/main" xmlns:c="http://schemas.openxmlformats.org/drawingml/2006/chart" xmlns:dgm="http://schemas.openxmlformats.org/drawingml/2006/diagram" xmlns:o="urn:schemas-microsoft-com:office:office" xmlns:v="urn:schemas-microsoft-com:vml" xmlns:pvml="urn:schemas-microsoft-com:office:powerpoint" xmlns:com="http://schemas.openxmlformats.org/drawingml/2006/compatibility" xmlns:p14="http://schemas.microsoft.com/office/powerpoint/2010/main" xmlns:p15="http://schemas.microsoft.com/office/powerpoint/2012/main" xmlns:ahyp="http://schemas.microsoft.com/office/drawing/2018/hyperlinkcolor">
+  <p:cSld>
+    <p:spTree>
+      <p:nvGrpSpPr>
+        <p:cNvPr id="44" name="Shape 44"/>
+        <p:cNvGrpSpPr/>
+        <p:nvPr/>
+      </p:nvGrpSpPr>
+      <p:grpSpPr>
+        <a:xfrm>
+          <a:off x="0" y="0"/>
+          <a:ext cx="0" cy="0"/>
+          <a:chOff x="0" y="0"/>
+          <a:chExt cx="0" cy="0"/>
+        </a:xfrm>
+      </p:grpSpPr>
+      <p:sp>
+        <p:nvSpPr>
+          <p:cNvPr id="45" name="Google Shape;45;p10"/>
+          <p:cNvSpPr txBox="1"/>
+          <p:nvPr>
+            <p:ph type="title"/>
+          </p:nvPr>
+        </p:nvSpPr>
+        <p:spPr>
+          <a:xfrm>
+            <a:off x="311700" y="195615"/>
+            <a:ext cx="8520600" cy="572700"/>
+          </a:xfrm>
+          <a:prstGeom prst="rect">
+            <a:avLst/>
+          </a:prstGeom>
+        </p:spPr>
+        <p:txBody>
+          <a:bodyPr anchorCtr="0" anchor="t" bIns="91425" lIns="91425" spcFirstLastPara="1" rIns="91425" wrap="square" tIns="91425">
+            <a:normAutofit fontScale="90000"/>
+          </a:bodyPr>
+          <a:lstStyle/>
+          <a:p>
+            <a:pPr indent="0" lvl="0" marL="0" rtl="0" algn="l">
+              <a:spcBef>
+                <a:spcPts val="0"/>
+              </a:spcBef>
+              <a:spcAft>
+                <a:spcPts val="0"/>
+              </a:spcAft>
+              <a:buNone/>
+            </a:pPr>
+            <a:r>
+              <a:rPr lang="en"/>
+              <a:t>Today’s Goal</a:t>
+            </a:r>
+            <a:endParaRPr/>
+          </a:p>
+        </p:txBody>
+      </p:sp>
+      <p:pic>
+        <p:nvPicPr>
+          <p:cNvPr id="46" name="Picture 46" descr="birds-flight.png"/>
+          <p:cNvPicPr>
+            <a:picLocks noChangeAspect="1"/>
+          </p:cNvPicPr>
+          <p:nvPr/>
+        </p:nvPicPr>
+        <p:blipFill>
+          <a:blip r:embed="rId4"/>
+          <a:stretch>
+            <a:fillRect/>
+          </a:stretch>
+        </p:blipFill>
+        <p:spPr>
+          <a:xfrm>
+            <a:off x="1677201" y="1531275"/>
+            <a:ext cx="5789598" cy="3256648"/>
+          </a:xfrm>
+          <a:prstGeom prst="rect">
+            <a:avLst/>
+          </a:prstGeom>
+        </p:spPr>
+      </p:pic>
+    </p:spTree>
+  </p:cSld>
+  <p:clrMapOvr>
+    <a:masterClrMapping/>
+  </p:clrMapOvr>
+</p:sld>
+</file>
+
+<file path=ppt/slides/slide4.xml><?xml version="1.0" encoding="utf-8"?>
 <p:sld xmlns:a="http://schemas.openxmlformats.org/drawingml/2006/main" xmlns:r="http://schemas.openxmlformats.org/officeDocument/2006/relationships" xmlns:mc="http://schemas.openxmlformats.org/markup-compatibility/2006" xmlns:mv="urn:schemas-microsoft-com:mac:vml" xmlns:p="http://schemas.openxmlformats.org/presentationml/2006/main" xmlns:c="http://schemas.openxmlformats.org/drawingml/2006/chart" xmlns:dgm="http://schemas.openxmlformats.org/drawingml/2006/diagram" xmlns:o="urn:schemas-microsoft-com:office:office" xmlns:v="urn:schemas-microsoft-com:vml" xmlns:pvml="urn:schemas-microsoft-com:office:powerpoint" xmlns:com="http://schemas.openxmlformats.org/drawingml/2006/compatibility" xmlns:p14="http://schemas.microsoft.com/office/powerpoint/2010/main" xmlns:p15="http://schemas.microsoft.com/office/powerpoint/2012/main" xmlns:ahyp="http://schemas.microsoft.com/office/drawing/2018/hyperlinkcolor">
   <p:cSld>
     <p:spTree>
@@ -15685,7 +16245,7 @@
 </p:sld>
 </file>
 
-<file path=ppt/slides/slide4.xml><?xml version="1.0" encoding="utf-8"?>
+<file path=ppt/slides/slide5.xml><?xml version="1.0" encoding="utf-8"?>
 <p:sld xmlns:a="http://schemas.openxmlformats.org/drawingml/2006/main" xmlns:r="http://schemas.openxmlformats.org/officeDocument/2006/relationships" xmlns:mc="http://schemas.openxmlformats.org/markup-compatibility/2006" xmlns:mv="urn:schemas-microsoft-com:mac:vml" xmlns:p="http://schemas.openxmlformats.org/presentationml/2006/main" xmlns:c="http://schemas.openxmlformats.org/drawingml/2006/chart" xmlns:dgm="http://schemas.openxmlformats.org/drawingml/2006/diagram" xmlns:o="urn:schemas-microsoft-com:office:office" xmlns:v="urn:schemas-microsoft-com:vml" xmlns:pvml="urn:schemas-microsoft-com:office:powerpoint" xmlns:com="http://schemas.openxmlformats.org/drawingml/2006/compatibility" xmlns:p14="http://schemas.microsoft.com/office/powerpoint/2010/main" xmlns:p15="http://schemas.microsoft.com/office/powerpoint/2012/main" xmlns:ahyp="http://schemas.microsoft.com/office/drawing/2018/hyperlinkcolor">
   <p:cSld>
     <p:spTree>
@@ -15825,7 +16385,7 @@
 </p:sld>
 </file>
 
-<file path=ppt/slides/slide5.xml><?xml version="1.0" encoding="utf-8"?>
+<file path=ppt/slides/slide6.xml><?xml version="1.0" encoding="utf-8"?>
 <p:sld xmlns:a="http://schemas.openxmlformats.org/drawingml/2006/main" xmlns:p="http://schemas.openxmlformats.org/presentationml/2006/main" xmlns:r="http://schemas.openxmlformats.org/officeDocument/2006/relationships">
   <p:cSld>
     <p:spTree>
@@ -16320,7 +16880,7 @@
 </p:sld>
 </file>
 
-<file path=ppt/slides/slide6.xml><?xml version="1.0" encoding="utf-8"?>
+<file path=ppt/slides/slide7.xml><?xml version="1.0" encoding="utf-8"?>
 <p:sld xmlns:a="http://schemas.openxmlformats.org/drawingml/2006/main" xmlns:p="http://schemas.openxmlformats.org/presentationml/2006/main" xmlns:r="http://schemas.openxmlformats.org/officeDocument/2006/relationships">
   <p:cSld>
     <p:spTree>
@@ -17216,7 +17776,7 @@
 </p:sld>
 </file>
 
-<file path=ppt/slides/slide7.xml><?xml version="1.0" encoding="utf-8"?>
+<file path=ppt/slides/slide8.xml><?xml version="1.0" encoding="utf-8"?>
 <p:sld xmlns:a="http://schemas.openxmlformats.org/drawingml/2006/main" xmlns:p="http://schemas.openxmlformats.org/presentationml/2006/main" xmlns:r="http://schemas.openxmlformats.org/officeDocument/2006/relationships">
   <p:cSld>
     <p:spTree>
@@ -17649,7 +18209,7 @@
 </p:sld>
 </file>
 
-<file path=ppt/slides/slide8.xml><?xml version="1.0" encoding="utf-8"?>
+<file path=ppt/slides/slide9.xml><?xml version="1.0" encoding="utf-8"?>
 <p:sld xmlns:a="http://schemas.openxmlformats.org/drawingml/2006/main" xmlns:p="http://schemas.openxmlformats.org/presentationml/2006/main" xmlns:r="http://schemas.openxmlformats.org/officeDocument/2006/relationships">
   <p:cSld>
     <p:spTree>
@@ -17765,389 +18325,6 @@
               <a:t>Birds0: Box2D, used directly in Game1</a:t>
             </a:r>
             <a:endParaRPr sz="1800"/>
-          </a:p>
-        </p:txBody>
-      </p:sp>
-    </p:spTree>
-  </p:cSld>
-  <p:clrMapOvr>
-    <a:masterClrMapping/>
-  </p:clrMapOvr>
-</p:sld>
-</file>
-
-<file path=ppt/slides/slide9.xml><?xml version="1.0" encoding="utf-8"?>
-<p:sld xmlns:a="http://schemas.openxmlformats.org/drawingml/2006/main" xmlns:p="http://schemas.openxmlformats.org/presentationml/2006/main" xmlns:r="http://schemas.openxmlformats.org/officeDocument/2006/relationships">
-  <p:cSld>
-    <p:spTree>
-      <p:nvGrpSpPr>
-        <p:cNvPr id="1" name=""/>
-        <p:cNvGrpSpPr/>
-        <p:nvPr/>
-      </p:nvGrpSpPr>
-      <p:grpSpPr/>
-      <p:sp>
-        <p:nvSpPr>
-          <p:cNvPr id="293" name="Google Shape;293;p45"/>
-          <p:cNvSpPr txBox="1"/>
-          <p:nvPr>
-            <p:ph type="title"/>
-          </p:nvPr>
-        </p:nvSpPr>
-        <p:spPr>
-          <a:xfrm>
-            <a:off x="311700" y="195615"/>
-            <a:ext cx="8520600" cy="572700"/>
-          </a:xfrm>
-          <a:prstGeom prst="rect">
-            <a:avLst/>
-          </a:prstGeom>
-        </p:spPr>
-        <p:txBody>
-          <a:bodyPr anchorCtr="0" anchor="t" bIns="91425" lIns="91425" spcFirstLastPara="1" rIns="91425" wrap="square" tIns="91425">
-            <a:normAutofit fontScale="90000"/>
-          </a:bodyPr>
-          <a:lstStyle/>
-          <a:p>
-            <a:pPr indent="0" lvl="0" marL="0" rtl="0" algn="l">
-              <a:spcBef>
-                <a:spcPts val="0"/>
-              </a:spcBef>
-              <a:spcAft>
-                <a:spcPts val="0"/>
-              </a:spcAft>
-              <a:buNone/>
-            </a:pPr>
-            <a:r>
-              <a:rPr lang="en">
-                <a:solidFill>
-                  <a:schemeClr val="accent5"/>
-                </a:solidFill>
-              </a:rPr>
-              <a:t>Adapter &amp; Facade</a:t>
-            </a:r>
-            <a:endParaRPr>
-              <a:solidFill>
-                <a:schemeClr val="accent5"/>
-              </a:solidFill>
-            </a:endParaRPr>
-          </a:p>
-        </p:txBody>
-      </p:sp>
-      <p:sp>
-        <p:nvSpPr>
-          <p:cNvPr id="294" name="Google Shape;294;p45"/>
-          <p:cNvSpPr txBox="1"/>
-          <p:nvPr>
-            <p:ph idx="1" type="body"/>
-          </p:nvPr>
-        </p:nvSpPr>
-        <p:spPr>
-          <a:xfrm>
-            <a:off x="311700" y="885950"/>
-            <a:ext cx="8520600" cy="521208"/>
-          </a:xfrm>
-          <a:prstGeom prst="rect">
-            <a:avLst/>
-          </a:prstGeom>
-        </p:spPr>
-        <p:txBody>
-          <a:bodyPr anchorCtr="0" anchor="t" bIns="91425" lIns="91425" spcFirstLastPara="1" rIns="91425" wrap="square" tIns="91425">
-            <a:normAutofit/>
-          </a:bodyPr>
-          <a:lstStyle/>
-          <a:p>
-            <a:pPr indent="-330200" lvl="0" marL="457200" rtl="0" algn="l">
-              <a:spcBef>
-                <a:spcPts val="0"/>
-              </a:spcBef>
-              <a:spcAft>
-                <a:spcPts val="0"/>
-              </a:spcAft>
-              <a:buSzPts val="1600"/>
-              <a:buChar char="●"/>
-            </a:pPr>
-            <a:r>
-              <a:rPr lang="en"/>
-              <a:t>Keep Box2D in one place: the rest of the game never sees a Box2D type.</a:t>
-            </a:r>
-            <a:endParaRPr/>
-          </a:p>
-        </p:txBody>
-      </p:sp>
-      <p:sp>
-        <p:nvSpPr>
-          <p:cNvPr id="295" name="Rounded Rectangle 294"/>
-          <p:cNvSpPr/>
-          <p:nvPr/>
-        </p:nvSpPr>
-        <p:spPr>
-          <a:xfrm>
-            <a:off x="548640" y="1371600"/>
-            <a:ext cx="8046720" cy="548640"/>
-          </a:xfrm>
-          <a:prstGeom prst="roundRect">
-            <a:avLst>
-              <a:gd name="adj" fmla="val 12000"/>
-            </a:avLst>
-          </a:prstGeom>
-          <a:solidFill>
-            <a:srgbClr val="2E3338"/>
-          </a:solidFill>
-          <a:ln>
-            <a:noFill/>
-          </a:ln>
-          <a:effectLst/>
-        </p:spPr>
-        <p:style>
-          <a:lnRef idx="1">
-            <a:schemeClr val="accent1"/>
-          </a:lnRef>
-          <a:fillRef idx="3">
-            <a:schemeClr val="accent1"/>
-          </a:fillRef>
-          <a:effectRef idx="2">
-            <a:schemeClr val="accent1"/>
-          </a:effectRef>
-          <a:fontRef idx="minor">
-            <a:schemeClr val="lt1"/>
-          </a:fontRef>
-        </p:style>
-        <p:txBody>
-          <a:bodyPr rtlCol="0" anchor="ctr" wrap="square" lIns="73152" rIns="73152"/>
-          <a:lstStyle/>
-          <a:p>
-            <a:pPr algn="ctr"/>
-            <a:r>
-              <a:rPr sz="1500" b="1">
-                <a:solidFill>
-                  <a:srgbClr val="DEE2E6"/>
-                </a:solidFill>
-              </a:rPr>
-              <a:t>The game: blocks, pigs, birds, levels</a:t>
-            </a:r>
-          </a:p>
-        </p:txBody>
-      </p:sp>
-      <p:sp>
-        <p:nvSpPr>
-          <p:cNvPr id="296" name="Rounded Rectangle 295"/>
-          <p:cNvSpPr/>
-          <p:nvPr/>
-        </p:nvSpPr>
-        <p:spPr>
-          <a:xfrm>
-            <a:off x="548640" y="2148840"/>
-            <a:ext cx="3886200" cy="822960"/>
-          </a:xfrm>
-          <a:prstGeom prst="roundRect">
-            <a:avLst>
-              <a:gd name="adj" fmla="val 12000"/>
-            </a:avLst>
-          </a:prstGeom>
-          <a:solidFill>
-            <a:srgbClr val="2E3338"/>
-          </a:solidFill>
-          <a:ln w="25400">
-            <a:solidFill>
-              <a:srgbClr val="D45D35"/>
-            </a:solidFill>
-          </a:ln>
-          <a:effectLst/>
-        </p:spPr>
-        <p:style>
-          <a:lnRef idx="1">
-            <a:schemeClr val="accent1"/>
-          </a:lnRef>
-          <a:fillRef idx="3">
-            <a:schemeClr val="accent1"/>
-          </a:fillRef>
-          <a:effectRef idx="2">
-            <a:schemeClr val="accent1"/>
-          </a:effectRef>
-          <a:fontRef idx="minor">
-            <a:schemeClr val="lt1"/>
-          </a:fontRef>
-        </p:style>
-        <p:txBody>
-          <a:bodyPr rtlCol="0" anchor="ctr" wrap="square" lIns="73152" rIns="73152"/>
-          <a:lstStyle/>
-          <a:p>
-            <a:pPr algn="ctr"/>
-            <a:r>
-              <a:rPr sz="1500" b="1">
-                <a:solidFill>
-                  <a:srgbClr val="DEE2E6"/>
-                </a:solidFill>
-              </a:rPr>
-              <a:t>PhysicsWorld: a Facade</a:t>
-            </a:r>
-          </a:p>
-          <a:p>
-            <a:pPr algn="ctr"/>
-            <a:r>
-              <a:rPr sz="1300" b="0">
-                <a:solidFill>
-                  <a:srgbClr val="9AA3AB"/>
-                </a:solidFill>
-              </a:rPr>
-              <a:t>a handful of calls: create, step, destroy</a:t>
-            </a:r>
-          </a:p>
-        </p:txBody>
-      </p:sp>
-      <p:sp>
-        <p:nvSpPr>
-          <p:cNvPr id="297" name="Rounded Rectangle 296"/>
-          <p:cNvSpPr/>
-          <p:nvPr/>
-        </p:nvSpPr>
-        <p:spPr>
-          <a:xfrm>
-            <a:off x="4709160" y="2148840"/>
-            <a:ext cx="3886200" cy="822960"/>
-          </a:xfrm>
-          <a:prstGeom prst="roundRect">
-            <a:avLst>
-              <a:gd name="adj" fmla="val 12000"/>
-            </a:avLst>
-          </a:prstGeom>
-          <a:solidFill>
-            <a:srgbClr val="2E3338"/>
-          </a:solidFill>
-          <a:ln w="25400">
-            <a:solidFill>
-              <a:srgbClr val="D45D35"/>
-            </a:solidFill>
-          </a:ln>
-          <a:effectLst/>
-        </p:spPr>
-        <p:style>
-          <a:lnRef idx="1">
-            <a:schemeClr val="accent1"/>
-          </a:lnRef>
-          <a:fillRef idx="3">
-            <a:schemeClr val="accent1"/>
-          </a:fillRef>
-          <a:effectRef idx="2">
-            <a:schemeClr val="accent1"/>
-          </a:effectRef>
-          <a:fontRef idx="minor">
-            <a:schemeClr val="lt1"/>
-          </a:fontRef>
-        </p:style>
-        <p:txBody>
-          <a:bodyPr rtlCol="0" anchor="ctr" wrap="square" lIns="73152" rIns="73152"/>
-          <a:lstStyle/>
-          <a:p>
-            <a:pPr algn="ctr"/>
-            <a:r>
-              <a:rPr sz="1500" b="1">
-                <a:solidFill>
-                  <a:srgbClr val="DEE2E6"/>
-                </a:solidFill>
-              </a:rPr>
-              <a:t>PhysicsBody: an Adapter</a:t>
-            </a:r>
-          </a:p>
-          <a:p>
-            <a:pPr algn="ctr"/>
-            <a:r>
-              <a:rPr sz="1300" b="0">
-                <a:solidFill>
-                  <a:srgbClr val="9AA3AB"/>
-                </a:solidFill>
-              </a:rPr>
-              <a:t>a body in pixels, turning like SpriteBatch</a:t>
-            </a:r>
-          </a:p>
-        </p:txBody>
-      </p:sp>
-      <p:sp>
-        <p:nvSpPr>
-          <p:cNvPr id="298" name="Rounded Rectangle 297"/>
-          <p:cNvSpPr/>
-          <p:nvPr/>
-        </p:nvSpPr>
-        <p:spPr>
-          <a:xfrm>
-            <a:off x="548640" y="3200400"/>
-            <a:ext cx="8046720" cy="548640"/>
-          </a:xfrm>
-          <a:prstGeom prst="roundRect">
-            <a:avLst>
-              <a:gd name="adj" fmla="val 12000"/>
-            </a:avLst>
-          </a:prstGeom>
-          <a:solidFill>
-            <a:srgbClr val="2E3338"/>
-          </a:solidFill>
-          <a:ln>
-            <a:noFill/>
-          </a:ln>
-          <a:effectLst/>
-        </p:spPr>
-        <p:style>
-          <a:lnRef idx="1">
-            <a:schemeClr val="accent1"/>
-          </a:lnRef>
-          <a:fillRef idx="3">
-            <a:schemeClr val="accent1"/>
-          </a:fillRef>
-          <a:effectRef idx="2">
-            <a:schemeClr val="accent1"/>
-          </a:effectRef>
-          <a:fontRef idx="minor">
-            <a:schemeClr val="lt1"/>
-          </a:fontRef>
-        </p:style>
-        <p:txBody>
-          <a:bodyPr rtlCol="0" anchor="ctr" wrap="square" lIns="73152" rIns="73152"/>
-          <a:lstStyle/>
-          <a:p>
-            <a:pPr algn="ctr"/>
-            <a:r>
-              <a:rPr sz="1500" b="1">
-                <a:solidFill>
-                  <a:srgbClr val="DEE2E6"/>
-                </a:solidFill>
-              </a:rPr>
-              <a:t>Box2D: hundreds of functions, metres, structs and IDs</a:t>
-            </a:r>
-          </a:p>
-        </p:txBody>
-      </p:sp>
-      <p:sp>
-        <p:nvSpPr>
-          <p:cNvPr id="299" name="TextBox 298"/>
-          <p:cNvSpPr txBox="1"/>
-          <p:nvPr/>
-        </p:nvSpPr>
-        <p:spPr>
-          <a:xfrm>
-            <a:off x="457200" y="3886200"/>
-            <a:ext cx="8229600" cy="731520"/>
-          </a:xfrm>
-          <a:prstGeom prst="rect">
-            <a:avLst/>
-          </a:prstGeom>
-          <a:noFill/>
-        </p:spPr>
-        <p:txBody>
-          <a:bodyPr wrap="square">
-            <a:spAutoFit/>
-          </a:bodyPr>
-          <a:lstStyle/>
-          <a:p>
-            <a:pPr algn="ctr"/>
-            <a:r>
-              <a:rPr sz="1500" b="1" i="0">
-                <a:solidFill>
-                  <a:srgbClr val="DEE2E6"/>
-                </a:solidFill>
-              </a:rPr>
-              <a:t>Swap Box2D for another library. Which files change?</a:t>
-            </a:r>
           </a:p>
         </p:txBody>
       </p:sp>

--- a/slides/07 Angry Birds.pptx
+++ b/slides/07 Angry Birds.pptx
@@ -17,17 +17,21 @@
     <p:sldId id="298" r:id="rId57"/>
     <p:sldId id="299" r:id="rId58"/>
     <p:sldId id="300" r:id="rId59"/>
+    <p:sldId id="318" r:id="rId36"/>
     <p:sldId id="301" r:id="rId60"/>
     <p:sldId id="302" r:id="rId61"/>
     <p:sldId id="303" r:id="rId62"/>
     <p:sldId id="304" r:id="rId63"/>
     <p:sldId id="305" r:id="rId64"/>
+    <p:sldId id="317" r:id="rId37"/>
     <p:sldId id="306" r:id="rId65"/>
     <p:sldId id="307" r:id="rId66"/>
     <p:sldId id="308" r:id="rId67"/>
+    <p:sldId id="316" r:id="rId38"/>
     <p:sldId id="309" r:id="rId68"/>
     <p:sldId id="310" r:id="rId69"/>
     <p:sldId id="311" r:id="rId70"/>
+    <p:sldId id="315" r:id="rId39"/>
     <p:sldId id="312" r:id="rId71"/>
     <p:sldId id="280" r:id="rId30"/>
     <p:sldId id="292" r:id="rId42"/>
@@ -2129,6 +2133,122 @@
 </p:notes>
 </file>
 
+<file path=ppt/notesSlides/notesSlide28.xml><?xml version="1.0" encoding="utf-8"?>
+<p:notes xmlns:a="http://schemas.openxmlformats.org/drawingml/2006/main" xmlns:p="http://schemas.openxmlformats.org/presentationml/2006/main" xmlns:r="http://schemas.openxmlformats.org/officeDocument/2006/relationships">
+  <p:cSld>
+    <p:spTree>
+      <p:nvGrpSpPr>
+        <p:cNvPr id="1" name=""/>
+        <p:cNvGrpSpPr/>
+        <p:nvPr/>
+      </p:nvGrpSpPr>
+      <p:grpSpPr>
+        <a:xfrm>
+          <a:off x="0" y="0"/>
+          <a:ext cx="0" cy="0"/>
+          <a:chOff x="0" y="0"/>
+          <a:chExt cx="0" cy="0"/>
+        </a:xfrm>
+      </p:grpSpPr>
+      <p:sp>
+        <p:nvSpPr>
+          <p:cNvPr id="2" name="Slide Image Placeholder 1"/>
+          <p:cNvSpPr>
+            <a:spLocks noGrp="1"/>
+          </p:cNvSpPr>
+          <p:nvPr>
+            <p:ph type="sldImg" idx="2"/>
+          </p:nvPr>
+        </p:nvSpPr>
+        <p:spPr/>
+      </p:sp>
+      <p:sp>
+        <p:nvSpPr>
+          <p:cNvPr id="3" name="Notes Placeholder 2"/>
+          <p:cNvSpPr>
+            <a:spLocks noGrp="1"/>
+          </p:cNvSpPr>
+          <p:nvPr>
+            <p:ph type="body" idx="1"/>
+          </p:nvPr>
+        </p:nvSpPr>
+        <p:spPr/>
+        <p:txBody>
+          <a:bodyPr/>
+          <a:lstStyle/>
+          <a:p>
+            <a:r>
+              <a:t>Pairs, about 5 minutes. None: the prefab names and positions are data. A kind of block that doesn’t exist yet would be one line in Prefabs.</a:t>
+            </a:r>
+          </a:p>
+        </p:txBody>
+      </p:sp>
+    </p:spTree>
+  </p:cSld>
+  <p:clrMapOvr>
+    <a:masterClrMapping/>
+  </p:clrMapOvr>
+</p:notes>
+</file>
+
+<file path=ppt/notesSlides/notesSlide29.xml><?xml version="1.0" encoding="utf-8"?>
+<p:notes xmlns:a="http://schemas.openxmlformats.org/drawingml/2006/main" xmlns:p="http://schemas.openxmlformats.org/presentationml/2006/main" xmlns:r="http://schemas.openxmlformats.org/officeDocument/2006/relationships">
+  <p:cSld>
+    <p:spTree>
+      <p:nvGrpSpPr>
+        <p:cNvPr id="1" name=""/>
+        <p:cNvGrpSpPr/>
+        <p:nvPr/>
+      </p:nvGrpSpPr>
+      <p:grpSpPr>
+        <a:xfrm>
+          <a:off x="0" y="0"/>
+          <a:ext cx="0" cy="0"/>
+          <a:chOff x="0" y="0"/>
+          <a:chExt cx="0" cy="0"/>
+        </a:xfrm>
+      </p:grpSpPr>
+      <p:sp>
+        <p:nvSpPr>
+          <p:cNvPr id="2" name="Slide Image Placeholder 1"/>
+          <p:cNvSpPr>
+            <a:spLocks noGrp="1"/>
+          </p:cNvSpPr>
+          <p:nvPr>
+            <p:ph type="sldImg" idx="2"/>
+          </p:nvPr>
+        </p:nvSpPr>
+        <p:spPr/>
+      </p:sp>
+      <p:sp>
+        <p:nvSpPr>
+          <p:cNvPr id="3" name="Notes Placeholder 2"/>
+          <p:cNvSpPr>
+            <a:spLocks noGrp="1"/>
+          </p:cNvSpPr>
+          <p:nvPr>
+            <p:ph type="body" idx="1"/>
+          </p:nvPr>
+        </p:nvSpPr>
+        <p:spPr/>
+        <p:txBody>
+          <a:bodyPr/>
+          <a:lstStyle/>
+          <a:p>
+            <a:r>
+              <a:t>Pairs, about 5 minutes. damage = speed / 100 in OnHit. Glass breaks at the slightest touch, and some huts fall apart before the first bird.</a:t>
+            </a:r>
+          </a:p>
+        </p:txBody>
+      </p:sp>
+    </p:spTree>
+  </p:cSld>
+  <p:clrMapOvr>
+    <a:masterClrMapping/>
+  </p:clrMapOvr>
+</p:notes>
+</file>
+
 <file path=ppt/notesSlides/notesSlide3.xml><?xml version="1.0" encoding="utf-8"?>
 <p:notes xmlns:a="http://schemas.openxmlformats.org/drawingml/2006/main" xmlns:r="http://schemas.openxmlformats.org/officeDocument/2006/relationships" xmlns:mc="http://schemas.openxmlformats.org/markup-compatibility/2006" xmlns:mv="urn:schemas-microsoft-com:mac:vml" xmlns:p="http://schemas.openxmlformats.org/presentationml/2006/main" xmlns:c="http://schemas.openxmlformats.org/drawingml/2006/chart" xmlns:dgm="http://schemas.openxmlformats.org/drawingml/2006/diagram" xmlns:o="urn:schemas-microsoft-com:office:office" xmlns:v="urn:schemas-microsoft-com:vml" xmlns:pvml="urn:schemas-microsoft-com:office:powerpoint" xmlns:com="http://schemas.openxmlformats.org/drawingml/2006/compatibility" xmlns:p14="http://schemas.microsoft.com/office/powerpoint/2010/main" xmlns:p15="http://schemas.microsoft.com/office/powerpoint/2012/main" xmlns:ahyp="http://schemas.microsoft.com/office/drawing/2018/hyperlinkcolor" showMasterPhAnim="0" showMasterSp="0">
   <p:cSld>
@@ -2206,6 +2326,122 @@
           <a:p>
             <a:r>
               <a:t>The main topic: using a third-party library without letting it spread through your code. Adapter and Facade, two worlds, contact events, and Prototype.</a:t>
+            </a:r>
+          </a:p>
+        </p:txBody>
+      </p:sp>
+    </p:spTree>
+  </p:cSld>
+  <p:clrMapOvr>
+    <a:masterClrMapping/>
+  </p:clrMapOvr>
+</p:notes>
+</file>
+
+<file path=ppt/notesSlides/notesSlide30.xml><?xml version="1.0" encoding="utf-8"?>
+<p:notes xmlns:a="http://schemas.openxmlformats.org/drawingml/2006/main" xmlns:p="http://schemas.openxmlformats.org/presentationml/2006/main" xmlns:r="http://schemas.openxmlformats.org/officeDocument/2006/relationships">
+  <p:cSld>
+    <p:spTree>
+      <p:nvGrpSpPr>
+        <p:cNvPr id="1" name=""/>
+        <p:cNvGrpSpPr/>
+        <p:nvPr/>
+      </p:nvGrpSpPr>
+      <p:grpSpPr>
+        <a:xfrm>
+          <a:off x="0" y="0"/>
+          <a:ext cx="0" cy="0"/>
+          <a:chOff x="0" y="0"/>
+          <a:chExt cx="0" cy="0"/>
+        </a:xfrm>
+      </p:grpSpPr>
+      <p:sp>
+        <p:nvSpPr>
+          <p:cNvPr id="2" name="Slide Image Placeholder 1"/>
+          <p:cNvSpPr>
+            <a:spLocks noGrp="1"/>
+          </p:cNvSpPr>
+          <p:nvPr>
+            <p:ph type="sldImg" idx="2"/>
+          </p:nvPr>
+        </p:nvSpPr>
+        <p:spPr/>
+      </p:sp>
+      <p:sp>
+        <p:nvSpPr>
+          <p:cNvPr id="3" name="Notes Placeholder 2"/>
+          <p:cNvSpPr>
+            <a:spLocks noGrp="1"/>
+          </p:cNvSpPr>
+          <p:nvPr>
+            <p:ph type="body" idx="1"/>
+          </p:nvPr>
+        </p:nvSpPr>
+        <p:spPr/>
+        <p:txBody>
+          <a:bodyPr/>
+          <a:lstStyle/>
+          <a:p>
+            <a:r>
+              <a:t>Pairs, about 3 minutes. One line in Physics/Units.cs. Compare with Birds0: that difference is what the adapter is for.</a:t>
+            </a:r>
+          </a:p>
+        </p:txBody>
+      </p:sp>
+    </p:spTree>
+  </p:cSld>
+  <p:clrMapOvr>
+    <a:masterClrMapping/>
+  </p:clrMapOvr>
+</p:notes>
+</file>
+
+<file path=ppt/notesSlides/notesSlide31.xml><?xml version="1.0" encoding="utf-8"?>
+<p:notes xmlns:a="http://schemas.openxmlformats.org/drawingml/2006/main" xmlns:p="http://schemas.openxmlformats.org/presentationml/2006/main" xmlns:r="http://schemas.openxmlformats.org/officeDocument/2006/relationships">
+  <p:cSld>
+    <p:spTree>
+      <p:nvGrpSpPr>
+        <p:cNvPr id="1" name=""/>
+        <p:cNvGrpSpPr/>
+        <p:nvPr/>
+      </p:nvGrpSpPr>
+      <p:grpSpPr>
+        <a:xfrm>
+          <a:off x="0" y="0"/>
+          <a:ext cx="0" cy="0"/>
+          <a:chOff x="0" y="0"/>
+          <a:chExt cx="0" cy="0"/>
+        </a:xfrm>
+      </p:grpSpPr>
+      <p:sp>
+        <p:nvSpPr>
+          <p:cNvPr id="2" name="Slide Image Placeholder 1"/>
+          <p:cNvSpPr>
+            <a:spLocks noGrp="1"/>
+          </p:cNvSpPr>
+          <p:nvPr>
+            <p:ph type="sldImg" idx="2"/>
+          </p:nvPr>
+        </p:nvSpPr>
+        <p:spPr/>
+      </p:sp>
+      <p:sp>
+        <p:nvSpPr>
+          <p:cNvPr id="3" name="Notes Placeholder 2"/>
+          <p:cNvSpPr>
+            <a:spLocks noGrp="1"/>
+          </p:cNvSpPr>
+          <p:nvPr>
+            <p:ph type="body" idx="1"/>
+          </p:nvPr>
+        </p:nvSpPr>
+        <p:spPr/>
+        <p:txBody>
+          <a:bodyPr/>
+          <a:lstStyle/>
+          <a:p>
+            <a:r>
+              <a:t>Pairs, about 5 minutes. The constant is used all through Game1. At 10, a block is five times bigger in metres, so it falls like a building: slowly.</a:t>
             </a:r>
           </a:p>
         </p:txBody>
@@ -6326,6 +6562,128 @@
       <p:grpSpPr/>
       <p:sp>
         <p:nvSpPr>
+          <p:cNvPr id="2" name="Title 1"/>
+          <p:cNvSpPr>
+            <a:spLocks noGrp="1"/>
+          </p:cNvSpPr>
+          <p:nvPr>
+            <p:ph type="title"/>
+          </p:nvPr>
+        </p:nvSpPr>
+        <p:spPr/>
+        <p:txBody>
+          <a:bodyPr/>
+          <a:lstStyle/>
+          <a:p>
+            <a:pPr indent="0" lvl="0" marL="0" rtl="0" algn="l">
+              <a:spcBef>
+                <a:spcPts val="0"/>
+              </a:spcBef>
+              <a:spcAft>
+                <a:spcPts val="0"/>
+              </a:spcAft>
+              <a:buNone/>
+            </a:pPr>
+            <a:r>
+              <a:rPr lang="en"/>
+              <a:t>Try It: A Different Scale</a:t>
+            </a:r>
+            <a:endParaRPr/>
+          </a:p>
+        </p:txBody>
+      </p:sp>
+      <p:sp>
+        <p:nvSpPr>
+          <p:cNvPr id="3" name="Text Placeholder 2"/>
+          <p:cNvSpPr>
+            <a:spLocks noGrp="1"/>
+          </p:cNvSpPr>
+          <p:nvPr>
+            <p:ph type="body" idx="1"/>
+          </p:nvPr>
+        </p:nvSpPr>
+        <p:spPr>
+          <a:xfrm>
+            <a:off x="311700" y="885950"/>
+            <a:ext cx="8520600" cy="1289304"/>
+          </a:xfrm>
+        </p:spPr>
+        <p:txBody>
+          <a:bodyPr/>
+          <a:lstStyle/>
+          <a:p>
+            <a:pPr indent="-330200" lvl="0" marL="457200" rtl="0" algn="l">
+              <a:spcBef>
+                <a:spcPts val="0"/>
+              </a:spcBef>
+              <a:spcAft>
+                <a:spcPts val="0"/>
+              </a:spcAft>
+              <a:buSzPts val="1600"/>
+              <a:buChar char="●"/>
+            </a:pPr>
+            <a:r>
+              <a:rPr lang="en"/>
+              <a:t>In Birds0:</a:t>
+            </a:r>
+            <a:endParaRPr/>
+          </a:p>
+          <a:p>
+            <a:pPr indent="-330200" lvl="0" marL="457200" rtl="0" algn="l">
+              <a:spcBef>
+                <a:spcPts val="0"/>
+              </a:spcBef>
+              <a:spcAft>
+                <a:spcPts val="0"/>
+              </a:spcAft>
+              <a:buSzPts val="1600"/>
+              <a:buChar char="●"/>
+            </a:pPr>
+            <a:r>
+              <a:rPr lang="en"/>
+              <a:t>Change PixelsPerMeter from 50 to 10</a:t>
+            </a:r>
+            <a:endParaRPr/>
+          </a:p>
+          <a:p>
+            <a:pPr indent="-330200" lvl="0" marL="457200" rtl="0" algn="l">
+              <a:spcBef>
+                <a:spcPts val="0"/>
+              </a:spcBef>
+              <a:spcAft>
+                <a:spcPts val="0"/>
+              </a:spcAft>
+              <a:buSzPts val="1600"/>
+              <a:buChar char="●"/>
+            </a:pPr>
+            <a:r>
+              <a:rPr lang="en"/>
+              <a:t>How many lines does it touch? How do the blocks fall now?</a:t>
+            </a:r>
+            <a:endParaRPr/>
+          </a:p>
+        </p:txBody>
+      </p:sp>
+    </p:spTree>
+  </p:cSld>
+  <p:clrMapOvr>
+    <a:masterClrMapping/>
+  </p:clrMapOvr>
+</p:sld>
+</file>
+
+<file path=ppt/slides/slide11.xml><?xml version="1.0" encoding="utf-8"?>
+<p:sld xmlns:a="http://schemas.openxmlformats.org/drawingml/2006/main" xmlns:p="http://schemas.openxmlformats.org/presentationml/2006/main" xmlns:r="http://schemas.openxmlformats.org/officeDocument/2006/relationships">
+  <p:cSld>
+    <p:spTree>
+      <p:nvGrpSpPr>
+        <p:cNvPr id="1" name=""/>
+        <p:cNvGrpSpPr/>
+        <p:nvPr/>
+      </p:nvGrpSpPr>
+      <p:grpSpPr/>
+      <p:sp>
+        <p:nvSpPr>
           <p:cNvPr id="293" name="Google Shape;293;p45"/>
           <p:cNvSpPr txBox="1"/>
           <p:nvPr>
@@ -6697,878 +7055,6 @@
 </p:sld>
 </file>
 
-<file path=ppt/slides/slide11.xml><?xml version="1.0" encoding="utf-8"?>
-<p:sld xmlns:a="http://schemas.openxmlformats.org/drawingml/2006/main" xmlns:p="http://schemas.openxmlformats.org/presentationml/2006/main" xmlns:r="http://schemas.openxmlformats.org/officeDocument/2006/relationships">
-  <p:cSld>
-    <p:spTree>
-      <p:nvGrpSpPr>
-        <p:cNvPr id="1" name=""/>
-        <p:cNvGrpSpPr/>
-        <p:nvPr/>
-      </p:nvGrpSpPr>
-      <p:grpSpPr/>
-      <p:sp>
-        <p:nvSpPr>
-          <p:cNvPr id="140" name="Google Shape;140;p23"/>
-          <p:cNvSpPr txBox="1"/>
-          <p:nvPr>
-            <p:ph type="title"/>
-          </p:nvPr>
-        </p:nvSpPr>
-        <p:spPr>
-          <a:xfrm>
-            <a:off x="311700" y="195615"/>
-            <a:ext cx="8520600" cy="572700"/>
-          </a:xfrm>
-          <a:prstGeom prst="rect">
-            <a:avLst/>
-          </a:prstGeom>
-        </p:spPr>
-        <p:txBody>
-          <a:bodyPr anchorCtr="0" anchor="t" bIns="91425" lIns="91425" spcFirstLastPara="1" rIns="91425" wrap="square" tIns="91425">
-            <a:normAutofit fontScale="90000"/>
-          </a:bodyPr>
-          <a:lstStyle/>
-          <a:p>
-            <a:pPr indent="0" lvl="0" marL="0" rtl="0" algn="l">
-              <a:spcBef>
-                <a:spcPts val="0"/>
-              </a:spcBef>
-              <a:spcAft>
-                <a:spcPts val="0"/>
-              </a:spcAft>
-              <a:buNone/>
-            </a:pPr>
-            <a:r>
-              <a:rPr lang="en"/>
-              <a:t>The Adapter: PhysicsBody</a:t>
-            </a:r>
-            <a:endParaRPr/>
-          </a:p>
-        </p:txBody>
-      </p:sp>
-      <p:sp>
-        <p:nvSpPr>
-          <p:cNvPr id="293" name="Google Shape;293;p45"/>
-          <p:cNvSpPr txBox="1"/>
-          <p:nvPr>
-            <p:ph type="title"/>
-          </p:nvPr>
-        </p:nvSpPr>
-        <p:spPr>
-          <a:xfrm>
-            <a:off x="311700" y="1152475"/>
-            <a:ext cx="3700000" cy="3500000"/>
-          </a:xfrm>
-          <a:prstGeom prst="rect">
-            <a:avLst/>
-          </a:prstGeom>
-        </p:spPr>
-        <p:txBody>
-          <a:bodyPr anchorCtr="0" anchor="t" bIns="91425" lIns="91425" spcFirstLastPara="1" rIns="91425" wrap="square" tIns="91425">
-            <a:normAutofit fontScale="90000"/>
-          </a:bodyPr>
-          <a:lstStyle/>
-          <a:p>
-            <a:pPr indent="-330200" lvl="0" marL="457200" rtl="0" algn="l">
-              <a:buClr>
-                <a:srgbClr val="DEE2E6"/>
-              </a:buClr>
-              <a:spcBef>
-                <a:spcPts val="0"/>
-              </a:spcBef>
-              <a:spcAft>
-                <a:spcPts val="0"/>
-              </a:spcAft>
-              <a:buSzPts val="1600"/>
-              <a:buChar char="●"/>
-            </a:pPr>
-            <a:r>
-              <a:rPr lang="en" sz="1600">
-                <a:solidFill>
-                  <a:srgbClr val="DEE2E6"/>
-                </a:solidFill>
-              </a:rPr>
-              <a:t>Wraps a B2BodyId</a:t>
-            </a:r>
-            <a:endParaRPr/>
-          </a:p>
-          <a:p>
-            <a:pPr indent="-330200" lvl="0" marL="457200" rtl="0" algn="l">
-              <a:buClr>
-                <a:srgbClr val="DEE2E6"/>
-              </a:buClr>
-              <a:spcBef>
-                <a:spcPts val="0"/>
-              </a:spcBef>
-              <a:spcAft>
-                <a:spcPts val="0"/>
-              </a:spcAft>
-              <a:buSzPts val="1600"/>
-              <a:buChar char="●"/>
-            </a:pPr>
-            <a:r>
-              <a:rPr lang="en" sz="1600">
-                <a:solidFill>
-                  <a:srgbClr val="DEE2E6"/>
-                </a:solidFill>
-              </a:rPr>
-              <a:t>Position in pixels</a:t>
-            </a:r>
-            <a:endParaRPr/>
-          </a:p>
-          <a:p>
-            <a:pPr indent="-330200" lvl="0" marL="457200" rtl="0" algn="l">
-              <a:buClr>
-                <a:srgbClr val="DEE2E6"/>
-              </a:buClr>
-              <a:spcBef>
-                <a:spcPts val="0"/>
-              </a:spcBef>
-              <a:spcAft>
-                <a:spcPts val="0"/>
-              </a:spcAft>
-              <a:buSzPts val="1600"/>
-              <a:buChar char="●"/>
-            </a:pPr>
-            <a:r>
-              <a:rPr lang="en" sz="1600">
-                <a:solidFill>
-                  <a:srgbClr val="DEE2E6"/>
-                </a:solidFill>
-              </a:rPr>
-              <a:t>Rotation that turns like SpriteBatch</a:t>
-            </a:r>
-            <a:endParaRPr/>
-          </a:p>
-          <a:p>
-            <a:pPr indent="-330200" lvl="0" marL="457200" rtl="0" algn="l">
-              <a:buClr>
-                <a:srgbClr val="DEE2E6"/>
-              </a:buClr>
-              <a:spcBef>
-                <a:spcPts val="0"/>
-              </a:spcBef>
-              <a:spcAft>
-                <a:spcPts val="0"/>
-              </a:spcAft>
-              <a:buSzPts val="1600"/>
-              <a:buChar char="●"/>
-            </a:pPr>
-            <a:r>
-              <a:rPr lang="en" sz="1600">
-                <a:solidFill>
-                  <a:srgbClr val="DEE2E6"/>
-                </a:solidFill>
-              </a:rPr>
-              <a:t>Owner: the entity it belongs to</a:t>
-            </a:r>
-            <a:endParaRPr/>
-          </a:p>
-          <a:p>
-            <a:pPr indent="-330200" lvl="0" marL="457200" rtl="0" algn="l">
-              <a:buClr>
-                <a:srgbClr val="DEE2E6"/>
-              </a:buClr>
-              <a:spcBef>
-                <a:spcPts val="0"/>
-              </a:spcBef>
-              <a:spcAft>
-                <a:spcPts val="0"/>
-              </a:spcAft>
-              <a:buSzPts val="1600"/>
-              <a:buChar char="●"/>
-            </a:pPr>
-            <a:r>
-              <a:rPr lang="en" sz="1600">
-                <a:solidFill>
-                  <a:srgbClr val="DEE2E6"/>
-                </a:solidFill>
-              </a:rPr>
-              <a:t>Units: every conversion, in one place</a:t>
-            </a:r>
-            <a:endParaRPr/>
-          </a:p>
-        </p:txBody>
-      </p:sp>
-      <p:sp>
-        <p:nvSpPr>
-          <p:cNvPr id="141" name="Google Shape;141;p23"/>
-          <p:cNvSpPr txBox="1"/>
-          <p:nvPr>
-            <p:ph idx="2" type="body"/>
-          </p:nvPr>
-        </p:nvSpPr>
-        <p:spPr>
-          <a:xfrm>
-            <a:off x="4150000" y="1152475"/>
-            <a:ext cx="4750000" cy="3600000"/>
-          </a:xfrm>
-          <a:prstGeom prst="rect">
-            <a:avLst/>
-          </a:prstGeom>
-        </p:spPr>
-        <p:txBody>
-          <a:bodyPr anchorCtr="0" anchor="t" bIns="91425" lIns="91425" spcFirstLastPara="1" rIns="91425" wrap="square" tIns="91425">
-            <a:noAutofit/>
-          </a:bodyPr>
-          <a:lstStyle/>
-          <a:p>
-            <a:pPr indent="0" lvl="0" marL="0" rtl="0" algn="l">
-              <a:lnSpc>
-                <a:spcPct val="115000"/>
-              </a:lnSpc>
-              <a:spcBef>
-                <a:spcPts val="0"/>
-              </a:spcBef>
-              <a:spcAft>
-                <a:spcPts val="0"/>
-              </a:spcAft>
-              <a:buNone/>
-            </a:pPr>
-            <a:r>
-              <a:rPr lang="en" sz="1000">
-                <a:highlight>
-                  <a:schemeClr val="dk2"/>
-                </a:highlight>
-                <a:latin typeface="Consolas"/>
-                <a:ea typeface="Consolas"/>
-                <a:cs typeface="Consolas"/>
-                <a:sym typeface="Consolas"/>
-              </a:rPr>
-              <a:t>public sealed class PhysicsBody</a:t>
-            </a:r>
-            <a:endParaRPr sz="1000">
-              <a:solidFill>
-                <a:srgbClr val="CCCCCC"/>
-              </a:solidFill>
-              <a:highlight>
-                <a:schemeClr val="dk2"/>
-              </a:highlight>
-              <a:latin typeface="Consolas"/>
-              <a:ea typeface="Consolas"/>
-              <a:cs typeface="Consolas"/>
-              <a:sym typeface="Consolas"/>
-            </a:endParaRPr>
-          </a:p>
-          <a:p>
-            <a:pPr indent="0" lvl="0" marL="0" rtl="0" algn="l">
-              <a:lnSpc>
-                <a:spcPct val="115000"/>
-              </a:lnSpc>
-              <a:spcBef>
-                <a:spcPts val="0"/>
-              </a:spcBef>
-              <a:spcAft>
-                <a:spcPts val="0"/>
-              </a:spcAft>
-              <a:buNone/>
-            </a:pPr>
-            <a:r>
-              <a:rPr lang="en" sz="1000">
-                <a:highlight>
-                  <a:schemeClr val="dk2"/>
-                </a:highlight>
-                <a:latin typeface="Consolas"/>
-                <a:ea typeface="Consolas"/>
-                <a:cs typeface="Consolas"/>
-                <a:sym typeface="Consolas"/>
-              </a:rPr>
-              <a:t>{</a:t>
-            </a:r>
-            <a:endParaRPr sz="1000">
-              <a:solidFill>
-                <a:srgbClr val="CCCCCC"/>
-              </a:solidFill>
-              <a:highlight>
-                <a:schemeClr val="dk2"/>
-              </a:highlight>
-              <a:latin typeface="Consolas"/>
-              <a:ea typeface="Consolas"/>
-              <a:cs typeface="Consolas"/>
-              <a:sym typeface="Consolas"/>
-            </a:endParaRPr>
-          </a:p>
-          <a:p>
-            <a:pPr indent="0" lvl="0" marL="0" rtl="0" algn="l">
-              <a:lnSpc>
-                <a:spcPct val="115000"/>
-              </a:lnSpc>
-              <a:spcBef>
-                <a:spcPts val="0"/>
-              </a:spcBef>
-              <a:spcAft>
-                <a:spcPts val="0"/>
-              </a:spcAft>
-              <a:buNone/>
-            </a:pPr>
-            <a:r>
-              <a:rPr lang="en" sz="1000">
-                <a:highlight>
-                  <a:schemeClr val="dk2"/>
-                </a:highlight>
-                <a:latin typeface="Consolas"/>
-                <a:ea typeface="Consolas"/>
-                <a:cs typeface="Consolas"/>
-                <a:sym typeface="Consolas"/>
-              </a:rPr>
-              <a:t>    internal B2BodyId Id { get; }</a:t>
-            </a:r>
-            <a:endParaRPr sz="1000">
-              <a:solidFill>
-                <a:srgbClr val="CCCCCC"/>
-              </a:solidFill>
-              <a:highlight>
-                <a:schemeClr val="dk2"/>
-              </a:highlight>
-              <a:latin typeface="Consolas"/>
-              <a:ea typeface="Consolas"/>
-              <a:cs typeface="Consolas"/>
-              <a:sym typeface="Consolas"/>
-            </a:endParaRPr>
-          </a:p>
-          <a:p>
-            <a:pPr indent="0" lvl="0" marL="0" rtl="0" algn="l">
-              <a:lnSpc>
-                <a:spcPct val="115000"/>
-              </a:lnSpc>
-              <a:spcBef>
-                <a:spcPts val="0"/>
-              </a:spcBef>
-              <a:spcAft>
-                <a:spcPts val="0"/>
-              </a:spcAft>
-              <a:buNone/>
-            </a:pPr>
-            <a:r>
-              <a:rPr lang="en" sz="1000">
-                <a:highlight>
-                  <a:schemeClr val="dk2"/>
-                </a:highlight>
-                <a:latin typeface="Consolas"/>
-                <a:ea typeface="Consolas"/>
-                <a:cs typeface="Consolas"/>
-                <a:sym typeface="Consolas"/>
-              </a:rPr>
-              <a:t>    public object Owner { get; }</a:t>
-            </a:r>
-            <a:endParaRPr sz="1000">
-              <a:solidFill>
-                <a:srgbClr val="CCCCCC"/>
-              </a:solidFill>
-              <a:highlight>
-                <a:schemeClr val="dk2"/>
-              </a:highlight>
-              <a:latin typeface="Consolas"/>
-              <a:ea typeface="Consolas"/>
-              <a:cs typeface="Consolas"/>
-              <a:sym typeface="Consolas"/>
-            </a:endParaRPr>
-          </a:p>
-          <a:p>
-            <a:pPr indent="0" lvl="0" marL="0" rtl="0" algn="l">
-              <a:lnSpc>
-                <a:spcPct val="115000"/>
-              </a:lnSpc>
-              <a:spcBef>
-                <a:spcPts val="0"/>
-              </a:spcBef>
-              <a:spcAft>
-                <a:spcPts val="0"/>
-              </a:spcAft>
-              <a:buNone/>
-            </a:pPr>
-            <a:r>
-              <a:rPr lang="en" sz="1000">
-                <a:highlight>
-                  <a:schemeClr val="dk2"/>
-                </a:highlight>
-                <a:latin typeface="Consolas"/>
-                <a:ea typeface="Consolas"/>
-                <a:cs typeface="Consolas"/>
-                <a:sym typeface="Consolas"/>
-              </a:rPr>
-              <a:t/>
-            </a:r>
-            <a:endParaRPr sz="1000">
-              <a:solidFill>
-                <a:srgbClr val="CCCCCC"/>
-              </a:solidFill>
-              <a:highlight>
-                <a:schemeClr val="dk2"/>
-              </a:highlight>
-              <a:latin typeface="Consolas"/>
-              <a:ea typeface="Consolas"/>
-              <a:cs typeface="Consolas"/>
-              <a:sym typeface="Consolas"/>
-            </a:endParaRPr>
-          </a:p>
-          <a:p>
-            <a:pPr indent="0" lvl="0" marL="0" rtl="0" algn="l">
-              <a:lnSpc>
-                <a:spcPct val="115000"/>
-              </a:lnSpc>
-              <a:spcBef>
-                <a:spcPts val="0"/>
-              </a:spcBef>
-              <a:spcAft>
-                <a:spcPts val="0"/>
-              </a:spcAft>
-              <a:buNone/>
-            </a:pPr>
-            <a:r>
-              <a:rPr lang="en" sz="1000">
-                <a:highlight>
-                  <a:schemeClr val="dk2"/>
-                </a:highlight>
-                <a:latin typeface="Consolas"/>
-                <a:ea typeface="Consolas"/>
-                <a:cs typeface="Consolas"/>
-                <a:sym typeface="Consolas"/>
-              </a:rPr>
-              <a:t>    public Vector2 Position =&gt;</a:t>
-            </a:r>
-            <a:endParaRPr sz="1000">
-              <a:solidFill>
-                <a:srgbClr val="CCCCCC"/>
-              </a:solidFill>
-              <a:highlight>
-                <a:schemeClr val="dk2"/>
-              </a:highlight>
-              <a:latin typeface="Consolas"/>
-              <a:ea typeface="Consolas"/>
-              <a:cs typeface="Consolas"/>
-              <a:sym typeface="Consolas"/>
-            </a:endParaRPr>
-          </a:p>
-          <a:p>
-            <a:pPr indent="0" lvl="0" marL="0" rtl="0" algn="l">
-              <a:lnSpc>
-                <a:spcPct val="115000"/>
-              </a:lnSpc>
-              <a:spcBef>
-                <a:spcPts val="0"/>
-              </a:spcBef>
-              <a:spcAft>
-                <a:spcPts val="0"/>
-              </a:spcAft>
-              <a:buNone/>
-            </a:pPr>
-            <a:r>
-              <a:rPr lang="en" sz="1000">
-                <a:highlight>
-                  <a:schemeClr val="dk2"/>
-                </a:highlight>
-                <a:latin typeface="Consolas"/>
-                <a:ea typeface="Consolas"/>
-                <a:cs typeface="Consolas"/>
-                <a:sym typeface="Consolas"/>
-              </a:rPr>
-              <a:t>        Units.ToPixels(b2Body_GetPosition(Id));</a:t>
-            </a:r>
-            <a:endParaRPr sz="1000">
-              <a:solidFill>
-                <a:srgbClr val="CCCCCC"/>
-              </a:solidFill>
-              <a:highlight>
-                <a:schemeClr val="dk2"/>
-              </a:highlight>
-              <a:latin typeface="Consolas"/>
-              <a:ea typeface="Consolas"/>
-              <a:cs typeface="Consolas"/>
-              <a:sym typeface="Consolas"/>
-            </a:endParaRPr>
-          </a:p>
-          <a:p>
-            <a:pPr indent="0" lvl="0" marL="0" rtl="0" algn="l">
-              <a:lnSpc>
-                <a:spcPct val="115000"/>
-              </a:lnSpc>
-              <a:spcBef>
-                <a:spcPts val="0"/>
-              </a:spcBef>
-              <a:spcAft>
-                <a:spcPts val="0"/>
-              </a:spcAft>
-              <a:buNone/>
-            </a:pPr>
-            <a:r>
-              <a:rPr lang="en" sz="1000">
-                <a:highlight>
-                  <a:schemeClr val="dk2"/>
-                </a:highlight>
-                <a:latin typeface="Consolas"/>
-                <a:ea typeface="Consolas"/>
-                <a:cs typeface="Consolas"/>
-                <a:sym typeface="Consolas"/>
-              </a:rPr>
-              <a:t/>
-            </a:r>
-            <a:endParaRPr sz="1000">
-              <a:solidFill>
-                <a:srgbClr val="CCCCCC"/>
-              </a:solidFill>
-              <a:highlight>
-                <a:schemeClr val="dk2"/>
-              </a:highlight>
-              <a:latin typeface="Consolas"/>
-              <a:ea typeface="Consolas"/>
-              <a:cs typeface="Consolas"/>
-              <a:sym typeface="Consolas"/>
-            </a:endParaRPr>
-          </a:p>
-          <a:p>
-            <a:pPr indent="0" lvl="0" marL="0" rtl="0" algn="l">
-              <a:lnSpc>
-                <a:spcPct val="115000"/>
-              </a:lnSpc>
-              <a:spcBef>
-                <a:spcPts val="0"/>
-              </a:spcBef>
-              <a:spcAft>
-                <a:spcPts val="0"/>
-              </a:spcAft>
-              <a:buNone/>
-            </a:pPr>
-            <a:r>
-              <a:rPr lang="en" sz="1000">
-                <a:highlight>
-                  <a:schemeClr val="dk2"/>
-                </a:highlight>
-                <a:latin typeface="Consolas"/>
-                <a:ea typeface="Consolas"/>
-                <a:cs typeface="Consolas"/>
-                <a:sym typeface="Consolas"/>
-              </a:rPr>
-              <a:t>    public float Rotation</a:t>
-            </a:r>
-            <a:endParaRPr sz="1000">
-              <a:solidFill>
-                <a:srgbClr val="CCCCCC"/>
-              </a:solidFill>
-              <a:highlight>
-                <a:schemeClr val="dk2"/>
-              </a:highlight>
-              <a:latin typeface="Consolas"/>
-              <a:ea typeface="Consolas"/>
-              <a:cs typeface="Consolas"/>
-              <a:sym typeface="Consolas"/>
-            </a:endParaRPr>
-          </a:p>
-          <a:p>
-            <a:pPr indent="0" lvl="0" marL="0" rtl="0" algn="l">
-              <a:lnSpc>
-                <a:spcPct val="115000"/>
-              </a:lnSpc>
-              <a:spcBef>
-                <a:spcPts val="0"/>
-              </a:spcBef>
-              <a:spcAft>
-                <a:spcPts val="0"/>
-              </a:spcAft>
-              <a:buNone/>
-            </a:pPr>
-            <a:r>
-              <a:rPr lang="en" sz="1000">
-                <a:highlight>
-                  <a:schemeClr val="dk2"/>
-                </a:highlight>
-                <a:latin typeface="Consolas"/>
-                <a:ea typeface="Consolas"/>
-                <a:cs typeface="Consolas"/>
-                <a:sym typeface="Consolas"/>
-              </a:rPr>
-              <a:t>    {</a:t>
-            </a:r>
-            <a:endParaRPr sz="1000">
-              <a:solidFill>
-                <a:srgbClr val="CCCCCC"/>
-              </a:solidFill>
-              <a:highlight>
-                <a:schemeClr val="dk2"/>
-              </a:highlight>
-              <a:latin typeface="Consolas"/>
-              <a:ea typeface="Consolas"/>
-              <a:cs typeface="Consolas"/>
-              <a:sym typeface="Consolas"/>
-            </a:endParaRPr>
-          </a:p>
-          <a:p>
-            <a:pPr indent="0" lvl="0" marL="0" rtl="0" algn="l">
-              <a:lnSpc>
-                <a:spcPct val="115000"/>
-              </a:lnSpc>
-              <a:spcBef>
-                <a:spcPts val="0"/>
-              </a:spcBef>
-              <a:spcAft>
-                <a:spcPts val="0"/>
-              </a:spcAft>
-              <a:buNone/>
-            </a:pPr>
-            <a:r>
-              <a:rPr lang="en" sz="1000">
-                <a:highlight>
-                  <a:schemeClr val="dk2"/>
-                </a:highlight>
-                <a:latin typeface="Consolas"/>
-                <a:ea typeface="Consolas"/>
-                <a:cs typeface="Consolas"/>
-                <a:sym typeface="Consolas"/>
-              </a:rPr>
-              <a:t>        get</a:t>
-            </a:r>
-            <a:endParaRPr sz="1000">
-              <a:solidFill>
-                <a:srgbClr val="CCCCCC"/>
-              </a:solidFill>
-              <a:highlight>
-                <a:schemeClr val="dk2"/>
-              </a:highlight>
-              <a:latin typeface="Consolas"/>
-              <a:ea typeface="Consolas"/>
-              <a:cs typeface="Consolas"/>
-              <a:sym typeface="Consolas"/>
-            </a:endParaRPr>
-          </a:p>
-          <a:p>
-            <a:pPr indent="0" lvl="0" marL="0" rtl="0" algn="l">
-              <a:lnSpc>
-                <a:spcPct val="115000"/>
-              </a:lnSpc>
-              <a:spcBef>
-                <a:spcPts val="0"/>
-              </a:spcBef>
-              <a:spcAft>
-                <a:spcPts val="0"/>
-              </a:spcAft>
-              <a:buNone/>
-            </a:pPr>
-            <a:r>
-              <a:rPr lang="en" sz="1000">
-                <a:highlight>
-                  <a:schemeClr val="dk2"/>
-                </a:highlight>
-                <a:latin typeface="Consolas"/>
-                <a:ea typeface="Consolas"/>
-                <a:cs typeface="Consolas"/>
-                <a:sym typeface="Consolas"/>
-              </a:rPr>
-              <a:t>        {</a:t>
-            </a:r>
-            <a:endParaRPr sz="1000">
-              <a:solidFill>
-                <a:srgbClr val="CCCCCC"/>
-              </a:solidFill>
-              <a:highlight>
-                <a:schemeClr val="dk2"/>
-              </a:highlight>
-              <a:latin typeface="Consolas"/>
-              <a:ea typeface="Consolas"/>
-              <a:cs typeface="Consolas"/>
-              <a:sym typeface="Consolas"/>
-            </a:endParaRPr>
-          </a:p>
-          <a:p>
-            <a:pPr indent="0" lvl="0" marL="0" rtl="0" algn="l">
-              <a:lnSpc>
-                <a:spcPct val="115000"/>
-              </a:lnSpc>
-              <a:spcBef>
-                <a:spcPts val="0"/>
-              </a:spcBef>
-              <a:spcAft>
-                <a:spcPts val="0"/>
-              </a:spcAft>
-              <a:buNone/>
-            </a:pPr>
-            <a:r>
-              <a:rPr lang="en" sz="1000">
-                <a:highlight>
-                  <a:schemeClr val="dk2"/>
-                </a:highlight>
-                <a:latin typeface="Consolas"/>
-                <a:ea typeface="Consolas"/>
-                <a:cs typeface="Consolas"/>
-                <a:sym typeface="Consolas"/>
-              </a:rPr>
-              <a:t>            B2Rot r = b2Body_GetRotation(Id);</a:t>
-            </a:r>
-            <a:endParaRPr sz="1000">
-              <a:solidFill>
-                <a:srgbClr val="CCCCCC"/>
-              </a:solidFill>
-              <a:highlight>
-                <a:schemeClr val="dk2"/>
-              </a:highlight>
-              <a:latin typeface="Consolas"/>
-              <a:ea typeface="Consolas"/>
-              <a:cs typeface="Consolas"/>
-              <a:sym typeface="Consolas"/>
-            </a:endParaRPr>
-          </a:p>
-          <a:p>
-            <a:pPr indent="0" lvl="0" marL="0" rtl="0" algn="l">
-              <a:lnSpc>
-                <a:spcPct val="115000"/>
-              </a:lnSpc>
-              <a:spcBef>
-                <a:spcPts val="0"/>
-              </a:spcBef>
-              <a:spcAft>
-                <a:spcPts val="0"/>
-              </a:spcAft>
-              <a:buNone/>
-            </a:pPr>
-            <a:r>
-              <a:rPr lang="en" sz="1000">
-                <a:highlight>
-                  <a:schemeClr val="dk2"/>
-                </a:highlight>
-                <a:latin typeface="Consolas"/>
-                <a:ea typeface="Consolas"/>
-                <a:cs typeface="Consolas"/>
-                <a:sym typeface="Consolas"/>
-              </a:rPr>
-              <a:t>            return -b2Rot_GetAngle(in r);</a:t>
-            </a:r>
-            <a:endParaRPr sz="1000">
-              <a:solidFill>
-                <a:srgbClr val="CCCCCC"/>
-              </a:solidFill>
-              <a:highlight>
-                <a:schemeClr val="dk2"/>
-              </a:highlight>
-              <a:latin typeface="Consolas"/>
-              <a:ea typeface="Consolas"/>
-              <a:cs typeface="Consolas"/>
-              <a:sym typeface="Consolas"/>
-            </a:endParaRPr>
-          </a:p>
-          <a:p>
-            <a:pPr indent="0" lvl="0" marL="0" rtl="0" algn="l">
-              <a:lnSpc>
-                <a:spcPct val="115000"/>
-              </a:lnSpc>
-              <a:spcBef>
-                <a:spcPts val="0"/>
-              </a:spcBef>
-              <a:spcAft>
-                <a:spcPts val="0"/>
-              </a:spcAft>
-              <a:buNone/>
-            </a:pPr>
-            <a:r>
-              <a:rPr lang="en" sz="1000">
-                <a:highlight>
-                  <a:schemeClr val="dk2"/>
-                </a:highlight>
-                <a:latin typeface="Consolas"/>
-                <a:ea typeface="Consolas"/>
-                <a:cs typeface="Consolas"/>
-                <a:sym typeface="Consolas"/>
-              </a:rPr>
-              <a:t>        }</a:t>
-            </a:r>
-            <a:endParaRPr sz="1000">
-              <a:solidFill>
-                <a:srgbClr val="CCCCCC"/>
-              </a:solidFill>
-              <a:highlight>
-                <a:schemeClr val="dk2"/>
-              </a:highlight>
-              <a:latin typeface="Consolas"/>
-              <a:ea typeface="Consolas"/>
-              <a:cs typeface="Consolas"/>
-              <a:sym typeface="Consolas"/>
-            </a:endParaRPr>
-          </a:p>
-          <a:p>
-            <a:pPr indent="0" lvl="0" marL="0" rtl="0" algn="l">
-              <a:lnSpc>
-                <a:spcPct val="115000"/>
-              </a:lnSpc>
-              <a:spcBef>
-                <a:spcPts val="0"/>
-              </a:spcBef>
-              <a:spcAft>
-                <a:spcPts val="0"/>
-              </a:spcAft>
-              <a:buNone/>
-            </a:pPr>
-            <a:r>
-              <a:rPr lang="en" sz="1000">
-                <a:highlight>
-                  <a:schemeClr val="dk2"/>
-                </a:highlight>
-                <a:latin typeface="Consolas"/>
-                <a:ea typeface="Consolas"/>
-                <a:cs typeface="Consolas"/>
-                <a:sym typeface="Consolas"/>
-              </a:rPr>
-              <a:t>    }</a:t>
-            </a:r>
-            <a:endParaRPr sz="1000">
-              <a:solidFill>
-                <a:srgbClr val="CCCCCC"/>
-              </a:solidFill>
-              <a:highlight>
-                <a:schemeClr val="dk2"/>
-              </a:highlight>
-              <a:latin typeface="Consolas"/>
-              <a:ea typeface="Consolas"/>
-              <a:cs typeface="Consolas"/>
-              <a:sym typeface="Consolas"/>
-            </a:endParaRPr>
-          </a:p>
-          <a:p>
-            <a:pPr indent="0" lvl="0" marL="0" rtl="0" algn="l">
-              <a:lnSpc>
-                <a:spcPct val="115000"/>
-              </a:lnSpc>
-              <a:spcBef>
-                <a:spcPts val="0"/>
-              </a:spcBef>
-              <a:spcAft>
-                <a:spcPts val="0"/>
-              </a:spcAft>
-              <a:buNone/>
-            </a:pPr>
-            <a:r>
-              <a:rPr lang="en" sz="1000">
-                <a:highlight>
-                  <a:schemeClr val="dk2"/>
-                </a:highlight>
-                <a:latin typeface="Consolas"/>
-                <a:ea typeface="Consolas"/>
-                <a:cs typeface="Consolas"/>
-                <a:sym typeface="Consolas"/>
-              </a:rPr>
-              <a:t>}</a:t>
-            </a:r>
-            <a:endParaRPr sz="1000">
-              <a:solidFill>
-                <a:srgbClr val="CCCCCC"/>
-              </a:solidFill>
-              <a:highlight>
-                <a:schemeClr val="dk2"/>
-              </a:highlight>
-              <a:latin typeface="Consolas"/>
-              <a:ea typeface="Consolas"/>
-              <a:cs typeface="Consolas"/>
-              <a:sym typeface="Consolas"/>
-            </a:endParaRPr>
-          </a:p>
-        </p:txBody>
-      </p:sp>
-    </p:spTree>
-  </p:cSld>
-  <p:clrMapOvr>
-    <a:masterClrMapping/>
-  </p:clrMapOvr>
-</p:sld>
-</file>
-
 <file path=ppt/slides/slide12.xml><?xml version="1.0" encoding="utf-8"?>
 <p:sld xmlns:a="http://schemas.openxmlformats.org/drawingml/2006/main" xmlns:p="http://schemas.openxmlformats.org/presentationml/2006/main" xmlns:r="http://schemas.openxmlformats.org/officeDocument/2006/relationships">
   <p:cSld>
@@ -7613,7 +7099,7 @@
             </a:pPr>
             <a:r>
               <a:rPr lang="en"/>
-              <a:t>The Facade: PhysicsWorld</a:t>
+              <a:t>The Adapter: PhysicsBody</a:t>
             </a:r>
             <a:endParaRPr/>
           </a:p>
@@ -7661,7 +7147,7 @@
                   <a:srgbClr val="DEE2E6"/>
                 </a:solidFill>
               </a:rPr>
-              <a:t>The game reads like our game again</a:t>
+              <a:t>Wraps a B2BodyId</a:t>
             </a:r>
             <a:endParaRPr/>
           </a:p>
@@ -7685,79 +7171,7 @@
                   <a:srgbClr val="DEE2E6"/>
                 </a:solidFill>
               </a:rPr>
-              <a:t>Gains</a:t>
-            </a:r>
-            <a:endParaRPr/>
-          </a:p>
-          <a:p>
-            <a:pPr indent="-317500" lvl="1" marL="914400" rtl="0" algn="l">
-              <a:buClr>
-                <a:srgbClr val="6C757D"/>
-              </a:buClr>
-              <a:spcBef>
-                <a:spcPts val="0"/>
-              </a:spcBef>
-              <a:spcAft>
-                <a:spcPts val="0"/>
-              </a:spcAft>
-              <a:buSzPts val="1400"/>
-              <a:buChar char="○"/>
-            </a:pPr>
-            <a:r>
-              <a:rPr lang="en" sz="1400">
-                <a:solidFill>
-                  <a:srgbClr val="6C757D"/>
-                </a:solidFill>
-              </a:rPr>
-              <a:t>One place to change</a:t>
-            </a:r>
-            <a:endParaRPr/>
-          </a:p>
-          <a:p>
-            <a:pPr indent="-317500" lvl="1" marL="914400" rtl="0" algn="l">
-              <a:buClr>
-                <a:srgbClr val="6C757D"/>
-              </a:buClr>
-              <a:spcBef>
-                <a:spcPts val="0"/>
-              </a:spcBef>
-              <a:spcAft>
-                <a:spcPts val="0"/>
-              </a:spcAft>
-              <a:buSzPts val="1400"/>
-              <a:buChar char="○"/>
-            </a:pPr>
-            <a:r>
-              <a:rPr lang="en" sz="1400">
-                <a:solidFill>
-                  <a:srgbClr val="6C757D"/>
-                </a:solidFill>
-              </a:rPr>
-              <a:t>Our language: pixels, not metres</a:t>
-            </a:r>
-            <a:endParaRPr/>
-          </a:p>
-          <a:p>
-            <a:pPr indent="-317500" lvl="1" marL="914400" rtl="0" algn="l">
-              <a:buClr>
-                <a:srgbClr val="6C757D"/>
-              </a:buClr>
-              <a:spcBef>
-                <a:spcPts val="0"/>
-              </a:spcBef>
-              <a:spcAft>
-                <a:spcPts val="0"/>
-              </a:spcAft>
-              <a:buSzPts val="1400"/>
-              <a:buChar char="○"/>
-            </a:pPr>
-            <a:r>
-              <a:rPr lang="en" sz="1400">
-                <a:solidFill>
-                  <a:srgbClr val="6C757D"/>
-                </a:solidFill>
-              </a:rPr>
-              <a:t>A smaller surface</a:t>
+              <a:t>Position in pixels</a:t>
             </a:r>
             <a:endParaRPr/>
           </a:p>
@@ -7781,7 +7195,55 @@
                   <a:srgbClr val="DEE2E6"/>
                 </a:solidFill>
               </a:rPr>
-              <a:t>Cost: every new feature goes through the facade first</a:t>
+              <a:t>Rotation that turns like SpriteBatch</a:t>
+            </a:r>
+            <a:endParaRPr/>
+          </a:p>
+          <a:p>
+            <a:pPr indent="-330200" lvl="0" marL="457200" rtl="0" algn="l">
+              <a:buClr>
+                <a:srgbClr val="DEE2E6"/>
+              </a:buClr>
+              <a:spcBef>
+                <a:spcPts val="0"/>
+              </a:spcBef>
+              <a:spcAft>
+                <a:spcPts val="0"/>
+              </a:spcAft>
+              <a:buSzPts val="1600"/>
+              <a:buChar char="●"/>
+            </a:pPr>
+            <a:r>
+              <a:rPr lang="en" sz="1600">
+                <a:solidFill>
+                  <a:srgbClr val="DEE2E6"/>
+                </a:solidFill>
+              </a:rPr>
+              <a:t>Owner: the entity it belongs to</a:t>
+            </a:r>
+            <a:endParaRPr/>
+          </a:p>
+          <a:p>
+            <a:pPr indent="-330200" lvl="0" marL="457200" rtl="0" algn="l">
+              <a:buClr>
+                <a:srgbClr val="DEE2E6"/>
+              </a:buClr>
+              <a:spcBef>
+                <a:spcPts val="0"/>
+              </a:spcBef>
+              <a:spcAft>
+                <a:spcPts val="0"/>
+              </a:spcAft>
+              <a:buSzPts val="1600"/>
+              <a:buChar char="●"/>
+            </a:pPr>
+            <a:r>
+              <a:rPr lang="en" sz="1600">
+                <a:solidFill>
+                  <a:srgbClr val="DEE2E6"/>
+                </a:solidFill>
+              </a:rPr>
+              <a:t>Units: every conversion, in one place</a:t>
             </a:r>
             <a:endParaRPr/>
           </a:p>
@@ -7832,7 +7294,7 @@
                 <a:cs typeface="Consolas"/>
                 <a:sym typeface="Consolas"/>
               </a:rPr>
-              <a:t>// Units.cs</a:t>
+              <a:t>public sealed class PhysicsBody</a:t>
             </a:r>
             <a:endParaRPr sz="1000">
               <a:solidFill>
@@ -7870,7 +7332,7 @@
                 <a:cs typeface="Consolas"/>
                 <a:sym typeface="Consolas"/>
               </a:rPr>
-              <a:t>public static B2Vec2 ToMeters(Vector2 pixels) =&gt;</a:t>
+              <a:t>{</a:t>
             </a:r>
             <a:endParaRPr sz="1000">
               <a:solidFill>
@@ -7908,7 +7370,7 @@
                 <a:cs typeface="Consolas"/>
                 <a:sym typeface="Consolas"/>
               </a:rPr>
-              <a:t>    new(pixels.X / PixelsPerMeter,</a:t>
+              <a:t>    internal B2BodyId Id { get; }</a:t>
             </a:r>
             <a:endParaRPr sz="1000">
               <a:solidFill>
@@ -7946,7 +7408,7 @@
                 <a:cs typeface="Consolas"/>
                 <a:sym typeface="Consolas"/>
               </a:rPr>
-              <a:t>        -pixels.Y / PixelsPerMeter);</a:t>
+              <a:t>    public object Owner { get; }</a:t>
             </a:r>
             <a:endParaRPr sz="1000">
               <a:solidFill>
@@ -8022,7 +7484,7 @@
                 <a:cs typeface="Consolas"/>
                 <a:sym typeface="Consolas"/>
               </a:rPr>
-              <a:t>// Block.cs</a:t>
+              <a:t>    public Vector2 Position =&gt;</a:t>
             </a:r>
             <a:endParaRPr sz="1000">
               <a:solidFill>
@@ -8060,7 +7522,7 @@
                 <a:cs typeface="Consolas"/>
                 <a:sym typeface="Consolas"/>
               </a:rPr>
-              <a:t>public Block(PhysicsWorld world, Vector2 center,</a:t>
+              <a:t>        Units.ToPixels(b2Body_GetPosition(Id));</a:t>
             </a:r>
             <a:endParaRPr sz="1000">
               <a:solidFill>
@@ -8098,7 +7560,7 @@
                 <a:cs typeface="Consolas"/>
                 <a:sym typeface="Consolas"/>
               </a:rPr>
-              <a:t>    Vector2 size, float rotation,</a:t>
+              <a:t/>
             </a:r>
             <a:endParaRPr sz="1000">
               <a:solidFill>
@@ -8136,7 +7598,7 @@
                 <a:cs typeface="Consolas"/>
                 <a:sym typeface="Consolas"/>
               </a:rPr>
-              <a:t>    PhysicsMaterial material, TextureRegion sprite)</a:t>
+              <a:t>    public float Rotation</a:t>
             </a:r>
             <a:endParaRPr sz="1000">
               <a:solidFill>
@@ -8174,7 +7636,7 @@
                 <a:cs typeface="Consolas"/>
                 <a:sym typeface="Consolas"/>
               </a:rPr>
-              <a:t>    : base(sprite)</a:t>
+              <a:t>    {</a:t>
             </a:r>
             <a:endParaRPr sz="1000">
               <a:solidFill>
@@ -8212,7 +7674,7 @@
                 <a:cs typeface="Consolas"/>
                 <a:sym typeface="Consolas"/>
               </a:rPr>
-              <a:t>{</a:t>
+              <a:t>        get</a:t>
             </a:r>
             <a:endParaRPr sz="1000">
               <a:solidFill>
@@ -8250,7 +7712,7 @@
                 <a:cs typeface="Consolas"/>
                 <a:sym typeface="Consolas"/>
               </a:rPr>
-              <a:t>    Body = world.CreateBox(center, size,</a:t>
+              <a:t>        {</a:t>
             </a:r>
             <a:endParaRPr sz="1000">
               <a:solidFill>
@@ -8288,7 +7750,7 @@
                 <a:cs typeface="Consolas"/>
                 <a:sym typeface="Consolas"/>
               </a:rPr>
-              <a:t>        rotation, material, this);</a:t>
+              <a:t>            B2Rot r = b2Body_GetRotation(Id);</a:t>
             </a:r>
             <a:endParaRPr sz="1000">
               <a:solidFill>
@@ -8326,7 +7788,7 @@
                 <a:cs typeface="Consolas"/>
                 <a:sym typeface="Consolas"/>
               </a:rPr>
-              <a:t>}</a:t>
+              <a:t>            return -b2Rot_GetAngle(in r);</a:t>
             </a:r>
             <a:endParaRPr sz="1000">
               <a:solidFill>
@@ -8341,6 +7803,120 @@
               <a:sym typeface="Consolas"/>
             </a:endParaRPr>
           </a:p>
+          <a:p>
+            <a:pPr indent="0" lvl="0" marL="0" rtl="0" algn="l">
+              <a:lnSpc>
+                <a:spcPct val="115000"/>
+              </a:lnSpc>
+              <a:spcBef>
+                <a:spcPts val="0"/>
+              </a:spcBef>
+              <a:spcAft>
+                <a:spcPts val="0"/>
+              </a:spcAft>
+              <a:buNone/>
+            </a:pPr>
+            <a:r>
+              <a:rPr lang="en" sz="1000">
+                <a:highlight>
+                  <a:schemeClr val="dk2"/>
+                </a:highlight>
+                <a:latin typeface="Consolas"/>
+                <a:ea typeface="Consolas"/>
+                <a:cs typeface="Consolas"/>
+                <a:sym typeface="Consolas"/>
+              </a:rPr>
+              <a:t>        }</a:t>
+            </a:r>
+            <a:endParaRPr sz="1000">
+              <a:solidFill>
+                <a:srgbClr val="CCCCCC"/>
+              </a:solidFill>
+              <a:highlight>
+                <a:schemeClr val="dk2"/>
+              </a:highlight>
+              <a:latin typeface="Consolas"/>
+              <a:ea typeface="Consolas"/>
+              <a:cs typeface="Consolas"/>
+              <a:sym typeface="Consolas"/>
+            </a:endParaRPr>
+          </a:p>
+          <a:p>
+            <a:pPr indent="0" lvl="0" marL="0" rtl="0" algn="l">
+              <a:lnSpc>
+                <a:spcPct val="115000"/>
+              </a:lnSpc>
+              <a:spcBef>
+                <a:spcPts val="0"/>
+              </a:spcBef>
+              <a:spcAft>
+                <a:spcPts val="0"/>
+              </a:spcAft>
+              <a:buNone/>
+            </a:pPr>
+            <a:r>
+              <a:rPr lang="en" sz="1000">
+                <a:highlight>
+                  <a:schemeClr val="dk2"/>
+                </a:highlight>
+                <a:latin typeface="Consolas"/>
+                <a:ea typeface="Consolas"/>
+                <a:cs typeface="Consolas"/>
+                <a:sym typeface="Consolas"/>
+              </a:rPr>
+              <a:t>    }</a:t>
+            </a:r>
+            <a:endParaRPr sz="1000">
+              <a:solidFill>
+                <a:srgbClr val="CCCCCC"/>
+              </a:solidFill>
+              <a:highlight>
+                <a:schemeClr val="dk2"/>
+              </a:highlight>
+              <a:latin typeface="Consolas"/>
+              <a:ea typeface="Consolas"/>
+              <a:cs typeface="Consolas"/>
+              <a:sym typeface="Consolas"/>
+            </a:endParaRPr>
+          </a:p>
+          <a:p>
+            <a:pPr indent="0" lvl="0" marL="0" rtl="0" algn="l">
+              <a:lnSpc>
+                <a:spcPct val="115000"/>
+              </a:lnSpc>
+              <a:spcBef>
+                <a:spcPts val="0"/>
+              </a:spcBef>
+              <a:spcAft>
+                <a:spcPts val="0"/>
+              </a:spcAft>
+              <a:buNone/>
+            </a:pPr>
+            <a:r>
+              <a:rPr lang="en" sz="1000">
+                <a:highlight>
+                  <a:schemeClr val="dk2"/>
+                </a:highlight>
+                <a:latin typeface="Consolas"/>
+                <a:ea typeface="Consolas"/>
+                <a:cs typeface="Consolas"/>
+                <a:sym typeface="Consolas"/>
+              </a:rPr>
+              <a:t>}</a:t>
+            </a:r>
+            <a:endParaRPr sz="1000">
+              <a:solidFill>
+                <a:srgbClr val="CCCCCC"/>
+              </a:solidFill>
+              <a:highlight>
+                <a:schemeClr val="dk2"/>
+              </a:highlight>
+              <a:latin typeface="Consolas"/>
+              <a:ea typeface="Consolas"/>
+              <a:cs typeface="Consolas"/>
+              <a:sym typeface="Consolas"/>
+            </a:endParaRPr>
+          </a:p>
         </p:txBody>
       </p:sp>
     </p:spTree>
@@ -8352,6 +7928,788 @@
 </file>
 
 <file path=ppt/slides/slide13.xml><?xml version="1.0" encoding="utf-8"?>
+<p:sld xmlns:a="http://schemas.openxmlformats.org/drawingml/2006/main" xmlns:p="http://schemas.openxmlformats.org/presentationml/2006/main" xmlns:r="http://schemas.openxmlformats.org/officeDocument/2006/relationships">
+  <p:cSld>
+    <p:spTree>
+      <p:nvGrpSpPr>
+        <p:cNvPr id="1" name=""/>
+        <p:cNvGrpSpPr/>
+        <p:nvPr/>
+      </p:nvGrpSpPr>
+      <p:grpSpPr/>
+      <p:sp>
+        <p:nvSpPr>
+          <p:cNvPr id="140" name="Google Shape;140;p23"/>
+          <p:cNvSpPr txBox="1"/>
+          <p:nvPr>
+            <p:ph type="title"/>
+          </p:nvPr>
+        </p:nvSpPr>
+        <p:spPr>
+          <a:xfrm>
+            <a:off x="311700" y="195615"/>
+            <a:ext cx="8520600" cy="572700"/>
+          </a:xfrm>
+          <a:prstGeom prst="rect">
+            <a:avLst/>
+          </a:prstGeom>
+        </p:spPr>
+        <p:txBody>
+          <a:bodyPr anchorCtr="0" anchor="t" bIns="91425" lIns="91425" spcFirstLastPara="1" rIns="91425" wrap="square" tIns="91425">
+            <a:normAutofit fontScale="90000"/>
+          </a:bodyPr>
+          <a:lstStyle/>
+          <a:p>
+            <a:pPr indent="0" lvl="0" marL="0" rtl="0" algn="l">
+              <a:spcBef>
+                <a:spcPts val="0"/>
+              </a:spcBef>
+              <a:spcAft>
+                <a:spcPts val="0"/>
+              </a:spcAft>
+              <a:buNone/>
+            </a:pPr>
+            <a:r>
+              <a:rPr lang="en"/>
+              <a:t>The Facade: PhysicsWorld</a:t>
+            </a:r>
+            <a:endParaRPr/>
+          </a:p>
+        </p:txBody>
+      </p:sp>
+      <p:sp>
+        <p:nvSpPr>
+          <p:cNvPr id="293" name="Google Shape;293;p45"/>
+          <p:cNvSpPr txBox="1"/>
+          <p:nvPr>
+            <p:ph type="title"/>
+          </p:nvPr>
+        </p:nvSpPr>
+        <p:spPr>
+          <a:xfrm>
+            <a:off x="311700" y="1152475"/>
+            <a:ext cx="3700000" cy="3500000"/>
+          </a:xfrm>
+          <a:prstGeom prst="rect">
+            <a:avLst/>
+          </a:prstGeom>
+        </p:spPr>
+        <p:txBody>
+          <a:bodyPr anchorCtr="0" anchor="t" bIns="91425" lIns="91425" spcFirstLastPara="1" rIns="91425" wrap="square" tIns="91425">
+            <a:normAutofit fontScale="90000"/>
+          </a:bodyPr>
+          <a:lstStyle/>
+          <a:p>
+            <a:pPr indent="-330200" lvl="0" marL="457200" rtl="0" algn="l">
+              <a:buClr>
+                <a:srgbClr val="DEE2E6"/>
+              </a:buClr>
+              <a:spcBef>
+                <a:spcPts val="0"/>
+              </a:spcBef>
+              <a:spcAft>
+                <a:spcPts val="0"/>
+              </a:spcAft>
+              <a:buSzPts val="1600"/>
+              <a:buChar char="●"/>
+            </a:pPr>
+            <a:r>
+              <a:rPr lang="en" sz="1600">
+                <a:solidFill>
+                  <a:srgbClr val="DEE2E6"/>
+                </a:solidFill>
+              </a:rPr>
+              <a:t>The game reads like our game again</a:t>
+            </a:r>
+            <a:endParaRPr/>
+          </a:p>
+          <a:p>
+            <a:pPr indent="-330200" lvl="0" marL="457200" rtl="0" algn="l">
+              <a:buClr>
+                <a:srgbClr val="DEE2E6"/>
+              </a:buClr>
+              <a:spcBef>
+                <a:spcPts val="0"/>
+              </a:spcBef>
+              <a:spcAft>
+                <a:spcPts val="0"/>
+              </a:spcAft>
+              <a:buSzPts val="1600"/>
+              <a:buChar char="●"/>
+            </a:pPr>
+            <a:r>
+              <a:rPr lang="en" sz="1600">
+                <a:solidFill>
+                  <a:srgbClr val="DEE2E6"/>
+                </a:solidFill>
+              </a:rPr>
+              <a:t>Gains</a:t>
+            </a:r>
+            <a:endParaRPr/>
+          </a:p>
+          <a:p>
+            <a:pPr indent="-317500" lvl="1" marL="914400" rtl="0" algn="l">
+              <a:buClr>
+                <a:srgbClr val="6C757D"/>
+              </a:buClr>
+              <a:spcBef>
+                <a:spcPts val="0"/>
+              </a:spcBef>
+              <a:spcAft>
+                <a:spcPts val="0"/>
+              </a:spcAft>
+              <a:buSzPts val="1400"/>
+              <a:buChar char="○"/>
+            </a:pPr>
+            <a:r>
+              <a:rPr lang="en" sz="1400">
+                <a:solidFill>
+                  <a:srgbClr val="6C757D"/>
+                </a:solidFill>
+              </a:rPr>
+              <a:t>One place to change</a:t>
+            </a:r>
+            <a:endParaRPr/>
+          </a:p>
+          <a:p>
+            <a:pPr indent="-317500" lvl="1" marL="914400" rtl="0" algn="l">
+              <a:buClr>
+                <a:srgbClr val="6C757D"/>
+              </a:buClr>
+              <a:spcBef>
+                <a:spcPts val="0"/>
+              </a:spcBef>
+              <a:spcAft>
+                <a:spcPts val="0"/>
+              </a:spcAft>
+              <a:buSzPts val="1400"/>
+              <a:buChar char="○"/>
+            </a:pPr>
+            <a:r>
+              <a:rPr lang="en" sz="1400">
+                <a:solidFill>
+                  <a:srgbClr val="6C757D"/>
+                </a:solidFill>
+              </a:rPr>
+              <a:t>Our language: pixels, not metres</a:t>
+            </a:r>
+            <a:endParaRPr/>
+          </a:p>
+          <a:p>
+            <a:pPr indent="-317500" lvl="1" marL="914400" rtl="0" algn="l">
+              <a:buClr>
+                <a:srgbClr val="6C757D"/>
+              </a:buClr>
+              <a:spcBef>
+                <a:spcPts val="0"/>
+              </a:spcBef>
+              <a:spcAft>
+                <a:spcPts val="0"/>
+              </a:spcAft>
+              <a:buSzPts val="1400"/>
+              <a:buChar char="○"/>
+            </a:pPr>
+            <a:r>
+              <a:rPr lang="en" sz="1400">
+                <a:solidFill>
+                  <a:srgbClr val="6C757D"/>
+                </a:solidFill>
+              </a:rPr>
+              <a:t>A smaller surface</a:t>
+            </a:r>
+            <a:endParaRPr/>
+          </a:p>
+          <a:p>
+            <a:pPr indent="-330200" lvl="0" marL="457200" rtl="0" algn="l">
+              <a:buClr>
+                <a:srgbClr val="DEE2E6"/>
+              </a:buClr>
+              <a:spcBef>
+                <a:spcPts val="0"/>
+              </a:spcBef>
+              <a:spcAft>
+                <a:spcPts val="0"/>
+              </a:spcAft>
+              <a:buSzPts val="1600"/>
+              <a:buChar char="●"/>
+            </a:pPr>
+            <a:r>
+              <a:rPr lang="en" sz="1600">
+                <a:solidFill>
+                  <a:srgbClr val="DEE2E6"/>
+                </a:solidFill>
+              </a:rPr>
+              <a:t>Cost: every new feature goes through the facade first</a:t>
+            </a:r>
+            <a:endParaRPr/>
+          </a:p>
+        </p:txBody>
+      </p:sp>
+      <p:sp>
+        <p:nvSpPr>
+          <p:cNvPr id="141" name="Google Shape;141;p23"/>
+          <p:cNvSpPr txBox="1"/>
+          <p:nvPr>
+            <p:ph idx="2" type="body"/>
+          </p:nvPr>
+        </p:nvSpPr>
+        <p:spPr>
+          <a:xfrm>
+            <a:off x="4150000" y="1152475"/>
+            <a:ext cx="4750000" cy="3600000"/>
+          </a:xfrm>
+          <a:prstGeom prst="rect">
+            <a:avLst/>
+          </a:prstGeom>
+        </p:spPr>
+        <p:txBody>
+          <a:bodyPr anchorCtr="0" anchor="t" bIns="91425" lIns="91425" spcFirstLastPara="1" rIns="91425" wrap="square" tIns="91425">
+            <a:noAutofit/>
+          </a:bodyPr>
+          <a:lstStyle/>
+          <a:p>
+            <a:pPr indent="0" lvl="0" marL="0" rtl="0" algn="l">
+              <a:lnSpc>
+                <a:spcPct val="115000"/>
+              </a:lnSpc>
+              <a:spcBef>
+                <a:spcPts val="0"/>
+              </a:spcBef>
+              <a:spcAft>
+                <a:spcPts val="0"/>
+              </a:spcAft>
+              <a:buNone/>
+            </a:pPr>
+            <a:r>
+              <a:rPr lang="en" sz="1000">
+                <a:highlight>
+                  <a:schemeClr val="dk2"/>
+                </a:highlight>
+                <a:latin typeface="Consolas"/>
+                <a:ea typeface="Consolas"/>
+                <a:cs typeface="Consolas"/>
+                <a:sym typeface="Consolas"/>
+              </a:rPr>
+              <a:t>// Units.cs</a:t>
+            </a:r>
+            <a:endParaRPr sz="1000">
+              <a:solidFill>
+                <a:srgbClr val="CCCCCC"/>
+              </a:solidFill>
+              <a:highlight>
+                <a:schemeClr val="dk2"/>
+              </a:highlight>
+              <a:latin typeface="Consolas"/>
+              <a:ea typeface="Consolas"/>
+              <a:cs typeface="Consolas"/>
+              <a:sym typeface="Consolas"/>
+            </a:endParaRPr>
+          </a:p>
+          <a:p>
+            <a:pPr indent="0" lvl="0" marL="0" rtl="0" algn="l">
+              <a:lnSpc>
+                <a:spcPct val="115000"/>
+              </a:lnSpc>
+              <a:spcBef>
+                <a:spcPts val="0"/>
+              </a:spcBef>
+              <a:spcAft>
+                <a:spcPts val="0"/>
+              </a:spcAft>
+              <a:buNone/>
+            </a:pPr>
+            <a:r>
+              <a:rPr lang="en" sz="1000">
+                <a:highlight>
+                  <a:schemeClr val="dk2"/>
+                </a:highlight>
+                <a:latin typeface="Consolas"/>
+                <a:ea typeface="Consolas"/>
+                <a:cs typeface="Consolas"/>
+                <a:sym typeface="Consolas"/>
+              </a:rPr>
+              <a:t>public static B2Vec2 ToMeters(Vector2 pixels) =&gt;</a:t>
+            </a:r>
+            <a:endParaRPr sz="1000">
+              <a:solidFill>
+                <a:srgbClr val="CCCCCC"/>
+              </a:solidFill>
+              <a:highlight>
+                <a:schemeClr val="dk2"/>
+              </a:highlight>
+              <a:latin typeface="Consolas"/>
+              <a:ea typeface="Consolas"/>
+              <a:cs typeface="Consolas"/>
+              <a:sym typeface="Consolas"/>
+            </a:endParaRPr>
+          </a:p>
+          <a:p>
+            <a:pPr indent="0" lvl="0" marL="0" rtl="0" algn="l">
+              <a:lnSpc>
+                <a:spcPct val="115000"/>
+              </a:lnSpc>
+              <a:spcBef>
+                <a:spcPts val="0"/>
+              </a:spcBef>
+              <a:spcAft>
+                <a:spcPts val="0"/>
+              </a:spcAft>
+              <a:buNone/>
+            </a:pPr>
+            <a:r>
+              <a:rPr lang="en" sz="1000">
+                <a:highlight>
+                  <a:schemeClr val="dk2"/>
+                </a:highlight>
+                <a:latin typeface="Consolas"/>
+                <a:ea typeface="Consolas"/>
+                <a:cs typeface="Consolas"/>
+                <a:sym typeface="Consolas"/>
+              </a:rPr>
+              <a:t>    new(pixels.X / PixelsPerMeter,</a:t>
+            </a:r>
+            <a:endParaRPr sz="1000">
+              <a:solidFill>
+                <a:srgbClr val="CCCCCC"/>
+              </a:solidFill>
+              <a:highlight>
+                <a:schemeClr val="dk2"/>
+              </a:highlight>
+              <a:latin typeface="Consolas"/>
+              <a:ea typeface="Consolas"/>
+              <a:cs typeface="Consolas"/>
+              <a:sym typeface="Consolas"/>
+            </a:endParaRPr>
+          </a:p>
+          <a:p>
+            <a:pPr indent="0" lvl="0" marL="0" rtl="0" algn="l">
+              <a:lnSpc>
+                <a:spcPct val="115000"/>
+              </a:lnSpc>
+              <a:spcBef>
+                <a:spcPts val="0"/>
+              </a:spcBef>
+              <a:spcAft>
+                <a:spcPts val="0"/>
+              </a:spcAft>
+              <a:buNone/>
+            </a:pPr>
+            <a:r>
+              <a:rPr lang="en" sz="1000">
+                <a:highlight>
+                  <a:schemeClr val="dk2"/>
+                </a:highlight>
+                <a:latin typeface="Consolas"/>
+                <a:ea typeface="Consolas"/>
+                <a:cs typeface="Consolas"/>
+                <a:sym typeface="Consolas"/>
+              </a:rPr>
+              <a:t>        -pixels.Y / PixelsPerMeter);</a:t>
+            </a:r>
+            <a:endParaRPr sz="1000">
+              <a:solidFill>
+                <a:srgbClr val="CCCCCC"/>
+              </a:solidFill>
+              <a:highlight>
+                <a:schemeClr val="dk2"/>
+              </a:highlight>
+              <a:latin typeface="Consolas"/>
+              <a:ea typeface="Consolas"/>
+              <a:cs typeface="Consolas"/>
+              <a:sym typeface="Consolas"/>
+            </a:endParaRPr>
+          </a:p>
+          <a:p>
+            <a:pPr indent="0" lvl="0" marL="0" rtl="0" algn="l">
+              <a:lnSpc>
+                <a:spcPct val="115000"/>
+              </a:lnSpc>
+              <a:spcBef>
+                <a:spcPts val="0"/>
+              </a:spcBef>
+              <a:spcAft>
+                <a:spcPts val="0"/>
+              </a:spcAft>
+              <a:buNone/>
+            </a:pPr>
+            <a:r>
+              <a:rPr lang="en" sz="1000">
+                <a:highlight>
+                  <a:schemeClr val="dk2"/>
+                </a:highlight>
+                <a:latin typeface="Consolas"/>
+                <a:ea typeface="Consolas"/>
+                <a:cs typeface="Consolas"/>
+                <a:sym typeface="Consolas"/>
+              </a:rPr>
+              <a:t/>
+            </a:r>
+            <a:endParaRPr sz="1000">
+              <a:solidFill>
+                <a:srgbClr val="CCCCCC"/>
+              </a:solidFill>
+              <a:highlight>
+                <a:schemeClr val="dk2"/>
+              </a:highlight>
+              <a:latin typeface="Consolas"/>
+              <a:ea typeface="Consolas"/>
+              <a:cs typeface="Consolas"/>
+              <a:sym typeface="Consolas"/>
+            </a:endParaRPr>
+          </a:p>
+          <a:p>
+            <a:pPr indent="0" lvl="0" marL="0" rtl="0" algn="l">
+              <a:lnSpc>
+                <a:spcPct val="115000"/>
+              </a:lnSpc>
+              <a:spcBef>
+                <a:spcPts val="0"/>
+              </a:spcBef>
+              <a:spcAft>
+                <a:spcPts val="0"/>
+              </a:spcAft>
+              <a:buNone/>
+            </a:pPr>
+            <a:r>
+              <a:rPr lang="en" sz="1000">
+                <a:highlight>
+                  <a:schemeClr val="dk2"/>
+                </a:highlight>
+                <a:latin typeface="Consolas"/>
+                <a:ea typeface="Consolas"/>
+                <a:cs typeface="Consolas"/>
+                <a:sym typeface="Consolas"/>
+              </a:rPr>
+              <a:t>// Block.cs</a:t>
+            </a:r>
+            <a:endParaRPr sz="1000">
+              <a:solidFill>
+                <a:srgbClr val="CCCCCC"/>
+              </a:solidFill>
+              <a:highlight>
+                <a:schemeClr val="dk2"/>
+              </a:highlight>
+              <a:latin typeface="Consolas"/>
+              <a:ea typeface="Consolas"/>
+              <a:cs typeface="Consolas"/>
+              <a:sym typeface="Consolas"/>
+            </a:endParaRPr>
+          </a:p>
+          <a:p>
+            <a:pPr indent="0" lvl="0" marL="0" rtl="0" algn="l">
+              <a:lnSpc>
+                <a:spcPct val="115000"/>
+              </a:lnSpc>
+              <a:spcBef>
+                <a:spcPts val="0"/>
+              </a:spcBef>
+              <a:spcAft>
+                <a:spcPts val="0"/>
+              </a:spcAft>
+              <a:buNone/>
+            </a:pPr>
+            <a:r>
+              <a:rPr lang="en" sz="1000">
+                <a:highlight>
+                  <a:schemeClr val="dk2"/>
+                </a:highlight>
+                <a:latin typeface="Consolas"/>
+                <a:ea typeface="Consolas"/>
+                <a:cs typeface="Consolas"/>
+                <a:sym typeface="Consolas"/>
+              </a:rPr>
+              <a:t>public Block(PhysicsWorld world, Vector2 center,</a:t>
+            </a:r>
+            <a:endParaRPr sz="1000">
+              <a:solidFill>
+                <a:srgbClr val="CCCCCC"/>
+              </a:solidFill>
+              <a:highlight>
+                <a:schemeClr val="dk2"/>
+              </a:highlight>
+              <a:latin typeface="Consolas"/>
+              <a:ea typeface="Consolas"/>
+              <a:cs typeface="Consolas"/>
+              <a:sym typeface="Consolas"/>
+            </a:endParaRPr>
+          </a:p>
+          <a:p>
+            <a:pPr indent="0" lvl="0" marL="0" rtl="0" algn="l">
+              <a:lnSpc>
+                <a:spcPct val="115000"/>
+              </a:lnSpc>
+              <a:spcBef>
+                <a:spcPts val="0"/>
+              </a:spcBef>
+              <a:spcAft>
+                <a:spcPts val="0"/>
+              </a:spcAft>
+              <a:buNone/>
+            </a:pPr>
+            <a:r>
+              <a:rPr lang="en" sz="1000">
+                <a:highlight>
+                  <a:schemeClr val="dk2"/>
+                </a:highlight>
+                <a:latin typeface="Consolas"/>
+                <a:ea typeface="Consolas"/>
+                <a:cs typeface="Consolas"/>
+                <a:sym typeface="Consolas"/>
+              </a:rPr>
+              <a:t>    Vector2 size, float rotation,</a:t>
+            </a:r>
+            <a:endParaRPr sz="1000">
+              <a:solidFill>
+                <a:srgbClr val="CCCCCC"/>
+              </a:solidFill>
+              <a:highlight>
+                <a:schemeClr val="dk2"/>
+              </a:highlight>
+              <a:latin typeface="Consolas"/>
+              <a:ea typeface="Consolas"/>
+              <a:cs typeface="Consolas"/>
+              <a:sym typeface="Consolas"/>
+            </a:endParaRPr>
+          </a:p>
+          <a:p>
+            <a:pPr indent="0" lvl="0" marL="0" rtl="0" algn="l">
+              <a:lnSpc>
+                <a:spcPct val="115000"/>
+              </a:lnSpc>
+              <a:spcBef>
+                <a:spcPts val="0"/>
+              </a:spcBef>
+              <a:spcAft>
+                <a:spcPts val="0"/>
+              </a:spcAft>
+              <a:buNone/>
+            </a:pPr>
+            <a:r>
+              <a:rPr lang="en" sz="1000">
+                <a:highlight>
+                  <a:schemeClr val="dk2"/>
+                </a:highlight>
+                <a:latin typeface="Consolas"/>
+                <a:ea typeface="Consolas"/>
+                <a:cs typeface="Consolas"/>
+                <a:sym typeface="Consolas"/>
+              </a:rPr>
+              <a:t>    PhysicsMaterial material, TextureRegion sprite)</a:t>
+            </a:r>
+            <a:endParaRPr sz="1000">
+              <a:solidFill>
+                <a:srgbClr val="CCCCCC"/>
+              </a:solidFill>
+              <a:highlight>
+                <a:schemeClr val="dk2"/>
+              </a:highlight>
+              <a:latin typeface="Consolas"/>
+              <a:ea typeface="Consolas"/>
+              <a:cs typeface="Consolas"/>
+              <a:sym typeface="Consolas"/>
+            </a:endParaRPr>
+          </a:p>
+          <a:p>
+            <a:pPr indent="0" lvl="0" marL="0" rtl="0" algn="l">
+              <a:lnSpc>
+                <a:spcPct val="115000"/>
+              </a:lnSpc>
+              <a:spcBef>
+                <a:spcPts val="0"/>
+              </a:spcBef>
+              <a:spcAft>
+                <a:spcPts val="0"/>
+              </a:spcAft>
+              <a:buNone/>
+            </a:pPr>
+            <a:r>
+              <a:rPr lang="en" sz="1000">
+                <a:highlight>
+                  <a:schemeClr val="dk2"/>
+                </a:highlight>
+                <a:latin typeface="Consolas"/>
+                <a:ea typeface="Consolas"/>
+                <a:cs typeface="Consolas"/>
+                <a:sym typeface="Consolas"/>
+              </a:rPr>
+              <a:t>    : base(sprite)</a:t>
+            </a:r>
+            <a:endParaRPr sz="1000">
+              <a:solidFill>
+                <a:srgbClr val="CCCCCC"/>
+              </a:solidFill>
+              <a:highlight>
+                <a:schemeClr val="dk2"/>
+              </a:highlight>
+              <a:latin typeface="Consolas"/>
+              <a:ea typeface="Consolas"/>
+              <a:cs typeface="Consolas"/>
+              <a:sym typeface="Consolas"/>
+            </a:endParaRPr>
+          </a:p>
+          <a:p>
+            <a:pPr indent="0" lvl="0" marL="0" rtl="0" algn="l">
+              <a:lnSpc>
+                <a:spcPct val="115000"/>
+              </a:lnSpc>
+              <a:spcBef>
+                <a:spcPts val="0"/>
+              </a:spcBef>
+              <a:spcAft>
+                <a:spcPts val="0"/>
+              </a:spcAft>
+              <a:buNone/>
+            </a:pPr>
+            <a:r>
+              <a:rPr lang="en" sz="1000">
+                <a:highlight>
+                  <a:schemeClr val="dk2"/>
+                </a:highlight>
+                <a:latin typeface="Consolas"/>
+                <a:ea typeface="Consolas"/>
+                <a:cs typeface="Consolas"/>
+                <a:sym typeface="Consolas"/>
+              </a:rPr>
+              <a:t>{</a:t>
+            </a:r>
+            <a:endParaRPr sz="1000">
+              <a:solidFill>
+                <a:srgbClr val="CCCCCC"/>
+              </a:solidFill>
+              <a:highlight>
+                <a:schemeClr val="dk2"/>
+              </a:highlight>
+              <a:latin typeface="Consolas"/>
+              <a:ea typeface="Consolas"/>
+              <a:cs typeface="Consolas"/>
+              <a:sym typeface="Consolas"/>
+            </a:endParaRPr>
+          </a:p>
+          <a:p>
+            <a:pPr indent="0" lvl="0" marL="0" rtl="0" algn="l">
+              <a:lnSpc>
+                <a:spcPct val="115000"/>
+              </a:lnSpc>
+              <a:spcBef>
+                <a:spcPts val="0"/>
+              </a:spcBef>
+              <a:spcAft>
+                <a:spcPts val="0"/>
+              </a:spcAft>
+              <a:buNone/>
+            </a:pPr>
+            <a:r>
+              <a:rPr lang="en" sz="1000">
+                <a:highlight>
+                  <a:schemeClr val="dk2"/>
+                </a:highlight>
+                <a:latin typeface="Consolas"/>
+                <a:ea typeface="Consolas"/>
+                <a:cs typeface="Consolas"/>
+                <a:sym typeface="Consolas"/>
+              </a:rPr>
+              <a:t>    Body = world.CreateBox(center, size,</a:t>
+            </a:r>
+            <a:endParaRPr sz="1000">
+              <a:solidFill>
+                <a:srgbClr val="CCCCCC"/>
+              </a:solidFill>
+              <a:highlight>
+                <a:schemeClr val="dk2"/>
+              </a:highlight>
+              <a:latin typeface="Consolas"/>
+              <a:ea typeface="Consolas"/>
+              <a:cs typeface="Consolas"/>
+              <a:sym typeface="Consolas"/>
+            </a:endParaRPr>
+          </a:p>
+          <a:p>
+            <a:pPr indent="0" lvl="0" marL="0" rtl="0" algn="l">
+              <a:lnSpc>
+                <a:spcPct val="115000"/>
+              </a:lnSpc>
+              <a:spcBef>
+                <a:spcPts val="0"/>
+              </a:spcBef>
+              <a:spcAft>
+                <a:spcPts val="0"/>
+              </a:spcAft>
+              <a:buNone/>
+            </a:pPr>
+            <a:r>
+              <a:rPr lang="en" sz="1000">
+                <a:highlight>
+                  <a:schemeClr val="dk2"/>
+                </a:highlight>
+                <a:latin typeface="Consolas"/>
+                <a:ea typeface="Consolas"/>
+                <a:cs typeface="Consolas"/>
+                <a:sym typeface="Consolas"/>
+              </a:rPr>
+              <a:t>        rotation, material, this);</a:t>
+            </a:r>
+            <a:endParaRPr sz="1000">
+              <a:solidFill>
+                <a:srgbClr val="CCCCCC"/>
+              </a:solidFill>
+              <a:highlight>
+                <a:schemeClr val="dk2"/>
+              </a:highlight>
+              <a:latin typeface="Consolas"/>
+              <a:ea typeface="Consolas"/>
+              <a:cs typeface="Consolas"/>
+              <a:sym typeface="Consolas"/>
+            </a:endParaRPr>
+          </a:p>
+          <a:p>
+            <a:pPr indent="0" lvl="0" marL="0" rtl="0" algn="l">
+              <a:lnSpc>
+                <a:spcPct val="115000"/>
+              </a:lnSpc>
+              <a:spcBef>
+                <a:spcPts val="0"/>
+              </a:spcBef>
+              <a:spcAft>
+                <a:spcPts val="0"/>
+              </a:spcAft>
+              <a:buNone/>
+            </a:pPr>
+            <a:r>
+              <a:rPr lang="en" sz="1000">
+                <a:highlight>
+                  <a:schemeClr val="dk2"/>
+                </a:highlight>
+                <a:latin typeface="Consolas"/>
+                <a:ea typeface="Consolas"/>
+                <a:cs typeface="Consolas"/>
+                <a:sym typeface="Consolas"/>
+              </a:rPr>
+              <a:t>}</a:t>
+            </a:r>
+            <a:endParaRPr sz="1000">
+              <a:solidFill>
+                <a:srgbClr val="CCCCCC"/>
+              </a:solidFill>
+              <a:highlight>
+                <a:schemeClr val="dk2"/>
+              </a:highlight>
+              <a:latin typeface="Consolas"/>
+              <a:ea typeface="Consolas"/>
+              <a:cs typeface="Consolas"/>
+              <a:sym typeface="Consolas"/>
+            </a:endParaRPr>
+          </a:p>
+        </p:txBody>
+      </p:sp>
+    </p:spTree>
+  </p:cSld>
+  <p:clrMapOvr>
+    <a:masterClrMapping/>
+  </p:clrMapOvr>
+</p:sld>
+</file>
+
+<file path=ppt/slides/slide14.xml><?xml version="1.0" encoding="utf-8"?>
 <p:sld xmlns:a="http://schemas.openxmlformats.org/drawingml/2006/main" xmlns:p="http://schemas.openxmlformats.org/presentationml/2006/main" xmlns:r="http://schemas.openxmlformats.org/officeDocument/2006/relationships">
   <p:cSld>
     <p:spTree>
@@ -8775,7 +9133,7 @@
 </p:sld>
 </file>
 
-<file path=ppt/slides/slide14.xml><?xml version="1.0" encoding="utf-8"?>
+<file path=ppt/slides/slide15.xml><?xml version="1.0" encoding="utf-8"?>
 <p:sld xmlns:a="http://schemas.openxmlformats.org/drawingml/2006/main" xmlns:p="http://schemas.openxmlformats.org/presentationml/2006/main" xmlns:r="http://schemas.openxmlformats.org/officeDocument/2006/relationships">
   <p:cSld>
     <p:spTree>
@@ -8902,7 +9260,129 @@
 </p:sld>
 </file>
 
-<file path=ppt/slides/slide15.xml><?xml version="1.0" encoding="utf-8"?>
+<file path=ppt/slides/slide16.xml><?xml version="1.0" encoding="utf-8"?>
+<p:sld xmlns:a="http://schemas.openxmlformats.org/drawingml/2006/main" xmlns:p="http://schemas.openxmlformats.org/presentationml/2006/main" xmlns:r="http://schemas.openxmlformats.org/officeDocument/2006/relationships">
+  <p:cSld>
+    <p:spTree>
+      <p:nvGrpSpPr>
+        <p:cNvPr id="1" name=""/>
+        <p:cNvGrpSpPr/>
+        <p:nvPr/>
+      </p:nvGrpSpPr>
+      <p:grpSpPr/>
+      <p:sp>
+        <p:nvSpPr>
+          <p:cNvPr id="2" name="Title 1"/>
+          <p:cNvSpPr>
+            <a:spLocks noGrp="1"/>
+          </p:cNvSpPr>
+          <p:nvPr>
+            <p:ph type="title"/>
+          </p:nvPr>
+        </p:nvSpPr>
+        <p:spPr/>
+        <p:txBody>
+          <a:bodyPr/>
+          <a:lstStyle/>
+          <a:p>
+            <a:pPr indent="0" lvl="0" marL="0" rtl="0" algn="l">
+              <a:spcBef>
+                <a:spcPts val="0"/>
+              </a:spcBef>
+              <a:spcAft>
+                <a:spcPts val="0"/>
+              </a:spcAft>
+              <a:buNone/>
+            </a:pPr>
+            <a:r>
+              <a:rPr lang="en"/>
+              <a:t>Try It: The Same Change, Behind the Adapter</a:t>
+            </a:r>
+            <a:endParaRPr/>
+          </a:p>
+        </p:txBody>
+      </p:sp>
+      <p:sp>
+        <p:nvSpPr>
+          <p:cNvPr id="3" name="Text Placeholder 2"/>
+          <p:cNvSpPr>
+            <a:spLocks noGrp="1"/>
+          </p:cNvSpPr>
+          <p:nvPr>
+            <p:ph type="body" idx="1"/>
+          </p:nvPr>
+        </p:nvSpPr>
+        <p:spPr>
+          <a:xfrm>
+            <a:off x="311700" y="885950"/>
+            <a:ext cx="8520600" cy="1289304"/>
+          </a:xfrm>
+        </p:spPr>
+        <p:txBody>
+          <a:bodyPr/>
+          <a:lstStyle/>
+          <a:p>
+            <a:pPr indent="-330200" lvl="0" marL="457200" rtl="0" algn="l">
+              <a:spcBef>
+                <a:spcPts val="0"/>
+              </a:spcBef>
+              <a:spcAft>
+                <a:spcPts val="0"/>
+              </a:spcAft>
+              <a:buSzPts val="1600"/>
+              <a:buChar char="●"/>
+            </a:pPr>
+            <a:r>
+              <a:rPr lang="en"/>
+              <a:t>In Birds1:</a:t>
+            </a:r>
+            <a:endParaRPr/>
+          </a:p>
+          <a:p>
+            <a:pPr indent="-330200" lvl="0" marL="457200" rtl="0" algn="l">
+              <a:spcBef>
+                <a:spcPts val="0"/>
+              </a:spcBef>
+              <a:spcAft>
+                <a:spcPts val="0"/>
+              </a:spcAft>
+              <a:buSzPts val="1600"/>
+              <a:buChar char="●"/>
+            </a:pPr>
+            <a:r>
+              <a:rPr lang="en"/>
+              <a:t>Make the same change: 10 pixels per metre</a:t>
+            </a:r>
+            <a:endParaRPr/>
+          </a:p>
+          <a:p>
+            <a:pPr indent="-330200" lvl="0" marL="457200" rtl="0" algn="l">
+              <a:spcBef>
+                <a:spcPts val="0"/>
+              </a:spcBef>
+              <a:spcAft>
+                <a:spcPts val="0"/>
+              </a:spcAft>
+              <a:buSzPts val="1600"/>
+              <a:buChar char="●"/>
+            </a:pPr>
+            <a:r>
+              <a:rPr lang="en"/>
+              <a:t>How many files did you touch this time?</a:t>
+            </a:r>
+            <a:endParaRPr/>
+          </a:p>
+        </p:txBody>
+      </p:sp>
+    </p:spTree>
+  </p:cSld>
+  <p:clrMapOvr>
+    <a:masterClrMapping/>
+  </p:clrMapOvr>
+</p:sld>
+</file>
+
+<file path=ppt/slides/slide17.xml><?xml version="1.0" encoding="utf-8"?>
 <p:sld xmlns:a="http://schemas.openxmlformats.org/drawingml/2006/main" xmlns:p="http://schemas.openxmlformats.org/presentationml/2006/main" xmlns:r="http://schemas.openxmlformats.org/officeDocument/2006/relationships">
   <p:cSld>
     <p:spTree>
@@ -9711,991 +10191,6 @@
               <a:cs typeface="Consolas"/>
               <a:sym typeface="Consolas"/>
             </a:endParaRPr>
-          </a:p>
-        </p:txBody>
-      </p:sp>
-    </p:spTree>
-  </p:cSld>
-  <p:clrMapOvr>
-    <a:masterClrMapping/>
-  </p:clrMapOvr>
-</p:sld>
-</file>
-
-<file path=ppt/slides/slide16.xml><?xml version="1.0" encoding="utf-8"?>
-<p:sld xmlns:a="http://schemas.openxmlformats.org/drawingml/2006/main" xmlns:p="http://schemas.openxmlformats.org/presentationml/2006/main" xmlns:r="http://schemas.openxmlformats.org/officeDocument/2006/relationships">
-  <p:cSld>
-    <p:spTree>
-      <p:nvGrpSpPr>
-        <p:cNvPr id="1" name=""/>
-        <p:cNvGrpSpPr/>
-        <p:nvPr/>
-      </p:nvGrpSpPr>
-      <p:grpSpPr/>
-      <p:sp>
-        <p:nvSpPr>
-          <p:cNvPr id="140" name="Google Shape;140;p23"/>
-          <p:cNvSpPr txBox="1"/>
-          <p:nvPr>
-            <p:ph type="title"/>
-          </p:nvPr>
-        </p:nvSpPr>
-        <p:spPr>
-          <a:xfrm>
-            <a:off x="311700" y="195615"/>
-            <a:ext cx="8520600" cy="572700"/>
-          </a:xfrm>
-          <a:prstGeom prst="rect">
-            <a:avLst/>
-          </a:prstGeom>
-        </p:spPr>
-        <p:txBody>
-          <a:bodyPr anchorCtr="0" anchor="t" bIns="91425" lIns="91425" spcFirstLastPara="1" rIns="91425" wrap="square" tIns="91425">
-            <a:normAutofit fontScale="90000"/>
-          </a:bodyPr>
-          <a:lstStyle/>
-          <a:p>
-            <a:pPr indent="0" lvl="0" marL="0" rtl="0" algn="l">
-              <a:spcBef>
-                <a:spcPts val="0"/>
-              </a:spcBef>
-              <a:spcAft>
-                <a:spcPts val="0"/>
-              </a:spcAft>
-              <a:buNone/>
-            </a:pPr>
-            <a:r>
-              <a:rPr lang="en"/>
-              <a:t>Destroying Safely</a:t>
-            </a:r>
-            <a:endParaRPr/>
-          </a:p>
-        </p:txBody>
-      </p:sp>
-      <p:sp>
-        <p:nvSpPr>
-          <p:cNvPr id="293" name="Google Shape;293;p45"/>
-          <p:cNvSpPr txBox="1"/>
-          <p:nvPr>
-            <p:ph type="title"/>
-          </p:nvPr>
-        </p:nvSpPr>
-        <p:spPr>
-          <a:xfrm>
-            <a:off x="311700" y="1152475"/>
-            <a:ext cx="3700000" cy="3500000"/>
-          </a:xfrm>
-          <a:prstGeom prst="rect">
-            <a:avLst/>
-          </a:prstGeom>
-        </p:spPr>
-        <p:txBody>
-          <a:bodyPr anchorCtr="0" anchor="t" bIns="91425" lIns="91425" spcFirstLastPara="1" rIns="91425" wrap="square" tIns="91425">
-            <a:normAutofit fontScale="90000"/>
-          </a:bodyPr>
-          <a:lstStyle/>
-          <a:p>
-            <a:pPr indent="-330200" lvl="0" marL="457200" rtl="0" algn="l">
-              <a:buClr>
-                <a:srgbClr val="DEE2E6"/>
-              </a:buClr>
-              <a:spcBef>
-                <a:spcPts val="0"/>
-              </a:spcBef>
-              <a:spcAft>
-                <a:spcPts val="0"/>
-              </a:spcAft>
-              <a:buSzPts val="1600"/>
-              <a:buChar char="●"/>
-            </a:pPr>
-            <a:r>
-              <a:rPr lang="en" sz="1600">
-                <a:solidFill>
-                  <a:srgbClr val="DEE2E6"/>
-                </a:solidFill>
-              </a:rPr>
-              <a:t>Not in the hit handler</a:t>
-            </a:r>
-            <a:endParaRPr/>
-          </a:p>
-          <a:p>
-            <a:pPr indent="-317500" lvl="1" marL="914400" rtl="0" algn="l">
-              <a:buClr>
-                <a:srgbClr val="6C757D"/>
-              </a:buClr>
-              <a:spcBef>
-                <a:spcPts val="0"/>
-              </a:spcBef>
-              <a:spcAft>
-                <a:spcPts val="0"/>
-              </a:spcAft>
-              <a:buSzPts val="1400"/>
-              <a:buChar char="○"/>
-            </a:pPr>
-            <a:r>
-              <a:rPr lang="en" sz="1400">
-                <a:solidFill>
-                  <a:srgbClr val="6C757D"/>
-                </a:solidFill>
-              </a:rPr>
-              <a:t>More hits may be about the body you destroyed</a:t>
-            </a:r>
-            <a:endParaRPr/>
-          </a:p>
-          <a:p>
-            <a:pPr indent="-317500" lvl="1" marL="914400" rtl="0" algn="l">
-              <a:buClr>
-                <a:srgbClr val="6C757D"/>
-              </a:buClr>
-              <a:spcBef>
-                <a:spcPts val="0"/>
-              </a:spcBef>
-              <a:spcAft>
-                <a:spcPts val="0"/>
-              </a:spcAft>
-              <a:buSzPts val="1400"/>
-              <a:buChar char="○"/>
-            </a:pPr>
-            <a:r>
-              <a:rPr lang="en" sz="1400">
-                <a:solidFill>
-                  <a:srgbClr val="6C757D"/>
-                </a:solidFill>
-              </a:rPr>
-              <a:t>Many libraries crash if the world changes during a callback</a:t>
-            </a:r>
-            <a:endParaRPr/>
-          </a:p>
-          <a:p>
-            <a:pPr indent="-317500" lvl="1" marL="914400" rtl="0" algn="l">
-              <a:buClr>
-                <a:srgbClr val="6C757D"/>
-              </a:buClr>
-              <a:spcBef>
-                <a:spcPts val="0"/>
-              </a:spcBef>
-              <a:spcAft>
-                <a:spcPts val="0"/>
-              </a:spcAft>
-              <a:buSzPts val="1400"/>
-              <a:buChar char="○"/>
-            </a:pPr>
-            <a:r>
-              <a:rPr lang="en" sz="1400">
-                <a:solidFill>
-                  <a:srgbClr val="6C757D"/>
-                </a:solidFill>
-              </a:rPr>
-              <a:t>You may be looping over the list</a:t>
-            </a:r>
-            <a:endParaRPr/>
-          </a:p>
-          <a:p>
-            <a:pPr indent="-330200" lvl="0" marL="457200" rtl="0" algn="l">
-              <a:buClr>
-                <a:srgbClr val="DEE2E6"/>
-              </a:buClr>
-              <a:spcBef>
-                <a:spcPts val="0"/>
-              </a:spcBef>
-              <a:spcAft>
-                <a:spcPts val="0"/>
-              </a:spcAft>
-              <a:buSzPts val="1600"/>
-              <a:buChar char="●"/>
-            </a:pPr>
-            <a:r>
-              <a:rPr lang="en" sz="1600">
-                <a:solidFill>
-                  <a:srgbClr val="DEE2E6"/>
-                </a:solidFill>
-              </a:rPr>
-              <a:t>Mark now, remove at a safe point</a:t>
-            </a:r>
-            <a:endParaRPr/>
-          </a:p>
-          <a:p>
-            <a:pPr indent="-330200" lvl="0" marL="457200" rtl="0" algn="l">
-              <a:buClr>
-                <a:srgbClr val="DEE2E6"/>
-              </a:buClr>
-              <a:spcBef>
-                <a:spcPts val="0"/>
-              </a:spcBef>
-              <a:spcAft>
-                <a:spcPts val="0"/>
-              </a:spcAft>
-              <a:buSzPts val="1600"/>
-              <a:buChar char="●"/>
-            </a:pPr>
-            <a:r>
-              <a:rPr lang="en" sz="1600">
-                <a:solidFill>
-                  <a:srgbClr val="DEE2E6"/>
-                </a:solidFill>
-              </a:rPr>
-              <a:t>Loop backwards when removing</a:t>
-            </a:r>
-            <a:endParaRPr/>
-          </a:p>
-        </p:txBody>
-      </p:sp>
-      <p:sp>
-        <p:nvSpPr>
-          <p:cNvPr id="141" name="Google Shape;141;p23"/>
-          <p:cNvSpPr txBox="1"/>
-          <p:nvPr>
-            <p:ph idx="2" type="body"/>
-          </p:nvPr>
-        </p:nvSpPr>
-        <p:spPr>
-          <a:xfrm>
-            <a:off x="4150000" y="1152475"/>
-            <a:ext cx="4750000" cy="3600000"/>
-          </a:xfrm>
-          <a:prstGeom prst="rect">
-            <a:avLst/>
-          </a:prstGeom>
-        </p:spPr>
-        <p:txBody>
-          <a:bodyPr anchorCtr="0" anchor="t" bIns="91425" lIns="91425" spcFirstLastPara="1" rIns="91425" wrap="square" tIns="91425">
-            <a:noAutofit/>
-          </a:bodyPr>
-          <a:lstStyle/>
-          <a:p>
-            <a:pPr indent="0" lvl="0" marL="0" rtl="0" algn="l">
-              <a:lnSpc>
-                <a:spcPct val="115000"/>
-              </a:lnSpc>
-              <a:spcBef>
-                <a:spcPts val="0"/>
-              </a:spcBef>
-              <a:spcAft>
-                <a:spcPts val="0"/>
-              </a:spcAft>
-              <a:buNone/>
-            </a:pPr>
-            <a:r>
-              <a:rPr lang="en" sz="1000">
-                <a:highlight>
-                  <a:schemeClr val="dk2"/>
-                </a:highlight>
-                <a:latin typeface="Consolas"/>
-                <a:ea typeface="Consolas"/>
-                <a:cs typeface="Consolas"/>
-                <a:sym typeface="Consolas"/>
-              </a:rPr>
-              <a:t>void OnHit(PhysicsBody a, PhysicsBody b,</a:t>
-            </a:r>
-            <a:endParaRPr sz="1000">
-              <a:solidFill>
-                <a:srgbClr val="CCCCCC"/>
-              </a:solidFill>
-              <a:highlight>
-                <a:schemeClr val="dk2"/>
-              </a:highlight>
-              <a:latin typeface="Consolas"/>
-              <a:ea typeface="Consolas"/>
-              <a:cs typeface="Consolas"/>
-              <a:sym typeface="Consolas"/>
-            </a:endParaRPr>
-          </a:p>
-          <a:p>
-            <a:pPr indent="0" lvl="0" marL="0" rtl="0" algn="l">
-              <a:lnSpc>
-                <a:spcPct val="115000"/>
-              </a:lnSpc>
-              <a:spcBef>
-                <a:spcPts val="0"/>
-              </a:spcBef>
-              <a:spcAft>
-                <a:spcPts val="0"/>
-              </a:spcAft>
-              <a:buNone/>
-            </a:pPr>
-            <a:r>
-              <a:rPr lang="en" sz="1000">
-                <a:highlight>
-                  <a:schemeClr val="dk2"/>
-                </a:highlight>
-                <a:latin typeface="Consolas"/>
-                <a:ea typeface="Consolas"/>
-                <a:cs typeface="Consolas"/>
-                <a:sym typeface="Consolas"/>
-              </a:rPr>
-              <a:t>    float speed)</a:t>
-            </a:r>
-            <a:endParaRPr sz="1000">
-              <a:solidFill>
-                <a:srgbClr val="CCCCCC"/>
-              </a:solidFill>
-              <a:highlight>
-                <a:schemeClr val="dk2"/>
-              </a:highlight>
-              <a:latin typeface="Consolas"/>
-              <a:ea typeface="Consolas"/>
-              <a:cs typeface="Consolas"/>
-              <a:sym typeface="Consolas"/>
-            </a:endParaRPr>
-          </a:p>
-          <a:p>
-            <a:pPr indent="0" lvl="0" marL="0" rtl="0" algn="l">
-              <a:lnSpc>
-                <a:spcPct val="115000"/>
-              </a:lnSpc>
-              <a:spcBef>
-                <a:spcPts val="0"/>
-              </a:spcBef>
-              <a:spcAft>
-                <a:spcPts val="0"/>
-              </a:spcAft>
-              <a:buNone/>
-            </a:pPr>
-            <a:r>
-              <a:rPr lang="en" sz="1000">
-                <a:highlight>
-                  <a:schemeClr val="dk2"/>
-                </a:highlight>
-                <a:latin typeface="Consolas"/>
-                <a:ea typeface="Consolas"/>
-                <a:cs typeface="Consolas"/>
-                <a:sym typeface="Consolas"/>
-              </a:rPr>
-              <a:t>{</a:t>
-            </a:r>
-            <a:endParaRPr sz="1000">
-              <a:solidFill>
-                <a:srgbClr val="CCCCCC"/>
-              </a:solidFill>
-              <a:highlight>
-                <a:schemeClr val="dk2"/>
-              </a:highlight>
-              <a:latin typeface="Consolas"/>
-              <a:ea typeface="Consolas"/>
-              <a:cs typeface="Consolas"/>
-              <a:sym typeface="Consolas"/>
-            </a:endParaRPr>
-          </a:p>
-          <a:p>
-            <a:pPr indent="0" lvl="0" marL="0" rtl="0" algn="l">
-              <a:lnSpc>
-                <a:spcPct val="115000"/>
-              </a:lnSpc>
-              <a:spcBef>
-                <a:spcPts val="0"/>
-              </a:spcBef>
-              <a:spcAft>
-                <a:spcPts val="0"/>
-              </a:spcAft>
-              <a:buNone/>
-            </a:pPr>
-            <a:r>
-              <a:rPr lang="en" sz="1000">
-                <a:highlight>
-                  <a:schemeClr val="dk2"/>
-                </a:highlight>
-                <a:latin typeface="Consolas"/>
-                <a:ea typeface="Consolas"/>
-                <a:cs typeface="Consolas"/>
-                <a:sym typeface="Consolas"/>
-              </a:rPr>
-              <a:t>    (a.Owner as Entity)?.TakeDamage(speed / 100);</a:t>
-            </a:r>
-            <a:endParaRPr sz="1000">
-              <a:solidFill>
-                <a:srgbClr val="CCCCCC"/>
-              </a:solidFill>
-              <a:highlight>
-                <a:schemeClr val="dk2"/>
-              </a:highlight>
-              <a:latin typeface="Consolas"/>
-              <a:ea typeface="Consolas"/>
-              <a:cs typeface="Consolas"/>
-              <a:sym typeface="Consolas"/>
-            </a:endParaRPr>
-          </a:p>
-          <a:p>
-            <a:pPr indent="0" lvl="0" marL="0" rtl="0" algn="l">
-              <a:lnSpc>
-                <a:spcPct val="115000"/>
-              </a:lnSpc>
-              <a:spcBef>
-                <a:spcPts val="0"/>
-              </a:spcBef>
-              <a:spcAft>
-                <a:spcPts val="0"/>
-              </a:spcAft>
-              <a:buNone/>
-            </a:pPr>
-            <a:r>
-              <a:rPr lang="en" sz="1000">
-                <a:highlight>
-                  <a:schemeClr val="dk2"/>
-                </a:highlight>
-                <a:latin typeface="Consolas"/>
-                <a:ea typeface="Consolas"/>
-                <a:cs typeface="Consolas"/>
-                <a:sym typeface="Consolas"/>
-              </a:rPr>
-              <a:t>    (b.Owner as Entity)?.TakeDamage(speed / 100);</a:t>
-            </a:r>
-            <a:endParaRPr sz="1000">
-              <a:solidFill>
-                <a:srgbClr val="CCCCCC"/>
-              </a:solidFill>
-              <a:highlight>
-                <a:schemeClr val="dk2"/>
-              </a:highlight>
-              <a:latin typeface="Consolas"/>
-              <a:ea typeface="Consolas"/>
-              <a:cs typeface="Consolas"/>
-              <a:sym typeface="Consolas"/>
-            </a:endParaRPr>
-          </a:p>
-          <a:p>
-            <a:pPr indent="0" lvl="0" marL="0" rtl="0" algn="l">
-              <a:lnSpc>
-                <a:spcPct val="115000"/>
-              </a:lnSpc>
-              <a:spcBef>
-                <a:spcPts val="0"/>
-              </a:spcBef>
-              <a:spcAft>
-                <a:spcPts val="0"/>
-              </a:spcAft>
-              <a:buNone/>
-            </a:pPr>
-            <a:r>
-              <a:rPr lang="en" sz="1000">
-                <a:highlight>
-                  <a:schemeClr val="dk2"/>
-                </a:highlight>
-                <a:latin typeface="Consolas"/>
-                <a:ea typeface="Consolas"/>
-                <a:cs typeface="Consolas"/>
-                <a:sym typeface="Consolas"/>
-              </a:rPr>
-              <a:t>}</a:t>
-            </a:r>
-            <a:endParaRPr sz="1000">
-              <a:solidFill>
-                <a:srgbClr val="CCCCCC"/>
-              </a:solidFill>
-              <a:highlight>
-                <a:schemeClr val="dk2"/>
-              </a:highlight>
-              <a:latin typeface="Consolas"/>
-              <a:ea typeface="Consolas"/>
-              <a:cs typeface="Consolas"/>
-              <a:sym typeface="Consolas"/>
-            </a:endParaRPr>
-          </a:p>
-          <a:p>
-            <a:pPr indent="0" lvl="0" marL="0" rtl="0" algn="l">
-              <a:lnSpc>
-                <a:spcPct val="115000"/>
-              </a:lnSpc>
-              <a:spcBef>
-                <a:spcPts val="0"/>
-              </a:spcBef>
-              <a:spcAft>
-                <a:spcPts val="0"/>
-              </a:spcAft>
-              <a:buNone/>
-            </a:pPr>
-            <a:r>
-              <a:rPr lang="en" sz="1000">
-                <a:highlight>
-                  <a:schemeClr val="dk2"/>
-                </a:highlight>
-                <a:latin typeface="Consolas"/>
-                <a:ea typeface="Consolas"/>
-                <a:cs typeface="Consolas"/>
-                <a:sym typeface="Consolas"/>
-              </a:rPr>
-              <a:t/>
-            </a:r>
-            <a:endParaRPr sz="1000">
-              <a:solidFill>
-                <a:srgbClr val="CCCCCC"/>
-              </a:solidFill>
-              <a:highlight>
-                <a:schemeClr val="dk2"/>
-              </a:highlight>
-              <a:latin typeface="Consolas"/>
-              <a:ea typeface="Consolas"/>
-              <a:cs typeface="Consolas"/>
-              <a:sym typeface="Consolas"/>
-            </a:endParaRPr>
-          </a:p>
-          <a:p>
-            <a:pPr indent="0" lvl="0" marL="0" rtl="0" algn="l">
-              <a:lnSpc>
-                <a:spcPct val="115000"/>
-              </a:lnSpc>
-              <a:spcBef>
-                <a:spcPts val="0"/>
-              </a:spcBef>
-              <a:spcAft>
-                <a:spcPts val="0"/>
-              </a:spcAft>
-              <a:buNone/>
-            </a:pPr>
-            <a:r>
-              <a:rPr lang="en" sz="1000">
-                <a:highlight>
-                  <a:schemeClr val="dk2"/>
-                </a:highlight>
-                <a:latin typeface="Consolas"/>
-                <a:ea typeface="Consolas"/>
-                <a:cs typeface="Consolas"/>
-                <a:sym typeface="Consolas"/>
-              </a:rPr>
-              <a:t>_physics.Update(deltaSeconds);</a:t>
-            </a:r>
-            <a:endParaRPr sz="1000">
-              <a:solidFill>
-                <a:srgbClr val="CCCCCC"/>
-              </a:solidFill>
-              <a:highlight>
-                <a:schemeClr val="dk2"/>
-              </a:highlight>
-              <a:latin typeface="Consolas"/>
-              <a:ea typeface="Consolas"/>
-              <a:cs typeface="Consolas"/>
-              <a:sym typeface="Consolas"/>
-            </a:endParaRPr>
-          </a:p>
-          <a:p>
-            <a:pPr indent="0" lvl="0" marL="0" rtl="0" algn="l">
-              <a:lnSpc>
-                <a:spcPct val="115000"/>
-              </a:lnSpc>
-              <a:spcBef>
-                <a:spcPts val="0"/>
-              </a:spcBef>
-              <a:spcAft>
-                <a:spcPts val="0"/>
-              </a:spcAft>
-              <a:buNone/>
-            </a:pPr>
-            <a:r>
-              <a:rPr lang="en" sz="1000">
-                <a:highlight>
-                  <a:schemeClr val="dk2"/>
-                </a:highlight>
-                <a:latin typeface="Consolas"/>
-                <a:ea typeface="Consolas"/>
-                <a:cs typeface="Consolas"/>
-                <a:sym typeface="Consolas"/>
-              </a:rPr>
-              <a:t>RemoveDestroyed();</a:t>
-            </a:r>
-            <a:endParaRPr sz="1000">
-              <a:solidFill>
-                <a:srgbClr val="CCCCCC"/>
-              </a:solidFill>
-              <a:highlight>
-                <a:schemeClr val="dk2"/>
-              </a:highlight>
-              <a:latin typeface="Consolas"/>
-              <a:ea typeface="Consolas"/>
-              <a:cs typeface="Consolas"/>
-              <a:sym typeface="Consolas"/>
-            </a:endParaRPr>
-          </a:p>
-          <a:p>
-            <a:pPr indent="0" lvl="0" marL="0" rtl="0" algn="l">
-              <a:lnSpc>
-                <a:spcPct val="115000"/>
-              </a:lnSpc>
-              <a:spcBef>
-                <a:spcPts val="0"/>
-              </a:spcBef>
-              <a:spcAft>
-                <a:spcPts val="0"/>
-              </a:spcAft>
-              <a:buNone/>
-            </a:pPr>
-            <a:r>
-              <a:rPr lang="en" sz="1000">
-                <a:highlight>
-                  <a:schemeClr val="dk2"/>
-                </a:highlight>
-                <a:latin typeface="Consolas"/>
-                <a:ea typeface="Consolas"/>
-                <a:cs typeface="Consolas"/>
-                <a:sym typeface="Consolas"/>
-              </a:rPr>
-              <a:t/>
-            </a:r>
-            <a:endParaRPr sz="1000">
-              <a:solidFill>
-                <a:srgbClr val="CCCCCC"/>
-              </a:solidFill>
-              <a:highlight>
-                <a:schemeClr val="dk2"/>
-              </a:highlight>
-              <a:latin typeface="Consolas"/>
-              <a:ea typeface="Consolas"/>
-              <a:cs typeface="Consolas"/>
-              <a:sym typeface="Consolas"/>
-            </a:endParaRPr>
-          </a:p>
-          <a:p>
-            <a:pPr indent="0" lvl="0" marL="0" rtl="0" algn="l">
-              <a:lnSpc>
-                <a:spcPct val="115000"/>
-              </a:lnSpc>
-              <a:spcBef>
-                <a:spcPts val="0"/>
-              </a:spcBef>
-              <a:spcAft>
-                <a:spcPts val="0"/>
-              </a:spcAft>
-              <a:buNone/>
-            </a:pPr>
-            <a:r>
-              <a:rPr lang="en" sz="1000">
-                <a:highlight>
-                  <a:schemeClr val="dk2"/>
-                </a:highlight>
-                <a:latin typeface="Consolas"/>
-                <a:ea typeface="Consolas"/>
-                <a:cs typeface="Consolas"/>
-                <a:sym typeface="Consolas"/>
-              </a:rPr>
-              <a:t>for (int i = _entities.Count - 1; i &gt;= 0; i--)</a:t>
-            </a:r>
-            <a:endParaRPr sz="1000">
-              <a:solidFill>
-                <a:srgbClr val="CCCCCC"/>
-              </a:solidFill>
-              <a:highlight>
-                <a:schemeClr val="dk2"/>
-              </a:highlight>
-              <a:latin typeface="Consolas"/>
-              <a:ea typeface="Consolas"/>
-              <a:cs typeface="Consolas"/>
-              <a:sym typeface="Consolas"/>
-            </a:endParaRPr>
-          </a:p>
-          <a:p>
-            <a:pPr indent="0" lvl="0" marL="0" rtl="0" algn="l">
-              <a:lnSpc>
-                <a:spcPct val="115000"/>
-              </a:lnSpc>
-              <a:spcBef>
-                <a:spcPts val="0"/>
-              </a:spcBef>
-              <a:spcAft>
-                <a:spcPts val="0"/>
-              </a:spcAft>
-              <a:buNone/>
-            </a:pPr>
-            <a:r>
-              <a:rPr lang="en" sz="1000">
-                <a:highlight>
-                  <a:schemeClr val="dk2"/>
-                </a:highlight>
-                <a:latin typeface="Consolas"/>
-                <a:ea typeface="Consolas"/>
-                <a:cs typeface="Consolas"/>
-                <a:sym typeface="Consolas"/>
-              </a:rPr>
-              <a:t>{</a:t>
-            </a:r>
-            <a:endParaRPr sz="1000">
-              <a:solidFill>
-                <a:srgbClr val="CCCCCC"/>
-              </a:solidFill>
-              <a:highlight>
-                <a:schemeClr val="dk2"/>
-              </a:highlight>
-              <a:latin typeface="Consolas"/>
-              <a:ea typeface="Consolas"/>
-              <a:cs typeface="Consolas"/>
-              <a:sym typeface="Consolas"/>
-            </a:endParaRPr>
-          </a:p>
-          <a:p>
-            <a:pPr indent="0" lvl="0" marL="0" rtl="0" algn="l">
-              <a:lnSpc>
-                <a:spcPct val="115000"/>
-              </a:lnSpc>
-              <a:spcBef>
-                <a:spcPts val="0"/>
-              </a:spcBef>
-              <a:spcAft>
-                <a:spcPts val="0"/>
-              </a:spcAft>
-              <a:buNone/>
-            </a:pPr>
-            <a:r>
-              <a:rPr lang="en" sz="1000">
-                <a:highlight>
-                  <a:schemeClr val="dk2"/>
-                </a:highlight>
-                <a:latin typeface="Consolas"/>
-                <a:ea typeface="Consolas"/>
-                <a:cs typeface="Consolas"/>
-                <a:sym typeface="Consolas"/>
-              </a:rPr>
-              <a:t>    if (!_entities[i].IsDestroyed) continue;</a:t>
-            </a:r>
-            <a:endParaRPr sz="1000">
-              <a:solidFill>
-                <a:srgbClr val="CCCCCC"/>
-              </a:solidFill>
-              <a:highlight>
-                <a:schemeClr val="dk2"/>
-              </a:highlight>
-              <a:latin typeface="Consolas"/>
-              <a:ea typeface="Consolas"/>
-              <a:cs typeface="Consolas"/>
-              <a:sym typeface="Consolas"/>
-            </a:endParaRPr>
-          </a:p>
-          <a:p>
-            <a:pPr indent="0" lvl="0" marL="0" rtl="0" algn="l">
-              <a:lnSpc>
-                <a:spcPct val="115000"/>
-              </a:lnSpc>
-              <a:spcBef>
-                <a:spcPts val="0"/>
-              </a:spcBef>
-              <a:spcAft>
-                <a:spcPts val="0"/>
-              </a:spcAft>
-              <a:buNone/>
-            </a:pPr>
-            <a:r>
-              <a:rPr lang="en" sz="1000">
-                <a:highlight>
-                  <a:schemeClr val="dk2"/>
-                </a:highlight>
-                <a:latin typeface="Consolas"/>
-                <a:ea typeface="Consolas"/>
-                <a:cs typeface="Consolas"/>
-                <a:sym typeface="Consolas"/>
-              </a:rPr>
-              <a:t>    _physics.Destroy(_entities[i].Body);</a:t>
-            </a:r>
-            <a:endParaRPr sz="1000">
-              <a:solidFill>
-                <a:srgbClr val="CCCCCC"/>
-              </a:solidFill>
-              <a:highlight>
-                <a:schemeClr val="dk2"/>
-              </a:highlight>
-              <a:latin typeface="Consolas"/>
-              <a:ea typeface="Consolas"/>
-              <a:cs typeface="Consolas"/>
-              <a:sym typeface="Consolas"/>
-            </a:endParaRPr>
-          </a:p>
-          <a:p>
-            <a:pPr indent="0" lvl="0" marL="0" rtl="0" algn="l">
-              <a:lnSpc>
-                <a:spcPct val="115000"/>
-              </a:lnSpc>
-              <a:spcBef>
-                <a:spcPts val="0"/>
-              </a:spcBef>
-              <a:spcAft>
-                <a:spcPts val="0"/>
-              </a:spcAft>
-              <a:buNone/>
-            </a:pPr>
-            <a:r>
-              <a:rPr lang="en" sz="1000">
-                <a:highlight>
-                  <a:schemeClr val="dk2"/>
-                </a:highlight>
-                <a:latin typeface="Consolas"/>
-                <a:ea typeface="Consolas"/>
-                <a:cs typeface="Consolas"/>
-                <a:sym typeface="Consolas"/>
-              </a:rPr>
-              <a:t>    _entities.RemoveAt(i);</a:t>
-            </a:r>
-            <a:endParaRPr sz="1000">
-              <a:solidFill>
-                <a:srgbClr val="CCCCCC"/>
-              </a:solidFill>
-              <a:highlight>
-                <a:schemeClr val="dk2"/>
-              </a:highlight>
-              <a:latin typeface="Consolas"/>
-              <a:ea typeface="Consolas"/>
-              <a:cs typeface="Consolas"/>
-              <a:sym typeface="Consolas"/>
-            </a:endParaRPr>
-          </a:p>
-          <a:p>
-            <a:pPr indent="0" lvl="0" marL="0" rtl="0" algn="l">
-              <a:lnSpc>
-                <a:spcPct val="115000"/>
-              </a:lnSpc>
-              <a:spcBef>
-                <a:spcPts val="0"/>
-              </a:spcBef>
-              <a:spcAft>
-                <a:spcPts val="0"/>
-              </a:spcAft>
-              <a:buNone/>
-            </a:pPr>
-            <a:r>
-              <a:rPr lang="en" sz="1000">
-                <a:highlight>
-                  <a:schemeClr val="dk2"/>
-                </a:highlight>
-                <a:latin typeface="Consolas"/>
-                <a:ea typeface="Consolas"/>
-                <a:cs typeface="Consolas"/>
-                <a:sym typeface="Consolas"/>
-              </a:rPr>
-              <a:t>}</a:t>
-            </a:r>
-            <a:endParaRPr sz="1000">
-              <a:solidFill>
-                <a:srgbClr val="CCCCCC"/>
-              </a:solidFill>
-              <a:highlight>
-                <a:schemeClr val="dk2"/>
-              </a:highlight>
-              <a:latin typeface="Consolas"/>
-              <a:ea typeface="Consolas"/>
-              <a:cs typeface="Consolas"/>
-              <a:sym typeface="Consolas"/>
-            </a:endParaRPr>
-          </a:p>
-        </p:txBody>
-      </p:sp>
-    </p:spTree>
-  </p:cSld>
-  <p:clrMapOvr>
-    <a:masterClrMapping/>
-  </p:clrMapOvr>
-</p:sld>
-</file>
-
-<file path=ppt/slides/slide17.xml><?xml version="1.0" encoding="utf-8"?>
-<p:sld xmlns:a="http://schemas.openxmlformats.org/drawingml/2006/main" xmlns:p="http://schemas.openxmlformats.org/presentationml/2006/main" xmlns:r="http://schemas.openxmlformats.org/officeDocument/2006/relationships">
-  <p:cSld>
-    <p:spTree>
-      <p:nvGrpSpPr>
-        <p:cNvPr id="1" name=""/>
-        <p:cNvGrpSpPr/>
-        <p:nvPr/>
-      </p:nvGrpSpPr>
-      <p:grpSpPr/>
-      <p:sp>
-        <p:nvSpPr>
-          <p:cNvPr id="128" name="Google Shape;128;p21"/>
-          <p:cNvSpPr txBox="1"/>
-          <p:nvPr>
-            <p:ph type="title"/>
-          </p:nvPr>
-        </p:nvSpPr>
-        <p:spPr>
-          <a:xfrm>
-            <a:off x="311700" y="195615"/>
-            <a:ext cx="8520600" cy="572700"/>
-          </a:xfrm>
-          <a:prstGeom prst="rect">
-            <a:avLst/>
-          </a:prstGeom>
-        </p:spPr>
-        <p:txBody>
-          <a:bodyPr anchorCtr="0" anchor="t" bIns="91425" lIns="91425" spcFirstLastPara="1" rIns="91425" wrap="square" tIns="91425">
-            <a:normAutofit fontScale="90000"/>
-          </a:bodyPr>
-          <a:lstStyle/>
-          <a:p>
-            <a:pPr indent="0" lvl="0" marL="0" rtl="0" algn="l">
-              <a:spcBef>
-                <a:spcPts val="0"/>
-              </a:spcBef>
-              <a:spcAft>
-                <a:spcPts val="0"/>
-              </a:spcAft>
-              <a:buNone/>
-            </a:pPr>
-            <a:r>
-              <a:rPr lang="en">
-                <a:solidFill>
-                  <a:schemeClr val="accent5"/>
-                </a:solidFill>
-              </a:rPr>
-              <a:t>Events Implementation</a:t>
-            </a:r>
-            <a:endParaRPr>
-              <a:solidFill>
-                <a:schemeClr val="accent5"/>
-              </a:solidFill>
-            </a:endParaRPr>
-          </a:p>
-        </p:txBody>
-      </p:sp>
-      <p:sp>
-        <p:nvSpPr>
-          <p:cNvPr id="129" name="Google Shape;129;p21"/>
-          <p:cNvSpPr txBox="1"/>
-          <p:nvPr>
-            <p:ph idx="1" type="body"/>
-          </p:nvPr>
-        </p:nvSpPr>
-        <p:spPr>
-          <a:xfrm>
-            <a:off x="311700" y="885950"/>
-            <a:ext cx="8520600" cy="4023300"/>
-          </a:xfrm>
-          <a:prstGeom prst="rect">
-            <a:avLst/>
-          </a:prstGeom>
-        </p:spPr>
-        <p:txBody>
-          <a:bodyPr anchorCtr="0" anchor="ctr" bIns="91425" lIns="91425" spcFirstLastPara="1" rIns="91425" wrap="square" tIns="91425">
-            <a:normAutofit/>
-          </a:bodyPr>
-          <a:lstStyle/>
-          <a:p>
-            <a:pPr indent="0" lvl="0" marL="0" rtl="0" algn="ctr">
-              <a:spcBef>
-                <a:spcPts val="0"/>
-              </a:spcBef>
-              <a:spcAft>
-                <a:spcPts val="1200"/>
-              </a:spcAft>
-              <a:buNone/>
-            </a:pPr>
-            <a:r>
-              <a:rPr lang="en" sz="2900">
-                <a:latin typeface="VT323"/>
-                <a:ea typeface="VT323"/>
-                <a:cs typeface="VT323"/>
-                <a:sym typeface="VT323"/>
-              </a:rPr>
-              <a:t>DEMO!</a:t>
-            </a:r>
-            <a:endParaRPr/>
-          </a:p>
-          <a:p>
-            <a:pPr indent="0" lvl="0" marL="0" rtl="0" algn="ctr">
-              <a:spcBef>
-                <a:spcPts val="0"/>
-              </a:spcBef>
-              <a:spcAft>
-                <a:spcPts val="0"/>
-              </a:spcAft>
-              <a:buNone/>
-            </a:pPr>
-            <a:r>
-              <a:rPr lang="en" sz="1800"/>
-              <a:t>Birds2: hits that damage, removed after the step</a:t>
-            </a:r>
-            <a:endParaRPr sz="1800"/>
           </a:p>
         </p:txBody>
       </p:sp>
@@ -10751,7 +10246,7 @@
             </a:pPr>
             <a:r>
               <a:rPr lang="en"/>
-              <a:t>Prototype</a:t>
+              <a:t>Destroying Safely</a:t>
             </a:r>
             <a:endParaRPr/>
           </a:p>
@@ -10799,7 +10294,79 @@
                   <a:srgbClr val="DEE2E6"/>
                 </a:solidFill>
               </a:rPr>
-              <a:t>“Create new objects by copying a prototype”</a:t>
+              <a:t>Not in the hit handler</a:t>
+            </a:r>
+            <a:endParaRPr/>
+          </a:p>
+          <a:p>
+            <a:pPr indent="-317500" lvl="1" marL="914400" rtl="0" algn="l">
+              <a:buClr>
+                <a:srgbClr val="6C757D"/>
+              </a:buClr>
+              <a:spcBef>
+                <a:spcPts val="0"/>
+              </a:spcBef>
+              <a:spcAft>
+                <a:spcPts val="0"/>
+              </a:spcAft>
+              <a:buSzPts val="1400"/>
+              <a:buChar char="○"/>
+            </a:pPr>
+            <a:r>
+              <a:rPr lang="en" sz="1400">
+                <a:solidFill>
+                  <a:srgbClr val="6C757D"/>
+                </a:solidFill>
+              </a:rPr>
+              <a:t>More hits may be about the body you destroyed</a:t>
+            </a:r>
+            <a:endParaRPr/>
+          </a:p>
+          <a:p>
+            <a:pPr indent="-317500" lvl="1" marL="914400" rtl="0" algn="l">
+              <a:buClr>
+                <a:srgbClr val="6C757D"/>
+              </a:buClr>
+              <a:spcBef>
+                <a:spcPts val="0"/>
+              </a:spcBef>
+              <a:spcAft>
+                <a:spcPts val="0"/>
+              </a:spcAft>
+              <a:buSzPts val="1400"/>
+              <a:buChar char="○"/>
+            </a:pPr>
+            <a:r>
+              <a:rPr lang="en" sz="1400">
+                <a:solidFill>
+                  <a:srgbClr val="6C757D"/>
+                </a:solidFill>
+              </a:rPr>
+              <a:t>Many libraries crash if the world changes during a callback</a:t>
+            </a:r>
+            <a:endParaRPr/>
+          </a:p>
+          <a:p>
+            <a:pPr indent="-317500" lvl="1" marL="914400" rtl="0" algn="l">
+              <a:buClr>
+                <a:srgbClr val="6C757D"/>
+              </a:buClr>
+              <a:spcBef>
+                <a:spcPts val="0"/>
+              </a:spcBef>
+              <a:spcAft>
+                <a:spcPts val="0"/>
+              </a:spcAft>
+              <a:buSzPts val="1400"/>
+              <a:buChar char="○"/>
+            </a:pPr>
+            <a:r>
+              <a:rPr lang="en" sz="1400">
+                <a:solidFill>
+                  <a:srgbClr val="6C757D"/>
+                </a:solidFill>
+              </a:rPr>
+              <a:t>You may be looping over the list</a:t>
             </a:r>
             <a:endParaRPr/>
           </a:p>
@@ -10823,7 +10390,7 @@
                   <a:srgbClr val="DEE2E6"/>
                 </a:solidFill>
               </a:rPr>
-              <a:t>A configured entity, not in the world</a:t>
+              <a:t>Mark now, remove at a safe point</a:t>
             </a:r>
             <a:endParaRPr/>
           </a:p>
@@ -10847,55 +10414,7 @@
                   <a:srgbClr val="DEE2E6"/>
                 </a:solidFill>
               </a:rPr>
-              <a:t>Copy it, and give the copy a body</a:t>
-            </a:r>
-            <a:endParaRPr/>
-          </a:p>
-          <a:p>
-            <a:pPr indent="-330200" lvl="0" marL="457200" rtl="0" algn="l">
-              <a:buClr>
-                <a:srgbClr val="DEE2E6"/>
-              </a:buClr>
-              <a:spcBef>
-                <a:spcPts val="0"/>
-              </a:spcBef>
-              <a:spcAft>
-                <a:spcPts val="0"/>
-              </a:spcAft>
-              <a:buSzPts val="1600"/>
-              <a:buChar char="●"/>
-            </a:pPr>
-            <a:r>
-              <a:rPr lang="en" sz="1600">
-                <a:solidFill>
-                  <a:srgbClr val="DEE2E6"/>
-                </a:solidFill>
-              </a:rPr>
-              <a:t>Prefabs: one prototype per kind, by name</a:t>
-            </a:r>
-            <a:endParaRPr/>
-          </a:p>
-          <a:p>
-            <a:pPr indent="-317500" lvl="1" marL="914400" rtl="0" algn="l">
-              <a:buClr>
-                <a:srgbClr val="6C757D"/>
-              </a:buClr>
-              <a:spcBef>
-                <a:spcPts val="0"/>
-              </a:spcBef>
-              <a:spcAft>
-                <a:spcPts val="0"/>
-              </a:spcAft>
-              <a:buSzPts val="1400"/>
-              <a:buChar char="○"/>
-            </a:pPr>
-            <a:r>
-              <a:rPr lang="en" sz="1400">
-                <a:solidFill>
-                  <a:srgbClr val="6C757D"/>
-                </a:solidFill>
-              </a:rPr>
-              <a:t>A big pig: a Pig with a bigger radius, not a subclass</a:t>
+              <a:t>Loop backwards when removing</a:t>
             </a:r>
             <a:endParaRPr/>
           </a:p>
@@ -10946,7 +10465,7 @@
                 <a:cs typeface="Consolas"/>
                 <a:sym typeface="Consolas"/>
               </a:rPr>
-              <a:t>public Entity Clone()</a:t>
+              <a:t>void OnHit(PhysicsBody a, PhysicsBody b,</a:t>
             </a:r>
             <a:endParaRPr sz="1000">
               <a:solidFill>
@@ -10984,7 +10503,7 @@
                 <a:cs typeface="Consolas"/>
                 <a:sym typeface="Consolas"/>
               </a:rPr>
-              <a:t>{</a:t>
+              <a:t>    float speed)</a:t>
             </a:r>
             <a:endParaRPr sz="1000">
               <a:solidFill>
@@ -11022,7 +10541,7 @@
                 <a:cs typeface="Consolas"/>
                 <a:sym typeface="Consolas"/>
               </a:rPr>
-              <a:t>    var copy = (Entity)MemberwiseClone();</a:t>
+              <a:t>{</a:t>
             </a:r>
             <a:endParaRPr sz="1000">
               <a:solidFill>
@@ -11060,7 +10579,7 @@
                 <a:cs typeface="Consolas"/>
                 <a:sym typeface="Consolas"/>
               </a:rPr>
-              <a:t>    copy.Body = null;</a:t>
+              <a:t>    (a.Owner as Entity)?.TakeDamage(speed / 100);</a:t>
             </a:r>
             <a:endParaRPr sz="1000">
               <a:solidFill>
@@ -11098,7 +10617,7 @@
                 <a:cs typeface="Consolas"/>
                 <a:sym typeface="Consolas"/>
               </a:rPr>
-              <a:t>    return copy;</a:t>
+              <a:t>    (b.Owner as Entity)?.TakeDamage(speed / 100);</a:t>
             </a:r>
             <a:endParaRPr sz="1000">
               <a:solidFill>
@@ -11212,7 +10731,7 @@
                 <a:cs typeface="Consolas"/>
                 <a:sym typeface="Consolas"/>
               </a:rPr>
-              <a:t>// Prefabs.cs</a:t>
+              <a:t>_physics.Update(deltaSeconds);</a:t>
             </a:r>
             <a:endParaRPr sz="1000">
               <a:solidFill>
@@ -11250,7 +10769,7 @@
                 <a:cs typeface="Consolas"/>
                 <a:sym typeface="Consolas"/>
               </a:rPr>
-              <a:t>Add("wood-post", new Block(Materials.Wood,</a:t>
+              <a:t>RemoveDestroyed();</a:t>
             </a:r>
             <a:endParaRPr sz="1000">
               <a:solidFill>
@@ -11288,7 +10807,7 @@
                 <a:cs typeface="Consolas"/>
                 <a:sym typeface="Consolas"/>
               </a:rPr>
-              <a:t>    post, 8, 500, atlas.GetRegion("wood-post")));</a:t>
+              <a:t/>
             </a:r>
             <a:endParaRPr sz="1000">
               <a:solidFill>
@@ -11326,7 +10845,7 @@
                 <a:cs typeface="Consolas"/>
                 <a:sym typeface="Consolas"/>
               </a:rPr>
-              <a:t>Add("big-pig", new Pig(30, 6, 5000,</a:t>
+              <a:t>for (int i = _entities.Count - 1; i &gt;= 0; i--)</a:t>
             </a:r>
             <a:endParaRPr sz="1000">
               <a:solidFill>
@@ -11364,7 +10883,7 @@
                 <a:cs typeface="Consolas"/>
                 <a:sym typeface="Consolas"/>
               </a:rPr>
-              <a:t>    atlas.GetRegion("big-pig")));</a:t>
+              <a:t>{</a:t>
             </a:r>
             <a:endParaRPr sz="1000">
               <a:solidFill>
@@ -11402,7 +10921,7 @@
                 <a:cs typeface="Consolas"/>
                 <a:sym typeface="Consolas"/>
               </a:rPr>
-              <a:t/>
+              <a:t>    if (!_entities[i].IsDestroyed) continue;</a:t>
             </a:r>
             <a:endParaRPr sz="1000">
               <a:solidFill>
@@ -11440,7 +10959,7 @@
                 <a:cs typeface="Consolas"/>
                 <a:sym typeface="Consolas"/>
               </a:rPr>
-              <a:t>Entity entity = _prototypes[name].Clone();</a:t>
+              <a:t>    _physics.Destroy(_entities[i].Body);</a:t>
             </a:r>
             <a:endParaRPr sz="1000">
               <a:solidFill>
@@ -11478,7 +10997,45 @@
                 <a:cs typeface="Consolas"/>
                 <a:sym typeface="Consolas"/>
               </a:rPr>
-              <a:t>entity.Spawn(world, position, rotation);</a:t>
+              <a:t>    _entities.RemoveAt(i);</a:t>
+            </a:r>
+            <a:endParaRPr sz="1000">
+              <a:solidFill>
+                <a:srgbClr val="CCCCCC"/>
+              </a:solidFill>
+              <a:highlight>
+                <a:schemeClr val="dk2"/>
+              </a:highlight>
+              <a:latin typeface="Consolas"/>
+              <a:ea typeface="Consolas"/>
+              <a:cs typeface="Consolas"/>
+              <a:sym typeface="Consolas"/>
+            </a:endParaRPr>
+          </a:p>
+          <a:p>
+            <a:pPr indent="0" lvl="0" marL="0" rtl="0" algn="l">
+              <a:lnSpc>
+                <a:spcPct val="115000"/>
+              </a:lnSpc>
+              <a:spcBef>
+                <a:spcPts val="0"/>
+              </a:spcBef>
+              <a:spcAft>
+                <a:spcPts val="0"/>
+              </a:spcAft>
+              <a:buNone/>
+            </a:pPr>
+            <a:r>
+              <a:rPr lang="en" sz="1000">
+                <a:highlight>
+                  <a:schemeClr val="dk2"/>
+                </a:highlight>
+                <a:latin typeface="Consolas"/>
+                <a:ea typeface="Consolas"/>
+                <a:cs typeface="Consolas"/>
+                <a:sym typeface="Consolas"/>
+              </a:rPr>
+              <a:t>}</a:t>
             </a:r>
             <a:endParaRPr sz="1000">
               <a:solidFill>
@@ -11515,7 +11072,7 @@
       <p:grpSpPr/>
       <p:sp>
         <p:nvSpPr>
-          <p:cNvPr id="140" name="Google Shape;140;p23"/>
+          <p:cNvPr id="128" name="Google Shape;128;p21"/>
           <p:cNvSpPr txBox="1"/>
           <p:nvPr>
             <p:ph type="title"/>
@@ -11546,506 +11103,79 @@
               <a:buNone/>
             </a:pPr>
             <a:r>
-              <a:rPr lang="en"/>
-              <a:t>Levels From Prefabs</a:t>
-            </a:r>
-            <a:endParaRPr/>
+              <a:rPr lang="en">
+                <a:solidFill>
+                  <a:schemeClr val="accent5"/>
+                </a:solidFill>
+              </a:rPr>
+              <a:t>Events Implementation</a:t>
+            </a:r>
+            <a:endParaRPr>
+              <a:solidFill>
+                <a:schemeClr val="accent5"/>
+              </a:solidFill>
+            </a:endParaRPr>
           </a:p>
         </p:txBody>
       </p:sp>
       <p:sp>
         <p:nvSpPr>
-          <p:cNvPr id="293" name="Google Shape;293;p45"/>
+          <p:cNvPr id="129" name="Google Shape;129;p21"/>
           <p:cNvSpPr txBox="1"/>
           <p:nvPr>
-            <p:ph type="title"/>
+            <p:ph idx="1" type="body"/>
           </p:nvPr>
         </p:nvSpPr>
         <p:spPr>
           <a:xfrm>
-            <a:off x="311700" y="1152475"/>
-            <a:ext cx="3700000" cy="3500000"/>
+            <a:off x="311700" y="885950"/>
+            <a:ext cx="8520600" cy="4023300"/>
           </a:xfrm>
           <a:prstGeom prst="rect">
             <a:avLst/>
           </a:prstGeom>
         </p:spPr>
         <p:txBody>
-          <a:bodyPr anchorCtr="0" anchor="t" bIns="91425" lIns="91425" spcFirstLastPara="1" rIns="91425" wrap="square" tIns="91425">
-            <a:normAutofit fontScale="90000"/>
+          <a:bodyPr anchorCtr="0" anchor="ctr" bIns="91425" lIns="91425" spcFirstLastPara="1" rIns="91425" wrap="square" tIns="91425">
+            <a:normAutofit/>
           </a:bodyPr>
           <a:lstStyle/>
           <a:p>
-            <a:pPr indent="-330200" lvl="0" marL="457200" rtl="0" algn="l">
-              <a:buClr>
-                <a:srgbClr val="DEE2E6"/>
-              </a:buClr>
-              <a:spcBef>
-                <a:spcPts val="0"/>
-              </a:spcBef>
-              <a:spcAft>
-                <a:spcPts val="0"/>
-              </a:spcAft>
-              <a:buSzPts val="1600"/>
-              <a:buChar char="●"/>
-            </a:pPr>
-            <a:r>
-              <a:rPr lang="en" sz="1600">
-                <a:solidFill>
-                  <a:srgbClr val="DEE2E6"/>
-                </a:solidFill>
-              </a:rPr>
-              <a:t>A level: prefab names and positions</a:t>
+            <a:pPr indent="0" lvl="0" marL="0" rtl="0" algn="ctr">
+              <a:spcBef>
+                <a:spcPts val="0"/>
+              </a:spcBef>
+              <a:spcAft>
+                <a:spcPts val="1200"/>
+              </a:spcAft>
+              <a:buNone/>
+            </a:pPr>
+            <a:r>
+              <a:rPr lang="en" sz="2900">
+                <a:latin typeface="VT323"/>
+                <a:ea typeface="VT323"/>
+                <a:cs typeface="VT323"/>
+                <a:sym typeface="VT323"/>
+              </a:rPr>
+              <a:t>DEMO!</a:t>
             </a:r>
             <a:endParaRPr/>
           </a:p>
           <a:p>
-            <a:pPr indent="-317500" lvl="1" marL="914400" rtl="0" algn="l">
-              <a:buClr>
-                <a:srgbClr val="6C757D"/>
-              </a:buClr>
-              <a:spcBef>
-                <a:spcPts val="0"/>
-              </a:spcBef>
-              <a:spcAft>
-                <a:spcPts val="0"/>
-              </a:spcAft>
-              <a:buSzPts val="1400"/>
-              <a:buChar char="○"/>
-            </a:pPr>
-            <a:r>
-              <a:rPr lang="en" sz="1400">
-                <a:solidFill>
-                  <a:srgbClr val="6C757D"/>
-                </a:solidFill>
-              </a:rPr>
-              <a:t>Levels as data, as in Sokoban</a:t>
-            </a:r>
-            <a:endParaRPr/>
-          </a:p>
-          <a:p>
-            <a:pPr indent="-330200" lvl="0" marL="457200" rtl="0" algn="l">
-              <a:buClr>
-                <a:srgbClr val="DEE2E6"/>
-              </a:buClr>
-              <a:spcBef>
-                <a:spcPts val="0"/>
-              </a:spcBef>
-              <a:spcAft>
-                <a:spcPts val="0"/>
-              </a:spcAft>
-              <a:buSzPts val="1600"/>
-              <a:buChar char="●"/>
-            </a:pPr>
-            <a:r>
-              <a:rPr lang="en" sz="1600">
-                <a:solidFill>
-                  <a:srgbClr val="DEE2E6"/>
-                </a:solidFill>
-              </a:rPr>
-              <a:t>MemberwiseClone: a shallow copy</a:t>
-            </a:r>
-            <a:endParaRPr/>
-          </a:p>
-          <a:p>
-            <a:pPr indent="-317500" lvl="1" marL="914400" rtl="0" algn="l">
-              <a:buClr>
-                <a:srgbClr val="6C757D"/>
-              </a:buClr>
-              <a:spcBef>
-                <a:spcPts val="0"/>
-              </a:spcBef>
-              <a:spcAft>
-                <a:spcPts val="0"/>
-              </a:spcAft>
-              <a:buSzPts val="1400"/>
-              <a:buChar char="○"/>
-            </a:pPr>
-            <a:r>
-              <a:rPr lang="en" sz="1400">
-                <a:solidFill>
-                  <a:srgbClr val="6C757D"/>
-                </a:solidFill>
-              </a:rPr>
-              <a:t>Sharing a sprite: fine</a:t>
-            </a:r>
-            <a:endParaRPr/>
-          </a:p>
-          <a:p>
-            <a:pPr indent="-317500" lvl="1" marL="914400" rtl="0" algn="l">
-              <a:buClr>
-                <a:srgbClr val="6C757D"/>
-              </a:buClr>
-              <a:spcBef>
-                <a:spcPts val="0"/>
-              </a:spcBef>
-              <a:spcAft>
-                <a:spcPts val="0"/>
-              </a:spcAft>
-              <a:buSzPts val="1400"/>
-              <a:buChar char="○"/>
-            </a:pPr>
-            <a:r>
-              <a:rPr lang="en" sz="1400">
-                <a:solidFill>
-                  <a:srgbClr val="6C757D"/>
-                </a:solidFill>
-              </a:rPr>
-              <a:t>Sharing a body: two blocks move as one</a:t>
-            </a:r>
-            <a:endParaRPr/>
-          </a:p>
-          <a:p>
-            <a:pPr indent="-330200" lvl="0" marL="457200" rtl="0" algn="l">
-              <a:buClr>
-                <a:srgbClr val="DEE2E6"/>
-              </a:buClr>
-              <a:spcBef>
-                <a:spcPts val="0"/>
-              </a:spcBef>
-              <a:spcAft>
-                <a:spcPts val="0"/>
-              </a:spcAft>
-              <a:buSzPts val="1600"/>
-              <a:buChar char="●"/>
-            </a:pPr>
-            <a:r>
-              <a:rPr lang="en" sz="1600">
-                <a:solidFill>
-                  <a:srgbClr val="DEE2E6"/>
-                </a:solidFill>
-              </a:rPr>
-              <a:t>Prototype vs. Type Object: in Plants vs. Zombies</a:t>
-            </a:r>
-            <a:endParaRPr/>
-          </a:p>
-        </p:txBody>
-      </p:sp>
-      <p:sp>
-        <p:nvSpPr>
-          <p:cNvPr id="141" name="Google Shape;141;p23"/>
-          <p:cNvSpPr txBox="1"/>
-          <p:nvPr>
-            <p:ph idx="2" type="body"/>
-          </p:nvPr>
-        </p:nvSpPr>
-        <p:spPr>
-          <a:xfrm>
-            <a:off x="4150000" y="1152475"/>
-            <a:ext cx="4750000" cy="3600000"/>
-          </a:xfrm>
-          <a:prstGeom prst="rect">
-            <a:avLst/>
-          </a:prstGeom>
-        </p:spPr>
-        <p:txBody>
-          <a:bodyPr anchorCtr="0" anchor="t" bIns="91425" lIns="91425" spcFirstLastPara="1" rIns="91425" wrap="square" tIns="91425">
-            <a:noAutofit/>
-          </a:bodyPr>
-          <a:lstStyle/>
-          <a:p>
-            <a:pPr indent="0" lvl="0" marL="0" rtl="0" algn="l">
-              <a:lnSpc>
-                <a:spcPct val="115000"/>
-              </a:lnSpc>
-              <a:spcBef>
-                <a:spcPts val="0"/>
-              </a:spcBef>
-              <a:spcAft>
-                <a:spcPts val="0"/>
-              </a:spcAft>
-              <a:buNone/>
-            </a:pPr>
-            <a:r>
-              <a:rPr lang="en" sz="1000">
-                <a:highlight>
-                  <a:schemeClr val="dk2"/>
-                </a:highlight>
-                <a:latin typeface="Consolas"/>
-                <a:ea typeface="Consolas"/>
-                <a:cs typeface="Consolas"/>
-                <a:sym typeface="Consolas"/>
-              </a:rPr>
-              <a:t># level1.txt</a:t>
-            </a:r>
-            <a:endParaRPr sz="1000">
-              <a:solidFill>
-                <a:srgbClr val="CCCCCC"/>
-              </a:solidFill>
-              <a:highlight>
-                <a:schemeClr val="dk2"/>
-              </a:highlight>
-              <a:latin typeface="Consolas"/>
-              <a:ea typeface="Consolas"/>
-              <a:cs typeface="Consolas"/>
-              <a:sym typeface="Consolas"/>
-            </a:endParaRPr>
-          </a:p>
-          <a:p>
-            <a:pPr indent="0" lvl="0" marL="0" rtl="0" algn="l">
-              <a:lnSpc>
-                <a:spcPct val="115000"/>
-              </a:lnSpc>
-              <a:spcBef>
-                <a:spcPts val="0"/>
-              </a:spcBef>
-              <a:spcAft>
-                <a:spcPts val="0"/>
-              </a:spcAft>
-              <a:buNone/>
-            </a:pPr>
-            <a:r>
-              <a:rPr lang="en" sz="1000">
-                <a:highlight>
-                  <a:schemeClr val="dk2"/>
-                </a:highlight>
-                <a:latin typeface="Consolas"/>
-                <a:ea typeface="Consolas"/>
-                <a:cs typeface="Consolas"/>
-                <a:sym typeface="Consolas"/>
-              </a:rPr>
-              <a:t>birds 3</a:t>
-            </a:r>
-            <a:endParaRPr sz="1000">
-              <a:solidFill>
-                <a:srgbClr val="CCCCCC"/>
-              </a:solidFill>
-              <a:highlight>
-                <a:schemeClr val="dk2"/>
-              </a:highlight>
-              <a:latin typeface="Consolas"/>
-              <a:ea typeface="Consolas"/>
-              <a:cs typeface="Consolas"/>
-              <a:sym typeface="Consolas"/>
-            </a:endParaRPr>
-          </a:p>
-          <a:p>
-            <a:pPr indent="0" lvl="0" marL="0" rtl="0" algn="l">
-              <a:lnSpc>
-                <a:spcPct val="115000"/>
-              </a:lnSpc>
-              <a:spcBef>
-                <a:spcPts val="0"/>
-              </a:spcBef>
-              <a:spcAft>
-                <a:spcPts val="0"/>
-              </a:spcAft>
-              <a:buNone/>
-            </a:pPr>
-            <a:r>
-              <a:rPr lang="en" sz="1000">
-                <a:highlight>
-                  <a:schemeClr val="dk2"/>
-                </a:highlight>
-                <a:latin typeface="Consolas"/>
-                <a:ea typeface="Consolas"/>
-                <a:cs typeface="Consolas"/>
-                <a:sym typeface="Consolas"/>
-              </a:rPr>
-              <a:t>wood-post    880 590 0</a:t>
-            </a:r>
-            <a:endParaRPr sz="1000">
-              <a:solidFill>
-                <a:srgbClr val="CCCCCC"/>
-              </a:solidFill>
-              <a:highlight>
-                <a:schemeClr val="dk2"/>
-              </a:highlight>
-              <a:latin typeface="Consolas"/>
-              <a:ea typeface="Consolas"/>
-              <a:cs typeface="Consolas"/>
-              <a:sym typeface="Consolas"/>
-            </a:endParaRPr>
-          </a:p>
-          <a:p>
-            <a:pPr indent="0" lvl="0" marL="0" rtl="0" algn="l">
-              <a:lnSpc>
-                <a:spcPct val="115000"/>
-              </a:lnSpc>
-              <a:spcBef>
-                <a:spcPts val="0"/>
-              </a:spcBef>
-              <a:spcAft>
-                <a:spcPts val="0"/>
-              </a:spcAft>
-              <a:buNone/>
-            </a:pPr>
-            <a:r>
-              <a:rPr lang="en" sz="1000">
-                <a:highlight>
-                  <a:schemeClr val="dk2"/>
-                </a:highlight>
-                <a:latin typeface="Consolas"/>
-                <a:ea typeface="Consolas"/>
-                <a:cs typeface="Consolas"/>
-                <a:sym typeface="Consolas"/>
-              </a:rPr>
-              <a:t>wood-post   1040 590 0</a:t>
-            </a:r>
-            <a:endParaRPr sz="1000">
-              <a:solidFill>
-                <a:srgbClr val="CCCCCC"/>
-              </a:solidFill>
-              <a:highlight>
-                <a:schemeClr val="dk2"/>
-              </a:highlight>
-              <a:latin typeface="Consolas"/>
-              <a:ea typeface="Consolas"/>
-              <a:cs typeface="Consolas"/>
-              <a:sym typeface="Consolas"/>
-            </a:endParaRPr>
-          </a:p>
-          <a:p>
-            <a:pPr indent="0" lvl="0" marL="0" rtl="0" algn="l">
-              <a:lnSpc>
-                <a:spcPct val="115000"/>
-              </a:lnSpc>
-              <a:spcBef>
-                <a:spcPts val="0"/>
-              </a:spcBef>
-              <a:spcAft>
-                <a:spcPts val="0"/>
-              </a:spcAft>
-              <a:buNone/>
-            </a:pPr>
-            <a:r>
-              <a:rPr lang="en" sz="1000">
-                <a:highlight>
-                  <a:schemeClr val="dk2"/>
-                </a:highlight>
-                <a:latin typeface="Consolas"/>
-                <a:ea typeface="Consolas"/>
-                <a:cs typeface="Consolas"/>
-                <a:sym typeface="Consolas"/>
-              </a:rPr>
-              <a:t>wood-plank   960 530 0</a:t>
-            </a:r>
-            <a:endParaRPr sz="1000">
-              <a:solidFill>
-                <a:srgbClr val="CCCCCC"/>
-              </a:solidFill>
-              <a:highlight>
-                <a:schemeClr val="dk2"/>
-              </a:highlight>
-              <a:latin typeface="Consolas"/>
-              <a:ea typeface="Consolas"/>
-              <a:cs typeface="Consolas"/>
-              <a:sym typeface="Consolas"/>
-            </a:endParaRPr>
-          </a:p>
-          <a:p>
-            <a:pPr indent="0" lvl="0" marL="0" rtl="0" algn="l">
-              <a:lnSpc>
-                <a:spcPct val="115000"/>
-              </a:lnSpc>
-              <a:spcBef>
-                <a:spcPts val="0"/>
-              </a:spcBef>
-              <a:spcAft>
-                <a:spcPts val="0"/>
-              </a:spcAft>
-              <a:buNone/>
-            </a:pPr>
-            <a:r>
-              <a:rPr lang="en" sz="1000">
-                <a:highlight>
-                  <a:schemeClr val="dk2"/>
-                </a:highlight>
-                <a:latin typeface="Consolas"/>
-                <a:ea typeface="Consolas"/>
-                <a:cs typeface="Consolas"/>
-                <a:sym typeface="Consolas"/>
-              </a:rPr>
-              <a:t>pig          960 618 0</a:t>
-            </a:r>
-            <a:endParaRPr sz="1000">
-              <a:solidFill>
-                <a:srgbClr val="CCCCCC"/>
-              </a:solidFill>
-              <a:highlight>
-                <a:schemeClr val="dk2"/>
-              </a:highlight>
-              <a:latin typeface="Consolas"/>
-              <a:ea typeface="Consolas"/>
-              <a:cs typeface="Consolas"/>
-              <a:sym typeface="Consolas"/>
-            </a:endParaRPr>
-          </a:p>
-          <a:p>
-            <a:pPr indent="0" lvl="0" marL="0" rtl="0" algn="l">
-              <a:lnSpc>
-                <a:spcPct val="115000"/>
-              </a:lnSpc>
-              <a:spcBef>
-                <a:spcPts val="0"/>
-              </a:spcBef>
-              <a:spcAft>
-                <a:spcPts val="0"/>
-              </a:spcAft>
-              <a:buNone/>
-            </a:pPr>
-            <a:r>
-              <a:rPr lang="en" sz="1000">
-                <a:highlight>
-                  <a:schemeClr val="dk2"/>
-                </a:highlight>
-                <a:latin typeface="Consolas"/>
-                <a:ea typeface="Consolas"/>
-                <a:cs typeface="Consolas"/>
-                <a:sym typeface="Consolas"/>
-              </a:rPr>
-              <a:t>glass-box    960 495 0</a:t>
-            </a:r>
-            <a:endParaRPr sz="1000">
-              <a:solidFill>
-                <a:srgbClr val="CCCCCC"/>
-              </a:solidFill>
-              <a:highlight>
-                <a:schemeClr val="dk2"/>
-              </a:highlight>
-              <a:latin typeface="Consolas"/>
-              <a:ea typeface="Consolas"/>
-              <a:cs typeface="Consolas"/>
-              <a:sym typeface="Consolas"/>
-            </a:endParaRPr>
-          </a:p>
-          <a:p>
-            <a:pPr indent="0" lvl="0" marL="0" rtl="0" algn="l">
-              <a:lnSpc>
-                <a:spcPct val="115000"/>
-              </a:lnSpc>
-              <a:spcBef>
-                <a:spcPts val="0"/>
-              </a:spcBef>
-              <a:spcAft>
-                <a:spcPts val="0"/>
-              </a:spcAft>
-              <a:buNone/>
-            </a:pPr>
-            <a:r>
-              <a:rPr lang="en" sz="1000">
-                <a:highlight>
-                  <a:schemeClr val="dk2"/>
-                </a:highlight>
-                <a:latin typeface="Consolas"/>
-                <a:ea typeface="Consolas"/>
-                <a:cs typeface="Consolas"/>
-                <a:sym typeface="Consolas"/>
-              </a:rPr>
-              <a:t>pig          960 448 0</a:t>
-            </a:r>
-            <a:endParaRPr sz="1000">
-              <a:solidFill>
-                <a:srgbClr val="CCCCCC"/>
-              </a:solidFill>
-              <a:highlight>
-                <a:schemeClr val="dk2"/>
-              </a:highlight>
-              <a:latin typeface="Consolas"/>
-              <a:ea typeface="Consolas"/>
-              <a:cs typeface="Consolas"/>
-              <a:sym typeface="Consolas"/>
-            </a:endParaRPr>
+            <a:pPr indent="0" lvl="0" marL="0" rtl="0" algn="ctr">
+              <a:spcBef>
+                <a:spcPts val="0"/>
+              </a:spcBef>
+              <a:spcAft>
+                <a:spcPts val="0"/>
+              </a:spcAft>
+              <a:buNone/>
+            </a:pPr>
+            <a:r>
+              <a:rPr lang="en" sz="1800"/>
+              <a:t>Birds2: hits that damage, removed after the step</a:t>
+            </a:r>
+            <a:endParaRPr sz="1800"/>
           </a:p>
         </p:txBody>
       </p:sp>
@@ -12182,6 +11312,1478 @@
       <p:grpSpPr/>
       <p:sp>
         <p:nvSpPr>
+          <p:cNvPr id="2" name="Title 1"/>
+          <p:cNvSpPr>
+            <a:spLocks noGrp="1"/>
+          </p:cNvSpPr>
+          <p:nvPr>
+            <p:ph type="title"/>
+          </p:nvPr>
+        </p:nvSpPr>
+        <p:spPr/>
+        <p:txBody>
+          <a:bodyPr/>
+          <a:lstStyle/>
+          <a:p>
+            <a:pPr indent="0" lvl="0" marL="0" rtl="0" algn="l">
+              <a:spcBef>
+                <a:spcPts val="0"/>
+              </a:spcBef>
+              <a:spcAft>
+                <a:spcPts val="0"/>
+              </a:spcAft>
+              <a:buNone/>
+            </a:pPr>
+            <a:r>
+              <a:rPr lang="en"/>
+              <a:t>Try It: Harder Hits</a:t>
+            </a:r>
+            <a:endParaRPr/>
+          </a:p>
+        </p:txBody>
+      </p:sp>
+      <p:sp>
+        <p:nvSpPr>
+          <p:cNvPr id="3" name="Text Placeholder 2"/>
+          <p:cNvSpPr>
+            <a:spLocks noGrp="1"/>
+          </p:cNvSpPr>
+          <p:nvPr>
+            <p:ph type="body" idx="1"/>
+          </p:nvPr>
+        </p:nvSpPr>
+        <p:spPr>
+          <a:xfrm>
+            <a:off x="311700" y="885950"/>
+            <a:ext cx="8520600" cy="1289304"/>
+          </a:xfrm>
+        </p:spPr>
+        <p:txBody>
+          <a:bodyPr/>
+          <a:lstStyle/>
+          <a:p>
+            <a:pPr indent="-330200" lvl="0" marL="457200" rtl="0" algn="l">
+              <a:spcBef>
+                <a:spcPts val="0"/>
+              </a:spcBef>
+              <a:spcAft>
+                <a:spcPts val="0"/>
+              </a:spcAft>
+              <a:buSzPts val="1600"/>
+              <a:buChar char="●"/>
+            </a:pPr>
+            <a:r>
+              <a:rPr lang="en"/>
+              <a:t>In Birds2:</a:t>
+            </a:r>
+            <a:endParaRPr/>
+          </a:p>
+          <a:p>
+            <a:pPr indent="-330200" lvl="0" marL="457200" rtl="0" algn="l">
+              <a:spcBef>
+                <a:spcPts val="0"/>
+              </a:spcBef>
+              <a:spcAft>
+                <a:spcPts val="0"/>
+              </a:spcAft>
+              <a:buSzPts val="1600"/>
+              <a:buChar char="●"/>
+            </a:pPr>
+            <a:r>
+              <a:rPr lang="en"/>
+              <a:t>Make every hit do twice the damage</a:t>
+            </a:r>
+            <a:endParaRPr/>
+          </a:p>
+          <a:p>
+            <a:pPr indent="-330200" lvl="0" marL="457200" rtl="0" algn="l">
+              <a:spcBef>
+                <a:spcPts val="0"/>
+              </a:spcBef>
+              <a:spcAft>
+                <a:spcPts val="0"/>
+              </a:spcAft>
+              <a:buSzPts val="1600"/>
+              <a:buChar char="●"/>
+            </a:pPr>
+            <a:r>
+              <a:rPr lang="en"/>
+              <a:t>Which method? What breaks sooner?</a:t>
+            </a:r>
+            <a:endParaRPr/>
+          </a:p>
+        </p:txBody>
+      </p:sp>
+    </p:spTree>
+  </p:cSld>
+  <p:clrMapOvr>
+    <a:masterClrMapping/>
+  </p:clrMapOvr>
+</p:sld>
+</file>
+
+<file path=ppt/slides/slide21.xml><?xml version="1.0" encoding="utf-8"?>
+<p:sld xmlns:a="http://schemas.openxmlformats.org/drawingml/2006/main" xmlns:p="http://schemas.openxmlformats.org/presentationml/2006/main" xmlns:r="http://schemas.openxmlformats.org/officeDocument/2006/relationships">
+  <p:cSld>
+    <p:spTree>
+      <p:nvGrpSpPr>
+        <p:cNvPr id="1" name=""/>
+        <p:cNvGrpSpPr/>
+        <p:nvPr/>
+      </p:nvGrpSpPr>
+      <p:grpSpPr/>
+      <p:sp>
+        <p:nvSpPr>
+          <p:cNvPr id="140" name="Google Shape;140;p23"/>
+          <p:cNvSpPr txBox="1"/>
+          <p:nvPr>
+            <p:ph type="title"/>
+          </p:nvPr>
+        </p:nvSpPr>
+        <p:spPr>
+          <a:xfrm>
+            <a:off x="311700" y="195615"/>
+            <a:ext cx="8520600" cy="572700"/>
+          </a:xfrm>
+          <a:prstGeom prst="rect">
+            <a:avLst/>
+          </a:prstGeom>
+        </p:spPr>
+        <p:txBody>
+          <a:bodyPr anchorCtr="0" anchor="t" bIns="91425" lIns="91425" spcFirstLastPara="1" rIns="91425" wrap="square" tIns="91425">
+            <a:normAutofit fontScale="90000"/>
+          </a:bodyPr>
+          <a:lstStyle/>
+          <a:p>
+            <a:pPr indent="0" lvl="0" marL="0" rtl="0" algn="l">
+              <a:spcBef>
+                <a:spcPts val="0"/>
+              </a:spcBef>
+              <a:spcAft>
+                <a:spcPts val="0"/>
+              </a:spcAft>
+              <a:buNone/>
+            </a:pPr>
+            <a:r>
+              <a:rPr lang="en"/>
+              <a:t>Prototype</a:t>
+            </a:r>
+            <a:endParaRPr/>
+          </a:p>
+        </p:txBody>
+      </p:sp>
+      <p:sp>
+        <p:nvSpPr>
+          <p:cNvPr id="293" name="Google Shape;293;p45"/>
+          <p:cNvSpPr txBox="1"/>
+          <p:nvPr>
+            <p:ph type="title"/>
+          </p:nvPr>
+        </p:nvSpPr>
+        <p:spPr>
+          <a:xfrm>
+            <a:off x="311700" y="1152475"/>
+            <a:ext cx="3700000" cy="3500000"/>
+          </a:xfrm>
+          <a:prstGeom prst="rect">
+            <a:avLst/>
+          </a:prstGeom>
+        </p:spPr>
+        <p:txBody>
+          <a:bodyPr anchorCtr="0" anchor="t" bIns="91425" lIns="91425" spcFirstLastPara="1" rIns="91425" wrap="square" tIns="91425">
+            <a:normAutofit fontScale="90000"/>
+          </a:bodyPr>
+          <a:lstStyle/>
+          <a:p>
+            <a:pPr indent="-330200" lvl="0" marL="457200" rtl="0" algn="l">
+              <a:buClr>
+                <a:srgbClr val="DEE2E6"/>
+              </a:buClr>
+              <a:spcBef>
+                <a:spcPts val="0"/>
+              </a:spcBef>
+              <a:spcAft>
+                <a:spcPts val="0"/>
+              </a:spcAft>
+              <a:buSzPts val="1600"/>
+              <a:buChar char="●"/>
+            </a:pPr>
+            <a:r>
+              <a:rPr lang="en" sz="1600">
+                <a:solidFill>
+                  <a:srgbClr val="DEE2E6"/>
+                </a:solidFill>
+              </a:rPr>
+              <a:t>“Create new objects by copying a prototype”</a:t>
+            </a:r>
+            <a:endParaRPr/>
+          </a:p>
+          <a:p>
+            <a:pPr indent="-330200" lvl="0" marL="457200" rtl="0" algn="l">
+              <a:buClr>
+                <a:srgbClr val="DEE2E6"/>
+              </a:buClr>
+              <a:spcBef>
+                <a:spcPts val="0"/>
+              </a:spcBef>
+              <a:spcAft>
+                <a:spcPts val="0"/>
+              </a:spcAft>
+              <a:buSzPts val="1600"/>
+              <a:buChar char="●"/>
+            </a:pPr>
+            <a:r>
+              <a:rPr lang="en" sz="1600">
+                <a:solidFill>
+                  <a:srgbClr val="DEE2E6"/>
+                </a:solidFill>
+              </a:rPr>
+              <a:t>A configured entity, not in the world</a:t>
+            </a:r>
+            <a:endParaRPr/>
+          </a:p>
+          <a:p>
+            <a:pPr indent="-330200" lvl="0" marL="457200" rtl="0" algn="l">
+              <a:buClr>
+                <a:srgbClr val="DEE2E6"/>
+              </a:buClr>
+              <a:spcBef>
+                <a:spcPts val="0"/>
+              </a:spcBef>
+              <a:spcAft>
+                <a:spcPts val="0"/>
+              </a:spcAft>
+              <a:buSzPts val="1600"/>
+              <a:buChar char="●"/>
+            </a:pPr>
+            <a:r>
+              <a:rPr lang="en" sz="1600">
+                <a:solidFill>
+                  <a:srgbClr val="DEE2E6"/>
+                </a:solidFill>
+              </a:rPr>
+              <a:t>Copy it, and give the copy a body</a:t>
+            </a:r>
+            <a:endParaRPr/>
+          </a:p>
+          <a:p>
+            <a:pPr indent="-330200" lvl="0" marL="457200" rtl="0" algn="l">
+              <a:buClr>
+                <a:srgbClr val="DEE2E6"/>
+              </a:buClr>
+              <a:spcBef>
+                <a:spcPts val="0"/>
+              </a:spcBef>
+              <a:spcAft>
+                <a:spcPts val="0"/>
+              </a:spcAft>
+              <a:buSzPts val="1600"/>
+              <a:buChar char="●"/>
+            </a:pPr>
+            <a:r>
+              <a:rPr lang="en" sz="1600">
+                <a:solidFill>
+                  <a:srgbClr val="DEE2E6"/>
+                </a:solidFill>
+              </a:rPr>
+              <a:t>Prefabs: one prototype per kind, by name</a:t>
+            </a:r>
+            <a:endParaRPr/>
+          </a:p>
+          <a:p>
+            <a:pPr indent="-317500" lvl="1" marL="914400" rtl="0" algn="l">
+              <a:buClr>
+                <a:srgbClr val="6C757D"/>
+              </a:buClr>
+              <a:spcBef>
+                <a:spcPts val="0"/>
+              </a:spcBef>
+              <a:spcAft>
+                <a:spcPts val="0"/>
+              </a:spcAft>
+              <a:buSzPts val="1400"/>
+              <a:buChar char="○"/>
+            </a:pPr>
+            <a:r>
+              <a:rPr lang="en" sz="1400">
+                <a:solidFill>
+                  <a:srgbClr val="6C757D"/>
+                </a:solidFill>
+              </a:rPr>
+              <a:t>A big pig: a Pig with a bigger radius, not a subclass</a:t>
+            </a:r>
+            <a:endParaRPr/>
+          </a:p>
+        </p:txBody>
+      </p:sp>
+      <p:sp>
+        <p:nvSpPr>
+          <p:cNvPr id="141" name="Google Shape;141;p23"/>
+          <p:cNvSpPr txBox="1"/>
+          <p:nvPr>
+            <p:ph idx="2" type="body"/>
+          </p:nvPr>
+        </p:nvSpPr>
+        <p:spPr>
+          <a:xfrm>
+            <a:off x="4150000" y="1152475"/>
+            <a:ext cx="4750000" cy="3600000"/>
+          </a:xfrm>
+          <a:prstGeom prst="rect">
+            <a:avLst/>
+          </a:prstGeom>
+        </p:spPr>
+        <p:txBody>
+          <a:bodyPr anchorCtr="0" anchor="t" bIns="91425" lIns="91425" spcFirstLastPara="1" rIns="91425" wrap="square" tIns="91425">
+            <a:noAutofit/>
+          </a:bodyPr>
+          <a:lstStyle/>
+          <a:p>
+            <a:pPr indent="0" lvl="0" marL="0" rtl="0" algn="l">
+              <a:lnSpc>
+                <a:spcPct val="115000"/>
+              </a:lnSpc>
+              <a:spcBef>
+                <a:spcPts val="0"/>
+              </a:spcBef>
+              <a:spcAft>
+                <a:spcPts val="0"/>
+              </a:spcAft>
+              <a:buNone/>
+            </a:pPr>
+            <a:r>
+              <a:rPr lang="en" sz="1000">
+                <a:highlight>
+                  <a:schemeClr val="dk2"/>
+                </a:highlight>
+                <a:latin typeface="Consolas"/>
+                <a:ea typeface="Consolas"/>
+                <a:cs typeface="Consolas"/>
+                <a:sym typeface="Consolas"/>
+              </a:rPr>
+              <a:t>public Entity Clone()</a:t>
+            </a:r>
+            <a:endParaRPr sz="1000">
+              <a:solidFill>
+                <a:srgbClr val="CCCCCC"/>
+              </a:solidFill>
+              <a:highlight>
+                <a:schemeClr val="dk2"/>
+              </a:highlight>
+              <a:latin typeface="Consolas"/>
+              <a:ea typeface="Consolas"/>
+              <a:cs typeface="Consolas"/>
+              <a:sym typeface="Consolas"/>
+            </a:endParaRPr>
+          </a:p>
+          <a:p>
+            <a:pPr indent="0" lvl="0" marL="0" rtl="0" algn="l">
+              <a:lnSpc>
+                <a:spcPct val="115000"/>
+              </a:lnSpc>
+              <a:spcBef>
+                <a:spcPts val="0"/>
+              </a:spcBef>
+              <a:spcAft>
+                <a:spcPts val="0"/>
+              </a:spcAft>
+              <a:buNone/>
+            </a:pPr>
+            <a:r>
+              <a:rPr lang="en" sz="1000">
+                <a:highlight>
+                  <a:schemeClr val="dk2"/>
+                </a:highlight>
+                <a:latin typeface="Consolas"/>
+                <a:ea typeface="Consolas"/>
+                <a:cs typeface="Consolas"/>
+                <a:sym typeface="Consolas"/>
+              </a:rPr>
+              <a:t>{</a:t>
+            </a:r>
+            <a:endParaRPr sz="1000">
+              <a:solidFill>
+                <a:srgbClr val="CCCCCC"/>
+              </a:solidFill>
+              <a:highlight>
+                <a:schemeClr val="dk2"/>
+              </a:highlight>
+              <a:latin typeface="Consolas"/>
+              <a:ea typeface="Consolas"/>
+              <a:cs typeface="Consolas"/>
+              <a:sym typeface="Consolas"/>
+            </a:endParaRPr>
+          </a:p>
+          <a:p>
+            <a:pPr indent="0" lvl="0" marL="0" rtl="0" algn="l">
+              <a:lnSpc>
+                <a:spcPct val="115000"/>
+              </a:lnSpc>
+              <a:spcBef>
+                <a:spcPts val="0"/>
+              </a:spcBef>
+              <a:spcAft>
+                <a:spcPts val="0"/>
+              </a:spcAft>
+              <a:buNone/>
+            </a:pPr>
+            <a:r>
+              <a:rPr lang="en" sz="1000">
+                <a:highlight>
+                  <a:schemeClr val="dk2"/>
+                </a:highlight>
+                <a:latin typeface="Consolas"/>
+                <a:ea typeface="Consolas"/>
+                <a:cs typeface="Consolas"/>
+                <a:sym typeface="Consolas"/>
+              </a:rPr>
+              <a:t>    var copy = (Entity)MemberwiseClone();</a:t>
+            </a:r>
+            <a:endParaRPr sz="1000">
+              <a:solidFill>
+                <a:srgbClr val="CCCCCC"/>
+              </a:solidFill>
+              <a:highlight>
+                <a:schemeClr val="dk2"/>
+              </a:highlight>
+              <a:latin typeface="Consolas"/>
+              <a:ea typeface="Consolas"/>
+              <a:cs typeface="Consolas"/>
+              <a:sym typeface="Consolas"/>
+            </a:endParaRPr>
+          </a:p>
+          <a:p>
+            <a:pPr indent="0" lvl="0" marL="0" rtl="0" algn="l">
+              <a:lnSpc>
+                <a:spcPct val="115000"/>
+              </a:lnSpc>
+              <a:spcBef>
+                <a:spcPts val="0"/>
+              </a:spcBef>
+              <a:spcAft>
+                <a:spcPts val="0"/>
+              </a:spcAft>
+              <a:buNone/>
+            </a:pPr>
+            <a:r>
+              <a:rPr lang="en" sz="1000">
+                <a:highlight>
+                  <a:schemeClr val="dk2"/>
+                </a:highlight>
+                <a:latin typeface="Consolas"/>
+                <a:ea typeface="Consolas"/>
+                <a:cs typeface="Consolas"/>
+                <a:sym typeface="Consolas"/>
+              </a:rPr>
+              <a:t>    copy.Body = null;</a:t>
+            </a:r>
+            <a:endParaRPr sz="1000">
+              <a:solidFill>
+                <a:srgbClr val="CCCCCC"/>
+              </a:solidFill>
+              <a:highlight>
+                <a:schemeClr val="dk2"/>
+              </a:highlight>
+              <a:latin typeface="Consolas"/>
+              <a:ea typeface="Consolas"/>
+              <a:cs typeface="Consolas"/>
+              <a:sym typeface="Consolas"/>
+            </a:endParaRPr>
+          </a:p>
+          <a:p>
+            <a:pPr indent="0" lvl="0" marL="0" rtl="0" algn="l">
+              <a:lnSpc>
+                <a:spcPct val="115000"/>
+              </a:lnSpc>
+              <a:spcBef>
+                <a:spcPts val="0"/>
+              </a:spcBef>
+              <a:spcAft>
+                <a:spcPts val="0"/>
+              </a:spcAft>
+              <a:buNone/>
+            </a:pPr>
+            <a:r>
+              <a:rPr lang="en" sz="1000">
+                <a:highlight>
+                  <a:schemeClr val="dk2"/>
+                </a:highlight>
+                <a:latin typeface="Consolas"/>
+                <a:ea typeface="Consolas"/>
+                <a:cs typeface="Consolas"/>
+                <a:sym typeface="Consolas"/>
+              </a:rPr>
+              <a:t>    return copy;</a:t>
+            </a:r>
+            <a:endParaRPr sz="1000">
+              <a:solidFill>
+                <a:srgbClr val="CCCCCC"/>
+              </a:solidFill>
+              <a:highlight>
+                <a:schemeClr val="dk2"/>
+              </a:highlight>
+              <a:latin typeface="Consolas"/>
+              <a:ea typeface="Consolas"/>
+              <a:cs typeface="Consolas"/>
+              <a:sym typeface="Consolas"/>
+            </a:endParaRPr>
+          </a:p>
+          <a:p>
+            <a:pPr indent="0" lvl="0" marL="0" rtl="0" algn="l">
+              <a:lnSpc>
+                <a:spcPct val="115000"/>
+              </a:lnSpc>
+              <a:spcBef>
+                <a:spcPts val="0"/>
+              </a:spcBef>
+              <a:spcAft>
+                <a:spcPts val="0"/>
+              </a:spcAft>
+              <a:buNone/>
+            </a:pPr>
+            <a:r>
+              <a:rPr lang="en" sz="1000">
+                <a:highlight>
+                  <a:schemeClr val="dk2"/>
+                </a:highlight>
+                <a:latin typeface="Consolas"/>
+                <a:ea typeface="Consolas"/>
+                <a:cs typeface="Consolas"/>
+                <a:sym typeface="Consolas"/>
+              </a:rPr>
+              <a:t>}</a:t>
+            </a:r>
+            <a:endParaRPr sz="1000">
+              <a:solidFill>
+                <a:srgbClr val="CCCCCC"/>
+              </a:solidFill>
+              <a:highlight>
+                <a:schemeClr val="dk2"/>
+              </a:highlight>
+              <a:latin typeface="Consolas"/>
+              <a:ea typeface="Consolas"/>
+              <a:cs typeface="Consolas"/>
+              <a:sym typeface="Consolas"/>
+            </a:endParaRPr>
+          </a:p>
+          <a:p>
+            <a:pPr indent="0" lvl="0" marL="0" rtl="0" algn="l">
+              <a:lnSpc>
+                <a:spcPct val="115000"/>
+              </a:lnSpc>
+              <a:spcBef>
+                <a:spcPts val="0"/>
+              </a:spcBef>
+              <a:spcAft>
+                <a:spcPts val="0"/>
+              </a:spcAft>
+              <a:buNone/>
+            </a:pPr>
+            <a:r>
+              <a:rPr lang="en" sz="1000">
+                <a:highlight>
+                  <a:schemeClr val="dk2"/>
+                </a:highlight>
+                <a:latin typeface="Consolas"/>
+                <a:ea typeface="Consolas"/>
+                <a:cs typeface="Consolas"/>
+                <a:sym typeface="Consolas"/>
+              </a:rPr>
+              <a:t/>
+            </a:r>
+            <a:endParaRPr sz="1000">
+              <a:solidFill>
+                <a:srgbClr val="CCCCCC"/>
+              </a:solidFill>
+              <a:highlight>
+                <a:schemeClr val="dk2"/>
+              </a:highlight>
+              <a:latin typeface="Consolas"/>
+              <a:ea typeface="Consolas"/>
+              <a:cs typeface="Consolas"/>
+              <a:sym typeface="Consolas"/>
+            </a:endParaRPr>
+          </a:p>
+          <a:p>
+            <a:pPr indent="0" lvl="0" marL="0" rtl="0" algn="l">
+              <a:lnSpc>
+                <a:spcPct val="115000"/>
+              </a:lnSpc>
+              <a:spcBef>
+                <a:spcPts val="0"/>
+              </a:spcBef>
+              <a:spcAft>
+                <a:spcPts val="0"/>
+              </a:spcAft>
+              <a:buNone/>
+            </a:pPr>
+            <a:r>
+              <a:rPr lang="en" sz="1000">
+                <a:highlight>
+                  <a:schemeClr val="dk2"/>
+                </a:highlight>
+                <a:latin typeface="Consolas"/>
+                <a:ea typeface="Consolas"/>
+                <a:cs typeface="Consolas"/>
+                <a:sym typeface="Consolas"/>
+              </a:rPr>
+              <a:t>// Prefabs.cs</a:t>
+            </a:r>
+            <a:endParaRPr sz="1000">
+              <a:solidFill>
+                <a:srgbClr val="CCCCCC"/>
+              </a:solidFill>
+              <a:highlight>
+                <a:schemeClr val="dk2"/>
+              </a:highlight>
+              <a:latin typeface="Consolas"/>
+              <a:ea typeface="Consolas"/>
+              <a:cs typeface="Consolas"/>
+              <a:sym typeface="Consolas"/>
+            </a:endParaRPr>
+          </a:p>
+          <a:p>
+            <a:pPr indent="0" lvl="0" marL="0" rtl="0" algn="l">
+              <a:lnSpc>
+                <a:spcPct val="115000"/>
+              </a:lnSpc>
+              <a:spcBef>
+                <a:spcPts val="0"/>
+              </a:spcBef>
+              <a:spcAft>
+                <a:spcPts val="0"/>
+              </a:spcAft>
+              <a:buNone/>
+            </a:pPr>
+            <a:r>
+              <a:rPr lang="en" sz="1000">
+                <a:highlight>
+                  <a:schemeClr val="dk2"/>
+                </a:highlight>
+                <a:latin typeface="Consolas"/>
+                <a:ea typeface="Consolas"/>
+                <a:cs typeface="Consolas"/>
+                <a:sym typeface="Consolas"/>
+              </a:rPr>
+              <a:t>Add("wood-post", new Block(Materials.Wood,</a:t>
+            </a:r>
+            <a:endParaRPr sz="1000">
+              <a:solidFill>
+                <a:srgbClr val="CCCCCC"/>
+              </a:solidFill>
+              <a:highlight>
+                <a:schemeClr val="dk2"/>
+              </a:highlight>
+              <a:latin typeface="Consolas"/>
+              <a:ea typeface="Consolas"/>
+              <a:cs typeface="Consolas"/>
+              <a:sym typeface="Consolas"/>
+            </a:endParaRPr>
+          </a:p>
+          <a:p>
+            <a:pPr indent="0" lvl="0" marL="0" rtl="0" algn="l">
+              <a:lnSpc>
+                <a:spcPct val="115000"/>
+              </a:lnSpc>
+              <a:spcBef>
+                <a:spcPts val="0"/>
+              </a:spcBef>
+              <a:spcAft>
+                <a:spcPts val="0"/>
+              </a:spcAft>
+              <a:buNone/>
+            </a:pPr>
+            <a:r>
+              <a:rPr lang="en" sz="1000">
+                <a:highlight>
+                  <a:schemeClr val="dk2"/>
+                </a:highlight>
+                <a:latin typeface="Consolas"/>
+                <a:ea typeface="Consolas"/>
+                <a:cs typeface="Consolas"/>
+                <a:sym typeface="Consolas"/>
+              </a:rPr>
+              <a:t>    post, 8, 500, atlas.GetRegion("wood-post")));</a:t>
+            </a:r>
+            <a:endParaRPr sz="1000">
+              <a:solidFill>
+                <a:srgbClr val="CCCCCC"/>
+              </a:solidFill>
+              <a:highlight>
+                <a:schemeClr val="dk2"/>
+              </a:highlight>
+              <a:latin typeface="Consolas"/>
+              <a:ea typeface="Consolas"/>
+              <a:cs typeface="Consolas"/>
+              <a:sym typeface="Consolas"/>
+            </a:endParaRPr>
+          </a:p>
+          <a:p>
+            <a:pPr indent="0" lvl="0" marL="0" rtl="0" algn="l">
+              <a:lnSpc>
+                <a:spcPct val="115000"/>
+              </a:lnSpc>
+              <a:spcBef>
+                <a:spcPts val="0"/>
+              </a:spcBef>
+              <a:spcAft>
+                <a:spcPts val="0"/>
+              </a:spcAft>
+              <a:buNone/>
+            </a:pPr>
+            <a:r>
+              <a:rPr lang="en" sz="1000">
+                <a:highlight>
+                  <a:schemeClr val="dk2"/>
+                </a:highlight>
+                <a:latin typeface="Consolas"/>
+                <a:ea typeface="Consolas"/>
+                <a:cs typeface="Consolas"/>
+                <a:sym typeface="Consolas"/>
+              </a:rPr>
+              <a:t>Add("big-pig", new Pig(30, 6, 5000,</a:t>
+            </a:r>
+            <a:endParaRPr sz="1000">
+              <a:solidFill>
+                <a:srgbClr val="CCCCCC"/>
+              </a:solidFill>
+              <a:highlight>
+                <a:schemeClr val="dk2"/>
+              </a:highlight>
+              <a:latin typeface="Consolas"/>
+              <a:ea typeface="Consolas"/>
+              <a:cs typeface="Consolas"/>
+              <a:sym typeface="Consolas"/>
+            </a:endParaRPr>
+          </a:p>
+          <a:p>
+            <a:pPr indent="0" lvl="0" marL="0" rtl="0" algn="l">
+              <a:lnSpc>
+                <a:spcPct val="115000"/>
+              </a:lnSpc>
+              <a:spcBef>
+                <a:spcPts val="0"/>
+              </a:spcBef>
+              <a:spcAft>
+                <a:spcPts val="0"/>
+              </a:spcAft>
+              <a:buNone/>
+            </a:pPr>
+            <a:r>
+              <a:rPr lang="en" sz="1000">
+                <a:highlight>
+                  <a:schemeClr val="dk2"/>
+                </a:highlight>
+                <a:latin typeface="Consolas"/>
+                <a:ea typeface="Consolas"/>
+                <a:cs typeface="Consolas"/>
+                <a:sym typeface="Consolas"/>
+              </a:rPr>
+              <a:t>    atlas.GetRegion("big-pig")));</a:t>
+            </a:r>
+            <a:endParaRPr sz="1000">
+              <a:solidFill>
+                <a:srgbClr val="CCCCCC"/>
+              </a:solidFill>
+              <a:highlight>
+                <a:schemeClr val="dk2"/>
+              </a:highlight>
+              <a:latin typeface="Consolas"/>
+              <a:ea typeface="Consolas"/>
+              <a:cs typeface="Consolas"/>
+              <a:sym typeface="Consolas"/>
+            </a:endParaRPr>
+          </a:p>
+          <a:p>
+            <a:pPr indent="0" lvl="0" marL="0" rtl="0" algn="l">
+              <a:lnSpc>
+                <a:spcPct val="115000"/>
+              </a:lnSpc>
+              <a:spcBef>
+                <a:spcPts val="0"/>
+              </a:spcBef>
+              <a:spcAft>
+                <a:spcPts val="0"/>
+              </a:spcAft>
+              <a:buNone/>
+            </a:pPr>
+            <a:r>
+              <a:rPr lang="en" sz="1000">
+                <a:highlight>
+                  <a:schemeClr val="dk2"/>
+                </a:highlight>
+                <a:latin typeface="Consolas"/>
+                <a:ea typeface="Consolas"/>
+                <a:cs typeface="Consolas"/>
+                <a:sym typeface="Consolas"/>
+              </a:rPr>
+              <a:t/>
+            </a:r>
+            <a:endParaRPr sz="1000">
+              <a:solidFill>
+                <a:srgbClr val="CCCCCC"/>
+              </a:solidFill>
+              <a:highlight>
+                <a:schemeClr val="dk2"/>
+              </a:highlight>
+              <a:latin typeface="Consolas"/>
+              <a:ea typeface="Consolas"/>
+              <a:cs typeface="Consolas"/>
+              <a:sym typeface="Consolas"/>
+            </a:endParaRPr>
+          </a:p>
+          <a:p>
+            <a:pPr indent="0" lvl="0" marL="0" rtl="0" algn="l">
+              <a:lnSpc>
+                <a:spcPct val="115000"/>
+              </a:lnSpc>
+              <a:spcBef>
+                <a:spcPts val="0"/>
+              </a:spcBef>
+              <a:spcAft>
+                <a:spcPts val="0"/>
+              </a:spcAft>
+              <a:buNone/>
+            </a:pPr>
+            <a:r>
+              <a:rPr lang="en" sz="1000">
+                <a:highlight>
+                  <a:schemeClr val="dk2"/>
+                </a:highlight>
+                <a:latin typeface="Consolas"/>
+                <a:ea typeface="Consolas"/>
+                <a:cs typeface="Consolas"/>
+                <a:sym typeface="Consolas"/>
+              </a:rPr>
+              <a:t>Entity entity = _prototypes[name].Clone();</a:t>
+            </a:r>
+            <a:endParaRPr sz="1000">
+              <a:solidFill>
+                <a:srgbClr val="CCCCCC"/>
+              </a:solidFill>
+              <a:highlight>
+                <a:schemeClr val="dk2"/>
+              </a:highlight>
+              <a:latin typeface="Consolas"/>
+              <a:ea typeface="Consolas"/>
+              <a:cs typeface="Consolas"/>
+              <a:sym typeface="Consolas"/>
+            </a:endParaRPr>
+          </a:p>
+          <a:p>
+            <a:pPr indent="0" lvl="0" marL="0" rtl="0" algn="l">
+              <a:lnSpc>
+                <a:spcPct val="115000"/>
+              </a:lnSpc>
+              <a:spcBef>
+                <a:spcPts val="0"/>
+              </a:spcBef>
+              <a:spcAft>
+                <a:spcPts val="0"/>
+              </a:spcAft>
+              <a:buNone/>
+            </a:pPr>
+            <a:r>
+              <a:rPr lang="en" sz="1000">
+                <a:highlight>
+                  <a:schemeClr val="dk2"/>
+                </a:highlight>
+                <a:latin typeface="Consolas"/>
+                <a:ea typeface="Consolas"/>
+                <a:cs typeface="Consolas"/>
+                <a:sym typeface="Consolas"/>
+              </a:rPr>
+              <a:t>entity.Spawn(world, position, rotation);</a:t>
+            </a:r>
+            <a:endParaRPr sz="1000">
+              <a:solidFill>
+                <a:srgbClr val="CCCCCC"/>
+              </a:solidFill>
+              <a:highlight>
+                <a:schemeClr val="dk2"/>
+              </a:highlight>
+              <a:latin typeface="Consolas"/>
+              <a:ea typeface="Consolas"/>
+              <a:cs typeface="Consolas"/>
+              <a:sym typeface="Consolas"/>
+            </a:endParaRPr>
+          </a:p>
+        </p:txBody>
+      </p:sp>
+    </p:spTree>
+  </p:cSld>
+  <p:clrMapOvr>
+    <a:masterClrMapping/>
+  </p:clrMapOvr>
+</p:sld>
+</file>
+
+<file path=ppt/slides/slide22.xml><?xml version="1.0" encoding="utf-8"?>
+<p:sld xmlns:a="http://schemas.openxmlformats.org/drawingml/2006/main" xmlns:p="http://schemas.openxmlformats.org/presentationml/2006/main" xmlns:r="http://schemas.openxmlformats.org/officeDocument/2006/relationships">
+  <p:cSld>
+    <p:spTree>
+      <p:nvGrpSpPr>
+        <p:cNvPr id="1" name=""/>
+        <p:cNvGrpSpPr/>
+        <p:nvPr/>
+      </p:nvGrpSpPr>
+      <p:grpSpPr/>
+      <p:sp>
+        <p:nvSpPr>
+          <p:cNvPr id="140" name="Google Shape;140;p23"/>
+          <p:cNvSpPr txBox="1"/>
+          <p:nvPr>
+            <p:ph type="title"/>
+          </p:nvPr>
+        </p:nvSpPr>
+        <p:spPr>
+          <a:xfrm>
+            <a:off x="311700" y="195615"/>
+            <a:ext cx="8520600" cy="572700"/>
+          </a:xfrm>
+          <a:prstGeom prst="rect">
+            <a:avLst/>
+          </a:prstGeom>
+        </p:spPr>
+        <p:txBody>
+          <a:bodyPr anchorCtr="0" anchor="t" bIns="91425" lIns="91425" spcFirstLastPara="1" rIns="91425" wrap="square" tIns="91425">
+            <a:normAutofit fontScale="90000"/>
+          </a:bodyPr>
+          <a:lstStyle/>
+          <a:p>
+            <a:pPr indent="0" lvl="0" marL="0" rtl="0" algn="l">
+              <a:spcBef>
+                <a:spcPts val="0"/>
+              </a:spcBef>
+              <a:spcAft>
+                <a:spcPts val="0"/>
+              </a:spcAft>
+              <a:buNone/>
+            </a:pPr>
+            <a:r>
+              <a:rPr lang="en"/>
+              <a:t>Levels From Prefabs</a:t>
+            </a:r>
+            <a:endParaRPr/>
+          </a:p>
+        </p:txBody>
+      </p:sp>
+      <p:sp>
+        <p:nvSpPr>
+          <p:cNvPr id="293" name="Google Shape;293;p45"/>
+          <p:cNvSpPr txBox="1"/>
+          <p:nvPr>
+            <p:ph type="title"/>
+          </p:nvPr>
+        </p:nvSpPr>
+        <p:spPr>
+          <a:xfrm>
+            <a:off x="311700" y="1152475"/>
+            <a:ext cx="3700000" cy="3500000"/>
+          </a:xfrm>
+          <a:prstGeom prst="rect">
+            <a:avLst/>
+          </a:prstGeom>
+        </p:spPr>
+        <p:txBody>
+          <a:bodyPr anchorCtr="0" anchor="t" bIns="91425" lIns="91425" spcFirstLastPara="1" rIns="91425" wrap="square" tIns="91425">
+            <a:normAutofit fontScale="90000"/>
+          </a:bodyPr>
+          <a:lstStyle/>
+          <a:p>
+            <a:pPr indent="-330200" lvl="0" marL="457200" rtl="0" algn="l">
+              <a:buClr>
+                <a:srgbClr val="DEE2E6"/>
+              </a:buClr>
+              <a:spcBef>
+                <a:spcPts val="0"/>
+              </a:spcBef>
+              <a:spcAft>
+                <a:spcPts val="0"/>
+              </a:spcAft>
+              <a:buSzPts val="1600"/>
+              <a:buChar char="●"/>
+            </a:pPr>
+            <a:r>
+              <a:rPr lang="en" sz="1600">
+                <a:solidFill>
+                  <a:srgbClr val="DEE2E6"/>
+                </a:solidFill>
+              </a:rPr>
+              <a:t>A level: prefab names and positions</a:t>
+            </a:r>
+            <a:endParaRPr/>
+          </a:p>
+          <a:p>
+            <a:pPr indent="-317500" lvl="1" marL="914400" rtl="0" algn="l">
+              <a:buClr>
+                <a:srgbClr val="6C757D"/>
+              </a:buClr>
+              <a:spcBef>
+                <a:spcPts val="0"/>
+              </a:spcBef>
+              <a:spcAft>
+                <a:spcPts val="0"/>
+              </a:spcAft>
+              <a:buSzPts val="1400"/>
+              <a:buChar char="○"/>
+            </a:pPr>
+            <a:r>
+              <a:rPr lang="en" sz="1400">
+                <a:solidFill>
+                  <a:srgbClr val="6C757D"/>
+                </a:solidFill>
+              </a:rPr>
+              <a:t>Levels as data, as in Sokoban</a:t>
+            </a:r>
+            <a:endParaRPr/>
+          </a:p>
+          <a:p>
+            <a:pPr indent="-330200" lvl="0" marL="457200" rtl="0" algn="l">
+              <a:buClr>
+                <a:srgbClr val="DEE2E6"/>
+              </a:buClr>
+              <a:spcBef>
+                <a:spcPts val="0"/>
+              </a:spcBef>
+              <a:spcAft>
+                <a:spcPts val="0"/>
+              </a:spcAft>
+              <a:buSzPts val="1600"/>
+              <a:buChar char="●"/>
+            </a:pPr>
+            <a:r>
+              <a:rPr lang="en" sz="1600">
+                <a:solidFill>
+                  <a:srgbClr val="DEE2E6"/>
+                </a:solidFill>
+              </a:rPr>
+              <a:t>MemberwiseClone: a shallow copy</a:t>
+            </a:r>
+            <a:endParaRPr/>
+          </a:p>
+          <a:p>
+            <a:pPr indent="-317500" lvl="1" marL="914400" rtl="0" algn="l">
+              <a:buClr>
+                <a:srgbClr val="6C757D"/>
+              </a:buClr>
+              <a:spcBef>
+                <a:spcPts val="0"/>
+              </a:spcBef>
+              <a:spcAft>
+                <a:spcPts val="0"/>
+              </a:spcAft>
+              <a:buSzPts val="1400"/>
+              <a:buChar char="○"/>
+            </a:pPr>
+            <a:r>
+              <a:rPr lang="en" sz="1400">
+                <a:solidFill>
+                  <a:srgbClr val="6C757D"/>
+                </a:solidFill>
+              </a:rPr>
+              <a:t>Sharing a sprite: fine</a:t>
+            </a:r>
+            <a:endParaRPr/>
+          </a:p>
+          <a:p>
+            <a:pPr indent="-317500" lvl="1" marL="914400" rtl="0" algn="l">
+              <a:buClr>
+                <a:srgbClr val="6C757D"/>
+              </a:buClr>
+              <a:spcBef>
+                <a:spcPts val="0"/>
+              </a:spcBef>
+              <a:spcAft>
+                <a:spcPts val="0"/>
+              </a:spcAft>
+              <a:buSzPts val="1400"/>
+              <a:buChar char="○"/>
+            </a:pPr>
+            <a:r>
+              <a:rPr lang="en" sz="1400">
+                <a:solidFill>
+                  <a:srgbClr val="6C757D"/>
+                </a:solidFill>
+              </a:rPr>
+              <a:t>Sharing a body: two blocks move as one</a:t>
+            </a:r>
+            <a:endParaRPr/>
+          </a:p>
+          <a:p>
+            <a:pPr indent="-330200" lvl="0" marL="457200" rtl="0" algn="l">
+              <a:buClr>
+                <a:srgbClr val="DEE2E6"/>
+              </a:buClr>
+              <a:spcBef>
+                <a:spcPts val="0"/>
+              </a:spcBef>
+              <a:spcAft>
+                <a:spcPts val="0"/>
+              </a:spcAft>
+              <a:buSzPts val="1600"/>
+              <a:buChar char="●"/>
+            </a:pPr>
+            <a:r>
+              <a:rPr lang="en" sz="1600">
+                <a:solidFill>
+                  <a:srgbClr val="DEE2E6"/>
+                </a:solidFill>
+              </a:rPr>
+              <a:t>Prototype vs. Type Object: in Plants vs. Zombies</a:t>
+            </a:r>
+            <a:endParaRPr/>
+          </a:p>
+        </p:txBody>
+      </p:sp>
+      <p:sp>
+        <p:nvSpPr>
+          <p:cNvPr id="141" name="Google Shape;141;p23"/>
+          <p:cNvSpPr txBox="1"/>
+          <p:nvPr>
+            <p:ph idx="2" type="body"/>
+          </p:nvPr>
+        </p:nvSpPr>
+        <p:spPr>
+          <a:xfrm>
+            <a:off x="4150000" y="1152475"/>
+            <a:ext cx="4750000" cy="3600000"/>
+          </a:xfrm>
+          <a:prstGeom prst="rect">
+            <a:avLst/>
+          </a:prstGeom>
+        </p:spPr>
+        <p:txBody>
+          <a:bodyPr anchorCtr="0" anchor="t" bIns="91425" lIns="91425" spcFirstLastPara="1" rIns="91425" wrap="square" tIns="91425">
+            <a:noAutofit/>
+          </a:bodyPr>
+          <a:lstStyle/>
+          <a:p>
+            <a:pPr indent="0" lvl="0" marL="0" rtl="0" algn="l">
+              <a:lnSpc>
+                <a:spcPct val="115000"/>
+              </a:lnSpc>
+              <a:spcBef>
+                <a:spcPts val="0"/>
+              </a:spcBef>
+              <a:spcAft>
+                <a:spcPts val="0"/>
+              </a:spcAft>
+              <a:buNone/>
+            </a:pPr>
+            <a:r>
+              <a:rPr lang="en" sz="1000">
+                <a:highlight>
+                  <a:schemeClr val="dk2"/>
+                </a:highlight>
+                <a:latin typeface="Consolas"/>
+                <a:ea typeface="Consolas"/>
+                <a:cs typeface="Consolas"/>
+                <a:sym typeface="Consolas"/>
+              </a:rPr>
+              <a:t># level1.txt</a:t>
+            </a:r>
+            <a:endParaRPr sz="1000">
+              <a:solidFill>
+                <a:srgbClr val="CCCCCC"/>
+              </a:solidFill>
+              <a:highlight>
+                <a:schemeClr val="dk2"/>
+              </a:highlight>
+              <a:latin typeface="Consolas"/>
+              <a:ea typeface="Consolas"/>
+              <a:cs typeface="Consolas"/>
+              <a:sym typeface="Consolas"/>
+            </a:endParaRPr>
+          </a:p>
+          <a:p>
+            <a:pPr indent="0" lvl="0" marL="0" rtl="0" algn="l">
+              <a:lnSpc>
+                <a:spcPct val="115000"/>
+              </a:lnSpc>
+              <a:spcBef>
+                <a:spcPts val="0"/>
+              </a:spcBef>
+              <a:spcAft>
+                <a:spcPts val="0"/>
+              </a:spcAft>
+              <a:buNone/>
+            </a:pPr>
+            <a:r>
+              <a:rPr lang="en" sz="1000">
+                <a:highlight>
+                  <a:schemeClr val="dk2"/>
+                </a:highlight>
+                <a:latin typeface="Consolas"/>
+                <a:ea typeface="Consolas"/>
+                <a:cs typeface="Consolas"/>
+                <a:sym typeface="Consolas"/>
+              </a:rPr>
+              <a:t>birds 3</a:t>
+            </a:r>
+            <a:endParaRPr sz="1000">
+              <a:solidFill>
+                <a:srgbClr val="CCCCCC"/>
+              </a:solidFill>
+              <a:highlight>
+                <a:schemeClr val="dk2"/>
+              </a:highlight>
+              <a:latin typeface="Consolas"/>
+              <a:ea typeface="Consolas"/>
+              <a:cs typeface="Consolas"/>
+              <a:sym typeface="Consolas"/>
+            </a:endParaRPr>
+          </a:p>
+          <a:p>
+            <a:pPr indent="0" lvl="0" marL="0" rtl="0" algn="l">
+              <a:lnSpc>
+                <a:spcPct val="115000"/>
+              </a:lnSpc>
+              <a:spcBef>
+                <a:spcPts val="0"/>
+              </a:spcBef>
+              <a:spcAft>
+                <a:spcPts val="0"/>
+              </a:spcAft>
+              <a:buNone/>
+            </a:pPr>
+            <a:r>
+              <a:rPr lang="en" sz="1000">
+                <a:highlight>
+                  <a:schemeClr val="dk2"/>
+                </a:highlight>
+                <a:latin typeface="Consolas"/>
+                <a:ea typeface="Consolas"/>
+                <a:cs typeface="Consolas"/>
+                <a:sym typeface="Consolas"/>
+              </a:rPr>
+              <a:t>wood-post    880 590 0</a:t>
+            </a:r>
+            <a:endParaRPr sz="1000">
+              <a:solidFill>
+                <a:srgbClr val="CCCCCC"/>
+              </a:solidFill>
+              <a:highlight>
+                <a:schemeClr val="dk2"/>
+              </a:highlight>
+              <a:latin typeface="Consolas"/>
+              <a:ea typeface="Consolas"/>
+              <a:cs typeface="Consolas"/>
+              <a:sym typeface="Consolas"/>
+            </a:endParaRPr>
+          </a:p>
+          <a:p>
+            <a:pPr indent="0" lvl="0" marL="0" rtl="0" algn="l">
+              <a:lnSpc>
+                <a:spcPct val="115000"/>
+              </a:lnSpc>
+              <a:spcBef>
+                <a:spcPts val="0"/>
+              </a:spcBef>
+              <a:spcAft>
+                <a:spcPts val="0"/>
+              </a:spcAft>
+              <a:buNone/>
+            </a:pPr>
+            <a:r>
+              <a:rPr lang="en" sz="1000">
+                <a:highlight>
+                  <a:schemeClr val="dk2"/>
+                </a:highlight>
+                <a:latin typeface="Consolas"/>
+                <a:ea typeface="Consolas"/>
+                <a:cs typeface="Consolas"/>
+                <a:sym typeface="Consolas"/>
+              </a:rPr>
+              <a:t>wood-post   1040 590 0</a:t>
+            </a:r>
+            <a:endParaRPr sz="1000">
+              <a:solidFill>
+                <a:srgbClr val="CCCCCC"/>
+              </a:solidFill>
+              <a:highlight>
+                <a:schemeClr val="dk2"/>
+              </a:highlight>
+              <a:latin typeface="Consolas"/>
+              <a:ea typeface="Consolas"/>
+              <a:cs typeface="Consolas"/>
+              <a:sym typeface="Consolas"/>
+            </a:endParaRPr>
+          </a:p>
+          <a:p>
+            <a:pPr indent="0" lvl="0" marL="0" rtl="0" algn="l">
+              <a:lnSpc>
+                <a:spcPct val="115000"/>
+              </a:lnSpc>
+              <a:spcBef>
+                <a:spcPts val="0"/>
+              </a:spcBef>
+              <a:spcAft>
+                <a:spcPts val="0"/>
+              </a:spcAft>
+              <a:buNone/>
+            </a:pPr>
+            <a:r>
+              <a:rPr lang="en" sz="1000">
+                <a:highlight>
+                  <a:schemeClr val="dk2"/>
+                </a:highlight>
+                <a:latin typeface="Consolas"/>
+                <a:ea typeface="Consolas"/>
+                <a:cs typeface="Consolas"/>
+                <a:sym typeface="Consolas"/>
+              </a:rPr>
+              <a:t>wood-plank   960 530 0</a:t>
+            </a:r>
+            <a:endParaRPr sz="1000">
+              <a:solidFill>
+                <a:srgbClr val="CCCCCC"/>
+              </a:solidFill>
+              <a:highlight>
+                <a:schemeClr val="dk2"/>
+              </a:highlight>
+              <a:latin typeface="Consolas"/>
+              <a:ea typeface="Consolas"/>
+              <a:cs typeface="Consolas"/>
+              <a:sym typeface="Consolas"/>
+            </a:endParaRPr>
+          </a:p>
+          <a:p>
+            <a:pPr indent="0" lvl="0" marL="0" rtl="0" algn="l">
+              <a:lnSpc>
+                <a:spcPct val="115000"/>
+              </a:lnSpc>
+              <a:spcBef>
+                <a:spcPts val="0"/>
+              </a:spcBef>
+              <a:spcAft>
+                <a:spcPts val="0"/>
+              </a:spcAft>
+              <a:buNone/>
+            </a:pPr>
+            <a:r>
+              <a:rPr lang="en" sz="1000">
+                <a:highlight>
+                  <a:schemeClr val="dk2"/>
+                </a:highlight>
+                <a:latin typeface="Consolas"/>
+                <a:ea typeface="Consolas"/>
+                <a:cs typeface="Consolas"/>
+                <a:sym typeface="Consolas"/>
+              </a:rPr>
+              <a:t>pig          960 618 0</a:t>
+            </a:r>
+            <a:endParaRPr sz="1000">
+              <a:solidFill>
+                <a:srgbClr val="CCCCCC"/>
+              </a:solidFill>
+              <a:highlight>
+                <a:schemeClr val="dk2"/>
+              </a:highlight>
+              <a:latin typeface="Consolas"/>
+              <a:ea typeface="Consolas"/>
+              <a:cs typeface="Consolas"/>
+              <a:sym typeface="Consolas"/>
+            </a:endParaRPr>
+          </a:p>
+          <a:p>
+            <a:pPr indent="0" lvl="0" marL="0" rtl="0" algn="l">
+              <a:lnSpc>
+                <a:spcPct val="115000"/>
+              </a:lnSpc>
+              <a:spcBef>
+                <a:spcPts val="0"/>
+              </a:spcBef>
+              <a:spcAft>
+                <a:spcPts val="0"/>
+              </a:spcAft>
+              <a:buNone/>
+            </a:pPr>
+            <a:r>
+              <a:rPr lang="en" sz="1000">
+                <a:highlight>
+                  <a:schemeClr val="dk2"/>
+                </a:highlight>
+                <a:latin typeface="Consolas"/>
+                <a:ea typeface="Consolas"/>
+                <a:cs typeface="Consolas"/>
+                <a:sym typeface="Consolas"/>
+              </a:rPr>
+              <a:t>glass-box    960 495 0</a:t>
+            </a:r>
+            <a:endParaRPr sz="1000">
+              <a:solidFill>
+                <a:srgbClr val="CCCCCC"/>
+              </a:solidFill>
+              <a:highlight>
+                <a:schemeClr val="dk2"/>
+              </a:highlight>
+              <a:latin typeface="Consolas"/>
+              <a:ea typeface="Consolas"/>
+              <a:cs typeface="Consolas"/>
+              <a:sym typeface="Consolas"/>
+            </a:endParaRPr>
+          </a:p>
+          <a:p>
+            <a:pPr indent="0" lvl="0" marL="0" rtl="0" algn="l">
+              <a:lnSpc>
+                <a:spcPct val="115000"/>
+              </a:lnSpc>
+              <a:spcBef>
+                <a:spcPts val="0"/>
+              </a:spcBef>
+              <a:spcAft>
+                <a:spcPts val="0"/>
+              </a:spcAft>
+              <a:buNone/>
+            </a:pPr>
+            <a:r>
+              <a:rPr lang="en" sz="1000">
+                <a:highlight>
+                  <a:schemeClr val="dk2"/>
+                </a:highlight>
+                <a:latin typeface="Consolas"/>
+                <a:ea typeface="Consolas"/>
+                <a:cs typeface="Consolas"/>
+                <a:sym typeface="Consolas"/>
+              </a:rPr>
+              <a:t>pig          960 448 0</a:t>
+            </a:r>
+            <a:endParaRPr sz="1000">
+              <a:solidFill>
+                <a:srgbClr val="CCCCCC"/>
+              </a:solidFill>
+              <a:highlight>
+                <a:schemeClr val="dk2"/>
+              </a:highlight>
+              <a:latin typeface="Consolas"/>
+              <a:ea typeface="Consolas"/>
+              <a:cs typeface="Consolas"/>
+              <a:sym typeface="Consolas"/>
+            </a:endParaRPr>
+          </a:p>
+        </p:txBody>
+      </p:sp>
+    </p:spTree>
+  </p:cSld>
+  <p:clrMapOvr>
+    <a:masterClrMapping/>
+  </p:clrMapOvr>
+</p:sld>
+</file>
+
+<file path=ppt/slides/slide23.xml><?xml version="1.0" encoding="utf-8"?>
+<p:sld xmlns:a="http://schemas.openxmlformats.org/drawingml/2006/main" xmlns:p="http://schemas.openxmlformats.org/presentationml/2006/main" xmlns:r="http://schemas.openxmlformats.org/officeDocument/2006/relationships">
+  <p:cSld>
+    <p:spTree>
+      <p:nvGrpSpPr>
+        <p:cNvPr id="1" name=""/>
+        <p:cNvGrpSpPr/>
+        <p:nvPr/>
+      </p:nvGrpSpPr>
+      <p:grpSpPr/>
+      <p:sp>
+        <p:nvSpPr>
           <p:cNvPr id="128" name="Google Shape;128;p21"/>
           <p:cNvSpPr txBox="1"/>
           <p:nvPr>
@@ -12297,7 +12899,129 @@
 </p:sld>
 </file>
 
-<file path=ppt/slides/slide21.xml><?xml version="1.0" encoding="utf-8"?>
+<file path=ppt/slides/slide24.xml><?xml version="1.0" encoding="utf-8"?>
+<p:sld xmlns:a="http://schemas.openxmlformats.org/drawingml/2006/main" xmlns:p="http://schemas.openxmlformats.org/presentationml/2006/main" xmlns:r="http://schemas.openxmlformats.org/officeDocument/2006/relationships">
+  <p:cSld>
+    <p:spTree>
+      <p:nvGrpSpPr>
+        <p:cNvPr id="1" name=""/>
+        <p:cNvGrpSpPr/>
+        <p:nvPr/>
+      </p:nvGrpSpPr>
+      <p:grpSpPr/>
+      <p:sp>
+        <p:nvSpPr>
+          <p:cNvPr id="2" name="Title 1"/>
+          <p:cNvSpPr>
+            <a:spLocks noGrp="1"/>
+          </p:cNvSpPr>
+          <p:nvPr>
+            <p:ph type="title"/>
+          </p:nvPr>
+        </p:nvSpPr>
+        <p:spPr/>
+        <p:txBody>
+          <a:bodyPr/>
+          <a:lstStyle/>
+          <a:p>
+            <a:pPr indent="0" lvl="0" marL="0" rtl="0" algn="l">
+              <a:spcBef>
+                <a:spcPts val="0"/>
+              </a:spcBef>
+              <a:spcAft>
+                <a:spcPts val="0"/>
+              </a:spcAft>
+              <a:buNone/>
+            </a:pPr>
+            <a:r>
+              <a:rPr lang="en"/>
+              <a:t>Try It: A Level From Prefabs</a:t>
+            </a:r>
+            <a:endParaRPr/>
+          </a:p>
+        </p:txBody>
+      </p:sp>
+      <p:sp>
+        <p:nvSpPr>
+          <p:cNvPr id="3" name="Text Placeholder 2"/>
+          <p:cNvSpPr>
+            <a:spLocks noGrp="1"/>
+          </p:cNvSpPr>
+          <p:nvPr>
+            <p:ph type="body" idx="1"/>
+          </p:nvPr>
+        </p:nvSpPr>
+        <p:spPr>
+          <a:xfrm>
+            <a:off x="311700" y="885950"/>
+            <a:ext cx="8520600" cy="1289304"/>
+          </a:xfrm>
+        </p:spPr>
+        <p:txBody>
+          <a:bodyPr/>
+          <a:lstStyle/>
+          <a:p>
+            <a:pPr indent="-330200" lvl="0" marL="457200" rtl="0" algn="l">
+              <a:spcBef>
+                <a:spcPts val="0"/>
+              </a:spcBef>
+              <a:spcAft>
+                <a:spcPts val="0"/>
+              </a:spcAft>
+              <a:buSzPts val="1600"/>
+              <a:buChar char="●"/>
+            </a:pPr>
+            <a:r>
+              <a:rPr lang="en"/>
+              <a:t>In level1.txt:</a:t>
+            </a:r>
+            <a:endParaRPr/>
+          </a:p>
+          <a:p>
+            <a:pPr indent="-330200" lvl="0" marL="457200" rtl="0" algn="l">
+              <a:spcBef>
+                <a:spcPts val="0"/>
+              </a:spcBef>
+              <a:spcAft>
+                <a:spcPts val="0"/>
+              </a:spcAft>
+              <a:buSzPts val="1600"/>
+              <a:buChar char="●"/>
+            </a:pPr>
+            <a:r>
+              <a:rPr lang="en"/>
+              <a:t>Put a big-pig on top of the hut, and a glass-box next to it</a:t>
+            </a:r>
+            <a:endParaRPr/>
+          </a:p>
+          <a:p>
+            <a:pPr indent="-330200" lvl="0" marL="457200" rtl="0" algn="l">
+              <a:spcBef>
+                <a:spcPts val="0"/>
+              </a:spcBef>
+              <a:spcAft>
+                <a:spcPts val="0"/>
+              </a:spcAft>
+              <a:buSzPts val="1600"/>
+              <a:buChar char="●"/>
+            </a:pPr>
+            <a:r>
+              <a:rPr lang="en"/>
+              <a:t>How much code did it take?</a:t>
+            </a:r>
+            <a:endParaRPr/>
+          </a:p>
+        </p:txBody>
+      </p:sp>
+    </p:spTree>
+  </p:cSld>
+  <p:clrMapOvr>
+    <a:masterClrMapping/>
+  </p:clrMapOvr>
+</p:sld>
+</file>
+
+<file path=ppt/slides/slide25.xml><?xml version="1.0" encoding="utf-8"?>
 <p:sld xmlns:a="http://schemas.openxmlformats.org/drawingml/2006/main" xmlns:p="http://schemas.openxmlformats.org/presentationml/2006/main" xmlns:r="http://schemas.openxmlformats.org/officeDocument/2006/relationships">
   <p:cSld>
     <p:spTree>
@@ -12713,7 +13437,7 @@
 </p:sld>
 </file>
 
-<file path=ppt/slides/slide22.xml><?xml version="1.0" encoding="utf-8"?>
+<file path=ppt/slides/slide26.xml><?xml version="1.0" encoding="utf-8"?>
 <p:sld xmlns:a="http://schemas.openxmlformats.org/drawingml/2006/main" xmlns:r="http://schemas.openxmlformats.org/officeDocument/2006/relationships" xmlns:mc="http://schemas.openxmlformats.org/markup-compatibility/2006" xmlns:mv="urn:schemas-microsoft-com:mac:vml" xmlns:p="http://schemas.openxmlformats.org/presentationml/2006/main" xmlns:c="http://schemas.openxmlformats.org/drawingml/2006/chart" xmlns:dgm="http://schemas.openxmlformats.org/drawingml/2006/diagram" xmlns:o="urn:schemas-microsoft-com:office:office" xmlns:v="urn:schemas-microsoft-com:vml" xmlns:pvml="urn:schemas-microsoft-com:office:powerpoint" xmlns:com="http://schemas.openxmlformats.org/drawingml/2006/compatibility" xmlns:p14="http://schemas.microsoft.com/office/powerpoint/2010/main" xmlns:p15="http://schemas.microsoft.com/office/powerpoint/2012/main" xmlns:ahyp="http://schemas.microsoft.com/office/drawing/2018/hyperlinkcolor">
   <p:cSld>
     <p:spTree>
@@ -12847,7 +13571,7 @@
 </p:sld>
 </file>
 
-<file path=ppt/slides/slide23.xml><?xml version="1.0" encoding="utf-8"?>
+<file path=ppt/slides/slide27.xml><?xml version="1.0" encoding="utf-8"?>
 <p:sld xmlns:a="http://schemas.openxmlformats.org/drawingml/2006/main" xmlns:r="http://schemas.openxmlformats.org/officeDocument/2006/relationships" xmlns:mc="http://schemas.openxmlformats.org/markup-compatibility/2006" xmlns:mv="urn:schemas-microsoft-com:mac:vml" xmlns:p="http://schemas.openxmlformats.org/presentationml/2006/main" xmlns:c="http://schemas.openxmlformats.org/drawingml/2006/chart" xmlns:dgm="http://schemas.openxmlformats.org/drawingml/2006/diagram" xmlns:o="urn:schemas-microsoft-com:office:office" xmlns:v="urn:schemas-microsoft-com:vml" xmlns:pvml="urn:schemas-microsoft-com:office:powerpoint" xmlns:com="http://schemas.openxmlformats.org/drawingml/2006/compatibility" xmlns:p14="http://schemas.microsoft.com/office/powerpoint/2010/main" xmlns:p15="http://schemas.microsoft.com/office/powerpoint/2012/main" xmlns:ahyp="http://schemas.microsoft.com/office/drawing/2018/hyperlinkcolor">
   <p:cSld>
     <p:spTree>
@@ -13713,7 +14437,7 @@
 </p:sld>
 </file>
 
-<file path=ppt/slides/slide24.xml><?xml version="1.0" encoding="utf-8"?>
+<file path=ppt/slides/slide28.xml><?xml version="1.0" encoding="utf-8"?>
 <p:sld xmlns:a="http://schemas.openxmlformats.org/drawingml/2006/main" xmlns:r="http://schemas.openxmlformats.org/officeDocument/2006/relationships" xmlns:mc="http://schemas.openxmlformats.org/markup-compatibility/2006" xmlns:mv="urn:schemas-microsoft-com:mac:vml" xmlns:p="http://schemas.openxmlformats.org/presentationml/2006/main" xmlns:c="http://schemas.openxmlformats.org/drawingml/2006/chart" xmlns:dgm="http://schemas.openxmlformats.org/drawingml/2006/diagram" xmlns:o="urn:schemas-microsoft-com:office:office" xmlns:v="urn:schemas-microsoft-com:vml" xmlns:pvml="urn:schemas-microsoft-com:office:powerpoint" xmlns:com="http://schemas.openxmlformats.org/drawingml/2006/compatibility" xmlns:p14="http://schemas.microsoft.com/office/powerpoint/2010/main" xmlns:p15="http://schemas.microsoft.com/office/powerpoint/2012/main" xmlns:ahyp="http://schemas.microsoft.com/office/drawing/2018/hyperlinkcolor">
   <p:cSld>
     <p:spTree>
@@ -14528,7 +15252,7 @@
 </p:sld>
 </file>
 
-<file path=ppt/slides/slide25.xml><?xml version="1.0" encoding="utf-8"?>
+<file path=ppt/slides/slide29.xml><?xml version="1.0" encoding="utf-8"?>
 <p:sld xmlns:a="http://schemas.openxmlformats.org/drawingml/2006/main" xmlns:p="http://schemas.openxmlformats.org/presentationml/2006/main" xmlns:r="http://schemas.openxmlformats.org/officeDocument/2006/relationships">
   <p:cSld>
     <p:spTree>
@@ -14701,7 +15425,96 @@
 </p:sld>
 </file>
 
-<file path=ppt/slides/slide26.xml><?xml version="1.0" encoding="utf-8"?>
+<file path=ppt/slides/slide3.xml><?xml version="1.0" encoding="utf-8"?>
+<p:sld xmlns:a="http://schemas.openxmlformats.org/drawingml/2006/main" xmlns:r="http://schemas.openxmlformats.org/officeDocument/2006/relationships" xmlns:mc="http://schemas.openxmlformats.org/markup-compatibility/2006" xmlns:mv="urn:schemas-microsoft-com:mac:vml" xmlns:p="http://schemas.openxmlformats.org/presentationml/2006/main" xmlns:c="http://schemas.openxmlformats.org/drawingml/2006/chart" xmlns:dgm="http://schemas.openxmlformats.org/drawingml/2006/diagram" xmlns:o="urn:schemas-microsoft-com:office:office" xmlns:v="urn:schemas-microsoft-com:vml" xmlns:pvml="urn:schemas-microsoft-com:office:powerpoint" xmlns:com="http://schemas.openxmlformats.org/drawingml/2006/compatibility" xmlns:p14="http://schemas.microsoft.com/office/powerpoint/2010/main" xmlns:p15="http://schemas.microsoft.com/office/powerpoint/2012/main" xmlns:ahyp="http://schemas.microsoft.com/office/drawing/2018/hyperlinkcolor">
+  <p:cSld>
+    <p:spTree>
+      <p:nvGrpSpPr>
+        <p:cNvPr id="44" name="Shape 44"/>
+        <p:cNvGrpSpPr/>
+        <p:nvPr/>
+      </p:nvGrpSpPr>
+      <p:grpSpPr>
+        <a:xfrm>
+          <a:off x="0" y="0"/>
+          <a:ext cx="0" cy="0"/>
+          <a:chOff x="0" y="0"/>
+          <a:chExt cx="0" cy="0"/>
+        </a:xfrm>
+      </p:grpSpPr>
+      <p:sp>
+        <p:nvSpPr>
+          <p:cNvPr id="45" name="Google Shape;45;p10"/>
+          <p:cNvSpPr txBox="1"/>
+          <p:nvPr>
+            <p:ph type="title"/>
+          </p:nvPr>
+        </p:nvSpPr>
+        <p:spPr>
+          <a:xfrm>
+            <a:off x="311700" y="195615"/>
+            <a:ext cx="8520600" cy="572700"/>
+          </a:xfrm>
+          <a:prstGeom prst="rect">
+            <a:avLst/>
+          </a:prstGeom>
+        </p:spPr>
+        <p:txBody>
+          <a:bodyPr anchorCtr="0" anchor="t" bIns="91425" lIns="91425" spcFirstLastPara="1" rIns="91425" wrap="square" tIns="91425">
+            <a:normAutofit fontScale="90000"/>
+          </a:bodyPr>
+          <a:lstStyle/>
+          <a:p>
+            <a:pPr indent="0" lvl="0" marL="0" rtl="0" algn="l">
+              <a:spcBef>
+                <a:spcPts val="0"/>
+              </a:spcBef>
+              <a:spcAft>
+                <a:spcPts val="0"/>
+              </a:spcAft>
+              <a:buNone/>
+            </a:pPr>
+            <a:r>
+              <a:rPr lang="en"/>
+              <a:t>Today’s Goal</a:t>
+            </a:r>
+            <a:endParaRPr/>
+          </a:p>
+        </p:txBody>
+      </p:sp>
+      <p:pic>
+        <p:nvPicPr>
+          <p:cNvPr id="46" name="Picture 46" descr="birds-flight.png"/>
+          <p:cNvPicPr>
+            <a:picLocks noChangeAspect="1"/>
+          </p:cNvPicPr>
+          <p:nvPr/>
+        </p:nvPicPr>
+        <p:blipFill>
+          <a:blip r:embed="rId4"/>
+          <a:stretch>
+            <a:fillRect/>
+          </a:stretch>
+        </p:blipFill>
+        <p:spPr>
+          <a:xfrm>
+            <a:off x="1677201" y="1531275"/>
+            <a:ext cx="5789598" cy="3256648"/>
+          </a:xfrm>
+          <a:prstGeom prst="rect">
+            <a:avLst/>
+          </a:prstGeom>
+        </p:spPr>
+      </p:pic>
+    </p:spTree>
+  </p:cSld>
+  <p:clrMapOvr>
+    <a:masterClrMapping/>
+  </p:clrMapOvr>
+</p:sld>
+</file>
+
+<file path=ppt/slides/slide30.xml><?xml version="1.0" encoding="utf-8"?>
 <p:sld xmlns:a="http://schemas.openxmlformats.org/drawingml/2006/main" xmlns:r="http://schemas.openxmlformats.org/officeDocument/2006/relationships" xmlns:mc="http://schemas.openxmlformats.org/markup-compatibility/2006" xmlns:mv="urn:schemas-microsoft-com:mac:vml" xmlns:p="http://schemas.openxmlformats.org/presentationml/2006/main" xmlns:c="http://schemas.openxmlformats.org/drawingml/2006/chart" xmlns:dgm="http://schemas.openxmlformats.org/drawingml/2006/diagram" xmlns:o="urn:schemas-microsoft-com:office:office" xmlns:v="urn:schemas-microsoft-com:vml" xmlns:pvml="urn:schemas-microsoft-com:office:powerpoint" xmlns:com="http://schemas.openxmlformats.org/drawingml/2006/compatibility" xmlns:p14="http://schemas.microsoft.com/office/powerpoint/2010/main" xmlns:p15="http://schemas.microsoft.com/office/powerpoint/2012/main" xmlns:ahyp="http://schemas.microsoft.com/office/drawing/2018/hyperlinkcolor">
   <p:cSld>
     <p:spTree>
@@ -15533,7 +16346,7 @@
 </p:sld>
 </file>
 
-<file path=ppt/slides/slide27.xml><?xml version="1.0" encoding="utf-8"?>
+<file path=ppt/slides/slide31.xml><?xml version="1.0" encoding="utf-8"?>
 <p:sld xmlns:a="http://schemas.openxmlformats.org/drawingml/2006/main" xmlns:r="http://schemas.openxmlformats.org/officeDocument/2006/relationships" xmlns:mc="http://schemas.openxmlformats.org/markup-compatibility/2006" xmlns:mv="urn:schemas-microsoft-com:mac:vml" xmlns:p="http://schemas.openxmlformats.org/presentationml/2006/main" xmlns:c="http://schemas.openxmlformats.org/drawingml/2006/chart" xmlns:dgm="http://schemas.openxmlformats.org/drawingml/2006/diagram" xmlns:o="urn:schemas-microsoft-com:office:office" xmlns:v="urn:schemas-microsoft-com:vml" xmlns:pvml="urn:schemas-microsoft-com:office:powerpoint" xmlns:com="http://schemas.openxmlformats.org/drawingml/2006/compatibility" xmlns:p14="http://schemas.microsoft.com/office/powerpoint/2010/main" xmlns:p15="http://schemas.microsoft.com/office/powerpoint/2012/main" xmlns:ahyp="http://schemas.microsoft.com/office/drawing/2018/hyperlinkcolor">
   <p:cSld>
     <p:spTree>
@@ -15682,95 +16495,6 @@
           </a:p>
         </p:txBody>
       </p:sp>
-    </p:spTree>
-  </p:cSld>
-  <p:clrMapOvr>
-    <a:masterClrMapping/>
-  </p:clrMapOvr>
-</p:sld>
-</file>
-
-<file path=ppt/slides/slide3.xml><?xml version="1.0" encoding="utf-8"?>
-<p:sld xmlns:a="http://schemas.openxmlformats.org/drawingml/2006/main" xmlns:r="http://schemas.openxmlformats.org/officeDocument/2006/relationships" xmlns:mc="http://schemas.openxmlformats.org/markup-compatibility/2006" xmlns:mv="urn:schemas-microsoft-com:mac:vml" xmlns:p="http://schemas.openxmlformats.org/presentationml/2006/main" xmlns:c="http://schemas.openxmlformats.org/drawingml/2006/chart" xmlns:dgm="http://schemas.openxmlformats.org/drawingml/2006/diagram" xmlns:o="urn:schemas-microsoft-com:office:office" xmlns:v="urn:schemas-microsoft-com:vml" xmlns:pvml="urn:schemas-microsoft-com:office:powerpoint" xmlns:com="http://schemas.openxmlformats.org/drawingml/2006/compatibility" xmlns:p14="http://schemas.microsoft.com/office/powerpoint/2010/main" xmlns:p15="http://schemas.microsoft.com/office/powerpoint/2012/main" xmlns:ahyp="http://schemas.microsoft.com/office/drawing/2018/hyperlinkcolor">
-  <p:cSld>
-    <p:spTree>
-      <p:nvGrpSpPr>
-        <p:cNvPr id="44" name="Shape 44"/>
-        <p:cNvGrpSpPr/>
-        <p:nvPr/>
-      </p:nvGrpSpPr>
-      <p:grpSpPr>
-        <a:xfrm>
-          <a:off x="0" y="0"/>
-          <a:ext cx="0" cy="0"/>
-          <a:chOff x="0" y="0"/>
-          <a:chExt cx="0" cy="0"/>
-        </a:xfrm>
-      </p:grpSpPr>
-      <p:sp>
-        <p:nvSpPr>
-          <p:cNvPr id="45" name="Google Shape;45;p10"/>
-          <p:cNvSpPr txBox="1"/>
-          <p:nvPr>
-            <p:ph type="title"/>
-          </p:nvPr>
-        </p:nvSpPr>
-        <p:spPr>
-          <a:xfrm>
-            <a:off x="311700" y="195615"/>
-            <a:ext cx="8520600" cy="572700"/>
-          </a:xfrm>
-          <a:prstGeom prst="rect">
-            <a:avLst/>
-          </a:prstGeom>
-        </p:spPr>
-        <p:txBody>
-          <a:bodyPr anchorCtr="0" anchor="t" bIns="91425" lIns="91425" spcFirstLastPara="1" rIns="91425" wrap="square" tIns="91425">
-            <a:normAutofit fontScale="90000"/>
-          </a:bodyPr>
-          <a:lstStyle/>
-          <a:p>
-            <a:pPr indent="0" lvl="0" marL="0" rtl="0" algn="l">
-              <a:spcBef>
-                <a:spcPts val="0"/>
-              </a:spcBef>
-              <a:spcAft>
-                <a:spcPts val="0"/>
-              </a:spcAft>
-              <a:buNone/>
-            </a:pPr>
-            <a:r>
-              <a:rPr lang="en"/>
-              <a:t>Today’s Goal</a:t>
-            </a:r>
-            <a:endParaRPr/>
-          </a:p>
-        </p:txBody>
-      </p:sp>
-      <p:pic>
-        <p:nvPicPr>
-          <p:cNvPr id="46" name="Picture 46" descr="birds-flight.png"/>
-          <p:cNvPicPr>
-            <a:picLocks noChangeAspect="1"/>
-          </p:cNvPicPr>
-          <p:nvPr/>
-        </p:nvPicPr>
-        <p:blipFill>
-          <a:blip r:embed="rId4"/>
-          <a:stretch>
-            <a:fillRect/>
-          </a:stretch>
-        </p:blipFill>
-        <p:spPr>
-          <a:xfrm>
-            <a:off x="1677201" y="1531275"/>
-            <a:ext cx="5789598" cy="3256648"/>
-          </a:xfrm>
-          <a:prstGeom prst="rect">
-            <a:avLst/>
-          </a:prstGeom>
-        </p:spPr>
-      </p:pic>
     </p:spTree>
   </p:cSld>
   <p:clrMapOvr>

--- a/slides/07 Angry Birds.pptx
+++ b/slides/07 Angry Birds.pptx
@@ -15484,22 +15484,22 @@
       </p:sp>
       <p:pic>
         <p:nvPicPr>
-          <p:cNvPr id="46" name="Picture 46" descr="birds-flight.png"/>
+          <p:cNvPr id="46" name="Picture 46" descr="gif-birds.gif"/>
           <p:cNvPicPr>
             <a:picLocks noChangeAspect="1"/>
           </p:cNvPicPr>
           <p:nvPr/>
         </p:nvPicPr>
         <p:blipFill>
-          <a:blip r:embed="rId4"/>
+          <a:blip r:embed="rId3"/>
           <a:stretch>
             <a:fillRect/>
           </a:stretch>
         </p:blipFill>
         <p:spPr>
           <a:xfrm>
-            <a:off x="1677201" y="1531275"/>
-            <a:ext cx="5789598" cy="3256648"/>
+            <a:off x="1677202" y="1531275"/>
+            <a:ext cx="5789596" cy="3256648"/>
           </a:xfrm>
           <a:prstGeom prst="rect">
             <a:avLst/>

--- a/slides/07 Angry Birds.pptx
+++ b/slides/07 Angry Birds.pptx
@@ -14,6 +14,8 @@
     <p:sldId id="258" r:id="rId8"/>
     <p:sldId id="259" r:id="rId9"/>
     <p:sldId id="297" r:id="rId56"/>
+    <p:sldId id="319" r:id="rId35"/>
+    <p:sldId id="320" r:id="rId34"/>
     <p:sldId id="298" r:id="rId57"/>
     <p:sldId id="299" r:id="rId58"/>
     <p:sldId id="300" r:id="rId59"/>
@@ -2442,6 +2444,147 @@
           <a:p>
             <a:r>
               <a:t>Pairs, about 5 minutes. The constant is used all through Game1. At 10, a block is five times bigger in metres, so it falls like a building: slowly.</a:t>
+            </a:r>
+          </a:p>
+        </p:txBody>
+      </p:sp>
+    </p:spTree>
+  </p:cSld>
+  <p:clrMapOvr>
+    <a:masterClrMapping/>
+  </p:clrMapOvr>
+</p:notes>
+</file>
+
+<file path=ppt/notesSlides/notesSlide32.xml><?xml version="1.0" encoding="utf-8"?>
+<p:notes xmlns:a="http://schemas.openxmlformats.org/drawingml/2006/main" xmlns:p="http://schemas.openxmlformats.org/presentationml/2006/main" xmlns:r="http://schemas.openxmlformats.org/officeDocument/2006/relationships">
+  <p:cSld>
+    <p:spTree>
+      <p:nvGrpSpPr>
+        <p:cNvPr id="1" name=""/>
+        <p:cNvGrpSpPr/>
+        <p:nvPr/>
+      </p:nvGrpSpPr>
+      <p:grpSpPr>
+        <a:xfrm>
+          <a:off x="0" y="0"/>
+          <a:ext cx="0" cy="0"/>
+          <a:chOff x="0" y="0"/>
+          <a:chExt cx="0" cy="0"/>
+        </a:xfrm>
+      </p:grpSpPr>
+      <p:sp>
+        <p:nvSpPr>
+          <p:cNvPr id="2" name="Slide Image Placeholder 1"/>
+          <p:cNvSpPr>
+            <a:spLocks noGrp="1"/>
+          </p:cNvSpPr>
+          <p:nvPr>
+            <p:ph type="sldImg" idx="2"/>
+          </p:nvPr>
+        </p:nvSpPr>
+        <p:spPr/>
+      </p:sp>
+      <p:sp>
+        <p:nvSpPr>
+          <p:cNvPr id="3" name="Notes Placeholder 2"/>
+          <p:cNvSpPr>
+            <a:spLocks noGrp="1"/>
+          </p:cNvSpPr>
+          <p:nvPr>
+            <p:ph type="body" idx="1"/>
+          </p:nvPr>
+        </p:nvSpPr>
+        <p:spPr/>
+        <p:txBody>
+          <a:bodyPr/>
+          <a:lstStyle/>
+          <a:p>
+            <a:r>
+              <a:t>Demo: run PhysicsSamples and go through the scenes.</a:t>
+            </a:r>
+          </a:p>
+          <a:p>
+            <a:r>
+              <a:t>1: static (orange), kinematic (magenta: moves at its own velocity, pushes, is never pushed), dynamic (green, blue when asleep).</a:t>
+            </a:r>
+          </a:p>
+          <a:p>
+            <a:r>
+              <a:t>2: restitution, how much speed a bounce keeps. 3: friction, the same slope. 4: density, the same ball fifty times heavier.</a:t>
+            </a:r>
+          </a:p>
+          <a:p>
+            <a:r>
+              <a:t>5: sleeping, the pile turns blue; drop a box in to wake it.</a:t>
+            </a:r>
+          </a:p>
+          <a:p>
+            <a:r>
+              <a:t>Mention: the samples use the game’s facade, which got BodyType so they could make a kinematic platform.</a:t>
+            </a:r>
+          </a:p>
+        </p:txBody>
+      </p:sp>
+    </p:spTree>
+  </p:cSld>
+  <p:clrMapOvr>
+    <a:masterClrMapping/>
+  </p:clrMapOvr>
+</p:notes>
+</file>
+
+<file path=ppt/notesSlides/notesSlide33.xml><?xml version="1.0" encoding="utf-8"?>
+<p:notes xmlns:a="http://schemas.openxmlformats.org/drawingml/2006/main" xmlns:p="http://schemas.openxmlformats.org/presentationml/2006/main" xmlns:r="http://schemas.openxmlformats.org/officeDocument/2006/relationships">
+  <p:cSld>
+    <p:spTree>
+      <p:nvGrpSpPr>
+        <p:cNvPr id="1" name=""/>
+        <p:cNvGrpSpPr/>
+        <p:nvPr/>
+      </p:nvGrpSpPr>
+      <p:grpSpPr>
+        <a:xfrm>
+          <a:off x="0" y="0"/>
+          <a:ext cx="0" cy="0"/>
+          <a:chOff x="0" y="0"/>
+          <a:chExt cx="0" cy="0"/>
+        </a:xfrm>
+      </p:grpSpPr>
+      <p:sp>
+        <p:nvSpPr>
+          <p:cNvPr id="2" name="Slide Image Placeholder 1"/>
+          <p:cNvSpPr>
+            <a:spLocks noGrp="1"/>
+          </p:cNvSpPr>
+          <p:nvPr>
+            <p:ph type="sldImg" idx="2"/>
+          </p:nvPr>
+        </p:nvSpPr>
+        <p:spPr/>
+      </p:sp>
+      <p:sp>
+        <p:nvSpPr>
+          <p:cNvPr id="3" name="Notes Placeholder 2"/>
+          <p:cNvSpPr>
+            <a:spLocks noGrp="1"/>
+          </p:cNvSpPr>
+          <p:nvPr>
+            <p:ph type="body" idx="1"/>
+          </p:nvPr>
+        </p:nvSpPr>
+        <p:spPr/>
+        <p:txBody>
+          <a:bodyPr/>
+          <a:lstStyle/>
+          <a:p>
+            <a:r>
+              <a:t>Pairs, about 7 minutes. The platform: its velocity and the two turning points in BodyTypesScene.</a:t>
+            </a:r>
+          </a:p>
+          <a:p>
+            <a:r>
+              <a:t>The friction: about 0.23, not tan 26° (about 0.48). Box2D combines two frictions as the square root of their product, and the slope’s friction is 1: the square root of 0.23 is 0.48. A good reason to read what a library does.</a:t>
             </a:r>
           </a:p>
         </p:txBody>
@@ -6562,6 +6705,566 @@
       <p:grpSpPr/>
       <p:sp>
         <p:nvSpPr>
+          <p:cNvPr id="293" name="Google Shape;293;p45"/>
+          <p:cNvSpPr txBox="1"/>
+          <p:nvPr>
+            <p:ph type="title"/>
+          </p:nvPr>
+        </p:nvSpPr>
+        <p:spPr>
+          <a:xfrm>
+            <a:off x="311700" y="195615"/>
+            <a:ext cx="8520600" cy="572700"/>
+          </a:xfrm>
+          <a:prstGeom prst="rect">
+            <a:avLst/>
+          </a:prstGeom>
+        </p:spPr>
+        <p:txBody>
+          <a:bodyPr anchorCtr="0" anchor="t" bIns="91425" lIns="91425" spcFirstLastPara="1" rIns="91425" wrap="square" tIns="91425">
+            <a:normAutofit fontScale="90000"/>
+          </a:bodyPr>
+          <a:lstStyle/>
+          <a:p>
+            <a:pPr indent="0" lvl="0" marL="0" rtl="0" algn="l">
+              <a:spcBef>
+                <a:spcPts val="0"/>
+              </a:spcBef>
+              <a:spcAft>
+                <a:spcPts val="0"/>
+              </a:spcAft>
+              <a:buNone/>
+            </a:pPr>
+            <a:r>
+              <a:rPr lang="en">
+                <a:solidFill>
+                  <a:schemeClr val="accent5"/>
+                </a:solidFill>
+              </a:rPr>
+              <a:t>Why Metres?</a:t>
+            </a:r>
+            <a:endParaRPr>
+              <a:solidFill>
+                <a:schemeClr val="accent5"/>
+              </a:solidFill>
+            </a:endParaRPr>
+          </a:p>
+        </p:txBody>
+      </p:sp>
+      <p:sp>
+        <p:nvSpPr>
+          <p:cNvPr id="294" name="Google Shape;294;p45"/>
+          <p:cNvSpPr txBox="1"/>
+          <p:nvPr>
+            <p:ph idx="1" type="body"/>
+          </p:nvPr>
+        </p:nvSpPr>
+        <p:spPr>
+          <a:xfrm>
+            <a:off x="311700" y="885950"/>
+            <a:ext cx="8520600" cy="521208"/>
+          </a:xfrm>
+          <a:prstGeom prst="rect">
+            <a:avLst/>
+          </a:prstGeom>
+        </p:spPr>
+        <p:txBody>
+          <a:bodyPr anchorCtr="0" anchor="t" bIns="91425" lIns="91425" spcFirstLastPara="1" rIns="91425" wrap="square" tIns="91425">
+            <a:normAutofit/>
+          </a:bodyPr>
+          <a:lstStyle/>
+          <a:p>
+            <a:pPr indent="-330200" lvl="0" marL="457200" rtl="0" algn="l">
+              <a:spcBef>
+                <a:spcPts val="0"/>
+              </a:spcBef>
+              <a:spcAft>
+                <a:spcPts val="0"/>
+              </a:spcAft>
+              <a:buSzPts val="1600"/>
+              <a:buChar char="●"/>
+            </a:pPr>
+            <a:r>
+              <a:rPr lang="en"/>
+              <a:t>A 50-pixel block, taken as metres, is a 50-metre building: it falls in slow motion.</a:t>
+            </a:r>
+            <a:endParaRPr/>
+          </a:p>
+        </p:txBody>
+      </p:sp>
+      <p:sp>
+        <p:nvSpPr>
+          <p:cNvPr id="295" name="Rounded Rectangle 294"/>
+          <p:cNvSpPr/>
+          <p:nvPr/>
+        </p:nvSpPr>
+        <p:spPr>
+          <a:xfrm>
+            <a:off x="548640" y="1463040"/>
+            <a:ext cx="2743200" cy="914400"/>
+          </a:xfrm>
+          <a:prstGeom prst="roundRect">
+            <a:avLst>
+              <a:gd name="adj" fmla="val 12000"/>
+            </a:avLst>
+          </a:prstGeom>
+          <a:solidFill>
+            <a:srgbClr val="2E3338"/>
+          </a:solidFill>
+          <a:ln>
+            <a:noFill/>
+          </a:ln>
+          <a:effectLst/>
+        </p:spPr>
+        <p:style>
+          <a:lnRef idx="1">
+            <a:schemeClr val="accent1"/>
+          </a:lnRef>
+          <a:fillRef idx="3">
+            <a:schemeClr val="accent1"/>
+          </a:fillRef>
+          <a:effectRef idx="2">
+            <a:schemeClr val="accent1"/>
+          </a:effectRef>
+          <a:fontRef idx="minor">
+            <a:schemeClr val="lt1"/>
+          </a:fontRef>
+        </p:style>
+        <p:txBody>
+          <a:bodyPr rtlCol="0" anchor="ctr" wrap="square" lIns="73152" rIns="73152"/>
+          <a:lstStyle/>
+          <a:p>
+            <a:pPr algn="ctr"/>
+            <a:r>
+              <a:rPr sz="1600" b="1">
+                <a:solidFill>
+                  <a:srgbClr val="DEE2E6"/>
+                </a:solidFill>
+              </a:rPr>
+              <a:t>Our game</a:t>
+            </a:r>
+          </a:p>
+          <a:p>
+            <a:pPr algn="ctr"/>
+            <a:r>
+              <a:rPr sz="1400" b="0">
+                <a:solidFill>
+                  <a:srgbClr val="9AA3AB"/>
+                </a:solidFill>
+              </a:rPr>
+              <a:t>pixels, y down,</a:t>
+            </a:r>
+          </a:p>
+          <a:p>
+            <a:pPr algn="ctr"/>
+            <a:r>
+              <a:rPr sz="1400" b="0">
+                <a:solidFill>
+                  <a:srgbClr val="9AA3AB"/>
+                </a:solidFill>
+              </a:rPr>
+              <a:t>clockwise</a:t>
+            </a:r>
+          </a:p>
+        </p:txBody>
+      </p:sp>
+      <p:sp>
+        <p:nvSpPr>
+          <p:cNvPr id="296" name="Rounded Rectangle 295"/>
+          <p:cNvSpPr/>
+          <p:nvPr/>
+        </p:nvSpPr>
+        <p:spPr>
+          <a:xfrm>
+            <a:off x="5852160" y="1463040"/>
+            <a:ext cx="2743200" cy="914400"/>
+          </a:xfrm>
+          <a:prstGeom prst="roundRect">
+            <a:avLst>
+              <a:gd name="adj" fmla="val 12000"/>
+            </a:avLst>
+          </a:prstGeom>
+          <a:solidFill>
+            <a:srgbClr val="2E3338"/>
+          </a:solidFill>
+          <a:ln>
+            <a:noFill/>
+          </a:ln>
+          <a:effectLst/>
+        </p:spPr>
+        <p:style>
+          <a:lnRef idx="1">
+            <a:schemeClr val="accent1"/>
+          </a:lnRef>
+          <a:fillRef idx="3">
+            <a:schemeClr val="accent1"/>
+          </a:fillRef>
+          <a:effectRef idx="2">
+            <a:schemeClr val="accent1"/>
+          </a:effectRef>
+          <a:fontRef idx="minor">
+            <a:schemeClr val="lt1"/>
+          </a:fontRef>
+        </p:style>
+        <p:txBody>
+          <a:bodyPr rtlCol="0" anchor="ctr" wrap="square" lIns="73152" rIns="73152"/>
+          <a:lstStyle/>
+          <a:p>
+            <a:pPr algn="ctr"/>
+            <a:r>
+              <a:rPr sz="1600" b="1">
+                <a:solidFill>
+                  <a:srgbClr val="DEE2E6"/>
+                </a:solidFill>
+              </a:rPr>
+              <a:t>Box2D</a:t>
+            </a:r>
+          </a:p>
+          <a:p>
+            <a:pPr algn="ctr"/>
+            <a:r>
+              <a:rPr sz="1400" b="0">
+                <a:solidFill>
+                  <a:srgbClr val="9AA3AB"/>
+                </a:solidFill>
+              </a:rPr>
+              <a:t>metres, y up,</a:t>
+            </a:r>
+          </a:p>
+          <a:p>
+            <a:pPr algn="ctr"/>
+            <a:r>
+              <a:rPr sz="1400" b="0">
+                <a:solidFill>
+                  <a:srgbClr val="9AA3AB"/>
+                </a:solidFill>
+              </a:rPr>
+              <a:t>counter-clockwise</a:t>
+            </a:r>
+          </a:p>
+        </p:txBody>
+      </p:sp>
+      <p:cxnSp>
+        <p:nvCxnSpPr>
+          <p:cNvPr id="297" name="Connector 296"/>
+          <p:cNvCxnSpPr/>
+          <p:nvPr/>
+        </p:nvCxnSpPr>
+        <p:spPr>
+          <a:xfrm>
+            <a:off x="3337560" y="1783080"/>
+            <a:ext cx="2468880" cy="0"/>
+          </a:xfrm>
+          <a:prstGeom prst="line">
+            <a:avLst/>
+          </a:prstGeom>
+          <a:ln w="25400">
+            <a:solidFill>
+              <a:srgbClr val="D45D35"/>
+            </a:solidFill>
+            <a:tailEnd type="triangle"/>
+          </a:ln>
+        </p:spPr>
+        <p:style>
+          <a:lnRef idx="2">
+            <a:schemeClr val="accent1"/>
+          </a:lnRef>
+          <a:fillRef idx="0">
+            <a:schemeClr val="accent1"/>
+          </a:fillRef>
+          <a:effectRef idx="1">
+            <a:schemeClr val="accent1"/>
+          </a:effectRef>
+          <a:fontRef idx="minor">
+            <a:schemeClr val="tx1"/>
+          </a:fontRef>
+        </p:style>
+      </p:cxnSp>
+      <p:sp>
+        <p:nvSpPr>
+          <p:cNvPr id="298" name="TextBox 297"/>
+          <p:cNvSpPr txBox="1"/>
+          <p:nvPr/>
+        </p:nvSpPr>
+        <p:spPr>
+          <a:xfrm>
+            <a:off x="3154679" y="1490472"/>
+            <a:ext cx="2834639" cy="274320"/>
+          </a:xfrm>
+          <a:prstGeom prst="rect">
+            <a:avLst/>
+          </a:prstGeom>
+          <a:noFill/>
+        </p:spPr>
+        <p:txBody>
+          <a:bodyPr wrap="square">
+            <a:spAutoFit/>
+          </a:bodyPr>
+          <a:lstStyle/>
+          <a:p>
+            <a:pPr algn="ctr"/>
+            <a:r>
+              <a:rPr sz="1100" b="0" i="0">
+                <a:solidFill>
+                  <a:srgbClr val="9AA3AB"/>
+                </a:solidFill>
+              </a:rPr>
+              <a:t>÷ 50, flip y</a:t>
+            </a:r>
+          </a:p>
+        </p:txBody>
+      </p:sp>
+      <p:cxnSp>
+        <p:nvCxnSpPr>
+          <p:cNvPr id="299" name="Connector 298"/>
+          <p:cNvCxnSpPr/>
+          <p:nvPr/>
+        </p:nvCxnSpPr>
+        <p:spPr>
+          <a:xfrm flipH="1">
+            <a:off x="3337560" y="2103120"/>
+            <a:ext cx="2468880" cy="0"/>
+          </a:xfrm>
+          <a:prstGeom prst="line">
+            <a:avLst/>
+          </a:prstGeom>
+          <a:ln w="25400">
+            <a:solidFill>
+              <a:srgbClr val="D45D35"/>
+            </a:solidFill>
+            <a:tailEnd type="triangle"/>
+          </a:ln>
+        </p:spPr>
+        <p:style>
+          <a:lnRef idx="2">
+            <a:schemeClr val="accent1"/>
+          </a:lnRef>
+          <a:fillRef idx="0">
+            <a:schemeClr val="accent1"/>
+          </a:fillRef>
+          <a:effectRef idx="1">
+            <a:schemeClr val="accent1"/>
+          </a:effectRef>
+          <a:fontRef idx="minor">
+            <a:schemeClr val="tx1"/>
+          </a:fontRef>
+        </p:style>
+      </p:cxnSp>
+      <p:sp>
+        <p:nvSpPr>
+          <p:cNvPr id="300" name="TextBox 299"/>
+          <p:cNvSpPr txBox="1"/>
+          <p:nvPr/>
+        </p:nvSpPr>
+        <p:spPr>
+          <a:xfrm>
+            <a:off x="3337560" y="2148840"/>
+            <a:ext cx="2468880" cy="274320"/>
+          </a:xfrm>
+          <a:prstGeom prst="rect">
+            <a:avLst/>
+          </a:prstGeom>
+          <a:noFill/>
+        </p:spPr>
+        <p:txBody>
+          <a:bodyPr wrap="square">
+            <a:spAutoFit/>
+          </a:bodyPr>
+          <a:lstStyle/>
+          <a:p>
+            <a:pPr algn="ctr"/>
+            <a:r>
+              <a:rPr sz="1100" b="0" i="0">
+                <a:solidFill>
+                  <a:srgbClr val="9AA3AB"/>
+                </a:solidFill>
+              </a:rPr>
+              <a:t>× 50, flip y</a:t>
+            </a:r>
+          </a:p>
+        </p:txBody>
+      </p:sp>
+      <p:sp>
+        <p:nvSpPr>
+          <p:cNvPr id="301" name="TextBox 300"/>
+          <p:cNvSpPr txBox="1"/>
+          <p:nvPr/>
+        </p:nvSpPr>
+        <p:spPr>
+          <a:xfrm>
+            <a:off x="457200" y="2834640"/>
+            <a:ext cx="8229600" cy="731520"/>
+          </a:xfrm>
+          <a:prstGeom prst="rect">
+            <a:avLst/>
+          </a:prstGeom>
+          <a:noFill/>
+        </p:spPr>
+        <p:txBody>
+          <a:bodyPr wrap="square">
+            <a:spAutoFit/>
+          </a:bodyPr>
+          <a:lstStyle/>
+          <a:p>
+            <a:pPr algn="ctr"/>
+            <a:r>
+              <a:rPr sz="1700" b="1" i="0">
+                <a:solidFill>
+                  <a:srgbClr val="DEE2E6"/>
+                </a:solidFill>
+              </a:rPr>
+              <a:t>Forget one conversion. What do you see?</a:t>
+            </a:r>
+          </a:p>
+        </p:txBody>
+      </p:sp>
+    </p:spTree>
+  </p:cSld>
+  <p:clrMapOvr>
+    <a:masterClrMapping/>
+  </p:clrMapOvr>
+</p:sld>
+</file>
+
+<file path=ppt/slides/slide11.xml><?xml version="1.0" encoding="utf-8"?>
+<p:sld xmlns:a="http://schemas.openxmlformats.org/drawingml/2006/main" xmlns:p="http://schemas.openxmlformats.org/presentationml/2006/main" xmlns:r="http://schemas.openxmlformats.org/officeDocument/2006/relationships">
+  <p:cSld>
+    <p:spTree>
+      <p:nvGrpSpPr>
+        <p:cNvPr id="1" name=""/>
+        <p:cNvGrpSpPr/>
+        <p:nvPr/>
+      </p:nvGrpSpPr>
+      <p:grpSpPr/>
+      <p:sp>
+        <p:nvSpPr>
+          <p:cNvPr id="128" name="Google Shape;128;p21"/>
+          <p:cNvSpPr txBox="1"/>
+          <p:nvPr>
+            <p:ph type="title"/>
+          </p:nvPr>
+        </p:nvSpPr>
+        <p:spPr>
+          <a:xfrm>
+            <a:off x="311700" y="195615"/>
+            <a:ext cx="8520600" cy="572700"/>
+          </a:xfrm>
+          <a:prstGeom prst="rect">
+            <a:avLst/>
+          </a:prstGeom>
+        </p:spPr>
+        <p:txBody>
+          <a:bodyPr anchorCtr="0" anchor="t" bIns="91425" lIns="91425" spcFirstLastPara="1" rIns="91425" wrap="square" tIns="91425">
+            <a:normAutofit fontScale="90000"/>
+          </a:bodyPr>
+          <a:lstStyle/>
+          <a:p>
+            <a:pPr indent="0" lvl="0" marL="0" rtl="0" algn="l">
+              <a:spcBef>
+                <a:spcPts val="0"/>
+              </a:spcBef>
+              <a:spcAft>
+                <a:spcPts val="0"/>
+              </a:spcAft>
+              <a:buNone/>
+            </a:pPr>
+            <a:r>
+              <a:rPr lang="en">
+                <a:solidFill>
+                  <a:schemeClr val="accent5"/>
+                </a:solidFill>
+              </a:rPr>
+              <a:t>Box2D Implementation</a:t>
+            </a:r>
+            <a:endParaRPr>
+              <a:solidFill>
+                <a:schemeClr val="accent5"/>
+              </a:solidFill>
+            </a:endParaRPr>
+          </a:p>
+        </p:txBody>
+      </p:sp>
+      <p:sp>
+        <p:nvSpPr>
+          <p:cNvPr id="129" name="Google Shape;129;p21"/>
+          <p:cNvSpPr txBox="1"/>
+          <p:nvPr>
+            <p:ph idx="1" type="body"/>
+          </p:nvPr>
+        </p:nvSpPr>
+        <p:spPr>
+          <a:xfrm>
+            <a:off x="311700" y="885950"/>
+            <a:ext cx="8520600" cy="4023300"/>
+          </a:xfrm>
+          <a:prstGeom prst="rect">
+            <a:avLst/>
+          </a:prstGeom>
+        </p:spPr>
+        <p:txBody>
+          <a:bodyPr anchorCtr="0" anchor="ctr" bIns="91425" lIns="91425" spcFirstLastPara="1" rIns="91425" wrap="square" tIns="91425">
+            <a:normAutofit/>
+          </a:bodyPr>
+          <a:lstStyle/>
+          <a:p>
+            <a:pPr indent="0" lvl="0" marL="0" rtl="0" algn="ctr">
+              <a:spcBef>
+                <a:spcPts val="0"/>
+              </a:spcBef>
+              <a:spcAft>
+                <a:spcPts val="1200"/>
+              </a:spcAft>
+              <a:buNone/>
+            </a:pPr>
+            <a:r>
+              <a:rPr lang="en" sz="2900">
+                <a:latin typeface="VT323"/>
+                <a:ea typeface="VT323"/>
+                <a:cs typeface="VT323"/>
+                <a:sym typeface="VT323"/>
+              </a:rPr>
+              <a:t>DEMO!</a:t>
+            </a:r>
+            <a:endParaRPr/>
+          </a:p>
+          <a:p>
+            <a:pPr indent="0" lvl="0" marL="0" rtl="0" algn="ctr">
+              <a:spcBef>
+                <a:spcPts val="0"/>
+              </a:spcBef>
+              <a:spcAft>
+                <a:spcPts val="0"/>
+              </a:spcAft>
+              <a:buNone/>
+            </a:pPr>
+            <a:r>
+              <a:rPr lang="en" sz="1800"/>
+              <a:t>Birds0: Box2D, used directly in Game1</a:t>
+            </a:r>
+            <a:endParaRPr sz="1800"/>
+          </a:p>
+        </p:txBody>
+      </p:sp>
+    </p:spTree>
+  </p:cSld>
+  <p:clrMapOvr>
+    <a:masterClrMapping/>
+  </p:clrMapOvr>
+</p:sld>
+</file>
+
+<file path=ppt/slides/slide12.xml><?xml version="1.0" encoding="utf-8"?>
+<p:sld xmlns:a="http://schemas.openxmlformats.org/drawingml/2006/main" xmlns:p="http://schemas.openxmlformats.org/presentationml/2006/main" xmlns:r="http://schemas.openxmlformats.org/officeDocument/2006/relationships">
+  <p:cSld>
+    <p:spTree>
+      <p:nvGrpSpPr>
+        <p:cNvPr id="1" name=""/>
+        <p:cNvGrpSpPr/>
+        <p:nvPr/>
+      </p:nvGrpSpPr>
+      <p:grpSpPr/>
+      <p:sp>
+        <p:nvSpPr>
           <p:cNvPr id="2" name="Title 1"/>
           <p:cNvSpPr>
             <a:spLocks noGrp="1"/>
@@ -6672,7 +7375,7 @@
 </p:sld>
 </file>
 
-<file path=ppt/slides/slide11.xml><?xml version="1.0" encoding="utf-8"?>
+<file path=ppt/slides/slide13.xml><?xml version="1.0" encoding="utf-8"?>
 <p:sld xmlns:a="http://schemas.openxmlformats.org/drawingml/2006/main" xmlns:p="http://schemas.openxmlformats.org/presentationml/2006/main" xmlns:r="http://schemas.openxmlformats.org/officeDocument/2006/relationships">
   <p:cSld>
     <p:spTree>
@@ -7055,7 +7758,7 @@
 </p:sld>
 </file>
 
-<file path=ppt/slides/slide12.xml><?xml version="1.0" encoding="utf-8"?>
+<file path=ppt/slides/slide14.xml><?xml version="1.0" encoding="utf-8"?>
 <p:sld xmlns:a="http://schemas.openxmlformats.org/drawingml/2006/main" xmlns:p="http://schemas.openxmlformats.org/presentationml/2006/main" xmlns:r="http://schemas.openxmlformats.org/officeDocument/2006/relationships">
   <p:cSld>
     <p:spTree>
@@ -7927,7 +8630,7 @@
 </p:sld>
 </file>
 
-<file path=ppt/slides/slide13.xml><?xml version="1.0" encoding="utf-8"?>
+<file path=ppt/slides/slide15.xml><?xml version="1.0" encoding="utf-8"?>
 <p:sld xmlns:a="http://schemas.openxmlformats.org/drawingml/2006/main" xmlns:p="http://schemas.openxmlformats.org/presentationml/2006/main" xmlns:r="http://schemas.openxmlformats.org/officeDocument/2006/relationships">
   <p:cSld>
     <p:spTree>
@@ -8709,7 +9412,7 @@
 </p:sld>
 </file>
 
-<file path=ppt/slides/slide14.xml><?xml version="1.0" encoding="utf-8"?>
+<file path=ppt/slides/slide16.xml><?xml version="1.0" encoding="utf-8"?>
 <p:sld xmlns:a="http://schemas.openxmlformats.org/drawingml/2006/main" xmlns:p="http://schemas.openxmlformats.org/presentationml/2006/main" xmlns:r="http://schemas.openxmlformats.org/officeDocument/2006/relationships">
   <p:cSld>
     <p:spTree>
@@ -9133,7 +9836,7 @@
 </p:sld>
 </file>
 
-<file path=ppt/slides/slide15.xml><?xml version="1.0" encoding="utf-8"?>
+<file path=ppt/slides/slide17.xml><?xml version="1.0" encoding="utf-8"?>
 <p:sld xmlns:a="http://schemas.openxmlformats.org/drawingml/2006/main" xmlns:p="http://schemas.openxmlformats.org/presentationml/2006/main" xmlns:r="http://schemas.openxmlformats.org/officeDocument/2006/relationships">
   <p:cSld>
     <p:spTree>
@@ -9260,7 +9963,7 @@
 </p:sld>
 </file>
 
-<file path=ppt/slides/slide16.xml><?xml version="1.0" encoding="utf-8"?>
+<file path=ppt/slides/slide18.xml><?xml version="1.0" encoding="utf-8"?>
 <p:sld xmlns:a="http://schemas.openxmlformats.org/drawingml/2006/main" xmlns:p="http://schemas.openxmlformats.org/presentationml/2006/main" xmlns:r="http://schemas.openxmlformats.org/officeDocument/2006/relationships">
   <p:cSld>
     <p:spTree>
@@ -9382,7 +10085,7 @@
 </p:sld>
 </file>
 
-<file path=ppt/slides/slide17.xml><?xml version="1.0" encoding="utf-8"?>
+<file path=ppt/slides/slide19.xml><?xml version="1.0" encoding="utf-8"?>
 <p:sld xmlns:a="http://schemas.openxmlformats.org/drawingml/2006/main" xmlns:p="http://schemas.openxmlformats.org/presentationml/2006/main" xmlns:r="http://schemas.openxmlformats.org/officeDocument/2006/relationships">
   <p:cSld>
     <p:spTree>
@@ -10191,991 +10894,6 @@
               <a:cs typeface="Consolas"/>
               <a:sym typeface="Consolas"/>
             </a:endParaRPr>
-          </a:p>
-        </p:txBody>
-      </p:sp>
-    </p:spTree>
-  </p:cSld>
-  <p:clrMapOvr>
-    <a:masterClrMapping/>
-  </p:clrMapOvr>
-</p:sld>
-</file>
-
-<file path=ppt/slides/slide18.xml><?xml version="1.0" encoding="utf-8"?>
-<p:sld xmlns:a="http://schemas.openxmlformats.org/drawingml/2006/main" xmlns:p="http://schemas.openxmlformats.org/presentationml/2006/main" xmlns:r="http://schemas.openxmlformats.org/officeDocument/2006/relationships">
-  <p:cSld>
-    <p:spTree>
-      <p:nvGrpSpPr>
-        <p:cNvPr id="1" name=""/>
-        <p:cNvGrpSpPr/>
-        <p:nvPr/>
-      </p:nvGrpSpPr>
-      <p:grpSpPr/>
-      <p:sp>
-        <p:nvSpPr>
-          <p:cNvPr id="140" name="Google Shape;140;p23"/>
-          <p:cNvSpPr txBox="1"/>
-          <p:nvPr>
-            <p:ph type="title"/>
-          </p:nvPr>
-        </p:nvSpPr>
-        <p:spPr>
-          <a:xfrm>
-            <a:off x="311700" y="195615"/>
-            <a:ext cx="8520600" cy="572700"/>
-          </a:xfrm>
-          <a:prstGeom prst="rect">
-            <a:avLst/>
-          </a:prstGeom>
-        </p:spPr>
-        <p:txBody>
-          <a:bodyPr anchorCtr="0" anchor="t" bIns="91425" lIns="91425" spcFirstLastPara="1" rIns="91425" wrap="square" tIns="91425">
-            <a:normAutofit fontScale="90000"/>
-          </a:bodyPr>
-          <a:lstStyle/>
-          <a:p>
-            <a:pPr indent="0" lvl="0" marL="0" rtl="0" algn="l">
-              <a:spcBef>
-                <a:spcPts val="0"/>
-              </a:spcBef>
-              <a:spcAft>
-                <a:spcPts val="0"/>
-              </a:spcAft>
-              <a:buNone/>
-            </a:pPr>
-            <a:r>
-              <a:rPr lang="en"/>
-              <a:t>Destroying Safely</a:t>
-            </a:r>
-            <a:endParaRPr/>
-          </a:p>
-        </p:txBody>
-      </p:sp>
-      <p:sp>
-        <p:nvSpPr>
-          <p:cNvPr id="293" name="Google Shape;293;p45"/>
-          <p:cNvSpPr txBox="1"/>
-          <p:nvPr>
-            <p:ph type="title"/>
-          </p:nvPr>
-        </p:nvSpPr>
-        <p:spPr>
-          <a:xfrm>
-            <a:off x="311700" y="1152475"/>
-            <a:ext cx="3700000" cy="3500000"/>
-          </a:xfrm>
-          <a:prstGeom prst="rect">
-            <a:avLst/>
-          </a:prstGeom>
-        </p:spPr>
-        <p:txBody>
-          <a:bodyPr anchorCtr="0" anchor="t" bIns="91425" lIns="91425" spcFirstLastPara="1" rIns="91425" wrap="square" tIns="91425">
-            <a:normAutofit fontScale="90000"/>
-          </a:bodyPr>
-          <a:lstStyle/>
-          <a:p>
-            <a:pPr indent="-330200" lvl="0" marL="457200" rtl="0" algn="l">
-              <a:buClr>
-                <a:srgbClr val="DEE2E6"/>
-              </a:buClr>
-              <a:spcBef>
-                <a:spcPts val="0"/>
-              </a:spcBef>
-              <a:spcAft>
-                <a:spcPts val="0"/>
-              </a:spcAft>
-              <a:buSzPts val="1600"/>
-              <a:buChar char="●"/>
-            </a:pPr>
-            <a:r>
-              <a:rPr lang="en" sz="1600">
-                <a:solidFill>
-                  <a:srgbClr val="DEE2E6"/>
-                </a:solidFill>
-              </a:rPr>
-              <a:t>Not in the hit handler</a:t>
-            </a:r>
-            <a:endParaRPr/>
-          </a:p>
-          <a:p>
-            <a:pPr indent="-317500" lvl="1" marL="914400" rtl="0" algn="l">
-              <a:buClr>
-                <a:srgbClr val="6C757D"/>
-              </a:buClr>
-              <a:spcBef>
-                <a:spcPts val="0"/>
-              </a:spcBef>
-              <a:spcAft>
-                <a:spcPts val="0"/>
-              </a:spcAft>
-              <a:buSzPts val="1400"/>
-              <a:buChar char="○"/>
-            </a:pPr>
-            <a:r>
-              <a:rPr lang="en" sz="1400">
-                <a:solidFill>
-                  <a:srgbClr val="6C757D"/>
-                </a:solidFill>
-              </a:rPr>
-              <a:t>More hits may be about the body you destroyed</a:t>
-            </a:r>
-            <a:endParaRPr/>
-          </a:p>
-          <a:p>
-            <a:pPr indent="-317500" lvl="1" marL="914400" rtl="0" algn="l">
-              <a:buClr>
-                <a:srgbClr val="6C757D"/>
-              </a:buClr>
-              <a:spcBef>
-                <a:spcPts val="0"/>
-              </a:spcBef>
-              <a:spcAft>
-                <a:spcPts val="0"/>
-              </a:spcAft>
-              <a:buSzPts val="1400"/>
-              <a:buChar char="○"/>
-            </a:pPr>
-            <a:r>
-              <a:rPr lang="en" sz="1400">
-                <a:solidFill>
-                  <a:srgbClr val="6C757D"/>
-                </a:solidFill>
-              </a:rPr>
-              <a:t>Many libraries crash if the world changes during a callback</a:t>
-            </a:r>
-            <a:endParaRPr/>
-          </a:p>
-          <a:p>
-            <a:pPr indent="-317500" lvl="1" marL="914400" rtl="0" algn="l">
-              <a:buClr>
-                <a:srgbClr val="6C757D"/>
-              </a:buClr>
-              <a:spcBef>
-                <a:spcPts val="0"/>
-              </a:spcBef>
-              <a:spcAft>
-                <a:spcPts val="0"/>
-              </a:spcAft>
-              <a:buSzPts val="1400"/>
-              <a:buChar char="○"/>
-            </a:pPr>
-            <a:r>
-              <a:rPr lang="en" sz="1400">
-                <a:solidFill>
-                  <a:srgbClr val="6C757D"/>
-                </a:solidFill>
-              </a:rPr>
-              <a:t>You may be looping over the list</a:t>
-            </a:r>
-            <a:endParaRPr/>
-          </a:p>
-          <a:p>
-            <a:pPr indent="-330200" lvl="0" marL="457200" rtl="0" algn="l">
-              <a:buClr>
-                <a:srgbClr val="DEE2E6"/>
-              </a:buClr>
-              <a:spcBef>
-                <a:spcPts val="0"/>
-              </a:spcBef>
-              <a:spcAft>
-                <a:spcPts val="0"/>
-              </a:spcAft>
-              <a:buSzPts val="1600"/>
-              <a:buChar char="●"/>
-            </a:pPr>
-            <a:r>
-              <a:rPr lang="en" sz="1600">
-                <a:solidFill>
-                  <a:srgbClr val="DEE2E6"/>
-                </a:solidFill>
-              </a:rPr>
-              <a:t>Mark now, remove at a safe point</a:t>
-            </a:r>
-            <a:endParaRPr/>
-          </a:p>
-          <a:p>
-            <a:pPr indent="-330200" lvl="0" marL="457200" rtl="0" algn="l">
-              <a:buClr>
-                <a:srgbClr val="DEE2E6"/>
-              </a:buClr>
-              <a:spcBef>
-                <a:spcPts val="0"/>
-              </a:spcBef>
-              <a:spcAft>
-                <a:spcPts val="0"/>
-              </a:spcAft>
-              <a:buSzPts val="1600"/>
-              <a:buChar char="●"/>
-            </a:pPr>
-            <a:r>
-              <a:rPr lang="en" sz="1600">
-                <a:solidFill>
-                  <a:srgbClr val="DEE2E6"/>
-                </a:solidFill>
-              </a:rPr>
-              <a:t>Loop backwards when removing</a:t>
-            </a:r>
-            <a:endParaRPr/>
-          </a:p>
-        </p:txBody>
-      </p:sp>
-      <p:sp>
-        <p:nvSpPr>
-          <p:cNvPr id="141" name="Google Shape;141;p23"/>
-          <p:cNvSpPr txBox="1"/>
-          <p:nvPr>
-            <p:ph idx="2" type="body"/>
-          </p:nvPr>
-        </p:nvSpPr>
-        <p:spPr>
-          <a:xfrm>
-            <a:off x="4150000" y="1152475"/>
-            <a:ext cx="4750000" cy="3600000"/>
-          </a:xfrm>
-          <a:prstGeom prst="rect">
-            <a:avLst/>
-          </a:prstGeom>
-        </p:spPr>
-        <p:txBody>
-          <a:bodyPr anchorCtr="0" anchor="t" bIns="91425" lIns="91425" spcFirstLastPara="1" rIns="91425" wrap="square" tIns="91425">
-            <a:noAutofit/>
-          </a:bodyPr>
-          <a:lstStyle/>
-          <a:p>
-            <a:pPr indent="0" lvl="0" marL="0" rtl="0" algn="l">
-              <a:lnSpc>
-                <a:spcPct val="115000"/>
-              </a:lnSpc>
-              <a:spcBef>
-                <a:spcPts val="0"/>
-              </a:spcBef>
-              <a:spcAft>
-                <a:spcPts val="0"/>
-              </a:spcAft>
-              <a:buNone/>
-            </a:pPr>
-            <a:r>
-              <a:rPr lang="en" sz="1000">
-                <a:highlight>
-                  <a:schemeClr val="dk2"/>
-                </a:highlight>
-                <a:latin typeface="Consolas"/>
-                <a:ea typeface="Consolas"/>
-                <a:cs typeface="Consolas"/>
-                <a:sym typeface="Consolas"/>
-              </a:rPr>
-              <a:t>void OnHit(PhysicsBody a, PhysicsBody b,</a:t>
-            </a:r>
-            <a:endParaRPr sz="1000">
-              <a:solidFill>
-                <a:srgbClr val="CCCCCC"/>
-              </a:solidFill>
-              <a:highlight>
-                <a:schemeClr val="dk2"/>
-              </a:highlight>
-              <a:latin typeface="Consolas"/>
-              <a:ea typeface="Consolas"/>
-              <a:cs typeface="Consolas"/>
-              <a:sym typeface="Consolas"/>
-            </a:endParaRPr>
-          </a:p>
-          <a:p>
-            <a:pPr indent="0" lvl="0" marL="0" rtl="0" algn="l">
-              <a:lnSpc>
-                <a:spcPct val="115000"/>
-              </a:lnSpc>
-              <a:spcBef>
-                <a:spcPts val="0"/>
-              </a:spcBef>
-              <a:spcAft>
-                <a:spcPts val="0"/>
-              </a:spcAft>
-              <a:buNone/>
-            </a:pPr>
-            <a:r>
-              <a:rPr lang="en" sz="1000">
-                <a:highlight>
-                  <a:schemeClr val="dk2"/>
-                </a:highlight>
-                <a:latin typeface="Consolas"/>
-                <a:ea typeface="Consolas"/>
-                <a:cs typeface="Consolas"/>
-                <a:sym typeface="Consolas"/>
-              </a:rPr>
-              <a:t>    float speed)</a:t>
-            </a:r>
-            <a:endParaRPr sz="1000">
-              <a:solidFill>
-                <a:srgbClr val="CCCCCC"/>
-              </a:solidFill>
-              <a:highlight>
-                <a:schemeClr val="dk2"/>
-              </a:highlight>
-              <a:latin typeface="Consolas"/>
-              <a:ea typeface="Consolas"/>
-              <a:cs typeface="Consolas"/>
-              <a:sym typeface="Consolas"/>
-            </a:endParaRPr>
-          </a:p>
-          <a:p>
-            <a:pPr indent="0" lvl="0" marL="0" rtl="0" algn="l">
-              <a:lnSpc>
-                <a:spcPct val="115000"/>
-              </a:lnSpc>
-              <a:spcBef>
-                <a:spcPts val="0"/>
-              </a:spcBef>
-              <a:spcAft>
-                <a:spcPts val="0"/>
-              </a:spcAft>
-              <a:buNone/>
-            </a:pPr>
-            <a:r>
-              <a:rPr lang="en" sz="1000">
-                <a:highlight>
-                  <a:schemeClr val="dk2"/>
-                </a:highlight>
-                <a:latin typeface="Consolas"/>
-                <a:ea typeface="Consolas"/>
-                <a:cs typeface="Consolas"/>
-                <a:sym typeface="Consolas"/>
-              </a:rPr>
-              <a:t>{</a:t>
-            </a:r>
-            <a:endParaRPr sz="1000">
-              <a:solidFill>
-                <a:srgbClr val="CCCCCC"/>
-              </a:solidFill>
-              <a:highlight>
-                <a:schemeClr val="dk2"/>
-              </a:highlight>
-              <a:latin typeface="Consolas"/>
-              <a:ea typeface="Consolas"/>
-              <a:cs typeface="Consolas"/>
-              <a:sym typeface="Consolas"/>
-            </a:endParaRPr>
-          </a:p>
-          <a:p>
-            <a:pPr indent="0" lvl="0" marL="0" rtl="0" algn="l">
-              <a:lnSpc>
-                <a:spcPct val="115000"/>
-              </a:lnSpc>
-              <a:spcBef>
-                <a:spcPts val="0"/>
-              </a:spcBef>
-              <a:spcAft>
-                <a:spcPts val="0"/>
-              </a:spcAft>
-              <a:buNone/>
-            </a:pPr>
-            <a:r>
-              <a:rPr lang="en" sz="1000">
-                <a:highlight>
-                  <a:schemeClr val="dk2"/>
-                </a:highlight>
-                <a:latin typeface="Consolas"/>
-                <a:ea typeface="Consolas"/>
-                <a:cs typeface="Consolas"/>
-                <a:sym typeface="Consolas"/>
-              </a:rPr>
-              <a:t>    (a.Owner as Entity)?.TakeDamage(speed / 100);</a:t>
-            </a:r>
-            <a:endParaRPr sz="1000">
-              <a:solidFill>
-                <a:srgbClr val="CCCCCC"/>
-              </a:solidFill>
-              <a:highlight>
-                <a:schemeClr val="dk2"/>
-              </a:highlight>
-              <a:latin typeface="Consolas"/>
-              <a:ea typeface="Consolas"/>
-              <a:cs typeface="Consolas"/>
-              <a:sym typeface="Consolas"/>
-            </a:endParaRPr>
-          </a:p>
-          <a:p>
-            <a:pPr indent="0" lvl="0" marL="0" rtl="0" algn="l">
-              <a:lnSpc>
-                <a:spcPct val="115000"/>
-              </a:lnSpc>
-              <a:spcBef>
-                <a:spcPts val="0"/>
-              </a:spcBef>
-              <a:spcAft>
-                <a:spcPts val="0"/>
-              </a:spcAft>
-              <a:buNone/>
-            </a:pPr>
-            <a:r>
-              <a:rPr lang="en" sz="1000">
-                <a:highlight>
-                  <a:schemeClr val="dk2"/>
-                </a:highlight>
-                <a:latin typeface="Consolas"/>
-                <a:ea typeface="Consolas"/>
-                <a:cs typeface="Consolas"/>
-                <a:sym typeface="Consolas"/>
-              </a:rPr>
-              <a:t>    (b.Owner as Entity)?.TakeDamage(speed / 100);</a:t>
-            </a:r>
-            <a:endParaRPr sz="1000">
-              <a:solidFill>
-                <a:srgbClr val="CCCCCC"/>
-              </a:solidFill>
-              <a:highlight>
-                <a:schemeClr val="dk2"/>
-              </a:highlight>
-              <a:latin typeface="Consolas"/>
-              <a:ea typeface="Consolas"/>
-              <a:cs typeface="Consolas"/>
-              <a:sym typeface="Consolas"/>
-            </a:endParaRPr>
-          </a:p>
-          <a:p>
-            <a:pPr indent="0" lvl="0" marL="0" rtl="0" algn="l">
-              <a:lnSpc>
-                <a:spcPct val="115000"/>
-              </a:lnSpc>
-              <a:spcBef>
-                <a:spcPts val="0"/>
-              </a:spcBef>
-              <a:spcAft>
-                <a:spcPts val="0"/>
-              </a:spcAft>
-              <a:buNone/>
-            </a:pPr>
-            <a:r>
-              <a:rPr lang="en" sz="1000">
-                <a:highlight>
-                  <a:schemeClr val="dk2"/>
-                </a:highlight>
-                <a:latin typeface="Consolas"/>
-                <a:ea typeface="Consolas"/>
-                <a:cs typeface="Consolas"/>
-                <a:sym typeface="Consolas"/>
-              </a:rPr>
-              <a:t>}</a:t>
-            </a:r>
-            <a:endParaRPr sz="1000">
-              <a:solidFill>
-                <a:srgbClr val="CCCCCC"/>
-              </a:solidFill>
-              <a:highlight>
-                <a:schemeClr val="dk2"/>
-              </a:highlight>
-              <a:latin typeface="Consolas"/>
-              <a:ea typeface="Consolas"/>
-              <a:cs typeface="Consolas"/>
-              <a:sym typeface="Consolas"/>
-            </a:endParaRPr>
-          </a:p>
-          <a:p>
-            <a:pPr indent="0" lvl="0" marL="0" rtl="0" algn="l">
-              <a:lnSpc>
-                <a:spcPct val="115000"/>
-              </a:lnSpc>
-              <a:spcBef>
-                <a:spcPts val="0"/>
-              </a:spcBef>
-              <a:spcAft>
-                <a:spcPts val="0"/>
-              </a:spcAft>
-              <a:buNone/>
-            </a:pPr>
-            <a:r>
-              <a:rPr lang="en" sz="1000">
-                <a:highlight>
-                  <a:schemeClr val="dk2"/>
-                </a:highlight>
-                <a:latin typeface="Consolas"/>
-                <a:ea typeface="Consolas"/>
-                <a:cs typeface="Consolas"/>
-                <a:sym typeface="Consolas"/>
-              </a:rPr>
-              <a:t/>
-            </a:r>
-            <a:endParaRPr sz="1000">
-              <a:solidFill>
-                <a:srgbClr val="CCCCCC"/>
-              </a:solidFill>
-              <a:highlight>
-                <a:schemeClr val="dk2"/>
-              </a:highlight>
-              <a:latin typeface="Consolas"/>
-              <a:ea typeface="Consolas"/>
-              <a:cs typeface="Consolas"/>
-              <a:sym typeface="Consolas"/>
-            </a:endParaRPr>
-          </a:p>
-          <a:p>
-            <a:pPr indent="0" lvl="0" marL="0" rtl="0" algn="l">
-              <a:lnSpc>
-                <a:spcPct val="115000"/>
-              </a:lnSpc>
-              <a:spcBef>
-                <a:spcPts val="0"/>
-              </a:spcBef>
-              <a:spcAft>
-                <a:spcPts val="0"/>
-              </a:spcAft>
-              <a:buNone/>
-            </a:pPr>
-            <a:r>
-              <a:rPr lang="en" sz="1000">
-                <a:highlight>
-                  <a:schemeClr val="dk2"/>
-                </a:highlight>
-                <a:latin typeface="Consolas"/>
-                <a:ea typeface="Consolas"/>
-                <a:cs typeface="Consolas"/>
-                <a:sym typeface="Consolas"/>
-              </a:rPr>
-              <a:t>_physics.Update(deltaSeconds);</a:t>
-            </a:r>
-            <a:endParaRPr sz="1000">
-              <a:solidFill>
-                <a:srgbClr val="CCCCCC"/>
-              </a:solidFill>
-              <a:highlight>
-                <a:schemeClr val="dk2"/>
-              </a:highlight>
-              <a:latin typeface="Consolas"/>
-              <a:ea typeface="Consolas"/>
-              <a:cs typeface="Consolas"/>
-              <a:sym typeface="Consolas"/>
-            </a:endParaRPr>
-          </a:p>
-          <a:p>
-            <a:pPr indent="0" lvl="0" marL="0" rtl="0" algn="l">
-              <a:lnSpc>
-                <a:spcPct val="115000"/>
-              </a:lnSpc>
-              <a:spcBef>
-                <a:spcPts val="0"/>
-              </a:spcBef>
-              <a:spcAft>
-                <a:spcPts val="0"/>
-              </a:spcAft>
-              <a:buNone/>
-            </a:pPr>
-            <a:r>
-              <a:rPr lang="en" sz="1000">
-                <a:highlight>
-                  <a:schemeClr val="dk2"/>
-                </a:highlight>
-                <a:latin typeface="Consolas"/>
-                <a:ea typeface="Consolas"/>
-                <a:cs typeface="Consolas"/>
-                <a:sym typeface="Consolas"/>
-              </a:rPr>
-              <a:t>RemoveDestroyed();</a:t>
-            </a:r>
-            <a:endParaRPr sz="1000">
-              <a:solidFill>
-                <a:srgbClr val="CCCCCC"/>
-              </a:solidFill>
-              <a:highlight>
-                <a:schemeClr val="dk2"/>
-              </a:highlight>
-              <a:latin typeface="Consolas"/>
-              <a:ea typeface="Consolas"/>
-              <a:cs typeface="Consolas"/>
-              <a:sym typeface="Consolas"/>
-            </a:endParaRPr>
-          </a:p>
-          <a:p>
-            <a:pPr indent="0" lvl="0" marL="0" rtl="0" algn="l">
-              <a:lnSpc>
-                <a:spcPct val="115000"/>
-              </a:lnSpc>
-              <a:spcBef>
-                <a:spcPts val="0"/>
-              </a:spcBef>
-              <a:spcAft>
-                <a:spcPts val="0"/>
-              </a:spcAft>
-              <a:buNone/>
-            </a:pPr>
-            <a:r>
-              <a:rPr lang="en" sz="1000">
-                <a:highlight>
-                  <a:schemeClr val="dk2"/>
-                </a:highlight>
-                <a:latin typeface="Consolas"/>
-                <a:ea typeface="Consolas"/>
-                <a:cs typeface="Consolas"/>
-                <a:sym typeface="Consolas"/>
-              </a:rPr>
-              <a:t/>
-            </a:r>
-            <a:endParaRPr sz="1000">
-              <a:solidFill>
-                <a:srgbClr val="CCCCCC"/>
-              </a:solidFill>
-              <a:highlight>
-                <a:schemeClr val="dk2"/>
-              </a:highlight>
-              <a:latin typeface="Consolas"/>
-              <a:ea typeface="Consolas"/>
-              <a:cs typeface="Consolas"/>
-              <a:sym typeface="Consolas"/>
-            </a:endParaRPr>
-          </a:p>
-          <a:p>
-            <a:pPr indent="0" lvl="0" marL="0" rtl="0" algn="l">
-              <a:lnSpc>
-                <a:spcPct val="115000"/>
-              </a:lnSpc>
-              <a:spcBef>
-                <a:spcPts val="0"/>
-              </a:spcBef>
-              <a:spcAft>
-                <a:spcPts val="0"/>
-              </a:spcAft>
-              <a:buNone/>
-            </a:pPr>
-            <a:r>
-              <a:rPr lang="en" sz="1000">
-                <a:highlight>
-                  <a:schemeClr val="dk2"/>
-                </a:highlight>
-                <a:latin typeface="Consolas"/>
-                <a:ea typeface="Consolas"/>
-                <a:cs typeface="Consolas"/>
-                <a:sym typeface="Consolas"/>
-              </a:rPr>
-              <a:t>for (int i = _entities.Count - 1; i &gt;= 0; i--)</a:t>
-            </a:r>
-            <a:endParaRPr sz="1000">
-              <a:solidFill>
-                <a:srgbClr val="CCCCCC"/>
-              </a:solidFill>
-              <a:highlight>
-                <a:schemeClr val="dk2"/>
-              </a:highlight>
-              <a:latin typeface="Consolas"/>
-              <a:ea typeface="Consolas"/>
-              <a:cs typeface="Consolas"/>
-              <a:sym typeface="Consolas"/>
-            </a:endParaRPr>
-          </a:p>
-          <a:p>
-            <a:pPr indent="0" lvl="0" marL="0" rtl="0" algn="l">
-              <a:lnSpc>
-                <a:spcPct val="115000"/>
-              </a:lnSpc>
-              <a:spcBef>
-                <a:spcPts val="0"/>
-              </a:spcBef>
-              <a:spcAft>
-                <a:spcPts val="0"/>
-              </a:spcAft>
-              <a:buNone/>
-            </a:pPr>
-            <a:r>
-              <a:rPr lang="en" sz="1000">
-                <a:highlight>
-                  <a:schemeClr val="dk2"/>
-                </a:highlight>
-                <a:latin typeface="Consolas"/>
-                <a:ea typeface="Consolas"/>
-                <a:cs typeface="Consolas"/>
-                <a:sym typeface="Consolas"/>
-              </a:rPr>
-              <a:t>{</a:t>
-            </a:r>
-            <a:endParaRPr sz="1000">
-              <a:solidFill>
-                <a:srgbClr val="CCCCCC"/>
-              </a:solidFill>
-              <a:highlight>
-                <a:schemeClr val="dk2"/>
-              </a:highlight>
-              <a:latin typeface="Consolas"/>
-              <a:ea typeface="Consolas"/>
-              <a:cs typeface="Consolas"/>
-              <a:sym typeface="Consolas"/>
-            </a:endParaRPr>
-          </a:p>
-          <a:p>
-            <a:pPr indent="0" lvl="0" marL="0" rtl="0" algn="l">
-              <a:lnSpc>
-                <a:spcPct val="115000"/>
-              </a:lnSpc>
-              <a:spcBef>
-                <a:spcPts val="0"/>
-              </a:spcBef>
-              <a:spcAft>
-                <a:spcPts val="0"/>
-              </a:spcAft>
-              <a:buNone/>
-            </a:pPr>
-            <a:r>
-              <a:rPr lang="en" sz="1000">
-                <a:highlight>
-                  <a:schemeClr val="dk2"/>
-                </a:highlight>
-                <a:latin typeface="Consolas"/>
-                <a:ea typeface="Consolas"/>
-                <a:cs typeface="Consolas"/>
-                <a:sym typeface="Consolas"/>
-              </a:rPr>
-              <a:t>    if (!_entities[i].IsDestroyed) continue;</a:t>
-            </a:r>
-            <a:endParaRPr sz="1000">
-              <a:solidFill>
-                <a:srgbClr val="CCCCCC"/>
-              </a:solidFill>
-              <a:highlight>
-                <a:schemeClr val="dk2"/>
-              </a:highlight>
-              <a:latin typeface="Consolas"/>
-              <a:ea typeface="Consolas"/>
-              <a:cs typeface="Consolas"/>
-              <a:sym typeface="Consolas"/>
-            </a:endParaRPr>
-          </a:p>
-          <a:p>
-            <a:pPr indent="0" lvl="0" marL="0" rtl="0" algn="l">
-              <a:lnSpc>
-                <a:spcPct val="115000"/>
-              </a:lnSpc>
-              <a:spcBef>
-                <a:spcPts val="0"/>
-              </a:spcBef>
-              <a:spcAft>
-                <a:spcPts val="0"/>
-              </a:spcAft>
-              <a:buNone/>
-            </a:pPr>
-            <a:r>
-              <a:rPr lang="en" sz="1000">
-                <a:highlight>
-                  <a:schemeClr val="dk2"/>
-                </a:highlight>
-                <a:latin typeface="Consolas"/>
-                <a:ea typeface="Consolas"/>
-                <a:cs typeface="Consolas"/>
-                <a:sym typeface="Consolas"/>
-              </a:rPr>
-              <a:t>    _physics.Destroy(_entities[i].Body);</a:t>
-            </a:r>
-            <a:endParaRPr sz="1000">
-              <a:solidFill>
-                <a:srgbClr val="CCCCCC"/>
-              </a:solidFill>
-              <a:highlight>
-                <a:schemeClr val="dk2"/>
-              </a:highlight>
-              <a:latin typeface="Consolas"/>
-              <a:ea typeface="Consolas"/>
-              <a:cs typeface="Consolas"/>
-              <a:sym typeface="Consolas"/>
-            </a:endParaRPr>
-          </a:p>
-          <a:p>
-            <a:pPr indent="0" lvl="0" marL="0" rtl="0" algn="l">
-              <a:lnSpc>
-                <a:spcPct val="115000"/>
-              </a:lnSpc>
-              <a:spcBef>
-                <a:spcPts val="0"/>
-              </a:spcBef>
-              <a:spcAft>
-                <a:spcPts val="0"/>
-              </a:spcAft>
-              <a:buNone/>
-            </a:pPr>
-            <a:r>
-              <a:rPr lang="en" sz="1000">
-                <a:highlight>
-                  <a:schemeClr val="dk2"/>
-                </a:highlight>
-                <a:latin typeface="Consolas"/>
-                <a:ea typeface="Consolas"/>
-                <a:cs typeface="Consolas"/>
-                <a:sym typeface="Consolas"/>
-              </a:rPr>
-              <a:t>    _entities.RemoveAt(i);</a:t>
-            </a:r>
-            <a:endParaRPr sz="1000">
-              <a:solidFill>
-                <a:srgbClr val="CCCCCC"/>
-              </a:solidFill>
-              <a:highlight>
-                <a:schemeClr val="dk2"/>
-              </a:highlight>
-              <a:latin typeface="Consolas"/>
-              <a:ea typeface="Consolas"/>
-              <a:cs typeface="Consolas"/>
-              <a:sym typeface="Consolas"/>
-            </a:endParaRPr>
-          </a:p>
-          <a:p>
-            <a:pPr indent="0" lvl="0" marL="0" rtl="0" algn="l">
-              <a:lnSpc>
-                <a:spcPct val="115000"/>
-              </a:lnSpc>
-              <a:spcBef>
-                <a:spcPts val="0"/>
-              </a:spcBef>
-              <a:spcAft>
-                <a:spcPts val="0"/>
-              </a:spcAft>
-              <a:buNone/>
-            </a:pPr>
-            <a:r>
-              <a:rPr lang="en" sz="1000">
-                <a:highlight>
-                  <a:schemeClr val="dk2"/>
-                </a:highlight>
-                <a:latin typeface="Consolas"/>
-                <a:ea typeface="Consolas"/>
-                <a:cs typeface="Consolas"/>
-                <a:sym typeface="Consolas"/>
-              </a:rPr>
-              <a:t>}</a:t>
-            </a:r>
-            <a:endParaRPr sz="1000">
-              <a:solidFill>
-                <a:srgbClr val="CCCCCC"/>
-              </a:solidFill>
-              <a:highlight>
-                <a:schemeClr val="dk2"/>
-              </a:highlight>
-              <a:latin typeface="Consolas"/>
-              <a:ea typeface="Consolas"/>
-              <a:cs typeface="Consolas"/>
-              <a:sym typeface="Consolas"/>
-            </a:endParaRPr>
-          </a:p>
-        </p:txBody>
-      </p:sp>
-    </p:spTree>
-  </p:cSld>
-  <p:clrMapOvr>
-    <a:masterClrMapping/>
-  </p:clrMapOvr>
-</p:sld>
-</file>
-
-<file path=ppt/slides/slide19.xml><?xml version="1.0" encoding="utf-8"?>
-<p:sld xmlns:a="http://schemas.openxmlformats.org/drawingml/2006/main" xmlns:p="http://schemas.openxmlformats.org/presentationml/2006/main" xmlns:r="http://schemas.openxmlformats.org/officeDocument/2006/relationships">
-  <p:cSld>
-    <p:spTree>
-      <p:nvGrpSpPr>
-        <p:cNvPr id="1" name=""/>
-        <p:cNvGrpSpPr/>
-        <p:nvPr/>
-      </p:nvGrpSpPr>
-      <p:grpSpPr/>
-      <p:sp>
-        <p:nvSpPr>
-          <p:cNvPr id="128" name="Google Shape;128;p21"/>
-          <p:cNvSpPr txBox="1"/>
-          <p:nvPr>
-            <p:ph type="title"/>
-          </p:nvPr>
-        </p:nvSpPr>
-        <p:spPr>
-          <a:xfrm>
-            <a:off x="311700" y="195615"/>
-            <a:ext cx="8520600" cy="572700"/>
-          </a:xfrm>
-          <a:prstGeom prst="rect">
-            <a:avLst/>
-          </a:prstGeom>
-        </p:spPr>
-        <p:txBody>
-          <a:bodyPr anchorCtr="0" anchor="t" bIns="91425" lIns="91425" spcFirstLastPara="1" rIns="91425" wrap="square" tIns="91425">
-            <a:normAutofit fontScale="90000"/>
-          </a:bodyPr>
-          <a:lstStyle/>
-          <a:p>
-            <a:pPr indent="0" lvl="0" marL="0" rtl="0" algn="l">
-              <a:spcBef>
-                <a:spcPts val="0"/>
-              </a:spcBef>
-              <a:spcAft>
-                <a:spcPts val="0"/>
-              </a:spcAft>
-              <a:buNone/>
-            </a:pPr>
-            <a:r>
-              <a:rPr lang="en">
-                <a:solidFill>
-                  <a:schemeClr val="accent5"/>
-                </a:solidFill>
-              </a:rPr>
-              <a:t>Events Implementation</a:t>
-            </a:r>
-            <a:endParaRPr>
-              <a:solidFill>
-                <a:schemeClr val="accent5"/>
-              </a:solidFill>
-            </a:endParaRPr>
-          </a:p>
-        </p:txBody>
-      </p:sp>
-      <p:sp>
-        <p:nvSpPr>
-          <p:cNvPr id="129" name="Google Shape;129;p21"/>
-          <p:cNvSpPr txBox="1"/>
-          <p:nvPr>
-            <p:ph idx="1" type="body"/>
-          </p:nvPr>
-        </p:nvSpPr>
-        <p:spPr>
-          <a:xfrm>
-            <a:off x="311700" y="885950"/>
-            <a:ext cx="8520600" cy="4023300"/>
-          </a:xfrm>
-          <a:prstGeom prst="rect">
-            <a:avLst/>
-          </a:prstGeom>
-        </p:spPr>
-        <p:txBody>
-          <a:bodyPr anchorCtr="0" anchor="ctr" bIns="91425" lIns="91425" spcFirstLastPara="1" rIns="91425" wrap="square" tIns="91425">
-            <a:normAutofit/>
-          </a:bodyPr>
-          <a:lstStyle/>
-          <a:p>
-            <a:pPr indent="0" lvl="0" marL="0" rtl="0" algn="ctr">
-              <a:spcBef>
-                <a:spcPts val="0"/>
-              </a:spcBef>
-              <a:spcAft>
-                <a:spcPts val="1200"/>
-              </a:spcAft>
-              <a:buNone/>
-            </a:pPr>
-            <a:r>
-              <a:rPr lang="en" sz="2900">
-                <a:latin typeface="VT323"/>
-                <a:ea typeface="VT323"/>
-                <a:cs typeface="VT323"/>
-                <a:sym typeface="VT323"/>
-              </a:rPr>
-              <a:t>DEMO!</a:t>
-            </a:r>
-            <a:endParaRPr/>
-          </a:p>
-          <a:p>
-            <a:pPr indent="0" lvl="0" marL="0" rtl="0" algn="ctr">
-              <a:spcBef>
-                <a:spcPts val="0"/>
-              </a:spcBef>
-              <a:spcAft>
-                <a:spcPts val="0"/>
-              </a:spcAft>
-              <a:buNone/>
-            </a:pPr>
-            <a:r>
-              <a:rPr lang="en" sz="1800"/>
-              <a:t>Birds2: hits that damage, removed after the step</a:t>
-            </a:r>
-            <a:endParaRPr sz="1800"/>
           </a:p>
         </p:txBody>
       </p:sp>
@@ -11312,6 +11030,991 @@
       <p:grpSpPr/>
       <p:sp>
         <p:nvSpPr>
+          <p:cNvPr id="140" name="Google Shape;140;p23"/>
+          <p:cNvSpPr txBox="1"/>
+          <p:nvPr>
+            <p:ph type="title"/>
+          </p:nvPr>
+        </p:nvSpPr>
+        <p:spPr>
+          <a:xfrm>
+            <a:off x="311700" y="195615"/>
+            <a:ext cx="8520600" cy="572700"/>
+          </a:xfrm>
+          <a:prstGeom prst="rect">
+            <a:avLst/>
+          </a:prstGeom>
+        </p:spPr>
+        <p:txBody>
+          <a:bodyPr anchorCtr="0" anchor="t" bIns="91425" lIns="91425" spcFirstLastPara="1" rIns="91425" wrap="square" tIns="91425">
+            <a:normAutofit fontScale="90000"/>
+          </a:bodyPr>
+          <a:lstStyle/>
+          <a:p>
+            <a:pPr indent="0" lvl="0" marL="0" rtl="0" algn="l">
+              <a:spcBef>
+                <a:spcPts val="0"/>
+              </a:spcBef>
+              <a:spcAft>
+                <a:spcPts val="0"/>
+              </a:spcAft>
+              <a:buNone/>
+            </a:pPr>
+            <a:r>
+              <a:rPr lang="en"/>
+              <a:t>Destroying Safely</a:t>
+            </a:r>
+            <a:endParaRPr/>
+          </a:p>
+        </p:txBody>
+      </p:sp>
+      <p:sp>
+        <p:nvSpPr>
+          <p:cNvPr id="293" name="Google Shape;293;p45"/>
+          <p:cNvSpPr txBox="1"/>
+          <p:nvPr>
+            <p:ph type="title"/>
+          </p:nvPr>
+        </p:nvSpPr>
+        <p:spPr>
+          <a:xfrm>
+            <a:off x="311700" y="1152475"/>
+            <a:ext cx="3700000" cy="3500000"/>
+          </a:xfrm>
+          <a:prstGeom prst="rect">
+            <a:avLst/>
+          </a:prstGeom>
+        </p:spPr>
+        <p:txBody>
+          <a:bodyPr anchorCtr="0" anchor="t" bIns="91425" lIns="91425" spcFirstLastPara="1" rIns="91425" wrap="square" tIns="91425">
+            <a:normAutofit fontScale="90000"/>
+          </a:bodyPr>
+          <a:lstStyle/>
+          <a:p>
+            <a:pPr indent="-330200" lvl="0" marL="457200" rtl="0" algn="l">
+              <a:buClr>
+                <a:srgbClr val="DEE2E6"/>
+              </a:buClr>
+              <a:spcBef>
+                <a:spcPts val="0"/>
+              </a:spcBef>
+              <a:spcAft>
+                <a:spcPts val="0"/>
+              </a:spcAft>
+              <a:buSzPts val="1600"/>
+              <a:buChar char="●"/>
+            </a:pPr>
+            <a:r>
+              <a:rPr lang="en" sz="1600">
+                <a:solidFill>
+                  <a:srgbClr val="DEE2E6"/>
+                </a:solidFill>
+              </a:rPr>
+              <a:t>Not in the hit handler</a:t>
+            </a:r>
+            <a:endParaRPr/>
+          </a:p>
+          <a:p>
+            <a:pPr indent="-317500" lvl="1" marL="914400" rtl="0" algn="l">
+              <a:buClr>
+                <a:srgbClr val="6C757D"/>
+              </a:buClr>
+              <a:spcBef>
+                <a:spcPts val="0"/>
+              </a:spcBef>
+              <a:spcAft>
+                <a:spcPts val="0"/>
+              </a:spcAft>
+              <a:buSzPts val="1400"/>
+              <a:buChar char="○"/>
+            </a:pPr>
+            <a:r>
+              <a:rPr lang="en" sz="1400">
+                <a:solidFill>
+                  <a:srgbClr val="6C757D"/>
+                </a:solidFill>
+              </a:rPr>
+              <a:t>More hits may be about the body you destroyed</a:t>
+            </a:r>
+            <a:endParaRPr/>
+          </a:p>
+          <a:p>
+            <a:pPr indent="-317500" lvl="1" marL="914400" rtl="0" algn="l">
+              <a:buClr>
+                <a:srgbClr val="6C757D"/>
+              </a:buClr>
+              <a:spcBef>
+                <a:spcPts val="0"/>
+              </a:spcBef>
+              <a:spcAft>
+                <a:spcPts val="0"/>
+              </a:spcAft>
+              <a:buSzPts val="1400"/>
+              <a:buChar char="○"/>
+            </a:pPr>
+            <a:r>
+              <a:rPr lang="en" sz="1400">
+                <a:solidFill>
+                  <a:srgbClr val="6C757D"/>
+                </a:solidFill>
+              </a:rPr>
+              <a:t>Many libraries crash if the world changes during a callback</a:t>
+            </a:r>
+            <a:endParaRPr/>
+          </a:p>
+          <a:p>
+            <a:pPr indent="-317500" lvl="1" marL="914400" rtl="0" algn="l">
+              <a:buClr>
+                <a:srgbClr val="6C757D"/>
+              </a:buClr>
+              <a:spcBef>
+                <a:spcPts val="0"/>
+              </a:spcBef>
+              <a:spcAft>
+                <a:spcPts val="0"/>
+              </a:spcAft>
+              <a:buSzPts val="1400"/>
+              <a:buChar char="○"/>
+            </a:pPr>
+            <a:r>
+              <a:rPr lang="en" sz="1400">
+                <a:solidFill>
+                  <a:srgbClr val="6C757D"/>
+                </a:solidFill>
+              </a:rPr>
+              <a:t>You may be looping over the list</a:t>
+            </a:r>
+            <a:endParaRPr/>
+          </a:p>
+          <a:p>
+            <a:pPr indent="-330200" lvl="0" marL="457200" rtl="0" algn="l">
+              <a:buClr>
+                <a:srgbClr val="DEE2E6"/>
+              </a:buClr>
+              <a:spcBef>
+                <a:spcPts val="0"/>
+              </a:spcBef>
+              <a:spcAft>
+                <a:spcPts val="0"/>
+              </a:spcAft>
+              <a:buSzPts val="1600"/>
+              <a:buChar char="●"/>
+            </a:pPr>
+            <a:r>
+              <a:rPr lang="en" sz="1600">
+                <a:solidFill>
+                  <a:srgbClr val="DEE2E6"/>
+                </a:solidFill>
+              </a:rPr>
+              <a:t>Mark now, remove at a safe point</a:t>
+            </a:r>
+            <a:endParaRPr/>
+          </a:p>
+          <a:p>
+            <a:pPr indent="-330200" lvl="0" marL="457200" rtl="0" algn="l">
+              <a:buClr>
+                <a:srgbClr val="DEE2E6"/>
+              </a:buClr>
+              <a:spcBef>
+                <a:spcPts val="0"/>
+              </a:spcBef>
+              <a:spcAft>
+                <a:spcPts val="0"/>
+              </a:spcAft>
+              <a:buSzPts val="1600"/>
+              <a:buChar char="●"/>
+            </a:pPr>
+            <a:r>
+              <a:rPr lang="en" sz="1600">
+                <a:solidFill>
+                  <a:srgbClr val="DEE2E6"/>
+                </a:solidFill>
+              </a:rPr>
+              <a:t>Loop backwards when removing</a:t>
+            </a:r>
+            <a:endParaRPr/>
+          </a:p>
+        </p:txBody>
+      </p:sp>
+      <p:sp>
+        <p:nvSpPr>
+          <p:cNvPr id="141" name="Google Shape;141;p23"/>
+          <p:cNvSpPr txBox="1"/>
+          <p:nvPr>
+            <p:ph idx="2" type="body"/>
+          </p:nvPr>
+        </p:nvSpPr>
+        <p:spPr>
+          <a:xfrm>
+            <a:off x="4150000" y="1152475"/>
+            <a:ext cx="4750000" cy="3600000"/>
+          </a:xfrm>
+          <a:prstGeom prst="rect">
+            <a:avLst/>
+          </a:prstGeom>
+        </p:spPr>
+        <p:txBody>
+          <a:bodyPr anchorCtr="0" anchor="t" bIns="91425" lIns="91425" spcFirstLastPara="1" rIns="91425" wrap="square" tIns="91425">
+            <a:noAutofit/>
+          </a:bodyPr>
+          <a:lstStyle/>
+          <a:p>
+            <a:pPr indent="0" lvl="0" marL="0" rtl="0" algn="l">
+              <a:lnSpc>
+                <a:spcPct val="115000"/>
+              </a:lnSpc>
+              <a:spcBef>
+                <a:spcPts val="0"/>
+              </a:spcBef>
+              <a:spcAft>
+                <a:spcPts val="0"/>
+              </a:spcAft>
+              <a:buNone/>
+            </a:pPr>
+            <a:r>
+              <a:rPr lang="en" sz="1000">
+                <a:highlight>
+                  <a:schemeClr val="dk2"/>
+                </a:highlight>
+                <a:latin typeface="Consolas"/>
+                <a:ea typeface="Consolas"/>
+                <a:cs typeface="Consolas"/>
+                <a:sym typeface="Consolas"/>
+              </a:rPr>
+              <a:t>void OnHit(PhysicsBody a, PhysicsBody b,</a:t>
+            </a:r>
+            <a:endParaRPr sz="1000">
+              <a:solidFill>
+                <a:srgbClr val="CCCCCC"/>
+              </a:solidFill>
+              <a:highlight>
+                <a:schemeClr val="dk2"/>
+              </a:highlight>
+              <a:latin typeface="Consolas"/>
+              <a:ea typeface="Consolas"/>
+              <a:cs typeface="Consolas"/>
+              <a:sym typeface="Consolas"/>
+            </a:endParaRPr>
+          </a:p>
+          <a:p>
+            <a:pPr indent="0" lvl="0" marL="0" rtl="0" algn="l">
+              <a:lnSpc>
+                <a:spcPct val="115000"/>
+              </a:lnSpc>
+              <a:spcBef>
+                <a:spcPts val="0"/>
+              </a:spcBef>
+              <a:spcAft>
+                <a:spcPts val="0"/>
+              </a:spcAft>
+              <a:buNone/>
+            </a:pPr>
+            <a:r>
+              <a:rPr lang="en" sz="1000">
+                <a:highlight>
+                  <a:schemeClr val="dk2"/>
+                </a:highlight>
+                <a:latin typeface="Consolas"/>
+                <a:ea typeface="Consolas"/>
+                <a:cs typeface="Consolas"/>
+                <a:sym typeface="Consolas"/>
+              </a:rPr>
+              <a:t>    float speed)</a:t>
+            </a:r>
+            <a:endParaRPr sz="1000">
+              <a:solidFill>
+                <a:srgbClr val="CCCCCC"/>
+              </a:solidFill>
+              <a:highlight>
+                <a:schemeClr val="dk2"/>
+              </a:highlight>
+              <a:latin typeface="Consolas"/>
+              <a:ea typeface="Consolas"/>
+              <a:cs typeface="Consolas"/>
+              <a:sym typeface="Consolas"/>
+            </a:endParaRPr>
+          </a:p>
+          <a:p>
+            <a:pPr indent="0" lvl="0" marL="0" rtl="0" algn="l">
+              <a:lnSpc>
+                <a:spcPct val="115000"/>
+              </a:lnSpc>
+              <a:spcBef>
+                <a:spcPts val="0"/>
+              </a:spcBef>
+              <a:spcAft>
+                <a:spcPts val="0"/>
+              </a:spcAft>
+              <a:buNone/>
+            </a:pPr>
+            <a:r>
+              <a:rPr lang="en" sz="1000">
+                <a:highlight>
+                  <a:schemeClr val="dk2"/>
+                </a:highlight>
+                <a:latin typeface="Consolas"/>
+                <a:ea typeface="Consolas"/>
+                <a:cs typeface="Consolas"/>
+                <a:sym typeface="Consolas"/>
+              </a:rPr>
+              <a:t>{</a:t>
+            </a:r>
+            <a:endParaRPr sz="1000">
+              <a:solidFill>
+                <a:srgbClr val="CCCCCC"/>
+              </a:solidFill>
+              <a:highlight>
+                <a:schemeClr val="dk2"/>
+              </a:highlight>
+              <a:latin typeface="Consolas"/>
+              <a:ea typeface="Consolas"/>
+              <a:cs typeface="Consolas"/>
+              <a:sym typeface="Consolas"/>
+            </a:endParaRPr>
+          </a:p>
+          <a:p>
+            <a:pPr indent="0" lvl="0" marL="0" rtl="0" algn="l">
+              <a:lnSpc>
+                <a:spcPct val="115000"/>
+              </a:lnSpc>
+              <a:spcBef>
+                <a:spcPts val="0"/>
+              </a:spcBef>
+              <a:spcAft>
+                <a:spcPts val="0"/>
+              </a:spcAft>
+              <a:buNone/>
+            </a:pPr>
+            <a:r>
+              <a:rPr lang="en" sz="1000">
+                <a:highlight>
+                  <a:schemeClr val="dk2"/>
+                </a:highlight>
+                <a:latin typeface="Consolas"/>
+                <a:ea typeface="Consolas"/>
+                <a:cs typeface="Consolas"/>
+                <a:sym typeface="Consolas"/>
+              </a:rPr>
+              <a:t>    (a.Owner as Entity)?.TakeDamage(speed / 100);</a:t>
+            </a:r>
+            <a:endParaRPr sz="1000">
+              <a:solidFill>
+                <a:srgbClr val="CCCCCC"/>
+              </a:solidFill>
+              <a:highlight>
+                <a:schemeClr val="dk2"/>
+              </a:highlight>
+              <a:latin typeface="Consolas"/>
+              <a:ea typeface="Consolas"/>
+              <a:cs typeface="Consolas"/>
+              <a:sym typeface="Consolas"/>
+            </a:endParaRPr>
+          </a:p>
+          <a:p>
+            <a:pPr indent="0" lvl="0" marL="0" rtl="0" algn="l">
+              <a:lnSpc>
+                <a:spcPct val="115000"/>
+              </a:lnSpc>
+              <a:spcBef>
+                <a:spcPts val="0"/>
+              </a:spcBef>
+              <a:spcAft>
+                <a:spcPts val="0"/>
+              </a:spcAft>
+              <a:buNone/>
+            </a:pPr>
+            <a:r>
+              <a:rPr lang="en" sz="1000">
+                <a:highlight>
+                  <a:schemeClr val="dk2"/>
+                </a:highlight>
+                <a:latin typeface="Consolas"/>
+                <a:ea typeface="Consolas"/>
+                <a:cs typeface="Consolas"/>
+                <a:sym typeface="Consolas"/>
+              </a:rPr>
+              <a:t>    (b.Owner as Entity)?.TakeDamage(speed / 100);</a:t>
+            </a:r>
+            <a:endParaRPr sz="1000">
+              <a:solidFill>
+                <a:srgbClr val="CCCCCC"/>
+              </a:solidFill>
+              <a:highlight>
+                <a:schemeClr val="dk2"/>
+              </a:highlight>
+              <a:latin typeface="Consolas"/>
+              <a:ea typeface="Consolas"/>
+              <a:cs typeface="Consolas"/>
+              <a:sym typeface="Consolas"/>
+            </a:endParaRPr>
+          </a:p>
+          <a:p>
+            <a:pPr indent="0" lvl="0" marL="0" rtl="0" algn="l">
+              <a:lnSpc>
+                <a:spcPct val="115000"/>
+              </a:lnSpc>
+              <a:spcBef>
+                <a:spcPts val="0"/>
+              </a:spcBef>
+              <a:spcAft>
+                <a:spcPts val="0"/>
+              </a:spcAft>
+              <a:buNone/>
+            </a:pPr>
+            <a:r>
+              <a:rPr lang="en" sz="1000">
+                <a:highlight>
+                  <a:schemeClr val="dk2"/>
+                </a:highlight>
+                <a:latin typeface="Consolas"/>
+                <a:ea typeface="Consolas"/>
+                <a:cs typeface="Consolas"/>
+                <a:sym typeface="Consolas"/>
+              </a:rPr>
+              <a:t>}</a:t>
+            </a:r>
+            <a:endParaRPr sz="1000">
+              <a:solidFill>
+                <a:srgbClr val="CCCCCC"/>
+              </a:solidFill>
+              <a:highlight>
+                <a:schemeClr val="dk2"/>
+              </a:highlight>
+              <a:latin typeface="Consolas"/>
+              <a:ea typeface="Consolas"/>
+              <a:cs typeface="Consolas"/>
+              <a:sym typeface="Consolas"/>
+            </a:endParaRPr>
+          </a:p>
+          <a:p>
+            <a:pPr indent="0" lvl="0" marL="0" rtl="0" algn="l">
+              <a:lnSpc>
+                <a:spcPct val="115000"/>
+              </a:lnSpc>
+              <a:spcBef>
+                <a:spcPts val="0"/>
+              </a:spcBef>
+              <a:spcAft>
+                <a:spcPts val="0"/>
+              </a:spcAft>
+              <a:buNone/>
+            </a:pPr>
+            <a:r>
+              <a:rPr lang="en" sz="1000">
+                <a:highlight>
+                  <a:schemeClr val="dk2"/>
+                </a:highlight>
+                <a:latin typeface="Consolas"/>
+                <a:ea typeface="Consolas"/>
+                <a:cs typeface="Consolas"/>
+                <a:sym typeface="Consolas"/>
+              </a:rPr>
+              <a:t/>
+            </a:r>
+            <a:endParaRPr sz="1000">
+              <a:solidFill>
+                <a:srgbClr val="CCCCCC"/>
+              </a:solidFill>
+              <a:highlight>
+                <a:schemeClr val="dk2"/>
+              </a:highlight>
+              <a:latin typeface="Consolas"/>
+              <a:ea typeface="Consolas"/>
+              <a:cs typeface="Consolas"/>
+              <a:sym typeface="Consolas"/>
+            </a:endParaRPr>
+          </a:p>
+          <a:p>
+            <a:pPr indent="0" lvl="0" marL="0" rtl="0" algn="l">
+              <a:lnSpc>
+                <a:spcPct val="115000"/>
+              </a:lnSpc>
+              <a:spcBef>
+                <a:spcPts val="0"/>
+              </a:spcBef>
+              <a:spcAft>
+                <a:spcPts val="0"/>
+              </a:spcAft>
+              <a:buNone/>
+            </a:pPr>
+            <a:r>
+              <a:rPr lang="en" sz="1000">
+                <a:highlight>
+                  <a:schemeClr val="dk2"/>
+                </a:highlight>
+                <a:latin typeface="Consolas"/>
+                <a:ea typeface="Consolas"/>
+                <a:cs typeface="Consolas"/>
+                <a:sym typeface="Consolas"/>
+              </a:rPr>
+              <a:t>_physics.Update(deltaSeconds);</a:t>
+            </a:r>
+            <a:endParaRPr sz="1000">
+              <a:solidFill>
+                <a:srgbClr val="CCCCCC"/>
+              </a:solidFill>
+              <a:highlight>
+                <a:schemeClr val="dk2"/>
+              </a:highlight>
+              <a:latin typeface="Consolas"/>
+              <a:ea typeface="Consolas"/>
+              <a:cs typeface="Consolas"/>
+              <a:sym typeface="Consolas"/>
+            </a:endParaRPr>
+          </a:p>
+          <a:p>
+            <a:pPr indent="0" lvl="0" marL="0" rtl="0" algn="l">
+              <a:lnSpc>
+                <a:spcPct val="115000"/>
+              </a:lnSpc>
+              <a:spcBef>
+                <a:spcPts val="0"/>
+              </a:spcBef>
+              <a:spcAft>
+                <a:spcPts val="0"/>
+              </a:spcAft>
+              <a:buNone/>
+            </a:pPr>
+            <a:r>
+              <a:rPr lang="en" sz="1000">
+                <a:highlight>
+                  <a:schemeClr val="dk2"/>
+                </a:highlight>
+                <a:latin typeface="Consolas"/>
+                <a:ea typeface="Consolas"/>
+                <a:cs typeface="Consolas"/>
+                <a:sym typeface="Consolas"/>
+              </a:rPr>
+              <a:t>RemoveDestroyed();</a:t>
+            </a:r>
+            <a:endParaRPr sz="1000">
+              <a:solidFill>
+                <a:srgbClr val="CCCCCC"/>
+              </a:solidFill>
+              <a:highlight>
+                <a:schemeClr val="dk2"/>
+              </a:highlight>
+              <a:latin typeface="Consolas"/>
+              <a:ea typeface="Consolas"/>
+              <a:cs typeface="Consolas"/>
+              <a:sym typeface="Consolas"/>
+            </a:endParaRPr>
+          </a:p>
+          <a:p>
+            <a:pPr indent="0" lvl="0" marL="0" rtl="0" algn="l">
+              <a:lnSpc>
+                <a:spcPct val="115000"/>
+              </a:lnSpc>
+              <a:spcBef>
+                <a:spcPts val="0"/>
+              </a:spcBef>
+              <a:spcAft>
+                <a:spcPts val="0"/>
+              </a:spcAft>
+              <a:buNone/>
+            </a:pPr>
+            <a:r>
+              <a:rPr lang="en" sz="1000">
+                <a:highlight>
+                  <a:schemeClr val="dk2"/>
+                </a:highlight>
+                <a:latin typeface="Consolas"/>
+                <a:ea typeface="Consolas"/>
+                <a:cs typeface="Consolas"/>
+                <a:sym typeface="Consolas"/>
+              </a:rPr>
+              <a:t/>
+            </a:r>
+            <a:endParaRPr sz="1000">
+              <a:solidFill>
+                <a:srgbClr val="CCCCCC"/>
+              </a:solidFill>
+              <a:highlight>
+                <a:schemeClr val="dk2"/>
+              </a:highlight>
+              <a:latin typeface="Consolas"/>
+              <a:ea typeface="Consolas"/>
+              <a:cs typeface="Consolas"/>
+              <a:sym typeface="Consolas"/>
+            </a:endParaRPr>
+          </a:p>
+          <a:p>
+            <a:pPr indent="0" lvl="0" marL="0" rtl="0" algn="l">
+              <a:lnSpc>
+                <a:spcPct val="115000"/>
+              </a:lnSpc>
+              <a:spcBef>
+                <a:spcPts val="0"/>
+              </a:spcBef>
+              <a:spcAft>
+                <a:spcPts val="0"/>
+              </a:spcAft>
+              <a:buNone/>
+            </a:pPr>
+            <a:r>
+              <a:rPr lang="en" sz="1000">
+                <a:highlight>
+                  <a:schemeClr val="dk2"/>
+                </a:highlight>
+                <a:latin typeface="Consolas"/>
+                <a:ea typeface="Consolas"/>
+                <a:cs typeface="Consolas"/>
+                <a:sym typeface="Consolas"/>
+              </a:rPr>
+              <a:t>for (int i = _entities.Count - 1; i &gt;= 0; i--)</a:t>
+            </a:r>
+            <a:endParaRPr sz="1000">
+              <a:solidFill>
+                <a:srgbClr val="CCCCCC"/>
+              </a:solidFill>
+              <a:highlight>
+                <a:schemeClr val="dk2"/>
+              </a:highlight>
+              <a:latin typeface="Consolas"/>
+              <a:ea typeface="Consolas"/>
+              <a:cs typeface="Consolas"/>
+              <a:sym typeface="Consolas"/>
+            </a:endParaRPr>
+          </a:p>
+          <a:p>
+            <a:pPr indent="0" lvl="0" marL="0" rtl="0" algn="l">
+              <a:lnSpc>
+                <a:spcPct val="115000"/>
+              </a:lnSpc>
+              <a:spcBef>
+                <a:spcPts val="0"/>
+              </a:spcBef>
+              <a:spcAft>
+                <a:spcPts val="0"/>
+              </a:spcAft>
+              <a:buNone/>
+            </a:pPr>
+            <a:r>
+              <a:rPr lang="en" sz="1000">
+                <a:highlight>
+                  <a:schemeClr val="dk2"/>
+                </a:highlight>
+                <a:latin typeface="Consolas"/>
+                <a:ea typeface="Consolas"/>
+                <a:cs typeface="Consolas"/>
+                <a:sym typeface="Consolas"/>
+              </a:rPr>
+              <a:t>{</a:t>
+            </a:r>
+            <a:endParaRPr sz="1000">
+              <a:solidFill>
+                <a:srgbClr val="CCCCCC"/>
+              </a:solidFill>
+              <a:highlight>
+                <a:schemeClr val="dk2"/>
+              </a:highlight>
+              <a:latin typeface="Consolas"/>
+              <a:ea typeface="Consolas"/>
+              <a:cs typeface="Consolas"/>
+              <a:sym typeface="Consolas"/>
+            </a:endParaRPr>
+          </a:p>
+          <a:p>
+            <a:pPr indent="0" lvl="0" marL="0" rtl="0" algn="l">
+              <a:lnSpc>
+                <a:spcPct val="115000"/>
+              </a:lnSpc>
+              <a:spcBef>
+                <a:spcPts val="0"/>
+              </a:spcBef>
+              <a:spcAft>
+                <a:spcPts val="0"/>
+              </a:spcAft>
+              <a:buNone/>
+            </a:pPr>
+            <a:r>
+              <a:rPr lang="en" sz="1000">
+                <a:highlight>
+                  <a:schemeClr val="dk2"/>
+                </a:highlight>
+                <a:latin typeface="Consolas"/>
+                <a:ea typeface="Consolas"/>
+                <a:cs typeface="Consolas"/>
+                <a:sym typeface="Consolas"/>
+              </a:rPr>
+              <a:t>    if (!_entities[i].IsDestroyed) continue;</a:t>
+            </a:r>
+            <a:endParaRPr sz="1000">
+              <a:solidFill>
+                <a:srgbClr val="CCCCCC"/>
+              </a:solidFill>
+              <a:highlight>
+                <a:schemeClr val="dk2"/>
+              </a:highlight>
+              <a:latin typeface="Consolas"/>
+              <a:ea typeface="Consolas"/>
+              <a:cs typeface="Consolas"/>
+              <a:sym typeface="Consolas"/>
+            </a:endParaRPr>
+          </a:p>
+          <a:p>
+            <a:pPr indent="0" lvl="0" marL="0" rtl="0" algn="l">
+              <a:lnSpc>
+                <a:spcPct val="115000"/>
+              </a:lnSpc>
+              <a:spcBef>
+                <a:spcPts val="0"/>
+              </a:spcBef>
+              <a:spcAft>
+                <a:spcPts val="0"/>
+              </a:spcAft>
+              <a:buNone/>
+            </a:pPr>
+            <a:r>
+              <a:rPr lang="en" sz="1000">
+                <a:highlight>
+                  <a:schemeClr val="dk2"/>
+                </a:highlight>
+                <a:latin typeface="Consolas"/>
+                <a:ea typeface="Consolas"/>
+                <a:cs typeface="Consolas"/>
+                <a:sym typeface="Consolas"/>
+              </a:rPr>
+              <a:t>    _physics.Destroy(_entities[i].Body);</a:t>
+            </a:r>
+            <a:endParaRPr sz="1000">
+              <a:solidFill>
+                <a:srgbClr val="CCCCCC"/>
+              </a:solidFill>
+              <a:highlight>
+                <a:schemeClr val="dk2"/>
+              </a:highlight>
+              <a:latin typeface="Consolas"/>
+              <a:ea typeface="Consolas"/>
+              <a:cs typeface="Consolas"/>
+              <a:sym typeface="Consolas"/>
+            </a:endParaRPr>
+          </a:p>
+          <a:p>
+            <a:pPr indent="0" lvl="0" marL="0" rtl="0" algn="l">
+              <a:lnSpc>
+                <a:spcPct val="115000"/>
+              </a:lnSpc>
+              <a:spcBef>
+                <a:spcPts val="0"/>
+              </a:spcBef>
+              <a:spcAft>
+                <a:spcPts val="0"/>
+              </a:spcAft>
+              <a:buNone/>
+            </a:pPr>
+            <a:r>
+              <a:rPr lang="en" sz="1000">
+                <a:highlight>
+                  <a:schemeClr val="dk2"/>
+                </a:highlight>
+                <a:latin typeface="Consolas"/>
+                <a:ea typeface="Consolas"/>
+                <a:cs typeface="Consolas"/>
+                <a:sym typeface="Consolas"/>
+              </a:rPr>
+              <a:t>    _entities.RemoveAt(i);</a:t>
+            </a:r>
+            <a:endParaRPr sz="1000">
+              <a:solidFill>
+                <a:srgbClr val="CCCCCC"/>
+              </a:solidFill>
+              <a:highlight>
+                <a:schemeClr val="dk2"/>
+              </a:highlight>
+              <a:latin typeface="Consolas"/>
+              <a:ea typeface="Consolas"/>
+              <a:cs typeface="Consolas"/>
+              <a:sym typeface="Consolas"/>
+            </a:endParaRPr>
+          </a:p>
+          <a:p>
+            <a:pPr indent="0" lvl="0" marL="0" rtl="0" algn="l">
+              <a:lnSpc>
+                <a:spcPct val="115000"/>
+              </a:lnSpc>
+              <a:spcBef>
+                <a:spcPts val="0"/>
+              </a:spcBef>
+              <a:spcAft>
+                <a:spcPts val="0"/>
+              </a:spcAft>
+              <a:buNone/>
+            </a:pPr>
+            <a:r>
+              <a:rPr lang="en" sz="1000">
+                <a:highlight>
+                  <a:schemeClr val="dk2"/>
+                </a:highlight>
+                <a:latin typeface="Consolas"/>
+                <a:ea typeface="Consolas"/>
+                <a:cs typeface="Consolas"/>
+                <a:sym typeface="Consolas"/>
+              </a:rPr>
+              <a:t>}</a:t>
+            </a:r>
+            <a:endParaRPr sz="1000">
+              <a:solidFill>
+                <a:srgbClr val="CCCCCC"/>
+              </a:solidFill>
+              <a:highlight>
+                <a:schemeClr val="dk2"/>
+              </a:highlight>
+              <a:latin typeface="Consolas"/>
+              <a:ea typeface="Consolas"/>
+              <a:cs typeface="Consolas"/>
+              <a:sym typeface="Consolas"/>
+            </a:endParaRPr>
+          </a:p>
+        </p:txBody>
+      </p:sp>
+    </p:spTree>
+  </p:cSld>
+  <p:clrMapOvr>
+    <a:masterClrMapping/>
+  </p:clrMapOvr>
+</p:sld>
+</file>
+
+<file path=ppt/slides/slide21.xml><?xml version="1.0" encoding="utf-8"?>
+<p:sld xmlns:a="http://schemas.openxmlformats.org/drawingml/2006/main" xmlns:p="http://schemas.openxmlformats.org/presentationml/2006/main" xmlns:r="http://schemas.openxmlformats.org/officeDocument/2006/relationships">
+  <p:cSld>
+    <p:spTree>
+      <p:nvGrpSpPr>
+        <p:cNvPr id="1" name=""/>
+        <p:cNvGrpSpPr/>
+        <p:nvPr/>
+      </p:nvGrpSpPr>
+      <p:grpSpPr/>
+      <p:sp>
+        <p:nvSpPr>
+          <p:cNvPr id="128" name="Google Shape;128;p21"/>
+          <p:cNvSpPr txBox="1"/>
+          <p:nvPr>
+            <p:ph type="title"/>
+          </p:nvPr>
+        </p:nvSpPr>
+        <p:spPr>
+          <a:xfrm>
+            <a:off x="311700" y="195615"/>
+            <a:ext cx="8520600" cy="572700"/>
+          </a:xfrm>
+          <a:prstGeom prst="rect">
+            <a:avLst/>
+          </a:prstGeom>
+        </p:spPr>
+        <p:txBody>
+          <a:bodyPr anchorCtr="0" anchor="t" bIns="91425" lIns="91425" spcFirstLastPara="1" rIns="91425" wrap="square" tIns="91425">
+            <a:normAutofit fontScale="90000"/>
+          </a:bodyPr>
+          <a:lstStyle/>
+          <a:p>
+            <a:pPr indent="0" lvl="0" marL="0" rtl="0" algn="l">
+              <a:spcBef>
+                <a:spcPts val="0"/>
+              </a:spcBef>
+              <a:spcAft>
+                <a:spcPts val="0"/>
+              </a:spcAft>
+              <a:buNone/>
+            </a:pPr>
+            <a:r>
+              <a:rPr lang="en">
+                <a:solidFill>
+                  <a:schemeClr val="accent5"/>
+                </a:solidFill>
+              </a:rPr>
+              <a:t>Events Implementation</a:t>
+            </a:r>
+            <a:endParaRPr>
+              <a:solidFill>
+                <a:schemeClr val="accent5"/>
+              </a:solidFill>
+            </a:endParaRPr>
+          </a:p>
+        </p:txBody>
+      </p:sp>
+      <p:sp>
+        <p:nvSpPr>
+          <p:cNvPr id="129" name="Google Shape;129;p21"/>
+          <p:cNvSpPr txBox="1"/>
+          <p:nvPr>
+            <p:ph idx="1" type="body"/>
+          </p:nvPr>
+        </p:nvSpPr>
+        <p:spPr>
+          <a:xfrm>
+            <a:off x="311700" y="885950"/>
+            <a:ext cx="8520600" cy="4023300"/>
+          </a:xfrm>
+          <a:prstGeom prst="rect">
+            <a:avLst/>
+          </a:prstGeom>
+        </p:spPr>
+        <p:txBody>
+          <a:bodyPr anchorCtr="0" anchor="ctr" bIns="91425" lIns="91425" spcFirstLastPara="1" rIns="91425" wrap="square" tIns="91425">
+            <a:normAutofit/>
+          </a:bodyPr>
+          <a:lstStyle/>
+          <a:p>
+            <a:pPr indent="0" lvl="0" marL="0" rtl="0" algn="ctr">
+              <a:spcBef>
+                <a:spcPts val="0"/>
+              </a:spcBef>
+              <a:spcAft>
+                <a:spcPts val="1200"/>
+              </a:spcAft>
+              <a:buNone/>
+            </a:pPr>
+            <a:r>
+              <a:rPr lang="en" sz="2900">
+                <a:latin typeface="VT323"/>
+                <a:ea typeface="VT323"/>
+                <a:cs typeface="VT323"/>
+                <a:sym typeface="VT323"/>
+              </a:rPr>
+              <a:t>DEMO!</a:t>
+            </a:r>
+            <a:endParaRPr/>
+          </a:p>
+          <a:p>
+            <a:pPr indent="0" lvl="0" marL="0" rtl="0" algn="ctr">
+              <a:spcBef>
+                <a:spcPts val="0"/>
+              </a:spcBef>
+              <a:spcAft>
+                <a:spcPts val="0"/>
+              </a:spcAft>
+              <a:buNone/>
+            </a:pPr>
+            <a:r>
+              <a:rPr lang="en" sz="1800"/>
+              <a:t>Birds2: hits that damage, removed after the step</a:t>
+            </a:r>
+            <a:endParaRPr sz="1800"/>
+          </a:p>
+        </p:txBody>
+      </p:sp>
+    </p:spTree>
+  </p:cSld>
+  <p:clrMapOvr>
+    <a:masterClrMapping/>
+  </p:clrMapOvr>
+</p:sld>
+</file>
+
+<file path=ppt/slides/slide22.xml><?xml version="1.0" encoding="utf-8"?>
+<p:sld xmlns:a="http://schemas.openxmlformats.org/drawingml/2006/main" xmlns:p="http://schemas.openxmlformats.org/presentationml/2006/main" xmlns:r="http://schemas.openxmlformats.org/officeDocument/2006/relationships">
+  <p:cSld>
+    <p:spTree>
+      <p:nvGrpSpPr>
+        <p:cNvPr id="1" name=""/>
+        <p:cNvGrpSpPr/>
+        <p:nvPr/>
+      </p:nvGrpSpPr>
+      <p:grpSpPr/>
+      <p:sp>
+        <p:nvSpPr>
           <p:cNvPr id="2" name="Title 1"/>
           <p:cNvSpPr>
             <a:spLocks noGrp="1"/>
@@ -11422,7 +12125,7 @@
 </p:sld>
 </file>
 
-<file path=ppt/slides/slide21.xml><?xml version="1.0" encoding="utf-8"?>
+<file path=ppt/slides/slide23.xml><?xml version="1.0" encoding="utf-8"?>
 <p:sld xmlns:a="http://schemas.openxmlformats.org/drawingml/2006/main" xmlns:p="http://schemas.openxmlformats.org/presentationml/2006/main" xmlns:r="http://schemas.openxmlformats.org/officeDocument/2006/relationships">
   <p:cSld>
     <p:spTree>
@@ -12218,7 +12921,7 @@
 </p:sld>
 </file>
 
-<file path=ppt/slides/slide22.xml><?xml version="1.0" encoding="utf-8"?>
+<file path=ppt/slides/slide24.xml><?xml version="1.0" encoding="utf-8"?>
 <p:sld xmlns:a="http://schemas.openxmlformats.org/drawingml/2006/main" xmlns:p="http://schemas.openxmlformats.org/presentationml/2006/main" xmlns:r="http://schemas.openxmlformats.org/officeDocument/2006/relationships">
   <p:cSld>
     <p:spTree>
@@ -12772,7 +13475,7 @@
 </p:sld>
 </file>
 
-<file path=ppt/slides/slide23.xml><?xml version="1.0" encoding="utf-8"?>
+<file path=ppt/slides/slide25.xml><?xml version="1.0" encoding="utf-8"?>
 <p:sld xmlns:a="http://schemas.openxmlformats.org/drawingml/2006/main" xmlns:p="http://schemas.openxmlformats.org/presentationml/2006/main" xmlns:r="http://schemas.openxmlformats.org/officeDocument/2006/relationships">
   <p:cSld>
     <p:spTree>
@@ -12899,7 +13602,7 @@
 </p:sld>
 </file>
 
-<file path=ppt/slides/slide24.xml><?xml version="1.0" encoding="utf-8"?>
+<file path=ppt/slides/slide26.xml><?xml version="1.0" encoding="utf-8"?>
 <p:sld xmlns:a="http://schemas.openxmlformats.org/drawingml/2006/main" xmlns:p="http://schemas.openxmlformats.org/presentationml/2006/main" xmlns:r="http://schemas.openxmlformats.org/officeDocument/2006/relationships">
   <p:cSld>
     <p:spTree>
@@ -13021,7 +13724,7 @@
 </p:sld>
 </file>
 
-<file path=ppt/slides/slide25.xml><?xml version="1.0" encoding="utf-8"?>
+<file path=ppt/slides/slide27.xml><?xml version="1.0" encoding="utf-8"?>
 <p:sld xmlns:a="http://schemas.openxmlformats.org/drawingml/2006/main" xmlns:p="http://schemas.openxmlformats.org/presentationml/2006/main" xmlns:r="http://schemas.openxmlformats.org/officeDocument/2006/relationships">
   <p:cSld>
     <p:spTree>
@@ -13437,7 +14140,7 @@
 </p:sld>
 </file>
 
-<file path=ppt/slides/slide26.xml><?xml version="1.0" encoding="utf-8"?>
+<file path=ppt/slides/slide28.xml><?xml version="1.0" encoding="utf-8"?>
 <p:sld xmlns:a="http://schemas.openxmlformats.org/drawingml/2006/main" xmlns:r="http://schemas.openxmlformats.org/officeDocument/2006/relationships" xmlns:mc="http://schemas.openxmlformats.org/markup-compatibility/2006" xmlns:mv="urn:schemas-microsoft-com:mac:vml" xmlns:p="http://schemas.openxmlformats.org/presentationml/2006/main" xmlns:c="http://schemas.openxmlformats.org/drawingml/2006/chart" xmlns:dgm="http://schemas.openxmlformats.org/drawingml/2006/diagram" xmlns:o="urn:schemas-microsoft-com:office:office" xmlns:v="urn:schemas-microsoft-com:vml" xmlns:pvml="urn:schemas-microsoft-com:office:powerpoint" xmlns:com="http://schemas.openxmlformats.org/drawingml/2006/compatibility" xmlns:p14="http://schemas.microsoft.com/office/powerpoint/2010/main" xmlns:p15="http://schemas.microsoft.com/office/powerpoint/2012/main" xmlns:ahyp="http://schemas.microsoft.com/office/drawing/2018/hyperlinkcolor">
   <p:cSld>
     <p:spTree>
@@ -13571,7 +14274,7 @@
 </p:sld>
 </file>
 
-<file path=ppt/slides/slide27.xml><?xml version="1.0" encoding="utf-8"?>
+<file path=ppt/slides/slide29.xml><?xml version="1.0" encoding="utf-8"?>
 <p:sld xmlns:a="http://schemas.openxmlformats.org/drawingml/2006/main" xmlns:r="http://schemas.openxmlformats.org/officeDocument/2006/relationships" xmlns:mc="http://schemas.openxmlformats.org/markup-compatibility/2006" xmlns:mv="urn:schemas-microsoft-com:mac:vml" xmlns:p="http://schemas.openxmlformats.org/presentationml/2006/main" xmlns:c="http://schemas.openxmlformats.org/drawingml/2006/chart" xmlns:dgm="http://schemas.openxmlformats.org/drawingml/2006/diagram" xmlns:o="urn:schemas-microsoft-com:office:office" xmlns:v="urn:schemas-microsoft-com:vml" xmlns:pvml="urn:schemas-microsoft-com:office:powerpoint" xmlns:com="http://schemas.openxmlformats.org/drawingml/2006/compatibility" xmlns:p14="http://schemas.microsoft.com/office/powerpoint/2010/main" xmlns:p15="http://schemas.microsoft.com/office/powerpoint/2012/main" xmlns:ahyp="http://schemas.microsoft.com/office/drawing/2018/hyperlinkcolor">
   <p:cSld>
     <p:spTree>
@@ -14437,994 +15140,6 @@
 </p:sld>
 </file>
 
-<file path=ppt/slides/slide28.xml><?xml version="1.0" encoding="utf-8"?>
-<p:sld xmlns:a="http://schemas.openxmlformats.org/drawingml/2006/main" xmlns:r="http://schemas.openxmlformats.org/officeDocument/2006/relationships" xmlns:mc="http://schemas.openxmlformats.org/markup-compatibility/2006" xmlns:mv="urn:schemas-microsoft-com:mac:vml" xmlns:p="http://schemas.openxmlformats.org/presentationml/2006/main" xmlns:c="http://schemas.openxmlformats.org/drawingml/2006/chart" xmlns:dgm="http://schemas.openxmlformats.org/drawingml/2006/diagram" xmlns:o="urn:schemas-microsoft-com:office:office" xmlns:v="urn:schemas-microsoft-com:vml" xmlns:pvml="urn:schemas-microsoft-com:office:powerpoint" xmlns:com="http://schemas.openxmlformats.org/drawingml/2006/compatibility" xmlns:p14="http://schemas.microsoft.com/office/powerpoint/2010/main" xmlns:p15="http://schemas.microsoft.com/office/powerpoint/2012/main" xmlns:ahyp="http://schemas.microsoft.com/office/drawing/2018/hyperlinkcolor">
-  <p:cSld>
-    <p:spTree>
-      <p:nvGrpSpPr>
-        <p:cNvPr id="292" name="Shape 292"/>
-        <p:cNvGrpSpPr/>
-        <p:nvPr/>
-      </p:nvGrpSpPr>
-      <p:grpSpPr>
-        <a:xfrm>
-          <a:off x="0" y="0"/>
-          <a:ext cx="0" cy="0"/>
-          <a:chOff x="0" y="0"/>
-          <a:chExt cx="0" cy="0"/>
-        </a:xfrm>
-      </p:grpSpPr>
-      <p:sp>
-        <p:nvSpPr>
-          <p:cNvPr id="293" name="Google Shape;293;p45"/>
-          <p:cNvSpPr txBox="1"/>
-          <p:nvPr>
-            <p:ph type="title"/>
-          </p:nvPr>
-        </p:nvSpPr>
-        <p:spPr>
-          <a:xfrm>
-            <a:off x="311700" y="195615"/>
-            <a:ext cx="8520600" cy="572700"/>
-          </a:xfrm>
-          <a:prstGeom prst="rect">
-            <a:avLst/>
-          </a:prstGeom>
-        </p:spPr>
-        <p:txBody>
-          <a:bodyPr anchorCtr="0" anchor="t" bIns="91425" lIns="91425" spcFirstLastPara="1" rIns="91425" wrap="square" tIns="91425">
-            <a:normAutofit fontScale="90000"/>
-          </a:bodyPr>
-          <a:lstStyle/>
-          <a:p>
-            <a:pPr indent="0" lvl="0" marL="0" rtl="0" algn="l">
-              <a:spcBef>
-                <a:spcPts val="0"/>
-              </a:spcBef>
-              <a:spcAft>
-                <a:spcPts val="0"/>
-              </a:spcAft>
-              <a:buNone/>
-            </a:pPr>
-            <a:r>
-              <a:rPr lang="en">
-                <a:solidFill>
-                  <a:schemeClr val="accent5"/>
-                </a:solidFill>
-              </a:rPr>
-              <a:t>Exercises (Stretch)</a:t>
-            </a:r>
-            <a:endParaRPr>
-              <a:solidFill>
-                <a:schemeClr val="accent5"/>
-              </a:solidFill>
-            </a:endParaRPr>
-          </a:p>
-        </p:txBody>
-      </p:sp>
-      <p:sp>
-        <p:nvSpPr>
-          <p:cNvPr id="294" name="Google Shape;294;p45"/>
-          <p:cNvSpPr txBox="1"/>
-          <p:nvPr>
-            <p:ph idx="1" type="body"/>
-          </p:nvPr>
-        </p:nvSpPr>
-        <p:spPr>
-          <a:xfrm>
-            <a:off x="311700" y="885950"/>
-            <a:ext cx="8520600" cy="4023300"/>
-          </a:xfrm>
-          <a:prstGeom prst="rect">
-            <a:avLst/>
-          </a:prstGeom>
-        </p:spPr>
-        <p:txBody>
-          <a:bodyPr anchorCtr="0" anchor="t" bIns="91425" lIns="91425" spcFirstLastPara="1" rIns="91425" wrap="square" tIns="91425">
-            <a:normAutofit/>
-          </a:bodyPr>
-          <a:lstStyle/>
-          <a:p>
-            <a:pPr indent="-330200" lvl="0" marL="457200" rtl="0" algn="l">
-              <a:spcBef>
-                <a:spcPts val="0"/>
-              </a:spcBef>
-              <a:spcAft>
-                <a:spcPts val="0"/>
-              </a:spcAft>
-              <a:buSzPts val="1600"/>
-              <a:buChar char="●"/>
-            </a:pPr>
-            <a:r>
-              <a:rPr lang="en"/>
-              <a:t>Unit test Units: to metres and back, and y flips</a:t>
-            </a:r>
-            <a:endParaRPr/>
-          </a:p>
-          <a:p>
-            <a:pPr indent="-330200" lvl="0" marL="457200" rtl="0" algn="l">
-              <a:spcBef>
-                <a:spcPts val="0"/>
-              </a:spcBef>
-              <a:spcAft>
-                <a:spcPts val="0"/>
-              </a:spcAft>
-              <a:buSzPts val="1600"/>
-              <a:buChar char="●"/>
-            </a:pPr>
-            <a:r>
-              <a:rPr lang="en"/>
-              <a:t>Swap the library: which files would change?</a:t>
-            </a:r>
-            <a:endParaRPr/>
-          </a:p>
-          <a:p>
-            <a:pPr indent="-317500" lvl="1" marL="914400" rtl="0" algn="l">
-              <a:spcBef>
-                <a:spcPts val="0"/>
-              </a:spcBef>
-              <a:spcAft>
-                <a:spcPts val="0"/>
-              </a:spcAft>
-              <a:buSzPts val="1400"/>
-              <a:buChar char="○"/>
-            </a:pPr>
-            <a:r>
-              <a:rPr lang="en"/>
-              <a:t>Try it with Aether.Physics2D</a:t>
-            </a:r>
-            <a:endParaRPr/>
-          </a:p>
-        </p:txBody>
-      </p:sp>
-    </p:spTree>
-  </p:cSld>
-  <p:clrMapOvr>
-    <a:masterClrMapping/>
-  </p:clrMapOvr>
-  <p:timing>
-    <p:tnLst>
-      <p:par>
-        <p:cTn dur="indefinite" nodeType="tmRoot" restart="never">
-          <p:childTnLst>
-            <p:seq concurrent="1" nextAc="seek">
-              <p:cTn dur="indefinite" id="2" nodeType="mainSeq">
-                <p:childTnLst>
-                  <p:par>
-                    <p:cTn fill="hold">
-                      <p:stCondLst>
-                        <p:cond delay="indefinite"/>
-                      </p:stCondLst>
-                      <p:childTnLst>
-                        <p:par>
-                          <p:cTn fill="hold">
-                            <p:stCondLst>
-                              <p:cond delay="0"/>
-                            </p:stCondLst>
-                            <p:childTnLst>
-                              <p:par>
-                                <p:cTn fill="hold" nodeType="clickEffect" presetClass="entr" presetID="1" presetSubtype="0">
-                                  <p:stCondLst>
-                                    <p:cond delay="0"/>
-                                  </p:stCondLst>
-                                  <p:childTnLst>
-                                    <p:set>
-                                      <p:cBhvr>
-                                        <p:cTn dur="1" fill="hold">
-                                          <p:stCondLst>
-                                            <p:cond delay="0"/>
-                                          </p:stCondLst>
-                                        </p:cTn>
-                                        <p:tgtEl>
-                                          <p:spTgt spid="294">
-                                            <p:txEl>
-                                              <p:pRg end="0" st="0"/>
-                                            </p:txEl>
-                                          </p:spTgt>
-                                        </p:tgtEl>
-                                        <p:attrNameLst>
-                                          <p:attrName>style.visibility</p:attrName>
-                                        </p:attrNameLst>
-                                      </p:cBhvr>
-                                      <p:to>
-                                        <p:strVal val="visible"/>
-                                      </p:to>
-                                    </p:set>
-                                  </p:childTnLst>
-                                </p:cTn>
-                              </p:par>
-                            </p:childTnLst>
-                          </p:cTn>
-                        </p:par>
-                      </p:childTnLst>
-                    </p:cTn>
-                  </p:par>
-                  <p:par>
-                    <p:cTn fill="hold">
-                      <p:stCondLst>
-                        <p:cond delay="indefinite"/>
-                      </p:stCondLst>
-                      <p:childTnLst>
-                        <p:par>
-                          <p:cTn fill="hold">
-                            <p:stCondLst>
-                              <p:cond delay="0"/>
-                            </p:stCondLst>
-                            <p:childTnLst>
-                              <p:par>
-                                <p:cTn fill="hold" nodeType="clickEffect" presetClass="entr" presetID="1" presetSubtype="0">
-                                  <p:stCondLst>
-                                    <p:cond delay="0"/>
-                                  </p:stCondLst>
-                                  <p:childTnLst>
-                                    <p:set>
-                                      <p:cBhvr>
-                                        <p:cTn dur="1" fill="hold">
-                                          <p:stCondLst>
-                                            <p:cond delay="0"/>
-                                          </p:stCondLst>
-                                        </p:cTn>
-                                        <p:tgtEl>
-                                          <p:spTgt spid="294">
-                                            <p:txEl>
-                                              <p:pRg end="1" st="1"/>
-                                            </p:txEl>
-                                          </p:spTgt>
-                                        </p:tgtEl>
-                                        <p:attrNameLst>
-                                          <p:attrName>style.visibility</p:attrName>
-                                        </p:attrNameLst>
-                                      </p:cBhvr>
-                                      <p:to>
-                                        <p:strVal val="visible"/>
-                                      </p:to>
-                                    </p:set>
-                                  </p:childTnLst>
-                                </p:cTn>
-                              </p:par>
-                            </p:childTnLst>
-                          </p:cTn>
-                        </p:par>
-                      </p:childTnLst>
-                    </p:cTn>
-                  </p:par>
-                  <p:par>
-                    <p:cTn fill="hold">
-                      <p:stCondLst>
-                        <p:cond delay="indefinite"/>
-                      </p:stCondLst>
-                      <p:childTnLst>
-                        <p:par>
-                          <p:cTn fill="hold">
-                            <p:stCondLst>
-                              <p:cond delay="0"/>
-                            </p:stCondLst>
-                            <p:childTnLst>
-                              <p:par>
-                                <p:cTn fill="hold" nodeType="clickEffect" presetClass="entr" presetID="1" presetSubtype="0">
-                                  <p:stCondLst>
-                                    <p:cond delay="0"/>
-                                  </p:stCondLst>
-                                  <p:childTnLst>
-                                    <p:set>
-                                      <p:cBhvr>
-                                        <p:cTn dur="1" fill="hold">
-                                          <p:stCondLst>
-                                            <p:cond delay="0"/>
-                                          </p:stCondLst>
-                                        </p:cTn>
-                                        <p:tgtEl>
-                                          <p:spTgt spid="294">
-                                            <p:txEl>
-                                              <p:pRg end="2" st="2"/>
-                                            </p:txEl>
-                                          </p:spTgt>
-                                        </p:tgtEl>
-                                        <p:attrNameLst>
-                                          <p:attrName>style.visibility</p:attrName>
-                                        </p:attrNameLst>
-                                      </p:cBhvr>
-                                      <p:to>
-                                        <p:strVal val="visible"/>
-                                      </p:to>
-                                    </p:set>
-                                  </p:childTnLst>
-                                </p:cTn>
-                              </p:par>
-                            </p:childTnLst>
-                          </p:cTn>
-                        </p:par>
-                      </p:childTnLst>
-                    </p:cTn>
-                  </p:par>
-                  <p:par>
-                    <p:cTn fill="hold">
-                      <p:stCondLst>
-                        <p:cond delay="indefinite"/>
-                      </p:stCondLst>
-                      <p:childTnLst>
-                        <p:par>
-                          <p:cTn fill="hold">
-                            <p:stCondLst>
-                              <p:cond delay="0"/>
-                            </p:stCondLst>
-                            <p:childTnLst>
-                              <p:par>
-                                <p:cTn fill="hold" nodeType="clickEffect" presetClass="entr" presetID="1" presetSubtype="0">
-                                  <p:stCondLst>
-                                    <p:cond delay="0"/>
-                                  </p:stCondLst>
-                                  <p:childTnLst>
-                                    <p:set>
-                                      <p:cBhvr>
-                                        <p:cTn dur="1" fill="hold">
-                                          <p:stCondLst>
-                                            <p:cond delay="0"/>
-                                          </p:stCondLst>
-                                        </p:cTn>
-                                        <p:tgtEl>
-                                          <p:spTgt spid="294">
-                                            <p:txEl>
-                                              <p:pRg end="3" st="3"/>
-                                            </p:txEl>
-                                          </p:spTgt>
-                                        </p:tgtEl>
-                                        <p:attrNameLst>
-                                          <p:attrName>style.visibility</p:attrName>
-                                        </p:attrNameLst>
-                                      </p:cBhvr>
-                                      <p:to>
-                                        <p:strVal val="visible"/>
-                                      </p:to>
-                                    </p:set>
-                                  </p:childTnLst>
-                                </p:cTn>
-                              </p:par>
-                            </p:childTnLst>
-                          </p:cTn>
-                        </p:par>
-                      </p:childTnLst>
-                    </p:cTn>
-                  </p:par>
-                  <p:par>
-                    <p:cTn fill="hold">
-                      <p:stCondLst>
-                        <p:cond delay="indefinite"/>
-                      </p:stCondLst>
-                      <p:childTnLst>
-                        <p:par>
-                          <p:cTn fill="hold">
-                            <p:stCondLst>
-                              <p:cond delay="0"/>
-                            </p:stCondLst>
-                            <p:childTnLst>
-                              <p:par>
-                                <p:cTn fill="hold" nodeType="clickEffect" presetClass="entr" presetID="1" presetSubtype="0">
-                                  <p:stCondLst>
-                                    <p:cond delay="0"/>
-                                  </p:stCondLst>
-                                  <p:childTnLst>
-                                    <p:set>
-                                      <p:cBhvr>
-                                        <p:cTn dur="1" fill="hold">
-                                          <p:stCondLst>
-                                            <p:cond delay="0"/>
-                                          </p:stCondLst>
-                                        </p:cTn>
-                                        <p:tgtEl>
-                                          <p:spTgt spid="294">
-                                            <p:txEl>
-                                              <p:pRg end="4" st="4"/>
-                                            </p:txEl>
-                                          </p:spTgt>
-                                        </p:tgtEl>
-                                        <p:attrNameLst>
-                                          <p:attrName>style.visibility</p:attrName>
-                                        </p:attrNameLst>
-                                      </p:cBhvr>
-                                      <p:to>
-                                        <p:strVal val="visible"/>
-                                      </p:to>
-                                    </p:set>
-                                  </p:childTnLst>
-                                </p:cTn>
-                              </p:par>
-                            </p:childTnLst>
-                          </p:cTn>
-                        </p:par>
-                      </p:childTnLst>
-                    </p:cTn>
-                  </p:par>
-                  <p:par>
-                    <p:cTn fill="hold">
-                      <p:stCondLst>
-                        <p:cond delay="indefinite"/>
-                      </p:stCondLst>
-                      <p:childTnLst>
-                        <p:par>
-                          <p:cTn fill="hold">
-                            <p:stCondLst>
-                              <p:cond delay="0"/>
-                            </p:stCondLst>
-                            <p:childTnLst>
-                              <p:par>
-                                <p:cTn fill="hold" nodeType="clickEffect" presetClass="entr" presetID="1" presetSubtype="0">
-                                  <p:stCondLst>
-                                    <p:cond delay="0"/>
-                                  </p:stCondLst>
-                                  <p:childTnLst>
-                                    <p:set>
-                                      <p:cBhvr>
-                                        <p:cTn dur="1" fill="hold">
-                                          <p:stCondLst>
-                                            <p:cond delay="0"/>
-                                          </p:stCondLst>
-                                        </p:cTn>
-                                        <p:tgtEl>
-                                          <p:spTgt spid="294">
-                                            <p:txEl>
-                                              <p:pRg end="5" st="5"/>
-                                            </p:txEl>
-                                          </p:spTgt>
-                                        </p:tgtEl>
-                                        <p:attrNameLst>
-                                          <p:attrName>style.visibility</p:attrName>
-                                        </p:attrNameLst>
-                                      </p:cBhvr>
-                                      <p:to>
-                                        <p:strVal val="visible"/>
-                                      </p:to>
-                                    </p:set>
-                                  </p:childTnLst>
-                                </p:cTn>
-                              </p:par>
-                            </p:childTnLst>
-                          </p:cTn>
-                        </p:par>
-                      </p:childTnLst>
-                    </p:cTn>
-                  </p:par>
-                  <p:par>
-                    <p:cTn fill="hold">
-                      <p:stCondLst>
-                        <p:cond delay="indefinite"/>
-                      </p:stCondLst>
-                      <p:childTnLst>
-                        <p:par>
-                          <p:cTn fill="hold">
-                            <p:stCondLst>
-                              <p:cond delay="0"/>
-                            </p:stCondLst>
-                            <p:childTnLst>
-                              <p:par>
-                                <p:cTn fill="hold" nodeType="clickEffect" presetClass="entr" presetID="1" presetSubtype="0">
-                                  <p:stCondLst>
-                                    <p:cond delay="0"/>
-                                  </p:stCondLst>
-                                  <p:childTnLst>
-                                    <p:set>
-                                      <p:cBhvr>
-                                        <p:cTn dur="1" fill="hold">
-                                          <p:stCondLst>
-                                            <p:cond delay="0"/>
-                                          </p:stCondLst>
-                                        </p:cTn>
-                                        <p:tgtEl>
-                                          <p:spTgt spid="294">
-                                            <p:txEl>
-                                              <p:pRg end="6" st="6"/>
-                                            </p:txEl>
-                                          </p:spTgt>
-                                        </p:tgtEl>
-                                        <p:attrNameLst>
-                                          <p:attrName>style.visibility</p:attrName>
-                                        </p:attrNameLst>
-                                      </p:cBhvr>
-                                      <p:to>
-                                        <p:strVal val="visible"/>
-                                      </p:to>
-                                    </p:set>
-                                  </p:childTnLst>
-                                </p:cTn>
-                              </p:par>
-                            </p:childTnLst>
-                          </p:cTn>
-                        </p:par>
-                      </p:childTnLst>
-                    </p:cTn>
-                  </p:par>
-                  <p:par>
-                    <p:cTn fill="hold">
-                      <p:stCondLst>
-                        <p:cond delay="indefinite"/>
-                      </p:stCondLst>
-                      <p:childTnLst>
-                        <p:par>
-                          <p:cTn fill="hold">
-                            <p:stCondLst>
-                              <p:cond delay="0"/>
-                            </p:stCondLst>
-                            <p:childTnLst>
-                              <p:par>
-                                <p:cTn fill="hold" nodeType="clickEffect" presetClass="entr" presetID="1" presetSubtype="0">
-                                  <p:stCondLst>
-                                    <p:cond delay="0"/>
-                                  </p:stCondLst>
-                                  <p:childTnLst>
-                                    <p:set>
-                                      <p:cBhvr>
-                                        <p:cTn dur="1" fill="hold">
-                                          <p:stCondLst>
-                                            <p:cond delay="0"/>
-                                          </p:stCondLst>
-                                        </p:cTn>
-                                        <p:tgtEl>
-                                          <p:spTgt spid="294">
-                                            <p:txEl>
-                                              <p:pRg end="7" st="7"/>
-                                            </p:txEl>
-                                          </p:spTgt>
-                                        </p:tgtEl>
-                                        <p:attrNameLst>
-                                          <p:attrName>style.visibility</p:attrName>
-                                        </p:attrNameLst>
-                                      </p:cBhvr>
-                                      <p:to>
-                                        <p:strVal val="visible"/>
-                                      </p:to>
-                                    </p:set>
-                                  </p:childTnLst>
-                                </p:cTn>
-                              </p:par>
-                            </p:childTnLst>
-                          </p:cTn>
-                        </p:par>
-                      </p:childTnLst>
-                    </p:cTn>
-                  </p:par>
-                  <p:par>
-                    <p:cTn fill="hold">
-                      <p:stCondLst>
-                        <p:cond delay="indefinite"/>
-                      </p:stCondLst>
-                      <p:childTnLst>
-                        <p:par>
-                          <p:cTn fill="hold">
-                            <p:stCondLst>
-                              <p:cond delay="0"/>
-                            </p:stCondLst>
-                            <p:childTnLst>
-                              <p:par>
-                                <p:cTn fill="hold" nodeType="clickEffect" presetClass="entr" presetID="1" presetSubtype="0">
-                                  <p:stCondLst>
-                                    <p:cond delay="0"/>
-                                  </p:stCondLst>
-                                  <p:childTnLst>
-                                    <p:set>
-                                      <p:cBhvr>
-                                        <p:cTn dur="1" fill="hold">
-                                          <p:stCondLst>
-                                            <p:cond delay="0"/>
-                                          </p:stCondLst>
-                                        </p:cTn>
-                                        <p:tgtEl>
-                                          <p:spTgt spid="294">
-                                            <p:txEl>
-                                              <p:pRg end="8" st="8"/>
-                                            </p:txEl>
-                                          </p:spTgt>
-                                        </p:tgtEl>
-                                        <p:attrNameLst>
-                                          <p:attrName>style.visibility</p:attrName>
-                                        </p:attrNameLst>
-                                      </p:cBhvr>
-                                      <p:to>
-                                        <p:strVal val="visible"/>
-                                      </p:to>
-                                    </p:set>
-                                  </p:childTnLst>
-                                </p:cTn>
-                              </p:par>
-                            </p:childTnLst>
-                          </p:cTn>
-                        </p:par>
-                      </p:childTnLst>
-                    </p:cTn>
-                  </p:par>
-                  <p:par>
-                    <p:cTn fill="hold">
-                      <p:stCondLst>
-                        <p:cond delay="indefinite"/>
-                      </p:stCondLst>
-                      <p:childTnLst>
-                        <p:par>
-                          <p:cTn fill="hold">
-                            <p:stCondLst>
-                              <p:cond delay="0"/>
-                            </p:stCondLst>
-                            <p:childTnLst>
-                              <p:par>
-                                <p:cTn fill="hold" nodeType="clickEffect" presetClass="entr" presetID="1" presetSubtype="0">
-                                  <p:stCondLst>
-                                    <p:cond delay="0"/>
-                                  </p:stCondLst>
-                                  <p:childTnLst>
-                                    <p:set>
-                                      <p:cBhvr>
-                                        <p:cTn dur="1" fill="hold">
-                                          <p:stCondLst>
-                                            <p:cond delay="0"/>
-                                          </p:stCondLst>
-                                        </p:cTn>
-                                        <p:tgtEl>
-                                          <p:spTgt spid="294">
-                                            <p:txEl>
-                                              <p:pRg end="9" st="9"/>
-                                            </p:txEl>
-                                          </p:spTgt>
-                                        </p:tgtEl>
-                                        <p:attrNameLst>
-                                          <p:attrName>style.visibility</p:attrName>
-                                        </p:attrNameLst>
-                                      </p:cBhvr>
-                                      <p:to>
-                                        <p:strVal val="visible"/>
-                                      </p:to>
-                                    </p:set>
-                                  </p:childTnLst>
-                                </p:cTn>
-                              </p:par>
-                            </p:childTnLst>
-                          </p:cTn>
-                        </p:par>
-                      </p:childTnLst>
-                    </p:cTn>
-                  </p:par>
-                  <p:par>
-                    <p:cTn fill="hold">
-                      <p:stCondLst>
-                        <p:cond delay="indefinite"/>
-                      </p:stCondLst>
-                      <p:childTnLst>
-                        <p:par>
-                          <p:cTn fill="hold">
-                            <p:stCondLst>
-                              <p:cond delay="0"/>
-                            </p:stCondLst>
-                            <p:childTnLst>
-                              <p:par>
-                                <p:cTn fill="hold" nodeType="clickEffect" presetClass="entr" presetID="1" presetSubtype="0">
-                                  <p:stCondLst>
-                                    <p:cond delay="0"/>
-                                  </p:stCondLst>
-                                  <p:childTnLst>
-                                    <p:set>
-                                      <p:cBhvr>
-                                        <p:cTn dur="1" fill="hold">
-                                          <p:stCondLst>
-                                            <p:cond delay="0"/>
-                                          </p:stCondLst>
-                                        </p:cTn>
-                                        <p:tgtEl>
-                                          <p:spTgt spid="294">
-                                            <p:txEl>
-                                              <p:pRg end="10" st="10"/>
-                                            </p:txEl>
-                                          </p:spTgt>
-                                        </p:tgtEl>
-                                        <p:attrNameLst>
-                                          <p:attrName>style.visibility</p:attrName>
-                                        </p:attrNameLst>
-                                      </p:cBhvr>
-                                      <p:to>
-                                        <p:strVal val="visible"/>
-                                      </p:to>
-                                    </p:set>
-                                  </p:childTnLst>
-                                </p:cTn>
-                              </p:par>
-                            </p:childTnLst>
-                          </p:cTn>
-                        </p:par>
-                      </p:childTnLst>
-                    </p:cTn>
-                  </p:par>
-                  <p:par>
-                    <p:cTn fill="hold">
-                      <p:stCondLst>
-                        <p:cond delay="indefinite"/>
-                      </p:stCondLst>
-                      <p:childTnLst>
-                        <p:par>
-                          <p:cTn fill="hold">
-                            <p:stCondLst>
-                              <p:cond delay="0"/>
-                            </p:stCondLst>
-                            <p:childTnLst>
-                              <p:par>
-                                <p:cTn fill="hold" nodeType="clickEffect" presetClass="entr" presetID="1" presetSubtype="0">
-                                  <p:stCondLst>
-                                    <p:cond delay="0"/>
-                                  </p:stCondLst>
-                                  <p:childTnLst>
-                                    <p:set>
-                                      <p:cBhvr>
-                                        <p:cTn dur="1" fill="hold">
-                                          <p:stCondLst>
-                                            <p:cond delay="0"/>
-                                          </p:stCondLst>
-                                        </p:cTn>
-                                        <p:tgtEl>
-                                          <p:spTgt spid="294">
-                                            <p:txEl>
-                                              <p:pRg end="11" st="11"/>
-                                            </p:txEl>
-                                          </p:spTgt>
-                                        </p:tgtEl>
-                                        <p:attrNameLst>
-                                          <p:attrName>style.visibility</p:attrName>
-                                        </p:attrNameLst>
-                                      </p:cBhvr>
-                                      <p:to>
-                                        <p:strVal val="visible"/>
-                                      </p:to>
-                                    </p:set>
-                                  </p:childTnLst>
-                                </p:cTn>
-                              </p:par>
-                            </p:childTnLst>
-                          </p:cTn>
-                        </p:par>
-                      </p:childTnLst>
-                    </p:cTn>
-                  </p:par>
-                  <p:par>
-                    <p:cTn fill="hold">
-                      <p:stCondLst>
-                        <p:cond delay="indefinite"/>
-                      </p:stCondLst>
-                      <p:childTnLst>
-                        <p:par>
-                          <p:cTn fill="hold">
-                            <p:stCondLst>
-                              <p:cond delay="0"/>
-                            </p:stCondLst>
-                            <p:childTnLst>
-                              <p:par>
-                                <p:cTn fill="hold" nodeType="clickEffect" presetClass="entr" presetID="1" presetSubtype="0">
-                                  <p:stCondLst>
-                                    <p:cond delay="0"/>
-                                  </p:stCondLst>
-                                  <p:childTnLst>
-                                    <p:set>
-                                      <p:cBhvr>
-                                        <p:cTn dur="1" fill="hold">
-                                          <p:stCondLst>
-                                            <p:cond delay="0"/>
-                                          </p:stCondLst>
-                                        </p:cTn>
-                                        <p:tgtEl>
-                                          <p:spTgt spid="294">
-                                            <p:txEl>
-                                              <p:pRg end="12" st="12"/>
-                                            </p:txEl>
-                                          </p:spTgt>
-                                        </p:tgtEl>
-                                        <p:attrNameLst>
-                                          <p:attrName>style.visibility</p:attrName>
-                                        </p:attrNameLst>
-                                      </p:cBhvr>
-                                      <p:to>
-                                        <p:strVal val="visible"/>
-                                      </p:to>
-                                    </p:set>
-                                  </p:childTnLst>
-                                </p:cTn>
-                              </p:par>
-                            </p:childTnLst>
-                          </p:cTn>
-                        </p:par>
-                      </p:childTnLst>
-                    </p:cTn>
-                  </p:par>
-                </p:childTnLst>
-              </p:cTn>
-              <p:prevCondLst>
-                <p:cond evt="onPrev">
-                  <p:tgtEl>
-                    <p:sldTgt/>
-                  </p:tgtEl>
-                </p:cond>
-              </p:prevCondLst>
-              <p:nextCondLst>
-                <p:cond evt="onNext">
-                  <p:tgtEl>
-                    <p:sldTgt/>
-                  </p:tgtEl>
-                </p:cond>
-              </p:nextCondLst>
-            </p:seq>
-          </p:childTnLst>
-        </p:cTn>
-      </p:par>
-    </p:tnLst>
-  </p:timing>
-</p:sld>
-</file>
-
-<file path=ppt/slides/slide29.xml><?xml version="1.0" encoding="utf-8"?>
-<p:sld xmlns:a="http://schemas.openxmlformats.org/drawingml/2006/main" xmlns:p="http://schemas.openxmlformats.org/presentationml/2006/main" xmlns:r="http://schemas.openxmlformats.org/officeDocument/2006/relationships">
-  <p:cSld>
-    <p:spTree>
-      <p:nvGrpSpPr>
-        <p:cNvPr id="1" name=""/>
-        <p:cNvGrpSpPr/>
-        <p:nvPr/>
-      </p:nvGrpSpPr>
-      <p:grpSpPr/>
-      <p:sp>
-        <p:nvSpPr>
-          <p:cNvPr id="2" name="Title 1"/>
-          <p:cNvSpPr>
-            <a:spLocks noGrp="1"/>
-          </p:cNvSpPr>
-          <p:nvPr>
-            <p:ph type="title"/>
-          </p:nvPr>
-        </p:nvSpPr>
-        <p:spPr/>
-        <p:txBody>
-          <a:bodyPr/>
-          <a:lstStyle/>
-          <a:p>
-            <a:pPr indent="0" lvl="0" marL="0" rtl="0" algn="l">
-              <a:spcBef>
-                <a:spcPts val="0"/>
-              </a:spcBef>
-              <a:spcAft>
-                <a:spcPts val="0"/>
-              </a:spcAft>
-              <a:buNone/>
-            </a:pPr>
-            <a:r>
-              <a:rPr lang="en"/>
-              <a:t>Check Yourself</a:t>
-            </a:r>
-            <a:endParaRPr/>
-          </a:p>
-        </p:txBody>
-      </p:sp>
-      <p:sp>
-        <p:nvSpPr>
-          <p:cNvPr id="3" name="Text Placeholder 2"/>
-          <p:cNvSpPr>
-            <a:spLocks noGrp="1"/>
-          </p:cNvSpPr>
-          <p:nvPr>
-            <p:ph type="body" idx="1"/>
-          </p:nvPr>
-        </p:nvSpPr>
-        <p:spPr>
-          <a:xfrm>
-            <a:off x="311700" y="885950"/>
-            <a:ext cx="8520600" cy="1719072"/>
-          </a:xfrm>
-        </p:spPr>
-        <p:txBody>
-          <a:bodyPr/>
-          <a:lstStyle/>
-          <a:p>
-            <a:pPr indent="-330200" lvl="0" marL="457200" rtl="0" algn="l">
-              <a:spcBef>
-                <a:spcPts val="0"/>
-              </a:spcBef>
-              <a:spcAft>
-                <a:spcPts val="0"/>
-              </a:spcAft>
-              <a:buSzPts val="1600"/>
-              <a:buChar char="●"/>
-            </a:pPr>
-            <a:r>
-              <a:rPr lang="en"/>
-              <a:t>What is the difference between an Adapter and a Facade?</a:t>
-            </a:r>
-            <a:endParaRPr/>
-          </a:p>
-          <a:p>
-            <a:pPr indent="-330200" lvl="0" marL="457200" rtl="0" algn="l">
-              <a:spcBef>
-                <a:spcPts val="0"/>
-              </a:spcBef>
-              <a:spcAft>
-                <a:spcPts val="0"/>
-              </a:spcAft>
-              <a:buSzPts val="1600"/>
-              <a:buChar char="●"/>
-            </a:pPr>
-            <a:r>
-              <a:rPr lang="en"/>
-              <a:t>Why convert between metres and pixels at all?</a:t>
-            </a:r>
-            <a:endParaRPr/>
-          </a:p>
-          <a:p>
-            <a:pPr indent="-330200" lvl="0" marL="457200" rtl="0" algn="l">
-              <a:spcBef>
-                <a:spcPts val="0"/>
-              </a:spcBef>
-              <a:spcAft>
-                <a:spcPts val="0"/>
-              </a:spcAft>
-              <a:buSzPts val="1600"/>
-              <a:buChar char="●"/>
-            </a:pPr>
-            <a:r>
-              <a:rPr lang="en"/>
-              <a:t>Why not destroy a body inside the hit handler?</a:t>
-            </a:r>
-            <a:endParaRPr/>
-          </a:p>
-          <a:p>
-            <a:pPr indent="-330200" lvl="0" marL="457200" rtl="0" algn="l">
-              <a:spcBef>
-                <a:spcPts val="0"/>
-              </a:spcBef>
-              <a:spcAft>
-                <a:spcPts val="0"/>
-              </a:spcAft>
-              <a:buSzPts val="1600"/>
-              <a:buChar char="●"/>
-            </a:pPr>
-            <a:r>
-              <a:rPr lang="en"/>
-              <a:t>What does a shallow copy share with the original, and why does it matter?</a:t>
-            </a:r>
-            <a:endParaRPr/>
-          </a:p>
-        </p:txBody>
-      </p:sp>
-      <p:sp>
-        <p:nvSpPr>
-          <p:cNvPr id="4" name="TextBox 3"/>
-          <p:cNvSpPr txBox="1"/>
-          <p:nvPr/>
-        </p:nvSpPr>
-        <p:spPr>
-          <a:xfrm>
-            <a:off x="457200" y="3182112"/>
-            <a:ext cx="8229600" cy="457200"/>
-          </a:xfrm>
-          <a:prstGeom prst="rect">
-            <a:avLst/>
-          </a:prstGeom>
-          <a:noFill/>
-        </p:spPr>
-        <p:txBody>
-          <a:bodyPr wrap="square">
-            <a:spAutoFit/>
-          </a:bodyPr>
-          <a:lstStyle/>
-          <a:p>
-            <a:pPr algn="ctr"/>
-            <a:r>
-              <a:rPr sz="1400" b="0" i="0">
-                <a:solidFill>
-                  <a:srgbClr val="9AA3AB"/>
-                </a:solidFill>
-              </a:rPr>
-              <a:t>The answers, and more questions, are on the course site.</a:t>
-            </a:r>
-          </a:p>
-        </p:txBody>
-      </p:sp>
-    </p:spTree>
-  </p:cSld>
-  <p:clrMapOvr>
-    <a:masterClrMapping/>
-  </p:clrMapOvr>
-</p:sld>
-</file>
-
 <file path=ppt/slides/slide3.xml><?xml version="1.0" encoding="utf-8"?>
 <p:sld xmlns:a="http://schemas.openxmlformats.org/drawingml/2006/main" xmlns:r="http://schemas.openxmlformats.org/officeDocument/2006/relationships" xmlns:mc="http://schemas.openxmlformats.org/markup-compatibility/2006" xmlns:mv="urn:schemas-microsoft-com:mac:vml" xmlns:p="http://schemas.openxmlformats.org/presentationml/2006/main" xmlns:c="http://schemas.openxmlformats.org/drawingml/2006/chart" xmlns:dgm="http://schemas.openxmlformats.org/drawingml/2006/diagram" xmlns:o="urn:schemas-microsoft-com:office:office" xmlns:v="urn:schemas-microsoft-com:vml" xmlns:pvml="urn:schemas-microsoft-com:office:powerpoint" xmlns:com="http://schemas.openxmlformats.org/drawingml/2006/compatibility" xmlns:p14="http://schemas.microsoft.com/office/powerpoint/2010/main" xmlns:p15="http://schemas.microsoft.com/office/powerpoint/2012/main" xmlns:ahyp="http://schemas.microsoft.com/office/drawing/2018/hyperlinkcolor">
   <p:cSld>
@@ -15569,7 +15284,7 @@
                   <a:schemeClr val="accent5"/>
                 </a:solidFill>
               </a:rPr>
-              <a:t>Apply It to Your Project</a:t>
+              <a:t>Exercises (Stretch)</a:t>
             </a:r>
             <a:endParaRPr>
               <a:solidFill>
@@ -15614,7 +15329,7 @@
             </a:pPr>
             <a:r>
               <a:rPr lang="en"/>
-              <a:t>Which libraries does your game use? Would your code notice a swap?</a:t>
+              <a:t>Unit test Units: to metres and back, and y flips</a:t>
             </a:r>
             <a:endParaRPr/>
           </a:p>
@@ -15631,41 +15346,24 @@
             </a:pPr>
             <a:r>
               <a:rPr lang="en"/>
-              <a:t>Does anything exist twice? Which copy owns it?</a:t>
+              <a:t>Swap the library: which files would change?</a:t>
             </a:r>
             <a:endParaRPr/>
           </a:p>
           <a:p>
-            <a:pPr indent="-330200" lvl="0" marL="457200" rtl="0" algn="l">
-              <a:spcBef>
-                <a:spcPts val="0"/>
-              </a:spcBef>
-              <a:spcAft>
-                <a:spcPts val="0"/>
-              </a:spcAft>
-              <a:buSzPts val="1600"/>
-              <a:buChar char="●"/>
+            <a:pPr indent="-317500" lvl="1" marL="914400" rtl="0" algn="l">
+              <a:spcBef>
+                <a:spcPts val="0"/>
+              </a:spcBef>
+              <a:spcAft>
+                <a:spcPts val="0"/>
+              </a:spcAft>
+              <a:buSzPts val="1400"/>
+              <a:buChar char="○"/>
             </a:pPr>
             <a:r>
               <a:rPr lang="en"/>
-              <a:t>Do you remove objects while looping over them?</a:t>
-            </a:r>
-            <a:endParaRPr/>
-          </a:p>
-          <a:p>
-            <a:pPr indent="-330200" lvl="0" marL="457200" rtl="0" algn="l">
-              <a:spcBef>
-                <a:spcPts val="0"/>
-              </a:spcBef>
-              <a:spcAft>
-                <a:spcPts val="0"/>
-              </a:spcAft>
-              <a:buSzPts val="1600"/>
-              <a:buChar char="●"/>
-            </a:pPr>
-            <a:r>
-              <a:rPr lang="en"/>
-              <a:t>Which kinds of things could be prototypes, or data?</a:t>
+              <a:t>Try it with Aether.Physics2D</a:t>
             </a:r>
             <a:endParaRPr/>
           </a:p>
@@ -16347,6 +16045,1011 @@
 </file>
 
 <file path=ppt/slides/slide31.xml><?xml version="1.0" encoding="utf-8"?>
+<p:sld xmlns:a="http://schemas.openxmlformats.org/drawingml/2006/main" xmlns:p="http://schemas.openxmlformats.org/presentationml/2006/main" xmlns:r="http://schemas.openxmlformats.org/officeDocument/2006/relationships">
+  <p:cSld>
+    <p:spTree>
+      <p:nvGrpSpPr>
+        <p:cNvPr id="1" name=""/>
+        <p:cNvGrpSpPr/>
+        <p:nvPr/>
+      </p:nvGrpSpPr>
+      <p:grpSpPr/>
+      <p:sp>
+        <p:nvSpPr>
+          <p:cNvPr id="2" name="Title 1"/>
+          <p:cNvSpPr>
+            <a:spLocks noGrp="1"/>
+          </p:cNvSpPr>
+          <p:nvPr>
+            <p:ph type="title"/>
+          </p:nvPr>
+        </p:nvSpPr>
+        <p:spPr/>
+        <p:txBody>
+          <a:bodyPr/>
+          <a:lstStyle/>
+          <a:p>
+            <a:pPr indent="0" lvl="0" marL="0" rtl="0" algn="l">
+              <a:spcBef>
+                <a:spcPts val="0"/>
+              </a:spcBef>
+              <a:spcAft>
+                <a:spcPts val="0"/>
+              </a:spcAft>
+              <a:buNone/>
+            </a:pPr>
+            <a:r>
+              <a:rPr lang="en"/>
+              <a:t>Check Yourself</a:t>
+            </a:r>
+            <a:endParaRPr/>
+          </a:p>
+        </p:txBody>
+      </p:sp>
+      <p:sp>
+        <p:nvSpPr>
+          <p:cNvPr id="3" name="Text Placeholder 2"/>
+          <p:cNvSpPr>
+            <a:spLocks noGrp="1"/>
+          </p:cNvSpPr>
+          <p:nvPr>
+            <p:ph type="body" idx="1"/>
+          </p:nvPr>
+        </p:nvSpPr>
+        <p:spPr>
+          <a:xfrm>
+            <a:off x="311700" y="885950"/>
+            <a:ext cx="8520600" cy="1719072"/>
+          </a:xfrm>
+        </p:spPr>
+        <p:txBody>
+          <a:bodyPr/>
+          <a:lstStyle/>
+          <a:p>
+            <a:pPr indent="-330200" lvl="0" marL="457200" rtl="0" algn="l">
+              <a:spcBef>
+                <a:spcPts val="0"/>
+              </a:spcBef>
+              <a:spcAft>
+                <a:spcPts val="0"/>
+              </a:spcAft>
+              <a:buSzPts val="1600"/>
+              <a:buChar char="●"/>
+            </a:pPr>
+            <a:r>
+              <a:rPr lang="en"/>
+              <a:t>What is the difference between an Adapter and a Facade?</a:t>
+            </a:r>
+            <a:endParaRPr/>
+          </a:p>
+          <a:p>
+            <a:pPr indent="-330200" lvl="0" marL="457200" rtl="0" algn="l">
+              <a:spcBef>
+                <a:spcPts val="0"/>
+              </a:spcBef>
+              <a:spcAft>
+                <a:spcPts val="0"/>
+              </a:spcAft>
+              <a:buSzPts val="1600"/>
+              <a:buChar char="●"/>
+            </a:pPr>
+            <a:r>
+              <a:rPr lang="en"/>
+              <a:t>Why convert between metres and pixels at all?</a:t>
+            </a:r>
+            <a:endParaRPr/>
+          </a:p>
+          <a:p>
+            <a:pPr indent="-330200" lvl="0" marL="457200" rtl="0" algn="l">
+              <a:spcBef>
+                <a:spcPts val="0"/>
+              </a:spcBef>
+              <a:spcAft>
+                <a:spcPts val="0"/>
+              </a:spcAft>
+              <a:buSzPts val="1600"/>
+              <a:buChar char="●"/>
+            </a:pPr>
+            <a:r>
+              <a:rPr lang="en"/>
+              <a:t>Why not destroy a body inside the hit handler?</a:t>
+            </a:r>
+            <a:endParaRPr/>
+          </a:p>
+          <a:p>
+            <a:pPr indent="-330200" lvl="0" marL="457200" rtl="0" algn="l">
+              <a:spcBef>
+                <a:spcPts val="0"/>
+              </a:spcBef>
+              <a:spcAft>
+                <a:spcPts val="0"/>
+              </a:spcAft>
+              <a:buSzPts val="1600"/>
+              <a:buChar char="●"/>
+            </a:pPr>
+            <a:r>
+              <a:rPr lang="en"/>
+              <a:t>What does a shallow copy share with the original, and why does it matter?</a:t>
+            </a:r>
+            <a:endParaRPr/>
+          </a:p>
+        </p:txBody>
+      </p:sp>
+      <p:sp>
+        <p:nvSpPr>
+          <p:cNvPr id="4" name="TextBox 3"/>
+          <p:cNvSpPr txBox="1"/>
+          <p:nvPr/>
+        </p:nvSpPr>
+        <p:spPr>
+          <a:xfrm>
+            <a:off x="457200" y="3182112"/>
+            <a:ext cx="8229600" cy="457200"/>
+          </a:xfrm>
+          <a:prstGeom prst="rect">
+            <a:avLst/>
+          </a:prstGeom>
+          <a:noFill/>
+        </p:spPr>
+        <p:txBody>
+          <a:bodyPr wrap="square">
+            <a:spAutoFit/>
+          </a:bodyPr>
+          <a:lstStyle/>
+          <a:p>
+            <a:pPr algn="ctr"/>
+            <a:r>
+              <a:rPr sz="1400" b="0" i="0">
+                <a:solidFill>
+                  <a:srgbClr val="9AA3AB"/>
+                </a:solidFill>
+              </a:rPr>
+              <a:t>The answers, and more questions, are on the course site.</a:t>
+            </a:r>
+          </a:p>
+        </p:txBody>
+      </p:sp>
+    </p:spTree>
+  </p:cSld>
+  <p:clrMapOvr>
+    <a:masterClrMapping/>
+  </p:clrMapOvr>
+</p:sld>
+</file>
+
+<file path=ppt/slides/slide32.xml><?xml version="1.0" encoding="utf-8"?>
+<p:sld xmlns:a="http://schemas.openxmlformats.org/drawingml/2006/main" xmlns:r="http://schemas.openxmlformats.org/officeDocument/2006/relationships" xmlns:mc="http://schemas.openxmlformats.org/markup-compatibility/2006" xmlns:mv="urn:schemas-microsoft-com:mac:vml" xmlns:p="http://schemas.openxmlformats.org/presentationml/2006/main" xmlns:c="http://schemas.openxmlformats.org/drawingml/2006/chart" xmlns:dgm="http://schemas.openxmlformats.org/drawingml/2006/diagram" xmlns:o="urn:schemas-microsoft-com:office:office" xmlns:v="urn:schemas-microsoft-com:vml" xmlns:pvml="urn:schemas-microsoft-com:office:powerpoint" xmlns:com="http://schemas.openxmlformats.org/drawingml/2006/compatibility" xmlns:p14="http://schemas.microsoft.com/office/powerpoint/2010/main" xmlns:p15="http://schemas.microsoft.com/office/powerpoint/2012/main" xmlns:ahyp="http://schemas.microsoft.com/office/drawing/2018/hyperlinkcolor">
+  <p:cSld>
+    <p:spTree>
+      <p:nvGrpSpPr>
+        <p:cNvPr id="292" name="Shape 292"/>
+        <p:cNvGrpSpPr/>
+        <p:nvPr/>
+      </p:nvGrpSpPr>
+      <p:grpSpPr>
+        <a:xfrm>
+          <a:off x="0" y="0"/>
+          <a:ext cx="0" cy="0"/>
+          <a:chOff x="0" y="0"/>
+          <a:chExt cx="0" cy="0"/>
+        </a:xfrm>
+      </p:grpSpPr>
+      <p:sp>
+        <p:nvSpPr>
+          <p:cNvPr id="293" name="Google Shape;293;p45"/>
+          <p:cNvSpPr txBox="1"/>
+          <p:nvPr>
+            <p:ph type="title"/>
+          </p:nvPr>
+        </p:nvSpPr>
+        <p:spPr>
+          <a:xfrm>
+            <a:off x="311700" y="195615"/>
+            <a:ext cx="8520600" cy="572700"/>
+          </a:xfrm>
+          <a:prstGeom prst="rect">
+            <a:avLst/>
+          </a:prstGeom>
+        </p:spPr>
+        <p:txBody>
+          <a:bodyPr anchorCtr="0" anchor="t" bIns="91425" lIns="91425" spcFirstLastPara="1" rIns="91425" wrap="square" tIns="91425">
+            <a:normAutofit fontScale="90000"/>
+          </a:bodyPr>
+          <a:lstStyle/>
+          <a:p>
+            <a:pPr indent="0" lvl="0" marL="0" rtl="0" algn="l">
+              <a:spcBef>
+                <a:spcPts val="0"/>
+              </a:spcBef>
+              <a:spcAft>
+                <a:spcPts val="0"/>
+              </a:spcAft>
+              <a:buNone/>
+            </a:pPr>
+            <a:r>
+              <a:rPr lang="en">
+                <a:solidFill>
+                  <a:schemeClr val="accent5"/>
+                </a:solidFill>
+              </a:rPr>
+              <a:t>Apply It to Your Project</a:t>
+            </a:r>
+            <a:endParaRPr>
+              <a:solidFill>
+                <a:schemeClr val="accent5"/>
+              </a:solidFill>
+            </a:endParaRPr>
+          </a:p>
+        </p:txBody>
+      </p:sp>
+      <p:sp>
+        <p:nvSpPr>
+          <p:cNvPr id="294" name="Google Shape;294;p45"/>
+          <p:cNvSpPr txBox="1"/>
+          <p:nvPr>
+            <p:ph idx="1" type="body"/>
+          </p:nvPr>
+        </p:nvSpPr>
+        <p:spPr>
+          <a:xfrm>
+            <a:off x="311700" y="885950"/>
+            <a:ext cx="8520600" cy="4023300"/>
+          </a:xfrm>
+          <a:prstGeom prst="rect">
+            <a:avLst/>
+          </a:prstGeom>
+        </p:spPr>
+        <p:txBody>
+          <a:bodyPr anchorCtr="0" anchor="t" bIns="91425" lIns="91425" spcFirstLastPara="1" rIns="91425" wrap="square" tIns="91425">
+            <a:normAutofit/>
+          </a:bodyPr>
+          <a:lstStyle/>
+          <a:p>
+            <a:pPr indent="-330200" lvl="0" marL="457200" rtl="0" algn="l">
+              <a:spcBef>
+                <a:spcPts val="0"/>
+              </a:spcBef>
+              <a:spcAft>
+                <a:spcPts val="0"/>
+              </a:spcAft>
+              <a:buSzPts val="1600"/>
+              <a:buChar char="●"/>
+            </a:pPr>
+            <a:r>
+              <a:rPr lang="en"/>
+              <a:t>Which libraries does your game use? Would your code notice a swap?</a:t>
+            </a:r>
+            <a:endParaRPr/>
+          </a:p>
+          <a:p>
+            <a:pPr indent="-330200" lvl="0" marL="457200" rtl="0" algn="l">
+              <a:spcBef>
+                <a:spcPts val="0"/>
+              </a:spcBef>
+              <a:spcAft>
+                <a:spcPts val="0"/>
+              </a:spcAft>
+              <a:buSzPts val="1600"/>
+              <a:buChar char="●"/>
+            </a:pPr>
+            <a:r>
+              <a:rPr lang="en"/>
+              <a:t>Does anything exist twice? Which copy owns it?</a:t>
+            </a:r>
+            <a:endParaRPr/>
+          </a:p>
+          <a:p>
+            <a:pPr indent="-330200" lvl="0" marL="457200" rtl="0" algn="l">
+              <a:spcBef>
+                <a:spcPts val="0"/>
+              </a:spcBef>
+              <a:spcAft>
+                <a:spcPts val="0"/>
+              </a:spcAft>
+              <a:buSzPts val="1600"/>
+              <a:buChar char="●"/>
+            </a:pPr>
+            <a:r>
+              <a:rPr lang="en"/>
+              <a:t>Do you remove objects while looping over them?</a:t>
+            </a:r>
+            <a:endParaRPr/>
+          </a:p>
+          <a:p>
+            <a:pPr indent="-330200" lvl="0" marL="457200" rtl="0" algn="l">
+              <a:spcBef>
+                <a:spcPts val="0"/>
+              </a:spcBef>
+              <a:spcAft>
+                <a:spcPts val="0"/>
+              </a:spcAft>
+              <a:buSzPts val="1600"/>
+              <a:buChar char="●"/>
+            </a:pPr>
+            <a:r>
+              <a:rPr lang="en"/>
+              <a:t>Which kinds of things could be prototypes, or data?</a:t>
+            </a:r>
+            <a:endParaRPr/>
+          </a:p>
+        </p:txBody>
+      </p:sp>
+    </p:spTree>
+  </p:cSld>
+  <p:clrMapOvr>
+    <a:masterClrMapping/>
+  </p:clrMapOvr>
+  <p:timing>
+    <p:tnLst>
+      <p:par>
+        <p:cTn dur="indefinite" nodeType="tmRoot" restart="never">
+          <p:childTnLst>
+            <p:seq concurrent="1" nextAc="seek">
+              <p:cTn dur="indefinite" id="2" nodeType="mainSeq">
+                <p:childTnLst>
+                  <p:par>
+                    <p:cTn fill="hold">
+                      <p:stCondLst>
+                        <p:cond delay="indefinite"/>
+                      </p:stCondLst>
+                      <p:childTnLst>
+                        <p:par>
+                          <p:cTn fill="hold">
+                            <p:stCondLst>
+                              <p:cond delay="0"/>
+                            </p:stCondLst>
+                            <p:childTnLst>
+                              <p:par>
+                                <p:cTn fill="hold" nodeType="clickEffect" presetClass="entr" presetID="1" presetSubtype="0">
+                                  <p:stCondLst>
+                                    <p:cond delay="0"/>
+                                  </p:stCondLst>
+                                  <p:childTnLst>
+                                    <p:set>
+                                      <p:cBhvr>
+                                        <p:cTn dur="1" fill="hold">
+                                          <p:stCondLst>
+                                            <p:cond delay="0"/>
+                                          </p:stCondLst>
+                                        </p:cTn>
+                                        <p:tgtEl>
+                                          <p:spTgt spid="294">
+                                            <p:txEl>
+                                              <p:pRg end="0" st="0"/>
+                                            </p:txEl>
+                                          </p:spTgt>
+                                        </p:tgtEl>
+                                        <p:attrNameLst>
+                                          <p:attrName>style.visibility</p:attrName>
+                                        </p:attrNameLst>
+                                      </p:cBhvr>
+                                      <p:to>
+                                        <p:strVal val="visible"/>
+                                      </p:to>
+                                    </p:set>
+                                  </p:childTnLst>
+                                </p:cTn>
+                              </p:par>
+                            </p:childTnLst>
+                          </p:cTn>
+                        </p:par>
+                      </p:childTnLst>
+                    </p:cTn>
+                  </p:par>
+                  <p:par>
+                    <p:cTn fill="hold">
+                      <p:stCondLst>
+                        <p:cond delay="indefinite"/>
+                      </p:stCondLst>
+                      <p:childTnLst>
+                        <p:par>
+                          <p:cTn fill="hold">
+                            <p:stCondLst>
+                              <p:cond delay="0"/>
+                            </p:stCondLst>
+                            <p:childTnLst>
+                              <p:par>
+                                <p:cTn fill="hold" nodeType="clickEffect" presetClass="entr" presetID="1" presetSubtype="0">
+                                  <p:stCondLst>
+                                    <p:cond delay="0"/>
+                                  </p:stCondLst>
+                                  <p:childTnLst>
+                                    <p:set>
+                                      <p:cBhvr>
+                                        <p:cTn dur="1" fill="hold">
+                                          <p:stCondLst>
+                                            <p:cond delay="0"/>
+                                          </p:stCondLst>
+                                        </p:cTn>
+                                        <p:tgtEl>
+                                          <p:spTgt spid="294">
+                                            <p:txEl>
+                                              <p:pRg end="1" st="1"/>
+                                            </p:txEl>
+                                          </p:spTgt>
+                                        </p:tgtEl>
+                                        <p:attrNameLst>
+                                          <p:attrName>style.visibility</p:attrName>
+                                        </p:attrNameLst>
+                                      </p:cBhvr>
+                                      <p:to>
+                                        <p:strVal val="visible"/>
+                                      </p:to>
+                                    </p:set>
+                                  </p:childTnLst>
+                                </p:cTn>
+                              </p:par>
+                            </p:childTnLst>
+                          </p:cTn>
+                        </p:par>
+                      </p:childTnLst>
+                    </p:cTn>
+                  </p:par>
+                  <p:par>
+                    <p:cTn fill="hold">
+                      <p:stCondLst>
+                        <p:cond delay="indefinite"/>
+                      </p:stCondLst>
+                      <p:childTnLst>
+                        <p:par>
+                          <p:cTn fill="hold">
+                            <p:stCondLst>
+                              <p:cond delay="0"/>
+                            </p:stCondLst>
+                            <p:childTnLst>
+                              <p:par>
+                                <p:cTn fill="hold" nodeType="clickEffect" presetClass="entr" presetID="1" presetSubtype="0">
+                                  <p:stCondLst>
+                                    <p:cond delay="0"/>
+                                  </p:stCondLst>
+                                  <p:childTnLst>
+                                    <p:set>
+                                      <p:cBhvr>
+                                        <p:cTn dur="1" fill="hold">
+                                          <p:stCondLst>
+                                            <p:cond delay="0"/>
+                                          </p:stCondLst>
+                                        </p:cTn>
+                                        <p:tgtEl>
+                                          <p:spTgt spid="294">
+                                            <p:txEl>
+                                              <p:pRg end="2" st="2"/>
+                                            </p:txEl>
+                                          </p:spTgt>
+                                        </p:tgtEl>
+                                        <p:attrNameLst>
+                                          <p:attrName>style.visibility</p:attrName>
+                                        </p:attrNameLst>
+                                      </p:cBhvr>
+                                      <p:to>
+                                        <p:strVal val="visible"/>
+                                      </p:to>
+                                    </p:set>
+                                  </p:childTnLst>
+                                </p:cTn>
+                              </p:par>
+                            </p:childTnLst>
+                          </p:cTn>
+                        </p:par>
+                      </p:childTnLst>
+                    </p:cTn>
+                  </p:par>
+                  <p:par>
+                    <p:cTn fill="hold">
+                      <p:stCondLst>
+                        <p:cond delay="indefinite"/>
+                      </p:stCondLst>
+                      <p:childTnLst>
+                        <p:par>
+                          <p:cTn fill="hold">
+                            <p:stCondLst>
+                              <p:cond delay="0"/>
+                            </p:stCondLst>
+                            <p:childTnLst>
+                              <p:par>
+                                <p:cTn fill="hold" nodeType="clickEffect" presetClass="entr" presetID="1" presetSubtype="0">
+                                  <p:stCondLst>
+                                    <p:cond delay="0"/>
+                                  </p:stCondLst>
+                                  <p:childTnLst>
+                                    <p:set>
+                                      <p:cBhvr>
+                                        <p:cTn dur="1" fill="hold">
+                                          <p:stCondLst>
+                                            <p:cond delay="0"/>
+                                          </p:stCondLst>
+                                        </p:cTn>
+                                        <p:tgtEl>
+                                          <p:spTgt spid="294">
+                                            <p:txEl>
+                                              <p:pRg end="3" st="3"/>
+                                            </p:txEl>
+                                          </p:spTgt>
+                                        </p:tgtEl>
+                                        <p:attrNameLst>
+                                          <p:attrName>style.visibility</p:attrName>
+                                        </p:attrNameLst>
+                                      </p:cBhvr>
+                                      <p:to>
+                                        <p:strVal val="visible"/>
+                                      </p:to>
+                                    </p:set>
+                                  </p:childTnLst>
+                                </p:cTn>
+                              </p:par>
+                            </p:childTnLst>
+                          </p:cTn>
+                        </p:par>
+                      </p:childTnLst>
+                    </p:cTn>
+                  </p:par>
+                  <p:par>
+                    <p:cTn fill="hold">
+                      <p:stCondLst>
+                        <p:cond delay="indefinite"/>
+                      </p:stCondLst>
+                      <p:childTnLst>
+                        <p:par>
+                          <p:cTn fill="hold">
+                            <p:stCondLst>
+                              <p:cond delay="0"/>
+                            </p:stCondLst>
+                            <p:childTnLst>
+                              <p:par>
+                                <p:cTn fill="hold" nodeType="clickEffect" presetClass="entr" presetID="1" presetSubtype="0">
+                                  <p:stCondLst>
+                                    <p:cond delay="0"/>
+                                  </p:stCondLst>
+                                  <p:childTnLst>
+                                    <p:set>
+                                      <p:cBhvr>
+                                        <p:cTn dur="1" fill="hold">
+                                          <p:stCondLst>
+                                            <p:cond delay="0"/>
+                                          </p:stCondLst>
+                                        </p:cTn>
+                                        <p:tgtEl>
+                                          <p:spTgt spid="294">
+                                            <p:txEl>
+                                              <p:pRg end="4" st="4"/>
+                                            </p:txEl>
+                                          </p:spTgt>
+                                        </p:tgtEl>
+                                        <p:attrNameLst>
+                                          <p:attrName>style.visibility</p:attrName>
+                                        </p:attrNameLst>
+                                      </p:cBhvr>
+                                      <p:to>
+                                        <p:strVal val="visible"/>
+                                      </p:to>
+                                    </p:set>
+                                  </p:childTnLst>
+                                </p:cTn>
+                              </p:par>
+                            </p:childTnLst>
+                          </p:cTn>
+                        </p:par>
+                      </p:childTnLst>
+                    </p:cTn>
+                  </p:par>
+                  <p:par>
+                    <p:cTn fill="hold">
+                      <p:stCondLst>
+                        <p:cond delay="indefinite"/>
+                      </p:stCondLst>
+                      <p:childTnLst>
+                        <p:par>
+                          <p:cTn fill="hold">
+                            <p:stCondLst>
+                              <p:cond delay="0"/>
+                            </p:stCondLst>
+                            <p:childTnLst>
+                              <p:par>
+                                <p:cTn fill="hold" nodeType="clickEffect" presetClass="entr" presetID="1" presetSubtype="0">
+                                  <p:stCondLst>
+                                    <p:cond delay="0"/>
+                                  </p:stCondLst>
+                                  <p:childTnLst>
+                                    <p:set>
+                                      <p:cBhvr>
+                                        <p:cTn dur="1" fill="hold">
+                                          <p:stCondLst>
+                                            <p:cond delay="0"/>
+                                          </p:stCondLst>
+                                        </p:cTn>
+                                        <p:tgtEl>
+                                          <p:spTgt spid="294">
+                                            <p:txEl>
+                                              <p:pRg end="5" st="5"/>
+                                            </p:txEl>
+                                          </p:spTgt>
+                                        </p:tgtEl>
+                                        <p:attrNameLst>
+                                          <p:attrName>style.visibility</p:attrName>
+                                        </p:attrNameLst>
+                                      </p:cBhvr>
+                                      <p:to>
+                                        <p:strVal val="visible"/>
+                                      </p:to>
+                                    </p:set>
+                                  </p:childTnLst>
+                                </p:cTn>
+                              </p:par>
+                            </p:childTnLst>
+                          </p:cTn>
+                        </p:par>
+                      </p:childTnLst>
+                    </p:cTn>
+                  </p:par>
+                  <p:par>
+                    <p:cTn fill="hold">
+                      <p:stCondLst>
+                        <p:cond delay="indefinite"/>
+                      </p:stCondLst>
+                      <p:childTnLst>
+                        <p:par>
+                          <p:cTn fill="hold">
+                            <p:stCondLst>
+                              <p:cond delay="0"/>
+                            </p:stCondLst>
+                            <p:childTnLst>
+                              <p:par>
+                                <p:cTn fill="hold" nodeType="clickEffect" presetClass="entr" presetID="1" presetSubtype="0">
+                                  <p:stCondLst>
+                                    <p:cond delay="0"/>
+                                  </p:stCondLst>
+                                  <p:childTnLst>
+                                    <p:set>
+                                      <p:cBhvr>
+                                        <p:cTn dur="1" fill="hold">
+                                          <p:stCondLst>
+                                            <p:cond delay="0"/>
+                                          </p:stCondLst>
+                                        </p:cTn>
+                                        <p:tgtEl>
+                                          <p:spTgt spid="294">
+                                            <p:txEl>
+                                              <p:pRg end="6" st="6"/>
+                                            </p:txEl>
+                                          </p:spTgt>
+                                        </p:tgtEl>
+                                        <p:attrNameLst>
+                                          <p:attrName>style.visibility</p:attrName>
+                                        </p:attrNameLst>
+                                      </p:cBhvr>
+                                      <p:to>
+                                        <p:strVal val="visible"/>
+                                      </p:to>
+                                    </p:set>
+                                  </p:childTnLst>
+                                </p:cTn>
+                              </p:par>
+                            </p:childTnLst>
+                          </p:cTn>
+                        </p:par>
+                      </p:childTnLst>
+                    </p:cTn>
+                  </p:par>
+                  <p:par>
+                    <p:cTn fill="hold">
+                      <p:stCondLst>
+                        <p:cond delay="indefinite"/>
+                      </p:stCondLst>
+                      <p:childTnLst>
+                        <p:par>
+                          <p:cTn fill="hold">
+                            <p:stCondLst>
+                              <p:cond delay="0"/>
+                            </p:stCondLst>
+                            <p:childTnLst>
+                              <p:par>
+                                <p:cTn fill="hold" nodeType="clickEffect" presetClass="entr" presetID="1" presetSubtype="0">
+                                  <p:stCondLst>
+                                    <p:cond delay="0"/>
+                                  </p:stCondLst>
+                                  <p:childTnLst>
+                                    <p:set>
+                                      <p:cBhvr>
+                                        <p:cTn dur="1" fill="hold">
+                                          <p:stCondLst>
+                                            <p:cond delay="0"/>
+                                          </p:stCondLst>
+                                        </p:cTn>
+                                        <p:tgtEl>
+                                          <p:spTgt spid="294">
+                                            <p:txEl>
+                                              <p:pRg end="7" st="7"/>
+                                            </p:txEl>
+                                          </p:spTgt>
+                                        </p:tgtEl>
+                                        <p:attrNameLst>
+                                          <p:attrName>style.visibility</p:attrName>
+                                        </p:attrNameLst>
+                                      </p:cBhvr>
+                                      <p:to>
+                                        <p:strVal val="visible"/>
+                                      </p:to>
+                                    </p:set>
+                                  </p:childTnLst>
+                                </p:cTn>
+                              </p:par>
+                            </p:childTnLst>
+                          </p:cTn>
+                        </p:par>
+                      </p:childTnLst>
+                    </p:cTn>
+                  </p:par>
+                  <p:par>
+                    <p:cTn fill="hold">
+                      <p:stCondLst>
+                        <p:cond delay="indefinite"/>
+                      </p:stCondLst>
+                      <p:childTnLst>
+                        <p:par>
+                          <p:cTn fill="hold">
+                            <p:stCondLst>
+                              <p:cond delay="0"/>
+                            </p:stCondLst>
+                            <p:childTnLst>
+                              <p:par>
+                                <p:cTn fill="hold" nodeType="clickEffect" presetClass="entr" presetID="1" presetSubtype="0">
+                                  <p:stCondLst>
+                                    <p:cond delay="0"/>
+                                  </p:stCondLst>
+                                  <p:childTnLst>
+                                    <p:set>
+                                      <p:cBhvr>
+                                        <p:cTn dur="1" fill="hold">
+                                          <p:stCondLst>
+                                            <p:cond delay="0"/>
+                                          </p:stCondLst>
+                                        </p:cTn>
+                                        <p:tgtEl>
+                                          <p:spTgt spid="294">
+                                            <p:txEl>
+                                              <p:pRg end="8" st="8"/>
+                                            </p:txEl>
+                                          </p:spTgt>
+                                        </p:tgtEl>
+                                        <p:attrNameLst>
+                                          <p:attrName>style.visibility</p:attrName>
+                                        </p:attrNameLst>
+                                      </p:cBhvr>
+                                      <p:to>
+                                        <p:strVal val="visible"/>
+                                      </p:to>
+                                    </p:set>
+                                  </p:childTnLst>
+                                </p:cTn>
+                              </p:par>
+                            </p:childTnLst>
+                          </p:cTn>
+                        </p:par>
+                      </p:childTnLst>
+                    </p:cTn>
+                  </p:par>
+                  <p:par>
+                    <p:cTn fill="hold">
+                      <p:stCondLst>
+                        <p:cond delay="indefinite"/>
+                      </p:stCondLst>
+                      <p:childTnLst>
+                        <p:par>
+                          <p:cTn fill="hold">
+                            <p:stCondLst>
+                              <p:cond delay="0"/>
+                            </p:stCondLst>
+                            <p:childTnLst>
+                              <p:par>
+                                <p:cTn fill="hold" nodeType="clickEffect" presetClass="entr" presetID="1" presetSubtype="0">
+                                  <p:stCondLst>
+                                    <p:cond delay="0"/>
+                                  </p:stCondLst>
+                                  <p:childTnLst>
+                                    <p:set>
+                                      <p:cBhvr>
+                                        <p:cTn dur="1" fill="hold">
+                                          <p:stCondLst>
+                                            <p:cond delay="0"/>
+                                          </p:stCondLst>
+                                        </p:cTn>
+                                        <p:tgtEl>
+                                          <p:spTgt spid="294">
+                                            <p:txEl>
+                                              <p:pRg end="9" st="9"/>
+                                            </p:txEl>
+                                          </p:spTgt>
+                                        </p:tgtEl>
+                                        <p:attrNameLst>
+                                          <p:attrName>style.visibility</p:attrName>
+                                        </p:attrNameLst>
+                                      </p:cBhvr>
+                                      <p:to>
+                                        <p:strVal val="visible"/>
+                                      </p:to>
+                                    </p:set>
+                                  </p:childTnLst>
+                                </p:cTn>
+                              </p:par>
+                            </p:childTnLst>
+                          </p:cTn>
+                        </p:par>
+                      </p:childTnLst>
+                    </p:cTn>
+                  </p:par>
+                  <p:par>
+                    <p:cTn fill="hold">
+                      <p:stCondLst>
+                        <p:cond delay="indefinite"/>
+                      </p:stCondLst>
+                      <p:childTnLst>
+                        <p:par>
+                          <p:cTn fill="hold">
+                            <p:stCondLst>
+                              <p:cond delay="0"/>
+                            </p:stCondLst>
+                            <p:childTnLst>
+                              <p:par>
+                                <p:cTn fill="hold" nodeType="clickEffect" presetClass="entr" presetID="1" presetSubtype="0">
+                                  <p:stCondLst>
+                                    <p:cond delay="0"/>
+                                  </p:stCondLst>
+                                  <p:childTnLst>
+                                    <p:set>
+                                      <p:cBhvr>
+                                        <p:cTn dur="1" fill="hold">
+                                          <p:stCondLst>
+                                            <p:cond delay="0"/>
+                                          </p:stCondLst>
+                                        </p:cTn>
+                                        <p:tgtEl>
+                                          <p:spTgt spid="294">
+                                            <p:txEl>
+                                              <p:pRg end="10" st="10"/>
+                                            </p:txEl>
+                                          </p:spTgt>
+                                        </p:tgtEl>
+                                        <p:attrNameLst>
+                                          <p:attrName>style.visibility</p:attrName>
+                                        </p:attrNameLst>
+                                      </p:cBhvr>
+                                      <p:to>
+                                        <p:strVal val="visible"/>
+                                      </p:to>
+                                    </p:set>
+                                  </p:childTnLst>
+                                </p:cTn>
+                              </p:par>
+                            </p:childTnLst>
+                          </p:cTn>
+                        </p:par>
+                      </p:childTnLst>
+                    </p:cTn>
+                  </p:par>
+                  <p:par>
+                    <p:cTn fill="hold">
+                      <p:stCondLst>
+                        <p:cond delay="indefinite"/>
+                      </p:stCondLst>
+                      <p:childTnLst>
+                        <p:par>
+                          <p:cTn fill="hold">
+                            <p:stCondLst>
+                              <p:cond delay="0"/>
+                            </p:stCondLst>
+                            <p:childTnLst>
+                              <p:par>
+                                <p:cTn fill="hold" nodeType="clickEffect" presetClass="entr" presetID="1" presetSubtype="0">
+                                  <p:stCondLst>
+                                    <p:cond delay="0"/>
+                                  </p:stCondLst>
+                                  <p:childTnLst>
+                                    <p:set>
+                                      <p:cBhvr>
+                                        <p:cTn dur="1" fill="hold">
+                                          <p:stCondLst>
+                                            <p:cond delay="0"/>
+                                          </p:stCondLst>
+                                        </p:cTn>
+                                        <p:tgtEl>
+                                          <p:spTgt spid="294">
+                                            <p:txEl>
+                                              <p:pRg end="11" st="11"/>
+                                            </p:txEl>
+                                          </p:spTgt>
+                                        </p:tgtEl>
+                                        <p:attrNameLst>
+                                          <p:attrName>style.visibility</p:attrName>
+                                        </p:attrNameLst>
+                                      </p:cBhvr>
+                                      <p:to>
+                                        <p:strVal val="visible"/>
+                                      </p:to>
+                                    </p:set>
+                                  </p:childTnLst>
+                                </p:cTn>
+                              </p:par>
+                            </p:childTnLst>
+                          </p:cTn>
+                        </p:par>
+                      </p:childTnLst>
+                    </p:cTn>
+                  </p:par>
+                  <p:par>
+                    <p:cTn fill="hold">
+                      <p:stCondLst>
+                        <p:cond delay="indefinite"/>
+                      </p:stCondLst>
+                      <p:childTnLst>
+                        <p:par>
+                          <p:cTn fill="hold">
+                            <p:stCondLst>
+                              <p:cond delay="0"/>
+                            </p:stCondLst>
+                            <p:childTnLst>
+                              <p:par>
+                                <p:cTn fill="hold" nodeType="clickEffect" presetClass="entr" presetID="1" presetSubtype="0">
+                                  <p:stCondLst>
+                                    <p:cond delay="0"/>
+                                  </p:stCondLst>
+                                  <p:childTnLst>
+                                    <p:set>
+                                      <p:cBhvr>
+                                        <p:cTn dur="1" fill="hold">
+                                          <p:stCondLst>
+                                            <p:cond delay="0"/>
+                                          </p:stCondLst>
+                                        </p:cTn>
+                                        <p:tgtEl>
+                                          <p:spTgt spid="294">
+                                            <p:txEl>
+                                              <p:pRg end="12" st="12"/>
+                                            </p:txEl>
+                                          </p:spTgt>
+                                        </p:tgtEl>
+                                        <p:attrNameLst>
+                                          <p:attrName>style.visibility</p:attrName>
+                                        </p:attrNameLst>
+                                      </p:cBhvr>
+                                      <p:to>
+                                        <p:strVal val="visible"/>
+                                      </p:to>
+                                    </p:set>
+                                  </p:childTnLst>
+                                </p:cTn>
+                              </p:par>
+                            </p:childTnLst>
+                          </p:cTn>
+                        </p:par>
+                      </p:childTnLst>
+                    </p:cTn>
+                  </p:par>
+                </p:childTnLst>
+              </p:cTn>
+              <p:prevCondLst>
+                <p:cond evt="onPrev">
+                  <p:tgtEl>
+                    <p:sldTgt/>
+                  </p:tgtEl>
+                </p:cond>
+              </p:prevCondLst>
+              <p:nextCondLst>
+                <p:cond evt="onNext">
+                  <p:tgtEl>
+                    <p:sldTgt/>
+                  </p:tgtEl>
+                </p:cond>
+              </p:nextCondLst>
+            </p:seq>
+          </p:childTnLst>
+        </p:cTn>
+      </p:par>
+    </p:tnLst>
+  </p:timing>
+</p:sld>
+</file>
+
+<file path=ppt/slides/slide33.xml><?xml version="1.0" encoding="utf-8"?>
 <p:sld xmlns:a="http://schemas.openxmlformats.org/drawingml/2006/main" xmlns:r="http://schemas.openxmlformats.org/officeDocument/2006/relationships" xmlns:mc="http://schemas.openxmlformats.org/markup-compatibility/2006" xmlns:mv="urn:schemas-microsoft-com:mac:vml" xmlns:p="http://schemas.openxmlformats.org/presentationml/2006/main" xmlns:c="http://schemas.openxmlformats.org/drawingml/2006/chart" xmlns:dgm="http://schemas.openxmlformats.org/drawingml/2006/diagram" xmlns:o="urn:schemas-microsoft-com:office:office" xmlns:v="urn:schemas-microsoft-com:vml" xmlns:pvml="urn:schemas-microsoft-com:office:powerpoint" xmlns:com="http://schemas.openxmlformats.org/drawingml/2006/compatibility" xmlns:p14="http://schemas.microsoft.com/office/powerpoint/2010/main" xmlns:p15="http://schemas.microsoft.com/office/powerpoint/2012/main" xmlns:ahyp="http://schemas.microsoft.com/office/drawing/2018/hyperlinkcolor">
   <p:cSld>
     <p:spTree>
@@ -17616,6 +18319,291 @@
       <p:grpSpPr/>
       <p:sp>
         <p:nvSpPr>
+          <p:cNvPr id="2" name="Title 1"/>
+          <p:cNvSpPr>
+            <a:spLocks noGrp="1"/>
+          </p:cNvSpPr>
+          <p:nvPr>
+            <p:ph type="title"/>
+          </p:nvPr>
+        </p:nvSpPr>
+        <p:spPr/>
+        <p:txBody>
+          <a:bodyPr/>
+          <a:lstStyle/>
+          <a:p>
+            <a:pPr indent="0" lvl="0" marL="0" rtl="0" algn="l">
+              <a:spcBef>
+                <a:spcPts val="0"/>
+              </a:spcBef>
+              <a:spcAft>
+                <a:spcPts val="0"/>
+              </a:spcAft>
+              <a:buNone/>
+            </a:pPr>
+            <a:r>
+              <a:rPr lang="en"/>
+              <a:t>Physics Samples</a:t>
+            </a:r>
+            <a:endParaRPr/>
+          </a:p>
+        </p:txBody>
+      </p:sp>
+      <p:sp>
+        <p:nvSpPr>
+          <p:cNvPr id="3" name="Text Placeholder 2"/>
+          <p:cNvSpPr>
+            <a:spLocks noGrp="1"/>
+          </p:cNvSpPr>
+          <p:nvPr>
+            <p:ph type="body" idx="1"/>
+          </p:nvPr>
+        </p:nvSpPr>
+        <p:spPr>
+          <a:xfrm>
+            <a:off x="311700" y="885950"/>
+            <a:ext cx="8520600" cy="1289304"/>
+          </a:xfrm>
+        </p:spPr>
+        <p:txBody>
+          <a:bodyPr/>
+          <a:lstStyle/>
+          <a:p>
+            <a:pPr indent="-330200" lvl="0" marL="457200" rtl="0" algn="l">
+              <a:spcBef>
+                <a:spcPts val="0"/>
+              </a:spcBef>
+              <a:spcAft>
+                <a:spcPts val="0"/>
+              </a:spcAft>
+              <a:buSzPts val="1600"/>
+              <a:buChar char="●"/>
+            </a:pPr>
+            <a:r>
+              <a:rPr lang="en"/>
+              <a:t>Next to the steps: PhysicsSamples, one idea per scene</a:t>
+            </a:r>
+            <a:endParaRPr/>
+          </a:p>
+          <a:p>
+            <a:pPr indent="-330200" lvl="0" marL="457200" rtl="0" algn="l">
+              <a:spcBef>
+                <a:spcPts val="0"/>
+              </a:spcBef>
+              <a:spcAft>
+                <a:spcPts val="0"/>
+              </a:spcAft>
+              <a:buSzPts val="1600"/>
+              <a:buChar char="●"/>
+            </a:pPr>
+            <a:r>
+              <a:rPr lang="en"/>
+              <a:t>Body types, bounce, friction, density, sleeping</a:t>
+            </a:r>
+            <a:endParaRPr/>
+          </a:p>
+          <a:p>
+            <a:pPr indent="-330200" lvl="0" marL="457200" rtl="0" algn="l">
+              <a:spcBef>
+                <a:spcPts val="0"/>
+              </a:spcBef>
+              <a:spcAft>
+                <a:spcPts val="0"/>
+              </a:spcAft>
+              <a:buSzPts val="1600"/>
+              <a:buChar char="●"/>
+            </a:pPr>
+            <a:r>
+              <a:rPr lang="en"/>
+              <a:t>Keys 1 to 5; click: a box, Space: a ball, R: again</a:t>
+            </a:r>
+            <a:endParaRPr/>
+          </a:p>
+        </p:txBody>
+      </p:sp>
+      <p:pic>
+        <p:nvPicPr>
+          <p:cNvPr id="4" name="Picture 3" descr="f000.png"/>
+          <p:cNvPicPr>
+            <a:picLocks noChangeAspect="1"/>
+          </p:cNvPicPr>
+          <p:nvPr/>
+        </p:nvPicPr>
+        <p:blipFill>
+          <a:blip r:embed="rId3"/>
+          <a:stretch>
+            <a:fillRect/>
+          </a:stretch>
+        </p:blipFill>
+        <p:spPr>
+          <a:xfrm>
+            <a:off x="2194560" y="1920240"/>
+            <a:ext cx="4714240" cy="2651760"/>
+          </a:xfrm>
+          <a:prstGeom prst="rect">
+            <a:avLst/>
+          </a:prstGeom>
+        </p:spPr>
+      </p:pic>
+    </p:spTree>
+  </p:cSld>
+  <p:clrMapOvr>
+    <a:masterClrMapping/>
+  </p:clrMapOvr>
+</p:sld>
+</file>
+
+<file path=ppt/slides/slide8.xml><?xml version="1.0" encoding="utf-8"?>
+<p:sld xmlns:a="http://schemas.openxmlformats.org/drawingml/2006/main" xmlns:p="http://schemas.openxmlformats.org/presentationml/2006/main" xmlns:r="http://schemas.openxmlformats.org/officeDocument/2006/relationships">
+  <p:cSld>
+    <p:spTree>
+      <p:nvGrpSpPr>
+        <p:cNvPr id="1" name=""/>
+        <p:cNvGrpSpPr/>
+        <p:nvPr/>
+      </p:nvGrpSpPr>
+      <p:grpSpPr/>
+      <p:sp>
+        <p:nvSpPr>
+          <p:cNvPr id="2" name="Title 1"/>
+          <p:cNvSpPr>
+            <a:spLocks noGrp="1"/>
+          </p:cNvSpPr>
+          <p:nvPr>
+            <p:ph type="title"/>
+          </p:nvPr>
+        </p:nvSpPr>
+        <p:spPr/>
+        <p:txBody>
+          <a:bodyPr/>
+          <a:lstStyle/>
+          <a:p>
+            <a:pPr indent="0" lvl="0" marL="0" rtl="0" algn="l">
+              <a:spcBef>
+                <a:spcPts val="0"/>
+              </a:spcBef>
+              <a:spcAft>
+                <a:spcPts val="0"/>
+              </a:spcAft>
+              <a:buNone/>
+            </a:pPr>
+            <a:r>
+              <a:rPr lang="en"/>
+              <a:t>Try It: Physics Samples</a:t>
+            </a:r>
+            <a:endParaRPr/>
+          </a:p>
+        </p:txBody>
+      </p:sp>
+      <p:sp>
+        <p:nvSpPr>
+          <p:cNvPr id="3" name="Text Placeholder 2"/>
+          <p:cNvSpPr>
+            <a:spLocks noGrp="1"/>
+          </p:cNvSpPr>
+          <p:nvPr>
+            <p:ph type="body" idx="1"/>
+          </p:nvPr>
+        </p:nvSpPr>
+        <p:spPr>
+          <a:xfrm>
+            <a:off x="311700" y="885950"/>
+            <a:ext cx="8520600" cy="1673352"/>
+          </a:xfrm>
+        </p:spPr>
+        <p:txBody>
+          <a:bodyPr/>
+          <a:lstStyle/>
+          <a:p>
+            <a:pPr indent="-330200" lvl="0" marL="457200" rtl="0" algn="l">
+              <a:spcBef>
+                <a:spcPts val="0"/>
+              </a:spcBef>
+              <a:spcAft>
+                <a:spcPts val="0"/>
+              </a:spcAft>
+              <a:buSzPts val="1600"/>
+              <a:buChar char="●"/>
+            </a:pPr>
+            <a:r>
+              <a:rPr lang="en"/>
+              <a:t>In PhysicsSamples:</a:t>
+            </a:r>
+            <a:endParaRPr/>
+          </a:p>
+          <a:p>
+            <a:pPr indent="-330200" lvl="0" marL="457200" rtl="0" algn="l">
+              <a:spcBef>
+                <a:spcPts val="0"/>
+              </a:spcBef>
+              <a:spcAft>
+                <a:spcPts val="0"/>
+              </a:spcAft>
+              <a:buSzPts val="1600"/>
+              <a:buChar char="●"/>
+            </a:pPr>
+            <a:r>
+              <a:rPr lang="en"/>
+              <a:t>Make the platform move up and down instead of sideways</a:t>
+            </a:r>
+            <a:endParaRPr/>
+          </a:p>
+          <a:p>
+            <a:pPr indent="-330200" lvl="0" marL="457200" rtl="0" algn="l">
+              <a:spcBef>
+                <a:spcPts val="0"/>
+              </a:spcBef>
+              <a:spcAft>
+                <a:spcPts val="0"/>
+              </a:spcAft>
+              <a:buSzPts val="1600"/>
+              <a:buChar char="●"/>
+            </a:pPr>
+            <a:r>
+              <a:rPr lang="en"/>
+              <a:t>Find the lowest friction at which the box stays on the slope</a:t>
+            </a:r>
+            <a:endParaRPr/>
+          </a:p>
+          <a:p>
+            <a:pPr indent="-330200" lvl="0" marL="457200" rtl="0" algn="l">
+              <a:spcBef>
+                <a:spcPts val="0"/>
+              </a:spcBef>
+              <a:spcAft>
+                <a:spcPts val="0"/>
+              </a:spcAft>
+              <a:buSzPts val="1600"/>
+              <a:buChar char="●"/>
+            </a:pPr>
+            <a:r>
+              <a:rPr lang="en"/>
+              <a:t>Is it what you expected for 26 degrees?</a:t>
+            </a:r>
+            <a:endParaRPr/>
+          </a:p>
+        </p:txBody>
+      </p:sp>
+    </p:spTree>
+  </p:cSld>
+  <p:clrMapOvr>
+    <a:masterClrMapping/>
+  </p:clrMapOvr>
+</p:sld>
+</file>
+
+<file path=ppt/slides/slide9.xml><?xml version="1.0" encoding="utf-8"?>
+<p:sld xmlns:a="http://schemas.openxmlformats.org/drawingml/2006/main" xmlns:p="http://schemas.openxmlformats.org/presentationml/2006/main" xmlns:r="http://schemas.openxmlformats.org/officeDocument/2006/relationships">
+  <p:cSld>
+    <p:spTree>
+      <p:nvGrpSpPr>
+        <p:cNvPr id="1" name=""/>
+        <p:cNvGrpSpPr/>
+        <p:nvPr/>
+      </p:nvGrpSpPr>
+      <p:grpSpPr/>
+      <p:sp>
+        <p:nvSpPr>
           <p:cNvPr id="140" name="Google Shape;140;p23"/>
           <p:cNvSpPr txBox="1"/>
           <p:nvPr>
@@ -18489,566 +19477,6 @@
               <a:cs typeface="Consolas"/>
               <a:sym typeface="Consolas"/>
             </a:endParaRPr>
-          </a:p>
-        </p:txBody>
-      </p:sp>
-    </p:spTree>
-  </p:cSld>
-  <p:clrMapOvr>
-    <a:masterClrMapping/>
-  </p:clrMapOvr>
-</p:sld>
-</file>
-
-<file path=ppt/slides/slide8.xml><?xml version="1.0" encoding="utf-8"?>
-<p:sld xmlns:a="http://schemas.openxmlformats.org/drawingml/2006/main" xmlns:p="http://schemas.openxmlformats.org/presentationml/2006/main" xmlns:r="http://schemas.openxmlformats.org/officeDocument/2006/relationships">
-  <p:cSld>
-    <p:spTree>
-      <p:nvGrpSpPr>
-        <p:cNvPr id="1" name=""/>
-        <p:cNvGrpSpPr/>
-        <p:nvPr/>
-      </p:nvGrpSpPr>
-      <p:grpSpPr/>
-      <p:sp>
-        <p:nvSpPr>
-          <p:cNvPr id="293" name="Google Shape;293;p45"/>
-          <p:cNvSpPr txBox="1"/>
-          <p:nvPr>
-            <p:ph type="title"/>
-          </p:nvPr>
-        </p:nvSpPr>
-        <p:spPr>
-          <a:xfrm>
-            <a:off x="311700" y="195615"/>
-            <a:ext cx="8520600" cy="572700"/>
-          </a:xfrm>
-          <a:prstGeom prst="rect">
-            <a:avLst/>
-          </a:prstGeom>
-        </p:spPr>
-        <p:txBody>
-          <a:bodyPr anchorCtr="0" anchor="t" bIns="91425" lIns="91425" spcFirstLastPara="1" rIns="91425" wrap="square" tIns="91425">
-            <a:normAutofit fontScale="90000"/>
-          </a:bodyPr>
-          <a:lstStyle/>
-          <a:p>
-            <a:pPr indent="0" lvl="0" marL="0" rtl="0" algn="l">
-              <a:spcBef>
-                <a:spcPts val="0"/>
-              </a:spcBef>
-              <a:spcAft>
-                <a:spcPts val="0"/>
-              </a:spcAft>
-              <a:buNone/>
-            </a:pPr>
-            <a:r>
-              <a:rPr lang="en">
-                <a:solidFill>
-                  <a:schemeClr val="accent5"/>
-                </a:solidFill>
-              </a:rPr>
-              <a:t>Why Metres?</a:t>
-            </a:r>
-            <a:endParaRPr>
-              <a:solidFill>
-                <a:schemeClr val="accent5"/>
-              </a:solidFill>
-            </a:endParaRPr>
-          </a:p>
-        </p:txBody>
-      </p:sp>
-      <p:sp>
-        <p:nvSpPr>
-          <p:cNvPr id="294" name="Google Shape;294;p45"/>
-          <p:cNvSpPr txBox="1"/>
-          <p:nvPr>
-            <p:ph idx="1" type="body"/>
-          </p:nvPr>
-        </p:nvSpPr>
-        <p:spPr>
-          <a:xfrm>
-            <a:off x="311700" y="885950"/>
-            <a:ext cx="8520600" cy="521208"/>
-          </a:xfrm>
-          <a:prstGeom prst="rect">
-            <a:avLst/>
-          </a:prstGeom>
-        </p:spPr>
-        <p:txBody>
-          <a:bodyPr anchorCtr="0" anchor="t" bIns="91425" lIns="91425" spcFirstLastPara="1" rIns="91425" wrap="square" tIns="91425">
-            <a:normAutofit/>
-          </a:bodyPr>
-          <a:lstStyle/>
-          <a:p>
-            <a:pPr indent="-330200" lvl="0" marL="457200" rtl="0" algn="l">
-              <a:spcBef>
-                <a:spcPts val="0"/>
-              </a:spcBef>
-              <a:spcAft>
-                <a:spcPts val="0"/>
-              </a:spcAft>
-              <a:buSzPts val="1600"/>
-              <a:buChar char="●"/>
-            </a:pPr>
-            <a:r>
-              <a:rPr lang="en"/>
-              <a:t>A 50-pixel block, taken as metres, is a 50-metre building: it falls in slow motion.</a:t>
-            </a:r>
-            <a:endParaRPr/>
-          </a:p>
-        </p:txBody>
-      </p:sp>
-      <p:sp>
-        <p:nvSpPr>
-          <p:cNvPr id="295" name="Rounded Rectangle 294"/>
-          <p:cNvSpPr/>
-          <p:nvPr/>
-        </p:nvSpPr>
-        <p:spPr>
-          <a:xfrm>
-            <a:off x="548640" y="1463040"/>
-            <a:ext cx="2743200" cy="914400"/>
-          </a:xfrm>
-          <a:prstGeom prst="roundRect">
-            <a:avLst>
-              <a:gd name="adj" fmla="val 12000"/>
-            </a:avLst>
-          </a:prstGeom>
-          <a:solidFill>
-            <a:srgbClr val="2E3338"/>
-          </a:solidFill>
-          <a:ln>
-            <a:noFill/>
-          </a:ln>
-          <a:effectLst/>
-        </p:spPr>
-        <p:style>
-          <a:lnRef idx="1">
-            <a:schemeClr val="accent1"/>
-          </a:lnRef>
-          <a:fillRef idx="3">
-            <a:schemeClr val="accent1"/>
-          </a:fillRef>
-          <a:effectRef idx="2">
-            <a:schemeClr val="accent1"/>
-          </a:effectRef>
-          <a:fontRef idx="minor">
-            <a:schemeClr val="lt1"/>
-          </a:fontRef>
-        </p:style>
-        <p:txBody>
-          <a:bodyPr rtlCol="0" anchor="ctr" wrap="square" lIns="73152" rIns="73152"/>
-          <a:lstStyle/>
-          <a:p>
-            <a:pPr algn="ctr"/>
-            <a:r>
-              <a:rPr sz="1600" b="1">
-                <a:solidFill>
-                  <a:srgbClr val="DEE2E6"/>
-                </a:solidFill>
-              </a:rPr>
-              <a:t>Our game</a:t>
-            </a:r>
-          </a:p>
-          <a:p>
-            <a:pPr algn="ctr"/>
-            <a:r>
-              <a:rPr sz="1400" b="0">
-                <a:solidFill>
-                  <a:srgbClr val="9AA3AB"/>
-                </a:solidFill>
-              </a:rPr>
-              <a:t>pixels, y down,</a:t>
-            </a:r>
-          </a:p>
-          <a:p>
-            <a:pPr algn="ctr"/>
-            <a:r>
-              <a:rPr sz="1400" b="0">
-                <a:solidFill>
-                  <a:srgbClr val="9AA3AB"/>
-                </a:solidFill>
-              </a:rPr>
-              <a:t>clockwise</a:t>
-            </a:r>
-          </a:p>
-        </p:txBody>
-      </p:sp>
-      <p:sp>
-        <p:nvSpPr>
-          <p:cNvPr id="296" name="Rounded Rectangle 295"/>
-          <p:cNvSpPr/>
-          <p:nvPr/>
-        </p:nvSpPr>
-        <p:spPr>
-          <a:xfrm>
-            <a:off x="5852160" y="1463040"/>
-            <a:ext cx="2743200" cy="914400"/>
-          </a:xfrm>
-          <a:prstGeom prst="roundRect">
-            <a:avLst>
-              <a:gd name="adj" fmla="val 12000"/>
-            </a:avLst>
-          </a:prstGeom>
-          <a:solidFill>
-            <a:srgbClr val="2E3338"/>
-          </a:solidFill>
-          <a:ln>
-            <a:noFill/>
-          </a:ln>
-          <a:effectLst/>
-        </p:spPr>
-        <p:style>
-          <a:lnRef idx="1">
-            <a:schemeClr val="accent1"/>
-          </a:lnRef>
-          <a:fillRef idx="3">
-            <a:schemeClr val="accent1"/>
-          </a:fillRef>
-          <a:effectRef idx="2">
-            <a:schemeClr val="accent1"/>
-          </a:effectRef>
-          <a:fontRef idx="minor">
-            <a:schemeClr val="lt1"/>
-          </a:fontRef>
-        </p:style>
-        <p:txBody>
-          <a:bodyPr rtlCol="0" anchor="ctr" wrap="square" lIns="73152" rIns="73152"/>
-          <a:lstStyle/>
-          <a:p>
-            <a:pPr algn="ctr"/>
-            <a:r>
-              <a:rPr sz="1600" b="1">
-                <a:solidFill>
-                  <a:srgbClr val="DEE2E6"/>
-                </a:solidFill>
-              </a:rPr>
-              <a:t>Box2D</a:t>
-            </a:r>
-          </a:p>
-          <a:p>
-            <a:pPr algn="ctr"/>
-            <a:r>
-              <a:rPr sz="1400" b="0">
-                <a:solidFill>
-                  <a:srgbClr val="9AA3AB"/>
-                </a:solidFill>
-              </a:rPr>
-              <a:t>metres, y up,</a:t>
-            </a:r>
-          </a:p>
-          <a:p>
-            <a:pPr algn="ctr"/>
-            <a:r>
-              <a:rPr sz="1400" b="0">
-                <a:solidFill>
-                  <a:srgbClr val="9AA3AB"/>
-                </a:solidFill>
-              </a:rPr>
-              <a:t>counter-clockwise</a:t>
-            </a:r>
-          </a:p>
-        </p:txBody>
-      </p:sp>
-      <p:cxnSp>
-        <p:nvCxnSpPr>
-          <p:cNvPr id="297" name="Connector 296"/>
-          <p:cNvCxnSpPr/>
-          <p:nvPr/>
-        </p:nvCxnSpPr>
-        <p:spPr>
-          <a:xfrm>
-            <a:off x="3337560" y="1783080"/>
-            <a:ext cx="2468880" cy="0"/>
-          </a:xfrm>
-          <a:prstGeom prst="line">
-            <a:avLst/>
-          </a:prstGeom>
-          <a:ln w="25400">
-            <a:solidFill>
-              <a:srgbClr val="D45D35"/>
-            </a:solidFill>
-            <a:tailEnd type="triangle"/>
-          </a:ln>
-        </p:spPr>
-        <p:style>
-          <a:lnRef idx="2">
-            <a:schemeClr val="accent1"/>
-          </a:lnRef>
-          <a:fillRef idx="0">
-            <a:schemeClr val="accent1"/>
-          </a:fillRef>
-          <a:effectRef idx="1">
-            <a:schemeClr val="accent1"/>
-          </a:effectRef>
-          <a:fontRef idx="minor">
-            <a:schemeClr val="tx1"/>
-          </a:fontRef>
-        </p:style>
-      </p:cxnSp>
-      <p:sp>
-        <p:nvSpPr>
-          <p:cNvPr id="298" name="TextBox 297"/>
-          <p:cNvSpPr txBox="1"/>
-          <p:nvPr/>
-        </p:nvSpPr>
-        <p:spPr>
-          <a:xfrm>
-            <a:off x="3154679" y="1490472"/>
-            <a:ext cx="2834639" cy="274320"/>
-          </a:xfrm>
-          <a:prstGeom prst="rect">
-            <a:avLst/>
-          </a:prstGeom>
-          <a:noFill/>
-        </p:spPr>
-        <p:txBody>
-          <a:bodyPr wrap="square">
-            <a:spAutoFit/>
-          </a:bodyPr>
-          <a:lstStyle/>
-          <a:p>
-            <a:pPr algn="ctr"/>
-            <a:r>
-              <a:rPr sz="1100" b="0" i="0">
-                <a:solidFill>
-                  <a:srgbClr val="9AA3AB"/>
-                </a:solidFill>
-              </a:rPr>
-              <a:t>÷ 50, flip y</a:t>
-            </a:r>
-          </a:p>
-        </p:txBody>
-      </p:sp>
-      <p:cxnSp>
-        <p:nvCxnSpPr>
-          <p:cNvPr id="299" name="Connector 298"/>
-          <p:cNvCxnSpPr/>
-          <p:nvPr/>
-        </p:nvCxnSpPr>
-        <p:spPr>
-          <a:xfrm flipH="1">
-            <a:off x="3337560" y="2103120"/>
-            <a:ext cx="2468880" cy="0"/>
-          </a:xfrm>
-          <a:prstGeom prst="line">
-            <a:avLst/>
-          </a:prstGeom>
-          <a:ln w="25400">
-            <a:solidFill>
-              <a:srgbClr val="D45D35"/>
-            </a:solidFill>
-            <a:tailEnd type="triangle"/>
-          </a:ln>
-        </p:spPr>
-        <p:style>
-          <a:lnRef idx="2">
-            <a:schemeClr val="accent1"/>
-          </a:lnRef>
-          <a:fillRef idx="0">
-            <a:schemeClr val="accent1"/>
-          </a:fillRef>
-          <a:effectRef idx="1">
-            <a:schemeClr val="accent1"/>
-          </a:effectRef>
-          <a:fontRef idx="minor">
-            <a:schemeClr val="tx1"/>
-          </a:fontRef>
-        </p:style>
-      </p:cxnSp>
-      <p:sp>
-        <p:nvSpPr>
-          <p:cNvPr id="300" name="TextBox 299"/>
-          <p:cNvSpPr txBox="1"/>
-          <p:nvPr/>
-        </p:nvSpPr>
-        <p:spPr>
-          <a:xfrm>
-            <a:off x="3337560" y="2148840"/>
-            <a:ext cx="2468880" cy="274320"/>
-          </a:xfrm>
-          <a:prstGeom prst="rect">
-            <a:avLst/>
-          </a:prstGeom>
-          <a:noFill/>
-        </p:spPr>
-        <p:txBody>
-          <a:bodyPr wrap="square">
-            <a:spAutoFit/>
-          </a:bodyPr>
-          <a:lstStyle/>
-          <a:p>
-            <a:pPr algn="ctr"/>
-            <a:r>
-              <a:rPr sz="1100" b="0" i="0">
-                <a:solidFill>
-                  <a:srgbClr val="9AA3AB"/>
-                </a:solidFill>
-              </a:rPr>
-              <a:t>× 50, flip y</a:t>
-            </a:r>
-          </a:p>
-        </p:txBody>
-      </p:sp>
-      <p:sp>
-        <p:nvSpPr>
-          <p:cNvPr id="301" name="TextBox 300"/>
-          <p:cNvSpPr txBox="1"/>
-          <p:nvPr/>
-        </p:nvSpPr>
-        <p:spPr>
-          <a:xfrm>
-            <a:off x="457200" y="2834640"/>
-            <a:ext cx="8229600" cy="731520"/>
-          </a:xfrm>
-          <a:prstGeom prst="rect">
-            <a:avLst/>
-          </a:prstGeom>
-          <a:noFill/>
-        </p:spPr>
-        <p:txBody>
-          <a:bodyPr wrap="square">
-            <a:spAutoFit/>
-          </a:bodyPr>
-          <a:lstStyle/>
-          <a:p>
-            <a:pPr algn="ctr"/>
-            <a:r>
-              <a:rPr sz="1700" b="1" i="0">
-                <a:solidFill>
-                  <a:srgbClr val="DEE2E6"/>
-                </a:solidFill>
-              </a:rPr>
-              <a:t>Forget one conversion. What do you see?</a:t>
-            </a:r>
-          </a:p>
-        </p:txBody>
-      </p:sp>
-    </p:spTree>
-  </p:cSld>
-  <p:clrMapOvr>
-    <a:masterClrMapping/>
-  </p:clrMapOvr>
-</p:sld>
-</file>
-
-<file path=ppt/slides/slide9.xml><?xml version="1.0" encoding="utf-8"?>
-<p:sld xmlns:a="http://schemas.openxmlformats.org/drawingml/2006/main" xmlns:p="http://schemas.openxmlformats.org/presentationml/2006/main" xmlns:r="http://schemas.openxmlformats.org/officeDocument/2006/relationships">
-  <p:cSld>
-    <p:spTree>
-      <p:nvGrpSpPr>
-        <p:cNvPr id="1" name=""/>
-        <p:cNvGrpSpPr/>
-        <p:nvPr/>
-      </p:nvGrpSpPr>
-      <p:grpSpPr/>
-      <p:sp>
-        <p:nvSpPr>
-          <p:cNvPr id="128" name="Google Shape;128;p21"/>
-          <p:cNvSpPr txBox="1"/>
-          <p:nvPr>
-            <p:ph type="title"/>
-          </p:nvPr>
-        </p:nvSpPr>
-        <p:spPr>
-          <a:xfrm>
-            <a:off x="311700" y="195615"/>
-            <a:ext cx="8520600" cy="572700"/>
-          </a:xfrm>
-          <a:prstGeom prst="rect">
-            <a:avLst/>
-          </a:prstGeom>
-        </p:spPr>
-        <p:txBody>
-          <a:bodyPr anchorCtr="0" anchor="t" bIns="91425" lIns="91425" spcFirstLastPara="1" rIns="91425" wrap="square" tIns="91425">
-            <a:normAutofit fontScale="90000"/>
-          </a:bodyPr>
-          <a:lstStyle/>
-          <a:p>
-            <a:pPr indent="0" lvl="0" marL="0" rtl="0" algn="l">
-              <a:spcBef>
-                <a:spcPts val="0"/>
-              </a:spcBef>
-              <a:spcAft>
-                <a:spcPts val="0"/>
-              </a:spcAft>
-              <a:buNone/>
-            </a:pPr>
-            <a:r>
-              <a:rPr lang="en">
-                <a:solidFill>
-                  <a:schemeClr val="accent5"/>
-                </a:solidFill>
-              </a:rPr>
-              <a:t>Box2D Implementation</a:t>
-            </a:r>
-            <a:endParaRPr>
-              <a:solidFill>
-                <a:schemeClr val="accent5"/>
-              </a:solidFill>
-            </a:endParaRPr>
-          </a:p>
-        </p:txBody>
-      </p:sp>
-      <p:sp>
-        <p:nvSpPr>
-          <p:cNvPr id="129" name="Google Shape;129;p21"/>
-          <p:cNvSpPr txBox="1"/>
-          <p:nvPr>
-            <p:ph idx="1" type="body"/>
-          </p:nvPr>
-        </p:nvSpPr>
-        <p:spPr>
-          <a:xfrm>
-            <a:off x="311700" y="885950"/>
-            <a:ext cx="8520600" cy="4023300"/>
-          </a:xfrm>
-          <a:prstGeom prst="rect">
-            <a:avLst/>
-          </a:prstGeom>
-        </p:spPr>
-        <p:txBody>
-          <a:bodyPr anchorCtr="0" anchor="ctr" bIns="91425" lIns="91425" spcFirstLastPara="1" rIns="91425" wrap="square" tIns="91425">
-            <a:normAutofit/>
-          </a:bodyPr>
-          <a:lstStyle/>
-          <a:p>
-            <a:pPr indent="0" lvl="0" marL="0" rtl="0" algn="ctr">
-              <a:spcBef>
-                <a:spcPts val="0"/>
-              </a:spcBef>
-              <a:spcAft>
-                <a:spcPts val="1200"/>
-              </a:spcAft>
-              <a:buNone/>
-            </a:pPr>
-            <a:r>
-              <a:rPr lang="en" sz="2900">
-                <a:latin typeface="VT323"/>
-                <a:ea typeface="VT323"/>
-                <a:cs typeface="VT323"/>
-                <a:sym typeface="VT323"/>
-              </a:rPr>
-              <a:t>DEMO!</a:t>
-            </a:r>
-            <a:endParaRPr/>
-          </a:p>
-          <a:p>
-            <a:pPr indent="0" lvl="0" marL="0" rtl="0" algn="ctr">
-              <a:spcBef>
-                <a:spcPts val="0"/>
-              </a:spcBef>
-              <a:spcAft>
-                <a:spcPts val="0"/>
-              </a:spcAft>
-              <a:buNone/>
-            </a:pPr>
-            <a:r>
-              <a:rPr lang="en" sz="1800"/>
-              <a:t>Birds0: Box2D, used directly in Game1</a:t>
-            </a:r>
-            <a:endParaRPr sz="1800"/>
           </a:p>
         </p:txBody>
       </p:sp>

--- a/slides/07 Angry Birds.pptx
+++ b/slides/07 Angry Birds.pptx
@@ -2516,12 +2516,12 @@
           </a:p>
           <a:p>
             <a:r>
-              <a:t>5: sleeping, the pile turns blue; drop a box in to wake it.</a:t>
-            </a:r>
-          </a:p>
-          <a:p>
-            <a:r>
-              <a:t>Mention: the samples use the game’s facade, which got BodyType so they could make a kinematic platform.</a:t>
+              <a:t>5: sleeping, the pile turns blue; drop a box in to wake it. 6: joints: a hinged pendulum and chain, a rope that goes slack, a welded hammer.</a:t>
+            </a:r>
+          </a:p>
+          <a:p>
+            <a:r>
+              <a:t>Mention: the samples use the game’s facade, which got BodyType and joint methods so they could make a kinematic platform and joints.</a:t>
             </a:r>
           </a:p>
         </p:txBody>
@@ -2585,6 +2585,11 @@
           <a:p>
             <a:r>
               <a:t>The friction: about 0.23, not tan 26° (about 0.48). Box2D combines two frictions as the square root of their product, and the slope’s friction is 1: the square root of 0.23 is 0.48. A good reason to read what a library does.</a:t>
+            </a:r>
+          </a:p>
+          <a:p>
+            <a:r>
+              <a:t>The chain: Rope(lastLink, ball, ...) instead of Rope(hook, ball, ...), keeping the last link in a variable.</a:t>
             </a:r>
           </a:p>
         </p:txBody>
@@ -18398,7 +18403,7 @@
             </a:pPr>
             <a:r>
               <a:rPr lang="en"/>
-              <a:t>Body types, bounce, friction, density, sleeping</a:t>
+              <a:t>Body types, bounce, friction, density, sleeping, joints</a:t>
             </a:r>
             <a:endParaRPr/>
           </a:p>
@@ -18415,7 +18420,7 @@
             </a:pPr>
             <a:r>
               <a:rPr lang="en"/>
-              <a:t>Keys 1 to 5; click: a box, Space: a ball, R: again</a:t>
+              <a:t>Keys 1 to 6; click: a box, Space: a ball, R: again</a:t>
             </a:r>
             <a:endParaRPr/>
           </a:p>
@@ -18578,7 +18583,7 @@
             </a:pPr>
             <a:r>
               <a:rPr lang="en"/>
-              <a:t>Is it what you expected for 26 degrees?</a:t>
+              <a:t>Is it what you expected for 26 degrees? Then: hang the ball from the chain</a:t>
             </a:r>
             <a:endParaRPr/>
           </a:p>
